--- a/slides/seminar.pptx
+++ b/slides/seminar.pptx
@@ -31,10 +31,9 @@
     <p:sldId id="279" r:id="rId25"/>
     <p:sldId id="280" r:id="rId26"/>
     <p:sldId id="281" r:id="rId27"/>
-    <p:sldId id="282" r:id="rId28"/>
   </p:sldIdLst>
   <p:notesMasterIdLst>
-    <p:notesMasterId r:id="rId29"/>
+    <p:notesMasterId r:id="rId28"/>
   </p:notesMasterIdLst>
   <p:sldSz cx="12188952" cy="6858000"/>
   <p:notesSz cx="6858000" cy="12188952"/>
@@ -2136,94 +2135,6 @@
             <a:fld id="{F7021451-1387-4CA6-816F-3879F97B5CBC}" type="slidenum">
               <a:rPr lang="en-US"/>
               <a:t>26</a:t>
-            </a:fld>
-            <a:endParaRPr lang="en-US"/>
-          </a:p>
-        </p:txBody>
-      </p:sp>
-    </p:spTree>
-    <p:extLst>
-      <p:ext uri="{BB962C8B-B14F-4D97-AF65-F5344CB8AC3E}">
-        <p14:creationId xmlns:p14="http://schemas.microsoft.com/office/powerpoint/2010/main" val="1024086991"/>
-      </p:ext>
-    </p:extLst>
-  </p:cSld>
-  <p:clrMapOvr>
-    <a:masterClrMapping/>
-  </p:clrMapOvr>
-</p:notes>
-</file>
-
-<file path=ppt/notesSlides/notesSlide27.xml><?xml version="1.0" encoding="utf-8"?>
-<p:notes xmlns:a="http://schemas.openxmlformats.org/drawingml/2006/main" xmlns:r="http://schemas.openxmlformats.org/officeDocument/2006/relationships" xmlns:p="http://schemas.openxmlformats.org/presentationml/2006/main">
-  <p:cSld>
-    <p:spTree>
-      <p:nvGrpSpPr>
-        <p:cNvPr id="1" name=""/>
-        <p:cNvGrpSpPr/>
-        <p:nvPr/>
-      </p:nvGrpSpPr>
-      <p:grpSpPr>
-        <a:xfrm>
-          <a:off x="0" y="0"/>
-          <a:ext cx="0" cy="0"/>
-          <a:chOff x="0" y="0"/>
-          <a:chExt cx="0" cy="0"/>
-        </a:xfrm>
-      </p:grpSpPr>
-      <p:sp>
-        <p:nvSpPr>
-          <p:cNvPr id="2" name="Slide Image Placeholder 1"/>
-          <p:cNvSpPr>
-            <a:spLocks noGrp="1" noRot="1" noChangeAspect="1"/>
-          </p:cNvSpPr>
-          <p:nvPr>
-            <p:ph type="sldImg"/>
-          </p:nvPr>
-        </p:nvSpPr>
-        <p:spPr/>
-      </p:sp>
-      <p:sp>
-        <p:nvSpPr>
-          <p:cNvPr id="3" name="Notes Placeholder 2"/>
-          <p:cNvSpPr>
-            <a:spLocks noGrp="1"/>
-          </p:cNvSpPr>
-          <p:nvPr>
-            <p:ph type="body" idx="1"/>
-          </p:nvPr>
-        </p:nvSpPr>
-        <p:spPr/>
-        <p:txBody>
-          <a:bodyPr/>
-          <a:lstStyle/>
-          <a:p>
-            <a:r>
-              <a:rPr lang="en-US" dirty="0"/>
-              <a:t/>
-            </a:r>
-            <a:endParaRPr lang="en-US" dirty="0"/>
-          </a:p>
-        </p:txBody>
-      </p:sp>
-      <p:sp>
-        <p:nvSpPr>
-          <p:cNvPr id="4" name="Slide Number Placeholder 3"/>
-          <p:cNvSpPr>
-            <a:spLocks noGrp="1"/>
-          </p:cNvSpPr>
-          <p:nvPr>
-            <p:ph type="sldNum" sz="quarter" idx="10"/>
-          </p:nvPr>
-        </p:nvSpPr>
-        <p:spPr/>
-        <p:txBody>
-          <a:bodyPr/>
-          <a:lstStyle/>
-          <a:p>
-            <a:fld id="{F7021451-1387-4CA6-816F-3879F97B5CBC}" type="slidenum">
-              <a:rPr lang="en-US"/>
-              <a:t>27</a:t>
             </a:fld>
             <a:endParaRPr lang="en-US"/>
           </a:p>
@@ -4664,7 +4575,7 @@
                 <a:ea typeface="Menlo" pitchFamily="34" charset="-122"/>
                 <a:cs typeface="Menlo" pitchFamily="34" charset="-120"/>
               </a:rPr>
-              <a:t>10 / 27</a:t>
+              <a:t>10 / 26</a:t>
             </a:r>
             <a:endParaRPr lang="en-US" sz="900" dirty="0"/>
           </a:p>
@@ -5481,7 +5392,7 @@
                 <a:ea typeface="Menlo" pitchFamily="34" charset="-122"/>
                 <a:cs typeface="Menlo" pitchFamily="34" charset="-120"/>
               </a:rPr>
-              <a:t>11 / 27</a:t>
+              <a:t>11 / 26</a:t>
             </a:r>
             <a:endParaRPr lang="en-US" sz="900" dirty="0"/>
           </a:p>
@@ -6431,7 +6342,7 @@
                 <a:ea typeface="Menlo" pitchFamily="34" charset="-122"/>
                 <a:cs typeface="Menlo" pitchFamily="34" charset="-120"/>
               </a:rPr>
-              <a:t>12 / 27</a:t>
+              <a:t>12 / 26</a:t>
             </a:r>
             <a:endParaRPr lang="en-US" sz="900" dirty="0"/>
           </a:p>
@@ -7555,7 +7466,7 @@
                 <a:ea typeface="Menlo" pitchFamily="34" charset="-122"/>
                 <a:cs typeface="Menlo" pitchFamily="34" charset="-120"/>
               </a:rPr>
-              <a:t>13 / 27</a:t>
+              <a:t>13 / 26</a:t>
             </a:r>
             <a:endParaRPr lang="en-US" sz="900" dirty="0"/>
           </a:p>
@@ -7743,7 +7654,7 @@
                 <a:ea typeface="Hiragino Sans" pitchFamily="34" charset="-122"/>
                 <a:cs typeface="Hiragino Sans" pitchFamily="34" charset="-120"/>
               </a:rPr>
-              <a:t>作業用のフォルダを1つ作り、その中で OpenCode を起動します。</a:t>
+              <a:t>作業用のフォルダを作り、その中で OpenCode を起動します。</a:t>
             </a:r>
             <a:endParaRPr lang="en-US" sz="1600" dirty="0"/>
           </a:p>
@@ -7757,12 +7668,12 @@
         </p:nvSpPr>
         <p:spPr>
           <a:xfrm>
-            <a:off x="640080" y="2423160"/>
-            <a:ext cx="5486400" cy="2331720"/>
+            <a:off x="640080" y="2514600"/>
+            <a:ext cx="5852160" cy="2560320"/>
           </a:xfrm>
           <a:prstGeom prst="roundRect">
             <a:avLst>
-              <a:gd name="adj" fmla="val 2353"/>
+              <a:gd name="adj" fmla="val 2143"/>
             </a:avLst>
           </a:prstGeom>
           <a:solidFill>
@@ -7791,8 +7702,8 @@
         </p:nvSpPr>
         <p:spPr>
           <a:xfrm>
-            <a:off x="649224" y="2432304"/>
-            <a:ext cx="5468112" cy="347472"/>
+            <a:off x="649224" y="2523744"/>
+            <a:ext cx="5833872" cy="347472"/>
           </a:xfrm>
           <a:prstGeom prst="rect">
             <a:avLst/>
@@ -7811,7 +7722,7 @@
         </p:nvSpPr>
         <p:spPr>
           <a:xfrm>
-            <a:off x="804672" y="2546604"/>
+            <a:off x="804672" y="2638044"/>
             <a:ext cx="109728" cy="109728"/>
           </a:xfrm>
           <a:prstGeom prst="ellipse">
@@ -7831,7 +7742,7 @@
         </p:nvSpPr>
         <p:spPr>
           <a:xfrm>
-            <a:off x="1005840" y="2546604"/>
+            <a:off x="1005840" y="2638044"/>
             <a:ext cx="109728" cy="109728"/>
           </a:xfrm>
           <a:prstGeom prst="ellipse">
@@ -7851,7 +7762,7 @@
         </p:nvSpPr>
         <p:spPr>
           <a:xfrm>
-            <a:off x="1207008" y="2546604"/>
+            <a:off x="1207008" y="2638044"/>
             <a:ext cx="109728" cy="109728"/>
           </a:xfrm>
           <a:prstGeom prst="ellipse">
@@ -7871,8 +7782,8 @@
         </p:nvSpPr>
         <p:spPr>
           <a:xfrm>
-            <a:off x="1463040" y="2432304"/>
-            <a:ext cx="4389120" cy="347472"/>
+            <a:off x="1463040" y="2523744"/>
+            <a:ext cx="4754880" cy="347472"/>
           </a:xfrm>
           <a:prstGeom prst="rect">
             <a:avLst/>
@@ -7910,8 +7821,8 @@
         </p:nvSpPr>
         <p:spPr>
           <a:xfrm>
-            <a:off x="896112" y="2880360"/>
-            <a:ext cx="5029200" cy="1764792"/>
+            <a:off x="896112" y="2971800"/>
+            <a:ext cx="5394960" cy="1993392"/>
           </a:xfrm>
           <a:prstGeom prst="rect">
             <a:avLst/>
@@ -7930,7 +7841,7 @@
               <a:buNone/>
             </a:pPr>
             <a:r>
-              <a:rPr lang="en-US" sz="1350" dirty="0">
+              <a:rPr lang="en-US" sz="1450" dirty="0">
                 <a:solidFill>
                   <a:srgbClr val="8B949E"/>
                 </a:solidFill>
@@ -7940,7 +7851,7 @@
               </a:rPr>
               <a:t># 作業フォルダを作って入る</a:t>
             </a:r>
-            <a:endParaRPr lang="en-US" sz="1350" dirty="0"/>
+            <a:endParaRPr lang="en-US" sz="1450" dirty="0"/>
           </a:p>
           <a:p>
             <a:pPr algn="l" indent="0" marL="0">
@@ -7950,7 +7861,7 @@
               <a:buNone/>
             </a:pPr>
             <a:r>
-              <a:rPr lang="en-US" sz="1350" dirty="0">
+              <a:rPr lang="en-US" sz="1450" dirty="0">
                 <a:solidFill>
                   <a:srgbClr val="3FB950"/>
                 </a:solidFill>
@@ -7960,7 +7871,7 @@
               </a:rPr>
               <a:t>$ mkdir todo-app</a:t>
             </a:r>
-            <a:endParaRPr lang="en-US" sz="1350" dirty="0"/>
+            <a:endParaRPr lang="en-US" sz="1450" dirty="0"/>
           </a:p>
           <a:p>
             <a:pPr algn="l" indent="0" marL="0">
@@ -7970,7 +7881,7 @@
               <a:buNone/>
             </a:pPr>
             <a:r>
-              <a:rPr lang="en-US" sz="1350" dirty="0">
+              <a:rPr lang="en-US" sz="1450" dirty="0">
                 <a:solidFill>
                   <a:srgbClr val="3FB950"/>
                 </a:solidFill>
@@ -7980,7 +7891,7 @@
               </a:rPr>
               <a:t>$ cd todo-app</a:t>
             </a:r>
-            <a:endParaRPr lang="en-US" sz="1350" dirty="0"/>
+            <a:endParaRPr lang="en-US" sz="1450" dirty="0"/>
           </a:p>
           <a:p>
             <a:pPr algn="l" indent="0" marL="0">
@@ -7990,7 +7901,7 @@
               <a:buNone/>
             </a:pPr>
             <a:r>
-              <a:rPr lang="en-US" sz="1350" dirty="0">
+              <a:rPr lang="en-US" sz="1450" dirty="0">
                 <a:solidFill>
                   <a:srgbClr val="C9D1D9"/>
                 </a:solidFill>
@@ -8000,7 +7911,7 @@
               </a:rPr>
               <a:t> </a:t>
             </a:r>
-            <a:endParaRPr lang="en-US" sz="1350" dirty="0"/>
+            <a:endParaRPr lang="en-US" sz="1450" dirty="0"/>
           </a:p>
           <a:p>
             <a:pPr algn="l" indent="0" marL="0">
@@ -8010,7 +7921,7 @@
               <a:buNone/>
             </a:pPr>
             <a:r>
-              <a:rPr lang="en-US" sz="1350" dirty="0">
+              <a:rPr lang="en-US" sz="1450" dirty="0">
                 <a:solidFill>
                   <a:srgbClr val="8B949E"/>
                 </a:solidFill>
@@ -8020,7 +7931,7 @@
               </a:rPr>
               <a:t># OpenCode を起動</a:t>
             </a:r>
-            <a:endParaRPr lang="en-US" sz="1350" dirty="0"/>
+            <a:endParaRPr lang="en-US" sz="1450" dirty="0"/>
           </a:p>
           <a:p>
             <a:pPr algn="l" indent="0" marL="0">
@@ -8030,7 +7941,7 @@
               <a:buNone/>
             </a:pPr>
             <a:r>
-              <a:rPr lang="en-US" sz="1350" dirty="0">
+              <a:rPr lang="en-US" sz="1450" dirty="0">
                 <a:solidFill>
                   <a:srgbClr val="3FB950"/>
                 </a:solidFill>
@@ -8040,7 +7951,7 @@
               </a:rPr>
               <a:t>$ opencode</a:t>
             </a:r>
-            <a:endParaRPr lang="en-US" sz="1350" dirty="0"/>
+            <a:endParaRPr lang="en-US" sz="1450" dirty="0"/>
           </a:p>
         </p:txBody>
       </p:sp>
@@ -8052,12 +7963,12 @@
         </p:nvSpPr>
         <p:spPr>
           <a:xfrm>
-            <a:off x="6309360" y="2423160"/>
-            <a:ext cx="5212080" cy="2331720"/>
+            <a:off x="6675120" y="2514600"/>
+            <a:ext cx="4846320" cy="2560320"/>
           </a:xfrm>
           <a:prstGeom prst="roundRect">
             <a:avLst>
-              <a:gd name="adj" fmla="val 3137"/>
+              <a:gd name="adj" fmla="val 2857"/>
             </a:avLst>
           </a:prstGeom>
           <a:solidFill>
@@ -8086,8 +7997,8 @@
         </p:nvSpPr>
         <p:spPr>
           <a:xfrm>
-            <a:off x="6309360" y="2423160"/>
-            <a:ext cx="82296" cy="2331720"/>
+            <a:off x="6675120" y="2514600"/>
+            <a:ext cx="82296" cy="2560320"/>
           </a:xfrm>
           <a:prstGeom prst="rect">
             <a:avLst/>
@@ -8106,8 +8017,8 @@
         </p:nvSpPr>
         <p:spPr>
           <a:xfrm>
-            <a:off x="6675120" y="2697480"/>
-            <a:ext cx="4572000" cy="457200"/>
+            <a:off x="7040880" y="2788920"/>
+            <a:ext cx="4206240" cy="457200"/>
           </a:xfrm>
           <a:prstGeom prst="rect">
             <a:avLst/>
@@ -8131,7 +8042,7 @@
                 <a:ea typeface="Hiragino Sans" pitchFamily="34" charset="-122"/>
                 <a:cs typeface="Hiragino Sans" pitchFamily="34" charset="-120"/>
               </a:rPr>
-              <a:t>git は使いません</a:t>
+              <a:t>フォルダ名は自由</a:t>
             </a:r>
             <a:endParaRPr lang="en-US" sz="1600" dirty="0"/>
           </a:p>
@@ -8145,8 +8056,8 @@
         </p:nvSpPr>
         <p:spPr>
           <a:xfrm>
-            <a:off x="6675120" y="3200400"/>
-            <a:ext cx="4572000" cy="1463040"/>
+            <a:off x="7040880" y="3291840"/>
+            <a:ext cx="4206240" cy="1554480"/>
           </a:xfrm>
           <a:prstGeom prst="rect">
             <a:avLst/>
@@ -8158,15 +8069,14 @@
           <a:bodyPr wrap="square" lIns="0" tIns="0" rIns="0" bIns="0" rtlCol="0" anchor="t"/>
           <a:lstStyle/>
           <a:p>
-            <a:pPr algn="l" marL="228600" indent="-228600">
-              <a:spcAft>
-                <a:spcPts val="1000"/>
-              </a:spcAft>
-              <a:buSzPct val="100000"/>
-              <a:buChar char="•"/>
-            </a:pPr>
-            <a:r>
-              <a:rPr lang="en-US" sz="1400" dirty="0">
+            <a:pPr algn="l" indent="0" marL="0">
+              <a:lnSpc>
+                <a:spcPct val="140000"/>
+              </a:lnSpc>
+              <a:buNone/>
+            </a:pPr>
+            <a:r>
+              <a:rPr lang="en-US" sz="1450" dirty="0">
                 <a:solidFill>
                   <a:srgbClr val="C9D1D9"/>
                 </a:solidFill>
@@ -8174,156 +8084,7 @@
                 <a:ea typeface="Hiragino Sans" pitchFamily="34" charset="-122"/>
                 <a:cs typeface="Hiragino Sans" pitchFamily="34" charset="-120"/>
               </a:rPr>
-              <a:t>フォルダを1つ作るだけ</a:t>
-            </a:r>
-            <a:endParaRPr lang="en-US" sz="1400" dirty="0"/>
-          </a:p>
-          <a:p>
-            <a:pPr algn="l" marL="228600" indent="-228600">
-              <a:spcAft>
-                <a:spcPts val="1000"/>
-              </a:spcAft>
-              <a:buSzPct val="100000"/>
-              <a:buChar char="•"/>
-            </a:pPr>
-            <a:r>
-              <a:rPr lang="en-US" sz="1400" dirty="0">
-                <a:solidFill>
-                  <a:srgbClr val="C9D1D9"/>
-                </a:solidFill>
-                <a:latin typeface="Hiragino Sans" pitchFamily="34" charset="0"/>
-                <a:ea typeface="Hiragino Sans" pitchFamily="34" charset="-122"/>
-                <a:cs typeface="Hiragino Sans" pitchFamily="34" charset="-120"/>
-              </a:rPr>
-              <a:t>好きな名前でOK（例: todo-app）</a:t>
-            </a:r>
-            <a:endParaRPr lang="en-US" sz="1400" dirty="0"/>
-          </a:p>
-          <a:p>
-            <a:pPr algn="l" marL="228600" indent="-228600">
-              <a:spcAft>
-                <a:spcPts val="1000"/>
-              </a:spcAft>
-              <a:buSzPct val="100000"/>
-              <a:buChar char="•"/>
-            </a:pPr>
-            <a:r>
-              <a:rPr lang="en-US" sz="1400" dirty="0">
-                <a:solidFill>
-                  <a:srgbClr val="C9D1D9"/>
-                </a:solidFill>
-                <a:latin typeface="Hiragino Sans" pitchFamily="34" charset="0"/>
-                <a:ea typeface="Hiragino Sans" pitchFamily="34" charset="-122"/>
-                <a:cs typeface="Hiragino Sans" pitchFamily="34" charset="-120"/>
-              </a:rPr>
-              <a:t>作ったファイルはこの中にできる</a:t>
-            </a:r>
-            <a:endParaRPr lang="en-US" sz="1400" dirty="0"/>
-          </a:p>
-        </p:txBody>
-      </p:sp>
-      <p:sp>
-        <p:nvSpPr>
-          <p:cNvPr id="17" name="Shape 15"/>
-          <p:cNvSpPr/>
-          <p:nvPr/>
-        </p:nvSpPr>
-        <p:spPr>
-          <a:xfrm>
-            <a:off x="640080" y="4983480"/>
-            <a:ext cx="10908792" cy="914400"/>
-          </a:xfrm>
-          <a:prstGeom prst="roundRect">
-            <a:avLst>
-              <a:gd name="adj" fmla="val 8000"/>
-            </a:avLst>
-          </a:prstGeom>
-          <a:solidFill>
-            <a:srgbClr val="1C2128"/>
-          </a:solidFill>
-          <a:ln w="12700">
-            <a:solidFill>
-              <a:srgbClr val="30363D"/>
-            </a:solidFill>
-            <a:prstDash val="solid"/>
-          </a:ln>
-          <a:effectLst>
-            <a:outerShdw sx="100000" sy="100000" kx="0" ky="0" algn="bl" rotWithShape="0" blurRad="127000" dist="38100" dir="5400000">
-              <a:srgbClr val="000000">
-                <a:alpha val="35000"/>
-              </a:srgbClr>
-            </a:outerShdw>
-          </a:effectLst>
-        </p:spPr>
-      </p:sp>
-      <p:sp>
-        <p:nvSpPr>
-          <p:cNvPr id="18" name="Shape 16"/>
-          <p:cNvSpPr/>
-          <p:nvPr/>
-        </p:nvSpPr>
-        <p:spPr>
-          <a:xfrm>
-            <a:off x="640080" y="4983480"/>
-            <a:ext cx="82296" cy="914400"/>
-          </a:xfrm>
-          <a:prstGeom prst="rect">
-            <a:avLst/>
-          </a:prstGeom>
-          <a:solidFill>
-            <a:srgbClr val="F0883E"/>
-          </a:solidFill>
-          <a:ln/>
-        </p:spPr>
-      </p:sp>
-      <p:sp>
-        <p:nvSpPr>
-          <p:cNvPr id="19" name="Text 17"/>
-          <p:cNvSpPr/>
-          <p:nvPr/>
-        </p:nvSpPr>
-        <p:spPr>
-          <a:xfrm>
-            <a:off x="1005840" y="4983480"/>
-            <a:ext cx="10268712" cy="914400"/>
-          </a:xfrm>
-          <a:prstGeom prst="rect">
-            <a:avLst/>
-          </a:prstGeom>
-          <a:noFill/>
-          <a:ln/>
-        </p:spPr>
-        <p:txBody>
-          <a:bodyPr wrap="square" lIns="0" tIns="0" rIns="0" bIns="0" rtlCol="0" anchor="ctr"/>
-          <a:lstStyle/>
-          <a:p>
-            <a:pPr algn="l" indent="0" marL="0">
-              <a:buNone/>
-            </a:pPr>
-            <a:r>
-              <a:rPr lang="en-US" sz="1450" b="1" dirty="0">
-                <a:solidFill>
-                  <a:srgbClr val="F0883E"/>
-                </a:solidFill>
-                <a:latin typeface="Hiragino Sans" pitchFamily="34" charset="0"/>
-                <a:ea typeface="Hiragino Sans" pitchFamily="34" charset="-122"/>
-                <a:cs typeface="Hiragino Sans" pitchFamily="34" charset="-120"/>
-              </a:rPr>
-              <a:t>command not found の時：</a:t>
-            </a:r>
-            <a:pPr algn="l" indent="0" marL="0">
-              <a:buNone/>
-            </a:pPr>
-            <a:r>
-              <a:rPr lang="en-US" sz="1450" dirty="0">
-                <a:solidFill>
-                  <a:srgbClr val="C9D1D9"/>
-                </a:solidFill>
-                <a:latin typeface="Hiragino Sans" pitchFamily="34" charset="0"/>
-                <a:ea typeface="Hiragino Sans" pitchFamily="34" charset="-122"/>
-                <a:cs typeface="Hiragino Sans" pitchFamily="34" charset="-120"/>
-              </a:rPr>
-              <a:t> ターミナルを一度閉じて、開き直してからもう一度 opencode を実行。</a:t>
+              <a:t>好きな名前でOK（例: todo-app）。これから作るファイルは、このフォルダの中にできていきます。</a:t>
             </a:r>
             <a:endParaRPr lang="en-US" sz="1450" dirty="0"/>
           </a:p>
@@ -8331,7 +8092,7 @@
       </p:sp>
       <p:sp>
         <p:nvSpPr>
-          <p:cNvPr id="20" name="Text 18"/>
+          <p:cNvPr id="17" name="Text 15"/>
           <p:cNvSpPr/>
           <p:nvPr/>
         </p:nvSpPr>
@@ -8384,7 +8145,7 @@
       </p:sp>
       <p:sp>
         <p:nvSpPr>
-          <p:cNvPr id="21" name="Text 19"/>
+          <p:cNvPr id="18" name="Text 16"/>
           <p:cNvSpPr/>
           <p:nvPr/>
         </p:nvSpPr>
@@ -8415,7 +8176,7 @@
                 <a:ea typeface="Menlo" pitchFamily="34" charset="-122"/>
                 <a:cs typeface="Menlo" pitchFamily="34" charset="-120"/>
               </a:rPr>
-              <a:t>14 / 27</a:t>
+              <a:t>14 / 26</a:t>
             </a:r>
             <a:endParaRPr lang="en-US" sz="900" dirty="0"/>
           </a:p>
@@ -8578,12 +8339,12 @@
         </p:nvSpPr>
         <p:spPr>
           <a:xfrm>
-            <a:off x="640080" y="1965960"/>
-            <a:ext cx="6035040" cy="1051560"/>
+            <a:off x="640080" y="2057400"/>
+            <a:ext cx="6035040" cy="1143000"/>
           </a:xfrm>
           <a:prstGeom prst="roundRect">
             <a:avLst>
-              <a:gd name="adj" fmla="val 6957"/>
+              <a:gd name="adj" fmla="val 6400"/>
             </a:avLst>
           </a:prstGeom>
           <a:solidFill>
@@ -8612,7 +8373,7 @@
         </p:nvSpPr>
         <p:spPr>
           <a:xfrm>
-            <a:off x="932688" y="2217420"/>
+            <a:off x="932688" y="2354580"/>
             <a:ext cx="548640" cy="548640"/>
           </a:xfrm>
           <a:prstGeom prst="ellipse">
@@ -8632,7 +8393,7 @@
         </p:nvSpPr>
         <p:spPr>
           <a:xfrm>
-            <a:off x="932688" y="2217420"/>
+            <a:off x="932688" y="2354580"/>
             <a:ext cx="548640" cy="548640"/>
           </a:xfrm>
           <a:prstGeom prst="rect">
@@ -8671,7 +8432,7 @@
         </p:nvSpPr>
         <p:spPr>
           <a:xfrm>
-            <a:off x="1737360" y="2130552"/>
+            <a:off x="1737360" y="2258568"/>
             <a:ext cx="4754880" cy="411480"/>
           </a:xfrm>
           <a:prstGeom prst="rect">
@@ -8710,7 +8471,7 @@
         </p:nvSpPr>
         <p:spPr>
           <a:xfrm>
-            <a:off x="1737360" y="2532888"/>
+            <a:off x="1737360" y="2660904"/>
             <a:ext cx="4754880" cy="365760"/>
           </a:xfrm>
           <a:prstGeom prst="rect">
@@ -8749,12 +8510,12 @@
         </p:nvSpPr>
         <p:spPr>
           <a:xfrm>
-            <a:off x="640080" y="3154680"/>
-            <a:ext cx="6035040" cy="1051560"/>
+            <a:off x="640080" y="3383280"/>
+            <a:ext cx="6035040" cy="1143000"/>
           </a:xfrm>
           <a:prstGeom prst="roundRect">
             <a:avLst>
-              <a:gd name="adj" fmla="val 6957"/>
+              <a:gd name="adj" fmla="val 6400"/>
             </a:avLst>
           </a:prstGeom>
           <a:solidFill>
@@ -8783,7 +8544,7 @@
         </p:nvSpPr>
         <p:spPr>
           <a:xfrm>
-            <a:off x="932688" y="3406140"/>
+            <a:off x="932688" y="3680460"/>
             <a:ext cx="548640" cy="548640"/>
           </a:xfrm>
           <a:prstGeom prst="ellipse">
@@ -8803,7 +8564,7 @@
         </p:nvSpPr>
         <p:spPr>
           <a:xfrm>
-            <a:off x="932688" y="3406140"/>
+            <a:off x="932688" y="3680460"/>
             <a:ext cx="548640" cy="548640"/>
           </a:xfrm>
           <a:prstGeom prst="rect">
@@ -8842,7 +8603,7 @@
         </p:nvSpPr>
         <p:spPr>
           <a:xfrm>
-            <a:off x="1737360" y="3319272"/>
+            <a:off x="1737360" y="3584448"/>
             <a:ext cx="4754880" cy="411480"/>
           </a:xfrm>
           <a:prstGeom prst="rect">
@@ -8881,7 +8642,7 @@
         </p:nvSpPr>
         <p:spPr>
           <a:xfrm>
-            <a:off x="1737360" y="3721608"/>
+            <a:off x="1737360" y="3986784"/>
             <a:ext cx="4754880" cy="365760"/>
           </a:xfrm>
           <a:prstGeom prst="rect">
@@ -8920,12 +8681,12 @@
         </p:nvSpPr>
         <p:spPr>
           <a:xfrm>
-            <a:off x="640080" y="4343400"/>
-            <a:ext cx="6035040" cy="1051560"/>
+            <a:off x="640080" y="4709160"/>
+            <a:ext cx="6035040" cy="1143000"/>
           </a:xfrm>
           <a:prstGeom prst="roundRect">
             <a:avLst>
-              <a:gd name="adj" fmla="val 6957"/>
+              <a:gd name="adj" fmla="val 6400"/>
             </a:avLst>
           </a:prstGeom>
           <a:solidFill>
@@ -8954,7 +8715,7 @@
         </p:nvSpPr>
         <p:spPr>
           <a:xfrm>
-            <a:off x="932688" y="4594860"/>
+            <a:off x="932688" y="5006340"/>
             <a:ext cx="548640" cy="548640"/>
           </a:xfrm>
           <a:prstGeom prst="ellipse">
@@ -8974,7 +8735,7 @@
         </p:nvSpPr>
         <p:spPr>
           <a:xfrm>
-            <a:off x="932688" y="4594860"/>
+            <a:off x="932688" y="5006340"/>
             <a:ext cx="548640" cy="548640"/>
           </a:xfrm>
           <a:prstGeom prst="rect">
@@ -9013,7 +8774,7 @@
         </p:nvSpPr>
         <p:spPr>
           <a:xfrm>
-            <a:off x="1737360" y="4507992"/>
+            <a:off x="1737360" y="4910328"/>
             <a:ext cx="4754880" cy="411480"/>
           </a:xfrm>
           <a:prstGeom prst="rect">
@@ -9052,7 +8813,7 @@
         </p:nvSpPr>
         <p:spPr>
           <a:xfrm>
-            <a:off x="1737360" y="4910328"/>
+            <a:off x="1737360" y="5312664"/>
             <a:ext cx="4754880" cy="365760"/>
           </a:xfrm>
           <a:prstGeom prst="rect">
@@ -9091,12 +8852,12 @@
         </p:nvSpPr>
         <p:spPr>
           <a:xfrm>
-            <a:off x="7040880" y="1965960"/>
-            <a:ext cx="4480560" cy="1828800"/>
+            <a:off x="7040880" y="2057400"/>
+            <a:ext cx="4480560" cy="3840480"/>
           </a:xfrm>
           <a:prstGeom prst="roundRect">
             <a:avLst>
-              <a:gd name="adj" fmla="val 3000"/>
+              <a:gd name="adj" fmla="val 1429"/>
             </a:avLst>
           </a:prstGeom>
           <a:solidFill>
@@ -9125,7 +8886,7 @@
         </p:nvSpPr>
         <p:spPr>
           <a:xfrm>
-            <a:off x="7050024" y="1975104"/>
+            <a:off x="7050024" y="2066544"/>
             <a:ext cx="4462272" cy="347472"/>
           </a:xfrm>
           <a:prstGeom prst="rect">
@@ -9145,7 +8906,7 @@
         </p:nvSpPr>
         <p:spPr>
           <a:xfrm>
-            <a:off x="7205472" y="2089404"/>
+            <a:off x="7205472" y="2180844"/>
             <a:ext cx="109728" cy="109728"/>
           </a:xfrm>
           <a:prstGeom prst="ellipse">
@@ -9165,7 +8926,7 @@
         </p:nvSpPr>
         <p:spPr>
           <a:xfrm>
-            <a:off x="7406640" y="2089404"/>
+            <a:off x="7406640" y="2180844"/>
             <a:ext cx="109728" cy="109728"/>
           </a:xfrm>
           <a:prstGeom prst="ellipse">
@@ -9185,7 +8946,7 @@
         </p:nvSpPr>
         <p:spPr>
           <a:xfrm>
-            <a:off x="7607808" y="2089404"/>
+            <a:off x="7607808" y="2180844"/>
             <a:ext cx="109728" cy="109728"/>
           </a:xfrm>
           <a:prstGeom prst="ellipse">
@@ -9205,7 +8966,7 @@
         </p:nvSpPr>
         <p:spPr>
           <a:xfrm>
-            <a:off x="7863840" y="1975104"/>
+            <a:off x="7863840" y="2066544"/>
             <a:ext cx="3383280" cy="347472"/>
           </a:xfrm>
           <a:prstGeom prst="rect">
@@ -9244,8 +9005,8 @@
         </p:nvSpPr>
         <p:spPr>
           <a:xfrm>
-            <a:off x="7296912" y="2423160"/>
-            <a:ext cx="4023360" cy="1261872"/>
+            <a:off x="7296912" y="2514600"/>
+            <a:ext cx="4023360" cy="3273552"/>
           </a:xfrm>
           <a:prstGeom prst="rect">
             <a:avLst/>
@@ -9264,7 +9025,7 @@
               <a:buNone/>
             </a:pPr>
             <a:r>
-              <a:rPr lang="en-US" sz="1250" dirty="0">
+              <a:rPr lang="en-US" sz="1300" dirty="0">
                 <a:solidFill>
                   <a:srgbClr val="3FB950"/>
                 </a:solidFill>
@@ -9274,7 +9035,7 @@
               </a:rPr>
               <a:t>&gt; /connect</a:t>
             </a:r>
-            <a:endParaRPr lang="en-US" sz="1250" dirty="0"/>
+            <a:endParaRPr lang="en-US" sz="1300" dirty="0"/>
           </a:p>
           <a:p>
             <a:pPr algn="l" indent="0" marL="0">
@@ -9284,17 +9045,17 @@
               <a:buNone/>
             </a:pPr>
             <a:r>
-              <a:rPr lang="en-US" sz="1250" dirty="0">
-                <a:solidFill>
-                  <a:srgbClr val="8B949E"/>
+              <a:rPr lang="en-US" sz="1300" dirty="0">
+                <a:solidFill>
+                  <a:srgbClr val="C9D1D9"/>
                 </a:solidFill>
                 <a:latin typeface="Menlo" pitchFamily="34" charset="0"/>
                 <a:ea typeface="Menlo" pitchFamily="34" charset="-122"/>
                 <a:cs typeface="Menlo" pitchFamily="34" charset="-120"/>
               </a:rPr>
-              <a:t>  ? Provider</a:t>
-            </a:r>
-            <a:endParaRPr lang="en-US" sz="1250" dirty="0"/>
+              <a:t> </a:t>
+            </a:r>
+            <a:endParaRPr lang="en-US" sz="1300" dirty="0"/>
           </a:p>
           <a:p>
             <a:pPr algn="l" indent="0" marL="0">
@@ -9304,17 +9065,17 @@
               <a:buNone/>
             </a:pPr>
             <a:r>
-              <a:rPr lang="en-US" sz="1250" dirty="0">
-                <a:solidFill>
-                  <a:srgbClr val="58A6FF"/>
+              <a:rPr lang="en-US" sz="1300" dirty="0">
+                <a:solidFill>
+                  <a:srgbClr val="8B949E"/>
                 </a:solidFill>
                 <a:latin typeface="Menlo" pitchFamily="34" charset="0"/>
                 <a:ea typeface="Menlo" pitchFamily="34" charset="-122"/>
                 <a:cs typeface="Menlo" pitchFamily="34" charset="-120"/>
               </a:rPr>
-              <a:t>  &gt; OpenRouter</a:t>
-            </a:r>
-            <a:endParaRPr lang="en-US" sz="1250" dirty="0"/>
+              <a:t>  ? Provider</a:t>
+            </a:r>
+            <a:endParaRPr lang="en-US" sz="1300" dirty="0"/>
           </a:p>
           <a:p>
             <a:pPr algn="l" indent="0" marL="0">
@@ -9324,17 +9085,17 @@
               <a:buNone/>
             </a:pPr>
             <a:r>
-              <a:rPr lang="en-US" sz="1250" dirty="0">
-                <a:solidFill>
-                  <a:srgbClr val="8B949E"/>
+              <a:rPr lang="en-US" sz="1300" dirty="0">
+                <a:solidFill>
+                  <a:srgbClr val="58A6FF"/>
                 </a:solidFill>
                 <a:latin typeface="Menlo" pitchFamily="34" charset="0"/>
                 <a:ea typeface="Menlo" pitchFamily="34" charset="-122"/>
                 <a:cs typeface="Menlo" pitchFamily="34" charset="-120"/>
               </a:rPr>
-              <a:t>  ? API Key</a:t>
-            </a:r>
-            <a:endParaRPr lang="en-US" sz="1250" dirty="0"/>
+              <a:t>  &gt; OpenRouter</a:t>
+            </a:r>
+            <a:endParaRPr lang="en-US" sz="1300" dirty="0"/>
           </a:p>
           <a:p>
             <a:pPr algn="l" indent="0" marL="0">
@@ -9344,7 +9105,7 @@
               <a:buNone/>
             </a:pPr>
             <a:r>
-              <a:rPr lang="en-US" sz="1250" dirty="0">
+              <a:rPr lang="en-US" sz="1300" dirty="0">
                 <a:solidFill>
                   <a:srgbClr val="C9D1D9"/>
                 </a:solidFill>
@@ -9352,226 +9113,19 @@
                 <a:ea typeface="Menlo" pitchFamily="34" charset="-122"/>
                 <a:cs typeface="Menlo" pitchFamily="34" charset="-120"/>
               </a:rPr>
-              <a:t>  &gt; sk-or-••••••••</a:t>
-            </a:r>
-            <a:endParaRPr lang="en-US" sz="1250" dirty="0"/>
-          </a:p>
-        </p:txBody>
-      </p:sp>
-      <p:sp>
-        <p:nvSpPr>
-          <p:cNvPr id="27" name="Shape 25"/>
-          <p:cNvSpPr/>
-          <p:nvPr/>
-        </p:nvSpPr>
-        <p:spPr>
-          <a:xfrm>
-            <a:off x="7040880" y="4023360"/>
-            <a:ext cx="4480560" cy="1737360"/>
-          </a:xfrm>
-          <a:prstGeom prst="roundRect">
-            <a:avLst>
-              <a:gd name="adj" fmla="val 4211"/>
-            </a:avLst>
-          </a:prstGeom>
-          <a:solidFill>
-            <a:srgbClr val="1C2128"/>
-          </a:solidFill>
-          <a:ln w="12700">
-            <a:solidFill>
-              <a:srgbClr val="30363D"/>
-            </a:solidFill>
-            <a:prstDash val="solid"/>
-          </a:ln>
-          <a:effectLst>
-            <a:outerShdw sx="100000" sy="100000" kx="0" ky="0" algn="bl" rotWithShape="0" blurRad="127000" dist="38100" dir="5400000">
-              <a:srgbClr val="000000">
-                <a:alpha val="35000"/>
-              </a:srgbClr>
-            </a:outerShdw>
-          </a:effectLst>
-        </p:spPr>
-      </p:sp>
-      <p:sp>
-        <p:nvSpPr>
-          <p:cNvPr id="28" name="Shape 26"/>
-          <p:cNvSpPr/>
-          <p:nvPr/>
-        </p:nvSpPr>
-        <p:spPr>
-          <a:xfrm>
-            <a:off x="7040880" y="4023360"/>
-            <a:ext cx="82296" cy="1737360"/>
-          </a:xfrm>
-          <a:prstGeom prst="rect">
-            <a:avLst/>
-          </a:prstGeom>
-          <a:solidFill>
-            <a:srgbClr val="3FB950"/>
-          </a:solidFill>
-          <a:ln/>
-        </p:spPr>
-      </p:sp>
-      <p:sp>
-        <p:nvSpPr>
-          <p:cNvPr id="29" name="Text 27"/>
-          <p:cNvSpPr/>
-          <p:nvPr/>
-        </p:nvSpPr>
-        <p:spPr>
-          <a:xfrm>
-            <a:off x="7406640" y="4251960"/>
-            <a:ext cx="3931920" cy="457200"/>
-          </a:xfrm>
-          <a:prstGeom prst="rect">
-            <a:avLst/>
-          </a:prstGeom>
-          <a:noFill/>
-          <a:ln/>
-        </p:spPr>
-        <p:txBody>
-          <a:bodyPr wrap="square" lIns="0" tIns="0" rIns="0" bIns="0" rtlCol="0" anchor="ctr"/>
-          <a:lstStyle/>
-          <a:p>
-            <a:pPr algn="l" indent="0" marL="0">
-              <a:buNone/>
-            </a:pPr>
-            <a:r>
-              <a:rPr lang="en-US" sz="1450" b="1" dirty="0">
-                <a:solidFill>
-                  <a:srgbClr val="3FB950"/>
-                </a:solidFill>
-                <a:latin typeface="Hiragino Sans" pitchFamily="34" charset="0"/>
-                <a:ea typeface="Hiragino Sans" pitchFamily="34" charset="-122"/>
-                <a:cs typeface="Hiragino Sans" pitchFamily="34" charset="-120"/>
-              </a:rPr>
-              <a:t>キーは OpenCode 側に保存される</a:t>
-            </a:r>
-            <a:endParaRPr lang="en-US" sz="1450" dirty="0"/>
-          </a:p>
-        </p:txBody>
-      </p:sp>
-      <p:sp>
-        <p:nvSpPr>
-          <p:cNvPr id="30" name="Text 28"/>
-          <p:cNvSpPr/>
-          <p:nvPr/>
-        </p:nvSpPr>
-        <p:spPr>
-          <a:xfrm>
-            <a:off x="7406640" y="4709160"/>
-            <a:ext cx="3931920" cy="914400"/>
-          </a:xfrm>
-          <a:prstGeom prst="rect">
-            <a:avLst/>
-          </a:prstGeom>
-          <a:noFill/>
-          <a:ln/>
-        </p:spPr>
-        <p:txBody>
-          <a:bodyPr wrap="square" lIns="0" tIns="0" rIns="0" bIns="0" rtlCol="0" anchor="t"/>
-          <a:lstStyle/>
+              <a:t> </a:t>
+            </a:r>
+            <a:endParaRPr lang="en-US" sz="1300" dirty="0"/>
+          </a:p>
           <a:p>
             <a:pPr algn="l" indent="0" marL="0">
               <a:lnSpc>
-                <a:spcPct val="130000"/>
+                <a:spcPct val="125000"/>
               </a:lnSpc>
               <a:buNone/>
             </a:pPr>
             <a:r>
               <a:rPr lang="en-US" sz="1300" dirty="0">
-                <a:solidFill>
-                  <a:srgbClr val="C9D1D9"/>
-                </a:solidFill>
-                <a:latin typeface="Hiragino Sans" pitchFamily="34" charset="0"/>
-                <a:ea typeface="Hiragino Sans" pitchFamily="34" charset="-122"/>
-                <a:cs typeface="Hiragino Sans" pitchFamily="34" charset="-120"/>
-              </a:rPr>
-              <a:t>環境変数を自分で設定する必要はありません。一度つなげば次回からは不要です。</a:t>
-            </a:r>
-            <a:endParaRPr lang="en-US" sz="1300" dirty="0"/>
-          </a:p>
-        </p:txBody>
-      </p:sp>
-      <p:sp>
-        <p:nvSpPr>
-          <p:cNvPr id="31" name="Text 29"/>
-          <p:cNvSpPr/>
-          <p:nvPr/>
-        </p:nvSpPr>
-        <p:spPr>
-          <a:xfrm>
-            <a:off x="640080" y="6419088"/>
-            <a:ext cx="7315200" cy="274320"/>
-          </a:xfrm>
-          <a:prstGeom prst="rect">
-            <a:avLst/>
-          </a:prstGeom>
-          <a:noFill/>
-          <a:ln/>
-        </p:spPr>
-        <p:txBody>
-          <a:bodyPr wrap="square" lIns="0" tIns="0" rIns="0" bIns="0" rtlCol="0" anchor="ctr"/>
-          <a:lstStyle/>
-          <a:p>
-            <a:pPr algn="l" indent="0" marL="0">
-              <a:buNone/>
-            </a:pPr>
-            <a:r>
-              <a:rPr lang="en-US" sz="900" dirty="0">
-                <a:solidFill>
-                  <a:srgbClr val="8B949E"/>
-                </a:solidFill>
-                <a:latin typeface="Hiragino Sans" pitchFamily="34" charset="0"/>
-                <a:ea typeface="Hiragino Sans" pitchFamily="34" charset="-122"/>
-                <a:cs typeface="Hiragino Sans" pitchFamily="34" charset="-120"/>
-              </a:rPr>
-              <a:t>コーディングエージェント入門</a:t>
-            </a:r>
-            <a:pPr algn="l" indent="0" marL="0">
-              <a:buNone/>
-            </a:pPr>
-            <a:r>
-              <a:rPr lang="en-US" sz="900" dirty="0">
-                <a:solidFill>
-                  <a:srgbClr val="30363D"/>
-                </a:solidFill>
-                <a:latin typeface="Hiragino Sans" pitchFamily="34" charset="0"/>
-                <a:ea typeface="Hiragino Sans" pitchFamily="34" charset="-122"/>
-                <a:cs typeface="Hiragino Sans" pitchFamily="34" charset="-120"/>
-              </a:rPr>
-              <a:t>  ·  OpenCode × OpenRouter</a:t>
-            </a:r>
-            <a:endParaRPr lang="en-US" sz="900" dirty="0"/>
-          </a:p>
-        </p:txBody>
-      </p:sp>
-      <p:sp>
-        <p:nvSpPr>
-          <p:cNvPr id="32" name="Text 30"/>
-          <p:cNvSpPr/>
-          <p:nvPr/>
-        </p:nvSpPr>
-        <p:spPr>
-          <a:xfrm>
-            <a:off x="9720072" y="6419088"/>
-            <a:ext cx="1828800" cy="274320"/>
-          </a:xfrm>
-          <a:prstGeom prst="rect">
-            <a:avLst/>
-          </a:prstGeom>
-          <a:noFill/>
-          <a:ln/>
-        </p:spPr>
-        <p:txBody>
-          <a:bodyPr wrap="square" lIns="0" tIns="0" rIns="0" bIns="0" rtlCol="0" anchor="ctr"/>
-          <a:lstStyle/>
-          <a:p>
-            <a:pPr algn="r" indent="0" marL="0">
-              <a:buNone/>
-            </a:pPr>
-            <a:r>
-              <a:rPr lang="en-US" sz="900" dirty="0">
                 <a:solidFill>
                   <a:srgbClr val="8B949E"/>
                 </a:solidFill>
@@ -9579,7 +9133,159 @@
                 <a:ea typeface="Menlo" pitchFamily="34" charset="-122"/>
                 <a:cs typeface="Menlo" pitchFamily="34" charset="-120"/>
               </a:rPr>
-              <a:t>15 / 27</a:t>
+              <a:t>  ? API Key</a:t>
+            </a:r>
+            <a:endParaRPr lang="en-US" sz="1300" dirty="0"/>
+          </a:p>
+          <a:p>
+            <a:pPr algn="l" indent="0" marL="0">
+              <a:lnSpc>
+                <a:spcPct val="125000"/>
+              </a:lnSpc>
+              <a:buNone/>
+            </a:pPr>
+            <a:r>
+              <a:rPr lang="en-US" sz="1300" dirty="0">
+                <a:solidFill>
+                  <a:srgbClr val="C9D1D9"/>
+                </a:solidFill>
+                <a:latin typeface="Menlo" pitchFamily="34" charset="0"/>
+                <a:ea typeface="Menlo" pitchFamily="34" charset="-122"/>
+                <a:cs typeface="Menlo" pitchFamily="34" charset="-120"/>
+              </a:rPr>
+              <a:t>  &gt; sk-or-••••••••</a:t>
+            </a:r>
+            <a:endParaRPr lang="en-US" sz="1300" dirty="0"/>
+          </a:p>
+          <a:p>
+            <a:pPr algn="l" indent="0" marL="0">
+              <a:lnSpc>
+                <a:spcPct val="125000"/>
+              </a:lnSpc>
+              <a:buNone/>
+            </a:pPr>
+            <a:r>
+              <a:rPr lang="en-US" sz="1300" dirty="0">
+                <a:solidFill>
+                  <a:srgbClr val="C9D1D9"/>
+                </a:solidFill>
+                <a:latin typeface="Menlo" pitchFamily="34" charset="0"/>
+                <a:ea typeface="Menlo" pitchFamily="34" charset="-122"/>
+                <a:cs typeface="Menlo" pitchFamily="34" charset="-120"/>
+              </a:rPr>
+              <a:t> </a:t>
+            </a:r>
+            <a:endParaRPr lang="en-US" sz="1300" dirty="0"/>
+          </a:p>
+          <a:p>
+            <a:pPr algn="l" indent="0" marL="0">
+              <a:lnSpc>
+                <a:spcPct val="125000"/>
+              </a:lnSpc>
+              <a:buNone/>
+            </a:pPr>
+            <a:r>
+              <a:rPr lang="en-US" sz="1300" dirty="0">
+                <a:solidFill>
+                  <a:srgbClr val="3FB950"/>
+                </a:solidFill>
+                <a:latin typeface="Menlo" pitchFamily="34" charset="0"/>
+                <a:ea typeface="Menlo" pitchFamily="34" charset="-122"/>
+                <a:cs typeface="Menlo" pitchFamily="34" charset="-120"/>
+              </a:rPr>
+              <a:t>  ✓ 接続しました</a:t>
+            </a:r>
+            <a:endParaRPr lang="en-US" sz="1300" dirty="0"/>
+          </a:p>
+        </p:txBody>
+      </p:sp>
+      <p:sp>
+        <p:nvSpPr>
+          <p:cNvPr id="27" name="Text 25"/>
+          <p:cNvSpPr/>
+          <p:nvPr/>
+        </p:nvSpPr>
+        <p:spPr>
+          <a:xfrm>
+            <a:off x="640080" y="6419088"/>
+            <a:ext cx="7315200" cy="274320"/>
+          </a:xfrm>
+          <a:prstGeom prst="rect">
+            <a:avLst/>
+          </a:prstGeom>
+          <a:noFill/>
+          <a:ln/>
+        </p:spPr>
+        <p:txBody>
+          <a:bodyPr wrap="square" lIns="0" tIns="0" rIns="0" bIns="0" rtlCol="0" anchor="ctr"/>
+          <a:lstStyle/>
+          <a:p>
+            <a:pPr algn="l" indent="0" marL="0">
+              <a:buNone/>
+            </a:pPr>
+            <a:r>
+              <a:rPr lang="en-US" sz="900" dirty="0">
+                <a:solidFill>
+                  <a:srgbClr val="8B949E"/>
+                </a:solidFill>
+                <a:latin typeface="Hiragino Sans" pitchFamily="34" charset="0"/>
+                <a:ea typeface="Hiragino Sans" pitchFamily="34" charset="-122"/>
+                <a:cs typeface="Hiragino Sans" pitchFamily="34" charset="-120"/>
+              </a:rPr>
+              <a:t>コーディングエージェント入門</a:t>
+            </a:r>
+            <a:pPr algn="l" indent="0" marL="0">
+              <a:buNone/>
+            </a:pPr>
+            <a:r>
+              <a:rPr lang="en-US" sz="900" dirty="0">
+                <a:solidFill>
+                  <a:srgbClr val="30363D"/>
+                </a:solidFill>
+                <a:latin typeface="Hiragino Sans" pitchFamily="34" charset="0"/>
+                <a:ea typeface="Hiragino Sans" pitchFamily="34" charset="-122"/>
+                <a:cs typeface="Hiragino Sans" pitchFamily="34" charset="-120"/>
+              </a:rPr>
+              <a:t>  ·  OpenCode × OpenRouter</a:t>
+            </a:r>
+            <a:endParaRPr lang="en-US" sz="900" dirty="0"/>
+          </a:p>
+        </p:txBody>
+      </p:sp>
+      <p:sp>
+        <p:nvSpPr>
+          <p:cNvPr id="28" name="Text 26"/>
+          <p:cNvSpPr/>
+          <p:nvPr/>
+        </p:nvSpPr>
+        <p:spPr>
+          <a:xfrm>
+            <a:off x="9720072" y="6419088"/>
+            <a:ext cx="1828800" cy="274320"/>
+          </a:xfrm>
+          <a:prstGeom prst="rect">
+            <a:avLst/>
+          </a:prstGeom>
+          <a:noFill/>
+          <a:ln/>
+        </p:spPr>
+        <p:txBody>
+          <a:bodyPr wrap="square" lIns="0" tIns="0" rIns="0" bIns="0" rtlCol="0" anchor="ctr"/>
+          <a:lstStyle/>
+          <a:p>
+            <a:pPr algn="r" indent="0" marL="0">
+              <a:buNone/>
+            </a:pPr>
+            <a:r>
+              <a:rPr lang="en-US" sz="900" dirty="0">
+                <a:solidFill>
+                  <a:srgbClr val="8B949E"/>
+                </a:solidFill>
+                <a:latin typeface="Menlo" pitchFamily="34" charset="0"/>
+                <a:ea typeface="Menlo" pitchFamily="34" charset="-122"/>
+                <a:cs typeface="Menlo" pitchFamily="34" charset="-120"/>
+              </a:rPr>
+              <a:t>15 / 26</a:t>
             </a:r>
             <a:endParaRPr lang="en-US" sz="900" dirty="0"/>
           </a:p>
@@ -9809,12 +9515,12 @@
         </p:nvSpPr>
         <p:spPr>
           <a:xfrm>
-            <a:off x="640080" y="2423160"/>
-            <a:ext cx="5486400" cy="1828800"/>
+            <a:off x="640080" y="2468880"/>
+            <a:ext cx="6583680" cy="1920240"/>
           </a:xfrm>
           <a:prstGeom prst="roundRect">
             <a:avLst>
-              <a:gd name="adj" fmla="val 3000"/>
+              <a:gd name="adj" fmla="val 2857"/>
             </a:avLst>
           </a:prstGeom>
           <a:solidFill>
@@ -9843,8 +9549,8 @@
         </p:nvSpPr>
         <p:spPr>
           <a:xfrm>
-            <a:off x="649224" y="2432304"/>
-            <a:ext cx="5468112" cy="347472"/>
+            <a:off x="649224" y="2478024"/>
+            <a:ext cx="6565392" cy="347472"/>
           </a:xfrm>
           <a:prstGeom prst="rect">
             <a:avLst/>
@@ -9863,7 +9569,7 @@
         </p:nvSpPr>
         <p:spPr>
           <a:xfrm>
-            <a:off x="804672" y="2546604"/>
+            <a:off x="804672" y="2592324"/>
             <a:ext cx="109728" cy="109728"/>
           </a:xfrm>
           <a:prstGeom prst="ellipse">
@@ -9883,7 +9589,7 @@
         </p:nvSpPr>
         <p:spPr>
           <a:xfrm>
-            <a:off x="1005840" y="2546604"/>
+            <a:off x="1005840" y="2592324"/>
             <a:ext cx="109728" cy="109728"/>
           </a:xfrm>
           <a:prstGeom prst="ellipse">
@@ -9903,7 +9609,7 @@
         </p:nvSpPr>
         <p:spPr>
           <a:xfrm>
-            <a:off x="1207008" y="2546604"/>
+            <a:off x="1207008" y="2592324"/>
             <a:ext cx="109728" cy="109728"/>
           </a:xfrm>
           <a:prstGeom prst="ellipse">
@@ -9923,8 +9629,8 @@
         </p:nvSpPr>
         <p:spPr>
           <a:xfrm>
-            <a:off x="1463040" y="2432304"/>
-            <a:ext cx="4389120" cy="347472"/>
+            <a:off x="1463040" y="2478024"/>
+            <a:ext cx="5486400" cy="347472"/>
           </a:xfrm>
           <a:prstGeom prst="rect">
             <a:avLst/>
@@ -9962,8 +9668,8 @@
         </p:nvSpPr>
         <p:spPr>
           <a:xfrm>
-            <a:off x="896112" y="2880360"/>
-            <a:ext cx="5029200" cy="1261872"/>
+            <a:off x="896112" y="2926080"/>
+            <a:ext cx="6126480" cy="1353312"/>
           </a:xfrm>
           <a:prstGeom prst="rect">
             <a:avLst/>
@@ -9982,7 +9688,7 @@
               <a:buNone/>
             </a:pPr>
             <a:r>
-              <a:rPr lang="en-US" sz="1300" dirty="0">
+              <a:rPr lang="en-US" sz="1400" dirty="0">
                 <a:solidFill>
                   <a:srgbClr val="8B949E"/>
                 </a:solidFill>
@@ -9992,7 +9698,7 @@
               </a:rPr>
               <a:t># 見つからなければ検索欄に：</a:t>
             </a:r>
-            <a:endParaRPr lang="en-US" sz="1300" dirty="0"/>
+            <a:endParaRPr lang="en-US" sz="1400" dirty="0"/>
           </a:p>
           <a:p>
             <a:pPr algn="l" indent="0" marL="0">
@@ -10002,7 +9708,7 @@
               <a:buNone/>
             </a:pPr>
             <a:r>
-              <a:rPr lang="en-US" sz="1300" dirty="0">
+              <a:rPr lang="en-US" sz="1400" dirty="0">
                 <a:solidFill>
                   <a:srgbClr val="3FB950"/>
                 </a:solidFill>
@@ -10012,7 +9718,7 @@
               </a:rPr>
               <a:t>Free Models Router</a:t>
             </a:r>
-            <a:endParaRPr lang="en-US" sz="1300" dirty="0"/>
+            <a:endParaRPr lang="en-US" sz="1400" dirty="0"/>
           </a:p>
           <a:p>
             <a:pPr algn="l" indent="0" marL="0">
@@ -10022,7 +9728,7 @@
               <a:buNone/>
             </a:pPr>
             <a:r>
-              <a:rPr lang="en-US" sz="1300" dirty="0">
+              <a:rPr lang="en-US" sz="1400" dirty="0">
                 <a:solidFill>
                   <a:srgbClr val="8B949E"/>
                 </a:solidFill>
@@ -10032,7 +9738,7 @@
               </a:rPr>
               <a:t># と入力して絞り込む</a:t>
             </a:r>
-            <a:endParaRPr lang="en-US" sz="1300" dirty="0"/>
+            <a:endParaRPr lang="en-US" sz="1400" dirty="0"/>
           </a:p>
         </p:txBody>
       </p:sp>
@@ -10044,12 +9750,12 @@
         </p:nvSpPr>
         <p:spPr>
           <a:xfrm>
-            <a:off x="6309360" y="2423160"/>
-            <a:ext cx="5212080" cy="1828800"/>
+            <a:off x="640080" y="4663440"/>
+            <a:ext cx="10908792" cy="1280160"/>
           </a:xfrm>
           <a:prstGeom prst="roundRect">
             <a:avLst>
-              <a:gd name="adj" fmla="val 4000"/>
+              <a:gd name="adj" fmla="val 5714"/>
             </a:avLst>
           </a:prstGeom>
           <a:solidFill>
@@ -10072,129 +9778,14 @@
       </p:sp>
       <p:sp>
         <p:nvSpPr>
-          <p:cNvPr id="14" name="Text 12"/>
-          <p:cNvSpPr/>
-          <p:nvPr/>
-        </p:nvSpPr>
-        <p:spPr>
-          <a:xfrm>
-            <a:off x="6675120" y="2651760"/>
-            <a:ext cx="4572000" cy="365760"/>
-          </a:xfrm>
-          <a:prstGeom prst="rect">
-            <a:avLst/>
-          </a:prstGeom>
-          <a:noFill/>
-          <a:ln/>
-        </p:spPr>
-        <p:txBody>
-          <a:bodyPr wrap="square" lIns="0" tIns="0" rIns="0" bIns="0" rtlCol="0" anchor="ctr"/>
-          <a:lstStyle/>
-          <a:p>
-            <a:pPr algn="l" indent="0" marL="0">
-              <a:buNone/>
-            </a:pPr>
-            <a:r>
-              <a:rPr lang="en-US" sz="1500" b="1" dirty="0">
-                <a:solidFill>
-                  <a:srgbClr val="3FB950"/>
-                </a:solidFill>
-                <a:latin typeface="Hiragino Sans" pitchFamily="34" charset="0"/>
-                <a:ea typeface="Hiragino Sans" pitchFamily="34" charset="-122"/>
-                <a:cs typeface="Hiragino Sans" pitchFamily="34" charset="-120"/>
-              </a:rPr>
-              <a:t>なぜ Router？</a:t>
-            </a:r>
-            <a:endParaRPr lang="en-US" sz="1500" dirty="0"/>
-          </a:p>
-        </p:txBody>
-      </p:sp>
-      <p:sp>
-        <p:nvSpPr>
-          <p:cNvPr id="15" name="Text 13"/>
-          <p:cNvSpPr/>
-          <p:nvPr/>
-        </p:nvSpPr>
-        <p:spPr>
-          <a:xfrm>
-            <a:off x="6675120" y="3063240"/>
-            <a:ext cx="4480560" cy="1097280"/>
-          </a:xfrm>
-          <a:prstGeom prst="rect">
-            <a:avLst/>
-          </a:prstGeom>
-          <a:noFill/>
-          <a:ln/>
-        </p:spPr>
-        <p:txBody>
-          <a:bodyPr wrap="square" lIns="0" tIns="0" rIns="0" bIns="0" rtlCol="0" anchor="t"/>
-          <a:lstStyle/>
-          <a:p>
-            <a:pPr algn="l" indent="0" marL="0">
-              <a:lnSpc>
-                <a:spcPct val="130000"/>
-              </a:lnSpc>
-              <a:buNone/>
-            </a:pPr>
-            <a:r>
-              <a:rPr lang="en-US" sz="1350" dirty="0">
-                <a:solidFill>
-                  <a:srgbClr val="C9D1D9"/>
-                </a:solidFill>
-                <a:latin typeface="Hiragino Sans" pitchFamily="34" charset="0"/>
-                <a:ea typeface="Hiragino Sans" pitchFamily="34" charset="-122"/>
-                <a:cs typeface="Hiragino Sans" pitchFamily="34" charset="-120"/>
-              </a:rPr>
-              <a:t>特定の無料モデルは混雑で使えないことがある。Router は空いている無料モデルへ自動でつなぎます。</a:t>
-            </a:r>
-            <a:endParaRPr lang="en-US" sz="1350" dirty="0"/>
-          </a:p>
-        </p:txBody>
-      </p:sp>
-      <p:sp>
-        <p:nvSpPr>
-          <p:cNvPr id="16" name="Shape 14"/>
-          <p:cNvSpPr/>
-          <p:nvPr/>
-        </p:nvSpPr>
-        <p:spPr>
-          <a:xfrm>
-            <a:off x="640080" y="4526280"/>
-            <a:ext cx="10908792" cy="1325880"/>
-          </a:xfrm>
-          <a:prstGeom prst="roundRect">
-            <a:avLst>
-              <a:gd name="adj" fmla="val 5517"/>
-            </a:avLst>
-          </a:prstGeom>
-          <a:solidFill>
-            <a:srgbClr val="1C2128"/>
-          </a:solidFill>
-          <a:ln w="12700">
-            <a:solidFill>
-              <a:srgbClr val="30363D"/>
-            </a:solidFill>
-            <a:prstDash val="solid"/>
-          </a:ln>
-          <a:effectLst>
-            <a:outerShdw sx="100000" sy="100000" kx="0" ky="0" algn="bl" rotWithShape="0" blurRad="127000" dist="38100" dir="5400000">
-              <a:srgbClr val="000000">
-                <a:alpha val="35000"/>
-              </a:srgbClr>
-            </a:outerShdw>
-          </a:effectLst>
-        </p:spPr>
-      </p:sp>
-      <p:sp>
-        <p:nvSpPr>
-          <p:cNvPr id="17" name="Shape 15"/>
-          <p:cNvSpPr/>
-          <p:nvPr/>
-        </p:nvSpPr>
-        <p:spPr>
-          <a:xfrm>
-            <a:off x="640080" y="4526280"/>
-            <a:ext cx="82296" cy="1325880"/>
+          <p:cNvPr id="14" name="Shape 12"/>
+          <p:cNvSpPr/>
+          <p:nvPr/>
+        </p:nvSpPr>
+        <p:spPr>
+          <a:xfrm>
+            <a:off x="640080" y="4663440"/>
+            <a:ext cx="82296" cy="1280160"/>
           </a:xfrm>
           <a:prstGeom prst="rect">
             <a:avLst/>
@@ -10207,13 +9798,13 @@
       </p:sp>
       <p:sp>
         <p:nvSpPr>
-          <p:cNvPr id="18" name="Text 16"/>
-          <p:cNvSpPr/>
-          <p:nvPr/>
-        </p:nvSpPr>
-        <p:spPr>
-          <a:xfrm>
-            <a:off x="1005840" y="4709160"/>
+          <p:cNvPr id="15" name="Text 13"/>
+          <p:cNvSpPr/>
+          <p:nvPr/>
+        </p:nvSpPr>
+        <p:spPr>
+          <a:xfrm>
+            <a:off x="1005840" y="4846320"/>
             <a:ext cx="2011680" cy="457200"/>
           </a:xfrm>
           <a:prstGeom prst="rect">
@@ -10246,13 +9837,13 @@
       </p:sp>
       <p:sp>
         <p:nvSpPr>
-          <p:cNvPr id="19" name="Text 17"/>
-          <p:cNvSpPr/>
-          <p:nvPr/>
-        </p:nvSpPr>
-        <p:spPr>
-          <a:xfrm>
-            <a:off x="1005840" y="5166360"/>
+          <p:cNvPr id="16" name="Text 14"/>
+          <p:cNvSpPr/>
+          <p:nvPr/>
+        </p:nvSpPr>
+        <p:spPr>
+          <a:xfrm>
+            <a:off x="1005840" y="5303520"/>
             <a:ext cx="10268712" cy="548640"/>
           </a:xfrm>
           <a:prstGeom prst="rect">
@@ -10327,7 +9918,7 @@
       </p:sp>
       <p:sp>
         <p:nvSpPr>
-          <p:cNvPr id="20" name="Text 18"/>
+          <p:cNvPr id="17" name="Text 15"/>
           <p:cNvSpPr/>
           <p:nvPr/>
         </p:nvSpPr>
@@ -10380,7 +9971,7 @@
       </p:sp>
       <p:sp>
         <p:nvSpPr>
-          <p:cNvPr id="21" name="Text 19"/>
+          <p:cNvPr id="18" name="Text 16"/>
           <p:cNvSpPr/>
           <p:nvPr/>
         </p:nvSpPr>
@@ -10411,7 +10002,7 @@
                 <a:ea typeface="Menlo" pitchFamily="34" charset="-122"/>
                 <a:cs typeface="Menlo" pitchFamily="34" charset="-120"/>
               </a:rPr>
-              <a:t>16 / 27</a:t>
+              <a:t>16 / 26</a:t>
             </a:r>
             <a:endParaRPr lang="en-US" sz="900" dirty="0"/>
           </a:p>
@@ -11151,7 +10742,7 @@
                 <a:ea typeface="Menlo" pitchFamily="34" charset="-122"/>
                 <a:cs typeface="Menlo" pitchFamily="34" charset="-120"/>
               </a:rPr>
-              <a:t>&gt; ToDoアプリを分割して作って</a:t>
+              <a:t>&gt; ToDoアプリを作って</a:t>
             </a:r>
             <a:endParaRPr lang="en-US" sz="1250" dirty="0"/>
           </a:p>
@@ -11423,7 +11014,7 @@
                 <a:ea typeface="Menlo" pitchFamily="34" charset="-122"/>
                 <a:cs typeface="Menlo" pitchFamily="34" charset="-120"/>
               </a:rPr>
-              <a:t>17 / 27</a:t>
+              <a:t>17 / 26</a:t>
             </a:r>
             <a:endParaRPr lang="en-US" sz="900" dirty="0"/>
           </a:p>
@@ -11572,7 +11163,7 @@
                 <a:ea typeface="Hiragino Sans" pitchFamily="34" charset="-122"/>
                 <a:cs typeface="Hiragino Sans" pitchFamily="34" charset="-120"/>
               </a:rPr>
-              <a:t>STEP 6 ── ToDoアプリを “分割して” 作る</a:t>
+              <a:t>STEP 6 ── ToDoアプリを作る</a:t>
             </a:r>
             <a:endParaRPr lang="en-US" sz="2900" dirty="0"/>
           </a:p>
@@ -11725,7 +11316,7 @@
                 <a:ea typeface="Menlo" pitchFamily="34" charset="-122"/>
                 <a:cs typeface="Menlo" pitchFamily="34" charset="-120"/>
               </a:rPr>
-              <a:t>ファイル構成（ES Modules）</a:t>
+              <a:t>エージェントが作る構成（例）</a:t>
             </a:r>
             <a:endParaRPr lang="en-US" sz="1000" dirty="0"/>
           </a:p>
@@ -12454,7 +12045,7 @@
                 <a:ea typeface="Hiragino Sans" pitchFamily="34" charset="-122"/>
                 <a:cs typeface="Hiragino Sans" pitchFamily="34" charset="-120"/>
               </a:rPr>
-              <a:t>分け方も“どう動くか”も、まとめてエージェントにお任せできます。</a:t>
+              <a:t>どう分けるかも、まとめてエージェントが考えてくれます。</a:t>
             </a:r>
             <a:endParaRPr lang="en-US" sz="1250" dirty="0"/>
           </a:p>
@@ -12546,7 +12137,7 @@
                 <a:ea typeface="Menlo" pitchFamily="34" charset="-122"/>
                 <a:cs typeface="Menlo" pitchFamily="34" charset="-120"/>
               </a:rPr>
-              <a:t>18 / 27</a:t>
+              <a:t>18 / 26</a:t>
             </a:r>
             <a:endParaRPr lang="en-US" sz="900" dirty="0"/>
           </a:p>
@@ -12695,7 +12286,7 @@
                 <a:ea typeface="Hiragino Sans" pitchFamily="34" charset="-122"/>
                 <a:cs typeface="Hiragino Sans" pitchFamily="34" charset="-120"/>
               </a:rPr>
-              <a:t>“分割して” と頼む</a:t>
+              <a:t>プロンプトはシンプルでいい</a:t>
             </a:r>
             <a:endParaRPr lang="en-US" sz="2900" dirty="0"/>
           </a:p>
@@ -12734,7 +12325,7 @@
                 <a:ea typeface="Hiragino Sans" pitchFamily="34" charset="-122"/>
                 <a:cs typeface="Hiragino Sans" pitchFamily="34" charset="-120"/>
               </a:rPr>
-              <a:t>ファイル構成と役割を伝えるのがコツ。あとはエージェントが一気に作ります。</a:t>
+              <a:t>「作りたいもの」と「こうなってほしい」を伝えるだけ。作り方はエージェントが考えます。</a:t>
             </a:r>
             <a:endParaRPr lang="en-US" sz="1600" dirty="0"/>
           </a:p>
@@ -12748,12 +12339,12 @@
         </p:nvSpPr>
         <p:spPr>
           <a:xfrm>
-            <a:off x="640080" y="2423160"/>
-            <a:ext cx="10908792" cy="2697480"/>
+            <a:off x="640080" y="2468880"/>
+            <a:ext cx="10908792" cy="2514600"/>
           </a:xfrm>
           <a:prstGeom prst="roundRect">
             <a:avLst>
-              <a:gd name="adj" fmla="val 2034"/>
+              <a:gd name="adj" fmla="val 2182"/>
             </a:avLst>
           </a:prstGeom>
           <a:solidFill>
@@ -12782,7 +12373,7 @@
         </p:nvSpPr>
         <p:spPr>
           <a:xfrm>
-            <a:off x="649224" y="2432304"/>
+            <a:off x="649224" y="2478024"/>
             <a:ext cx="10890504" cy="347472"/>
           </a:xfrm>
           <a:prstGeom prst="rect">
@@ -12802,7 +12393,7 @@
         </p:nvSpPr>
         <p:spPr>
           <a:xfrm>
-            <a:off x="804672" y="2546604"/>
+            <a:off x="804672" y="2592324"/>
             <a:ext cx="109728" cy="109728"/>
           </a:xfrm>
           <a:prstGeom prst="ellipse">
@@ -12822,7 +12413,7 @@
         </p:nvSpPr>
         <p:spPr>
           <a:xfrm>
-            <a:off x="1005840" y="2546604"/>
+            <a:off x="1005840" y="2592324"/>
             <a:ext cx="109728" cy="109728"/>
           </a:xfrm>
           <a:prstGeom prst="ellipse">
@@ -12842,7 +12433,7 @@
         </p:nvSpPr>
         <p:spPr>
           <a:xfrm>
-            <a:off x="1207008" y="2546604"/>
+            <a:off x="1207008" y="2592324"/>
             <a:ext cx="109728" cy="109728"/>
           </a:xfrm>
           <a:prstGeom prst="ellipse">
@@ -12862,7 +12453,7 @@
         </p:nvSpPr>
         <p:spPr>
           <a:xfrm>
-            <a:off x="1463040" y="2432304"/>
+            <a:off x="1463040" y="2478024"/>
             <a:ext cx="9811512" cy="347472"/>
           </a:xfrm>
           <a:prstGeom prst="rect">
@@ -12901,8 +12492,8 @@
         </p:nvSpPr>
         <p:spPr>
           <a:xfrm>
-            <a:off x="896112" y="2880360"/>
-            <a:ext cx="10451592" cy="2130552"/>
+            <a:off x="896112" y="2926080"/>
+            <a:ext cx="10451592" cy="1947672"/>
           </a:xfrm>
           <a:prstGeom prst="rect">
             <a:avLst/>
@@ -12921,7 +12512,7 @@
               <a:buNone/>
             </a:pPr>
             <a:r>
-              <a:rPr lang="en-US" sz="1400" dirty="0">
+              <a:rPr lang="en-US" sz="1500" dirty="0">
                 <a:solidFill>
                   <a:srgbClr val="E6EDF3"/>
                 </a:solidFill>
@@ -12929,9 +12520,9 @@
                 <a:ea typeface="Menlo" pitchFamily="34" charset="-122"/>
                 <a:cs typeface="Menlo" pitchFamily="34" charset="-120"/>
               </a:rPr>
-              <a:t>ToDoアプリを作って。ES Modules で次のように分割して：</a:t>
-            </a:r>
-            <a:endParaRPr lang="en-US" sz="1400" dirty="0"/>
+              <a:t>ToDoアプリを作って。</a:t>
+            </a:r>
+            <a:endParaRPr lang="en-US" sz="1500" dirty="0"/>
           </a:p>
           <a:p>
             <a:pPr algn="l" indent="0" marL="0">
@@ -12941,7 +12532,7 @@
               <a:buNone/>
             </a:pPr>
             <a:r>
-              <a:rPr lang="en-US" sz="1400" dirty="0">
+              <a:rPr lang="en-US" sz="1500" dirty="0">
                 <a:solidFill>
                   <a:srgbClr val="C9D1D9"/>
                 </a:solidFill>
@@ -12949,9 +12540,9 @@
                 <a:ea typeface="Menlo" pitchFamily="34" charset="-122"/>
                 <a:cs typeface="Menlo" pitchFamily="34" charset="-120"/>
               </a:rPr>
-              <a:t>  index.html      … 画面</a:t>
-            </a:r>
-            <a:endParaRPr lang="en-US" sz="1400" dirty="0"/>
+              <a:t>・タスクの追加・完了チェック・削除ができる</a:t>
+            </a:r>
+            <a:endParaRPr lang="en-US" sz="1500" dirty="0"/>
           </a:p>
           <a:p>
             <a:pPr algn="l" indent="0" marL="0">
@@ -12961,7 +12552,7 @@
               <a:buNone/>
             </a:pPr>
             <a:r>
-              <a:rPr lang="en-US" sz="1400" dirty="0">
+              <a:rPr lang="en-US" sz="1500" dirty="0">
                 <a:solidFill>
                   <a:srgbClr val="C9D1D9"/>
                 </a:solidFill>
@@ -12969,9 +12560,9 @@
                 <a:ea typeface="Menlo" pitchFamily="34" charset="-122"/>
                 <a:cs typeface="Menlo" pitchFamily="34" charset="-120"/>
               </a:rPr>
-              <a:t>  styles.css      … 見た目</a:t>
-            </a:r>
-            <a:endParaRPr lang="en-US" sz="1400" dirty="0"/>
+              <a:t>・閉じても内容が残るようにする</a:t>
+            </a:r>
+            <a:endParaRPr lang="en-US" sz="1500" dirty="0"/>
           </a:p>
           <a:p>
             <a:pPr algn="l" indent="0" marL="0">
@@ -12981,7 +12572,7 @@
               <a:buNone/>
             </a:pPr>
             <a:r>
-              <a:rPr lang="en-US" sz="1400" dirty="0">
+              <a:rPr lang="en-US" sz="1500" dirty="0">
                 <a:solidFill>
                   <a:srgbClr val="C9D1D9"/>
                 </a:solidFill>
@@ -12989,9 +12580,9 @@
                 <a:ea typeface="Menlo" pitchFamily="34" charset="-122"/>
                 <a:cs typeface="Menlo" pitchFamily="34" charset="-120"/>
               </a:rPr>
-              <a:t>  src/storage.js  … localStorage への保存</a:t>
-            </a:r>
-            <a:endParaRPr lang="en-US" sz="1400" dirty="0"/>
+              <a:t>・コードは役割ごとに複数のファイルに分ける</a:t>
+            </a:r>
+            <a:endParaRPr lang="en-US" sz="1500" dirty="0"/>
           </a:p>
           <a:p>
             <a:pPr algn="l" indent="0" marL="0">
@@ -13001,7 +12592,7 @@
               <a:buNone/>
             </a:pPr>
             <a:r>
-              <a:rPr lang="en-US" sz="1400" dirty="0">
+              <a:rPr lang="en-US" sz="1500" dirty="0">
                 <a:solidFill>
                   <a:srgbClr val="C9D1D9"/>
                 </a:solidFill>
@@ -13009,69 +12600,9 @@
                 <a:ea typeface="Menlo" pitchFamily="34" charset="-122"/>
                 <a:cs typeface="Menlo" pitchFamily="34" charset="-120"/>
               </a:rPr>
-              <a:t>  src/todo.js     … 追加・完了・削除のロジック</a:t>
-            </a:r>
-            <a:endParaRPr lang="en-US" sz="1400" dirty="0"/>
-          </a:p>
-          <a:p>
-            <a:pPr algn="l" indent="0" marL="0">
-              <a:lnSpc>
-                <a:spcPct val="125000"/>
-              </a:lnSpc>
-              <a:buNone/>
-            </a:pPr>
-            <a:r>
-              <a:rPr lang="en-US" sz="1400" dirty="0">
-                <a:solidFill>
-                  <a:srgbClr val="C9D1D9"/>
-                </a:solidFill>
-                <a:latin typeface="Menlo" pitchFamily="34" charset="0"/>
-                <a:ea typeface="Menlo" pitchFamily="34" charset="-122"/>
-                <a:cs typeface="Menlo" pitchFamily="34" charset="-120"/>
-              </a:rPr>
-              <a:t>  src/app.js      … 画面とロジックをつなぐ入口</a:t>
-            </a:r>
-            <a:endParaRPr lang="en-US" sz="1400" dirty="0"/>
-          </a:p>
-          <a:p>
-            <a:pPr algn="l" indent="0" marL="0">
-              <a:lnSpc>
-                <a:spcPct val="125000"/>
-              </a:lnSpc>
-              <a:buNone/>
-            </a:pPr>
-            <a:r>
-              <a:rPr lang="en-US" sz="1400" dirty="0">
-                <a:solidFill>
-                  <a:srgbClr val="E6EDF3"/>
-                </a:solidFill>
-                <a:latin typeface="Menlo" pitchFamily="34" charset="0"/>
-                <a:ea typeface="Menlo" pitchFamily="34" charset="-122"/>
-                <a:cs typeface="Menlo" pitchFamily="34" charset="-120"/>
-              </a:rPr>
-              <a:t>タスクの追加・完了チェック・削除ができて、</a:t>
-            </a:r>
-            <a:endParaRPr lang="en-US" sz="1400" dirty="0"/>
-          </a:p>
-          <a:p>
-            <a:pPr algn="l" indent="0" marL="0">
-              <a:lnSpc>
-                <a:spcPct val="125000"/>
-              </a:lnSpc>
-              <a:buNone/>
-            </a:pPr>
-            <a:r>
-              <a:rPr lang="en-US" sz="1400" dirty="0">
-                <a:solidFill>
-                  <a:srgbClr val="E6EDF3"/>
-                </a:solidFill>
-                <a:latin typeface="Menlo" pitchFamily="34" charset="0"/>
-                <a:ea typeface="Menlo" pitchFamily="34" charset="-122"/>
-                <a:cs typeface="Menlo" pitchFamily="34" charset="-120"/>
-              </a:rPr>
-              <a:t>リロードしても残るようにして。</a:t>
-            </a:r>
-            <a:endParaRPr lang="en-US" sz="1400" dirty="0"/>
+              <a:t>・見た目もシンプルに整える</a:t>
+            </a:r>
+            <a:endParaRPr lang="en-US" sz="1500" dirty="0"/>
           </a:p>
         </p:txBody>
       </p:sp>
@@ -13083,8 +12614,8 @@
         </p:nvSpPr>
         <p:spPr>
           <a:xfrm>
-            <a:off x="640080" y="5349240"/>
-            <a:ext cx="3383280" cy="868680"/>
+            <a:off x="640080" y="5166360"/>
+            <a:ext cx="10908792" cy="868680"/>
           </a:xfrm>
           <a:prstGeom prst="roundRect">
             <a:avLst>
@@ -13092,7 +12623,7 @@
             </a:avLst>
           </a:prstGeom>
           <a:solidFill>
-            <a:srgbClr val="161B22"/>
+            <a:srgbClr val="1C2128"/>
           </a:solidFill>
           <a:ln w="12700">
             <a:solidFill>
@@ -13111,14 +12642,34 @@
       </p:sp>
       <p:sp>
         <p:nvSpPr>
-          <p:cNvPr id="14" name="Text 12"/>
-          <p:cNvSpPr/>
-          <p:nvPr/>
-        </p:nvSpPr>
-        <p:spPr>
-          <a:xfrm>
-            <a:off x="960120" y="5458968"/>
-            <a:ext cx="2743200" cy="384048"/>
+          <p:cNvPr id="14" name="Shape 12"/>
+          <p:cNvSpPr/>
+          <p:nvPr/>
+        </p:nvSpPr>
+        <p:spPr>
+          <a:xfrm>
+            <a:off x="640080" y="5166360"/>
+            <a:ext cx="82296" cy="868680"/>
+          </a:xfrm>
+          <a:prstGeom prst="rect">
+            <a:avLst/>
+          </a:prstGeom>
+          <a:solidFill>
+            <a:srgbClr val="F0883E"/>
+          </a:solidFill>
+          <a:ln/>
+        </p:spPr>
+      </p:sp>
+      <p:sp>
+        <p:nvSpPr>
+          <p:cNvPr id="15" name="Text 13"/>
+          <p:cNvSpPr/>
+          <p:nvPr/>
+        </p:nvSpPr>
+        <p:spPr>
+          <a:xfrm>
+            <a:off x="1005840" y="5166360"/>
+            <a:ext cx="10268712" cy="868680"/>
           </a:xfrm>
           <a:prstGeom prst="rect">
             <a:avLst/>
@@ -13136,13 +12687,27 @@
             <a:r>
               <a:rPr lang="en-US" sz="1500" b="1" dirty="0">
                 <a:solidFill>
-                  <a:srgbClr val="F0883E"/>
-                </a:solidFill>
-                <a:latin typeface="Hiragino Sans" pitchFamily="34" charset="0"/>
-                <a:ea typeface="Hiragino Sans" pitchFamily="34" charset="-122"/>
-                <a:cs typeface="Hiragino Sans" pitchFamily="34" charset="-120"/>
-              </a:rPr>
-              <a:t>ファイル構成を書く</a:t>
+                  <a:srgbClr val="E6EDF3"/>
+                </a:solidFill>
+                <a:latin typeface="Hiragino Sans" pitchFamily="34" charset="0"/>
+                <a:ea typeface="Hiragino Sans" pitchFamily="34" charset="-122"/>
+                <a:cs typeface="Hiragino Sans" pitchFamily="34" charset="-120"/>
+              </a:rPr>
+              <a:t>ファイル名や分け方までは指定しなくてOK。</a:t>
+            </a:r>
+            <a:pPr algn="l" indent="0" marL="0">
+              <a:buNone/>
+            </a:pPr>
+            <a:r>
+              <a:rPr lang="en-US" sz="1500" dirty="0">
+                <a:solidFill>
+                  <a:srgbClr val="C9D1D9"/>
+                </a:solidFill>
+                <a:latin typeface="Hiragino Sans" pitchFamily="34" charset="0"/>
+                <a:ea typeface="Hiragino Sans" pitchFamily="34" charset="-122"/>
+                <a:cs typeface="Hiragino Sans" pitchFamily="34" charset="-120"/>
+              </a:rPr>
+              <a:t> どう作るかはエージェントが判断します。</a:t>
             </a:r>
             <a:endParaRPr lang="en-US" sz="1500" dirty="0"/>
           </a:p>
@@ -13150,270 +12715,7 @@
       </p:sp>
       <p:sp>
         <p:nvSpPr>
-          <p:cNvPr id="15" name="Text 13"/>
-          <p:cNvSpPr/>
-          <p:nvPr/>
-        </p:nvSpPr>
-        <p:spPr>
-          <a:xfrm>
-            <a:off x="960120" y="5806440"/>
-            <a:ext cx="2743200" cy="320040"/>
-          </a:xfrm>
-          <a:prstGeom prst="rect">
-            <a:avLst/>
-          </a:prstGeom>
-          <a:noFill/>
-          <a:ln/>
-        </p:spPr>
-        <p:txBody>
-          <a:bodyPr wrap="square" lIns="0" tIns="0" rIns="0" bIns="0" rtlCol="0" anchor="ctr"/>
-          <a:lstStyle/>
-          <a:p>
-            <a:pPr algn="l" indent="0" marL="0">
-              <a:buNone/>
-            </a:pPr>
-            <a:r>
-              <a:rPr lang="en-US" sz="1200" dirty="0">
-                <a:solidFill>
-                  <a:srgbClr val="8B949E"/>
-                </a:solidFill>
-                <a:latin typeface="Hiragino Sans" pitchFamily="34" charset="0"/>
-                <a:ea typeface="Hiragino Sans" pitchFamily="34" charset="-122"/>
-                <a:cs typeface="Hiragino Sans" pitchFamily="34" charset="-120"/>
-              </a:rPr>
-              <a:t>どんなファイルに分けるか</a:t>
-            </a:r>
-            <a:endParaRPr lang="en-US" sz="1200" dirty="0"/>
-          </a:p>
-        </p:txBody>
-      </p:sp>
-      <p:sp>
-        <p:nvSpPr>
-          <p:cNvPr id="16" name="Shape 14"/>
-          <p:cNvSpPr/>
-          <p:nvPr/>
-        </p:nvSpPr>
-        <p:spPr>
-          <a:xfrm>
-            <a:off x="4407408" y="5349240"/>
-            <a:ext cx="3383280" cy="868680"/>
-          </a:xfrm>
-          <a:prstGeom prst="roundRect">
-            <a:avLst>
-              <a:gd name="adj" fmla="val 8421"/>
-            </a:avLst>
-          </a:prstGeom>
-          <a:solidFill>
-            <a:srgbClr val="161B22"/>
-          </a:solidFill>
-          <a:ln w="12700">
-            <a:solidFill>
-              <a:srgbClr val="30363D"/>
-            </a:solidFill>
-            <a:prstDash val="solid"/>
-          </a:ln>
-          <a:effectLst>
-            <a:outerShdw sx="100000" sy="100000" kx="0" ky="0" algn="bl" rotWithShape="0" blurRad="127000" dist="38100" dir="5400000">
-              <a:srgbClr val="000000">
-                <a:alpha val="35000"/>
-              </a:srgbClr>
-            </a:outerShdw>
-          </a:effectLst>
-        </p:spPr>
-      </p:sp>
-      <p:sp>
-        <p:nvSpPr>
-          <p:cNvPr id="17" name="Text 15"/>
-          <p:cNvSpPr/>
-          <p:nvPr/>
-        </p:nvSpPr>
-        <p:spPr>
-          <a:xfrm>
-            <a:off x="4727448" y="5458968"/>
-            <a:ext cx="2743200" cy="384048"/>
-          </a:xfrm>
-          <a:prstGeom prst="rect">
-            <a:avLst/>
-          </a:prstGeom>
-          <a:noFill/>
-          <a:ln/>
-        </p:spPr>
-        <p:txBody>
-          <a:bodyPr wrap="square" lIns="0" tIns="0" rIns="0" bIns="0" rtlCol="0" anchor="ctr"/>
-          <a:lstStyle/>
-          <a:p>
-            <a:pPr algn="l" indent="0" marL="0">
-              <a:buNone/>
-            </a:pPr>
-            <a:r>
-              <a:rPr lang="en-US" sz="1500" b="1" dirty="0">
-                <a:solidFill>
-                  <a:srgbClr val="F0883E"/>
-                </a:solidFill>
-                <a:latin typeface="Hiragino Sans" pitchFamily="34" charset="0"/>
-                <a:ea typeface="Hiragino Sans" pitchFamily="34" charset="-122"/>
-                <a:cs typeface="Hiragino Sans" pitchFamily="34" charset="-120"/>
-              </a:rPr>
-              <a:t>役割を一言ずつ</a:t>
-            </a:r>
-            <a:endParaRPr lang="en-US" sz="1500" dirty="0"/>
-          </a:p>
-        </p:txBody>
-      </p:sp>
-      <p:sp>
-        <p:nvSpPr>
-          <p:cNvPr id="18" name="Text 16"/>
-          <p:cNvSpPr/>
-          <p:nvPr/>
-        </p:nvSpPr>
-        <p:spPr>
-          <a:xfrm>
-            <a:off x="4727448" y="5806440"/>
-            <a:ext cx="2743200" cy="320040"/>
-          </a:xfrm>
-          <a:prstGeom prst="rect">
-            <a:avLst/>
-          </a:prstGeom>
-          <a:noFill/>
-          <a:ln/>
-        </p:spPr>
-        <p:txBody>
-          <a:bodyPr wrap="square" lIns="0" tIns="0" rIns="0" bIns="0" rtlCol="0" anchor="ctr"/>
-          <a:lstStyle/>
-          <a:p>
-            <a:pPr algn="l" indent="0" marL="0">
-              <a:buNone/>
-            </a:pPr>
-            <a:r>
-              <a:rPr lang="en-US" sz="1200" dirty="0">
-                <a:solidFill>
-                  <a:srgbClr val="8B949E"/>
-                </a:solidFill>
-                <a:latin typeface="Hiragino Sans" pitchFamily="34" charset="0"/>
-                <a:ea typeface="Hiragino Sans" pitchFamily="34" charset="-122"/>
-                <a:cs typeface="Hiragino Sans" pitchFamily="34" charset="-120"/>
-              </a:rPr>
-              <a:t>各ファイルが何を担当するか</a:t>
-            </a:r>
-            <a:endParaRPr lang="en-US" sz="1200" dirty="0"/>
-          </a:p>
-        </p:txBody>
-      </p:sp>
-      <p:sp>
-        <p:nvSpPr>
-          <p:cNvPr id="19" name="Shape 17"/>
-          <p:cNvSpPr/>
-          <p:nvPr/>
-        </p:nvSpPr>
-        <p:spPr>
-          <a:xfrm>
-            <a:off x="8174736" y="5349240"/>
-            <a:ext cx="3383280" cy="868680"/>
-          </a:xfrm>
-          <a:prstGeom prst="roundRect">
-            <a:avLst>
-              <a:gd name="adj" fmla="val 8421"/>
-            </a:avLst>
-          </a:prstGeom>
-          <a:solidFill>
-            <a:srgbClr val="161B22"/>
-          </a:solidFill>
-          <a:ln w="12700">
-            <a:solidFill>
-              <a:srgbClr val="30363D"/>
-            </a:solidFill>
-            <a:prstDash val="solid"/>
-          </a:ln>
-          <a:effectLst>
-            <a:outerShdw sx="100000" sy="100000" kx="0" ky="0" algn="bl" rotWithShape="0" blurRad="127000" dist="38100" dir="5400000">
-              <a:srgbClr val="000000">
-                <a:alpha val="35000"/>
-              </a:srgbClr>
-            </a:outerShdw>
-          </a:effectLst>
-        </p:spPr>
-      </p:sp>
-      <p:sp>
-        <p:nvSpPr>
-          <p:cNvPr id="20" name="Text 18"/>
-          <p:cNvSpPr/>
-          <p:nvPr/>
-        </p:nvSpPr>
-        <p:spPr>
-          <a:xfrm>
-            <a:off x="8494776" y="5458968"/>
-            <a:ext cx="2743200" cy="384048"/>
-          </a:xfrm>
-          <a:prstGeom prst="rect">
-            <a:avLst/>
-          </a:prstGeom>
-          <a:noFill/>
-          <a:ln/>
-        </p:spPr>
-        <p:txBody>
-          <a:bodyPr wrap="square" lIns="0" tIns="0" rIns="0" bIns="0" rtlCol="0" anchor="ctr"/>
-          <a:lstStyle/>
-          <a:p>
-            <a:pPr algn="l" indent="0" marL="0">
-              <a:buNone/>
-            </a:pPr>
-            <a:r>
-              <a:rPr lang="en-US" sz="1500" b="1" dirty="0">
-                <a:solidFill>
-                  <a:srgbClr val="F0883E"/>
-                </a:solidFill>
-                <a:latin typeface="Hiragino Sans" pitchFamily="34" charset="0"/>
-                <a:ea typeface="Hiragino Sans" pitchFamily="34" charset="-122"/>
-                <a:cs typeface="Hiragino Sans" pitchFamily="34" charset="-120"/>
-              </a:rPr>
-              <a:t>「ES Modules で」</a:t>
-            </a:r>
-            <a:endParaRPr lang="en-US" sz="1500" dirty="0"/>
-          </a:p>
-        </p:txBody>
-      </p:sp>
-      <p:sp>
-        <p:nvSpPr>
-          <p:cNvPr id="21" name="Text 19"/>
-          <p:cNvSpPr/>
-          <p:nvPr/>
-        </p:nvSpPr>
-        <p:spPr>
-          <a:xfrm>
-            <a:off x="8494776" y="5806440"/>
-            <a:ext cx="2743200" cy="320040"/>
-          </a:xfrm>
-          <a:prstGeom prst="rect">
-            <a:avLst/>
-          </a:prstGeom>
-          <a:noFill/>
-          <a:ln/>
-        </p:spPr>
-        <p:txBody>
-          <a:bodyPr wrap="square" lIns="0" tIns="0" rIns="0" bIns="0" rtlCol="0" anchor="ctr"/>
-          <a:lstStyle/>
-          <a:p>
-            <a:pPr algn="l" indent="0" marL="0">
-              <a:buNone/>
-            </a:pPr>
-            <a:r>
-              <a:rPr lang="en-US" sz="1200" dirty="0">
-                <a:solidFill>
-                  <a:srgbClr val="8B949E"/>
-                </a:solidFill>
-                <a:latin typeface="Hiragino Sans" pitchFamily="34" charset="0"/>
-                <a:ea typeface="Hiragino Sans" pitchFamily="34" charset="-122"/>
-                <a:cs typeface="Hiragino Sans" pitchFamily="34" charset="-120"/>
-              </a:rPr>
-              <a:t>import / export で分割と伝える</a:t>
-            </a:r>
-            <a:endParaRPr lang="en-US" sz="1200" dirty="0"/>
-          </a:p>
-        </p:txBody>
-      </p:sp>
-      <p:sp>
-        <p:nvSpPr>
-          <p:cNvPr id="22" name="Text 20"/>
+          <p:cNvPr id="16" name="Text 14"/>
           <p:cNvSpPr/>
           <p:nvPr/>
         </p:nvSpPr>
@@ -13466,7 +12768,7 @@
       </p:sp>
       <p:sp>
         <p:nvSpPr>
-          <p:cNvPr id="23" name="Text 21"/>
+          <p:cNvPr id="17" name="Text 15"/>
           <p:cNvSpPr/>
           <p:nvPr/>
         </p:nvSpPr>
@@ -13497,7 +12799,7 @@
                 <a:ea typeface="Menlo" pitchFamily="34" charset="-122"/>
                 <a:cs typeface="Menlo" pitchFamily="34" charset="-120"/>
               </a:rPr>
-              <a:t>19 / 27</a:t>
+              <a:t>19 / 26</a:t>
             </a:r>
             <a:endParaRPr lang="en-US" sz="900" dirty="0"/>
           </a:p>
@@ -14260,7 +13562,7 @@
                 <a:ea typeface="Menlo" pitchFamily="34" charset="-122"/>
                 <a:cs typeface="Menlo" pitchFamily="34" charset="-120"/>
               </a:rPr>
-              <a:t>02 / 27</a:t>
+              <a:t>02 / 26</a:t>
             </a:r>
             <a:endParaRPr lang="en-US" sz="900" dirty="0"/>
           </a:p>
@@ -15658,7 +14960,7 @@
                 <a:ea typeface="Menlo" pitchFamily="34" charset="-122"/>
                 <a:cs typeface="Menlo" pitchFamily="34" charset="-120"/>
               </a:rPr>
-              <a:t>20 / 27</a:t>
+              <a:t>20 / 26</a:t>
             </a:r>
             <a:endParaRPr lang="en-US" sz="900" dirty="0"/>
           </a:p>
@@ -15807,7 +15109,7 @@
                 <a:ea typeface="Hiragino Sans" pitchFamily="34" charset="-122"/>
                 <a:cs typeface="Hiragino Sans" pitchFamily="34" charset="-120"/>
               </a:rPr>
-              <a:t>うまくいかない時のコツ</a:t>
+              <a:t>エージェントへの指示ファイル</a:t>
             </a:r>
             <a:endParaRPr lang="en-US" sz="2900" dirty="0"/>
           </a:p>
@@ -15838,826 +15140,6 @@
               <a:buNone/>
             </a:pPr>
             <a:r>
-              <a:rPr lang="en-US" sz="1600" dirty="0">
-                <a:solidFill>
-                  <a:srgbClr val="C9D1D9"/>
-                </a:solidFill>
-                <a:latin typeface="Hiragino Sans" pitchFamily="34" charset="0"/>
-                <a:ea typeface="Hiragino Sans" pitchFamily="34" charset="-122"/>
-                <a:cs typeface="Hiragino Sans" pitchFamily="34" charset="-120"/>
-              </a:rPr>
-              <a:t>無料・軽量モデルでも、頼み方を工夫すると安定します。</a:t>
-            </a:r>
-            <a:endParaRPr lang="en-US" sz="1600" dirty="0"/>
-          </a:p>
-        </p:txBody>
-      </p:sp>
-      <p:sp>
-        <p:nvSpPr>
-          <p:cNvPr id="6" name="Shape 4"/>
-          <p:cNvSpPr/>
-          <p:nvPr/>
-        </p:nvSpPr>
-        <p:spPr>
-          <a:xfrm>
-            <a:off x="640080" y="2377440"/>
-            <a:ext cx="5303520" cy="1554480"/>
-          </a:xfrm>
-          <a:prstGeom prst="roundRect">
-            <a:avLst>
-              <a:gd name="adj" fmla="val 4706"/>
-            </a:avLst>
-          </a:prstGeom>
-          <a:solidFill>
-            <a:srgbClr val="161B22"/>
-          </a:solidFill>
-          <a:ln w="12700">
-            <a:solidFill>
-              <a:srgbClr val="30363D"/>
-            </a:solidFill>
-            <a:prstDash val="solid"/>
-          </a:ln>
-          <a:effectLst>
-            <a:outerShdw sx="100000" sy="100000" kx="0" ky="0" algn="bl" rotWithShape="0" blurRad="127000" dist="38100" dir="5400000">
-              <a:srgbClr val="000000">
-                <a:alpha val="35000"/>
-              </a:srgbClr>
-            </a:outerShdw>
-          </a:effectLst>
-        </p:spPr>
-      </p:sp>
-      <p:sp>
-        <p:nvSpPr>
-          <p:cNvPr id="7" name="Shape 5"/>
-          <p:cNvSpPr/>
-          <p:nvPr/>
-        </p:nvSpPr>
-        <p:spPr>
-          <a:xfrm>
-            <a:off x="640080" y="2377440"/>
-            <a:ext cx="82296" cy="1554480"/>
-          </a:xfrm>
-          <a:prstGeom prst="rect">
-            <a:avLst/>
-          </a:prstGeom>
-          <a:solidFill>
-            <a:srgbClr val="3FB950"/>
-          </a:solidFill>
-          <a:ln/>
-        </p:spPr>
-      </p:sp>
-      <p:sp>
-        <p:nvSpPr>
-          <p:cNvPr id="8" name="Text 6"/>
-          <p:cNvSpPr/>
-          <p:nvPr/>
-        </p:nvSpPr>
-        <p:spPr>
-          <a:xfrm>
-            <a:off x="1005840" y="2633472"/>
-            <a:ext cx="4663440" cy="457200"/>
-          </a:xfrm>
-          <a:prstGeom prst="rect">
-            <a:avLst/>
-          </a:prstGeom>
-          <a:noFill/>
-          <a:ln/>
-        </p:spPr>
-        <p:txBody>
-          <a:bodyPr wrap="square" lIns="0" tIns="0" rIns="0" bIns="0" rtlCol="0" anchor="ctr"/>
-          <a:lstStyle/>
-          <a:p>
-            <a:pPr algn="l" indent="0" marL="0">
-              <a:buNone/>
-            </a:pPr>
-            <a:r>
-              <a:rPr lang="en-US" sz="1700" b="1" dirty="0">
-                <a:solidFill>
-                  <a:srgbClr val="3FB950"/>
-                </a:solidFill>
-                <a:latin typeface="Hiragino Sans" pitchFamily="34" charset="0"/>
-                <a:ea typeface="Hiragino Sans" pitchFamily="34" charset="-122"/>
-                <a:cs typeface="Hiragino Sans" pitchFamily="34" charset="-120"/>
-              </a:rPr>
-              <a:t>小さく分けて頼む</a:t>
-            </a:r>
-            <a:endParaRPr lang="en-US" sz="1700" dirty="0"/>
-          </a:p>
-        </p:txBody>
-      </p:sp>
-      <p:sp>
-        <p:nvSpPr>
-          <p:cNvPr id="9" name="Text 7"/>
-          <p:cNvSpPr/>
-          <p:nvPr/>
-        </p:nvSpPr>
-        <p:spPr>
-          <a:xfrm>
-            <a:off x="1005840" y="3127248"/>
-            <a:ext cx="4663440" cy="685800"/>
-          </a:xfrm>
-          <a:prstGeom prst="rect">
-            <a:avLst/>
-          </a:prstGeom>
-          <a:noFill/>
-          <a:ln/>
-        </p:spPr>
-        <p:txBody>
-          <a:bodyPr wrap="square" lIns="0" tIns="0" rIns="0" bIns="0" rtlCol="0" anchor="t"/>
-          <a:lstStyle/>
-          <a:p>
-            <a:pPr algn="l" indent="0" marL="0">
-              <a:lnSpc>
-                <a:spcPct val="125000"/>
-              </a:lnSpc>
-              <a:buNone/>
-            </a:pPr>
-            <a:r>
-              <a:rPr lang="en-US" sz="1400" dirty="0">
-                <a:solidFill>
-                  <a:srgbClr val="C9D1D9"/>
-                </a:solidFill>
-                <a:latin typeface="Hiragino Sans" pitchFamily="34" charset="0"/>
-                <a:ea typeface="Hiragino Sans" pitchFamily="34" charset="-122"/>
-                <a:cs typeface="Hiragino Sans" pitchFamily="34" charset="-120"/>
-              </a:rPr>
-              <a:t>一度に全部より、機能ごとに少しずつ。</a:t>
-            </a:r>
-            <a:endParaRPr lang="en-US" sz="1400" dirty="0"/>
-          </a:p>
-        </p:txBody>
-      </p:sp>
-      <p:sp>
-        <p:nvSpPr>
-          <p:cNvPr id="10" name="Shape 8"/>
-          <p:cNvSpPr/>
-          <p:nvPr/>
-        </p:nvSpPr>
-        <p:spPr>
-          <a:xfrm>
-            <a:off x="6245352" y="2377440"/>
-            <a:ext cx="5303520" cy="1554480"/>
-          </a:xfrm>
-          <a:prstGeom prst="roundRect">
-            <a:avLst>
-              <a:gd name="adj" fmla="val 4706"/>
-            </a:avLst>
-          </a:prstGeom>
-          <a:solidFill>
-            <a:srgbClr val="161B22"/>
-          </a:solidFill>
-          <a:ln w="12700">
-            <a:solidFill>
-              <a:srgbClr val="30363D"/>
-            </a:solidFill>
-            <a:prstDash val="solid"/>
-          </a:ln>
-          <a:effectLst>
-            <a:outerShdw sx="100000" sy="100000" kx="0" ky="0" algn="bl" rotWithShape="0" blurRad="127000" dist="38100" dir="5400000">
-              <a:srgbClr val="000000">
-                <a:alpha val="35000"/>
-              </a:srgbClr>
-            </a:outerShdw>
-          </a:effectLst>
-        </p:spPr>
-      </p:sp>
-      <p:sp>
-        <p:nvSpPr>
-          <p:cNvPr id="11" name="Shape 9"/>
-          <p:cNvSpPr/>
-          <p:nvPr/>
-        </p:nvSpPr>
-        <p:spPr>
-          <a:xfrm>
-            <a:off x="6245352" y="2377440"/>
-            <a:ext cx="82296" cy="1554480"/>
-          </a:xfrm>
-          <a:prstGeom prst="rect">
-            <a:avLst/>
-          </a:prstGeom>
-          <a:solidFill>
-            <a:srgbClr val="58A6FF"/>
-          </a:solidFill>
-          <a:ln/>
-        </p:spPr>
-      </p:sp>
-      <p:sp>
-        <p:nvSpPr>
-          <p:cNvPr id="12" name="Text 10"/>
-          <p:cNvSpPr/>
-          <p:nvPr/>
-        </p:nvSpPr>
-        <p:spPr>
-          <a:xfrm>
-            <a:off x="6611112" y="2633472"/>
-            <a:ext cx="4663440" cy="457200"/>
-          </a:xfrm>
-          <a:prstGeom prst="rect">
-            <a:avLst/>
-          </a:prstGeom>
-          <a:noFill/>
-          <a:ln/>
-        </p:spPr>
-        <p:txBody>
-          <a:bodyPr wrap="square" lIns="0" tIns="0" rIns="0" bIns="0" rtlCol="0" anchor="ctr"/>
-          <a:lstStyle/>
-          <a:p>
-            <a:pPr algn="l" indent="0" marL="0">
-              <a:buNone/>
-            </a:pPr>
-            <a:r>
-              <a:rPr lang="en-US" sz="1700" b="1" dirty="0">
-                <a:solidFill>
-                  <a:srgbClr val="58A6FF"/>
-                </a:solidFill>
-                <a:latin typeface="Hiragino Sans" pitchFamily="34" charset="0"/>
-                <a:ea typeface="Hiragino Sans" pitchFamily="34" charset="-122"/>
-                <a:cs typeface="Hiragino Sans" pitchFamily="34" charset="-120"/>
-              </a:rPr>
-              <a:t>具体的に書く</a:t>
-            </a:r>
-            <a:endParaRPr lang="en-US" sz="1700" dirty="0"/>
-          </a:p>
-        </p:txBody>
-      </p:sp>
-      <p:sp>
-        <p:nvSpPr>
-          <p:cNvPr id="13" name="Text 11"/>
-          <p:cNvSpPr/>
-          <p:nvPr/>
-        </p:nvSpPr>
-        <p:spPr>
-          <a:xfrm>
-            <a:off x="6611112" y="3127248"/>
-            <a:ext cx="4663440" cy="685800"/>
-          </a:xfrm>
-          <a:prstGeom prst="rect">
-            <a:avLst/>
-          </a:prstGeom>
-          <a:noFill/>
-          <a:ln/>
-        </p:spPr>
-        <p:txBody>
-          <a:bodyPr wrap="square" lIns="0" tIns="0" rIns="0" bIns="0" rtlCol="0" anchor="t"/>
-          <a:lstStyle/>
-          <a:p>
-            <a:pPr algn="l" indent="0" marL="0">
-              <a:lnSpc>
-                <a:spcPct val="125000"/>
-              </a:lnSpc>
-              <a:buNone/>
-            </a:pPr>
-            <a:r>
-              <a:rPr lang="en-US" sz="1400" dirty="0">
-                <a:solidFill>
-                  <a:srgbClr val="C9D1D9"/>
-                </a:solidFill>
-                <a:latin typeface="Hiragino Sans" pitchFamily="34" charset="0"/>
-                <a:ea typeface="Hiragino Sans" pitchFamily="34" charset="-122"/>
-                <a:cs typeface="Hiragino Sans" pitchFamily="34" charset="-120"/>
-              </a:rPr>
-              <a:t>何を・どんな見た目か、はっきり伝える。</a:t>
-            </a:r>
-            <a:endParaRPr lang="en-US" sz="1400" dirty="0"/>
-          </a:p>
-        </p:txBody>
-      </p:sp>
-      <p:sp>
-        <p:nvSpPr>
-          <p:cNvPr id="14" name="Shape 12"/>
-          <p:cNvSpPr/>
-          <p:nvPr/>
-        </p:nvSpPr>
-        <p:spPr>
-          <a:xfrm>
-            <a:off x="640080" y="4160520"/>
-            <a:ext cx="5303520" cy="1554480"/>
-          </a:xfrm>
-          <a:prstGeom prst="roundRect">
-            <a:avLst>
-              <a:gd name="adj" fmla="val 4706"/>
-            </a:avLst>
-          </a:prstGeom>
-          <a:solidFill>
-            <a:srgbClr val="161B22"/>
-          </a:solidFill>
-          <a:ln w="12700">
-            <a:solidFill>
-              <a:srgbClr val="30363D"/>
-            </a:solidFill>
-            <a:prstDash val="solid"/>
-          </a:ln>
-          <a:effectLst>
-            <a:outerShdw sx="100000" sy="100000" kx="0" ky="0" algn="bl" rotWithShape="0" blurRad="127000" dist="38100" dir="5400000">
-              <a:srgbClr val="000000">
-                <a:alpha val="35000"/>
-              </a:srgbClr>
-            </a:outerShdw>
-          </a:effectLst>
-        </p:spPr>
-      </p:sp>
-      <p:sp>
-        <p:nvSpPr>
-          <p:cNvPr id="15" name="Shape 13"/>
-          <p:cNvSpPr/>
-          <p:nvPr/>
-        </p:nvSpPr>
-        <p:spPr>
-          <a:xfrm>
-            <a:off x="640080" y="4160520"/>
-            <a:ext cx="82296" cy="1554480"/>
-          </a:xfrm>
-          <a:prstGeom prst="rect">
-            <a:avLst/>
-          </a:prstGeom>
-          <a:solidFill>
-            <a:srgbClr val="BC8CFF"/>
-          </a:solidFill>
-          <a:ln/>
-        </p:spPr>
-      </p:sp>
-      <p:sp>
-        <p:nvSpPr>
-          <p:cNvPr id="16" name="Text 14"/>
-          <p:cNvSpPr/>
-          <p:nvPr/>
-        </p:nvSpPr>
-        <p:spPr>
-          <a:xfrm>
-            <a:off x="1005840" y="4416552"/>
-            <a:ext cx="4663440" cy="457200"/>
-          </a:xfrm>
-          <a:prstGeom prst="rect">
-            <a:avLst/>
-          </a:prstGeom>
-          <a:noFill/>
-          <a:ln/>
-        </p:spPr>
-        <p:txBody>
-          <a:bodyPr wrap="square" lIns="0" tIns="0" rIns="0" bIns="0" rtlCol="0" anchor="ctr"/>
-          <a:lstStyle/>
-          <a:p>
-            <a:pPr algn="l" indent="0" marL="0">
-              <a:buNone/>
-            </a:pPr>
-            <a:r>
-              <a:rPr lang="en-US" sz="1700" b="1" dirty="0">
-                <a:solidFill>
-                  <a:srgbClr val="BC8CFF"/>
-                </a:solidFill>
-                <a:latin typeface="Hiragino Sans" pitchFamily="34" charset="0"/>
-                <a:ea typeface="Hiragino Sans" pitchFamily="34" charset="-122"/>
-                <a:cs typeface="Hiragino Sans" pitchFamily="34" charset="-120"/>
-              </a:rPr>
-              <a:t>エラーは貼って渡す</a:t>
-            </a:r>
-            <a:endParaRPr lang="en-US" sz="1700" dirty="0"/>
-          </a:p>
-        </p:txBody>
-      </p:sp>
-      <p:sp>
-        <p:nvSpPr>
-          <p:cNvPr id="17" name="Text 15"/>
-          <p:cNvSpPr/>
-          <p:nvPr/>
-        </p:nvSpPr>
-        <p:spPr>
-          <a:xfrm>
-            <a:off x="1005840" y="4910328"/>
-            <a:ext cx="4663440" cy="685800"/>
-          </a:xfrm>
-          <a:prstGeom prst="rect">
-            <a:avLst/>
-          </a:prstGeom>
-          <a:noFill/>
-          <a:ln/>
-        </p:spPr>
-        <p:txBody>
-          <a:bodyPr wrap="square" lIns="0" tIns="0" rIns="0" bIns="0" rtlCol="0" anchor="t"/>
-          <a:lstStyle/>
-          <a:p>
-            <a:pPr algn="l" indent="0" marL="0">
-              <a:lnSpc>
-                <a:spcPct val="125000"/>
-              </a:lnSpc>
-              <a:buNone/>
-            </a:pPr>
-            <a:r>
-              <a:rPr lang="en-US" sz="1400" dirty="0">
-                <a:solidFill>
-                  <a:srgbClr val="C9D1D9"/>
-                </a:solidFill>
-                <a:latin typeface="Hiragino Sans" pitchFamily="34" charset="0"/>
-                <a:ea typeface="Hiragino Sans" pitchFamily="34" charset="-122"/>
-                <a:cs typeface="Hiragino Sans" pitchFamily="34" charset="-120"/>
-              </a:rPr>
-              <a:t>出たメッセージをそのまま貼り「直して」。</a:t>
-            </a:r>
-            <a:endParaRPr lang="en-US" sz="1400" dirty="0"/>
-          </a:p>
-        </p:txBody>
-      </p:sp>
-      <p:sp>
-        <p:nvSpPr>
-          <p:cNvPr id="18" name="Shape 16"/>
-          <p:cNvSpPr/>
-          <p:nvPr/>
-        </p:nvSpPr>
-        <p:spPr>
-          <a:xfrm>
-            <a:off x="6245352" y="4160520"/>
-            <a:ext cx="5303520" cy="1554480"/>
-          </a:xfrm>
-          <a:prstGeom prst="roundRect">
-            <a:avLst>
-              <a:gd name="adj" fmla="val 4706"/>
-            </a:avLst>
-          </a:prstGeom>
-          <a:solidFill>
-            <a:srgbClr val="161B22"/>
-          </a:solidFill>
-          <a:ln w="12700">
-            <a:solidFill>
-              <a:srgbClr val="30363D"/>
-            </a:solidFill>
-            <a:prstDash val="solid"/>
-          </a:ln>
-          <a:effectLst>
-            <a:outerShdw sx="100000" sy="100000" kx="0" ky="0" algn="bl" rotWithShape="0" blurRad="127000" dist="38100" dir="5400000">
-              <a:srgbClr val="000000">
-                <a:alpha val="35000"/>
-              </a:srgbClr>
-            </a:outerShdw>
-          </a:effectLst>
-        </p:spPr>
-      </p:sp>
-      <p:sp>
-        <p:nvSpPr>
-          <p:cNvPr id="19" name="Shape 17"/>
-          <p:cNvSpPr/>
-          <p:nvPr/>
-        </p:nvSpPr>
-        <p:spPr>
-          <a:xfrm>
-            <a:off x="6245352" y="4160520"/>
-            <a:ext cx="82296" cy="1554480"/>
-          </a:xfrm>
-          <a:prstGeom prst="rect">
-            <a:avLst/>
-          </a:prstGeom>
-          <a:solidFill>
-            <a:srgbClr val="F0883E"/>
-          </a:solidFill>
-          <a:ln/>
-        </p:spPr>
-      </p:sp>
-      <p:sp>
-        <p:nvSpPr>
-          <p:cNvPr id="20" name="Text 18"/>
-          <p:cNvSpPr/>
-          <p:nvPr/>
-        </p:nvSpPr>
-        <p:spPr>
-          <a:xfrm>
-            <a:off x="6611112" y="4416552"/>
-            <a:ext cx="4663440" cy="457200"/>
-          </a:xfrm>
-          <a:prstGeom prst="rect">
-            <a:avLst/>
-          </a:prstGeom>
-          <a:noFill/>
-          <a:ln/>
-        </p:spPr>
-        <p:txBody>
-          <a:bodyPr wrap="square" lIns="0" tIns="0" rIns="0" bIns="0" rtlCol="0" anchor="ctr"/>
-          <a:lstStyle/>
-          <a:p>
-            <a:pPr algn="l" indent="0" marL="0">
-              <a:buNone/>
-            </a:pPr>
-            <a:r>
-              <a:rPr lang="en-US" sz="1700" b="1" dirty="0">
-                <a:solidFill>
-                  <a:srgbClr val="F0883E"/>
-                </a:solidFill>
-                <a:latin typeface="Hiragino Sans" pitchFamily="34" charset="0"/>
-                <a:ea typeface="Hiragino Sans" pitchFamily="34" charset="-122"/>
-                <a:cs typeface="Hiragino Sans" pitchFamily="34" charset="-120"/>
-              </a:rPr>
-              <a:t>もう一度送る</a:t>
-            </a:r>
-            <a:endParaRPr lang="en-US" sz="1700" dirty="0"/>
-          </a:p>
-        </p:txBody>
-      </p:sp>
-      <p:sp>
-        <p:nvSpPr>
-          <p:cNvPr id="21" name="Text 19"/>
-          <p:cNvSpPr/>
-          <p:nvPr/>
-        </p:nvSpPr>
-        <p:spPr>
-          <a:xfrm>
-            <a:off x="6611112" y="4910328"/>
-            <a:ext cx="4663440" cy="685800"/>
-          </a:xfrm>
-          <a:prstGeom prst="rect">
-            <a:avLst/>
-          </a:prstGeom>
-          <a:noFill/>
-          <a:ln/>
-        </p:spPr>
-        <p:txBody>
-          <a:bodyPr wrap="square" lIns="0" tIns="0" rIns="0" bIns="0" rtlCol="0" anchor="t"/>
-          <a:lstStyle/>
-          <a:p>
-            <a:pPr algn="l" indent="0" marL="0">
-              <a:lnSpc>
-                <a:spcPct val="125000"/>
-              </a:lnSpc>
-              <a:buNone/>
-            </a:pPr>
-            <a:r>
-              <a:rPr lang="en-US" sz="1400" dirty="0">
-                <a:solidFill>
-                  <a:srgbClr val="C9D1D9"/>
-                </a:solidFill>
-                <a:latin typeface="Hiragino Sans" pitchFamily="34" charset="0"/>
-                <a:ea typeface="Hiragino Sans" pitchFamily="34" charset="-122"/>
-                <a:cs typeface="Hiragino Sans" pitchFamily="34" charset="-120"/>
-              </a:rPr>
-              <a:t>Router が別の無料モデルに切り替わることも。</a:t>
-            </a:r>
-            <a:endParaRPr lang="en-US" sz="1400" dirty="0"/>
-          </a:p>
-        </p:txBody>
-      </p:sp>
-      <p:sp>
-        <p:nvSpPr>
-          <p:cNvPr id="22" name="Text 20"/>
-          <p:cNvSpPr/>
-          <p:nvPr/>
-        </p:nvSpPr>
-        <p:spPr>
-          <a:xfrm>
-            <a:off x="640080" y="6419088"/>
-            <a:ext cx="7315200" cy="274320"/>
-          </a:xfrm>
-          <a:prstGeom prst="rect">
-            <a:avLst/>
-          </a:prstGeom>
-          <a:noFill/>
-          <a:ln/>
-        </p:spPr>
-        <p:txBody>
-          <a:bodyPr wrap="square" lIns="0" tIns="0" rIns="0" bIns="0" rtlCol="0" anchor="ctr"/>
-          <a:lstStyle/>
-          <a:p>
-            <a:pPr algn="l" indent="0" marL="0">
-              <a:buNone/>
-            </a:pPr>
-            <a:r>
-              <a:rPr lang="en-US" sz="900" dirty="0">
-                <a:solidFill>
-                  <a:srgbClr val="8B949E"/>
-                </a:solidFill>
-                <a:latin typeface="Hiragino Sans" pitchFamily="34" charset="0"/>
-                <a:ea typeface="Hiragino Sans" pitchFamily="34" charset="-122"/>
-                <a:cs typeface="Hiragino Sans" pitchFamily="34" charset="-120"/>
-              </a:rPr>
-              <a:t>コーディングエージェント入門</a:t>
-            </a:r>
-            <a:pPr algn="l" indent="0" marL="0">
-              <a:buNone/>
-            </a:pPr>
-            <a:r>
-              <a:rPr lang="en-US" sz="900" dirty="0">
-                <a:solidFill>
-                  <a:srgbClr val="30363D"/>
-                </a:solidFill>
-                <a:latin typeface="Hiragino Sans" pitchFamily="34" charset="0"/>
-                <a:ea typeface="Hiragino Sans" pitchFamily="34" charset="-122"/>
-                <a:cs typeface="Hiragino Sans" pitchFamily="34" charset="-120"/>
-              </a:rPr>
-              <a:t>  ·  OpenCode × OpenRouter</a:t>
-            </a:r>
-            <a:endParaRPr lang="en-US" sz="900" dirty="0"/>
-          </a:p>
-        </p:txBody>
-      </p:sp>
-      <p:sp>
-        <p:nvSpPr>
-          <p:cNvPr id="23" name="Text 21"/>
-          <p:cNvSpPr/>
-          <p:nvPr/>
-        </p:nvSpPr>
-        <p:spPr>
-          <a:xfrm>
-            <a:off x="9720072" y="6419088"/>
-            <a:ext cx="1828800" cy="274320"/>
-          </a:xfrm>
-          <a:prstGeom prst="rect">
-            <a:avLst/>
-          </a:prstGeom>
-          <a:noFill/>
-          <a:ln/>
-        </p:spPr>
-        <p:txBody>
-          <a:bodyPr wrap="square" lIns="0" tIns="0" rIns="0" bIns="0" rtlCol="0" anchor="ctr"/>
-          <a:lstStyle/>
-          <a:p>
-            <a:pPr algn="r" indent="0" marL="0">
-              <a:buNone/>
-            </a:pPr>
-            <a:r>
-              <a:rPr lang="en-US" sz="900" dirty="0">
-                <a:solidFill>
-                  <a:srgbClr val="8B949E"/>
-                </a:solidFill>
-                <a:latin typeface="Menlo" pitchFamily="34" charset="0"/>
-                <a:ea typeface="Menlo" pitchFamily="34" charset="-122"/>
-                <a:cs typeface="Menlo" pitchFamily="34" charset="-120"/>
-              </a:rPr>
-              <a:t>21 / 27</a:t>
-            </a:r>
-            <a:endParaRPr lang="en-US" sz="900" dirty="0"/>
-          </a:p>
-        </p:txBody>
-      </p:sp>
-    </p:spTree>
-  </p:cSld>
-  <p:clrMapOvr>
-    <a:masterClrMapping/>
-  </p:clrMapOvr>
-</p:sld>
-</file>
-
-<file path=ppt/slides/slide22.xml><?xml version="1.0" encoding="utf-8"?>
-<p:sld xmlns:a="http://schemas.openxmlformats.org/drawingml/2006/main" xmlns:r="http://schemas.openxmlformats.org/officeDocument/2006/relationships" xmlns:p="http://schemas.openxmlformats.org/presentationml/2006/main">
-  <p:cSld name="Slide 22">
-    <p:bg>
-      <p:bgPr>
-        <a:solidFill>
-          <a:srgbClr val="0D1117"/>
-        </a:solidFill>
-      </p:bgPr>
-    </p:bg>
-    <p:spTree>
-      <p:nvGrpSpPr>
-        <p:cNvPr id="1" name=""/>
-        <p:cNvGrpSpPr/>
-        <p:nvPr/>
-      </p:nvGrpSpPr>
-      <p:grpSpPr>
-        <a:xfrm>
-          <a:off x="0" y="0"/>
-          <a:ext cx="0" cy="0"/>
-          <a:chOff x="0" y="0"/>
-          <a:chExt cx="0" cy="0"/>
-        </a:xfrm>
-      </p:grpSpPr>
-      <p:sp>
-        <p:nvSpPr>
-          <p:cNvPr id="2" name="Text 0"/>
-          <p:cNvSpPr/>
-          <p:nvPr/>
-        </p:nvSpPr>
-        <p:spPr>
-          <a:xfrm>
-            <a:off x="640080" y="384048"/>
-            <a:ext cx="5486400" cy="274320"/>
-          </a:xfrm>
-          <a:prstGeom prst="rect">
-            <a:avLst/>
-          </a:prstGeom>
-          <a:noFill/>
-          <a:ln/>
-        </p:spPr>
-        <p:txBody>
-          <a:bodyPr wrap="square" lIns="0" tIns="0" rIns="0" bIns="0" rtlCol="0" anchor="ctr"/>
-          <a:lstStyle/>
-          <a:p>
-            <a:pPr algn="l" indent="0" marL="0">
-              <a:buNone/>
-            </a:pPr>
-            <a:r>
-              <a:rPr lang="en-US" sz="1100" b="1" spc="200" kern="0" dirty="0">
-                <a:solidFill>
-                  <a:srgbClr val="F0883E"/>
-                </a:solidFill>
-                <a:latin typeface="Menlo" pitchFamily="34" charset="0"/>
-                <a:ea typeface="Menlo" pitchFamily="34" charset="-122"/>
-                <a:cs typeface="Menlo" pitchFamily="34" charset="-120"/>
-              </a:rPr>
-              <a:t>BUILD</a:t>
-            </a:r>
-            <a:endParaRPr lang="en-US" sz="1100" dirty="0"/>
-          </a:p>
-        </p:txBody>
-      </p:sp>
-      <p:sp>
-        <p:nvSpPr>
-          <p:cNvPr id="3" name="Text 1"/>
-          <p:cNvSpPr/>
-          <p:nvPr/>
-        </p:nvSpPr>
-        <p:spPr>
-          <a:xfrm>
-            <a:off x="640080" y="713232"/>
-            <a:ext cx="365760" cy="640080"/>
-          </a:xfrm>
-          <a:prstGeom prst="rect">
-            <a:avLst/>
-          </a:prstGeom>
-          <a:noFill/>
-          <a:ln/>
-        </p:spPr>
-        <p:txBody>
-          <a:bodyPr wrap="square" lIns="0" tIns="0" rIns="0" bIns="0" rtlCol="0" anchor="ctr"/>
-          <a:lstStyle/>
-          <a:p>
-            <a:pPr algn="l" indent="0" marL="0">
-              <a:buNone/>
-            </a:pPr>
-            <a:r>
-              <a:rPr lang="en-US" sz="3000" b="1" dirty="0">
-                <a:solidFill>
-                  <a:srgbClr val="F0883E"/>
-                </a:solidFill>
-                <a:latin typeface="Menlo" pitchFamily="34" charset="0"/>
-                <a:ea typeface="Menlo" pitchFamily="34" charset="-122"/>
-                <a:cs typeface="Menlo" pitchFamily="34" charset="-120"/>
-              </a:rPr>
-              <a:t>&gt;</a:t>
-            </a:r>
-            <a:endParaRPr lang="en-US" sz="3000" dirty="0"/>
-          </a:p>
-        </p:txBody>
-      </p:sp>
-      <p:sp>
-        <p:nvSpPr>
-          <p:cNvPr id="4" name="Text 2"/>
-          <p:cNvSpPr/>
-          <p:nvPr/>
-        </p:nvSpPr>
-        <p:spPr>
-          <a:xfrm>
-            <a:off x="1024128" y="713232"/>
-            <a:ext cx="10524744" cy="640080"/>
-          </a:xfrm>
-          <a:prstGeom prst="rect">
-            <a:avLst/>
-          </a:prstGeom>
-          <a:noFill/>
-          <a:ln/>
-        </p:spPr>
-        <p:txBody>
-          <a:bodyPr wrap="square" lIns="0" tIns="0" rIns="0" bIns="0" rtlCol="0" anchor="ctr"/>
-          <a:lstStyle/>
-          <a:p>
-            <a:pPr algn="l" indent="0" marL="0">
-              <a:buNone/>
-            </a:pPr>
-            <a:r>
-              <a:rPr lang="en-US" sz="2900" b="1" dirty="0">
-                <a:solidFill>
-                  <a:srgbClr val="E6EDF3"/>
-                </a:solidFill>
-                <a:latin typeface="Hiragino Sans" pitchFamily="34" charset="0"/>
-                <a:ea typeface="Hiragino Sans" pitchFamily="34" charset="-122"/>
-                <a:cs typeface="Hiragino Sans" pitchFamily="34" charset="-120"/>
-              </a:rPr>
-              <a:t>エージェントへの指示ファイル</a:t>
-            </a:r>
-            <a:endParaRPr lang="en-US" sz="2900" dirty="0"/>
-          </a:p>
-        </p:txBody>
-      </p:sp>
-      <p:sp>
-        <p:nvSpPr>
-          <p:cNvPr id="5" name="Text 3"/>
-          <p:cNvSpPr/>
-          <p:nvPr/>
-        </p:nvSpPr>
-        <p:spPr>
-          <a:xfrm>
-            <a:off x="640080" y="1783080"/>
-            <a:ext cx="10908792" cy="457200"/>
-          </a:xfrm>
-          <a:prstGeom prst="rect">
-            <a:avLst/>
-          </a:prstGeom>
-          <a:noFill/>
-          <a:ln/>
-        </p:spPr>
-        <p:txBody>
-          <a:bodyPr wrap="square" lIns="0" tIns="0" rIns="0" bIns="0" rtlCol="0" anchor="ctr"/>
-          <a:lstStyle/>
-          <a:p>
-            <a:pPr algn="l" indent="0" marL="0">
-              <a:buNone/>
-            </a:pPr>
-            <a:r>
               <a:rPr lang="en-US" sz="1650" dirty="0">
                 <a:solidFill>
                   <a:srgbClr val="C9D1D9"/>
@@ -16674,7 +15156,7 @@
       </p:sp>
       <p:graphicFrame>
         <p:nvGraphicFramePr>
-          <p:cNvPr id="23" name="Table 0"/>
+          <p:cNvPr id="22" name="Table 0"/>
           <p:cNvGraphicFramePr>
             <a:graphicFrameLocks noGrp="1"/>
           </p:cNvGraphicFramePr>
@@ -17753,7 +16235,590 @@
                 <a:ea typeface="Menlo" pitchFamily="34" charset="-122"/>
                 <a:cs typeface="Menlo" pitchFamily="34" charset="-120"/>
               </a:rPr>
-              <a:t>22 / 27</a:t>
+              <a:t>21 / 26</a:t>
+            </a:r>
+            <a:endParaRPr lang="en-US" sz="900" dirty="0"/>
+          </a:p>
+        </p:txBody>
+      </p:sp>
+    </p:spTree>
+  </p:cSld>
+  <p:clrMapOvr>
+    <a:masterClrMapping/>
+  </p:clrMapOvr>
+</p:sld>
+</file>
+
+<file path=ppt/slides/slide22.xml><?xml version="1.0" encoding="utf-8"?>
+<p:sld xmlns:a="http://schemas.openxmlformats.org/drawingml/2006/main" xmlns:r="http://schemas.openxmlformats.org/officeDocument/2006/relationships" xmlns:p="http://schemas.openxmlformats.org/presentationml/2006/main">
+  <p:cSld name="Slide 22">
+    <p:bg>
+      <p:bgPr>
+        <a:solidFill>
+          <a:srgbClr val="0D1117"/>
+        </a:solidFill>
+      </p:bgPr>
+    </p:bg>
+    <p:spTree>
+      <p:nvGrpSpPr>
+        <p:cNvPr id="1" name=""/>
+        <p:cNvGrpSpPr/>
+        <p:nvPr/>
+      </p:nvGrpSpPr>
+      <p:grpSpPr>
+        <a:xfrm>
+          <a:off x="0" y="0"/>
+          <a:ext cx="0" cy="0"/>
+          <a:chOff x="0" y="0"/>
+          <a:chExt cx="0" cy="0"/>
+        </a:xfrm>
+      </p:grpSpPr>
+      <p:sp>
+        <p:nvSpPr>
+          <p:cNvPr id="2" name="Text 0"/>
+          <p:cNvSpPr/>
+          <p:nvPr/>
+        </p:nvSpPr>
+        <p:spPr>
+          <a:xfrm>
+            <a:off x="640080" y="384048"/>
+            <a:ext cx="5486400" cy="274320"/>
+          </a:xfrm>
+          <a:prstGeom prst="rect">
+            <a:avLst/>
+          </a:prstGeom>
+          <a:noFill/>
+          <a:ln/>
+        </p:spPr>
+        <p:txBody>
+          <a:bodyPr wrap="square" lIns="0" tIns="0" rIns="0" bIns="0" rtlCol="0" anchor="ctr"/>
+          <a:lstStyle/>
+          <a:p>
+            <a:pPr algn="l" indent="0" marL="0">
+              <a:buNone/>
+            </a:pPr>
+            <a:r>
+              <a:rPr lang="en-US" sz="1100" b="1" spc="200" kern="0" dirty="0">
+                <a:solidFill>
+                  <a:srgbClr val="F0883E"/>
+                </a:solidFill>
+                <a:latin typeface="Menlo" pitchFamily="34" charset="0"/>
+                <a:ea typeface="Menlo" pitchFamily="34" charset="-122"/>
+                <a:cs typeface="Menlo" pitchFamily="34" charset="-120"/>
+              </a:rPr>
+              <a:t>BUILD</a:t>
+            </a:r>
+            <a:endParaRPr lang="en-US" sz="1100" dirty="0"/>
+          </a:p>
+        </p:txBody>
+      </p:sp>
+      <p:sp>
+        <p:nvSpPr>
+          <p:cNvPr id="3" name="Text 1"/>
+          <p:cNvSpPr/>
+          <p:nvPr/>
+        </p:nvSpPr>
+        <p:spPr>
+          <a:xfrm>
+            <a:off x="640080" y="713232"/>
+            <a:ext cx="365760" cy="640080"/>
+          </a:xfrm>
+          <a:prstGeom prst="rect">
+            <a:avLst/>
+          </a:prstGeom>
+          <a:noFill/>
+          <a:ln/>
+        </p:spPr>
+        <p:txBody>
+          <a:bodyPr wrap="square" lIns="0" tIns="0" rIns="0" bIns="0" rtlCol="0" anchor="ctr"/>
+          <a:lstStyle/>
+          <a:p>
+            <a:pPr algn="l" indent="0" marL="0">
+              <a:buNone/>
+            </a:pPr>
+            <a:r>
+              <a:rPr lang="en-US" sz="3000" b="1" dirty="0">
+                <a:solidFill>
+                  <a:srgbClr val="F0883E"/>
+                </a:solidFill>
+                <a:latin typeface="Menlo" pitchFamily="34" charset="0"/>
+                <a:ea typeface="Menlo" pitchFamily="34" charset="-122"/>
+                <a:cs typeface="Menlo" pitchFamily="34" charset="-120"/>
+              </a:rPr>
+              <a:t>&gt;</a:t>
+            </a:r>
+            <a:endParaRPr lang="en-US" sz="3000" dirty="0"/>
+          </a:p>
+        </p:txBody>
+      </p:sp>
+      <p:sp>
+        <p:nvSpPr>
+          <p:cNvPr id="4" name="Text 2"/>
+          <p:cNvSpPr/>
+          <p:nvPr/>
+        </p:nvSpPr>
+        <p:spPr>
+          <a:xfrm>
+            <a:off x="1024128" y="713232"/>
+            <a:ext cx="10524744" cy="640080"/>
+          </a:xfrm>
+          <a:prstGeom prst="rect">
+            <a:avLst/>
+          </a:prstGeom>
+          <a:noFill/>
+          <a:ln/>
+        </p:spPr>
+        <p:txBody>
+          <a:bodyPr wrap="square" lIns="0" tIns="0" rIns="0" bIns="0" rtlCol="0" anchor="ctr"/>
+          <a:lstStyle/>
+          <a:p>
+            <a:pPr algn="l" indent="0" marL="0">
+              <a:buNone/>
+            </a:pPr>
+            <a:r>
+              <a:rPr lang="en-US" sz="2900" b="1" dirty="0">
+                <a:solidFill>
+                  <a:srgbClr val="E6EDF3"/>
+                </a:solidFill>
+                <a:latin typeface="Hiragino Sans" pitchFamily="34" charset="0"/>
+                <a:ea typeface="Hiragino Sans" pitchFamily="34" charset="-122"/>
+                <a:cs typeface="Hiragino Sans" pitchFamily="34" charset="-120"/>
+              </a:rPr>
+              <a:t>無料枠の上限に注意</a:t>
+            </a:r>
+            <a:endParaRPr lang="en-US" sz="2900" dirty="0"/>
+          </a:p>
+        </p:txBody>
+      </p:sp>
+      <p:sp>
+        <p:nvSpPr>
+          <p:cNvPr id="5" name="Text 3"/>
+          <p:cNvSpPr/>
+          <p:nvPr/>
+        </p:nvSpPr>
+        <p:spPr>
+          <a:xfrm>
+            <a:off x="640080" y="1783080"/>
+            <a:ext cx="10908792" cy="457200"/>
+          </a:xfrm>
+          <a:prstGeom prst="rect">
+            <a:avLst/>
+          </a:prstGeom>
+          <a:noFill/>
+          <a:ln/>
+        </p:spPr>
+        <p:txBody>
+          <a:bodyPr wrap="square" lIns="0" tIns="0" rIns="0" bIns="0" rtlCol="0" anchor="ctr"/>
+          <a:lstStyle/>
+          <a:p>
+            <a:pPr algn="l" indent="0" marL="0">
+              <a:buNone/>
+            </a:pPr>
+            <a:r>
+              <a:rPr lang="en-US" sz="1600" dirty="0">
+                <a:solidFill>
+                  <a:srgbClr val="C9D1D9"/>
+                </a:solidFill>
+                <a:latin typeface="Hiragino Sans" pitchFamily="34" charset="0"/>
+                <a:ea typeface="Hiragino Sans" pitchFamily="34" charset="-122"/>
+                <a:cs typeface="Hiragino Sans" pitchFamily="34" charset="-120"/>
+              </a:rPr>
+              <a:t>未課金アカウントの無料モデルには、OpenRouter の利用上限があります。</a:t>
+            </a:r>
+            <a:endParaRPr lang="en-US" sz="1600" dirty="0"/>
+          </a:p>
+        </p:txBody>
+      </p:sp>
+      <p:sp>
+        <p:nvSpPr>
+          <p:cNvPr id="6" name="Shape 4"/>
+          <p:cNvSpPr/>
+          <p:nvPr/>
+        </p:nvSpPr>
+        <p:spPr>
+          <a:xfrm>
+            <a:off x="1248156" y="2560320"/>
+            <a:ext cx="4572000" cy="2194560"/>
+          </a:xfrm>
+          <a:prstGeom prst="roundRect">
+            <a:avLst>
+              <a:gd name="adj" fmla="val 3333"/>
+            </a:avLst>
+          </a:prstGeom>
+          <a:solidFill>
+            <a:srgbClr val="1C2128"/>
+          </a:solidFill>
+          <a:ln w="12700">
+            <a:solidFill>
+              <a:srgbClr val="30363D"/>
+            </a:solidFill>
+            <a:prstDash val="solid"/>
+          </a:ln>
+          <a:effectLst>
+            <a:outerShdw sx="100000" sy="100000" kx="0" ky="0" algn="bl" rotWithShape="0" blurRad="127000" dist="38100" dir="5400000">
+              <a:srgbClr val="000000">
+                <a:alpha val="35000"/>
+              </a:srgbClr>
+            </a:outerShdw>
+          </a:effectLst>
+        </p:spPr>
+      </p:sp>
+      <p:sp>
+        <p:nvSpPr>
+          <p:cNvPr id="7" name="Shape 5"/>
+          <p:cNvSpPr/>
+          <p:nvPr/>
+        </p:nvSpPr>
+        <p:spPr>
+          <a:xfrm>
+            <a:off x="1248156" y="2560320"/>
+            <a:ext cx="4572000" cy="91440"/>
+          </a:xfrm>
+          <a:prstGeom prst="rect">
+            <a:avLst/>
+          </a:prstGeom>
+          <a:solidFill>
+            <a:srgbClr val="3FB950"/>
+          </a:solidFill>
+          <a:ln/>
+        </p:spPr>
+      </p:sp>
+      <p:sp>
+        <p:nvSpPr>
+          <p:cNvPr id="8" name="Text 6"/>
+          <p:cNvSpPr/>
+          <p:nvPr/>
+        </p:nvSpPr>
+        <p:spPr>
+          <a:xfrm>
+            <a:off x="1248156" y="2926080"/>
+            <a:ext cx="4572000" cy="1097280"/>
+          </a:xfrm>
+          <a:prstGeom prst="rect">
+            <a:avLst/>
+          </a:prstGeom>
+          <a:noFill/>
+          <a:ln/>
+        </p:spPr>
+        <p:txBody>
+          <a:bodyPr wrap="square" lIns="0" tIns="0" rIns="0" bIns="0" rtlCol="0" anchor="ctr"/>
+          <a:lstStyle/>
+          <a:p>
+            <a:pPr algn="ctr" indent="0" marL="0">
+              <a:buNone/>
+            </a:pPr>
+            <a:r>
+              <a:rPr lang="en-US" sz="7200" b="1" dirty="0">
+                <a:solidFill>
+                  <a:srgbClr val="3FB950"/>
+                </a:solidFill>
+                <a:latin typeface="Hiragino Sans" pitchFamily="34" charset="0"/>
+                <a:ea typeface="Hiragino Sans" pitchFamily="34" charset="-122"/>
+                <a:cs typeface="Hiragino Sans" pitchFamily="34" charset="-120"/>
+              </a:rPr>
+              <a:t>50</a:t>
+            </a:r>
+            <a:endParaRPr lang="en-US" sz="7200" dirty="0"/>
+          </a:p>
+        </p:txBody>
+      </p:sp>
+      <p:sp>
+        <p:nvSpPr>
+          <p:cNvPr id="9" name="Text 7"/>
+          <p:cNvSpPr/>
+          <p:nvPr/>
+        </p:nvSpPr>
+        <p:spPr>
+          <a:xfrm>
+            <a:off x="1248156" y="4069080"/>
+            <a:ext cx="4572000" cy="457200"/>
+          </a:xfrm>
+          <a:prstGeom prst="rect">
+            <a:avLst/>
+          </a:prstGeom>
+          <a:noFill/>
+          <a:ln/>
+        </p:spPr>
+        <p:txBody>
+          <a:bodyPr wrap="square" lIns="0" tIns="0" rIns="0" bIns="0" rtlCol="0" anchor="ctr"/>
+          <a:lstStyle/>
+          <a:p>
+            <a:pPr algn="ctr" indent="0" marL="0">
+              <a:buNone/>
+            </a:pPr>
+            <a:r>
+              <a:rPr lang="en-US" sz="1700" dirty="0">
+                <a:solidFill>
+                  <a:srgbClr val="C9D1D9"/>
+                </a:solidFill>
+                <a:latin typeface="Hiragino Sans" pitchFamily="34" charset="0"/>
+                <a:ea typeface="Hiragino Sans" pitchFamily="34" charset="-122"/>
+                <a:cs typeface="Hiragino Sans" pitchFamily="34" charset="-120"/>
+              </a:rPr>
+              <a:t>リクエスト / 日</a:t>
+            </a:r>
+            <a:endParaRPr lang="en-US" sz="1700" dirty="0"/>
+          </a:p>
+        </p:txBody>
+      </p:sp>
+      <p:sp>
+        <p:nvSpPr>
+          <p:cNvPr id="10" name="Shape 8"/>
+          <p:cNvSpPr/>
+          <p:nvPr/>
+        </p:nvSpPr>
+        <p:spPr>
+          <a:xfrm>
+            <a:off x="6368796" y="2560320"/>
+            <a:ext cx="4572000" cy="2194560"/>
+          </a:xfrm>
+          <a:prstGeom prst="roundRect">
+            <a:avLst>
+              <a:gd name="adj" fmla="val 3333"/>
+            </a:avLst>
+          </a:prstGeom>
+          <a:solidFill>
+            <a:srgbClr val="1C2128"/>
+          </a:solidFill>
+          <a:ln w="12700">
+            <a:solidFill>
+              <a:srgbClr val="30363D"/>
+            </a:solidFill>
+            <a:prstDash val="solid"/>
+          </a:ln>
+          <a:effectLst>
+            <a:outerShdw sx="100000" sy="100000" kx="0" ky="0" algn="bl" rotWithShape="0" blurRad="127000" dist="38100" dir="5400000">
+              <a:srgbClr val="000000">
+                <a:alpha val="35000"/>
+              </a:srgbClr>
+            </a:outerShdw>
+          </a:effectLst>
+        </p:spPr>
+      </p:sp>
+      <p:sp>
+        <p:nvSpPr>
+          <p:cNvPr id="11" name="Shape 9"/>
+          <p:cNvSpPr/>
+          <p:nvPr/>
+        </p:nvSpPr>
+        <p:spPr>
+          <a:xfrm>
+            <a:off x="6368796" y="2560320"/>
+            <a:ext cx="4572000" cy="91440"/>
+          </a:xfrm>
+          <a:prstGeom prst="rect">
+            <a:avLst/>
+          </a:prstGeom>
+          <a:solidFill>
+            <a:srgbClr val="58A6FF"/>
+          </a:solidFill>
+          <a:ln/>
+        </p:spPr>
+      </p:sp>
+      <p:sp>
+        <p:nvSpPr>
+          <p:cNvPr id="12" name="Text 10"/>
+          <p:cNvSpPr/>
+          <p:nvPr/>
+        </p:nvSpPr>
+        <p:spPr>
+          <a:xfrm>
+            <a:off x="6368796" y="2926080"/>
+            <a:ext cx="4572000" cy="1097280"/>
+          </a:xfrm>
+          <a:prstGeom prst="rect">
+            <a:avLst/>
+          </a:prstGeom>
+          <a:noFill/>
+          <a:ln/>
+        </p:spPr>
+        <p:txBody>
+          <a:bodyPr wrap="square" lIns="0" tIns="0" rIns="0" bIns="0" rtlCol="0" anchor="ctr"/>
+          <a:lstStyle/>
+          <a:p>
+            <a:pPr algn="ctr" indent="0" marL="0">
+              <a:buNone/>
+            </a:pPr>
+            <a:r>
+              <a:rPr lang="en-US" sz="7200" b="1" dirty="0">
+                <a:solidFill>
+                  <a:srgbClr val="58A6FF"/>
+                </a:solidFill>
+                <a:latin typeface="Hiragino Sans" pitchFamily="34" charset="0"/>
+                <a:ea typeface="Hiragino Sans" pitchFamily="34" charset="-122"/>
+                <a:cs typeface="Hiragino Sans" pitchFamily="34" charset="-120"/>
+              </a:rPr>
+              <a:t>20</a:t>
+            </a:r>
+            <a:endParaRPr lang="en-US" sz="7200" dirty="0"/>
+          </a:p>
+        </p:txBody>
+      </p:sp>
+      <p:sp>
+        <p:nvSpPr>
+          <p:cNvPr id="13" name="Text 11"/>
+          <p:cNvSpPr/>
+          <p:nvPr/>
+        </p:nvSpPr>
+        <p:spPr>
+          <a:xfrm>
+            <a:off x="6368796" y="4069080"/>
+            <a:ext cx="4572000" cy="457200"/>
+          </a:xfrm>
+          <a:prstGeom prst="rect">
+            <a:avLst/>
+          </a:prstGeom>
+          <a:noFill/>
+          <a:ln/>
+        </p:spPr>
+        <p:txBody>
+          <a:bodyPr wrap="square" lIns="0" tIns="0" rIns="0" bIns="0" rtlCol="0" anchor="ctr"/>
+          <a:lstStyle/>
+          <a:p>
+            <a:pPr algn="ctr" indent="0" marL="0">
+              <a:buNone/>
+            </a:pPr>
+            <a:r>
+              <a:rPr lang="en-US" sz="1700" dirty="0">
+                <a:solidFill>
+                  <a:srgbClr val="C9D1D9"/>
+                </a:solidFill>
+                <a:latin typeface="Hiragino Sans" pitchFamily="34" charset="0"/>
+                <a:ea typeface="Hiragino Sans" pitchFamily="34" charset="-122"/>
+                <a:cs typeface="Hiragino Sans" pitchFamily="34" charset="-120"/>
+              </a:rPr>
+              <a:t>リクエスト / 分</a:t>
+            </a:r>
+            <a:endParaRPr lang="en-US" sz="1700" dirty="0"/>
+          </a:p>
+        </p:txBody>
+      </p:sp>
+      <p:sp>
+        <p:nvSpPr>
+          <p:cNvPr id="14" name="Text 12"/>
+          <p:cNvSpPr/>
+          <p:nvPr/>
+        </p:nvSpPr>
+        <p:spPr>
+          <a:xfrm>
+            <a:off x="640080" y="5074920"/>
+            <a:ext cx="10908792" cy="457200"/>
+          </a:xfrm>
+          <a:prstGeom prst="rect">
+            <a:avLst/>
+          </a:prstGeom>
+          <a:noFill/>
+          <a:ln/>
+        </p:spPr>
+        <p:txBody>
+          <a:bodyPr wrap="square" lIns="0" tIns="0" rIns="0" bIns="0" rtlCol="0" anchor="ctr"/>
+          <a:lstStyle/>
+          <a:p>
+            <a:pPr algn="ctr" indent="0" marL="0">
+              <a:buNone/>
+            </a:pPr>
+            <a:r>
+              <a:rPr lang="en-US" sz="1500" dirty="0">
+                <a:solidFill>
+                  <a:srgbClr val="8B949E"/>
+                </a:solidFill>
+                <a:latin typeface="Hiragino Sans" pitchFamily="34" charset="0"/>
+                <a:ea typeface="Hiragino Sans" pitchFamily="34" charset="-122"/>
+                <a:cs typeface="Hiragino Sans" pitchFamily="34" charset="-120"/>
+              </a:rPr>
+              <a:t>上限に当たったら、少し時間をおいてから再開しましょう。</a:t>
+            </a:r>
+            <a:endParaRPr lang="en-US" sz="1500" dirty="0"/>
+          </a:p>
+        </p:txBody>
+      </p:sp>
+      <p:sp>
+        <p:nvSpPr>
+          <p:cNvPr id="15" name="Text 13"/>
+          <p:cNvSpPr/>
+          <p:nvPr/>
+        </p:nvSpPr>
+        <p:spPr>
+          <a:xfrm>
+            <a:off x="640080" y="6419088"/>
+            <a:ext cx="7315200" cy="274320"/>
+          </a:xfrm>
+          <a:prstGeom prst="rect">
+            <a:avLst/>
+          </a:prstGeom>
+          <a:noFill/>
+          <a:ln/>
+        </p:spPr>
+        <p:txBody>
+          <a:bodyPr wrap="square" lIns="0" tIns="0" rIns="0" bIns="0" rtlCol="0" anchor="ctr"/>
+          <a:lstStyle/>
+          <a:p>
+            <a:pPr algn="l" indent="0" marL="0">
+              <a:buNone/>
+            </a:pPr>
+            <a:r>
+              <a:rPr lang="en-US" sz="900" dirty="0">
+                <a:solidFill>
+                  <a:srgbClr val="8B949E"/>
+                </a:solidFill>
+                <a:latin typeface="Hiragino Sans" pitchFamily="34" charset="0"/>
+                <a:ea typeface="Hiragino Sans" pitchFamily="34" charset="-122"/>
+                <a:cs typeface="Hiragino Sans" pitchFamily="34" charset="-120"/>
+              </a:rPr>
+              <a:t>コーディングエージェント入門</a:t>
+            </a:r>
+            <a:pPr algn="l" indent="0" marL="0">
+              <a:buNone/>
+            </a:pPr>
+            <a:r>
+              <a:rPr lang="en-US" sz="900" dirty="0">
+                <a:solidFill>
+                  <a:srgbClr val="30363D"/>
+                </a:solidFill>
+                <a:latin typeface="Hiragino Sans" pitchFamily="34" charset="0"/>
+                <a:ea typeface="Hiragino Sans" pitchFamily="34" charset="-122"/>
+                <a:cs typeface="Hiragino Sans" pitchFamily="34" charset="-120"/>
+              </a:rPr>
+              <a:t>  ·  OpenCode × OpenRouter</a:t>
+            </a:r>
+            <a:endParaRPr lang="en-US" sz="900" dirty="0"/>
+          </a:p>
+        </p:txBody>
+      </p:sp>
+      <p:sp>
+        <p:nvSpPr>
+          <p:cNvPr id="16" name="Text 14"/>
+          <p:cNvSpPr/>
+          <p:nvPr/>
+        </p:nvSpPr>
+        <p:spPr>
+          <a:xfrm>
+            <a:off x="9720072" y="6419088"/>
+            <a:ext cx="1828800" cy="274320"/>
+          </a:xfrm>
+          <a:prstGeom prst="rect">
+            <a:avLst/>
+          </a:prstGeom>
+          <a:noFill/>
+          <a:ln/>
+        </p:spPr>
+        <p:txBody>
+          <a:bodyPr wrap="square" lIns="0" tIns="0" rIns="0" bIns="0" rtlCol="0" anchor="ctr"/>
+          <a:lstStyle/>
+          <a:p>
+            <a:pPr algn="r" indent="0" marL="0">
+              <a:buNone/>
+            </a:pPr>
+            <a:r>
+              <a:rPr lang="en-US" sz="900" dirty="0">
+                <a:solidFill>
+                  <a:srgbClr val="8B949E"/>
+                </a:solidFill>
+                <a:latin typeface="Menlo" pitchFamily="34" charset="0"/>
+                <a:ea typeface="Menlo" pitchFamily="34" charset="-122"/>
+                <a:cs typeface="Menlo" pitchFamily="34" charset="-120"/>
+              </a:rPr>
+              <a:t>22 / 26</a:t>
             </a:r>
             <a:endParaRPr lang="en-US" sz="900" dirty="0"/>
           </a:p>
@@ -17818,13 +16883,13 @@
             <a:r>
               <a:rPr lang="en-US" sz="1100" b="1" spc="200" kern="0" dirty="0">
                 <a:solidFill>
-                  <a:srgbClr val="F0883E"/>
+                  <a:srgbClr val="3FB950"/>
                 </a:solidFill>
                 <a:latin typeface="Menlo" pitchFamily="34" charset="0"/>
                 <a:ea typeface="Menlo" pitchFamily="34" charset="-122"/>
                 <a:cs typeface="Menlo" pitchFamily="34" charset="-120"/>
               </a:rPr>
-              <a:t>BUILD</a:t>
+              <a:t>WRAP UP</a:t>
             </a:r>
             <a:endParaRPr lang="en-US" sz="1100" dirty="0"/>
           </a:p>
@@ -17857,7 +16922,7 @@
             <a:r>
               <a:rPr lang="en-US" sz="3000" b="1" dirty="0">
                 <a:solidFill>
-                  <a:srgbClr val="F0883E"/>
+                  <a:srgbClr val="3FB950"/>
                 </a:solidFill>
                 <a:latin typeface="Menlo" pitchFamily="34" charset="0"/>
                 <a:ea typeface="Menlo" pitchFamily="34" charset="-122"/>
@@ -17902,7 +16967,7 @@
                 <a:ea typeface="Hiragino Sans" pitchFamily="34" charset="-122"/>
                 <a:cs typeface="Hiragino Sans" pitchFamily="34" charset="-120"/>
               </a:rPr>
-              <a:t>無料枠の上限に注意</a:t>
+              <a:t>今日できたこと</a:t>
             </a:r>
             <a:endParaRPr lang="en-US" sz="2900" dirty="0"/>
           </a:p>
@@ -17910,61 +16975,22 @@
       </p:sp>
       <p:sp>
         <p:nvSpPr>
-          <p:cNvPr id="5" name="Text 3"/>
-          <p:cNvSpPr/>
-          <p:nvPr/>
-        </p:nvSpPr>
-        <p:spPr>
-          <a:xfrm>
-            <a:off x="640080" y="1783080"/>
-            <a:ext cx="10908792" cy="457200"/>
-          </a:xfrm>
-          <a:prstGeom prst="rect">
-            <a:avLst/>
-          </a:prstGeom>
-          <a:noFill/>
-          <a:ln/>
-        </p:spPr>
-        <p:txBody>
-          <a:bodyPr wrap="square" lIns="0" tIns="0" rIns="0" bIns="0" rtlCol="0" anchor="ctr"/>
-          <a:lstStyle/>
-          <a:p>
-            <a:pPr algn="l" indent="0" marL="0">
-              <a:buNone/>
-            </a:pPr>
-            <a:r>
-              <a:rPr lang="en-US" sz="1600" dirty="0">
-                <a:solidFill>
-                  <a:srgbClr val="C9D1D9"/>
-                </a:solidFill>
-                <a:latin typeface="Hiragino Sans" pitchFamily="34" charset="0"/>
-                <a:ea typeface="Hiragino Sans" pitchFamily="34" charset="-122"/>
-                <a:cs typeface="Hiragino Sans" pitchFamily="34" charset="-120"/>
-              </a:rPr>
-              <a:t>未課金アカウントの無料モデルには、OpenRouter の利用上限があります。</a:t>
-            </a:r>
-            <a:endParaRPr lang="en-US" sz="1600" dirty="0"/>
-          </a:p>
-        </p:txBody>
-      </p:sp>
-      <p:sp>
-        <p:nvSpPr>
-          <p:cNvPr id="6" name="Shape 4"/>
-          <p:cNvSpPr/>
-          <p:nvPr/>
-        </p:nvSpPr>
-        <p:spPr>
-          <a:xfrm>
-            <a:off x="1248156" y="2560320"/>
-            <a:ext cx="4572000" cy="2194560"/>
+          <p:cNvPr id="5" name="Shape 3"/>
+          <p:cNvSpPr/>
+          <p:nvPr/>
+        </p:nvSpPr>
+        <p:spPr>
+          <a:xfrm>
+            <a:off x="640080" y="2057400"/>
+            <a:ext cx="10908792" cy="841248"/>
           </a:xfrm>
           <a:prstGeom prst="roundRect">
             <a:avLst>
-              <a:gd name="adj" fmla="val 3333"/>
+              <a:gd name="adj" fmla="val 8696"/>
             </a:avLst>
           </a:prstGeom>
           <a:solidFill>
-            <a:srgbClr val="1C2128"/>
+            <a:srgbClr val="161B22"/>
           </a:solidFill>
           <a:ln w="12700">
             <a:solidFill>
@@ -17983,16 +17009,16 @@
       </p:sp>
       <p:sp>
         <p:nvSpPr>
-          <p:cNvPr id="7" name="Shape 5"/>
-          <p:cNvSpPr/>
-          <p:nvPr/>
-        </p:nvSpPr>
-        <p:spPr>
-          <a:xfrm>
-            <a:off x="1248156" y="2560320"/>
-            <a:ext cx="4572000" cy="91440"/>
-          </a:xfrm>
-          <a:prstGeom prst="rect">
+          <p:cNvPr id="6" name="Shape 4"/>
+          <p:cNvSpPr/>
+          <p:nvPr/>
+        </p:nvSpPr>
+        <p:spPr>
+          <a:xfrm>
+            <a:off x="960120" y="2249424"/>
+            <a:ext cx="457200" cy="457200"/>
+          </a:xfrm>
+          <a:prstGeom prst="ellipse">
             <a:avLst/>
           </a:prstGeom>
           <a:solidFill>
@@ -18003,100 +17029,100 @@
       </p:sp>
       <p:sp>
         <p:nvSpPr>
+          <p:cNvPr id="7" name="Text 5"/>
+          <p:cNvSpPr/>
+          <p:nvPr/>
+        </p:nvSpPr>
+        <p:spPr>
+          <a:xfrm>
+            <a:off x="960120" y="2249424"/>
+            <a:ext cx="457200" cy="457200"/>
+          </a:xfrm>
+          <a:prstGeom prst="rect">
+            <a:avLst/>
+          </a:prstGeom>
+          <a:noFill/>
+          <a:ln/>
+        </p:spPr>
+        <p:txBody>
+          <a:bodyPr wrap="square" lIns="0" tIns="0" rIns="0" bIns="0" rtlCol="0" anchor="ctr"/>
+          <a:lstStyle/>
+          <a:p>
+            <a:pPr algn="ctr" indent="0" marL="0">
+              <a:buNone/>
+            </a:pPr>
+            <a:r>
+              <a:rPr lang="en-US" sz="1300" b="1" dirty="0">
+                <a:solidFill>
+                  <a:srgbClr val="0D1117"/>
+                </a:solidFill>
+                <a:latin typeface="Hiragino Sans" pitchFamily="34" charset="0"/>
+                <a:ea typeface="Hiragino Sans" pitchFamily="34" charset="-122"/>
+                <a:cs typeface="Hiragino Sans" pitchFamily="34" charset="-120"/>
+              </a:rPr>
+              <a:t>✓</a:t>
+            </a:r>
+            <a:endParaRPr lang="en-US" sz="1300" dirty="0"/>
+          </a:p>
+        </p:txBody>
+      </p:sp>
+      <p:sp>
+        <p:nvSpPr>
           <p:cNvPr id="8" name="Text 6"/>
           <p:cNvSpPr/>
           <p:nvPr/>
         </p:nvSpPr>
         <p:spPr>
           <a:xfrm>
-            <a:off x="1248156" y="2926080"/>
-            <a:ext cx="4572000" cy="1097280"/>
-          </a:xfrm>
-          <a:prstGeom prst="rect">
-            <a:avLst/>
-          </a:prstGeom>
-          <a:noFill/>
-          <a:ln/>
-        </p:spPr>
-        <p:txBody>
-          <a:bodyPr wrap="square" lIns="0" tIns="0" rIns="0" bIns="0" rtlCol="0" anchor="ctr"/>
-          <a:lstStyle/>
-          <a:p>
-            <a:pPr algn="ctr" indent="0" marL="0">
-              <a:buNone/>
-            </a:pPr>
-            <a:r>
-              <a:rPr lang="en-US" sz="7200" b="1" dirty="0">
-                <a:solidFill>
-                  <a:srgbClr val="3FB950"/>
-                </a:solidFill>
-                <a:latin typeface="Hiragino Sans" pitchFamily="34" charset="0"/>
-                <a:ea typeface="Hiragino Sans" pitchFamily="34" charset="-122"/>
-                <a:cs typeface="Hiragino Sans" pitchFamily="34" charset="-120"/>
-              </a:rPr>
-              <a:t>50</a:t>
-            </a:r>
-            <a:endParaRPr lang="en-US" sz="7200" dirty="0"/>
-          </a:p>
-        </p:txBody>
-      </p:sp>
-      <p:sp>
-        <p:nvSpPr>
-          <p:cNvPr id="9" name="Text 7"/>
-          <p:cNvSpPr/>
-          <p:nvPr/>
-        </p:nvSpPr>
-        <p:spPr>
-          <a:xfrm>
-            <a:off x="1248156" y="4069080"/>
-            <a:ext cx="4572000" cy="457200"/>
-          </a:xfrm>
-          <a:prstGeom prst="rect">
-            <a:avLst/>
-          </a:prstGeom>
-          <a:noFill/>
-          <a:ln/>
-        </p:spPr>
-        <p:txBody>
-          <a:bodyPr wrap="square" lIns="0" tIns="0" rIns="0" bIns="0" rtlCol="0" anchor="ctr"/>
-          <a:lstStyle/>
-          <a:p>
-            <a:pPr algn="ctr" indent="0" marL="0">
-              <a:buNone/>
-            </a:pPr>
-            <a:r>
-              <a:rPr lang="en-US" sz="1700" dirty="0">
-                <a:solidFill>
-                  <a:srgbClr val="C9D1D9"/>
-                </a:solidFill>
-                <a:latin typeface="Hiragino Sans" pitchFamily="34" charset="0"/>
-                <a:ea typeface="Hiragino Sans" pitchFamily="34" charset="-122"/>
-                <a:cs typeface="Hiragino Sans" pitchFamily="34" charset="-120"/>
-              </a:rPr>
-              <a:t>リクエスト / 日</a:t>
-            </a:r>
-            <a:endParaRPr lang="en-US" sz="1700" dirty="0"/>
-          </a:p>
-        </p:txBody>
-      </p:sp>
-      <p:sp>
-        <p:nvSpPr>
-          <p:cNvPr id="10" name="Shape 8"/>
-          <p:cNvSpPr/>
-          <p:nvPr/>
-        </p:nvSpPr>
-        <p:spPr>
-          <a:xfrm>
-            <a:off x="6368796" y="2560320"/>
-            <a:ext cx="4572000" cy="2194560"/>
+            <a:off x="1691640" y="2057400"/>
+            <a:ext cx="9537192" cy="841248"/>
+          </a:xfrm>
+          <a:prstGeom prst="rect">
+            <a:avLst/>
+          </a:prstGeom>
+          <a:noFill/>
+          <a:ln/>
+        </p:spPr>
+        <p:txBody>
+          <a:bodyPr wrap="square" lIns="0" tIns="0" rIns="0" bIns="0" rtlCol="0" anchor="ctr"/>
+          <a:lstStyle/>
+          <a:p>
+            <a:pPr algn="l" indent="0" marL="0">
+              <a:buNone/>
+            </a:pPr>
+            <a:r>
+              <a:rPr lang="en-US" sz="1800" dirty="0">
+                <a:solidFill>
+                  <a:srgbClr val="E6EDF3"/>
+                </a:solidFill>
+                <a:latin typeface="Hiragino Sans" pitchFamily="34" charset="0"/>
+                <a:ea typeface="Hiragino Sans" pitchFamily="34" charset="-122"/>
+                <a:cs typeface="Hiragino Sans" pitchFamily="34" charset="-120"/>
+              </a:rPr>
+              <a:t>コーディングエージェントが何か理解した</a:t>
+            </a:r>
+            <a:endParaRPr lang="en-US" sz="1800" dirty="0"/>
+          </a:p>
+        </p:txBody>
+      </p:sp>
+      <p:sp>
+        <p:nvSpPr>
+          <p:cNvPr id="9" name="Shape 7"/>
+          <p:cNvSpPr/>
+          <p:nvPr/>
+        </p:nvSpPr>
+        <p:spPr>
+          <a:xfrm>
+            <a:off x="640080" y="3063240"/>
+            <a:ext cx="10908792" cy="841248"/>
           </a:xfrm>
           <a:prstGeom prst="roundRect">
             <a:avLst>
-              <a:gd name="adj" fmla="val 3333"/>
+              <a:gd name="adj" fmla="val 8696"/>
             </a:avLst>
           </a:prstGeom>
           <a:solidFill>
-            <a:srgbClr val="1C2128"/>
+            <a:srgbClr val="161B22"/>
           </a:solidFill>
           <a:ln w="12700">
             <a:solidFill>
@@ -18115,34 +17141,166 @@
       </p:sp>
       <p:sp>
         <p:nvSpPr>
-          <p:cNvPr id="11" name="Shape 9"/>
-          <p:cNvSpPr/>
-          <p:nvPr/>
-        </p:nvSpPr>
-        <p:spPr>
-          <a:xfrm>
-            <a:off x="6368796" y="2560320"/>
-            <a:ext cx="4572000" cy="91440"/>
-          </a:xfrm>
-          <a:prstGeom prst="rect">
+          <p:cNvPr id="10" name="Shape 8"/>
+          <p:cNvSpPr/>
+          <p:nvPr/>
+        </p:nvSpPr>
+        <p:spPr>
+          <a:xfrm>
+            <a:off x="960120" y="3255264"/>
+            <a:ext cx="457200" cy="457200"/>
+          </a:xfrm>
+          <a:prstGeom prst="ellipse">
             <a:avLst/>
           </a:prstGeom>
           <a:solidFill>
-            <a:srgbClr val="58A6FF"/>
+            <a:srgbClr val="3FB950"/>
           </a:solidFill>
           <a:ln/>
         </p:spPr>
       </p:sp>
       <p:sp>
         <p:nvSpPr>
+          <p:cNvPr id="11" name="Text 9"/>
+          <p:cNvSpPr/>
+          <p:nvPr/>
+        </p:nvSpPr>
+        <p:spPr>
+          <a:xfrm>
+            <a:off x="960120" y="3255264"/>
+            <a:ext cx="457200" cy="457200"/>
+          </a:xfrm>
+          <a:prstGeom prst="rect">
+            <a:avLst/>
+          </a:prstGeom>
+          <a:noFill/>
+          <a:ln/>
+        </p:spPr>
+        <p:txBody>
+          <a:bodyPr wrap="square" lIns="0" tIns="0" rIns="0" bIns="0" rtlCol="0" anchor="ctr"/>
+          <a:lstStyle/>
+          <a:p>
+            <a:pPr algn="ctr" indent="0" marL="0">
+              <a:buNone/>
+            </a:pPr>
+            <a:r>
+              <a:rPr lang="en-US" sz="1300" b="1" dirty="0">
+                <a:solidFill>
+                  <a:srgbClr val="0D1117"/>
+                </a:solidFill>
+                <a:latin typeface="Hiragino Sans" pitchFamily="34" charset="0"/>
+                <a:ea typeface="Hiragino Sans" pitchFamily="34" charset="-122"/>
+                <a:cs typeface="Hiragino Sans" pitchFamily="34" charset="-120"/>
+              </a:rPr>
+              <a:t>✓</a:t>
+            </a:r>
+            <a:endParaRPr lang="en-US" sz="1300" dirty="0"/>
+          </a:p>
+        </p:txBody>
+      </p:sp>
+      <p:sp>
+        <p:nvSpPr>
           <p:cNvPr id="12" name="Text 10"/>
           <p:cNvSpPr/>
           <p:nvPr/>
         </p:nvSpPr>
         <p:spPr>
           <a:xfrm>
-            <a:off x="6368796" y="2926080"/>
-            <a:ext cx="4572000" cy="1097280"/>
+            <a:off x="1691640" y="3063240"/>
+            <a:ext cx="9537192" cy="841248"/>
+          </a:xfrm>
+          <a:prstGeom prst="rect">
+            <a:avLst/>
+          </a:prstGeom>
+          <a:noFill/>
+          <a:ln/>
+        </p:spPr>
+        <p:txBody>
+          <a:bodyPr wrap="square" lIns="0" tIns="0" rIns="0" bIns="0" rtlCol="0" anchor="ctr"/>
+          <a:lstStyle/>
+          <a:p>
+            <a:pPr algn="l" indent="0" marL="0">
+              <a:buNone/>
+            </a:pPr>
+            <a:r>
+              <a:rPr lang="en-US" sz="1800" dirty="0">
+                <a:solidFill>
+                  <a:srgbClr val="E6EDF3"/>
+                </a:solidFill>
+                <a:latin typeface="Hiragino Sans" pitchFamily="34" charset="0"/>
+                <a:ea typeface="Hiragino Sans" pitchFamily="34" charset="-122"/>
+                <a:cs typeface="Hiragino Sans" pitchFamily="34" charset="-120"/>
+              </a:rPr>
+              <a:t>OpenCode を自分のPCにインストールした</a:t>
+            </a:r>
+            <a:endParaRPr lang="en-US" sz="1800" dirty="0"/>
+          </a:p>
+        </p:txBody>
+      </p:sp>
+      <p:sp>
+        <p:nvSpPr>
+          <p:cNvPr id="13" name="Shape 11"/>
+          <p:cNvSpPr/>
+          <p:nvPr/>
+        </p:nvSpPr>
+        <p:spPr>
+          <a:xfrm>
+            <a:off x="640080" y="4069080"/>
+            <a:ext cx="10908792" cy="841248"/>
+          </a:xfrm>
+          <a:prstGeom prst="roundRect">
+            <a:avLst>
+              <a:gd name="adj" fmla="val 8696"/>
+            </a:avLst>
+          </a:prstGeom>
+          <a:solidFill>
+            <a:srgbClr val="161B22"/>
+          </a:solidFill>
+          <a:ln w="12700">
+            <a:solidFill>
+              <a:srgbClr val="30363D"/>
+            </a:solidFill>
+            <a:prstDash val="solid"/>
+          </a:ln>
+          <a:effectLst>
+            <a:outerShdw sx="100000" sy="100000" kx="0" ky="0" algn="bl" rotWithShape="0" blurRad="127000" dist="38100" dir="5400000">
+              <a:srgbClr val="000000">
+                <a:alpha val="35000"/>
+              </a:srgbClr>
+            </a:outerShdw>
+          </a:effectLst>
+        </p:spPr>
+      </p:sp>
+      <p:sp>
+        <p:nvSpPr>
+          <p:cNvPr id="14" name="Shape 12"/>
+          <p:cNvSpPr/>
+          <p:nvPr/>
+        </p:nvSpPr>
+        <p:spPr>
+          <a:xfrm>
+            <a:off x="960120" y="4261104"/>
+            <a:ext cx="457200" cy="457200"/>
+          </a:xfrm>
+          <a:prstGeom prst="ellipse">
+            <a:avLst/>
+          </a:prstGeom>
+          <a:solidFill>
+            <a:srgbClr val="3FB950"/>
+          </a:solidFill>
+          <a:ln/>
+        </p:spPr>
+      </p:sp>
+      <p:sp>
+        <p:nvSpPr>
+          <p:cNvPr id="15" name="Text 13"/>
+          <p:cNvSpPr/>
+          <p:nvPr/>
+        </p:nvSpPr>
+        <p:spPr>
+          <a:xfrm>
+            <a:off x="960120" y="4261104"/>
+            <a:ext cx="457200" cy="457200"/>
           </a:xfrm>
           <a:prstGeom prst="rect">
             <a:avLst/>
@@ -18158,30 +17316,123 @@
               <a:buNone/>
             </a:pPr>
             <a:r>
-              <a:rPr lang="en-US" sz="7200" b="1" dirty="0">
-                <a:solidFill>
-                  <a:srgbClr val="58A6FF"/>
-                </a:solidFill>
-                <a:latin typeface="Hiragino Sans" pitchFamily="34" charset="0"/>
-                <a:ea typeface="Hiragino Sans" pitchFamily="34" charset="-122"/>
-                <a:cs typeface="Hiragino Sans" pitchFamily="34" charset="-120"/>
-              </a:rPr>
-              <a:t>20</a:t>
-            </a:r>
-            <a:endParaRPr lang="en-US" sz="7200" dirty="0"/>
-          </a:p>
-        </p:txBody>
-      </p:sp>
-      <p:sp>
-        <p:nvSpPr>
-          <p:cNvPr id="13" name="Text 11"/>
-          <p:cNvSpPr/>
-          <p:nvPr/>
-        </p:nvSpPr>
-        <p:spPr>
-          <a:xfrm>
-            <a:off x="6368796" y="4069080"/>
-            <a:ext cx="4572000" cy="457200"/>
+              <a:rPr lang="en-US" sz="1300" b="1" dirty="0">
+                <a:solidFill>
+                  <a:srgbClr val="0D1117"/>
+                </a:solidFill>
+                <a:latin typeface="Hiragino Sans" pitchFamily="34" charset="0"/>
+                <a:ea typeface="Hiragino Sans" pitchFamily="34" charset="-122"/>
+                <a:cs typeface="Hiragino Sans" pitchFamily="34" charset="-120"/>
+              </a:rPr>
+              <a:t>✓</a:t>
+            </a:r>
+            <a:endParaRPr lang="en-US" sz="1300" dirty="0"/>
+          </a:p>
+        </p:txBody>
+      </p:sp>
+      <p:sp>
+        <p:nvSpPr>
+          <p:cNvPr id="16" name="Text 14"/>
+          <p:cNvSpPr/>
+          <p:nvPr/>
+        </p:nvSpPr>
+        <p:spPr>
+          <a:xfrm>
+            <a:off x="1691640" y="4069080"/>
+            <a:ext cx="9537192" cy="841248"/>
+          </a:xfrm>
+          <a:prstGeom prst="rect">
+            <a:avLst/>
+          </a:prstGeom>
+          <a:noFill/>
+          <a:ln/>
+        </p:spPr>
+        <p:txBody>
+          <a:bodyPr wrap="square" lIns="0" tIns="0" rIns="0" bIns="0" rtlCol="0" anchor="ctr"/>
+          <a:lstStyle/>
+          <a:p>
+            <a:pPr algn="l" indent="0" marL="0">
+              <a:buNone/>
+            </a:pPr>
+            <a:r>
+              <a:rPr lang="en-US" sz="1800" dirty="0">
+                <a:solidFill>
+                  <a:srgbClr val="E6EDF3"/>
+                </a:solidFill>
+                <a:latin typeface="Hiragino Sans" pitchFamily="34" charset="0"/>
+                <a:ea typeface="Hiragino Sans" pitchFamily="34" charset="-122"/>
+                <a:cs typeface="Hiragino Sans" pitchFamily="34" charset="-120"/>
+              </a:rPr>
+              <a:t>OpenRouter の無料モデルに接続した</a:t>
+            </a:r>
+            <a:endParaRPr lang="en-US" sz="1800" dirty="0"/>
+          </a:p>
+        </p:txBody>
+      </p:sp>
+      <p:sp>
+        <p:nvSpPr>
+          <p:cNvPr id="17" name="Shape 15"/>
+          <p:cNvSpPr/>
+          <p:nvPr/>
+        </p:nvSpPr>
+        <p:spPr>
+          <a:xfrm>
+            <a:off x="640080" y="5074920"/>
+            <a:ext cx="10908792" cy="841248"/>
+          </a:xfrm>
+          <a:prstGeom prst="roundRect">
+            <a:avLst>
+              <a:gd name="adj" fmla="val 8696"/>
+            </a:avLst>
+          </a:prstGeom>
+          <a:solidFill>
+            <a:srgbClr val="161B22"/>
+          </a:solidFill>
+          <a:ln w="12700">
+            <a:solidFill>
+              <a:srgbClr val="30363D"/>
+            </a:solidFill>
+            <a:prstDash val="solid"/>
+          </a:ln>
+          <a:effectLst>
+            <a:outerShdw sx="100000" sy="100000" kx="0" ky="0" algn="bl" rotWithShape="0" blurRad="127000" dist="38100" dir="5400000">
+              <a:srgbClr val="000000">
+                <a:alpha val="35000"/>
+              </a:srgbClr>
+            </a:outerShdw>
+          </a:effectLst>
+        </p:spPr>
+      </p:sp>
+      <p:sp>
+        <p:nvSpPr>
+          <p:cNvPr id="18" name="Shape 16"/>
+          <p:cNvSpPr/>
+          <p:nvPr/>
+        </p:nvSpPr>
+        <p:spPr>
+          <a:xfrm>
+            <a:off x="960120" y="5266944"/>
+            <a:ext cx="457200" cy="457200"/>
+          </a:xfrm>
+          <a:prstGeom prst="ellipse">
+            <a:avLst/>
+          </a:prstGeom>
+          <a:solidFill>
+            <a:srgbClr val="3FB950"/>
+          </a:solidFill>
+          <a:ln/>
+        </p:spPr>
+      </p:sp>
+      <p:sp>
+        <p:nvSpPr>
+          <p:cNvPr id="19" name="Text 17"/>
+          <p:cNvSpPr/>
+          <p:nvPr/>
+        </p:nvSpPr>
+        <p:spPr>
+          <a:xfrm>
+            <a:off x="960120" y="5266944"/>
+            <a:ext cx="457200" cy="457200"/>
           </a:xfrm>
           <a:prstGeom prst="rect">
             <a:avLst/>
@@ -18197,62 +17448,62 @@
               <a:buNone/>
             </a:pPr>
             <a:r>
-              <a:rPr lang="en-US" sz="1700" dirty="0">
-                <a:solidFill>
-                  <a:srgbClr val="C9D1D9"/>
-                </a:solidFill>
-                <a:latin typeface="Hiragino Sans" pitchFamily="34" charset="0"/>
-                <a:ea typeface="Hiragino Sans" pitchFamily="34" charset="-122"/>
-                <a:cs typeface="Hiragino Sans" pitchFamily="34" charset="-120"/>
-              </a:rPr>
-              <a:t>リクエスト / 分</a:t>
-            </a:r>
-            <a:endParaRPr lang="en-US" sz="1700" dirty="0"/>
-          </a:p>
-        </p:txBody>
-      </p:sp>
-      <p:sp>
-        <p:nvSpPr>
-          <p:cNvPr id="14" name="Text 12"/>
-          <p:cNvSpPr/>
-          <p:nvPr/>
-        </p:nvSpPr>
-        <p:spPr>
-          <a:xfrm>
-            <a:off x="640080" y="5074920"/>
-            <a:ext cx="10908792" cy="457200"/>
-          </a:xfrm>
-          <a:prstGeom prst="rect">
-            <a:avLst/>
-          </a:prstGeom>
-          <a:noFill/>
-          <a:ln/>
-        </p:spPr>
-        <p:txBody>
-          <a:bodyPr wrap="square" lIns="0" tIns="0" rIns="0" bIns="0" rtlCol="0" anchor="ctr"/>
-          <a:lstStyle/>
-          <a:p>
-            <a:pPr algn="ctr" indent="0" marL="0">
-              <a:buNone/>
-            </a:pPr>
-            <a:r>
-              <a:rPr lang="en-US" sz="1500" dirty="0">
-                <a:solidFill>
-                  <a:srgbClr val="8B949E"/>
-                </a:solidFill>
-                <a:latin typeface="Hiragino Sans" pitchFamily="34" charset="0"/>
-                <a:ea typeface="Hiragino Sans" pitchFamily="34" charset="-122"/>
-                <a:cs typeface="Hiragino Sans" pitchFamily="34" charset="-120"/>
-              </a:rPr>
-              <a:t>上限に当たったら、少し時間をおいてから再開しましょう。</a:t>
-            </a:r>
-            <a:endParaRPr lang="en-US" sz="1500" dirty="0"/>
-          </a:p>
-        </p:txBody>
-      </p:sp>
-      <p:sp>
-        <p:nvSpPr>
-          <p:cNvPr id="15" name="Text 13"/>
+              <a:rPr lang="en-US" sz="1300" b="1" dirty="0">
+                <a:solidFill>
+                  <a:srgbClr val="0D1117"/>
+                </a:solidFill>
+                <a:latin typeface="Hiragino Sans" pitchFamily="34" charset="0"/>
+                <a:ea typeface="Hiragino Sans" pitchFamily="34" charset="-122"/>
+                <a:cs typeface="Hiragino Sans" pitchFamily="34" charset="-120"/>
+              </a:rPr>
+              <a:t>✓</a:t>
+            </a:r>
+            <a:endParaRPr lang="en-US" sz="1300" dirty="0"/>
+          </a:p>
+        </p:txBody>
+      </p:sp>
+      <p:sp>
+        <p:nvSpPr>
+          <p:cNvPr id="20" name="Text 18"/>
+          <p:cNvSpPr/>
+          <p:nvPr/>
+        </p:nvSpPr>
+        <p:spPr>
+          <a:xfrm>
+            <a:off x="1691640" y="5074920"/>
+            <a:ext cx="9537192" cy="841248"/>
+          </a:xfrm>
+          <a:prstGeom prst="rect">
+            <a:avLst/>
+          </a:prstGeom>
+          <a:noFill/>
+          <a:ln/>
+        </p:spPr>
+        <p:txBody>
+          <a:bodyPr wrap="square" lIns="0" tIns="0" rIns="0" bIns="0" rtlCol="0" anchor="ctr"/>
+          <a:lstStyle/>
+          <a:p>
+            <a:pPr algn="l" indent="0" marL="0">
+              <a:buNone/>
+            </a:pPr>
+            <a:r>
+              <a:rPr lang="en-US" sz="1800" dirty="0">
+                <a:solidFill>
+                  <a:srgbClr val="E6EDF3"/>
+                </a:solidFill>
+                <a:latin typeface="Hiragino Sans" pitchFamily="34" charset="0"/>
+                <a:ea typeface="Hiragino Sans" pitchFamily="34" charset="-122"/>
+                <a:cs typeface="Hiragino Sans" pitchFamily="34" charset="-120"/>
+              </a:rPr>
+              <a:t>複数ファイルの ToDo アプリを作らせた</a:t>
+            </a:r>
+            <a:endParaRPr lang="en-US" sz="1800" dirty="0"/>
+          </a:p>
+        </p:txBody>
+      </p:sp>
+      <p:sp>
+        <p:nvSpPr>
+          <p:cNvPr id="21" name="Text 19"/>
           <p:cNvSpPr/>
           <p:nvPr/>
         </p:nvSpPr>
@@ -18305,7 +17556,7 @@
       </p:sp>
       <p:sp>
         <p:nvSpPr>
-          <p:cNvPr id="16" name="Text 14"/>
+          <p:cNvPr id="22" name="Text 20"/>
           <p:cNvSpPr/>
           <p:nvPr/>
         </p:nvSpPr>
@@ -18336,7 +17587,7 @@
                 <a:ea typeface="Menlo" pitchFamily="34" charset="-122"/>
                 <a:cs typeface="Menlo" pitchFamily="34" charset="-120"/>
               </a:rPr>
-              <a:t>23 / 27</a:t>
+              <a:t>23 / 26</a:t>
             </a:r>
             <a:endParaRPr lang="en-US" sz="900" dirty="0"/>
           </a:p>
@@ -18485,7 +17736,7 @@
                 <a:ea typeface="Hiragino Sans" pitchFamily="34" charset="-122"/>
                 <a:cs typeface="Hiragino Sans" pitchFamily="34" charset="-120"/>
               </a:rPr>
-              <a:t>今日できたこと</a:t>
+              <a:t>もっと先へ</a:t>
             </a:r>
             <a:endParaRPr lang="en-US" sz="2900" dirty="0"/>
           </a:p>
@@ -18493,18 +17744,57 @@
       </p:sp>
       <p:sp>
         <p:nvSpPr>
-          <p:cNvPr id="5" name="Shape 3"/>
-          <p:cNvSpPr/>
-          <p:nvPr/>
-        </p:nvSpPr>
-        <p:spPr>
-          <a:xfrm>
-            <a:off x="640080" y="2057400"/>
-            <a:ext cx="10908792" cy="841248"/>
+          <p:cNvPr id="5" name="Text 3"/>
+          <p:cNvSpPr/>
+          <p:nvPr/>
+        </p:nvSpPr>
+        <p:spPr>
+          <a:xfrm>
+            <a:off x="640080" y="1737360"/>
+            <a:ext cx="10908792" cy="457200"/>
+          </a:xfrm>
+          <a:prstGeom prst="rect">
+            <a:avLst/>
+          </a:prstGeom>
+          <a:noFill/>
+          <a:ln/>
+        </p:spPr>
+        <p:txBody>
+          <a:bodyPr wrap="square" lIns="0" tIns="0" rIns="0" bIns="0" rtlCol="0" anchor="ctr"/>
+          <a:lstStyle/>
+          <a:p>
+            <a:pPr algn="l" indent="0" marL="0">
+              <a:buNone/>
+            </a:pPr>
+            <a:r>
+              <a:rPr lang="en-US" sz="1500" dirty="0">
+                <a:solidFill>
+                  <a:srgbClr val="8B949E"/>
+                </a:solidFill>
+                <a:latin typeface="Hiragino Sans" pitchFamily="34" charset="0"/>
+                <a:ea typeface="Hiragino Sans" pitchFamily="34" charset="-122"/>
+                <a:cs typeface="Hiragino Sans" pitchFamily="34" charset="-120"/>
+              </a:rPr>
+              <a:t>今日おぼえた “頼み方” と “指示ファイル” は、どのエージェントでもそのまま使えます。</a:t>
+            </a:r>
+            <a:endParaRPr lang="en-US" sz="1500" dirty="0"/>
+          </a:p>
+        </p:txBody>
+      </p:sp>
+      <p:sp>
+        <p:nvSpPr>
+          <p:cNvPr id="6" name="Shape 4"/>
+          <p:cNvSpPr/>
+          <p:nvPr/>
+        </p:nvSpPr>
+        <p:spPr>
+          <a:xfrm>
+            <a:off x="640080" y="2377440"/>
+            <a:ext cx="5303520" cy="1508760"/>
           </a:xfrm>
           <a:prstGeom prst="roundRect">
             <a:avLst>
-              <a:gd name="adj" fmla="val 8696"/>
+              <a:gd name="adj" fmla="val 4848"/>
             </a:avLst>
           </a:prstGeom>
           <a:solidFill>
@@ -18527,116 +17817,119 @@
       </p:sp>
       <p:sp>
         <p:nvSpPr>
-          <p:cNvPr id="6" name="Shape 4"/>
-          <p:cNvSpPr/>
-          <p:nvPr/>
-        </p:nvSpPr>
-        <p:spPr>
-          <a:xfrm>
-            <a:off x="960120" y="2249424"/>
-            <a:ext cx="457200" cy="457200"/>
-          </a:xfrm>
-          <a:prstGeom prst="ellipse">
+          <p:cNvPr id="7" name="Shape 5"/>
+          <p:cNvSpPr/>
+          <p:nvPr/>
+        </p:nvSpPr>
+        <p:spPr>
+          <a:xfrm>
+            <a:off x="640080" y="2377440"/>
+            <a:ext cx="82296" cy="1508760"/>
+          </a:xfrm>
+          <a:prstGeom prst="rect">
             <a:avLst/>
           </a:prstGeom>
           <a:solidFill>
-            <a:srgbClr val="3FB950"/>
+            <a:srgbClr val="58A6FF"/>
           </a:solidFill>
           <a:ln/>
         </p:spPr>
       </p:sp>
       <p:sp>
         <p:nvSpPr>
-          <p:cNvPr id="7" name="Text 5"/>
-          <p:cNvSpPr/>
-          <p:nvPr/>
-        </p:nvSpPr>
-        <p:spPr>
-          <a:xfrm>
-            <a:off x="960120" y="2249424"/>
-            <a:ext cx="457200" cy="457200"/>
-          </a:xfrm>
-          <a:prstGeom prst="rect">
-            <a:avLst/>
-          </a:prstGeom>
-          <a:noFill/>
-          <a:ln/>
-        </p:spPr>
-        <p:txBody>
-          <a:bodyPr wrap="square" lIns="0" tIns="0" rIns="0" bIns="0" rtlCol="0" anchor="ctr"/>
-          <a:lstStyle/>
-          <a:p>
-            <a:pPr algn="ctr" indent="0" marL="0">
-              <a:buNone/>
-            </a:pPr>
-            <a:r>
-              <a:rPr lang="en-US" sz="1300" b="1" dirty="0">
-                <a:solidFill>
-                  <a:srgbClr val="0D1117"/>
-                </a:solidFill>
-                <a:latin typeface="Hiragino Sans" pitchFamily="34" charset="0"/>
-                <a:ea typeface="Hiragino Sans" pitchFamily="34" charset="-122"/>
-                <a:cs typeface="Hiragino Sans" pitchFamily="34" charset="-120"/>
-              </a:rPr>
-              <a:t>✓</a:t>
-            </a:r>
-            <a:endParaRPr lang="en-US" sz="1300" dirty="0"/>
-          </a:p>
-        </p:txBody>
-      </p:sp>
-      <p:sp>
-        <p:nvSpPr>
           <p:cNvPr id="8" name="Text 6"/>
           <p:cNvSpPr/>
           <p:nvPr/>
         </p:nvSpPr>
         <p:spPr>
           <a:xfrm>
-            <a:off x="1691640" y="2057400"/>
-            <a:ext cx="9537192" cy="841248"/>
-          </a:xfrm>
-          <a:prstGeom prst="rect">
-            <a:avLst/>
-          </a:prstGeom>
-          <a:noFill/>
-          <a:ln/>
-        </p:spPr>
-        <p:txBody>
-          <a:bodyPr wrap="square" lIns="0" tIns="0" rIns="0" bIns="0" rtlCol="0" anchor="ctr"/>
-          <a:lstStyle/>
-          <a:p>
-            <a:pPr algn="l" indent="0" marL="0">
-              <a:buNone/>
-            </a:pPr>
-            <a:r>
-              <a:rPr lang="en-US" sz="1800" dirty="0">
-                <a:solidFill>
-                  <a:srgbClr val="E6EDF3"/>
-                </a:solidFill>
-                <a:latin typeface="Hiragino Sans" pitchFamily="34" charset="0"/>
-                <a:ea typeface="Hiragino Sans" pitchFamily="34" charset="-122"/>
-                <a:cs typeface="Hiragino Sans" pitchFamily="34" charset="-120"/>
-              </a:rPr>
-              <a:t>コーディングエージェントが何か理解した</a:t>
-            </a:r>
-            <a:endParaRPr lang="en-US" sz="1800" dirty="0"/>
-          </a:p>
-        </p:txBody>
-      </p:sp>
-      <p:sp>
-        <p:nvSpPr>
-          <p:cNvPr id="9" name="Shape 7"/>
-          <p:cNvSpPr/>
-          <p:nvPr/>
-        </p:nvSpPr>
-        <p:spPr>
-          <a:xfrm>
-            <a:off x="640080" y="3063240"/>
-            <a:ext cx="10908792" cy="841248"/>
+            <a:off x="1005840" y="2615184"/>
+            <a:ext cx="4663440" cy="457200"/>
+          </a:xfrm>
+          <a:prstGeom prst="rect">
+            <a:avLst/>
+          </a:prstGeom>
+          <a:noFill/>
+          <a:ln/>
+        </p:spPr>
+        <p:txBody>
+          <a:bodyPr wrap="square" lIns="0" tIns="0" rIns="0" bIns="0" rtlCol="0" anchor="ctr"/>
+          <a:lstStyle/>
+          <a:p>
+            <a:pPr algn="l" indent="0" marL="0">
+              <a:buNone/>
+            </a:pPr>
+            <a:r>
+              <a:rPr lang="en-US" sz="1700" b="1" dirty="0">
+                <a:solidFill>
+                  <a:srgbClr val="58A6FF"/>
+                </a:solidFill>
+                <a:latin typeface="Hiragino Sans" pitchFamily="34" charset="0"/>
+                <a:ea typeface="Hiragino Sans" pitchFamily="34" charset="-122"/>
+                <a:cs typeface="Hiragino Sans" pitchFamily="34" charset="-120"/>
+              </a:rPr>
+              <a:t>他のエージェントを試す</a:t>
+            </a:r>
+            <a:endParaRPr lang="en-US" sz="1700" dirty="0"/>
+          </a:p>
+        </p:txBody>
+      </p:sp>
+      <p:sp>
+        <p:nvSpPr>
+          <p:cNvPr id="9" name="Text 7"/>
+          <p:cNvSpPr/>
+          <p:nvPr/>
+        </p:nvSpPr>
+        <p:spPr>
+          <a:xfrm>
+            <a:off x="1005840" y="3090672"/>
+            <a:ext cx="4663440" cy="685800"/>
+          </a:xfrm>
+          <a:prstGeom prst="rect">
+            <a:avLst/>
+          </a:prstGeom>
+          <a:noFill/>
+          <a:ln/>
+        </p:spPr>
+        <p:txBody>
+          <a:bodyPr wrap="square" lIns="0" tIns="0" rIns="0" bIns="0" rtlCol="0" anchor="t"/>
+          <a:lstStyle/>
+          <a:p>
+            <a:pPr algn="l" indent="0" marL="0">
+              <a:lnSpc>
+                <a:spcPct val="125000"/>
+              </a:lnSpc>
+              <a:buNone/>
+            </a:pPr>
+            <a:r>
+              <a:rPr lang="en-US" sz="1400" dirty="0">
+                <a:solidFill>
+                  <a:srgbClr val="C9D1D9"/>
+                </a:solidFill>
+                <a:latin typeface="Hiragino Sans" pitchFamily="34" charset="0"/>
+                <a:ea typeface="Hiragino Sans" pitchFamily="34" charset="-122"/>
+                <a:cs typeface="Hiragino Sans" pitchFamily="34" charset="-120"/>
+              </a:rPr>
+              <a:t>Claude Code・Codex CLI など。今日の知識がそのまま活きる。</a:t>
+            </a:r>
+            <a:endParaRPr lang="en-US" sz="1400" dirty="0"/>
+          </a:p>
+        </p:txBody>
+      </p:sp>
+      <p:sp>
+        <p:nvSpPr>
+          <p:cNvPr id="10" name="Shape 8"/>
+          <p:cNvSpPr/>
+          <p:nvPr/>
+        </p:nvSpPr>
+        <p:spPr>
+          <a:xfrm>
+            <a:off x="6245352" y="2377440"/>
+            <a:ext cx="5303520" cy="1508760"/>
           </a:xfrm>
           <a:prstGeom prst="roundRect">
             <a:avLst>
-              <a:gd name="adj" fmla="val 8696"/>
+              <a:gd name="adj" fmla="val 4848"/>
             </a:avLst>
           </a:prstGeom>
           <a:solidFill>
@@ -18659,116 +17952,119 @@
       </p:sp>
       <p:sp>
         <p:nvSpPr>
-          <p:cNvPr id="10" name="Shape 8"/>
-          <p:cNvSpPr/>
-          <p:nvPr/>
-        </p:nvSpPr>
-        <p:spPr>
-          <a:xfrm>
-            <a:off x="960120" y="3255264"/>
-            <a:ext cx="457200" cy="457200"/>
-          </a:xfrm>
-          <a:prstGeom prst="ellipse">
+          <p:cNvPr id="11" name="Shape 9"/>
+          <p:cNvSpPr/>
+          <p:nvPr/>
+        </p:nvSpPr>
+        <p:spPr>
+          <a:xfrm>
+            <a:off x="6245352" y="2377440"/>
+            <a:ext cx="82296" cy="1508760"/>
+          </a:xfrm>
+          <a:prstGeom prst="rect">
             <a:avLst/>
           </a:prstGeom>
           <a:solidFill>
-            <a:srgbClr val="3FB950"/>
+            <a:srgbClr val="F0883E"/>
           </a:solidFill>
           <a:ln/>
         </p:spPr>
       </p:sp>
       <p:sp>
         <p:nvSpPr>
-          <p:cNvPr id="11" name="Text 9"/>
-          <p:cNvSpPr/>
-          <p:nvPr/>
-        </p:nvSpPr>
-        <p:spPr>
-          <a:xfrm>
-            <a:off x="960120" y="3255264"/>
-            <a:ext cx="457200" cy="457200"/>
-          </a:xfrm>
-          <a:prstGeom prst="rect">
-            <a:avLst/>
-          </a:prstGeom>
-          <a:noFill/>
-          <a:ln/>
-        </p:spPr>
-        <p:txBody>
-          <a:bodyPr wrap="square" lIns="0" tIns="0" rIns="0" bIns="0" rtlCol="0" anchor="ctr"/>
-          <a:lstStyle/>
-          <a:p>
-            <a:pPr algn="ctr" indent="0" marL="0">
-              <a:buNone/>
-            </a:pPr>
-            <a:r>
-              <a:rPr lang="en-US" sz="1300" b="1" dirty="0">
-                <a:solidFill>
-                  <a:srgbClr val="0D1117"/>
-                </a:solidFill>
-                <a:latin typeface="Hiragino Sans" pitchFamily="34" charset="0"/>
-                <a:ea typeface="Hiragino Sans" pitchFamily="34" charset="-122"/>
-                <a:cs typeface="Hiragino Sans" pitchFamily="34" charset="-120"/>
-              </a:rPr>
-              <a:t>✓</a:t>
-            </a:r>
-            <a:endParaRPr lang="en-US" sz="1300" dirty="0"/>
-          </a:p>
-        </p:txBody>
-      </p:sp>
-      <p:sp>
-        <p:nvSpPr>
           <p:cNvPr id="12" name="Text 10"/>
           <p:cNvSpPr/>
           <p:nvPr/>
         </p:nvSpPr>
         <p:spPr>
           <a:xfrm>
-            <a:off x="1691640" y="3063240"/>
-            <a:ext cx="9537192" cy="841248"/>
-          </a:xfrm>
-          <a:prstGeom prst="rect">
-            <a:avLst/>
-          </a:prstGeom>
-          <a:noFill/>
-          <a:ln/>
-        </p:spPr>
-        <p:txBody>
-          <a:bodyPr wrap="square" lIns="0" tIns="0" rIns="0" bIns="0" rtlCol="0" anchor="ctr"/>
-          <a:lstStyle/>
-          <a:p>
-            <a:pPr algn="l" indent="0" marL="0">
-              <a:buNone/>
-            </a:pPr>
-            <a:r>
-              <a:rPr lang="en-US" sz="1800" dirty="0">
-                <a:solidFill>
-                  <a:srgbClr val="E6EDF3"/>
-                </a:solidFill>
-                <a:latin typeface="Hiragino Sans" pitchFamily="34" charset="0"/>
-                <a:ea typeface="Hiragino Sans" pitchFamily="34" charset="-122"/>
-                <a:cs typeface="Hiragino Sans" pitchFamily="34" charset="-120"/>
-              </a:rPr>
-              <a:t>OpenCode を自分のPCにインストールした</a:t>
-            </a:r>
-            <a:endParaRPr lang="en-US" sz="1800" dirty="0"/>
-          </a:p>
-        </p:txBody>
-      </p:sp>
-      <p:sp>
-        <p:nvSpPr>
-          <p:cNvPr id="13" name="Shape 11"/>
-          <p:cNvSpPr/>
-          <p:nvPr/>
-        </p:nvSpPr>
-        <p:spPr>
-          <a:xfrm>
-            <a:off x="640080" y="4069080"/>
-            <a:ext cx="10908792" cy="841248"/>
+            <a:off x="6611112" y="2615184"/>
+            <a:ext cx="4663440" cy="457200"/>
+          </a:xfrm>
+          <a:prstGeom prst="rect">
+            <a:avLst/>
+          </a:prstGeom>
+          <a:noFill/>
+          <a:ln/>
+        </p:spPr>
+        <p:txBody>
+          <a:bodyPr wrap="square" lIns="0" tIns="0" rIns="0" bIns="0" rtlCol="0" anchor="ctr"/>
+          <a:lstStyle/>
+          <a:p>
+            <a:pPr algn="l" indent="0" marL="0">
+              <a:buNone/>
+            </a:pPr>
+            <a:r>
+              <a:rPr lang="en-US" sz="1700" b="1" dirty="0">
+                <a:solidFill>
+                  <a:srgbClr val="F0883E"/>
+                </a:solidFill>
+                <a:latin typeface="Hiragino Sans" pitchFamily="34" charset="0"/>
+                <a:ea typeface="Hiragino Sans" pitchFamily="34" charset="-122"/>
+                <a:cs typeface="Hiragino Sans" pitchFamily="34" charset="-120"/>
+              </a:rPr>
+              <a:t>高性能モデルで本格開発</a:t>
+            </a:r>
+            <a:endParaRPr lang="en-US" sz="1700" dirty="0"/>
+          </a:p>
+        </p:txBody>
+      </p:sp>
+      <p:sp>
+        <p:nvSpPr>
+          <p:cNvPr id="13" name="Text 11"/>
+          <p:cNvSpPr/>
+          <p:nvPr/>
+        </p:nvSpPr>
+        <p:spPr>
+          <a:xfrm>
+            <a:off x="6611112" y="3090672"/>
+            <a:ext cx="4663440" cy="685800"/>
+          </a:xfrm>
+          <a:prstGeom prst="rect">
+            <a:avLst/>
+          </a:prstGeom>
+          <a:noFill/>
+          <a:ln/>
+        </p:spPr>
+        <p:txBody>
+          <a:bodyPr wrap="square" lIns="0" tIns="0" rIns="0" bIns="0" rtlCol="0" anchor="t"/>
+          <a:lstStyle/>
+          <a:p>
+            <a:pPr algn="l" indent="0" marL="0">
+              <a:lnSpc>
+                <a:spcPct val="125000"/>
+              </a:lnSpc>
+              <a:buNone/>
+            </a:pPr>
+            <a:r>
+              <a:rPr lang="en-US" sz="1400" dirty="0">
+                <a:solidFill>
+                  <a:srgbClr val="C9D1D9"/>
+                </a:solidFill>
+                <a:latin typeface="Hiragino Sans" pitchFamily="34" charset="0"/>
+                <a:ea typeface="Hiragino Sans" pitchFamily="34" charset="-122"/>
+                <a:cs typeface="Hiragino Sans" pitchFamily="34" charset="-120"/>
+              </a:rPr>
+              <a:t>有料モデルにすると精度・速度がぐっと上がる。</a:t>
+            </a:r>
+            <a:endParaRPr lang="en-US" sz="1400" dirty="0"/>
+          </a:p>
+        </p:txBody>
+      </p:sp>
+      <p:sp>
+        <p:nvSpPr>
+          <p:cNvPr id="14" name="Shape 12"/>
+          <p:cNvSpPr/>
+          <p:nvPr/>
+        </p:nvSpPr>
+        <p:spPr>
+          <a:xfrm>
+            <a:off x="640080" y="4087368"/>
+            <a:ext cx="5303520" cy="1508760"/>
           </a:xfrm>
           <a:prstGeom prst="roundRect">
             <a:avLst>
-              <a:gd name="adj" fmla="val 8696"/>
+              <a:gd name="adj" fmla="val 4848"/>
             </a:avLst>
           </a:prstGeom>
           <a:solidFill>
@@ -18791,116 +18087,119 @@
       </p:sp>
       <p:sp>
         <p:nvSpPr>
-          <p:cNvPr id="14" name="Shape 12"/>
-          <p:cNvSpPr/>
-          <p:nvPr/>
-        </p:nvSpPr>
-        <p:spPr>
-          <a:xfrm>
-            <a:off x="960120" y="4261104"/>
-            <a:ext cx="457200" cy="457200"/>
-          </a:xfrm>
-          <a:prstGeom prst="ellipse">
+          <p:cNvPr id="15" name="Shape 13"/>
+          <p:cNvSpPr/>
+          <p:nvPr/>
+        </p:nvSpPr>
+        <p:spPr>
+          <a:xfrm>
+            <a:off x="640080" y="4087368"/>
+            <a:ext cx="82296" cy="1508760"/>
+          </a:xfrm>
+          <a:prstGeom prst="rect">
             <a:avLst/>
           </a:prstGeom>
           <a:solidFill>
-            <a:srgbClr val="3FB950"/>
+            <a:srgbClr val="BC8CFF"/>
           </a:solidFill>
           <a:ln/>
         </p:spPr>
       </p:sp>
       <p:sp>
         <p:nvSpPr>
-          <p:cNvPr id="15" name="Text 13"/>
-          <p:cNvSpPr/>
-          <p:nvPr/>
-        </p:nvSpPr>
-        <p:spPr>
-          <a:xfrm>
-            <a:off x="960120" y="4261104"/>
-            <a:ext cx="457200" cy="457200"/>
-          </a:xfrm>
-          <a:prstGeom prst="rect">
-            <a:avLst/>
-          </a:prstGeom>
-          <a:noFill/>
-          <a:ln/>
-        </p:spPr>
-        <p:txBody>
-          <a:bodyPr wrap="square" lIns="0" tIns="0" rIns="0" bIns="0" rtlCol="0" anchor="ctr"/>
-          <a:lstStyle/>
-          <a:p>
-            <a:pPr algn="ctr" indent="0" marL="0">
-              <a:buNone/>
-            </a:pPr>
-            <a:r>
-              <a:rPr lang="en-US" sz="1300" b="1" dirty="0">
-                <a:solidFill>
-                  <a:srgbClr val="0D1117"/>
-                </a:solidFill>
-                <a:latin typeface="Hiragino Sans" pitchFamily="34" charset="0"/>
-                <a:ea typeface="Hiragino Sans" pitchFamily="34" charset="-122"/>
-                <a:cs typeface="Hiragino Sans" pitchFamily="34" charset="-120"/>
-              </a:rPr>
-              <a:t>✓</a:t>
-            </a:r>
-            <a:endParaRPr lang="en-US" sz="1300" dirty="0"/>
-          </a:p>
-        </p:txBody>
-      </p:sp>
-      <p:sp>
-        <p:nvSpPr>
           <p:cNvPr id="16" name="Text 14"/>
           <p:cNvSpPr/>
           <p:nvPr/>
         </p:nvSpPr>
         <p:spPr>
           <a:xfrm>
-            <a:off x="1691640" y="4069080"/>
-            <a:ext cx="9537192" cy="841248"/>
-          </a:xfrm>
-          <a:prstGeom prst="rect">
-            <a:avLst/>
-          </a:prstGeom>
-          <a:noFill/>
-          <a:ln/>
-        </p:spPr>
-        <p:txBody>
-          <a:bodyPr wrap="square" lIns="0" tIns="0" rIns="0" bIns="0" rtlCol="0" anchor="ctr"/>
-          <a:lstStyle/>
-          <a:p>
-            <a:pPr algn="l" indent="0" marL="0">
-              <a:buNone/>
-            </a:pPr>
-            <a:r>
-              <a:rPr lang="en-US" sz="1800" dirty="0">
-                <a:solidFill>
-                  <a:srgbClr val="E6EDF3"/>
-                </a:solidFill>
-                <a:latin typeface="Hiragino Sans" pitchFamily="34" charset="0"/>
-                <a:ea typeface="Hiragino Sans" pitchFamily="34" charset="-122"/>
-                <a:cs typeface="Hiragino Sans" pitchFamily="34" charset="-120"/>
-              </a:rPr>
-              <a:t>OpenRouter の無料モデルに接続した</a:t>
-            </a:r>
-            <a:endParaRPr lang="en-US" sz="1800" dirty="0"/>
-          </a:p>
-        </p:txBody>
-      </p:sp>
-      <p:sp>
-        <p:nvSpPr>
-          <p:cNvPr id="17" name="Shape 15"/>
-          <p:cNvSpPr/>
-          <p:nvPr/>
-        </p:nvSpPr>
-        <p:spPr>
-          <a:xfrm>
-            <a:off x="640080" y="5074920"/>
-            <a:ext cx="10908792" cy="841248"/>
+            <a:off x="1005840" y="4325112"/>
+            <a:ext cx="4663440" cy="457200"/>
+          </a:xfrm>
+          <a:prstGeom prst="rect">
+            <a:avLst/>
+          </a:prstGeom>
+          <a:noFill/>
+          <a:ln/>
+        </p:spPr>
+        <p:txBody>
+          <a:bodyPr wrap="square" lIns="0" tIns="0" rIns="0" bIns="0" rtlCol="0" anchor="ctr"/>
+          <a:lstStyle/>
+          <a:p>
+            <a:pPr algn="l" indent="0" marL="0">
+              <a:buNone/>
+            </a:pPr>
+            <a:r>
+              <a:rPr lang="en-US" sz="1700" b="1" dirty="0">
+                <a:solidFill>
+                  <a:srgbClr val="BC8CFF"/>
+                </a:solidFill>
+                <a:latin typeface="Hiragino Sans" pitchFamily="34" charset="0"/>
+                <a:ea typeface="Hiragino Sans" pitchFamily="34" charset="-122"/>
+                <a:cs typeface="Hiragino Sans" pitchFamily="34" charset="-120"/>
+              </a:rPr>
+              <a:t>Webアプリに挑戦</a:t>
+            </a:r>
+            <a:endParaRPr lang="en-US" sz="1700" dirty="0"/>
+          </a:p>
+        </p:txBody>
+      </p:sp>
+      <p:sp>
+        <p:nvSpPr>
+          <p:cNvPr id="17" name="Text 15"/>
+          <p:cNvSpPr/>
+          <p:nvPr/>
+        </p:nvSpPr>
+        <p:spPr>
+          <a:xfrm>
+            <a:off x="1005840" y="4800600"/>
+            <a:ext cx="4663440" cy="685800"/>
+          </a:xfrm>
+          <a:prstGeom prst="rect">
+            <a:avLst/>
+          </a:prstGeom>
+          <a:noFill/>
+          <a:ln/>
+        </p:spPr>
+        <p:txBody>
+          <a:bodyPr wrap="square" lIns="0" tIns="0" rIns="0" bIns="0" rtlCol="0" anchor="t"/>
+          <a:lstStyle/>
+          <a:p>
+            <a:pPr algn="l" indent="0" marL="0">
+              <a:lnSpc>
+                <a:spcPct val="125000"/>
+              </a:lnSpc>
+              <a:buNone/>
+            </a:pPr>
+            <a:r>
+              <a:rPr lang="en-US" sz="1400" dirty="0">
+                <a:solidFill>
+                  <a:srgbClr val="C9D1D9"/>
+                </a:solidFill>
+                <a:latin typeface="Hiragino Sans" pitchFamily="34" charset="0"/>
+                <a:ea typeface="Hiragino Sans" pitchFamily="34" charset="-122"/>
+                <a:cs typeface="Hiragino Sans" pitchFamily="34" charset="-120"/>
+              </a:rPr>
+              <a:t>Node を入れて Vite などで本格的なアプリへ。</a:t>
+            </a:r>
+            <a:endParaRPr lang="en-US" sz="1400" dirty="0"/>
+          </a:p>
+        </p:txBody>
+      </p:sp>
+      <p:sp>
+        <p:nvSpPr>
+          <p:cNvPr id="18" name="Shape 16"/>
+          <p:cNvSpPr/>
+          <p:nvPr/>
+        </p:nvSpPr>
+        <p:spPr>
+          <a:xfrm>
+            <a:off x="6245352" y="4087368"/>
+            <a:ext cx="5303520" cy="1508760"/>
           </a:xfrm>
           <a:prstGeom prst="roundRect">
             <a:avLst>
-              <a:gd name="adj" fmla="val 8696"/>
+              <a:gd name="adj" fmla="val 4848"/>
             </a:avLst>
           </a:prstGeom>
           <a:solidFill>
@@ -18923,16 +18222,16 @@
       </p:sp>
       <p:sp>
         <p:nvSpPr>
-          <p:cNvPr id="18" name="Shape 16"/>
-          <p:cNvSpPr/>
-          <p:nvPr/>
-        </p:nvSpPr>
-        <p:spPr>
-          <a:xfrm>
-            <a:off x="960120" y="5266944"/>
-            <a:ext cx="457200" cy="457200"/>
-          </a:xfrm>
-          <a:prstGeom prst="ellipse">
+          <p:cNvPr id="19" name="Shape 17"/>
+          <p:cNvSpPr/>
+          <p:nvPr/>
+        </p:nvSpPr>
+        <p:spPr>
+          <a:xfrm>
+            <a:off x="6245352" y="4087368"/>
+            <a:ext cx="82296" cy="1508760"/>
+          </a:xfrm>
+          <a:prstGeom prst="rect">
             <a:avLst/>
           </a:prstGeom>
           <a:solidFill>
@@ -18943,85 +18242,88 @@
       </p:sp>
       <p:sp>
         <p:nvSpPr>
-          <p:cNvPr id="19" name="Text 17"/>
-          <p:cNvSpPr/>
-          <p:nvPr/>
-        </p:nvSpPr>
-        <p:spPr>
-          <a:xfrm>
-            <a:off x="960120" y="5266944"/>
-            <a:ext cx="457200" cy="457200"/>
-          </a:xfrm>
-          <a:prstGeom prst="rect">
-            <a:avLst/>
-          </a:prstGeom>
-          <a:noFill/>
-          <a:ln/>
-        </p:spPr>
-        <p:txBody>
-          <a:bodyPr wrap="square" lIns="0" tIns="0" rIns="0" bIns="0" rtlCol="0" anchor="ctr"/>
-          <a:lstStyle/>
-          <a:p>
-            <a:pPr algn="ctr" indent="0" marL="0">
-              <a:buNone/>
-            </a:pPr>
-            <a:r>
-              <a:rPr lang="en-US" sz="1300" b="1" dirty="0">
-                <a:solidFill>
-                  <a:srgbClr val="0D1117"/>
-                </a:solidFill>
-                <a:latin typeface="Hiragino Sans" pitchFamily="34" charset="0"/>
-                <a:ea typeface="Hiragino Sans" pitchFamily="34" charset="-122"/>
-                <a:cs typeface="Hiragino Sans" pitchFamily="34" charset="-120"/>
-              </a:rPr>
-              <a:t>✓</a:t>
-            </a:r>
-            <a:endParaRPr lang="en-US" sz="1300" dirty="0"/>
-          </a:p>
-        </p:txBody>
-      </p:sp>
-      <p:sp>
-        <p:nvSpPr>
           <p:cNvPr id="20" name="Text 18"/>
           <p:cNvSpPr/>
           <p:nvPr/>
         </p:nvSpPr>
         <p:spPr>
           <a:xfrm>
-            <a:off x="1691640" y="5074920"/>
-            <a:ext cx="9537192" cy="841248"/>
-          </a:xfrm>
-          <a:prstGeom prst="rect">
-            <a:avLst/>
-          </a:prstGeom>
-          <a:noFill/>
-          <a:ln/>
-        </p:spPr>
-        <p:txBody>
-          <a:bodyPr wrap="square" lIns="0" tIns="0" rIns="0" bIns="0" rtlCol="0" anchor="ctr"/>
-          <a:lstStyle/>
-          <a:p>
-            <a:pPr algn="l" indent="0" marL="0">
-              <a:buNone/>
-            </a:pPr>
-            <a:r>
-              <a:rPr lang="en-US" sz="1800" dirty="0">
-                <a:solidFill>
-                  <a:srgbClr val="E6EDF3"/>
-                </a:solidFill>
-                <a:latin typeface="Hiragino Sans" pitchFamily="34" charset="0"/>
-                <a:ea typeface="Hiragino Sans" pitchFamily="34" charset="-122"/>
-                <a:cs typeface="Hiragino Sans" pitchFamily="34" charset="-120"/>
-              </a:rPr>
-              <a:t>複数ファイルの ToDo アプリを作らせた</a:t>
-            </a:r>
-            <a:endParaRPr lang="en-US" sz="1800" dirty="0"/>
+            <a:off x="6611112" y="4325112"/>
+            <a:ext cx="4663440" cy="457200"/>
+          </a:xfrm>
+          <a:prstGeom prst="rect">
+            <a:avLst/>
+          </a:prstGeom>
+          <a:noFill/>
+          <a:ln/>
+        </p:spPr>
+        <p:txBody>
+          <a:bodyPr wrap="square" lIns="0" tIns="0" rIns="0" bIns="0" rtlCol="0" anchor="ctr"/>
+          <a:lstStyle/>
+          <a:p>
+            <a:pPr algn="l" indent="0" marL="0">
+              <a:buNone/>
+            </a:pPr>
+            <a:r>
+              <a:rPr lang="en-US" sz="1700" b="1" dirty="0">
+                <a:solidFill>
+                  <a:srgbClr val="3FB950"/>
+                </a:solidFill>
+                <a:latin typeface="Hiragino Sans" pitchFamily="34" charset="0"/>
+                <a:ea typeface="Hiragino Sans" pitchFamily="34" charset="-122"/>
+                <a:cs typeface="Hiragino Sans" pitchFamily="34" charset="-120"/>
+              </a:rPr>
+              <a:t>ふだんの作業に使う</a:t>
+            </a:r>
+            <a:endParaRPr lang="en-US" sz="1700" dirty="0"/>
           </a:p>
         </p:txBody>
       </p:sp>
       <p:sp>
         <p:nvSpPr>
           <p:cNvPr id="21" name="Text 19"/>
+          <p:cNvSpPr/>
+          <p:nvPr/>
+        </p:nvSpPr>
+        <p:spPr>
+          <a:xfrm>
+            <a:off x="6611112" y="4800600"/>
+            <a:ext cx="4663440" cy="685800"/>
+          </a:xfrm>
+          <a:prstGeom prst="rect">
+            <a:avLst/>
+          </a:prstGeom>
+          <a:noFill/>
+          <a:ln/>
+        </p:spPr>
+        <p:txBody>
+          <a:bodyPr wrap="square" lIns="0" tIns="0" rIns="0" bIns="0" rtlCol="0" anchor="t"/>
+          <a:lstStyle/>
+          <a:p>
+            <a:pPr algn="l" indent="0" marL="0">
+              <a:lnSpc>
+                <a:spcPct val="125000"/>
+              </a:lnSpc>
+              <a:buNone/>
+            </a:pPr>
+            <a:r>
+              <a:rPr lang="en-US" sz="1400" dirty="0">
+                <a:solidFill>
+                  <a:srgbClr val="C9D1D9"/>
+                </a:solidFill>
+                <a:latin typeface="Hiragino Sans" pitchFamily="34" charset="0"/>
+                <a:ea typeface="Hiragino Sans" pitchFamily="34" charset="-122"/>
+                <a:cs typeface="Hiragino Sans" pitchFamily="34" charset="-120"/>
+              </a:rPr>
+              <a:t>調べもの・修正・自動化など、研究や開発の相棒に。</a:t>
+            </a:r>
+            <a:endParaRPr lang="en-US" sz="1400" dirty="0"/>
+          </a:p>
+        </p:txBody>
+      </p:sp>
+      <p:sp>
+        <p:nvSpPr>
+          <p:cNvPr id="22" name="Text 20"/>
           <p:cNvSpPr/>
           <p:nvPr/>
         </p:nvSpPr>
@@ -19074,7 +18376,7 @@
       </p:sp>
       <p:sp>
         <p:nvSpPr>
-          <p:cNvPr id="22" name="Text 20"/>
+          <p:cNvPr id="23" name="Text 21"/>
           <p:cNvSpPr/>
           <p:nvPr/>
         </p:nvSpPr>
@@ -19105,7 +18407,7 @@
                 <a:ea typeface="Menlo" pitchFamily="34" charset="-122"/>
                 <a:cs typeface="Menlo" pitchFamily="34" charset="-120"/>
               </a:rPr>
-              <a:t>24 / 27</a:t>
+              <a:t>24 / 26</a:t>
             </a:r>
             <a:endParaRPr lang="en-US" sz="900" dirty="0"/>
           </a:p>
@@ -19254,7 +18556,7 @@
                 <a:ea typeface="Hiragino Sans" pitchFamily="34" charset="-122"/>
                 <a:cs typeface="Hiragino Sans" pitchFamily="34" charset="-120"/>
               </a:rPr>
-              <a:t>もっと先へ</a:t>
+              <a:t>参考リンク</a:t>
             </a:r>
             <a:endParaRPr lang="en-US" sz="2900" dirty="0"/>
           </a:p>
@@ -19262,57 +18564,18 @@
       </p:sp>
       <p:sp>
         <p:nvSpPr>
-          <p:cNvPr id="5" name="Text 3"/>
-          <p:cNvSpPr/>
-          <p:nvPr/>
-        </p:nvSpPr>
-        <p:spPr>
-          <a:xfrm>
-            <a:off x="640080" y="1737360"/>
-            <a:ext cx="10908792" cy="457200"/>
-          </a:xfrm>
-          <a:prstGeom prst="rect">
-            <a:avLst/>
-          </a:prstGeom>
-          <a:noFill/>
-          <a:ln/>
-        </p:spPr>
-        <p:txBody>
-          <a:bodyPr wrap="square" lIns="0" tIns="0" rIns="0" bIns="0" rtlCol="0" anchor="ctr"/>
-          <a:lstStyle/>
-          <a:p>
-            <a:pPr algn="l" indent="0" marL="0">
-              <a:buNone/>
-            </a:pPr>
-            <a:r>
-              <a:rPr lang="en-US" sz="1500" dirty="0">
-                <a:solidFill>
-                  <a:srgbClr val="8B949E"/>
-                </a:solidFill>
-                <a:latin typeface="Hiragino Sans" pitchFamily="34" charset="0"/>
-                <a:ea typeface="Hiragino Sans" pitchFamily="34" charset="-122"/>
-                <a:cs typeface="Hiragino Sans" pitchFamily="34" charset="-120"/>
-              </a:rPr>
-              <a:t>今日おぼえた “頼み方” と “指示ファイル” は、どのエージェントでもそのまま使えます。</a:t>
-            </a:r>
-            <a:endParaRPr lang="en-US" sz="1500" dirty="0"/>
-          </a:p>
-        </p:txBody>
-      </p:sp>
-      <p:sp>
-        <p:nvSpPr>
-          <p:cNvPr id="6" name="Shape 4"/>
-          <p:cNvSpPr/>
-          <p:nvPr/>
-        </p:nvSpPr>
-        <p:spPr>
-          <a:xfrm>
-            <a:off x="640080" y="2377440"/>
-            <a:ext cx="5303520" cy="1508760"/>
+          <p:cNvPr id="5" name="Shape 3"/>
+          <p:cNvSpPr/>
+          <p:nvPr/>
+        </p:nvSpPr>
+        <p:spPr>
+          <a:xfrm>
+            <a:off x="640080" y="2011680"/>
+            <a:ext cx="10908792" cy="868680"/>
           </a:xfrm>
           <a:prstGeom prst="roundRect">
             <a:avLst>
-              <a:gd name="adj" fmla="val 4848"/>
+              <a:gd name="adj" fmla="val 8421"/>
             </a:avLst>
           </a:prstGeom>
           <a:solidFill>
@@ -19335,100 +18598,97 @@
       </p:sp>
       <p:sp>
         <p:nvSpPr>
-          <p:cNvPr id="7" name="Shape 5"/>
-          <p:cNvSpPr/>
-          <p:nvPr/>
-        </p:nvSpPr>
-        <p:spPr>
-          <a:xfrm>
-            <a:off x="640080" y="2377440"/>
-            <a:ext cx="82296" cy="1508760"/>
+          <p:cNvPr id="6" name="Shape 4"/>
+          <p:cNvSpPr/>
+          <p:nvPr/>
+        </p:nvSpPr>
+        <p:spPr>
+          <a:xfrm>
+            <a:off x="640080" y="2011680"/>
+            <a:ext cx="82296" cy="868680"/>
           </a:xfrm>
           <a:prstGeom prst="rect">
             <a:avLst/>
           </a:prstGeom>
           <a:solidFill>
-            <a:srgbClr val="58A6FF"/>
+            <a:srgbClr val="3FB950"/>
           </a:solidFill>
           <a:ln/>
         </p:spPr>
       </p:sp>
       <p:sp>
         <p:nvSpPr>
+          <p:cNvPr id="7" name="Text 5"/>
+          <p:cNvSpPr/>
+          <p:nvPr/>
+        </p:nvSpPr>
+        <p:spPr>
+          <a:xfrm>
+            <a:off x="1005840" y="2011680"/>
+            <a:ext cx="4754880" cy="868680"/>
+          </a:xfrm>
+          <a:prstGeom prst="rect">
+            <a:avLst/>
+          </a:prstGeom>
+          <a:noFill/>
+          <a:ln/>
+        </p:spPr>
+        <p:txBody>
+          <a:bodyPr wrap="square" lIns="0" tIns="0" rIns="0" bIns="0" rtlCol="0" anchor="ctr"/>
+          <a:lstStyle/>
+          <a:p>
+            <a:pPr algn="l" indent="0" marL="0">
+              <a:buNone/>
+            </a:pPr>
+            <a:r>
+              <a:rPr lang="en-US" sz="1600" b="1" dirty="0">
+                <a:solidFill>
+                  <a:srgbClr val="E6EDF3"/>
+                </a:solidFill>
+                <a:latin typeface="Hiragino Sans" pitchFamily="34" charset="0"/>
+                <a:ea typeface="Hiragino Sans" pitchFamily="34" charset="-122"/>
+                <a:cs typeface="Hiragino Sans" pitchFamily="34" charset="-120"/>
+              </a:rPr>
+              <a:t>OpenCode（今日のツール）</a:t>
+            </a:r>
+            <a:endParaRPr lang="en-US" sz="1600" dirty="0"/>
+          </a:p>
+        </p:txBody>
+      </p:sp>
+      <p:sp>
+        <p:nvSpPr>
           <p:cNvPr id="8" name="Text 6"/>
           <p:cNvSpPr/>
           <p:nvPr/>
         </p:nvSpPr>
         <p:spPr>
           <a:xfrm>
-            <a:off x="1005840" y="2615184"/>
-            <a:ext cx="4663440" cy="457200"/>
-          </a:xfrm>
-          <a:prstGeom prst="rect">
-            <a:avLst/>
-          </a:prstGeom>
-          <a:noFill/>
-          <a:ln/>
-        </p:spPr>
-        <p:txBody>
-          <a:bodyPr wrap="square" lIns="0" tIns="0" rIns="0" bIns="0" rtlCol="0" anchor="ctr"/>
-          <a:lstStyle/>
-          <a:p>
-            <a:pPr algn="l" indent="0" marL="0">
-              <a:buNone/>
-            </a:pPr>
-            <a:r>
-              <a:rPr lang="en-US" sz="1700" b="1" dirty="0">
-                <a:solidFill>
-                  <a:srgbClr val="58A6FF"/>
-                </a:solidFill>
-                <a:latin typeface="Hiragino Sans" pitchFamily="34" charset="0"/>
-                <a:ea typeface="Hiragino Sans" pitchFamily="34" charset="-122"/>
-                <a:cs typeface="Hiragino Sans" pitchFamily="34" charset="-120"/>
-              </a:rPr>
-              <a:t>他のエージェントを試す</a:t>
-            </a:r>
-            <a:endParaRPr lang="en-US" sz="1700" dirty="0"/>
-          </a:p>
-        </p:txBody>
-      </p:sp>
-      <p:sp>
-        <p:nvSpPr>
-          <p:cNvPr id="9" name="Text 7"/>
-          <p:cNvSpPr/>
-          <p:nvPr/>
-        </p:nvSpPr>
-        <p:spPr>
-          <a:xfrm>
-            <a:off x="1005840" y="3090672"/>
-            <a:ext cx="4663440" cy="685800"/>
-          </a:xfrm>
-          <a:prstGeom prst="rect">
-            <a:avLst/>
-          </a:prstGeom>
-          <a:noFill/>
-          <a:ln/>
-        </p:spPr>
-        <p:txBody>
-          <a:bodyPr wrap="square" lIns="0" tIns="0" rIns="0" bIns="0" rtlCol="0" anchor="t"/>
-          <a:lstStyle/>
-          <a:p>
-            <a:pPr algn="l" indent="0" marL="0">
-              <a:lnSpc>
-                <a:spcPct val="125000"/>
-              </a:lnSpc>
+            <a:off x="5486400" y="2011680"/>
+            <a:ext cx="5788152" cy="868680"/>
+          </a:xfrm>
+          <a:prstGeom prst="rect">
+            <a:avLst/>
+          </a:prstGeom>
+          <a:noFill/>
+          <a:ln/>
+        </p:spPr>
+        <p:txBody>
+          <a:bodyPr wrap="square" lIns="0" tIns="0" rIns="0" bIns="0" rtlCol="0" anchor="ctr"/>
+          <a:lstStyle/>
+          <a:p>
+            <a:pPr algn="l" indent="0" marL="0">
               <a:buNone/>
             </a:pPr>
             <a:r>
               <a:rPr lang="en-US" sz="1400" dirty="0">
                 <a:solidFill>
-                  <a:srgbClr val="C9D1D9"/>
-                </a:solidFill>
-                <a:latin typeface="Hiragino Sans" pitchFamily="34" charset="0"/>
-                <a:ea typeface="Hiragino Sans" pitchFamily="34" charset="-122"/>
-                <a:cs typeface="Hiragino Sans" pitchFamily="34" charset="-120"/>
-              </a:rPr>
-              <a:t>Claude Code・Codex CLI など。今日の知識がそのまま活きる。</a:t>
+                  <a:srgbClr val="3FB950"/>
+                </a:solidFill>
+                <a:latin typeface="Menlo" pitchFamily="34" charset="0"/>
+                <a:ea typeface="Menlo" pitchFamily="34" charset="-122"/>
+                <a:cs typeface="Menlo" pitchFamily="34" charset="-120"/>
+              </a:rPr>
+              <a:t>opencode.ai/docs</a:t>
             </a:r>
             <a:endParaRPr lang="en-US" sz="1400" dirty="0"/>
           </a:p>
@@ -19436,18 +18696,18 @@
       </p:sp>
       <p:sp>
         <p:nvSpPr>
-          <p:cNvPr id="10" name="Shape 8"/>
-          <p:cNvSpPr/>
-          <p:nvPr/>
-        </p:nvSpPr>
-        <p:spPr>
-          <a:xfrm>
-            <a:off x="6245352" y="2377440"/>
-            <a:ext cx="5303520" cy="1508760"/>
+          <p:cNvPr id="9" name="Shape 7"/>
+          <p:cNvSpPr/>
+          <p:nvPr/>
+        </p:nvSpPr>
+        <p:spPr>
+          <a:xfrm>
+            <a:off x="640080" y="3026664"/>
+            <a:ext cx="10908792" cy="868680"/>
           </a:xfrm>
           <a:prstGeom prst="roundRect">
             <a:avLst>
-              <a:gd name="adj" fmla="val 4848"/>
+              <a:gd name="adj" fmla="val 8421"/>
             </a:avLst>
           </a:prstGeom>
           <a:solidFill>
@@ -19470,100 +18730,97 @@
       </p:sp>
       <p:sp>
         <p:nvSpPr>
-          <p:cNvPr id="11" name="Shape 9"/>
-          <p:cNvSpPr/>
-          <p:nvPr/>
-        </p:nvSpPr>
-        <p:spPr>
-          <a:xfrm>
-            <a:off x="6245352" y="2377440"/>
-            <a:ext cx="82296" cy="1508760"/>
+          <p:cNvPr id="10" name="Shape 8"/>
+          <p:cNvSpPr/>
+          <p:nvPr/>
+        </p:nvSpPr>
+        <p:spPr>
+          <a:xfrm>
+            <a:off x="640080" y="3026664"/>
+            <a:ext cx="82296" cy="868680"/>
           </a:xfrm>
           <a:prstGeom prst="rect">
             <a:avLst/>
           </a:prstGeom>
           <a:solidFill>
-            <a:srgbClr val="F0883E"/>
+            <a:srgbClr val="58A6FF"/>
           </a:solidFill>
           <a:ln/>
         </p:spPr>
       </p:sp>
       <p:sp>
         <p:nvSpPr>
+          <p:cNvPr id="11" name="Text 9"/>
+          <p:cNvSpPr/>
+          <p:nvPr/>
+        </p:nvSpPr>
+        <p:spPr>
+          <a:xfrm>
+            <a:off x="1005840" y="3026664"/>
+            <a:ext cx="4754880" cy="868680"/>
+          </a:xfrm>
+          <a:prstGeom prst="rect">
+            <a:avLst/>
+          </a:prstGeom>
+          <a:noFill/>
+          <a:ln/>
+        </p:spPr>
+        <p:txBody>
+          <a:bodyPr wrap="square" lIns="0" tIns="0" rIns="0" bIns="0" rtlCol="0" anchor="ctr"/>
+          <a:lstStyle/>
+          <a:p>
+            <a:pPr algn="l" indent="0" marL="0">
+              <a:buNone/>
+            </a:pPr>
+            <a:r>
+              <a:rPr lang="en-US" sz="1600" b="1" dirty="0">
+                <a:solidFill>
+                  <a:srgbClr val="E6EDF3"/>
+                </a:solidFill>
+                <a:latin typeface="Hiragino Sans" pitchFamily="34" charset="0"/>
+                <a:ea typeface="Hiragino Sans" pitchFamily="34" charset="-122"/>
+                <a:cs typeface="Hiragino Sans" pitchFamily="34" charset="-120"/>
+              </a:rPr>
+              <a:t>OpenRouter API キー</a:t>
+            </a:r>
+            <a:endParaRPr lang="en-US" sz="1600" dirty="0"/>
+          </a:p>
+        </p:txBody>
+      </p:sp>
+      <p:sp>
+        <p:nvSpPr>
           <p:cNvPr id="12" name="Text 10"/>
           <p:cNvSpPr/>
           <p:nvPr/>
         </p:nvSpPr>
         <p:spPr>
           <a:xfrm>
-            <a:off x="6611112" y="2615184"/>
-            <a:ext cx="4663440" cy="457200"/>
-          </a:xfrm>
-          <a:prstGeom prst="rect">
-            <a:avLst/>
-          </a:prstGeom>
-          <a:noFill/>
-          <a:ln/>
-        </p:spPr>
-        <p:txBody>
-          <a:bodyPr wrap="square" lIns="0" tIns="0" rIns="0" bIns="0" rtlCol="0" anchor="ctr"/>
-          <a:lstStyle/>
-          <a:p>
-            <a:pPr algn="l" indent="0" marL="0">
-              <a:buNone/>
-            </a:pPr>
-            <a:r>
-              <a:rPr lang="en-US" sz="1700" b="1" dirty="0">
-                <a:solidFill>
-                  <a:srgbClr val="F0883E"/>
-                </a:solidFill>
-                <a:latin typeface="Hiragino Sans" pitchFamily="34" charset="0"/>
-                <a:ea typeface="Hiragino Sans" pitchFamily="34" charset="-122"/>
-                <a:cs typeface="Hiragino Sans" pitchFamily="34" charset="-120"/>
-              </a:rPr>
-              <a:t>高性能モデルで本格開発</a:t>
-            </a:r>
-            <a:endParaRPr lang="en-US" sz="1700" dirty="0"/>
-          </a:p>
-        </p:txBody>
-      </p:sp>
-      <p:sp>
-        <p:nvSpPr>
-          <p:cNvPr id="13" name="Text 11"/>
-          <p:cNvSpPr/>
-          <p:nvPr/>
-        </p:nvSpPr>
-        <p:spPr>
-          <a:xfrm>
-            <a:off x="6611112" y="3090672"/>
-            <a:ext cx="4663440" cy="685800"/>
-          </a:xfrm>
-          <a:prstGeom prst="rect">
-            <a:avLst/>
-          </a:prstGeom>
-          <a:noFill/>
-          <a:ln/>
-        </p:spPr>
-        <p:txBody>
-          <a:bodyPr wrap="square" lIns="0" tIns="0" rIns="0" bIns="0" rtlCol="0" anchor="t"/>
-          <a:lstStyle/>
-          <a:p>
-            <a:pPr algn="l" indent="0" marL="0">
-              <a:lnSpc>
-                <a:spcPct val="125000"/>
-              </a:lnSpc>
+            <a:off x="5486400" y="3026664"/>
+            <a:ext cx="5788152" cy="868680"/>
+          </a:xfrm>
+          <a:prstGeom prst="rect">
+            <a:avLst/>
+          </a:prstGeom>
+          <a:noFill/>
+          <a:ln/>
+        </p:spPr>
+        <p:txBody>
+          <a:bodyPr wrap="square" lIns="0" tIns="0" rIns="0" bIns="0" rtlCol="0" anchor="ctr"/>
+          <a:lstStyle/>
+          <a:p>
+            <a:pPr algn="l" indent="0" marL="0">
               <a:buNone/>
             </a:pPr>
             <a:r>
               <a:rPr lang="en-US" sz="1400" dirty="0">
                 <a:solidFill>
-                  <a:srgbClr val="C9D1D9"/>
-                </a:solidFill>
-                <a:latin typeface="Hiragino Sans" pitchFamily="34" charset="0"/>
-                <a:ea typeface="Hiragino Sans" pitchFamily="34" charset="-122"/>
-                <a:cs typeface="Hiragino Sans" pitchFamily="34" charset="-120"/>
-              </a:rPr>
-              <a:t>有料モデルにすると精度・速度がぐっと上がる。</a:t>
+                  <a:srgbClr val="58A6FF"/>
+                </a:solidFill>
+                <a:latin typeface="Menlo" pitchFamily="34" charset="0"/>
+                <a:ea typeface="Menlo" pitchFamily="34" charset="-122"/>
+                <a:cs typeface="Menlo" pitchFamily="34" charset="-120"/>
+              </a:rPr>
+              <a:t>openrouter.ai/keys</a:t>
             </a:r>
             <a:endParaRPr lang="en-US" sz="1400" dirty="0"/>
           </a:p>
@@ -19571,18 +18828,18 @@
       </p:sp>
       <p:sp>
         <p:nvSpPr>
-          <p:cNvPr id="14" name="Shape 12"/>
-          <p:cNvSpPr/>
-          <p:nvPr/>
-        </p:nvSpPr>
-        <p:spPr>
-          <a:xfrm>
-            <a:off x="640080" y="4087368"/>
-            <a:ext cx="5303520" cy="1508760"/>
+          <p:cNvPr id="13" name="Shape 11"/>
+          <p:cNvSpPr/>
+          <p:nvPr/>
+        </p:nvSpPr>
+        <p:spPr>
+          <a:xfrm>
+            <a:off x="640080" y="4041648"/>
+            <a:ext cx="10908792" cy="868680"/>
           </a:xfrm>
           <a:prstGeom prst="roundRect">
             <a:avLst>
-              <a:gd name="adj" fmla="val 4848"/>
+              <a:gd name="adj" fmla="val 8421"/>
             </a:avLst>
           </a:prstGeom>
           <a:solidFill>
@@ -19605,100 +18862,97 @@
       </p:sp>
       <p:sp>
         <p:nvSpPr>
-          <p:cNvPr id="15" name="Shape 13"/>
-          <p:cNvSpPr/>
-          <p:nvPr/>
-        </p:nvSpPr>
-        <p:spPr>
-          <a:xfrm>
-            <a:off x="640080" y="4087368"/>
-            <a:ext cx="82296" cy="1508760"/>
+          <p:cNvPr id="14" name="Shape 12"/>
+          <p:cNvSpPr/>
+          <p:nvPr/>
+        </p:nvSpPr>
+        <p:spPr>
+          <a:xfrm>
+            <a:off x="640080" y="4041648"/>
+            <a:ext cx="82296" cy="868680"/>
           </a:xfrm>
           <a:prstGeom prst="rect">
             <a:avLst/>
           </a:prstGeom>
           <a:solidFill>
-            <a:srgbClr val="BC8CFF"/>
+            <a:srgbClr val="F0883E"/>
           </a:solidFill>
           <a:ln/>
         </p:spPr>
       </p:sp>
       <p:sp>
         <p:nvSpPr>
+          <p:cNvPr id="15" name="Text 13"/>
+          <p:cNvSpPr/>
+          <p:nvPr/>
+        </p:nvSpPr>
+        <p:spPr>
+          <a:xfrm>
+            <a:off x="1005840" y="4041648"/>
+            <a:ext cx="4754880" cy="868680"/>
+          </a:xfrm>
+          <a:prstGeom prst="rect">
+            <a:avLst/>
+          </a:prstGeom>
+          <a:noFill/>
+          <a:ln/>
+        </p:spPr>
+        <p:txBody>
+          <a:bodyPr wrap="square" lIns="0" tIns="0" rIns="0" bIns="0" rtlCol="0" anchor="ctr"/>
+          <a:lstStyle/>
+          <a:p>
+            <a:pPr algn="l" indent="0" marL="0">
+              <a:buNone/>
+            </a:pPr>
+            <a:r>
+              <a:rPr lang="en-US" sz="1600" b="1" dirty="0">
+                <a:solidFill>
+                  <a:srgbClr val="E6EDF3"/>
+                </a:solidFill>
+                <a:latin typeface="Hiragino Sans" pitchFamily="34" charset="0"/>
+                <a:ea typeface="Hiragino Sans" pitchFamily="34" charset="-122"/>
+                <a:cs typeface="Hiragino Sans" pitchFamily="34" charset="-120"/>
+              </a:rPr>
+              <a:t>Claude Code</a:t>
+            </a:r>
+            <a:endParaRPr lang="en-US" sz="1600" dirty="0"/>
+          </a:p>
+        </p:txBody>
+      </p:sp>
+      <p:sp>
+        <p:nvSpPr>
           <p:cNvPr id="16" name="Text 14"/>
           <p:cNvSpPr/>
           <p:nvPr/>
         </p:nvSpPr>
         <p:spPr>
           <a:xfrm>
-            <a:off x="1005840" y="4325112"/>
-            <a:ext cx="4663440" cy="457200"/>
-          </a:xfrm>
-          <a:prstGeom prst="rect">
-            <a:avLst/>
-          </a:prstGeom>
-          <a:noFill/>
-          <a:ln/>
-        </p:spPr>
-        <p:txBody>
-          <a:bodyPr wrap="square" lIns="0" tIns="0" rIns="0" bIns="0" rtlCol="0" anchor="ctr"/>
-          <a:lstStyle/>
-          <a:p>
-            <a:pPr algn="l" indent="0" marL="0">
-              <a:buNone/>
-            </a:pPr>
-            <a:r>
-              <a:rPr lang="en-US" sz="1700" b="1" dirty="0">
-                <a:solidFill>
-                  <a:srgbClr val="BC8CFF"/>
-                </a:solidFill>
-                <a:latin typeface="Hiragino Sans" pitchFamily="34" charset="0"/>
-                <a:ea typeface="Hiragino Sans" pitchFamily="34" charset="-122"/>
-                <a:cs typeface="Hiragino Sans" pitchFamily="34" charset="-120"/>
-              </a:rPr>
-              <a:t>Webアプリに挑戦</a:t>
-            </a:r>
-            <a:endParaRPr lang="en-US" sz="1700" dirty="0"/>
-          </a:p>
-        </p:txBody>
-      </p:sp>
-      <p:sp>
-        <p:nvSpPr>
-          <p:cNvPr id="17" name="Text 15"/>
-          <p:cNvSpPr/>
-          <p:nvPr/>
-        </p:nvSpPr>
-        <p:spPr>
-          <a:xfrm>
-            <a:off x="1005840" y="4800600"/>
-            <a:ext cx="4663440" cy="685800"/>
-          </a:xfrm>
-          <a:prstGeom prst="rect">
-            <a:avLst/>
-          </a:prstGeom>
-          <a:noFill/>
-          <a:ln/>
-        </p:spPr>
-        <p:txBody>
-          <a:bodyPr wrap="square" lIns="0" tIns="0" rIns="0" bIns="0" rtlCol="0" anchor="t"/>
-          <a:lstStyle/>
-          <a:p>
-            <a:pPr algn="l" indent="0" marL="0">
-              <a:lnSpc>
-                <a:spcPct val="125000"/>
-              </a:lnSpc>
+            <a:off x="5486400" y="4041648"/>
+            <a:ext cx="5788152" cy="868680"/>
+          </a:xfrm>
+          <a:prstGeom prst="rect">
+            <a:avLst/>
+          </a:prstGeom>
+          <a:noFill/>
+          <a:ln/>
+        </p:spPr>
+        <p:txBody>
+          <a:bodyPr wrap="square" lIns="0" tIns="0" rIns="0" bIns="0" rtlCol="0" anchor="ctr"/>
+          <a:lstStyle/>
+          <a:p>
+            <a:pPr algn="l" indent="0" marL="0">
               <a:buNone/>
             </a:pPr>
             <a:r>
               <a:rPr lang="en-US" sz="1400" dirty="0">
                 <a:solidFill>
-                  <a:srgbClr val="C9D1D9"/>
-                </a:solidFill>
-                <a:latin typeface="Hiragino Sans" pitchFamily="34" charset="0"/>
-                <a:ea typeface="Hiragino Sans" pitchFamily="34" charset="-122"/>
-                <a:cs typeface="Hiragino Sans" pitchFamily="34" charset="-120"/>
-              </a:rPr>
-              <a:t>Node を入れて Vite などで本格的なアプリへ。</a:t>
+                  <a:srgbClr val="F0883E"/>
+                </a:solidFill>
+                <a:latin typeface="Menlo" pitchFamily="34" charset="0"/>
+                <a:ea typeface="Menlo" pitchFamily="34" charset="-122"/>
+                <a:cs typeface="Menlo" pitchFamily="34" charset="-120"/>
+              </a:rPr>
+              <a:t>claude.com/claude-code</a:t>
             </a:r>
             <a:endParaRPr lang="en-US" sz="1400" dirty="0"/>
           </a:p>
@@ -19706,18 +18960,18 @@
       </p:sp>
       <p:sp>
         <p:nvSpPr>
-          <p:cNvPr id="18" name="Shape 16"/>
-          <p:cNvSpPr/>
-          <p:nvPr/>
-        </p:nvSpPr>
-        <p:spPr>
-          <a:xfrm>
-            <a:off x="6245352" y="4087368"/>
-            <a:ext cx="5303520" cy="1508760"/>
+          <p:cNvPr id="17" name="Shape 15"/>
+          <p:cNvSpPr/>
+          <p:nvPr/>
+        </p:nvSpPr>
+        <p:spPr>
+          <a:xfrm>
+            <a:off x="640080" y="5056632"/>
+            <a:ext cx="10908792" cy="868680"/>
           </a:xfrm>
           <a:prstGeom prst="roundRect">
             <a:avLst>
-              <a:gd name="adj" fmla="val 4848"/>
+              <a:gd name="adj" fmla="val 8421"/>
             </a:avLst>
           </a:prstGeom>
           <a:solidFill>
@@ -19740,192 +18994,189 @@
       </p:sp>
       <p:sp>
         <p:nvSpPr>
-          <p:cNvPr id="19" name="Shape 17"/>
-          <p:cNvSpPr/>
-          <p:nvPr/>
-        </p:nvSpPr>
-        <p:spPr>
-          <a:xfrm>
-            <a:off x="6245352" y="4087368"/>
-            <a:ext cx="82296" cy="1508760"/>
+          <p:cNvPr id="18" name="Shape 16"/>
+          <p:cNvSpPr/>
+          <p:nvPr/>
+        </p:nvSpPr>
+        <p:spPr>
+          <a:xfrm>
+            <a:off x="640080" y="5056632"/>
+            <a:ext cx="82296" cy="868680"/>
           </a:xfrm>
           <a:prstGeom prst="rect">
             <a:avLst/>
           </a:prstGeom>
           <a:solidFill>
-            <a:srgbClr val="3FB950"/>
+            <a:srgbClr val="BC8CFF"/>
           </a:solidFill>
           <a:ln/>
         </p:spPr>
       </p:sp>
       <p:sp>
         <p:nvSpPr>
+          <p:cNvPr id="19" name="Text 17"/>
+          <p:cNvSpPr/>
+          <p:nvPr/>
+        </p:nvSpPr>
+        <p:spPr>
+          <a:xfrm>
+            <a:off x="1005840" y="5056632"/>
+            <a:ext cx="4754880" cy="868680"/>
+          </a:xfrm>
+          <a:prstGeom prst="rect">
+            <a:avLst/>
+          </a:prstGeom>
+          <a:noFill/>
+          <a:ln/>
+        </p:spPr>
+        <p:txBody>
+          <a:bodyPr wrap="square" lIns="0" tIns="0" rIns="0" bIns="0" rtlCol="0" anchor="ctr"/>
+          <a:lstStyle/>
+          <a:p>
+            <a:pPr algn="l" indent="0" marL="0">
+              <a:buNone/>
+            </a:pPr>
+            <a:r>
+              <a:rPr lang="en-US" sz="1600" b="1" dirty="0">
+                <a:solidFill>
+                  <a:srgbClr val="E6EDF3"/>
+                </a:solidFill>
+                <a:latin typeface="Hiragino Sans" pitchFamily="34" charset="0"/>
+                <a:ea typeface="Hiragino Sans" pitchFamily="34" charset="-122"/>
+                <a:cs typeface="Hiragino Sans" pitchFamily="34" charset="-120"/>
+              </a:rPr>
+              <a:t>Codex CLI</a:t>
+            </a:r>
+            <a:endParaRPr lang="en-US" sz="1600" dirty="0"/>
+          </a:p>
+        </p:txBody>
+      </p:sp>
+      <p:sp>
+        <p:nvSpPr>
           <p:cNvPr id="20" name="Text 18"/>
           <p:cNvSpPr/>
           <p:nvPr/>
         </p:nvSpPr>
         <p:spPr>
           <a:xfrm>
-            <a:off x="6611112" y="4325112"/>
-            <a:ext cx="4663440" cy="457200"/>
-          </a:xfrm>
-          <a:prstGeom prst="rect">
-            <a:avLst/>
-          </a:prstGeom>
-          <a:noFill/>
-          <a:ln/>
-        </p:spPr>
-        <p:txBody>
-          <a:bodyPr wrap="square" lIns="0" tIns="0" rIns="0" bIns="0" rtlCol="0" anchor="ctr"/>
-          <a:lstStyle/>
-          <a:p>
-            <a:pPr algn="l" indent="0" marL="0">
-              <a:buNone/>
-            </a:pPr>
-            <a:r>
-              <a:rPr lang="en-US" sz="1700" b="1" dirty="0">
-                <a:solidFill>
-                  <a:srgbClr val="3FB950"/>
-                </a:solidFill>
-                <a:latin typeface="Hiragino Sans" pitchFamily="34" charset="0"/>
-                <a:ea typeface="Hiragino Sans" pitchFamily="34" charset="-122"/>
-                <a:cs typeface="Hiragino Sans" pitchFamily="34" charset="-120"/>
-              </a:rPr>
-              <a:t>ふだんの作業に使う</a:t>
-            </a:r>
-            <a:endParaRPr lang="en-US" sz="1700" dirty="0"/>
-          </a:p>
-        </p:txBody>
-      </p:sp>
-      <p:sp>
-        <p:nvSpPr>
-          <p:cNvPr id="21" name="Text 19"/>
-          <p:cNvSpPr/>
-          <p:nvPr/>
-        </p:nvSpPr>
-        <p:spPr>
-          <a:xfrm>
-            <a:off x="6611112" y="4800600"/>
-            <a:ext cx="4663440" cy="685800"/>
-          </a:xfrm>
-          <a:prstGeom prst="rect">
-            <a:avLst/>
-          </a:prstGeom>
-          <a:noFill/>
-          <a:ln/>
-        </p:spPr>
-        <p:txBody>
-          <a:bodyPr wrap="square" lIns="0" tIns="0" rIns="0" bIns="0" rtlCol="0" anchor="t"/>
-          <a:lstStyle/>
-          <a:p>
-            <a:pPr algn="l" indent="0" marL="0">
-              <a:lnSpc>
-                <a:spcPct val="125000"/>
-              </a:lnSpc>
+            <a:off x="5486400" y="5056632"/>
+            <a:ext cx="5788152" cy="868680"/>
+          </a:xfrm>
+          <a:prstGeom prst="rect">
+            <a:avLst/>
+          </a:prstGeom>
+          <a:noFill/>
+          <a:ln/>
+        </p:spPr>
+        <p:txBody>
+          <a:bodyPr wrap="square" lIns="0" tIns="0" rIns="0" bIns="0" rtlCol="0" anchor="ctr"/>
+          <a:lstStyle/>
+          <a:p>
+            <a:pPr algn="l" indent="0" marL="0">
               <a:buNone/>
             </a:pPr>
             <a:r>
               <a:rPr lang="en-US" sz="1400" dirty="0">
                 <a:solidFill>
-                  <a:srgbClr val="C9D1D9"/>
-                </a:solidFill>
-                <a:latin typeface="Hiragino Sans" pitchFamily="34" charset="0"/>
-                <a:ea typeface="Hiragino Sans" pitchFamily="34" charset="-122"/>
-                <a:cs typeface="Hiragino Sans" pitchFamily="34" charset="-120"/>
-              </a:rPr>
-              <a:t>調べもの・修正・自動化など、研究や開発の相棒に。</a:t>
-            </a:r>
-            <a:endParaRPr lang="en-US" sz="1400" dirty="0"/>
-          </a:p>
-        </p:txBody>
-      </p:sp>
-      <p:sp>
-        <p:nvSpPr>
-          <p:cNvPr id="22" name="Text 20"/>
-          <p:cNvSpPr/>
-          <p:nvPr/>
-        </p:nvSpPr>
-        <p:spPr>
-          <a:xfrm>
-            <a:off x="640080" y="6419088"/>
-            <a:ext cx="7315200" cy="274320"/>
-          </a:xfrm>
-          <a:prstGeom prst="rect">
-            <a:avLst/>
-          </a:prstGeom>
-          <a:noFill/>
-          <a:ln/>
-        </p:spPr>
-        <p:txBody>
-          <a:bodyPr wrap="square" lIns="0" tIns="0" rIns="0" bIns="0" rtlCol="0" anchor="ctr"/>
-          <a:lstStyle/>
-          <a:p>
-            <a:pPr algn="l" indent="0" marL="0">
-              <a:buNone/>
-            </a:pPr>
-            <a:r>
-              <a:rPr lang="en-US" sz="900" dirty="0">
-                <a:solidFill>
-                  <a:srgbClr val="8B949E"/>
-                </a:solidFill>
-                <a:latin typeface="Hiragino Sans" pitchFamily="34" charset="0"/>
-                <a:ea typeface="Hiragino Sans" pitchFamily="34" charset="-122"/>
-                <a:cs typeface="Hiragino Sans" pitchFamily="34" charset="-120"/>
-              </a:rPr>
-              <a:t>コーディングエージェント入門</a:t>
-            </a:r>
-            <a:pPr algn="l" indent="0" marL="0">
-              <a:buNone/>
-            </a:pPr>
-            <a:r>
-              <a:rPr lang="en-US" sz="900" dirty="0">
-                <a:solidFill>
-                  <a:srgbClr val="30363D"/>
-                </a:solidFill>
-                <a:latin typeface="Hiragino Sans" pitchFamily="34" charset="0"/>
-                <a:ea typeface="Hiragino Sans" pitchFamily="34" charset="-122"/>
-                <a:cs typeface="Hiragino Sans" pitchFamily="34" charset="-120"/>
-              </a:rPr>
-              <a:t>  ·  OpenCode × OpenRouter</a:t>
-            </a:r>
-            <a:endParaRPr lang="en-US" sz="900" dirty="0"/>
-          </a:p>
-        </p:txBody>
-      </p:sp>
-      <p:sp>
-        <p:nvSpPr>
-          <p:cNvPr id="23" name="Text 21"/>
-          <p:cNvSpPr/>
-          <p:nvPr/>
-        </p:nvSpPr>
-        <p:spPr>
-          <a:xfrm>
-            <a:off x="9720072" y="6419088"/>
-            <a:ext cx="1828800" cy="274320"/>
-          </a:xfrm>
-          <a:prstGeom prst="rect">
-            <a:avLst/>
-          </a:prstGeom>
-          <a:noFill/>
-          <a:ln/>
-        </p:spPr>
-        <p:txBody>
-          <a:bodyPr wrap="square" lIns="0" tIns="0" rIns="0" bIns="0" rtlCol="0" anchor="ctr"/>
-          <a:lstStyle/>
-          <a:p>
-            <a:pPr algn="r" indent="0" marL="0">
-              <a:buNone/>
-            </a:pPr>
-            <a:r>
-              <a:rPr lang="en-US" sz="900" dirty="0">
-                <a:solidFill>
-                  <a:srgbClr val="8B949E"/>
+                  <a:srgbClr val="BC8CFF"/>
                 </a:solidFill>
                 <a:latin typeface="Menlo" pitchFamily="34" charset="0"/>
                 <a:ea typeface="Menlo" pitchFamily="34" charset="-122"/>
                 <a:cs typeface="Menlo" pitchFamily="34" charset="-120"/>
               </a:rPr>
-              <a:t>25 / 27</a:t>
+              <a:t>github.com/openai/codex</a:t>
+            </a:r>
+            <a:endParaRPr lang="en-US" sz="1400" dirty="0"/>
+          </a:p>
+        </p:txBody>
+      </p:sp>
+      <p:sp>
+        <p:nvSpPr>
+          <p:cNvPr id="21" name="Text 19"/>
+          <p:cNvSpPr/>
+          <p:nvPr/>
+        </p:nvSpPr>
+        <p:spPr>
+          <a:xfrm>
+            <a:off x="640080" y="6419088"/>
+            <a:ext cx="7315200" cy="274320"/>
+          </a:xfrm>
+          <a:prstGeom prst="rect">
+            <a:avLst/>
+          </a:prstGeom>
+          <a:noFill/>
+          <a:ln/>
+        </p:spPr>
+        <p:txBody>
+          <a:bodyPr wrap="square" lIns="0" tIns="0" rIns="0" bIns="0" rtlCol="0" anchor="ctr"/>
+          <a:lstStyle/>
+          <a:p>
+            <a:pPr algn="l" indent="0" marL="0">
+              <a:buNone/>
+            </a:pPr>
+            <a:r>
+              <a:rPr lang="en-US" sz="900" dirty="0">
+                <a:solidFill>
+                  <a:srgbClr val="8B949E"/>
+                </a:solidFill>
+                <a:latin typeface="Hiragino Sans" pitchFamily="34" charset="0"/>
+                <a:ea typeface="Hiragino Sans" pitchFamily="34" charset="-122"/>
+                <a:cs typeface="Hiragino Sans" pitchFamily="34" charset="-120"/>
+              </a:rPr>
+              <a:t>コーディングエージェント入門</a:t>
+            </a:r>
+            <a:pPr algn="l" indent="0" marL="0">
+              <a:buNone/>
+            </a:pPr>
+            <a:r>
+              <a:rPr lang="en-US" sz="900" dirty="0">
+                <a:solidFill>
+                  <a:srgbClr val="30363D"/>
+                </a:solidFill>
+                <a:latin typeface="Hiragino Sans" pitchFamily="34" charset="0"/>
+                <a:ea typeface="Hiragino Sans" pitchFamily="34" charset="-122"/>
+                <a:cs typeface="Hiragino Sans" pitchFamily="34" charset="-120"/>
+              </a:rPr>
+              <a:t>  ·  OpenCode × OpenRouter</a:t>
+            </a:r>
+            <a:endParaRPr lang="en-US" sz="900" dirty="0"/>
+          </a:p>
+        </p:txBody>
+      </p:sp>
+      <p:sp>
+        <p:nvSpPr>
+          <p:cNvPr id="22" name="Text 20"/>
+          <p:cNvSpPr/>
+          <p:nvPr/>
+        </p:nvSpPr>
+        <p:spPr>
+          <a:xfrm>
+            <a:off x="9720072" y="6419088"/>
+            <a:ext cx="1828800" cy="274320"/>
+          </a:xfrm>
+          <a:prstGeom prst="rect">
+            <a:avLst/>
+          </a:prstGeom>
+          <a:noFill/>
+          <a:ln/>
+        </p:spPr>
+        <p:txBody>
+          <a:bodyPr wrap="square" lIns="0" tIns="0" rIns="0" bIns="0" rtlCol="0" anchor="ctr"/>
+          <a:lstStyle/>
+          <a:p>
+            <a:pPr algn="r" indent="0" marL="0">
+              <a:buNone/>
+            </a:pPr>
+            <a:r>
+              <a:rPr lang="en-US" sz="900" dirty="0">
+                <a:solidFill>
+                  <a:srgbClr val="8B949E"/>
+                </a:solidFill>
+                <a:latin typeface="Menlo" pitchFamily="34" charset="0"/>
+                <a:ea typeface="Menlo" pitchFamily="34" charset="-122"/>
+                <a:cs typeface="Menlo" pitchFamily="34" charset="-120"/>
+              </a:rPr>
+              <a:t>25 / 26</a:t>
             </a:r>
             <a:endParaRPr lang="en-US" sz="900" dirty="0"/>
           </a:p>
@@ -19971,775 +19222,6 @@
         </p:nvSpPr>
         <p:spPr>
           <a:xfrm>
-            <a:off x="640080" y="384048"/>
-            <a:ext cx="5486400" cy="274320"/>
-          </a:xfrm>
-          <a:prstGeom prst="rect">
-            <a:avLst/>
-          </a:prstGeom>
-          <a:noFill/>
-          <a:ln/>
-        </p:spPr>
-        <p:txBody>
-          <a:bodyPr wrap="square" lIns="0" tIns="0" rIns="0" bIns="0" rtlCol="0" anchor="ctr"/>
-          <a:lstStyle/>
-          <a:p>
-            <a:pPr algn="l" indent="0" marL="0">
-              <a:buNone/>
-            </a:pPr>
-            <a:r>
-              <a:rPr lang="en-US" sz="1100" b="1" spc="200" kern="0" dirty="0">
-                <a:solidFill>
-                  <a:srgbClr val="3FB950"/>
-                </a:solidFill>
-                <a:latin typeface="Menlo" pitchFamily="34" charset="0"/>
-                <a:ea typeface="Menlo" pitchFamily="34" charset="-122"/>
-                <a:cs typeface="Menlo" pitchFamily="34" charset="-120"/>
-              </a:rPr>
-              <a:t>WRAP UP</a:t>
-            </a:r>
-            <a:endParaRPr lang="en-US" sz="1100" dirty="0"/>
-          </a:p>
-        </p:txBody>
-      </p:sp>
-      <p:sp>
-        <p:nvSpPr>
-          <p:cNvPr id="3" name="Text 1"/>
-          <p:cNvSpPr/>
-          <p:nvPr/>
-        </p:nvSpPr>
-        <p:spPr>
-          <a:xfrm>
-            <a:off x="640080" y="713232"/>
-            <a:ext cx="365760" cy="640080"/>
-          </a:xfrm>
-          <a:prstGeom prst="rect">
-            <a:avLst/>
-          </a:prstGeom>
-          <a:noFill/>
-          <a:ln/>
-        </p:spPr>
-        <p:txBody>
-          <a:bodyPr wrap="square" lIns="0" tIns="0" rIns="0" bIns="0" rtlCol="0" anchor="ctr"/>
-          <a:lstStyle/>
-          <a:p>
-            <a:pPr algn="l" indent="0" marL="0">
-              <a:buNone/>
-            </a:pPr>
-            <a:r>
-              <a:rPr lang="en-US" sz="3000" b="1" dirty="0">
-                <a:solidFill>
-                  <a:srgbClr val="3FB950"/>
-                </a:solidFill>
-                <a:latin typeface="Menlo" pitchFamily="34" charset="0"/>
-                <a:ea typeface="Menlo" pitchFamily="34" charset="-122"/>
-                <a:cs typeface="Menlo" pitchFamily="34" charset="-120"/>
-              </a:rPr>
-              <a:t>&gt;</a:t>
-            </a:r>
-            <a:endParaRPr lang="en-US" sz="3000" dirty="0"/>
-          </a:p>
-        </p:txBody>
-      </p:sp>
-      <p:sp>
-        <p:nvSpPr>
-          <p:cNvPr id="4" name="Text 2"/>
-          <p:cNvSpPr/>
-          <p:nvPr/>
-        </p:nvSpPr>
-        <p:spPr>
-          <a:xfrm>
-            <a:off x="1024128" y="713232"/>
-            <a:ext cx="10524744" cy="640080"/>
-          </a:xfrm>
-          <a:prstGeom prst="rect">
-            <a:avLst/>
-          </a:prstGeom>
-          <a:noFill/>
-          <a:ln/>
-        </p:spPr>
-        <p:txBody>
-          <a:bodyPr wrap="square" lIns="0" tIns="0" rIns="0" bIns="0" rtlCol="0" anchor="ctr"/>
-          <a:lstStyle/>
-          <a:p>
-            <a:pPr algn="l" indent="0" marL="0">
-              <a:buNone/>
-            </a:pPr>
-            <a:r>
-              <a:rPr lang="en-US" sz="2900" b="1" dirty="0">
-                <a:solidFill>
-                  <a:srgbClr val="E6EDF3"/>
-                </a:solidFill>
-                <a:latin typeface="Hiragino Sans" pitchFamily="34" charset="0"/>
-                <a:ea typeface="Hiragino Sans" pitchFamily="34" charset="-122"/>
-                <a:cs typeface="Hiragino Sans" pitchFamily="34" charset="-120"/>
-              </a:rPr>
-              <a:t>参考リンク</a:t>
-            </a:r>
-            <a:endParaRPr lang="en-US" sz="2900" dirty="0"/>
-          </a:p>
-        </p:txBody>
-      </p:sp>
-      <p:sp>
-        <p:nvSpPr>
-          <p:cNvPr id="5" name="Shape 3"/>
-          <p:cNvSpPr/>
-          <p:nvPr/>
-        </p:nvSpPr>
-        <p:spPr>
-          <a:xfrm>
-            <a:off x="640080" y="2011680"/>
-            <a:ext cx="10908792" cy="868680"/>
-          </a:xfrm>
-          <a:prstGeom prst="roundRect">
-            <a:avLst>
-              <a:gd name="adj" fmla="val 8421"/>
-            </a:avLst>
-          </a:prstGeom>
-          <a:solidFill>
-            <a:srgbClr val="161B22"/>
-          </a:solidFill>
-          <a:ln w="12700">
-            <a:solidFill>
-              <a:srgbClr val="30363D"/>
-            </a:solidFill>
-            <a:prstDash val="solid"/>
-          </a:ln>
-          <a:effectLst>
-            <a:outerShdw sx="100000" sy="100000" kx="0" ky="0" algn="bl" rotWithShape="0" blurRad="127000" dist="38100" dir="5400000">
-              <a:srgbClr val="000000">
-                <a:alpha val="35000"/>
-              </a:srgbClr>
-            </a:outerShdw>
-          </a:effectLst>
-        </p:spPr>
-      </p:sp>
-      <p:sp>
-        <p:nvSpPr>
-          <p:cNvPr id="6" name="Shape 4"/>
-          <p:cNvSpPr/>
-          <p:nvPr/>
-        </p:nvSpPr>
-        <p:spPr>
-          <a:xfrm>
-            <a:off x="640080" y="2011680"/>
-            <a:ext cx="82296" cy="868680"/>
-          </a:xfrm>
-          <a:prstGeom prst="rect">
-            <a:avLst/>
-          </a:prstGeom>
-          <a:solidFill>
-            <a:srgbClr val="3FB950"/>
-          </a:solidFill>
-          <a:ln/>
-        </p:spPr>
-      </p:sp>
-      <p:sp>
-        <p:nvSpPr>
-          <p:cNvPr id="7" name="Text 5"/>
-          <p:cNvSpPr/>
-          <p:nvPr/>
-        </p:nvSpPr>
-        <p:spPr>
-          <a:xfrm>
-            <a:off x="1005840" y="2011680"/>
-            <a:ext cx="4754880" cy="868680"/>
-          </a:xfrm>
-          <a:prstGeom prst="rect">
-            <a:avLst/>
-          </a:prstGeom>
-          <a:noFill/>
-          <a:ln/>
-        </p:spPr>
-        <p:txBody>
-          <a:bodyPr wrap="square" lIns="0" tIns="0" rIns="0" bIns="0" rtlCol="0" anchor="ctr"/>
-          <a:lstStyle/>
-          <a:p>
-            <a:pPr algn="l" indent="0" marL="0">
-              <a:buNone/>
-            </a:pPr>
-            <a:r>
-              <a:rPr lang="en-US" sz="1600" b="1" dirty="0">
-                <a:solidFill>
-                  <a:srgbClr val="E6EDF3"/>
-                </a:solidFill>
-                <a:latin typeface="Hiragino Sans" pitchFamily="34" charset="0"/>
-                <a:ea typeface="Hiragino Sans" pitchFamily="34" charset="-122"/>
-                <a:cs typeface="Hiragino Sans" pitchFamily="34" charset="-120"/>
-              </a:rPr>
-              <a:t>OpenCode（今日のツール）</a:t>
-            </a:r>
-            <a:endParaRPr lang="en-US" sz="1600" dirty="0"/>
-          </a:p>
-        </p:txBody>
-      </p:sp>
-      <p:sp>
-        <p:nvSpPr>
-          <p:cNvPr id="8" name="Text 6"/>
-          <p:cNvSpPr/>
-          <p:nvPr/>
-        </p:nvSpPr>
-        <p:spPr>
-          <a:xfrm>
-            <a:off x="5486400" y="2011680"/>
-            <a:ext cx="5788152" cy="868680"/>
-          </a:xfrm>
-          <a:prstGeom prst="rect">
-            <a:avLst/>
-          </a:prstGeom>
-          <a:noFill/>
-          <a:ln/>
-        </p:spPr>
-        <p:txBody>
-          <a:bodyPr wrap="square" lIns="0" tIns="0" rIns="0" bIns="0" rtlCol="0" anchor="ctr"/>
-          <a:lstStyle/>
-          <a:p>
-            <a:pPr algn="l" indent="0" marL="0">
-              <a:buNone/>
-            </a:pPr>
-            <a:r>
-              <a:rPr lang="en-US" sz="1400" dirty="0">
-                <a:solidFill>
-                  <a:srgbClr val="3FB950"/>
-                </a:solidFill>
-                <a:latin typeface="Menlo" pitchFamily="34" charset="0"/>
-                <a:ea typeface="Menlo" pitchFamily="34" charset="-122"/>
-                <a:cs typeface="Menlo" pitchFamily="34" charset="-120"/>
-              </a:rPr>
-              <a:t>opencode.ai/docs</a:t>
-            </a:r>
-            <a:endParaRPr lang="en-US" sz="1400" dirty="0"/>
-          </a:p>
-        </p:txBody>
-      </p:sp>
-      <p:sp>
-        <p:nvSpPr>
-          <p:cNvPr id="9" name="Shape 7"/>
-          <p:cNvSpPr/>
-          <p:nvPr/>
-        </p:nvSpPr>
-        <p:spPr>
-          <a:xfrm>
-            <a:off x="640080" y="3026664"/>
-            <a:ext cx="10908792" cy="868680"/>
-          </a:xfrm>
-          <a:prstGeom prst="roundRect">
-            <a:avLst>
-              <a:gd name="adj" fmla="val 8421"/>
-            </a:avLst>
-          </a:prstGeom>
-          <a:solidFill>
-            <a:srgbClr val="161B22"/>
-          </a:solidFill>
-          <a:ln w="12700">
-            <a:solidFill>
-              <a:srgbClr val="30363D"/>
-            </a:solidFill>
-            <a:prstDash val="solid"/>
-          </a:ln>
-          <a:effectLst>
-            <a:outerShdw sx="100000" sy="100000" kx="0" ky="0" algn="bl" rotWithShape="0" blurRad="127000" dist="38100" dir="5400000">
-              <a:srgbClr val="000000">
-                <a:alpha val="35000"/>
-              </a:srgbClr>
-            </a:outerShdw>
-          </a:effectLst>
-        </p:spPr>
-      </p:sp>
-      <p:sp>
-        <p:nvSpPr>
-          <p:cNvPr id="10" name="Shape 8"/>
-          <p:cNvSpPr/>
-          <p:nvPr/>
-        </p:nvSpPr>
-        <p:spPr>
-          <a:xfrm>
-            <a:off x="640080" y="3026664"/>
-            <a:ext cx="82296" cy="868680"/>
-          </a:xfrm>
-          <a:prstGeom prst="rect">
-            <a:avLst/>
-          </a:prstGeom>
-          <a:solidFill>
-            <a:srgbClr val="58A6FF"/>
-          </a:solidFill>
-          <a:ln/>
-        </p:spPr>
-      </p:sp>
-      <p:sp>
-        <p:nvSpPr>
-          <p:cNvPr id="11" name="Text 9"/>
-          <p:cNvSpPr/>
-          <p:nvPr/>
-        </p:nvSpPr>
-        <p:spPr>
-          <a:xfrm>
-            <a:off x="1005840" y="3026664"/>
-            <a:ext cx="4754880" cy="868680"/>
-          </a:xfrm>
-          <a:prstGeom prst="rect">
-            <a:avLst/>
-          </a:prstGeom>
-          <a:noFill/>
-          <a:ln/>
-        </p:spPr>
-        <p:txBody>
-          <a:bodyPr wrap="square" lIns="0" tIns="0" rIns="0" bIns="0" rtlCol="0" anchor="ctr"/>
-          <a:lstStyle/>
-          <a:p>
-            <a:pPr algn="l" indent="0" marL="0">
-              <a:buNone/>
-            </a:pPr>
-            <a:r>
-              <a:rPr lang="en-US" sz="1600" b="1" dirty="0">
-                <a:solidFill>
-                  <a:srgbClr val="E6EDF3"/>
-                </a:solidFill>
-                <a:latin typeface="Hiragino Sans" pitchFamily="34" charset="0"/>
-                <a:ea typeface="Hiragino Sans" pitchFamily="34" charset="-122"/>
-                <a:cs typeface="Hiragino Sans" pitchFamily="34" charset="-120"/>
-              </a:rPr>
-              <a:t>OpenRouter API キー</a:t>
-            </a:r>
-            <a:endParaRPr lang="en-US" sz="1600" dirty="0"/>
-          </a:p>
-        </p:txBody>
-      </p:sp>
-      <p:sp>
-        <p:nvSpPr>
-          <p:cNvPr id="12" name="Text 10"/>
-          <p:cNvSpPr/>
-          <p:nvPr/>
-        </p:nvSpPr>
-        <p:spPr>
-          <a:xfrm>
-            <a:off x="5486400" y="3026664"/>
-            <a:ext cx="5788152" cy="868680"/>
-          </a:xfrm>
-          <a:prstGeom prst="rect">
-            <a:avLst/>
-          </a:prstGeom>
-          <a:noFill/>
-          <a:ln/>
-        </p:spPr>
-        <p:txBody>
-          <a:bodyPr wrap="square" lIns="0" tIns="0" rIns="0" bIns="0" rtlCol="0" anchor="ctr"/>
-          <a:lstStyle/>
-          <a:p>
-            <a:pPr algn="l" indent="0" marL="0">
-              <a:buNone/>
-            </a:pPr>
-            <a:r>
-              <a:rPr lang="en-US" sz="1400" dirty="0">
-                <a:solidFill>
-                  <a:srgbClr val="58A6FF"/>
-                </a:solidFill>
-                <a:latin typeface="Menlo" pitchFamily="34" charset="0"/>
-                <a:ea typeface="Menlo" pitchFamily="34" charset="-122"/>
-                <a:cs typeface="Menlo" pitchFamily="34" charset="-120"/>
-              </a:rPr>
-              <a:t>openrouter.ai/keys</a:t>
-            </a:r>
-            <a:endParaRPr lang="en-US" sz="1400" dirty="0"/>
-          </a:p>
-        </p:txBody>
-      </p:sp>
-      <p:sp>
-        <p:nvSpPr>
-          <p:cNvPr id="13" name="Shape 11"/>
-          <p:cNvSpPr/>
-          <p:nvPr/>
-        </p:nvSpPr>
-        <p:spPr>
-          <a:xfrm>
-            <a:off x="640080" y="4041648"/>
-            <a:ext cx="10908792" cy="868680"/>
-          </a:xfrm>
-          <a:prstGeom prst="roundRect">
-            <a:avLst>
-              <a:gd name="adj" fmla="val 8421"/>
-            </a:avLst>
-          </a:prstGeom>
-          <a:solidFill>
-            <a:srgbClr val="161B22"/>
-          </a:solidFill>
-          <a:ln w="12700">
-            <a:solidFill>
-              <a:srgbClr val="30363D"/>
-            </a:solidFill>
-            <a:prstDash val="solid"/>
-          </a:ln>
-          <a:effectLst>
-            <a:outerShdw sx="100000" sy="100000" kx="0" ky="0" algn="bl" rotWithShape="0" blurRad="127000" dist="38100" dir="5400000">
-              <a:srgbClr val="000000">
-                <a:alpha val="35000"/>
-              </a:srgbClr>
-            </a:outerShdw>
-          </a:effectLst>
-        </p:spPr>
-      </p:sp>
-      <p:sp>
-        <p:nvSpPr>
-          <p:cNvPr id="14" name="Shape 12"/>
-          <p:cNvSpPr/>
-          <p:nvPr/>
-        </p:nvSpPr>
-        <p:spPr>
-          <a:xfrm>
-            <a:off x="640080" y="4041648"/>
-            <a:ext cx="82296" cy="868680"/>
-          </a:xfrm>
-          <a:prstGeom prst="rect">
-            <a:avLst/>
-          </a:prstGeom>
-          <a:solidFill>
-            <a:srgbClr val="F0883E"/>
-          </a:solidFill>
-          <a:ln/>
-        </p:spPr>
-      </p:sp>
-      <p:sp>
-        <p:nvSpPr>
-          <p:cNvPr id="15" name="Text 13"/>
-          <p:cNvSpPr/>
-          <p:nvPr/>
-        </p:nvSpPr>
-        <p:spPr>
-          <a:xfrm>
-            <a:off x="1005840" y="4041648"/>
-            <a:ext cx="4754880" cy="868680"/>
-          </a:xfrm>
-          <a:prstGeom prst="rect">
-            <a:avLst/>
-          </a:prstGeom>
-          <a:noFill/>
-          <a:ln/>
-        </p:spPr>
-        <p:txBody>
-          <a:bodyPr wrap="square" lIns="0" tIns="0" rIns="0" bIns="0" rtlCol="0" anchor="ctr"/>
-          <a:lstStyle/>
-          <a:p>
-            <a:pPr algn="l" indent="0" marL="0">
-              <a:buNone/>
-            </a:pPr>
-            <a:r>
-              <a:rPr lang="en-US" sz="1600" b="1" dirty="0">
-                <a:solidFill>
-                  <a:srgbClr val="E6EDF3"/>
-                </a:solidFill>
-                <a:latin typeface="Hiragino Sans" pitchFamily="34" charset="0"/>
-                <a:ea typeface="Hiragino Sans" pitchFamily="34" charset="-122"/>
-                <a:cs typeface="Hiragino Sans" pitchFamily="34" charset="-120"/>
-              </a:rPr>
-              <a:t>Claude Code</a:t>
-            </a:r>
-            <a:endParaRPr lang="en-US" sz="1600" dirty="0"/>
-          </a:p>
-        </p:txBody>
-      </p:sp>
-      <p:sp>
-        <p:nvSpPr>
-          <p:cNvPr id="16" name="Text 14"/>
-          <p:cNvSpPr/>
-          <p:nvPr/>
-        </p:nvSpPr>
-        <p:spPr>
-          <a:xfrm>
-            <a:off x="5486400" y="4041648"/>
-            <a:ext cx="5788152" cy="868680"/>
-          </a:xfrm>
-          <a:prstGeom prst="rect">
-            <a:avLst/>
-          </a:prstGeom>
-          <a:noFill/>
-          <a:ln/>
-        </p:spPr>
-        <p:txBody>
-          <a:bodyPr wrap="square" lIns="0" tIns="0" rIns="0" bIns="0" rtlCol="0" anchor="ctr"/>
-          <a:lstStyle/>
-          <a:p>
-            <a:pPr algn="l" indent="0" marL="0">
-              <a:buNone/>
-            </a:pPr>
-            <a:r>
-              <a:rPr lang="en-US" sz="1400" dirty="0">
-                <a:solidFill>
-                  <a:srgbClr val="F0883E"/>
-                </a:solidFill>
-                <a:latin typeface="Menlo" pitchFamily="34" charset="0"/>
-                <a:ea typeface="Menlo" pitchFamily="34" charset="-122"/>
-                <a:cs typeface="Menlo" pitchFamily="34" charset="-120"/>
-              </a:rPr>
-              <a:t>claude.com/claude-code</a:t>
-            </a:r>
-            <a:endParaRPr lang="en-US" sz="1400" dirty="0"/>
-          </a:p>
-        </p:txBody>
-      </p:sp>
-      <p:sp>
-        <p:nvSpPr>
-          <p:cNvPr id="17" name="Shape 15"/>
-          <p:cNvSpPr/>
-          <p:nvPr/>
-        </p:nvSpPr>
-        <p:spPr>
-          <a:xfrm>
-            <a:off x="640080" y="5056632"/>
-            <a:ext cx="10908792" cy="868680"/>
-          </a:xfrm>
-          <a:prstGeom prst="roundRect">
-            <a:avLst>
-              <a:gd name="adj" fmla="val 8421"/>
-            </a:avLst>
-          </a:prstGeom>
-          <a:solidFill>
-            <a:srgbClr val="161B22"/>
-          </a:solidFill>
-          <a:ln w="12700">
-            <a:solidFill>
-              <a:srgbClr val="30363D"/>
-            </a:solidFill>
-            <a:prstDash val="solid"/>
-          </a:ln>
-          <a:effectLst>
-            <a:outerShdw sx="100000" sy="100000" kx="0" ky="0" algn="bl" rotWithShape="0" blurRad="127000" dist="38100" dir="5400000">
-              <a:srgbClr val="000000">
-                <a:alpha val="35000"/>
-              </a:srgbClr>
-            </a:outerShdw>
-          </a:effectLst>
-        </p:spPr>
-      </p:sp>
-      <p:sp>
-        <p:nvSpPr>
-          <p:cNvPr id="18" name="Shape 16"/>
-          <p:cNvSpPr/>
-          <p:nvPr/>
-        </p:nvSpPr>
-        <p:spPr>
-          <a:xfrm>
-            <a:off x="640080" y="5056632"/>
-            <a:ext cx="82296" cy="868680"/>
-          </a:xfrm>
-          <a:prstGeom prst="rect">
-            <a:avLst/>
-          </a:prstGeom>
-          <a:solidFill>
-            <a:srgbClr val="BC8CFF"/>
-          </a:solidFill>
-          <a:ln/>
-        </p:spPr>
-      </p:sp>
-      <p:sp>
-        <p:nvSpPr>
-          <p:cNvPr id="19" name="Text 17"/>
-          <p:cNvSpPr/>
-          <p:nvPr/>
-        </p:nvSpPr>
-        <p:spPr>
-          <a:xfrm>
-            <a:off x="1005840" y="5056632"/>
-            <a:ext cx="4754880" cy="868680"/>
-          </a:xfrm>
-          <a:prstGeom prst="rect">
-            <a:avLst/>
-          </a:prstGeom>
-          <a:noFill/>
-          <a:ln/>
-        </p:spPr>
-        <p:txBody>
-          <a:bodyPr wrap="square" lIns="0" tIns="0" rIns="0" bIns="0" rtlCol="0" anchor="ctr"/>
-          <a:lstStyle/>
-          <a:p>
-            <a:pPr algn="l" indent="0" marL="0">
-              <a:buNone/>
-            </a:pPr>
-            <a:r>
-              <a:rPr lang="en-US" sz="1600" b="1" dirty="0">
-                <a:solidFill>
-                  <a:srgbClr val="E6EDF3"/>
-                </a:solidFill>
-                <a:latin typeface="Hiragino Sans" pitchFamily="34" charset="0"/>
-                <a:ea typeface="Hiragino Sans" pitchFamily="34" charset="-122"/>
-                <a:cs typeface="Hiragino Sans" pitchFamily="34" charset="-120"/>
-              </a:rPr>
-              <a:t>Codex CLI</a:t>
-            </a:r>
-            <a:endParaRPr lang="en-US" sz="1600" dirty="0"/>
-          </a:p>
-        </p:txBody>
-      </p:sp>
-      <p:sp>
-        <p:nvSpPr>
-          <p:cNvPr id="20" name="Text 18"/>
-          <p:cNvSpPr/>
-          <p:nvPr/>
-        </p:nvSpPr>
-        <p:spPr>
-          <a:xfrm>
-            <a:off x="5486400" y="5056632"/>
-            <a:ext cx="5788152" cy="868680"/>
-          </a:xfrm>
-          <a:prstGeom prst="rect">
-            <a:avLst/>
-          </a:prstGeom>
-          <a:noFill/>
-          <a:ln/>
-        </p:spPr>
-        <p:txBody>
-          <a:bodyPr wrap="square" lIns="0" tIns="0" rIns="0" bIns="0" rtlCol="0" anchor="ctr"/>
-          <a:lstStyle/>
-          <a:p>
-            <a:pPr algn="l" indent="0" marL="0">
-              <a:buNone/>
-            </a:pPr>
-            <a:r>
-              <a:rPr lang="en-US" sz="1400" dirty="0">
-                <a:solidFill>
-                  <a:srgbClr val="BC8CFF"/>
-                </a:solidFill>
-                <a:latin typeface="Menlo" pitchFamily="34" charset="0"/>
-                <a:ea typeface="Menlo" pitchFamily="34" charset="-122"/>
-                <a:cs typeface="Menlo" pitchFamily="34" charset="-120"/>
-              </a:rPr>
-              <a:t>github.com/openai/codex</a:t>
-            </a:r>
-            <a:endParaRPr lang="en-US" sz="1400" dirty="0"/>
-          </a:p>
-        </p:txBody>
-      </p:sp>
-      <p:sp>
-        <p:nvSpPr>
-          <p:cNvPr id="21" name="Text 19"/>
-          <p:cNvSpPr/>
-          <p:nvPr/>
-        </p:nvSpPr>
-        <p:spPr>
-          <a:xfrm>
-            <a:off x="640080" y="6419088"/>
-            <a:ext cx="7315200" cy="274320"/>
-          </a:xfrm>
-          <a:prstGeom prst="rect">
-            <a:avLst/>
-          </a:prstGeom>
-          <a:noFill/>
-          <a:ln/>
-        </p:spPr>
-        <p:txBody>
-          <a:bodyPr wrap="square" lIns="0" tIns="0" rIns="0" bIns="0" rtlCol="0" anchor="ctr"/>
-          <a:lstStyle/>
-          <a:p>
-            <a:pPr algn="l" indent="0" marL="0">
-              <a:buNone/>
-            </a:pPr>
-            <a:r>
-              <a:rPr lang="en-US" sz="900" dirty="0">
-                <a:solidFill>
-                  <a:srgbClr val="8B949E"/>
-                </a:solidFill>
-                <a:latin typeface="Hiragino Sans" pitchFamily="34" charset="0"/>
-                <a:ea typeface="Hiragino Sans" pitchFamily="34" charset="-122"/>
-                <a:cs typeface="Hiragino Sans" pitchFamily="34" charset="-120"/>
-              </a:rPr>
-              <a:t>コーディングエージェント入門</a:t>
-            </a:r>
-            <a:pPr algn="l" indent="0" marL="0">
-              <a:buNone/>
-            </a:pPr>
-            <a:r>
-              <a:rPr lang="en-US" sz="900" dirty="0">
-                <a:solidFill>
-                  <a:srgbClr val="30363D"/>
-                </a:solidFill>
-                <a:latin typeface="Hiragino Sans" pitchFamily="34" charset="0"/>
-                <a:ea typeface="Hiragino Sans" pitchFamily="34" charset="-122"/>
-                <a:cs typeface="Hiragino Sans" pitchFamily="34" charset="-120"/>
-              </a:rPr>
-              <a:t>  ·  OpenCode × OpenRouter</a:t>
-            </a:r>
-            <a:endParaRPr lang="en-US" sz="900" dirty="0"/>
-          </a:p>
-        </p:txBody>
-      </p:sp>
-      <p:sp>
-        <p:nvSpPr>
-          <p:cNvPr id="22" name="Text 20"/>
-          <p:cNvSpPr/>
-          <p:nvPr/>
-        </p:nvSpPr>
-        <p:spPr>
-          <a:xfrm>
-            <a:off x="9720072" y="6419088"/>
-            <a:ext cx="1828800" cy="274320"/>
-          </a:xfrm>
-          <a:prstGeom prst="rect">
-            <a:avLst/>
-          </a:prstGeom>
-          <a:noFill/>
-          <a:ln/>
-        </p:spPr>
-        <p:txBody>
-          <a:bodyPr wrap="square" lIns="0" tIns="0" rIns="0" bIns="0" rtlCol="0" anchor="ctr"/>
-          <a:lstStyle/>
-          <a:p>
-            <a:pPr algn="r" indent="0" marL="0">
-              <a:buNone/>
-            </a:pPr>
-            <a:r>
-              <a:rPr lang="en-US" sz="900" dirty="0">
-                <a:solidFill>
-                  <a:srgbClr val="8B949E"/>
-                </a:solidFill>
-                <a:latin typeface="Menlo" pitchFamily="34" charset="0"/>
-                <a:ea typeface="Menlo" pitchFamily="34" charset="-122"/>
-                <a:cs typeface="Menlo" pitchFamily="34" charset="-120"/>
-              </a:rPr>
-              <a:t>26 / 27</a:t>
-            </a:r>
-            <a:endParaRPr lang="en-US" sz="900" dirty="0"/>
-          </a:p>
-        </p:txBody>
-      </p:sp>
-    </p:spTree>
-  </p:cSld>
-  <p:clrMapOvr>
-    <a:masterClrMapping/>
-  </p:clrMapOvr>
-</p:sld>
-</file>
-
-<file path=ppt/slides/slide27.xml><?xml version="1.0" encoding="utf-8"?>
-<p:sld xmlns:a="http://schemas.openxmlformats.org/drawingml/2006/main" xmlns:r="http://schemas.openxmlformats.org/officeDocument/2006/relationships" xmlns:p="http://schemas.openxmlformats.org/presentationml/2006/main">
-  <p:cSld name="Slide 27">
-    <p:bg>
-      <p:bgPr>
-        <a:solidFill>
-          <a:srgbClr val="0D1117"/>
-        </a:solidFill>
-      </p:bgPr>
-    </p:bg>
-    <p:spTree>
-      <p:nvGrpSpPr>
-        <p:cNvPr id="1" name=""/>
-        <p:cNvGrpSpPr/>
-        <p:nvPr/>
-      </p:nvGrpSpPr>
-      <p:grpSpPr>
-        <a:xfrm>
-          <a:off x="0" y="0"/>
-          <a:ext cx="0" cy="0"/>
-          <a:chOff x="0" y="0"/>
-          <a:chExt cx="0" cy="0"/>
-        </a:xfrm>
-      </p:grpSpPr>
-      <p:sp>
-        <p:nvSpPr>
-          <p:cNvPr id="2" name="Text 0"/>
-          <p:cNvSpPr/>
-          <p:nvPr/>
-        </p:nvSpPr>
-        <p:spPr>
-          <a:xfrm>
             <a:off x="8686800" y="274320"/>
             <a:ext cx="3200400" cy="914400"/>
           </a:xfrm>
@@ -21175,7 +19657,7 @@
                 <a:ea typeface="Menlo" pitchFamily="34" charset="-122"/>
                 <a:cs typeface="Menlo" pitchFamily="34" charset="-120"/>
               </a:rPr>
-              <a:t>27 / 27</a:t>
+              <a:t>26 / 26</a:t>
             </a:r>
             <a:endParaRPr lang="en-US" sz="900" dirty="0"/>
           </a:p>
@@ -22256,7 +20738,7 @@
                 <a:ea typeface="Menlo" pitchFamily="34" charset="-122"/>
                 <a:cs typeface="Menlo" pitchFamily="34" charset="-120"/>
               </a:rPr>
-              <a:t>03 / 27</a:t>
+              <a:t>03 / 26</a:t>
             </a:r>
             <a:endParaRPr lang="en-US" sz="900" dirty="0"/>
           </a:p>
@@ -22405,7 +20887,7 @@
                 <a:ea typeface="Hiragino Sans" pitchFamily="34" charset="-122"/>
                 <a:cs typeface="Hiragino Sans" pitchFamily="34" charset="-120"/>
               </a:rPr>
-              <a:t>AIチャット、使ってますか？</a:t>
+              <a:t>“コピペ”の、その先へ</a:t>
             </a:r>
             <a:endParaRPr lang="en-US" sz="2900" dirty="0"/>
           </a:p>
@@ -22937,7 +21419,7 @@
                 <a:ea typeface="Menlo" pitchFamily="34" charset="-122"/>
                 <a:cs typeface="Menlo" pitchFamily="34" charset="-120"/>
               </a:rPr>
-              <a:t>04 / 27</a:t>
+              <a:t>04 / 26</a:t>
             </a:r>
             <a:endParaRPr lang="en-US" sz="900" dirty="0"/>
           </a:p>
@@ -23980,7 +22462,7 @@
                 <a:ea typeface="Menlo" pitchFamily="34" charset="-122"/>
                 <a:cs typeface="Menlo" pitchFamily="34" charset="-120"/>
               </a:rPr>
-              <a:t>05 / 27</a:t>
+              <a:t>05 / 26</a:t>
             </a:r>
             <a:endParaRPr lang="en-US" sz="900" dirty="0"/>
           </a:p>
@@ -24810,7 +23292,7 @@
                 <a:ea typeface="Menlo" pitchFamily="34" charset="-122"/>
                 <a:cs typeface="Menlo" pitchFamily="34" charset="-120"/>
               </a:rPr>
-              <a:t>06 / 27</a:t>
+              <a:t>06 / 26</a:t>
             </a:r>
             <a:endParaRPr lang="en-US" sz="900" dirty="0"/>
           </a:p>
@@ -25121,27 +23603,6 @@
             </a:r>
             <a:endParaRPr lang="en-US" sz="1450" dirty="0"/>
           </a:p>
-          <a:p>
-            <a:pPr algn="l" marL="228600" indent="-228600">
-              <a:spcAft>
-                <a:spcPts val="1200"/>
-              </a:spcAft>
-              <a:buSzPct val="100000"/>
-              <a:buChar char="•"/>
-            </a:pPr>
-            <a:r>
-              <a:rPr lang="en-US" sz="1450" dirty="0">
-                <a:solidFill>
-                  <a:srgbClr val="C9D1D9"/>
-                </a:solidFill>
-                <a:latin typeface="Hiragino Sans" pitchFamily="34" charset="0"/>
-                <a:ea typeface="Hiragino Sans" pitchFamily="34" charset="-122"/>
-                <a:cs typeface="Hiragino Sans" pitchFamily="34" charset="-120"/>
-              </a:rPr>
-              <a:t>黒い画面が苦手でも大丈夫 — 今日はコピペ中心</a:t>
-            </a:r>
-            <a:endParaRPr lang="en-US" sz="1450" dirty="0"/>
-          </a:p>
         </p:txBody>
       </p:sp>
       <p:sp>
@@ -25473,7 +23934,7 @@
                 <a:ea typeface="Menlo" pitchFamily="34" charset="-122"/>
                 <a:cs typeface="Menlo" pitchFamily="34" charset="-120"/>
               </a:rPr>
-              <a:t>&gt; ToDoアプリを分割して作って</a:t>
+              <a:t>&gt; ToDoアプリを作って</a:t>
             </a:r>
             <a:endParaRPr lang="en-US" sz="1300" dirty="0"/>
           </a:p>
@@ -25585,7 +24046,7 @@
                 <a:ea typeface="Menlo" pitchFamily="34" charset="-122"/>
                 <a:cs typeface="Menlo" pitchFamily="34" charset="-120"/>
               </a:rPr>
-              <a:t>07 / 27</a:t>
+              <a:t>07 / 26</a:t>
             </a:r>
             <a:endParaRPr lang="en-US" sz="900" dirty="0"/>
           </a:p>
@@ -26597,7 +25058,7 @@
                 <a:ea typeface="Menlo" pitchFamily="34" charset="-122"/>
                 <a:cs typeface="Menlo" pitchFamily="34" charset="-120"/>
               </a:rPr>
-              <a:t>08 / 27</a:t>
+              <a:t>08 / 26</a:t>
             </a:r>
             <a:endParaRPr lang="en-US" sz="900" dirty="0"/>
           </a:p>
@@ -27534,7 +25995,7 @@
                 <a:ea typeface="Menlo" pitchFamily="34" charset="-122"/>
                 <a:cs typeface="Menlo" pitchFamily="34" charset="-120"/>
               </a:rPr>
-              <a:t>09 / 27</a:t>
+              <a:t>09 / 26</a:t>
             </a:r>
             <a:endParaRPr lang="en-US" sz="900" dirty="0"/>
           </a:p>

--- a/slides/seminar.pptx
+++ b/slides/seminar.pptx
@@ -10742,7 +10742,7 @@
                 <a:ea typeface="Menlo" pitchFamily="34" charset="-122"/>
                 <a:cs typeface="Menlo" pitchFamily="34" charset="-120"/>
               </a:rPr>
-              <a:t>&gt; ToDoアプリを作って</a:t>
+              <a:t>&gt; ミニToDoアプリを作って</a:t>
             </a:r>
             <a:endParaRPr lang="en-US" sz="1250" dirty="0"/>
           </a:p>
@@ -10822,7 +10822,7 @@
                 <a:ea typeface="Menlo" pitchFamily="34" charset="-122"/>
                 <a:cs typeface="Menlo" pitchFamily="34" charset="-120"/>
               </a:rPr>
-              <a:t>  + styles.css</a:t>
+              <a:t>  ✓ ブラウザで表示確認</a:t>
             </a:r>
             <a:endParaRPr lang="en-US" sz="1250" dirty="0"/>
           </a:p>
@@ -10842,7 +10842,7 @@
                 <a:ea typeface="Menlo" pitchFamily="34" charset="-122"/>
                 <a:cs typeface="Menlo" pitchFamily="34" charset="-120"/>
               </a:rPr>
-              <a:t>  + src/storage.js</a:t>
+              <a:t>  ✓ 追加・完了・削除を確認</a:t>
             </a:r>
             <a:endParaRPr lang="en-US" sz="1250" dirty="0"/>
           </a:p>
@@ -10856,13 +10856,13 @@
             <a:r>
               <a:rPr lang="en-US" sz="1250" dirty="0">
                 <a:solidFill>
-                  <a:srgbClr val="3FB950"/>
+                  <a:srgbClr val="C9D1D9"/>
                 </a:solidFill>
                 <a:latin typeface="Menlo" pitchFamily="34" charset="0"/>
                 <a:ea typeface="Menlo" pitchFamily="34" charset="-122"/>
                 <a:cs typeface="Menlo" pitchFamily="34" charset="-120"/>
               </a:rPr>
-              <a:t>  + src/todo.js</a:t>
+              <a:t> </a:t>
             </a:r>
             <a:endParaRPr lang="en-US" sz="1250" dirty="0"/>
           </a:p>
@@ -10882,47 +10882,7 @@
                 <a:ea typeface="Menlo" pitchFamily="34" charset="-122"/>
                 <a:cs typeface="Menlo" pitchFamily="34" charset="-120"/>
               </a:rPr>
-              <a:t>  + src/app.js</a:t>
-            </a:r>
-            <a:endParaRPr lang="en-US" sz="1250" dirty="0"/>
-          </a:p>
-          <a:p>
-            <a:pPr algn="l" indent="0" marL="0">
-              <a:lnSpc>
-                <a:spcPct val="125000"/>
-              </a:lnSpc>
-              <a:buNone/>
-            </a:pPr>
-            <a:r>
-              <a:rPr lang="en-US" sz="1250" dirty="0">
-                <a:solidFill>
-                  <a:srgbClr val="C9D1D9"/>
-                </a:solidFill>
-                <a:latin typeface="Menlo" pitchFamily="34" charset="0"/>
-                <a:ea typeface="Menlo" pitchFamily="34" charset="-122"/>
-                <a:cs typeface="Menlo" pitchFamily="34" charset="-120"/>
-              </a:rPr>
-              <a:t> </a:t>
-            </a:r>
-            <a:endParaRPr lang="en-US" sz="1250" dirty="0"/>
-          </a:p>
-          <a:p>
-            <a:pPr algn="l" indent="0" marL="0">
-              <a:lnSpc>
-                <a:spcPct val="125000"/>
-              </a:lnSpc>
-              <a:buNone/>
-            </a:pPr>
-            <a:r>
-              <a:rPr lang="en-US" sz="1250" dirty="0">
-                <a:solidFill>
-                  <a:srgbClr val="3FB950"/>
-                </a:solidFill>
-                <a:latin typeface="Menlo" pitchFamily="34" charset="0"/>
-                <a:ea typeface="Menlo" pitchFamily="34" charset="-122"/>
-                <a:cs typeface="Menlo" pitchFamily="34" charset="-120"/>
-              </a:rPr>
-              <a:t>  ✓ 5ファイル作成</a:t>
+              <a:t>  ✓ 1ファイル作成</a:t>
             </a:r>
             <a:endParaRPr lang="en-US" sz="1250" dirty="0"/>
           </a:p>
@@ -11163,7 +11123,7 @@
                 <a:ea typeface="Hiragino Sans" pitchFamily="34" charset="-122"/>
                 <a:cs typeface="Hiragino Sans" pitchFamily="34" charset="-120"/>
               </a:rPr>
-              <a:t>STEP 6 ── ToDoアプリを作る</a:t>
+              <a:t>STEP 6 ── 作るものを決める</a:t>
             </a:r>
             <a:endParaRPr lang="en-US" sz="2900" dirty="0"/>
           </a:p>
@@ -11171,18 +11131,585 @@
       </p:sp>
       <p:sp>
         <p:nvSpPr>
-          <p:cNvPr id="5" name="Shape 3"/>
-          <p:cNvSpPr/>
-          <p:nvPr/>
-        </p:nvSpPr>
-        <p:spPr>
-          <a:xfrm>
-            <a:off x="640080" y="1920240"/>
-            <a:ext cx="5669280" cy="3886200"/>
+          <p:cNvPr id="5" name="Text 3"/>
+          <p:cNvSpPr/>
+          <p:nvPr/>
+        </p:nvSpPr>
+        <p:spPr>
+          <a:xfrm>
+            <a:off x="640080" y="1737360"/>
+            <a:ext cx="10908792" cy="411480"/>
+          </a:xfrm>
+          <a:prstGeom prst="rect">
+            <a:avLst/>
+          </a:prstGeom>
+          <a:noFill/>
+          <a:ln/>
+        </p:spPr>
+        <p:txBody>
+          <a:bodyPr wrap="square" lIns="0" tIns="0" rIns="0" bIns="0" rtlCol="0" anchor="ctr"/>
+          <a:lstStyle/>
+          <a:p>
+            <a:pPr algn="l" indent="0" marL="0">
+              <a:buNone/>
+            </a:pPr>
+            <a:r>
+              <a:rPr lang="en-US" sz="1600" dirty="0">
+                <a:solidFill>
+                  <a:srgbClr val="C9D1D9"/>
+                </a:solidFill>
+                <a:latin typeface="Hiragino Sans" pitchFamily="34" charset="0"/>
+                <a:ea typeface="Hiragino Sans" pitchFamily="34" charset="-122"/>
+                <a:cs typeface="Hiragino Sans" pitchFamily="34" charset="-120"/>
+              </a:rPr>
+              <a:t>今日は、ブラウザだけで動く ToDo ミニアプリを作ります。</a:t>
+            </a:r>
+            <a:endParaRPr lang="en-US" sz="1600" dirty="0"/>
+          </a:p>
+        </p:txBody>
+      </p:sp>
+      <p:sp>
+        <p:nvSpPr>
+          <p:cNvPr id="6" name="Shape 4"/>
+          <p:cNvSpPr/>
+          <p:nvPr/>
+        </p:nvSpPr>
+        <p:spPr>
+          <a:xfrm>
+            <a:off x="640080" y="2423160"/>
+            <a:ext cx="4572000" cy="749808"/>
           </a:xfrm>
           <a:prstGeom prst="roundRect">
             <a:avLst>
-              <a:gd name="adj" fmla="val 1412"/>
+              <a:gd name="adj" fmla="val 9756"/>
+            </a:avLst>
+          </a:prstGeom>
+          <a:solidFill>
+            <a:srgbClr val="161B22"/>
+          </a:solidFill>
+          <a:ln w="12700">
+            <a:solidFill>
+              <a:srgbClr val="30363D"/>
+            </a:solidFill>
+            <a:prstDash val="solid"/>
+          </a:ln>
+          <a:effectLst>
+            <a:outerShdw sx="100000" sy="100000" kx="0" ky="0" algn="bl" rotWithShape="0" blurRad="127000" dist="38100" dir="5400000">
+              <a:srgbClr val="000000">
+                <a:alpha val="35000"/>
+              </a:srgbClr>
+            </a:outerShdw>
+          </a:effectLst>
+        </p:spPr>
+      </p:sp>
+      <p:sp>
+        <p:nvSpPr>
+          <p:cNvPr id="7" name="Shape 5"/>
+          <p:cNvSpPr/>
+          <p:nvPr/>
+        </p:nvSpPr>
+        <p:spPr>
+          <a:xfrm>
+            <a:off x="640080" y="2423160"/>
+            <a:ext cx="82296" cy="749808"/>
+          </a:xfrm>
+          <a:prstGeom prst="rect">
+            <a:avLst/>
+          </a:prstGeom>
+          <a:solidFill>
+            <a:srgbClr val="3FB950"/>
+          </a:solidFill>
+          <a:ln/>
+        </p:spPr>
+      </p:sp>
+      <p:sp>
+        <p:nvSpPr>
+          <p:cNvPr id="8" name="Text 6"/>
+          <p:cNvSpPr/>
+          <p:nvPr/>
+        </p:nvSpPr>
+        <p:spPr>
+          <a:xfrm>
+            <a:off x="1005840" y="2514600"/>
+            <a:ext cx="3931920" cy="365760"/>
+          </a:xfrm>
+          <a:prstGeom prst="rect">
+            <a:avLst/>
+          </a:prstGeom>
+          <a:noFill/>
+          <a:ln/>
+        </p:spPr>
+        <p:txBody>
+          <a:bodyPr wrap="square" lIns="0" tIns="0" rIns="0" bIns="0" rtlCol="0" anchor="ctr"/>
+          <a:lstStyle/>
+          <a:p>
+            <a:pPr algn="l" indent="0" marL="0">
+              <a:buNone/>
+            </a:pPr>
+            <a:r>
+              <a:rPr lang="en-US" sz="1600" b="1" dirty="0">
+                <a:solidFill>
+                  <a:srgbClr val="E6EDF3"/>
+                </a:solidFill>
+                <a:latin typeface="Hiragino Sans" pitchFamily="34" charset="0"/>
+                <a:ea typeface="Hiragino Sans" pitchFamily="34" charset="-122"/>
+                <a:cs typeface="Hiragino Sans" pitchFamily="34" charset="-120"/>
+              </a:rPr>
+              <a:t>追加・完了・削除</a:t>
+            </a:r>
+            <a:endParaRPr lang="en-US" sz="1600" dirty="0"/>
+          </a:p>
+        </p:txBody>
+      </p:sp>
+      <p:sp>
+        <p:nvSpPr>
+          <p:cNvPr id="9" name="Text 7"/>
+          <p:cNvSpPr/>
+          <p:nvPr/>
+        </p:nvSpPr>
+        <p:spPr>
+          <a:xfrm>
+            <a:off x="1005840" y="2862072"/>
+            <a:ext cx="3931920" cy="292608"/>
+          </a:xfrm>
+          <a:prstGeom prst="rect">
+            <a:avLst/>
+          </a:prstGeom>
+          <a:noFill/>
+          <a:ln/>
+        </p:spPr>
+        <p:txBody>
+          <a:bodyPr wrap="square" lIns="0" tIns="0" rIns="0" bIns="0" rtlCol="0" anchor="ctr"/>
+          <a:lstStyle/>
+          <a:p>
+            <a:pPr algn="l" indent="0" marL="0">
+              <a:buNone/>
+            </a:pPr>
+            <a:r>
+              <a:rPr lang="en-US" sz="1250" dirty="0">
+                <a:solidFill>
+                  <a:srgbClr val="8B949E"/>
+                </a:solidFill>
+                <a:latin typeface="Hiragino Sans" pitchFamily="34" charset="0"/>
+                <a:ea typeface="Hiragino Sans" pitchFamily="34" charset="-122"/>
+                <a:cs typeface="Hiragino Sans" pitchFamily="34" charset="-120"/>
+              </a:rPr>
+              <a:t>基本操作がその場で試せる</a:t>
+            </a:r>
+            <a:endParaRPr lang="en-US" sz="1250" dirty="0"/>
+          </a:p>
+        </p:txBody>
+      </p:sp>
+      <p:sp>
+        <p:nvSpPr>
+          <p:cNvPr id="10" name="Shape 8"/>
+          <p:cNvSpPr/>
+          <p:nvPr/>
+        </p:nvSpPr>
+        <p:spPr>
+          <a:xfrm>
+            <a:off x="640080" y="3300984"/>
+            <a:ext cx="4572000" cy="749808"/>
+          </a:xfrm>
+          <a:prstGeom prst="roundRect">
+            <a:avLst>
+              <a:gd name="adj" fmla="val 9756"/>
+            </a:avLst>
+          </a:prstGeom>
+          <a:solidFill>
+            <a:srgbClr val="161B22"/>
+          </a:solidFill>
+          <a:ln w="12700">
+            <a:solidFill>
+              <a:srgbClr val="30363D"/>
+            </a:solidFill>
+            <a:prstDash val="solid"/>
+          </a:ln>
+          <a:effectLst>
+            <a:outerShdw sx="100000" sy="100000" kx="0" ky="0" algn="bl" rotWithShape="0" blurRad="127000" dist="38100" dir="5400000">
+              <a:srgbClr val="000000">
+                <a:alpha val="35000"/>
+              </a:srgbClr>
+            </a:outerShdw>
+          </a:effectLst>
+        </p:spPr>
+      </p:sp>
+      <p:sp>
+        <p:nvSpPr>
+          <p:cNvPr id="11" name="Shape 9"/>
+          <p:cNvSpPr/>
+          <p:nvPr/>
+        </p:nvSpPr>
+        <p:spPr>
+          <a:xfrm>
+            <a:off x="640080" y="3300984"/>
+            <a:ext cx="82296" cy="749808"/>
+          </a:xfrm>
+          <a:prstGeom prst="rect">
+            <a:avLst/>
+          </a:prstGeom>
+          <a:solidFill>
+            <a:srgbClr val="58A6FF"/>
+          </a:solidFill>
+          <a:ln/>
+        </p:spPr>
+      </p:sp>
+      <p:sp>
+        <p:nvSpPr>
+          <p:cNvPr id="12" name="Text 10"/>
+          <p:cNvSpPr/>
+          <p:nvPr/>
+        </p:nvSpPr>
+        <p:spPr>
+          <a:xfrm>
+            <a:off x="1005840" y="3392424"/>
+            <a:ext cx="3931920" cy="365760"/>
+          </a:xfrm>
+          <a:prstGeom prst="rect">
+            <a:avLst/>
+          </a:prstGeom>
+          <a:noFill/>
+          <a:ln/>
+        </p:spPr>
+        <p:txBody>
+          <a:bodyPr wrap="square" lIns="0" tIns="0" rIns="0" bIns="0" rtlCol="0" anchor="ctr"/>
+          <a:lstStyle/>
+          <a:p>
+            <a:pPr algn="l" indent="0" marL="0">
+              <a:buNone/>
+            </a:pPr>
+            <a:r>
+              <a:rPr lang="en-US" sz="1600" b="1" dirty="0">
+                <a:solidFill>
+                  <a:srgbClr val="E6EDF3"/>
+                </a:solidFill>
+                <a:latin typeface="Hiragino Sans" pitchFamily="34" charset="0"/>
+                <a:ea typeface="Hiragino Sans" pitchFamily="34" charset="-122"/>
+                <a:cs typeface="Hiragino Sans" pitchFamily="34" charset="-120"/>
+              </a:rPr>
+              <a:t>件数が見える</a:t>
+            </a:r>
+            <a:endParaRPr lang="en-US" sz="1600" dirty="0"/>
+          </a:p>
+        </p:txBody>
+      </p:sp>
+      <p:sp>
+        <p:nvSpPr>
+          <p:cNvPr id="13" name="Text 11"/>
+          <p:cNvSpPr/>
+          <p:nvPr/>
+        </p:nvSpPr>
+        <p:spPr>
+          <a:xfrm>
+            <a:off x="1005840" y="3739896"/>
+            <a:ext cx="3931920" cy="292608"/>
+          </a:xfrm>
+          <a:prstGeom prst="rect">
+            <a:avLst/>
+          </a:prstGeom>
+          <a:noFill/>
+          <a:ln/>
+        </p:spPr>
+        <p:txBody>
+          <a:bodyPr wrap="square" lIns="0" tIns="0" rIns="0" bIns="0" rtlCol="0" anchor="ctr"/>
+          <a:lstStyle/>
+          <a:p>
+            <a:pPr algn="l" indent="0" marL="0">
+              <a:buNone/>
+            </a:pPr>
+            <a:r>
+              <a:rPr lang="en-US" sz="1250" dirty="0">
+                <a:solidFill>
+                  <a:srgbClr val="8B949E"/>
+                </a:solidFill>
+                <a:latin typeface="Hiragino Sans" pitchFamily="34" charset="0"/>
+                <a:ea typeface="Hiragino Sans" pitchFamily="34" charset="-122"/>
+                <a:cs typeface="Hiragino Sans" pitchFamily="34" charset="-120"/>
+              </a:rPr>
+              <a:t>残り件数と完了件数を表示</a:t>
+            </a:r>
+            <a:endParaRPr lang="en-US" sz="1250" dirty="0"/>
+          </a:p>
+        </p:txBody>
+      </p:sp>
+      <p:sp>
+        <p:nvSpPr>
+          <p:cNvPr id="14" name="Shape 12"/>
+          <p:cNvSpPr/>
+          <p:nvPr/>
+        </p:nvSpPr>
+        <p:spPr>
+          <a:xfrm>
+            <a:off x="640080" y="4178808"/>
+            <a:ext cx="4572000" cy="749808"/>
+          </a:xfrm>
+          <a:prstGeom prst="roundRect">
+            <a:avLst>
+              <a:gd name="adj" fmla="val 9756"/>
+            </a:avLst>
+          </a:prstGeom>
+          <a:solidFill>
+            <a:srgbClr val="161B22"/>
+          </a:solidFill>
+          <a:ln w="12700">
+            <a:solidFill>
+              <a:srgbClr val="30363D"/>
+            </a:solidFill>
+            <a:prstDash val="solid"/>
+          </a:ln>
+          <a:effectLst>
+            <a:outerShdw sx="100000" sy="100000" kx="0" ky="0" algn="bl" rotWithShape="0" blurRad="127000" dist="38100" dir="5400000">
+              <a:srgbClr val="000000">
+                <a:alpha val="35000"/>
+              </a:srgbClr>
+            </a:outerShdw>
+          </a:effectLst>
+        </p:spPr>
+      </p:sp>
+      <p:sp>
+        <p:nvSpPr>
+          <p:cNvPr id="15" name="Shape 13"/>
+          <p:cNvSpPr/>
+          <p:nvPr/>
+        </p:nvSpPr>
+        <p:spPr>
+          <a:xfrm>
+            <a:off x="640080" y="4178808"/>
+            <a:ext cx="82296" cy="749808"/>
+          </a:xfrm>
+          <a:prstGeom prst="rect">
+            <a:avLst/>
+          </a:prstGeom>
+          <a:solidFill>
+            <a:srgbClr val="BC8CFF"/>
+          </a:solidFill>
+          <a:ln/>
+        </p:spPr>
+      </p:sp>
+      <p:sp>
+        <p:nvSpPr>
+          <p:cNvPr id="16" name="Text 14"/>
+          <p:cNvSpPr/>
+          <p:nvPr/>
+        </p:nvSpPr>
+        <p:spPr>
+          <a:xfrm>
+            <a:off x="1005840" y="4270248"/>
+            <a:ext cx="3931920" cy="365760"/>
+          </a:xfrm>
+          <a:prstGeom prst="rect">
+            <a:avLst/>
+          </a:prstGeom>
+          <a:noFill/>
+          <a:ln/>
+        </p:spPr>
+        <p:txBody>
+          <a:bodyPr wrap="square" lIns="0" tIns="0" rIns="0" bIns="0" rtlCol="0" anchor="ctr"/>
+          <a:lstStyle/>
+          <a:p>
+            <a:pPr algn="l" indent="0" marL="0">
+              <a:buNone/>
+            </a:pPr>
+            <a:r>
+              <a:rPr lang="en-US" sz="1600" b="1" dirty="0">
+                <a:solidFill>
+                  <a:srgbClr val="E6EDF3"/>
+                </a:solidFill>
+                <a:latin typeface="Hiragino Sans" pitchFamily="34" charset="0"/>
+                <a:ea typeface="Hiragino Sans" pitchFamily="34" charset="-122"/>
+                <a:cs typeface="Hiragino Sans" pitchFamily="34" charset="-120"/>
+              </a:rPr>
+              <a:t>閉じても残る</a:t>
+            </a:r>
+            <a:endParaRPr lang="en-US" sz="1600" dirty="0"/>
+          </a:p>
+        </p:txBody>
+      </p:sp>
+      <p:sp>
+        <p:nvSpPr>
+          <p:cNvPr id="17" name="Text 15"/>
+          <p:cNvSpPr/>
+          <p:nvPr/>
+        </p:nvSpPr>
+        <p:spPr>
+          <a:xfrm>
+            <a:off x="1005840" y="4617720"/>
+            <a:ext cx="3931920" cy="292608"/>
+          </a:xfrm>
+          <a:prstGeom prst="rect">
+            <a:avLst/>
+          </a:prstGeom>
+          <a:noFill/>
+          <a:ln/>
+        </p:spPr>
+        <p:txBody>
+          <a:bodyPr wrap="square" lIns="0" tIns="0" rIns="0" bIns="0" rtlCol="0" anchor="ctr"/>
+          <a:lstStyle/>
+          <a:p>
+            <a:pPr algn="l" indent="0" marL="0">
+              <a:buNone/>
+            </a:pPr>
+            <a:r>
+              <a:rPr lang="en-US" sz="1250" dirty="0">
+                <a:solidFill>
+                  <a:srgbClr val="8B949E"/>
+                </a:solidFill>
+                <a:latin typeface="Hiragino Sans" pitchFamily="34" charset="0"/>
+                <a:ea typeface="Hiragino Sans" pitchFamily="34" charset="-122"/>
+                <a:cs typeface="Hiragino Sans" pitchFamily="34" charset="-120"/>
+              </a:rPr>
+              <a:t>localStorage に保存</a:t>
+            </a:r>
+            <a:endParaRPr lang="en-US" sz="1250" dirty="0"/>
+          </a:p>
+        </p:txBody>
+      </p:sp>
+      <p:sp>
+        <p:nvSpPr>
+          <p:cNvPr id="18" name="Shape 16"/>
+          <p:cNvSpPr/>
+          <p:nvPr/>
+        </p:nvSpPr>
+        <p:spPr>
+          <a:xfrm>
+            <a:off x="640080" y="5056632"/>
+            <a:ext cx="4572000" cy="749808"/>
+          </a:xfrm>
+          <a:prstGeom prst="roundRect">
+            <a:avLst>
+              <a:gd name="adj" fmla="val 9756"/>
+            </a:avLst>
+          </a:prstGeom>
+          <a:solidFill>
+            <a:srgbClr val="161B22"/>
+          </a:solidFill>
+          <a:ln w="12700">
+            <a:solidFill>
+              <a:srgbClr val="30363D"/>
+            </a:solidFill>
+            <a:prstDash val="solid"/>
+          </a:ln>
+          <a:effectLst>
+            <a:outerShdw sx="100000" sy="100000" kx="0" ky="0" algn="bl" rotWithShape="0" blurRad="127000" dist="38100" dir="5400000">
+              <a:srgbClr val="000000">
+                <a:alpha val="35000"/>
+              </a:srgbClr>
+            </a:outerShdw>
+          </a:effectLst>
+        </p:spPr>
+      </p:sp>
+      <p:sp>
+        <p:nvSpPr>
+          <p:cNvPr id="19" name="Shape 17"/>
+          <p:cNvSpPr/>
+          <p:nvPr/>
+        </p:nvSpPr>
+        <p:spPr>
+          <a:xfrm>
+            <a:off x="640080" y="5056632"/>
+            <a:ext cx="82296" cy="749808"/>
+          </a:xfrm>
+          <a:prstGeom prst="rect">
+            <a:avLst/>
+          </a:prstGeom>
+          <a:solidFill>
+            <a:srgbClr val="F0883E"/>
+          </a:solidFill>
+          <a:ln/>
+        </p:spPr>
+      </p:sp>
+      <p:sp>
+        <p:nvSpPr>
+          <p:cNvPr id="20" name="Text 18"/>
+          <p:cNvSpPr/>
+          <p:nvPr/>
+        </p:nvSpPr>
+        <p:spPr>
+          <a:xfrm>
+            <a:off x="1005840" y="5148072"/>
+            <a:ext cx="3931920" cy="365760"/>
+          </a:xfrm>
+          <a:prstGeom prst="rect">
+            <a:avLst/>
+          </a:prstGeom>
+          <a:noFill/>
+          <a:ln/>
+        </p:spPr>
+        <p:txBody>
+          <a:bodyPr wrap="square" lIns="0" tIns="0" rIns="0" bIns="0" rtlCol="0" anchor="ctr"/>
+          <a:lstStyle/>
+          <a:p>
+            <a:pPr algn="l" indent="0" marL="0">
+              <a:buNone/>
+            </a:pPr>
+            <a:r>
+              <a:rPr lang="en-US" sz="1600" b="1" dirty="0">
+                <a:solidFill>
+                  <a:srgbClr val="E6EDF3"/>
+                </a:solidFill>
+                <a:latin typeface="Hiragino Sans" pitchFamily="34" charset="0"/>
+                <a:ea typeface="Hiragino Sans" pitchFamily="34" charset="-122"/>
+                <a:cs typeface="Hiragino Sans" pitchFamily="34" charset="-120"/>
+              </a:rPr>
+              <a:t>1ファイルで完結</a:t>
+            </a:r>
+            <a:endParaRPr lang="en-US" sz="1600" dirty="0"/>
+          </a:p>
+        </p:txBody>
+      </p:sp>
+      <p:sp>
+        <p:nvSpPr>
+          <p:cNvPr id="21" name="Text 19"/>
+          <p:cNvSpPr/>
+          <p:nvPr/>
+        </p:nvSpPr>
+        <p:spPr>
+          <a:xfrm>
+            <a:off x="1005840" y="5495544"/>
+            <a:ext cx="3931920" cy="292608"/>
+          </a:xfrm>
+          <a:prstGeom prst="rect">
+            <a:avLst/>
+          </a:prstGeom>
+          <a:noFill/>
+          <a:ln/>
+        </p:spPr>
+        <p:txBody>
+          <a:bodyPr wrap="square" lIns="0" tIns="0" rIns="0" bIns="0" rtlCol="0" anchor="ctr"/>
+          <a:lstStyle/>
+          <a:p>
+            <a:pPr algn="l" indent="0" marL="0">
+              <a:buNone/>
+            </a:pPr>
+            <a:r>
+              <a:rPr lang="en-US" sz="1250" dirty="0">
+                <a:solidFill>
+                  <a:srgbClr val="8B949E"/>
+                </a:solidFill>
+                <a:latin typeface="Hiragino Sans" pitchFamily="34" charset="0"/>
+                <a:ea typeface="Hiragino Sans" pitchFamily="34" charset="-122"/>
+                <a:cs typeface="Hiragino Sans" pitchFamily="34" charset="-120"/>
+              </a:rPr>
+              <a:t>index.html だけで配布しやすい</a:t>
+            </a:r>
+            <a:endParaRPr lang="en-US" sz="1250" dirty="0"/>
+          </a:p>
+        </p:txBody>
+      </p:sp>
+      <p:sp>
+        <p:nvSpPr>
+          <p:cNvPr id="22" name="Shape 20"/>
+          <p:cNvSpPr/>
+          <p:nvPr/>
+        </p:nvSpPr>
+        <p:spPr>
+          <a:xfrm>
+            <a:off x="5577840" y="2331720"/>
+            <a:ext cx="5989320" cy="3520440"/>
+          </a:xfrm>
+          <a:prstGeom prst="roundRect">
+            <a:avLst>
+              <a:gd name="adj" fmla="val 2078"/>
             </a:avLst>
           </a:prstGeom>
           <a:solidFill>
@@ -11205,14 +11732,14 @@
       </p:sp>
       <p:sp>
         <p:nvSpPr>
-          <p:cNvPr id="6" name="Shape 4"/>
-          <p:cNvSpPr/>
-          <p:nvPr/>
-        </p:nvSpPr>
-        <p:spPr>
-          <a:xfrm>
-            <a:off x="649224" y="1929384"/>
-            <a:ext cx="5650992" cy="347472"/>
+          <p:cNvPr id="23" name="Shape 21"/>
+          <p:cNvSpPr/>
+          <p:nvPr/>
+        </p:nvSpPr>
+        <p:spPr>
+          <a:xfrm>
+            <a:off x="5577840" y="2331720"/>
+            <a:ext cx="5989320" cy="384048"/>
           </a:xfrm>
           <a:prstGeom prst="rect">
             <a:avLst/>
@@ -11225,13 +11752,13 @@
       </p:sp>
       <p:sp>
         <p:nvSpPr>
-          <p:cNvPr id="7" name="Shape 5"/>
-          <p:cNvSpPr/>
-          <p:nvPr/>
-        </p:nvSpPr>
-        <p:spPr>
-          <a:xfrm>
-            <a:off x="804672" y="2043684"/>
+          <p:cNvPr id="24" name="Shape 22"/>
+          <p:cNvSpPr/>
+          <p:nvPr/>
+        </p:nvSpPr>
+        <p:spPr>
+          <a:xfrm>
+            <a:off x="5760720" y="2478024"/>
             <a:ext cx="109728" cy="109728"/>
           </a:xfrm>
           <a:prstGeom prst="ellipse">
@@ -11245,13 +11772,13 @@
       </p:sp>
       <p:sp>
         <p:nvSpPr>
-          <p:cNvPr id="8" name="Shape 6"/>
-          <p:cNvSpPr/>
-          <p:nvPr/>
-        </p:nvSpPr>
-        <p:spPr>
-          <a:xfrm>
-            <a:off x="1005840" y="2043684"/>
+          <p:cNvPr id="25" name="Shape 23"/>
+          <p:cNvSpPr/>
+          <p:nvPr/>
+        </p:nvSpPr>
+        <p:spPr>
+          <a:xfrm>
+            <a:off x="5961888" y="2478024"/>
             <a:ext cx="109728" cy="109728"/>
           </a:xfrm>
           <a:prstGeom prst="ellipse">
@@ -11265,13 +11792,13 @@
       </p:sp>
       <p:sp>
         <p:nvSpPr>
-          <p:cNvPr id="9" name="Shape 7"/>
-          <p:cNvSpPr/>
-          <p:nvPr/>
-        </p:nvSpPr>
-        <p:spPr>
-          <a:xfrm>
-            <a:off x="1207008" y="2043684"/>
+          <p:cNvPr id="26" name="Shape 24"/>
+          <p:cNvSpPr/>
+          <p:nvPr/>
+        </p:nvSpPr>
+        <p:spPr>
+          <a:xfrm>
+            <a:off x="6163056" y="2478024"/>
             <a:ext cx="109728" cy="109728"/>
           </a:xfrm>
           <a:prstGeom prst="ellipse">
@@ -11285,30 +11812,30 @@
       </p:sp>
       <p:sp>
         <p:nvSpPr>
-          <p:cNvPr id="10" name="Text 8"/>
-          <p:cNvSpPr/>
-          <p:nvPr/>
-        </p:nvSpPr>
-        <p:spPr>
-          <a:xfrm>
-            <a:off x="1463040" y="1929384"/>
-            <a:ext cx="4572000" cy="347472"/>
-          </a:xfrm>
-          <a:prstGeom prst="rect">
-            <a:avLst/>
-          </a:prstGeom>
-          <a:noFill/>
-          <a:ln/>
-        </p:spPr>
-        <p:txBody>
-          <a:bodyPr wrap="square" lIns="0" tIns="0" rIns="0" bIns="0" rtlCol="0" anchor="ctr"/>
-          <a:lstStyle/>
-          <a:p>
-            <a:pPr algn="l" indent="0" marL="0">
-              <a:buNone/>
-            </a:pPr>
-            <a:r>
-              <a:rPr lang="en-US" sz="1000" dirty="0">
+          <p:cNvPr id="27" name="Text 25"/>
+          <p:cNvSpPr/>
+          <p:nvPr/>
+        </p:nvSpPr>
+        <p:spPr>
+          <a:xfrm>
+            <a:off x="6446520" y="2331720"/>
+            <a:ext cx="4846320" cy="384048"/>
+          </a:xfrm>
+          <a:prstGeom prst="rect">
+            <a:avLst/>
+          </a:prstGeom>
+          <a:noFill/>
+          <a:ln/>
+        </p:spPr>
+        <p:txBody>
+          <a:bodyPr wrap="square" lIns="0" tIns="0" rIns="0" bIns="0" rtlCol="0" anchor="ctr"/>
+          <a:lstStyle/>
+          <a:p>
+            <a:pPr algn="l" indent="0" marL="0">
+              <a:buNone/>
+            </a:pPr>
+            <a:r>
+              <a:rPr lang="en-US" sz="1100" dirty="0">
                 <a:solidFill>
                   <a:srgbClr val="8B949E"/>
                 </a:solidFill>
@@ -11316,744 +11843,39 @@
                 <a:ea typeface="Menlo" pitchFamily="34" charset="-122"/>
                 <a:cs typeface="Menlo" pitchFamily="34" charset="-120"/>
               </a:rPr>
-              <a:t>エージェントが作る構成（例）</a:t>
-            </a:r>
-            <a:endParaRPr lang="en-US" sz="1000" dirty="0"/>
-          </a:p>
-        </p:txBody>
-      </p:sp>
-      <p:sp>
-        <p:nvSpPr>
-          <p:cNvPr id="11" name="Text 9"/>
-          <p:cNvSpPr/>
-          <p:nvPr/>
-        </p:nvSpPr>
-        <p:spPr>
-          <a:xfrm>
-            <a:off x="896112" y="2377440"/>
-            <a:ext cx="5212080" cy="3319272"/>
-          </a:xfrm>
-          <a:prstGeom prst="rect">
-            <a:avLst/>
-          </a:prstGeom>
-          <a:noFill/>
-          <a:ln/>
-        </p:spPr>
-        <p:txBody>
-          <a:bodyPr wrap="square" lIns="0" tIns="0" rIns="0" bIns="0" rtlCol="0" anchor="t"/>
-          <a:lstStyle/>
-          <a:p>
-            <a:pPr algn="l" indent="0" marL="0">
-              <a:lnSpc>
-                <a:spcPct val="125000"/>
-              </a:lnSpc>
-              <a:buNone/>
-            </a:pPr>
-            <a:r>
-              <a:rPr lang="en-US" sz="1400" dirty="0">
-                <a:solidFill>
-                  <a:srgbClr val="8B949E"/>
-                </a:solidFill>
-                <a:latin typeface="Menlo" pitchFamily="34" charset="0"/>
-                <a:ea typeface="Menlo" pitchFamily="34" charset="-122"/>
-                <a:cs typeface="Menlo" pitchFamily="34" charset="-120"/>
-              </a:rPr>
-              <a:t>todo-app/</a:t>
-            </a:r>
-            <a:endParaRPr lang="en-US" sz="1400" dirty="0"/>
-          </a:p>
-          <a:p>
-            <a:pPr algn="l" indent="0" marL="0">
-              <a:lnSpc>
-                <a:spcPct val="125000"/>
-              </a:lnSpc>
-              <a:buNone/>
-            </a:pPr>
-            <a:r>
-              <a:rPr lang="en-US" sz="1400" dirty="0">
-                <a:solidFill>
-                  <a:srgbClr val="C9D1D9"/>
-                </a:solidFill>
-                <a:latin typeface="Menlo" pitchFamily="34" charset="0"/>
-                <a:ea typeface="Menlo" pitchFamily="34" charset="-122"/>
-                <a:cs typeface="Menlo" pitchFamily="34" charset="-120"/>
-              </a:rPr>
-              <a:t>  index.html     画面</a:t>
-            </a:r>
-            <a:endParaRPr lang="en-US" sz="1400" dirty="0"/>
-          </a:p>
-          <a:p>
-            <a:pPr algn="l" indent="0" marL="0">
-              <a:lnSpc>
-                <a:spcPct val="125000"/>
-              </a:lnSpc>
-              <a:buNone/>
-            </a:pPr>
-            <a:r>
-              <a:rPr lang="en-US" sz="1400" dirty="0">
-                <a:solidFill>
-                  <a:srgbClr val="C9D1D9"/>
-                </a:solidFill>
-                <a:latin typeface="Menlo" pitchFamily="34" charset="0"/>
-                <a:ea typeface="Menlo" pitchFamily="34" charset="-122"/>
-                <a:cs typeface="Menlo" pitchFamily="34" charset="-120"/>
-              </a:rPr>
-              <a:t>  styles.css     見た目</a:t>
-            </a:r>
-            <a:endParaRPr lang="en-US" sz="1400" dirty="0"/>
-          </a:p>
-          <a:p>
-            <a:pPr algn="l" indent="0" marL="0">
-              <a:lnSpc>
-                <a:spcPct val="125000"/>
-              </a:lnSpc>
-              <a:buNone/>
-            </a:pPr>
-            <a:r>
-              <a:rPr lang="en-US" sz="1400" dirty="0">
-                <a:solidFill>
-                  <a:srgbClr val="8B949E"/>
-                </a:solidFill>
-                <a:latin typeface="Menlo" pitchFamily="34" charset="0"/>
-                <a:ea typeface="Menlo" pitchFamily="34" charset="-122"/>
-                <a:cs typeface="Menlo" pitchFamily="34" charset="-120"/>
-              </a:rPr>
-              <a:t>  src/</a:t>
-            </a:r>
-            <a:endParaRPr lang="en-US" sz="1400" dirty="0"/>
-          </a:p>
-          <a:p>
-            <a:pPr algn="l" indent="0" marL="0">
-              <a:lnSpc>
-                <a:spcPct val="125000"/>
-              </a:lnSpc>
-              <a:buNone/>
-            </a:pPr>
-            <a:r>
-              <a:rPr lang="en-US" sz="1400" dirty="0">
-                <a:solidFill>
-                  <a:srgbClr val="C9D1D9"/>
-                </a:solidFill>
-                <a:latin typeface="Menlo" pitchFamily="34" charset="0"/>
-                <a:ea typeface="Menlo" pitchFamily="34" charset="-122"/>
-                <a:cs typeface="Menlo" pitchFamily="34" charset="-120"/>
-              </a:rPr>
-              <a:t>    storage.js   保存（localStorage）</a:t>
-            </a:r>
-            <a:endParaRPr lang="en-US" sz="1400" dirty="0"/>
-          </a:p>
-          <a:p>
-            <a:pPr algn="l" indent="0" marL="0">
-              <a:lnSpc>
-                <a:spcPct val="125000"/>
-              </a:lnSpc>
-              <a:buNone/>
-            </a:pPr>
-            <a:r>
-              <a:rPr lang="en-US" sz="1400" dirty="0">
-                <a:solidFill>
-                  <a:srgbClr val="C9D1D9"/>
-                </a:solidFill>
-                <a:latin typeface="Menlo" pitchFamily="34" charset="0"/>
-                <a:ea typeface="Menlo" pitchFamily="34" charset="-122"/>
-                <a:cs typeface="Menlo" pitchFamily="34" charset="-120"/>
-              </a:rPr>
-              <a:t>    todo.js      追加・完了・削除</a:t>
-            </a:r>
-            <a:endParaRPr lang="en-US" sz="1400" dirty="0"/>
-          </a:p>
-          <a:p>
-            <a:pPr algn="l" indent="0" marL="0">
-              <a:lnSpc>
-                <a:spcPct val="125000"/>
-              </a:lnSpc>
-              <a:buNone/>
-            </a:pPr>
-            <a:r>
-              <a:rPr lang="en-US" sz="1400" dirty="0">
-                <a:solidFill>
-                  <a:srgbClr val="C9D1D9"/>
-                </a:solidFill>
-                <a:latin typeface="Menlo" pitchFamily="34" charset="0"/>
-                <a:ea typeface="Menlo" pitchFamily="34" charset="-122"/>
-                <a:cs typeface="Menlo" pitchFamily="34" charset="-120"/>
-              </a:rPr>
-              <a:t>    app.js       画面とロジックの入口</a:t>
-            </a:r>
-            <a:endParaRPr lang="en-US" sz="1400" dirty="0"/>
-          </a:p>
-        </p:txBody>
-      </p:sp>
-      <p:sp>
-        <p:nvSpPr>
-          <p:cNvPr id="12" name="Shape 10"/>
-          <p:cNvSpPr/>
-          <p:nvPr/>
-        </p:nvSpPr>
-        <p:spPr>
-          <a:xfrm>
-            <a:off x="6675120" y="1920240"/>
-            <a:ext cx="4846320" cy="749808"/>
-          </a:xfrm>
-          <a:prstGeom prst="roundRect">
-            <a:avLst>
-              <a:gd name="adj" fmla="val 9756"/>
-            </a:avLst>
-          </a:prstGeom>
-          <a:solidFill>
-            <a:srgbClr val="161B22"/>
-          </a:solidFill>
-          <a:ln w="12700">
-            <a:solidFill>
-              <a:srgbClr val="30363D"/>
-            </a:solidFill>
-            <a:prstDash val="solid"/>
-          </a:ln>
-          <a:effectLst>
-            <a:outerShdw sx="100000" sy="100000" kx="0" ky="0" algn="bl" rotWithShape="0" blurRad="127000" dist="38100" dir="5400000">
-              <a:srgbClr val="000000">
-                <a:alpha val="35000"/>
-              </a:srgbClr>
-            </a:outerShdw>
-          </a:effectLst>
-        </p:spPr>
-      </p:sp>
-      <p:sp>
-        <p:nvSpPr>
-          <p:cNvPr id="13" name="Shape 11"/>
-          <p:cNvSpPr/>
-          <p:nvPr/>
-        </p:nvSpPr>
-        <p:spPr>
-          <a:xfrm>
-            <a:off x="6675120" y="1920240"/>
-            <a:ext cx="82296" cy="749808"/>
-          </a:xfrm>
-          <a:prstGeom prst="rect">
-            <a:avLst/>
-          </a:prstGeom>
-          <a:solidFill>
-            <a:srgbClr val="3FB950"/>
-          </a:solidFill>
-          <a:ln/>
-        </p:spPr>
-      </p:sp>
-      <p:sp>
-        <p:nvSpPr>
-          <p:cNvPr id="14" name="Text 12"/>
-          <p:cNvSpPr/>
-          <p:nvPr/>
-        </p:nvSpPr>
-        <p:spPr>
-          <a:xfrm>
-            <a:off x="7040880" y="2011680"/>
-            <a:ext cx="4206240" cy="365760"/>
-          </a:xfrm>
-          <a:prstGeom prst="rect">
-            <a:avLst/>
-          </a:prstGeom>
-          <a:noFill/>
-          <a:ln/>
-        </p:spPr>
-        <p:txBody>
-          <a:bodyPr wrap="square" lIns="0" tIns="0" rIns="0" bIns="0" rtlCol="0" anchor="ctr"/>
-          <a:lstStyle/>
-          <a:p>
-            <a:pPr algn="l" indent="0" marL="0">
-              <a:buNone/>
-            </a:pPr>
-            <a:r>
-              <a:rPr lang="en-US" sz="1600" b="1" dirty="0">
-                <a:solidFill>
-                  <a:srgbClr val="E6EDF3"/>
-                </a:solidFill>
-                <a:latin typeface="Hiragino Sans" pitchFamily="34" charset="0"/>
-                <a:ea typeface="Hiragino Sans" pitchFamily="34" charset="-122"/>
-                <a:cs typeface="Hiragino Sans" pitchFamily="34" charset="-120"/>
-              </a:rPr>
-              <a:t>タスクを追加</a:t>
-            </a:r>
-            <a:endParaRPr lang="en-US" sz="1600" dirty="0"/>
-          </a:p>
-        </p:txBody>
-      </p:sp>
-      <p:sp>
-        <p:nvSpPr>
-          <p:cNvPr id="15" name="Text 13"/>
-          <p:cNvSpPr/>
-          <p:nvPr/>
-        </p:nvSpPr>
-        <p:spPr>
-          <a:xfrm>
-            <a:off x="7040880" y="2359152"/>
-            <a:ext cx="4206240" cy="292608"/>
-          </a:xfrm>
-          <a:prstGeom prst="rect">
-            <a:avLst/>
-          </a:prstGeom>
-          <a:noFill/>
-          <a:ln/>
-        </p:spPr>
-        <p:txBody>
-          <a:bodyPr wrap="square" lIns="0" tIns="0" rIns="0" bIns="0" rtlCol="0" anchor="ctr"/>
-          <a:lstStyle/>
-          <a:p>
-            <a:pPr algn="l" indent="0" marL="0">
-              <a:buNone/>
-            </a:pPr>
-            <a:r>
-              <a:rPr lang="en-US" sz="1250" dirty="0">
-                <a:solidFill>
-                  <a:srgbClr val="8B949E"/>
-                </a:solidFill>
-                <a:latin typeface="Hiragino Sans" pitchFamily="34" charset="0"/>
-                <a:ea typeface="Hiragino Sans" pitchFamily="34" charset="-122"/>
-                <a:cs typeface="Hiragino Sans" pitchFamily="34" charset="-120"/>
-              </a:rPr>
-              <a:t>入力して「追加」で登録</a:t>
-            </a:r>
-            <a:endParaRPr lang="en-US" sz="1250" dirty="0"/>
-          </a:p>
-        </p:txBody>
-      </p:sp>
-      <p:sp>
-        <p:nvSpPr>
-          <p:cNvPr id="16" name="Shape 14"/>
-          <p:cNvSpPr/>
-          <p:nvPr/>
-        </p:nvSpPr>
-        <p:spPr>
-          <a:xfrm>
-            <a:off x="6675120" y="2798064"/>
-            <a:ext cx="4846320" cy="749808"/>
-          </a:xfrm>
-          <a:prstGeom prst="roundRect">
-            <a:avLst>
-              <a:gd name="adj" fmla="val 9756"/>
-            </a:avLst>
-          </a:prstGeom>
-          <a:solidFill>
-            <a:srgbClr val="161B22"/>
-          </a:solidFill>
-          <a:ln w="12700">
-            <a:solidFill>
-              <a:srgbClr val="30363D"/>
-            </a:solidFill>
-            <a:prstDash val="solid"/>
-          </a:ln>
-          <a:effectLst>
-            <a:outerShdw sx="100000" sy="100000" kx="0" ky="0" algn="bl" rotWithShape="0" blurRad="127000" dist="38100" dir="5400000">
-              <a:srgbClr val="000000">
-                <a:alpha val="35000"/>
-              </a:srgbClr>
-            </a:outerShdw>
-          </a:effectLst>
-        </p:spPr>
-      </p:sp>
-      <p:sp>
-        <p:nvSpPr>
-          <p:cNvPr id="17" name="Shape 15"/>
-          <p:cNvSpPr/>
-          <p:nvPr/>
-        </p:nvSpPr>
-        <p:spPr>
-          <a:xfrm>
-            <a:off x="6675120" y="2798064"/>
-            <a:ext cx="82296" cy="749808"/>
-          </a:xfrm>
-          <a:prstGeom prst="rect">
-            <a:avLst/>
-          </a:prstGeom>
-          <a:solidFill>
-            <a:srgbClr val="58A6FF"/>
-          </a:solidFill>
-          <a:ln/>
-        </p:spPr>
-      </p:sp>
-      <p:sp>
-        <p:nvSpPr>
-          <p:cNvPr id="18" name="Text 16"/>
-          <p:cNvSpPr/>
-          <p:nvPr/>
-        </p:nvSpPr>
-        <p:spPr>
-          <a:xfrm>
-            <a:off x="7040880" y="2889504"/>
-            <a:ext cx="4206240" cy="365760"/>
-          </a:xfrm>
-          <a:prstGeom prst="rect">
-            <a:avLst/>
-          </a:prstGeom>
-          <a:noFill/>
-          <a:ln/>
-        </p:spPr>
-        <p:txBody>
-          <a:bodyPr wrap="square" lIns="0" tIns="0" rIns="0" bIns="0" rtlCol="0" anchor="ctr"/>
-          <a:lstStyle/>
-          <a:p>
-            <a:pPr algn="l" indent="0" marL="0">
-              <a:buNone/>
-            </a:pPr>
-            <a:r>
-              <a:rPr lang="en-US" sz="1600" b="1" dirty="0">
-                <a:solidFill>
-                  <a:srgbClr val="E6EDF3"/>
-                </a:solidFill>
-                <a:latin typeface="Hiragino Sans" pitchFamily="34" charset="0"/>
-                <a:ea typeface="Hiragino Sans" pitchFamily="34" charset="-122"/>
-                <a:cs typeface="Hiragino Sans" pitchFamily="34" charset="-120"/>
-              </a:rPr>
-              <a:t>完了でチェック</a:t>
-            </a:r>
-            <a:endParaRPr lang="en-US" sz="1600" dirty="0"/>
-          </a:p>
-        </p:txBody>
-      </p:sp>
-      <p:sp>
-        <p:nvSpPr>
-          <p:cNvPr id="19" name="Text 17"/>
-          <p:cNvSpPr/>
-          <p:nvPr/>
-        </p:nvSpPr>
-        <p:spPr>
-          <a:xfrm>
-            <a:off x="7040880" y="3236976"/>
-            <a:ext cx="4206240" cy="292608"/>
-          </a:xfrm>
-          <a:prstGeom prst="rect">
-            <a:avLst/>
-          </a:prstGeom>
-          <a:noFill/>
-          <a:ln/>
-        </p:spPr>
-        <p:txBody>
-          <a:bodyPr wrap="square" lIns="0" tIns="0" rIns="0" bIns="0" rtlCol="0" anchor="ctr"/>
-          <a:lstStyle/>
-          <a:p>
-            <a:pPr algn="l" indent="0" marL="0">
-              <a:buNone/>
-            </a:pPr>
-            <a:r>
-              <a:rPr lang="en-US" sz="1250" dirty="0">
-                <a:solidFill>
-                  <a:srgbClr val="8B949E"/>
-                </a:solidFill>
-                <a:latin typeface="Hiragino Sans" pitchFamily="34" charset="0"/>
-                <a:ea typeface="Hiragino Sans" pitchFamily="34" charset="-122"/>
-                <a:cs typeface="Hiragino Sans" pitchFamily="34" charset="-120"/>
-              </a:rPr>
-              <a:t>押すと打ち消し線が付く</a:t>
-            </a:r>
-            <a:endParaRPr lang="en-US" sz="1250" dirty="0"/>
-          </a:p>
-        </p:txBody>
-      </p:sp>
-      <p:sp>
-        <p:nvSpPr>
-          <p:cNvPr id="20" name="Shape 18"/>
-          <p:cNvSpPr/>
-          <p:nvPr/>
-        </p:nvSpPr>
-        <p:spPr>
-          <a:xfrm>
-            <a:off x="6675120" y="3675888"/>
-            <a:ext cx="4846320" cy="749808"/>
-          </a:xfrm>
-          <a:prstGeom prst="roundRect">
-            <a:avLst>
-              <a:gd name="adj" fmla="val 9756"/>
-            </a:avLst>
-          </a:prstGeom>
-          <a:solidFill>
-            <a:srgbClr val="161B22"/>
-          </a:solidFill>
-          <a:ln w="12700">
-            <a:solidFill>
-              <a:srgbClr val="30363D"/>
-            </a:solidFill>
-            <a:prstDash val="solid"/>
-          </a:ln>
-          <a:effectLst>
-            <a:outerShdw sx="100000" sy="100000" kx="0" ky="0" algn="bl" rotWithShape="0" blurRad="127000" dist="38100" dir="5400000">
-              <a:srgbClr val="000000">
-                <a:alpha val="35000"/>
-              </a:srgbClr>
-            </a:outerShdw>
-          </a:effectLst>
-        </p:spPr>
-      </p:sp>
-      <p:sp>
-        <p:nvSpPr>
-          <p:cNvPr id="21" name="Shape 19"/>
-          <p:cNvSpPr/>
-          <p:nvPr/>
-        </p:nvSpPr>
-        <p:spPr>
-          <a:xfrm>
-            <a:off x="6675120" y="3675888"/>
-            <a:ext cx="82296" cy="749808"/>
-          </a:xfrm>
-          <a:prstGeom prst="rect">
-            <a:avLst/>
-          </a:prstGeom>
-          <a:solidFill>
-            <a:srgbClr val="BC8CFF"/>
-          </a:solidFill>
-          <a:ln/>
-        </p:spPr>
-      </p:sp>
-      <p:sp>
-        <p:nvSpPr>
-          <p:cNvPr id="22" name="Text 20"/>
-          <p:cNvSpPr/>
-          <p:nvPr/>
-        </p:nvSpPr>
-        <p:spPr>
-          <a:xfrm>
-            <a:off x="7040880" y="3767328"/>
-            <a:ext cx="4206240" cy="365760"/>
-          </a:xfrm>
-          <a:prstGeom prst="rect">
-            <a:avLst/>
-          </a:prstGeom>
-          <a:noFill/>
-          <a:ln/>
-        </p:spPr>
-        <p:txBody>
-          <a:bodyPr wrap="square" lIns="0" tIns="0" rIns="0" bIns="0" rtlCol="0" anchor="ctr"/>
-          <a:lstStyle/>
-          <a:p>
-            <a:pPr algn="l" indent="0" marL="0">
-              <a:buNone/>
-            </a:pPr>
-            <a:r>
-              <a:rPr lang="en-US" sz="1600" b="1" dirty="0">
-                <a:solidFill>
-                  <a:srgbClr val="E6EDF3"/>
-                </a:solidFill>
-                <a:latin typeface="Hiragino Sans" pitchFamily="34" charset="0"/>
-                <a:ea typeface="Hiragino Sans" pitchFamily="34" charset="-122"/>
-                <a:cs typeface="Hiragino Sans" pitchFamily="34" charset="-120"/>
-              </a:rPr>
-              <a:t>いらないものは削除</a:t>
-            </a:r>
-            <a:endParaRPr lang="en-US" sz="1600" dirty="0"/>
-          </a:p>
-        </p:txBody>
-      </p:sp>
-      <p:sp>
-        <p:nvSpPr>
-          <p:cNvPr id="23" name="Text 21"/>
-          <p:cNvSpPr/>
-          <p:nvPr/>
-        </p:nvSpPr>
-        <p:spPr>
-          <a:xfrm>
-            <a:off x="7040880" y="4114800"/>
-            <a:ext cx="4206240" cy="292608"/>
-          </a:xfrm>
-          <a:prstGeom prst="rect">
-            <a:avLst/>
-          </a:prstGeom>
-          <a:noFill/>
-          <a:ln/>
-        </p:spPr>
-        <p:txBody>
-          <a:bodyPr wrap="square" lIns="0" tIns="0" rIns="0" bIns="0" rtlCol="0" anchor="ctr"/>
-          <a:lstStyle/>
-          <a:p>
-            <a:pPr algn="l" indent="0" marL="0">
-              <a:buNone/>
-            </a:pPr>
-            <a:r>
-              <a:rPr lang="en-US" sz="1250" dirty="0">
-                <a:solidFill>
-                  <a:srgbClr val="8B949E"/>
-                </a:solidFill>
-                <a:latin typeface="Hiragino Sans" pitchFamily="34" charset="0"/>
-                <a:ea typeface="Hiragino Sans" pitchFamily="34" charset="-122"/>
-                <a:cs typeface="Hiragino Sans" pitchFamily="34" charset="-120"/>
-              </a:rPr>
-              <a:t>× ボタンで消える</a:t>
-            </a:r>
-            <a:endParaRPr lang="en-US" sz="1250" dirty="0"/>
-          </a:p>
-        </p:txBody>
-      </p:sp>
-      <p:sp>
-        <p:nvSpPr>
-          <p:cNvPr id="24" name="Shape 22"/>
-          <p:cNvSpPr/>
-          <p:nvPr/>
-        </p:nvSpPr>
-        <p:spPr>
-          <a:xfrm>
-            <a:off x="6675120" y="4553712"/>
-            <a:ext cx="4846320" cy="749808"/>
-          </a:xfrm>
-          <a:prstGeom prst="roundRect">
-            <a:avLst>
-              <a:gd name="adj" fmla="val 9756"/>
-            </a:avLst>
-          </a:prstGeom>
-          <a:solidFill>
-            <a:srgbClr val="161B22"/>
-          </a:solidFill>
-          <a:ln w="12700">
-            <a:solidFill>
-              <a:srgbClr val="30363D"/>
-            </a:solidFill>
-            <a:prstDash val="solid"/>
-          </a:ln>
-          <a:effectLst>
-            <a:outerShdw sx="100000" sy="100000" kx="0" ky="0" algn="bl" rotWithShape="0" blurRad="127000" dist="38100" dir="5400000">
-              <a:srgbClr val="000000">
-                <a:alpha val="35000"/>
-              </a:srgbClr>
-            </a:outerShdw>
-          </a:effectLst>
-        </p:spPr>
-      </p:sp>
-      <p:sp>
-        <p:nvSpPr>
-          <p:cNvPr id="25" name="Shape 23"/>
-          <p:cNvSpPr/>
-          <p:nvPr/>
-        </p:nvSpPr>
-        <p:spPr>
-          <a:xfrm>
-            <a:off x="6675120" y="4553712"/>
-            <a:ext cx="82296" cy="749808"/>
-          </a:xfrm>
-          <a:prstGeom prst="rect">
-            <a:avLst/>
-          </a:prstGeom>
-          <a:solidFill>
-            <a:srgbClr val="F0883E"/>
-          </a:solidFill>
-          <a:ln/>
-        </p:spPr>
-      </p:sp>
-      <p:sp>
-        <p:nvSpPr>
-          <p:cNvPr id="26" name="Text 24"/>
-          <p:cNvSpPr/>
-          <p:nvPr/>
-        </p:nvSpPr>
-        <p:spPr>
-          <a:xfrm>
-            <a:off x="7040880" y="4645152"/>
-            <a:ext cx="4206240" cy="365760"/>
-          </a:xfrm>
-          <a:prstGeom prst="rect">
-            <a:avLst/>
-          </a:prstGeom>
-          <a:noFill/>
-          <a:ln/>
-        </p:spPr>
-        <p:txBody>
-          <a:bodyPr wrap="square" lIns="0" tIns="0" rIns="0" bIns="0" rtlCol="0" anchor="ctr"/>
-          <a:lstStyle/>
-          <a:p>
-            <a:pPr algn="l" indent="0" marL="0">
-              <a:buNone/>
-            </a:pPr>
-            <a:r>
-              <a:rPr lang="en-US" sz="1600" b="1" dirty="0">
-                <a:solidFill>
-                  <a:srgbClr val="E6EDF3"/>
-                </a:solidFill>
-                <a:latin typeface="Hiragino Sans" pitchFamily="34" charset="0"/>
-                <a:ea typeface="Hiragino Sans" pitchFamily="34" charset="-122"/>
-                <a:cs typeface="Hiragino Sans" pitchFamily="34" charset="-120"/>
-              </a:rPr>
-              <a:t>閉じても残る</a:t>
-            </a:r>
-            <a:endParaRPr lang="en-US" sz="1600" dirty="0"/>
-          </a:p>
-        </p:txBody>
-      </p:sp>
-      <p:sp>
-        <p:nvSpPr>
-          <p:cNvPr id="27" name="Text 25"/>
-          <p:cNvSpPr/>
-          <p:nvPr/>
-        </p:nvSpPr>
-        <p:spPr>
-          <a:xfrm>
-            <a:off x="7040880" y="4992624"/>
-            <a:ext cx="4206240" cy="292608"/>
-          </a:xfrm>
-          <a:prstGeom prst="rect">
-            <a:avLst/>
-          </a:prstGeom>
-          <a:noFill/>
-          <a:ln/>
-        </p:spPr>
-        <p:txBody>
-          <a:bodyPr wrap="square" lIns="0" tIns="0" rIns="0" bIns="0" rtlCol="0" anchor="ctr"/>
-          <a:lstStyle/>
-          <a:p>
-            <a:pPr algn="l" indent="0" marL="0">
-              <a:buNone/>
-            </a:pPr>
-            <a:r>
-              <a:rPr lang="en-US" sz="1250" dirty="0">
-                <a:solidFill>
-                  <a:srgbClr val="8B949E"/>
-                </a:solidFill>
-                <a:latin typeface="Hiragino Sans" pitchFamily="34" charset="0"/>
-                <a:ea typeface="Hiragino Sans" pitchFamily="34" charset="-122"/>
-                <a:cs typeface="Hiragino Sans" pitchFamily="34" charset="-120"/>
-              </a:rPr>
-              <a:t>localStorage に保存</a:t>
-            </a:r>
-            <a:endParaRPr lang="en-US" sz="1250" dirty="0"/>
-          </a:p>
-        </p:txBody>
-      </p:sp>
-      <p:sp>
-        <p:nvSpPr>
-          <p:cNvPr id="28" name="Text 26"/>
-          <p:cNvSpPr/>
-          <p:nvPr/>
-        </p:nvSpPr>
-        <p:spPr>
-          <a:xfrm>
-            <a:off x="6675120" y="5532120"/>
-            <a:ext cx="4846320" cy="274320"/>
-          </a:xfrm>
-          <a:prstGeom prst="rect">
-            <a:avLst/>
-          </a:prstGeom>
-          <a:noFill/>
-          <a:ln/>
-        </p:spPr>
-        <p:txBody>
-          <a:bodyPr wrap="square" lIns="0" tIns="0" rIns="0" bIns="0" rtlCol="0" anchor="ctr"/>
-          <a:lstStyle/>
-          <a:p>
-            <a:pPr algn="l" indent="0" marL="0">
-              <a:buNone/>
-            </a:pPr>
-            <a:r>
-              <a:rPr lang="en-US" sz="1250" dirty="0">
-                <a:solidFill>
-                  <a:srgbClr val="3FB950"/>
-                </a:solidFill>
-                <a:latin typeface="Hiragino Sans" pitchFamily="34" charset="0"/>
-                <a:ea typeface="Hiragino Sans" pitchFamily="34" charset="-122"/>
-                <a:cs typeface="Hiragino Sans" pitchFamily="34" charset="-120"/>
-              </a:rPr>
-              <a:t>どう分けるかも、まとめてエージェントが考えてくれます。</a:t>
-            </a:r>
-            <a:endParaRPr lang="en-US" sz="1250" dirty="0"/>
-          </a:p>
-        </p:txBody>
-      </p:sp>
-      <p:sp>
-        <p:nvSpPr>
-          <p:cNvPr id="29" name="Text 27"/>
+              <a:t>opencode で生成した実物</a:t>
+            </a:r>
+            <a:endParaRPr lang="en-US" sz="1100" dirty="0"/>
+          </a:p>
+        </p:txBody>
+      </p:sp>
+      <p:pic>
+        <p:nvPicPr>
+          <p:cNvPr id="28" name="Image 0" descr="/Users/ojii3/src/github.com/OJII3/opencode_openrouter_free_example/slides/assets/todo-hands-on-screenshot.png">    </p:cNvPr>
+          <p:cNvPicPr>
+            <a:picLocks noChangeAspect="1"/>
+          </p:cNvPicPr>
+          <p:nvPr/>
+        </p:nvPicPr>
+        <p:blipFill>
+          <a:blip r:embed="rId1"/>
+          <a:stretch>
+            <a:fillRect/>
+          </a:stretch>
+        </p:blipFill>
+        <p:spPr>
+          <a:xfrm>
+            <a:off x="5779008" y="2889504"/>
+            <a:ext cx="5577840" cy="2697480"/>
+          </a:xfrm>
+          <a:prstGeom prst="rect">
+            <a:avLst/>
+          </a:prstGeom>
+        </p:spPr>
+      </p:pic>
+      <p:sp>
+        <p:nvSpPr>
+          <p:cNvPr id="29" name="Text 26"/>
           <p:cNvSpPr/>
           <p:nvPr/>
         </p:nvSpPr>
@@ -12106,7 +11928,7 @@
       </p:sp>
       <p:sp>
         <p:nvSpPr>
-          <p:cNvPr id="30" name="Text 28"/>
+          <p:cNvPr id="30" name="Text 27"/>
           <p:cNvSpPr/>
           <p:nvPr/>
         </p:nvSpPr>
@@ -12286,7 +12108,7 @@
                 <a:ea typeface="Hiragino Sans" pitchFamily="34" charset="-122"/>
                 <a:cs typeface="Hiragino Sans" pitchFamily="34" charset="-120"/>
               </a:rPr>
-              <a:t>プロンプトはシンプルでいい</a:t>
+              <a:t>このプロンプトを貼る</a:t>
             </a:r>
             <a:endParaRPr lang="en-US" sz="2900" dirty="0"/>
           </a:p>
@@ -12300,8 +12122,8 @@
         </p:nvSpPr>
         <p:spPr>
           <a:xfrm>
-            <a:off x="640080" y="1783080"/>
-            <a:ext cx="10908792" cy="457200"/>
+            <a:off x="640080" y="1673352"/>
+            <a:ext cx="10908792" cy="411480"/>
           </a:xfrm>
           <a:prstGeom prst="rect">
             <a:avLst/>
@@ -12325,7 +12147,7 @@
                 <a:ea typeface="Hiragino Sans" pitchFamily="34" charset="-122"/>
                 <a:cs typeface="Hiragino Sans" pitchFamily="34" charset="-120"/>
               </a:rPr>
-              <a:t>「作りたいもの」と「こうなってほしい」を伝えるだけ。作り方はエージェントが考えます。</a:t>
+              <a:t>完成条件まで書いておくと、無料モデルでも結果が安定します。</a:t>
             </a:r>
             <a:endParaRPr lang="en-US" sz="1600" dirty="0"/>
           </a:p>
@@ -12339,12 +12161,12 @@
         </p:nvSpPr>
         <p:spPr>
           <a:xfrm>
-            <a:off x="640080" y="2468880"/>
-            <a:ext cx="10908792" cy="2514600"/>
+            <a:off x="640080" y="2057400"/>
+            <a:ext cx="10908792" cy="3886200"/>
           </a:xfrm>
           <a:prstGeom prst="roundRect">
             <a:avLst>
-              <a:gd name="adj" fmla="val 2182"/>
+              <a:gd name="adj" fmla="val 1412"/>
             </a:avLst>
           </a:prstGeom>
           <a:solidFill>
@@ -12373,7 +12195,7 @@
         </p:nvSpPr>
         <p:spPr>
           <a:xfrm>
-            <a:off x="649224" y="2478024"/>
+            <a:off x="649224" y="2066544"/>
             <a:ext cx="10890504" cy="347472"/>
           </a:xfrm>
           <a:prstGeom prst="rect">
@@ -12393,7 +12215,7 @@
         </p:nvSpPr>
         <p:spPr>
           <a:xfrm>
-            <a:off x="804672" y="2592324"/>
+            <a:off x="804672" y="2180844"/>
             <a:ext cx="109728" cy="109728"/>
           </a:xfrm>
           <a:prstGeom prst="ellipse">
@@ -12413,7 +12235,7 @@
         </p:nvSpPr>
         <p:spPr>
           <a:xfrm>
-            <a:off x="1005840" y="2592324"/>
+            <a:off x="1005840" y="2180844"/>
             <a:ext cx="109728" cy="109728"/>
           </a:xfrm>
           <a:prstGeom prst="ellipse">
@@ -12433,7 +12255,7 @@
         </p:nvSpPr>
         <p:spPr>
           <a:xfrm>
-            <a:off x="1207008" y="2592324"/>
+            <a:off x="1207008" y="2180844"/>
             <a:ext cx="109728" cy="109728"/>
           </a:xfrm>
           <a:prstGeom prst="ellipse">
@@ -12453,7 +12275,7 @@
         </p:nvSpPr>
         <p:spPr>
           <a:xfrm>
-            <a:off x="1463040" y="2478024"/>
+            <a:off x="1463040" y="2066544"/>
             <a:ext cx="9811512" cy="347472"/>
           </a:xfrm>
           <a:prstGeom prst="rect">
@@ -12492,8 +12314,8 @@
         </p:nvSpPr>
         <p:spPr>
           <a:xfrm>
-            <a:off x="896112" y="2926080"/>
-            <a:ext cx="10451592" cy="1947672"/>
+            <a:off x="896112" y="2514600"/>
+            <a:ext cx="10451592" cy="3319272"/>
           </a:xfrm>
           <a:prstGeom prst="rect">
             <a:avLst/>
@@ -12512,7 +12334,7 @@
               <a:buNone/>
             </a:pPr>
             <a:r>
-              <a:rPr lang="en-US" sz="1500" dirty="0">
+              <a:rPr lang="en-US" sz="1030" dirty="0">
                 <a:solidFill>
                   <a:srgbClr val="E6EDF3"/>
                 </a:solidFill>
@@ -12520,9 +12342,9 @@
                 <a:ea typeface="Menlo" pitchFamily="34" charset="-122"/>
                 <a:cs typeface="Menlo" pitchFamily="34" charset="-120"/>
               </a:rPr>
-              <a:t>ToDoアプリを作って。</a:t>
-            </a:r>
-            <a:endParaRPr lang="en-US" sz="1500" dirty="0"/>
+              <a:t>ミニToDoアプリを index.html 1ファイルで作ってください。</a:t>
+            </a:r>
+            <a:endParaRPr lang="en-US" sz="1030" dirty="0"/>
           </a:p>
           <a:p>
             <a:pPr algn="l" indent="0" marL="0">
@@ -12532,7 +12354,7 @@
               <a:buNone/>
             </a:pPr>
             <a:r>
-              <a:rPr lang="en-US" sz="1500" dirty="0">
+              <a:rPr lang="en-US" sz="1030" dirty="0">
                 <a:solidFill>
                   <a:srgbClr val="C9D1D9"/>
                 </a:solidFill>
@@ -12540,9 +12362,9 @@
                 <a:ea typeface="Menlo" pitchFamily="34" charset="-122"/>
                 <a:cs typeface="Menlo" pitchFamily="34" charset="-120"/>
               </a:rPr>
-              <a:t>・タスクの追加・完了チェック・削除ができる</a:t>
-            </a:r>
-            <a:endParaRPr lang="en-US" sz="1500" dirty="0"/>
+              <a:t>- タスクの追加、完了切り替え、削除ができる</a:t>
+            </a:r>
+            <a:endParaRPr lang="en-US" sz="1030" dirty="0"/>
           </a:p>
           <a:p>
             <a:pPr algn="l" indent="0" marL="0">
@@ -12552,7 +12374,7 @@
               <a:buNone/>
             </a:pPr>
             <a:r>
-              <a:rPr lang="en-US" sz="1500" dirty="0">
+              <a:rPr lang="en-US" sz="1030" dirty="0">
                 <a:solidFill>
                   <a:srgbClr val="C9D1D9"/>
                 </a:solidFill>
@@ -12560,9 +12382,9 @@
                 <a:ea typeface="Menlo" pitchFamily="34" charset="-122"/>
                 <a:cs typeface="Menlo" pitchFamily="34" charset="-120"/>
               </a:rPr>
-              <a:t>・閉じても内容が残るようにする</a:t>
-            </a:r>
-            <a:endParaRPr lang="en-US" sz="1500" dirty="0"/>
+              <a:t>- 残り件数と完了件数を表示する</a:t>
+            </a:r>
+            <a:endParaRPr lang="en-US" sz="1030" dirty="0"/>
           </a:p>
           <a:p>
             <a:pPr algn="l" indent="0" marL="0">
@@ -12572,7 +12394,7 @@
               <a:buNone/>
             </a:pPr>
             <a:r>
-              <a:rPr lang="en-US" sz="1500" dirty="0">
+              <a:rPr lang="en-US" sz="1030" dirty="0">
                 <a:solidFill>
                   <a:srgbClr val="C9D1D9"/>
                 </a:solidFill>
@@ -12580,9 +12402,9 @@
                 <a:ea typeface="Menlo" pitchFamily="34" charset="-122"/>
                 <a:cs typeface="Menlo" pitchFamily="34" charset="-120"/>
               </a:rPr>
-              <a:t>・コードは役割ごとに複数のファイルに分ける</a:t>
-            </a:r>
-            <a:endParaRPr lang="en-US" sz="1500" dirty="0"/>
+              <a:t>- localStorage に保存し、再読み込み後も残る</a:t>
+            </a:r>
+            <a:endParaRPr lang="en-US" sz="1030" dirty="0"/>
           </a:p>
           <a:p>
             <a:pPr algn="l" indent="0" marL="0">
@@ -12592,7 +12414,7 @@
               <a:buNone/>
             </a:pPr>
             <a:r>
-              <a:rPr lang="en-US" sz="1500" dirty="0">
+              <a:rPr lang="en-US" sz="1030" dirty="0">
                 <a:solidFill>
                   <a:srgbClr val="C9D1D9"/>
                 </a:solidFill>
@@ -12600,9 +12422,209 @@
                 <a:ea typeface="Menlo" pitchFamily="34" charset="-122"/>
                 <a:cs typeface="Menlo" pitchFamily="34" charset="-120"/>
               </a:rPr>
-              <a:t>・見た目もシンプルに整える</a:t>
-            </a:r>
-            <a:endParaRPr lang="en-US" sz="1500" dirty="0"/>
+              <a:t>- 初回表示時はサンプルタスクを3件入れる</a:t>
+            </a:r>
+            <a:endParaRPr lang="en-US" sz="1030" dirty="0"/>
+          </a:p>
+          <a:p>
+            <a:pPr algn="l" indent="0" marL="0">
+              <a:lnSpc>
+                <a:spcPct val="125000"/>
+              </a:lnSpc>
+              <a:buNone/>
+            </a:pPr>
+            <a:r>
+              <a:rPr lang="en-US" sz="1030" dirty="0">
+                <a:solidFill>
+                  <a:srgbClr val="C9D1D9"/>
+                </a:solidFill>
+                <a:latin typeface="Menlo" pitchFamily="34" charset="0"/>
+                <a:ea typeface="Menlo" pitchFamily="34" charset="-122"/>
+                <a:cs typeface="Menlo" pitchFamily="34" charset="-120"/>
+              </a:rPr>
+              <a:t>- スマホでもPCでも見やすいカード風の見た目</a:t>
+            </a:r>
+            <a:endParaRPr lang="en-US" sz="1030" dirty="0"/>
+          </a:p>
+          <a:p>
+            <a:pPr algn="l" indent="0" marL="0">
+              <a:lnSpc>
+                <a:spcPct val="125000"/>
+              </a:lnSpc>
+              <a:buNone/>
+            </a:pPr>
+            <a:r>
+              <a:rPr lang="en-US" sz="1030" dirty="0">
+                <a:solidFill>
+                  <a:srgbClr val="C9D1D9"/>
+                </a:solidFill>
+                <a:latin typeface="Menlo" pitchFamily="34" charset="0"/>
+                <a:ea typeface="Menlo" pitchFamily="34" charset="-122"/>
+                <a:cs typeface="Menlo" pitchFamily="34" charset="-120"/>
+              </a:rPr>
+              <a:t> </a:t>
+            </a:r>
+            <a:endParaRPr lang="en-US" sz="1030" dirty="0"/>
+          </a:p>
+          <a:p>
+            <a:pPr algn="l" indent="0" marL="0">
+              <a:lnSpc>
+                <a:spcPct val="125000"/>
+              </a:lnSpc>
+              <a:buNone/>
+            </a:pPr>
+            <a:r>
+              <a:rPr lang="en-US" sz="1030" dirty="0">
+                <a:solidFill>
+                  <a:srgbClr val="F0883E"/>
+                </a:solidFill>
+                <a:latin typeface="Menlo" pitchFamily="34" charset="0"/>
+                <a:ea typeface="Menlo" pitchFamily="34" charset="-122"/>
+                <a:cs typeface="Menlo" pitchFamily="34" charset="-120"/>
+              </a:rPr>
+              <a:t>実装条件:</a:t>
+            </a:r>
+            <a:endParaRPr lang="en-US" sz="1030" dirty="0"/>
+          </a:p>
+          <a:p>
+            <a:pPr algn="l" indent="0" marL="0">
+              <a:lnSpc>
+                <a:spcPct val="125000"/>
+              </a:lnSpc>
+              <a:buNone/>
+            </a:pPr>
+            <a:r>
+              <a:rPr lang="en-US" sz="1030" dirty="0">
+                <a:solidFill>
+                  <a:srgbClr val="C9D1D9"/>
+                </a:solidFill>
+                <a:latin typeface="Menlo" pitchFamily="34" charset="0"/>
+                <a:ea typeface="Menlo" pitchFamily="34" charset="-122"/>
+                <a:cs typeface="Menlo" pitchFamily="34" charset="-120"/>
+              </a:rPr>
+              <a:t>- 外部ライブラリは使わない</a:t>
+            </a:r>
+            <a:endParaRPr lang="en-US" sz="1030" dirty="0"/>
+          </a:p>
+          <a:p>
+            <a:pPr algn="l" indent="0" marL="0">
+              <a:lnSpc>
+                <a:spcPct val="125000"/>
+              </a:lnSpc>
+              <a:buNone/>
+            </a:pPr>
+            <a:r>
+              <a:rPr lang="en-US" sz="1030" dirty="0">
+                <a:solidFill>
+                  <a:srgbClr val="C9D1D9"/>
+                </a:solidFill>
+                <a:latin typeface="Menlo" pitchFamily="34" charset="0"/>
+                <a:ea typeface="Menlo" pitchFamily="34" charset="-122"/>
+                <a:cs typeface="Menlo" pitchFamily="34" charset="-120"/>
+              </a:rPr>
+              <a:t>- CSS は head 内の style にまとめる</a:t>
+            </a:r>
+            <a:endParaRPr lang="en-US" sz="1030" dirty="0"/>
+          </a:p>
+          <a:p>
+            <a:pPr algn="l" indent="0" marL="0">
+              <a:lnSpc>
+                <a:spcPct val="125000"/>
+              </a:lnSpc>
+              <a:buNone/>
+            </a:pPr>
+            <a:r>
+              <a:rPr lang="en-US" sz="1030" dirty="0">
+                <a:solidFill>
+                  <a:srgbClr val="C9D1D9"/>
+                </a:solidFill>
+                <a:latin typeface="Menlo" pitchFamily="34" charset="0"/>
+                <a:ea typeface="Menlo" pitchFamily="34" charset="-122"/>
+                <a:cs typeface="Menlo" pitchFamily="34" charset="-120"/>
+              </a:rPr>
+              <a:t>- JS は body 末尾の script にまとめる</a:t>
+            </a:r>
+            <a:endParaRPr lang="en-US" sz="1030" dirty="0"/>
+          </a:p>
+          <a:p>
+            <a:pPr algn="l" indent="0" marL="0">
+              <a:lnSpc>
+                <a:spcPct val="125000"/>
+              </a:lnSpc>
+              <a:buNone/>
+            </a:pPr>
+            <a:r>
+              <a:rPr lang="en-US" sz="1030" dirty="0">
+                <a:solidFill>
+                  <a:srgbClr val="C9D1D9"/>
+                </a:solidFill>
+                <a:latin typeface="Menlo" pitchFamily="34" charset="0"/>
+                <a:ea typeface="Menlo" pitchFamily="34" charset="-122"/>
+                <a:cs typeface="Menlo" pitchFamily="34" charset="-120"/>
+              </a:rPr>
+              <a:t>- HTML のタグが壊れていないか確認する</a:t>
+            </a:r>
+            <a:endParaRPr lang="en-US" sz="1030" dirty="0"/>
+          </a:p>
+          <a:p>
+            <a:pPr algn="l" indent="0" marL="0">
+              <a:lnSpc>
+                <a:spcPct val="125000"/>
+              </a:lnSpc>
+              <a:buNone/>
+            </a:pPr>
+            <a:r>
+              <a:rPr lang="en-US" sz="1030" dirty="0">
+                <a:solidFill>
+                  <a:srgbClr val="C9D1D9"/>
+                </a:solidFill>
+                <a:latin typeface="Menlo" pitchFamily="34" charset="0"/>
+                <a:ea typeface="Menlo" pitchFamily="34" charset="-122"/>
+                <a:cs typeface="Menlo" pitchFamily="34" charset="-120"/>
+              </a:rPr>
+              <a:t> </a:t>
+            </a:r>
+            <a:endParaRPr lang="en-US" sz="1030" dirty="0"/>
+          </a:p>
+          <a:p>
+            <a:pPr algn="l" indent="0" marL="0">
+              <a:lnSpc>
+                <a:spcPct val="125000"/>
+              </a:lnSpc>
+              <a:buNone/>
+            </a:pPr>
+            <a:r>
+              <a:rPr lang="en-US" sz="1030" dirty="0">
+                <a:solidFill>
+                  <a:srgbClr val="3FB950"/>
+                </a:solidFill>
+                <a:latin typeface="Menlo" pitchFamily="34" charset="0"/>
+                <a:ea typeface="Menlo" pitchFamily="34" charset="-122"/>
+                <a:cs typeface="Menlo" pitchFamily="34" charset="-120"/>
+              </a:rPr>
+              <a:t>最後に確認手順を1行で教えてください:</a:t>
+            </a:r>
+            <a:endParaRPr lang="en-US" sz="1030" dirty="0"/>
+          </a:p>
+          <a:p>
+            <a:pPr algn="l" indent="0" marL="0">
+              <a:lnSpc>
+                <a:spcPct val="125000"/>
+              </a:lnSpc>
+              <a:buNone/>
+            </a:pPr>
+            <a:r>
+              <a:rPr lang="en-US" sz="1030" dirty="0">
+                <a:solidFill>
+                  <a:srgbClr val="3FB950"/>
+                </a:solidFill>
+                <a:latin typeface="Menlo" pitchFamily="34" charset="0"/>
+                <a:ea typeface="Menlo" pitchFamily="34" charset="-122"/>
+                <a:cs typeface="Menlo" pitchFamily="34" charset="-120"/>
+              </a:rPr>
+              <a:t>python3 -m http.server 8000</a:t>
+            </a:r>
+            <a:endParaRPr lang="en-US" sz="1030" dirty="0"/>
           </a:p>
         </p:txBody>
       </p:sp>
@@ -12614,12 +12636,12 @@
         </p:nvSpPr>
         <p:spPr>
           <a:xfrm>
-            <a:off x="640080" y="5166360"/>
-            <a:ext cx="10908792" cy="868680"/>
+            <a:off x="640080" y="5870448"/>
+            <a:ext cx="10908792" cy="411480"/>
           </a:xfrm>
           <a:prstGeom prst="roundRect">
             <a:avLst>
-              <a:gd name="adj" fmla="val 8421"/>
+              <a:gd name="adj" fmla="val 17778"/>
             </a:avLst>
           </a:prstGeom>
           <a:solidFill>
@@ -12648,8 +12670,8 @@
         </p:nvSpPr>
         <p:spPr>
           <a:xfrm>
-            <a:off x="640080" y="5166360"/>
-            <a:ext cx="82296" cy="868680"/>
+            <a:off x="640080" y="5870448"/>
+            <a:ext cx="82296" cy="411480"/>
           </a:xfrm>
           <a:prstGeom prst="rect">
             <a:avLst/>
@@ -12668,24 +12690,24 @@
         </p:nvSpPr>
         <p:spPr>
           <a:xfrm>
-            <a:off x="1005840" y="5166360"/>
-            <a:ext cx="10268712" cy="868680"/>
-          </a:xfrm>
-          <a:prstGeom prst="rect">
-            <a:avLst/>
-          </a:prstGeom>
-          <a:noFill/>
-          <a:ln/>
-        </p:spPr>
-        <p:txBody>
-          <a:bodyPr wrap="square" lIns="0" tIns="0" rIns="0" bIns="0" rtlCol="0" anchor="ctr"/>
-          <a:lstStyle/>
-          <a:p>
-            <a:pPr algn="l" indent="0" marL="0">
-              <a:buNone/>
-            </a:pPr>
-            <a:r>
-              <a:rPr lang="en-US" sz="1500" b="1" dirty="0">
+            <a:off x="1005840" y="5870448"/>
+            <a:ext cx="10268712" cy="411480"/>
+          </a:xfrm>
+          <a:prstGeom prst="rect">
+            <a:avLst/>
+          </a:prstGeom>
+          <a:noFill/>
+          <a:ln/>
+        </p:spPr>
+        <p:txBody>
+          <a:bodyPr wrap="square" lIns="0" tIns="0" rIns="0" bIns="0" rtlCol="0" anchor="ctr"/>
+          <a:lstStyle/>
+          <a:p>
+            <a:pPr algn="l" indent="0" marL="0">
+              <a:buNone/>
+            </a:pPr>
+            <a:r>
+              <a:rPr lang="en-US" sz="1300" b="1" dirty="0">
                 <a:solidFill>
                   <a:srgbClr val="E6EDF3"/>
                 </a:solidFill>
@@ -12693,13 +12715,13 @@
                 <a:ea typeface="Hiragino Sans" pitchFamily="34" charset="-122"/>
                 <a:cs typeface="Hiragino Sans" pitchFamily="34" charset="-120"/>
               </a:rPr>
-              <a:t>ファイル名や分け方までは指定しなくてOK。</a:t>
-            </a:r>
-            <a:pPr algn="l" indent="0" marL="0">
-              <a:buNone/>
-            </a:pPr>
-            <a:r>
-              <a:rPr lang="en-US" sz="1500" dirty="0">
+              <a:t>ポイント：</a:t>
+            </a:r>
+            <a:pPr algn="l" indent="0" marL="0">
+              <a:buNone/>
+            </a:pPr>
+            <a:r>
+              <a:rPr lang="en-US" sz="1300" dirty="0">
                 <a:solidFill>
                   <a:srgbClr val="C9D1D9"/>
                 </a:solidFill>
@@ -12707,9 +12729,9 @@
                 <a:ea typeface="Hiragino Sans" pitchFamily="34" charset="-122"/>
                 <a:cs typeface="Hiragino Sans" pitchFamily="34" charset="-120"/>
               </a:rPr>
-              <a:t> どう作るかはエージェントが判断します。</a:t>
-            </a:r>
-            <a:endParaRPr lang="en-US" sz="1500" dirty="0"/>
+              <a:t> 何を作るかだけでなく、成功条件と確認方法まで一緒に渡す。</a:t>
+            </a:r>
+            <a:endParaRPr lang="en-US" sz="1300" dirty="0"/>
           </a:p>
         </p:txBody>
       </p:sp>
@@ -13726,16 +13748,16 @@
         <p:spPr>
           <a:xfrm>
             <a:off x="640080" y="1645920"/>
-            <a:ext cx="5486400" cy="822960"/>
-          </a:xfrm>
-          <a:prstGeom prst="rect">
-            <a:avLst/>
-          </a:prstGeom>
-          <a:noFill/>
-          <a:ln/>
-        </p:spPr>
-        <p:txBody>
-          <a:bodyPr wrap="square" lIns="0" tIns="0" rIns="0" bIns="0" rtlCol="0" anchor="t"/>
+            <a:ext cx="5486400" cy="502920"/>
+          </a:xfrm>
+          <a:prstGeom prst="rect">
+            <a:avLst/>
+          </a:prstGeom>
+          <a:noFill/>
+          <a:ln/>
+        </p:spPr>
+        <p:txBody>
+          <a:bodyPr wrap="square" lIns="0" tIns="0" rIns="0" bIns="0" rtlCol="0" anchor="ctr"/>
           <a:lstStyle/>
           <a:p>
             <a:pPr algn="l" indent="0" marL="0">
@@ -13753,27 +13775,7 @@
                 <a:ea typeface="Hiragino Sans" pitchFamily="34" charset="-122"/>
                 <a:cs typeface="Hiragino Sans" pitchFamily="34" charset="-120"/>
               </a:rPr>
-              <a:t>分割したコードは “ローカルサーバー” で開きます。</a:t>
-            </a:r>
-            <a:endParaRPr lang="en-US" sz="1500" dirty="0"/>
-          </a:p>
-          <a:p>
-            <a:pPr algn="l" indent="0" marL="0">
-              <a:lnSpc>
-                <a:spcPct val="130000"/>
-              </a:lnSpc>
-              <a:buNone/>
-            </a:pPr>
-            <a:r>
-              <a:rPr lang="en-US" sz="1500" dirty="0">
-                <a:solidFill>
-                  <a:srgbClr val="C9D1D9"/>
-                </a:solidFill>
-                <a:latin typeface="Hiragino Sans" pitchFamily="34" charset="0"/>
-                <a:ea typeface="Hiragino Sans" pitchFamily="34" charset="-122"/>
-                <a:cs typeface="Hiragino Sans" pitchFamily="34" charset="-120"/>
-              </a:rPr>
-              <a:t>（ダブルクリックでは動きません）</a:t>
+              <a:t>生成された index.html をブラウザで開いて、実際に操作します。</a:t>
             </a:r>
             <a:endParaRPr lang="en-US" sz="1500" dirty="0"/>
           </a:p>
@@ -14164,7 +14166,7 @@
                 <a:ea typeface="Hiragino Sans" pitchFamily="34" charset="-122"/>
                 <a:cs typeface="Hiragino Sans" pitchFamily="34" charset="-120"/>
               </a:rPr>
-              <a:t>「このフォルダをローカルサーバーで開いて」と言えば、起動まで任せられます。</a:t>
+              <a:t>「このフォルダをブラウザで開いて確認して」と言えば、確認まで任せられます。</a:t>
             </a:r>
             <a:endParaRPr lang="en-US" sz="1350" dirty="0"/>
           </a:p>
@@ -16027,7 +16029,7 @@
                 <a:ea typeface="Menlo" pitchFamily="34" charset="-122"/>
                 <a:cs typeface="Menlo" pitchFamily="34" charset="-120"/>
               </a:rPr>
-              <a:t>- アプリは複数ファイルに分けて作る</a:t>
+              <a:t>- ハンズオンは index.html 1枚で作る</a:t>
             </a:r>
             <a:endParaRPr lang="en-US" sz="1300" dirty="0"/>
           </a:p>
@@ -17495,7 +17497,7 @@
                 <a:ea typeface="Hiragino Sans" pitchFamily="34" charset="-122"/>
                 <a:cs typeface="Hiragino Sans" pitchFamily="34" charset="-120"/>
               </a:rPr>
-              <a:t>複数ファイルの ToDo アプリを作らせた</a:t>
+              <a:t>ToDo ミニアプリを作らせて確認した</a:t>
             </a:r>
             <a:endParaRPr lang="en-US" sz="1800" dirty="0"/>
           </a:p>

--- a/slides/seminar.pptx
+++ b/slides/seminar.pptx
@@ -10822,7 +10822,7 @@
                 <a:ea typeface="Menlo" pitchFamily="34" charset="-122"/>
                 <a:cs typeface="Menlo" pitchFamily="34" charset="-120"/>
               </a:rPr>
-              <a:t>  ✓ ブラウザで表示確認</a:t>
+              <a:t>  + style.css</a:t>
             </a:r>
             <a:endParaRPr lang="en-US" sz="1250" dirty="0"/>
           </a:p>
@@ -10842,7 +10842,7 @@
                 <a:ea typeface="Menlo" pitchFamily="34" charset="-122"/>
                 <a:cs typeface="Menlo" pitchFamily="34" charset="-120"/>
               </a:rPr>
-              <a:t>  ✓ 追加・完了・削除を確認</a:t>
+              <a:t>  + script.js</a:t>
             </a:r>
             <a:endParaRPr lang="en-US" sz="1250" dirty="0"/>
           </a:p>
@@ -10856,13 +10856,13 @@
             <a:r>
               <a:rPr lang="en-US" sz="1250" dirty="0">
                 <a:solidFill>
-                  <a:srgbClr val="C9D1D9"/>
+                  <a:srgbClr val="3FB950"/>
                 </a:solidFill>
                 <a:latin typeface="Menlo" pitchFamily="34" charset="0"/>
                 <a:ea typeface="Menlo" pitchFamily="34" charset="-122"/>
                 <a:cs typeface="Menlo" pitchFamily="34" charset="-120"/>
               </a:rPr>
-              <a:t> </a:t>
+              <a:t>  ✓ ブラウザで表示確認</a:t>
             </a:r>
             <a:endParaRPr lang="en-US" sz="1250" dirty="0"/>
           </a:p>
@@ -10876,13 +10876,33 @@
             <a:r>
               <a:rPr lang="en-US" sz="1250" dirty="0">
                 <a:solidFill>
-                  <a:srgbClr val="3FB950"/>
+                  <a:srgbClr val="C9D1D9"/>
                 </a:solidFill>
                 <a:latin typeface="Menlo" pitchFamily="34" charset="0"/>
                 <a:ea typeface="Menlo" pitchFamily="34" charset="-122"/>
                 <a:cs typeface="Menlo" pitchFamily="34" charset="-120"/>
               </a:rPr>
-              <a:t>  ✓ 1ファイル作成</a:t>
+              <a:t> </a:t>
+            </a:r>
+            <a:endParaRPr lang="en-US" sz="1250" dirty="0"/>
+          </a:p>
+          <a:p>
+            <a:pPr algn="l" indent="0" marL="0">
+              <a:lnSpc>
+                <a:spcPct val="125000"/>
+              </a:lnSpc>
+              <a:buNone/>
+            </a:pPr>
+            <a:r>
+              <a:rPr lang="en-US" sz="1250" dirty="0">
+                <a:solidFill>
+                  <a:srgbClr val="3FB950"/>
+                </a:solidFill>
+                <a:latin typeface="Menlo" pitchFamily="34" charset="0"/>
+                <a:ea typeface="Menlo" pitchFamily="34" charset="-122"/>
+                <a:cs typeface="Menlo" pitchFamily="34" charset="-120"/>
+              </a:rPr>
+              <a:t>  ✓ 追加・完了・削除を確認</a:t>
             </a:r>
             <a:endParaRPr lang="en-US" sz="1250" dirty="0"/>
           </a:p>
@@ -11651,7 +11671,7 @@
                 <a:ea typeface="Hiragino Sans" pitchFamily="34" charset="-122"/>
                 <a:cs typeface="Hiragino Sans" pitchFamily="34" charset="-120"/>
               </a:rPr>
-              <a:t>1ファイルで完結</a:t>
+              <a:t>役割ごとに分ける</a:t>
             </a:r>
             <a:endParaRPr lang="en-US" sz="1600" dirty="0"/>
           </a:p>
@@ -11690,7 +11710,7 @@
                 <a:ea typeface="Hiragino Sans" pitchFamily="34" charset="-122"/>
                 <a:cs typeface="Hiragino Sans" pitchFamily="34" charset="-120"/>
               </a:rPr>
-              <a:t>index.html だけで配布しやすい</a:t>
+              <a:t>画面・見た目・動きを読みやすく</a:t>
             </a:r>
             <a:endParaRPr lang="en-US" sz="1250" dirty="0"/>
           </a:p>
@@ -12116,57 +12136,18 @@
       </p:sp>
       <p:sp>
         <p:nvSpPr>
-          <p:cNvPr id="5" name="Text 3"/>
-          <p:cNvSpPr/>
-          <p:nvPr/>
-        </p:nvSpPr>
-        <p:spPr>
-          <a:xfrm>
-            <a:off x="640080" y="1673352"/>
-            <a:ext cx="10908792" cy="411480"/>
-          </a:xfrm>
-          <a:prstGeom prst="rect">
-            <a:avLst/>
-          </a:prstGeom>
-          <a:noFill/>
-          <a:ln/>
-        </p:spPr>
-        <p:txBody>
-          <a:bodyPr wrap="square" lIns="0" tIns="0" rIns="0" bIns="0" rtlCol="0" anchor="ctr"/>
-          <a:lstStyle/>
-          <a:p>
-            <a:pPr algn="l" indent="0" marL="0">
-              <a:buNone/>
-            </a:pPr>
-            <a:r>
-              <a:rPr lang="en-US" sz="1600" dirty="0">
-                <a:solidFill>
-                  <a:srgbClr val="C9D1D9"/>
-                </a:solidFill>
-                <a:latin typeface="Hiragino Sans" pitchFamily="34" charset="0"/>
-                <a:ea typeface="Hiragino Sans" pitchFamily="34" charset="-122"/>
-                <a:cs typeface="Hiragino Sans" pitchFamily="34" charset="-120"/>
-              </a:rPr>
-              <a:t>完成条件まで書いておくと、無料モデルでも結果が安定します。</a:t>
-            </a:r>
-            <a:endParaRPr lang="en-US" sz="1600" dirty="0"/>
-          </a:p>
-        </p:txBody>
-      </p:sp>
-      <p:sp>
-        <p:nvSpPr>
-          <p:cNvPr id="6" name="Shape 4"/>
-          <p:cNvSpPr/>
-          <p:nvPr/>
-        </p:nvSpPr>
-        <p:spPr>
-          <a:xfrm>
-            <a:off x="640080" y="2057400"/>
-            <a:ext cx="10908792" cy="3886200"/>
+          <p:cNvPr id="5" name="Shape 3"/>
+          <p:cNvSpPr/>
+          <p:nvPr/>
+        </p:nvSpPr>
+        <p:spPr>
+          <a:xfrm>
+            <a:off x="640080" y="1581912"/>
+            <a:ext cx="10908792" cy="4096512"/>
           </a:xfrm>
           <a:prstGeom prst="roundRect">
             <a:avLst>
-              <a:gd name="adj" fmla="val 1412"/>
+              <a:gd name="adj" fmla="val 1339"/>
             </a:avLst>
           </a:prstGeom>
           <a:solidFill>
@@ -12189,13 +12170,13 @@
       </p:sp>
       <p:sp>
         <p:nvSpPr>
-          <p:cNvPr id="7" name="Shape 5"/>
-          <p:cNvSpPr/>
-          <p:nvPr/>
-        </p:nvSpPr>
-        <p:spPr>
-          <a:xfrm>
-            <a:off x="649224" y="2066544"/>
+          <p:cNvPr id="6" name="Shape 4"/>
+          <p:cNvSpPr/>
+          <p:nvPr/>
+        </p:nvSpPr>
+        <p:spPr>
+          <a:xfrm>
+            <a:off x="649224" y="1591056"/>
             <a:ext cx="10890504" cy="347472"/>
           </a:xfrm>
           <a:prstGeom prst="rect">
@@ -12209,13 +12190,13 @@
       </p:sp>
       <p:sp>
         <p:nvSpPr>
-          <p:cNvPr id="8" name="Shape 6"/>
-          <p:cNvSpPr/>
-          <p:nvPr/>
-        </p:nvSpPr>
-        <p:spPr>
-          <a:xfrm>
-            <a:off x="804672" y="2180844"/>
+          <p:cNvPr id="7" name="Shape 5"/>
+          <p:cNvSpPr/>
+          <p:nvPr/>
+        </p:nvSpPr>
+        <p:spPr>
+          <a:xfrm>
+            <a:off x="804672" y="1705356"/>
             <a:ext cx="109728" cy="109728"/>
           </a:xfrm>
           <a:prstGeom prst="ellipse">
@@ -12229,13 +12210,13 @@
       </p:sp>
       <p:sp>
         <p:nvSpPr>
-          <p:cNvPr id="9" name="Shape 7"/>
-          <p:cNvSpPr/>
-          <p:nvPr/>
-        </p:nvSpPr>
-        <p:spPr>
-          <a:xfrm>
-            <a:off x="1005840" y="2180844"/>
+          <p:cNvPr id="8" name="Shape 6"/>
+          <p:cNvSpPr/>
+          <p:nvPr/>
+        </p:nvSpPr>
+        <p:spPr>
+          <a:xfrm>
+            <a:off x="1005840" y="1705356"/>
             <a:ext cx="109728" cy="109728"/>
           </a:xfrm>
           <a:prstGeom prst="ellipse">
@@ -12249,13 +12230,13 @@
       </p:sp>
       <p:sp>
         <p:nvSpPr>
-          <p:cNvPr id="10" name="Shape 8"/>
-          <p:cNvSpPr/>
-          <p:nvPr/>
-        </p:nvSpPr>
-        <p:spPr>
-          <a:xfrm>
-            <a:off x="1207008" y="2180844"/>
+          <p:cNvPr id="9" name="Shape 7"/>
+          <p:cNvSpPr/>
+          <p:nvPr/>
+        </p:nvSpPr>
+        <p:spPr>
+          <a:xfrm>
+            <a:off x="1207008" y="1705356"/>
             <a:ext cx="109728" cy="109728"/>
           </a:xfrm>
           <a:prstGeom prst="ellipse">
@@ -12269,13 +12250,13 @@
       </p:sp>
       <p:sp>
         <p:nvSpPr>
-          <p:cNvPr id="11" name="Text 9"/>
-          <p:cNvSpPr/>
-          <p:nvPr/>
-        </p:nvSpPr>
-        <p:spPr>
-          <a:xfrm>
-            <a:off x="1463040" y="2066544"/>
+          <p:cNvPr id="10" name="Text 8"/>
+          <p:cNvSpPr/>
+          <p:nvPr/>
+        </p:nvSpPr>
+        <p:spPr>
+          <a:xfrm>
+            <a:off x="1463040" y="1591056"/>
             <a:ext cx="9811512" cy="347472"/>
           </a:xfrm>
           <a:prstGeom prst="rect">
@@ -12308,14 +12289,14 @@
       </p:sp>
       <p:sp>
         <p:nvSpPr>
-          <p:cNvPr id="12" name="Text 10"/>
-          <p:cNvSpPr/>
-          <p:nvPr/>
-        </p:nvSpPr>
-        <p:spPr>
-          <a:xfrm>
-            <a:off x="896112" y="2514600"/>
-            <a:ext cx="10451592" cy="3319272"/>
+          <p:cNvPr id="11" name="Text 9"/>
+          <p:cNvSpPr/>
+          <p:nvPr/>
+        </p:nvSpPr>
+        <p:spPr>
+          <a:xfrm>
+            <a:off x="896112" y="2039112"/>
+            <a:ext cx="10451592" cy="3529584"/>
           </a:xfrm>
           <a:prstGeom prst="rect">
             <a:avLst/>
@@ -12334,7 +12315,7 @@
               <a:buNone/>
             </a:pPr>
             <a:r>
-              <a:rPr lang="en-US" sz="1030" dirty="0">
+              <a:rPr lang="en-US" sz="1000" dirty="0">
                 <a:solidFill>
                   <a:srgbClr val="E6EDF3"/>
                 </a:solidFill>
@@ -12342,9 +12323,9 @@
                 <a:ea typeface="Menlo" pitchFamily="34" charset="-122"/>
                 <a:cs typeface="Menlo" pitchFamily="34" charset="-120"/>
               </a:rPr>
-              <a:t>ミニToDoアプリを index.html 1ファイルで作ってください。</a:t>
-            </a:r>
-            <a:endParaRPr lang="en-US" sz="1030" dirty="0"/>
+              <a:t>ブラウザで動くミニToDoアプリを作ってください。</a:t>
+            </a:r>
+            <a:endParaRPr lang="en-US" sz="1000" dirty="0"/>
           </a:p>
           <a:p>
             <a:pPr algn="l" indent="0" marL="0">
@@ -12354,7 +12335,7 @@
               <a:buNone/>
             </a:pPr>
             <a:r>
-              <a:rPr lang="en-US" sz="1030" dirty="0">
+              <a:rPr lang="en-US" sz="1000" dirty="0">
                 <a:solidFill>
                   <a:srgbClr val="C9D1D9"/>
                 </a:solidFill>
@@ -12364,7 +12345,7 @@
               </a:rPr>
               <a:t>- タスクの追加、完了切り替え、削除ができる</a:t>
             </a:r>
-            <a:endParaRPr lang="en-US" sz="1030" dirty="0"/>
+            <a:endParaRPr lang="en-US" sz="1000" dirty="0"/>
           </a:p>
           <a:p>
             <a:pPr algn="l" indent="0" marL="0">
@@ -12374,7 +12355,7 @@
               <a:buNone/>
             </a:pPr>
             <a:r>
-              <a:rPr lang="en-US" sz="1030" dirty="0">
+              <a:rPr lang="en-US" sz="1000" dirty="0">
                 <a:solidFill>
                   <a:srgbClr val="C9D1D9"/>
                 </a:solidFill>
@@ -12384,7 +12365,7 @@
               </a:rPr>
               <a:t>- 残り件数と完了件数を表示する</a:t>
             </a:r>
-            <a:endParaRPr lang="en-US" sz="1030" dirty="0"/>
+            <a:endParaRPr lang="en-US" sz="1000" dirty="0"/>
           </a:p>
           <a:p>
             <a:pPr algn="l" indent="0" marL="0">
@@ -12394,7 +12375,7 @@
               <a:buNone/>
             </a:pPr>
             <a:r>
-              <a:rPr lang="en-US" sz="1030" dirty="0">
+              <a:rPr lang="en-US" sz="1000" dirty="0">
                 <a:solidFill>
                   <a:srgbClr val="C9D1D9"/>
                 </a:solidFill>
@@ -12404,7 +12385,7 @@
               </a:rPr>
               <a:t>- localStorage に保存し、再読み込み後も残る</a:t>
             </a:r>
-            <a:endParaRPr lang="en-US" sz="1030" dirty="0"/>
+            <a:endParaRPr lang="en-US" sz="1000" dirty="0"/>
           </a:p>
           <a:p>
             <a:pPr algn="l" indent="0" marL="0">
@@ -12414,7 +12395,7 @@
               <a:buNone/>
             </a:pPr>
             <a:r>
-              <a:rPr lang="en-US" sz="1030" dirty="0">
+              <a:rPr lang="en-US" sz="1000" dirty="0">
                 <a:solidFill>
                   <a:srgbClr val="C9D1D9"/>
                 </a:solidFill>
@@ -12424,7 +12405,7 @@
               </a:rPr>
               <a:t>- 初回表示時はサンプルタスクを3件入れる</a:t>
             </a:r>
-            <a:endParaRPr lang="en-US" sz="1030" dirty="0"/>
+            <a:endParaRPr lang="en-US" sz="1000" dirty="0"/>
           </a:p>
           <a:p>
             <a:pPr algn="l" indent="0" marL="0">
@@ -12434,7 +12415,7 @@
               <a:buNone/>
             </a:pPr>
             <a:r>
-              <a:rPr lang="en-US" sz="1030" dirty="0">
+              <a:rPr lang="en-US" sz="1000" dirty="0">
                 <a:solidFill>
                   <a:srgbClr val="C9D1D9"/>
                 </a:solidFill>
@@ -12444,7 +12425,7 @@
               </a:rPr>
               <a:t>- スマホでもPCでも見やすいカード風の見た目</a:t>
             </a:r>
-            <a:endParaRPr lang="en-US" sz="1030" dirty="0"/>
+            <a:endParaRPr lang="en-US" sz="1000" dirty="0"/>
           </a:p>
           <a:p>
             <a:pPr algn="l" indent="0" marL="0">
@@ -12454,7 +12435,7 @@
               <a:buNone/>
             </a:pPr>
             <a:r>
-              <a:rPr lang="en-US" sz="1030" dirty="0">
+              <a:rPr lang="en-US" sz="1000" dirty="0">
                 <a:solidFill>
                   <a:srgbClr val="C9D1D9"/>
                 </a:solidFill>
@@ -12464,7 +12445,7 @@
               </a:rPr>
               <a:t> </a:t>
             </a:r>
-            <a:endParaRPr lang="en-US" sz="1030" dirty="0"/>
+            <a:endParaRPr lang="en-US" sz="1000" dirty="0"/>
           </a:p>
           <a:p>
             <a:pPr algn="l" indent="0" marL="0">
@@ -12474,7 +12455,7 @@
               <a:buNone/>
             </a:pPr>
             <a:r>
-              <a:rPr lang="en-US" sz="1030" dirty="0">
+              <a:rPr lang="en-US" sz="1000" dirty="0">
                 <a:solidFill>
                   <a:srgbClr val="F0883E"/>
                 </a:solidFill>
@@ -12484,7 +12465,7 @@
               </a:rPr>
               <a:t>実装条件:</a:t>
             </a:r>
-            <a:endParaRPr lang="en-US" sz="1030" dirty="0"/>
+            <a:endParaRPr lang="en-US" sz="1000" dirty="0"/>
           </a:p>
           <a:p>
             <a:pPr algn="l" indent="0" marL="0">
@@ -12494,7 +12475,7 @@
               <a:buNone/>
             </a:pPr>
             <a:r>
-              <a:rPr lang="en-US" sz="1030" dirty="0">
+              <a:rPr lang="en-US" sz="1000" dirty="0">
                 <a:solidFill>
                   <a:srgbClr val="C9D1D9"/>
                 </a:solidFill>
@@ -12502,9 +12483,9 @@
                 <a:ea typeface="Menlo" pitchFamily="34" charset="-122"/>
                 <a:cs typeface="Menlo" pitchFamily="34" charset="-120"/>
               </a:rPr>
-              <a:t>- 外部ライブラリは使わない</a:t>
-            </a:r>
-            <a:endParaRPr lang="en-US" sz="1030" dirty="0"/>
+              <a:t>- HTML / CSS / JavaScript を役割ごとに分ける</a:t>
+            </a:r>
+            <a:endParaRPr lang="en-US" sz="1000" dirty="0"/>
           </a:p>
           <a:p>
             <a:pPr algn="l" indent="0" marL="0">
@@ -12514,7 +12495,7 @@
               <a:buNone/>
             </a:pPr>
             <a:r>
-              <a:rPr lang="en-US" sz="1030" dirty="0">
+              <a:rPr lang="en-US" sz="1000" dirty="0">
                 <a:solidFill>
                   <a:srgbClr val="C9D1D9"/>
                 </a:solidFill>
@@ -12522,9 +12503,9 @@
                 <a:ea typeface="Menlo" pitchFamily="34" charset="-122"/>
                 <a:cs typeface="Menlo" pitchFamily="34" charset="-120"/>
               </a:rPr>
-              <a:t>- CSS は head 内の style にまとめる</a:t>
-            </a:r>
-            <a:endParaRPr lang="en-US" sz="1030" dirty="0"/>
+              <a:t>- 作ったファイルと確認手順を最後に教える</a:t>
+            </a:r>
+            <a:endParaRPr lang="en-US" sz="1000" dirty="0"/>
           </a:p>
           <a:p>
             <a:pPr algn="l" indent="0" marL="0">
@@ -12534,7 +12515,7 @@
               <a:buNone/>
             </a:pPr>
             <a:r>
-              <a:rPr lang="en-US" sz="1030" dirty="0">
+              <a:rPr lang="en-US" sz="1000" dirty="0">
                 <a:solidFill>
                   <a:srgbClr val="C9D1D9"/>
                 </a:solidFill>
@@ -12542,9 +12523,9 @@
                 <a:ea typeface="Menlo" pitchFamily="34" charset="-122"/>
                 <a:cs typeface="Menlo" pitchFamily="34" charset="-120"/>
               </a:rPr>
-              <a:t>- JS は body 末尾の script にまとめる</a:t>
-            </a:r>
-            <a:endParaRPr lang="en-US" sz="1030" dirty="0"/>
+              <a:t> </a:t>
+            </a:r>
+            <a:endParaRPr lang="en-US" sz="1000" dirty="0"/>
           </a:p>
           <a:p>
             <a:pPr algn="l" indent="0" marL="0">
@@ -12554,17 +12535,17 @@
               <a:buNone/>
             </a:pPr>
             <a:r>
-              <a:rPr lang="en-US" sz="1030" dirty="0">
-                <a:solidFill>
-                  <a:srgbClr val="C9D1D9"/>
+              <a:rPr lang="en-US" sz="1000" dirty="0">
+                <a:solidFill>
+                  <a:srgbClr val="F0883E"/>
                 </a:solidFill>
                 <a:latin typeface="Menlo" pitchFamily="34" charset="0"/>
                 <a:ea typeface="Menlo" pitchFamily="34" charset="-122"/>
                 <a:cs typeface="Menlo" pitchFamily="34" charset="-120"/>
               </a:rPr>
-              <a:t>- HTML のタグが壊れていないか確認する</a:t>
-            </a:r>
-            <a:endParaRPr lang="en-US" sz="1030" dirty="0"/>
+              <a:t>確認すること:</a:t>
+            </a:r>
+            <a:endParaRPr lang="en-US" sz="1000" dirty="0"/>
           </a:p>
           <a:p>
             <a:pPr algn="l" indent="0" marL="0">
@@ -12574,7 +12555,7 @@
               <a:buNone/>
             </a:pPr>
             <a:r>
-              <a:rPr lang="en-US" sz="1030" dirty="0">
+              <a:rPr lang="en-US" sz="1000" dirty="0">
                 <a:solidFill>
                   <a:srgbClr val="C9D1D9"/>
                 </a:solidFill>
@@ -12582,9 +12563,9 @@
                 <a:ea typeface="Menlo" pitchFamily="34" charset="-122"/>
                 <a:cs typeface="Menlo" pitchFamily="34" charset="-120"/>
               </a:rPr>
-              <a:t> </a:t>
-            </a:r>
-            <a:endParaRPr lang="en-US" sz="1030" dirty="0"/>
+              <a:t>- 追加・完了切り替え・削除・再読み込み後の保存</a:t>
+            </a:r>
+            <a:endParaRPr lang="en-US" sz="1000" dirty="0"/>
           </a:p>
           <a:p>
             <a:pPr algn="l" indent="0" marL="0">
@@ -12594,7 +12575,7 @@
               <a:buNone/>
             </a:pPr>
             <a:r>
-              <a:rPr lang="en-US" sz="1030" dirty="0">
+              <a:rPr lang="en-US" sz="1000" dirty="0">
                 <a:solidFill>
                   <a:srgbClr val="3FB950"/>
                 </a:solidFill>
@@ -12602,9 +12583,9 @@
                 <a:ea typeface="Menlo" pitchFamily="34" charset="-122"/>
                 <a:cs typeface="Menlo" pitchFamily="34" charset="-120"/>
               </a:rPr>
-              <a:t>最後に確認手順を1行で教えてください:</a:t>
-            </a:r>
-            <a:endParaRPr lang="en-US" sz="1030" dirty="0"/>
+              <a:t>python3 -m http.server 8000 で起動して確認し、</a:t>
+            </a:r>
+            <a:endParaRPr lang="en-US" sz="1000" dirty="0"/>
           </a:p>
           <a:p>
             <a:pPr algn="l" indent="0" marL="0">
@@ -12614,7 +12595,7 @@
               <a:buNone/>
             </a:pPr>
             <a:r>
-              <a:rPr lang="en-US" sz="1030" dirty="0">
+              <a:rPr lang="en-US" sz="1000" dirty="0">
                 <a:solidFill>
                   <a:srgbClr val="3FB950"/>
                 </a:solidFill>
@@ -12622,21 +12603,21 @@
                 <a:ea typeface="Menlo" pitchFamily="34" charset="-122"/>
                 <a:cs typeface="Menlo" pitchFamily="34" charset="-120"/>
               </a:rPr>
-              <a:t>python3 -m http.server 8000</a:t>
-            </a:r>
-            <a:endParaRPr lang="en-US" sz="1030" dirty="0"/>
-          </a:p>
-        </p:txBody>
-      </p:sp>
-      <p:sp>
-        <p:nvSpPr>
-          <p:cNvPr id="13" name="Shape 11"/>
-          <p:cNvSpPr/>
-          <p:nvPr/>
-        </p:nvSpPr>
-        <p:spPr>
-          <a:xfrm>
-            <a:off x="640080" y="5870448"/>
+              <a:t>問題があれば修正してください。</a:t>
+            </a:r>
+            <a:endParaRPr lang="en-US" sz="1000" dirty="0"/>
+          </a:p>
+        </p:txBody>
+      </p:sp>
+      <p:sp>
+        <p:nvSpPr>
+          <p:cNvPr id="12" name="Shape 10"/>
+          <p:cNvSpPr/>
+          <p:nvPr/>
+        </p:nvSpPr>
+        <p:spPr>
+          <a:xfrm>
+            <a:off x="640080" y="5760720"/>
             <a:ext cx="10908792" cy="411480"/>
           </a:xfrm>
           <a:prstGeom prst="roundRect">
@@ -12664,13 +12645,13 @@
       </p:sp>
       <p:sp>
         <p:nvSpPr>
-          <p:cNvPr id="14" name="Shape 12"/>
-          <p:cNvSpPr/>
-          <p:nvPr/>
-        </p:nvSpPr>
-        <p:spPr>
-          <a:xfrm>
-            <a:off x="640080" y="5870448"/>
+          <p:cNvPr id="13" name="Shape 11"/>
+          <p:cNvSpPr/>
+          <p:nvPr/>
+        </p:nvSpPr>
+        <p:spPr>
+          <a:xfrm>
+            <a:off x="640080" y="5760720"/>
             <a:ext cx="82296" cy="411480"/>
           </a:xfrm>
           <a:prstGeom prst="rect">
@@ -12684,60 +12665,60 @@
       </p:sp>
       <p:sp>
         <p:nvSpPr>
+          <p:cNvPr id="14" name="Text 12"/>
+          <p:cNvSpPr/>
+          <p:nvPr/>
+        </p:nvSpPr>
+        <p:spPr>
+          <a:xfrm>
+            <a:off x="1005840" y="5760720"/>
+            <a:ext cx="10268712" cy="411480"/>
+          </a:xfrm>
+          <a:prstGeom prst="rect">
+            <a:avLst/>
+          </a:prstGeom>
+          <a:noFill/>
+          <a:ln/>
+        </p:spPr>
+        <p:txBody>
+          <a:bodyPr wrap="square" lIns="0" tIns="0" rIns="0" bIns="0" rtlCol="0" anchor="ctr"/>
+          <a:lstStyle/>
+          <a:p>
+            <a:pPr algn="l" indent="0" marL="0">
+              <a:buNone/>
+            </a:pPr>
+            <a:r>
+              <a:rPr lang="en-US" sz="1300" b="1" dirty="0">
+                <a:solidFill>
+                  <a:srgbClr val="E6EDF3"/>
+                </a:solidFill>
+                <a:latin typeface="Hiragino Sans" pitchFamily="34" charset="0"/>
+                <a:ea typeface="Hiragino Sans" pitchFamily="34" charset="-122"/>
+                <a:cs typeface="Hiragino Sans" pitchFamily="34" charset="-120"/>
+              </a:rPr>
+              <a:t>ポイント：</a:t>
+            </a:r>
+            <a:pPr algn="l" indent="0" marL="0">
+              <a:buNone/>
+            </a:pPr>
+            <a:r>
+              <a:rPr lang="en-US" sz="1300" dirty="0">
+                <a:solidFill>
+                  <a:srgbClr val="C9D1D9"/>
+                </a:solidFill>
+                <a:latin typeface="Hiragino Sans" pitchFamily="34" charset="0"/>
+                <a:ea typeface="Hiragino Sans" pitchFamily="34" charset="-122"/>
+                <a:cs typeface="Hiragino Sans" pitchFamily="34" charset="-120"/>
+              </a:rPr>
+              <a:t> 完成条件まで書くと無料モデルでも安定。役割と成功条件を渡す。</a:t>
+            </a:r>
+            <a:endParaRPr lang="en-US" sz="1300" dirty="0"/>
+          </a:p>
+        </p:txBody>
+      </p:sp>
+      <p:sp>
+        <p:nvSpPr>
           <p:cNvPr id="15" name="Text 13"/>
-          <p:cNvSpPr/>
-          <p:nvPr/>
-        </p:nvSpPr>
-        <p:spPr>
-          <a:xfrm>
-            <a:off x="1005840" y="5870448"/>
-            <a:ext cx="10268712" cy="411480"/>
-          </a:xfrm>
-          <a:prstGeom prst="rect">
-            <a:avLst/>
-          </a:prstGeom>
-          <a:noFill/>
-          <a:ln/>
-        </p:spPr>
-        <p:txBody>
-          <a:bodyPr wrap="square" lIns="0" tIns="0" rIns="0" bIns="0" rtlCol="0" anchor="ctr"/>
-          <a:lstStyle/>
-          <a:p>
-            <a:pPr algn="l" indent="0" marL="0">
-              <a:buNone/>
-            </a:pPr>
-            <a:r>
-              <a:rPr lang="en-US" sz="1300" b="1" dirty="0">
-                <a:solidFill>
-                  <a:srgbClr val="E6EDF3"/>
-                </a:solidFill>
-                <a:latin typeface="Hiragino Sans" pitchFamily="34" charset="0"/>
-                <a:ea typeface="Hiragino Sans" pitchFamily="34" charset="-122"/>
-                <a:cs typeface="Hiragino Sans" pitchFamily="34" charset="-120"/>
-              </a:rPr>
-              <a:t>ポイント：</a:t>
-            </a:r>
-            <a:pPr algn="l" indent="0" marL="0">
-              <a:buNone/>
-            </a:pPr>
-            <a:r>
-              <a:rPr lang="en-US" sz="1300" dirty="0">
-                <a:solidFill>
-                  <a:srgbClr val="C9D1D9"/>
-                </a:solidFill>
-                <a:latin typeface="Hiragino Sans" pitchFamily="34" charset="0"/>
-                <a:ea typeface="Hiragino Sans" pitchFamily="34" charset="-122"/>
-                <a:cs typeface="Hiragino Sans" pitchFamily="34" charset="-120"/>
-              </a:rPr>
-              <a:t> 何を作るかだけでなく、成功条件と確認方法まで一緒に渡す。</a:t>
-            </a:r>
-            <a:endParaRPr lang="en-US" sz="1300" dirty="0"/>
-          </a:p>
-        </p:txBody>
-      </p:sp>
-      <p:sp>
-        <p:nvSpPr>
-          <p:cNvPr id="16" name="Text 14"/>
           <p:cNvSpPr/>
           <p:nvPr/>
         </p:nvSpPr>
@@ -12790,7 +12771,7 @@
       </p:sp>
       <p:sp>
         <p:nvSpPr>
-          <p:cNvPr id="17" name="Text 15"/>
+          <p:cNvPr id="16" name="Text 14"/>
           <p:cNvSpPr/>
           <p:nvPr/>
         </p:nvSpPr>
@@ -16029,7 +16010,7 @@
                 <a:ea typeface="Menlo" pitchFamily="34" charset="-122"/>
                 <a:cs typeface="Menlo" pitchFamily="34" charset="-120"/>
               </a:rPr>
-              <a:t>- ハンズオンは index.html 1枚で作る</a:t>
+              <a:t>- 小さく動くものから作る</a:t>
             </a:r>
             <a:endParaRPr lang="en-US" sz="1300" dirty="0"/>
           </a:p>
@@ -16049,7 +16030,7 @@
                 <a:ea typeface="Menlo" pitchFamily="34" charset="-122"/>
                 <a:cs typeface="Menlo" pitchFamily="34" charset="-120"/>
               </a:rPr>
-              <a:t>- 凝った依存は入れない</a:t>
+              <a:t>- まずブラウザで動作確認する</a:t>
             </a:r>
             <a:endParaRPr lang="en-US" sz="1300" dirty="0"/>
           </a:p>

--- a/slides/seminar.pptx
+++ b/slides/seminar.pptx
@@ -10742,7 +10742,7 @@
                 <a:ea typeface="Menlo" pitchFamily="34" charset="-122"/>
                 <a:cs typeface="Menlo" pitchFamily="34" charset="-120"/>
               </a:rPr>
-              <a:t>&gt; ToDoアプリを作って</a:t>
+              <a:t>&gt; ミニToDoアプリを作って</a:t>
             </a:r>
             <a:endParaRPr lang="en-US" sz="1250" dirty="0"/>
           </a:p>
@@ -10822,7 +10822,7 @@
                 <a:ea typeface="Menlo" pitchFamily="34" charset="-122"/>
                 <a:cs typeface="Menlo" pitchFamily="34" charset="-120"/>
               </a:rPr>
-              <a:t>  + styles.css</a:t>
+              <a:t>  + style.css</a:t>
             </a:r>
             <a:endParaRPr lang="en-US" sz="1250" dirty="0"/>
           </a:p>
@@ -10842,7 +10842,7 @@
                 <a:ea typeface="Menlo" pitchFamily="34" charset="-122"/>
                 <a:cs typeface="Menlo" pitchFamily="34" charset="-120"/>
               </a:rPr>
-              <a:t>  + src/storage.js</a:t>
+              <a:t>  + script.js</a:t>
             </a:r>
             <a:endParaRPr lang="en-US" sz="1250" dirty="0"/>
           </a:p>
@@ -10862,7 +10862,7 @@
                 <a:ea typeface="Menlo" pitchFamily="34" charset="-122"/>
                 <a:cs typeface="Menlo" pitchFamily="34" charset="-120"/>
               </a:rPr>
-              <a:t>  + src/todo.js</a:t>
+              <a:t>  ✓ ブラウザで表示確認</a:t>
             </a:r>
             <a:endParaRPr lang="en-US" sz="1250" dirty="0"/>
           </a:p>
@@ -10876,13 +10876,13 @@
             <a:r>
               <a:rPr lang="en-US" sz="1250" dirty="0">
                 <a:solidFill>
-                  <a:srgbClr val="3FB950"/>
+                  <a:srgbClr val="C9D1D9"/>
                 </a:solidFill>
                 <a:latin typeface="Menlo" pitchFamily="34" charset="0"/>
                 <a:ea typeface="Menlo" pitchFamily="34" charset="-122"/>
                 <a:cs typeface="Menlo" pitchFamily="34" charset="-120"/>
               </a:rPr>
-              <a:t>  + src/app.js</a:t>
+              <a:t> </a:t>
             </a:r>
             <a:endParaRPr lang="en-US" sz="1250" dirty="0"/>
           </a:p>
@@ -10896,33 +10896,13 @@
             <a:r>
               <a:rPr lang="en-US" sz="1250" dirty="0">
                 <a:solidFill>
-                  <a:srgbClr val="C9D1D9"/>
+                  <a:srgbClr val="3FB950"/>
                 </a:solidFill>
                 <a:latin typeface="Menlo" pitchFamily="34" charset="0"/>
                 <a:ea typeface="Menlo" pitchFamily="34" charset="-122"/>
                 <a:cs typeface="Menlo" pitchFamily="34" charset="-120"/>
               </a:rPr>
-              <a:t> </a:t>
-            </a:r>
-            <a:endParaRPr lang="en-US" sz="1250" dirty="0"/>
-          </a:p>
-          <a:p>
-            <a:pPr algn="l" indent="0" marL="0">
-              <a:lnSpc>
-                <a:spcPct val="125000"/>
-              </a:lnSpc>
-              <a:buNone/>
-            </a:pPr>
-            <a:r>
-              <a:rPr lang="en-US" sz="1250" dirty="0">
-                <a:solidFill>
-                  <a:srgbClr val="3FB950"/>
-                </a:solidFill>
-                <a:latin typeface="Menlo" pitchFamily="34" charset="0"/>
-                <a:ea typeface="Menlo" pitchFamily="34" charset="-122"/>
-                <a:cs typeface="Menlo" pitchFamily="34" charset="-120"/>
-              </a:rPr>
-              <a:t>  ✓ 5ファイル作成</a:t>
+              <a:t>  ✓ 追加・完了・削除を確認</a:t>
             </a:r>
             <a:endParaRPr lang="en-US" sz="1250" dirty="0"/>
           </a:p>
@@ -11163,7 +11143,7 @@
                 <a:ea typeface="Hiragino Sans" pitchFamily="34" charset="-122"/>
                 <a:cs typeface="Hiragino Sans" pitchFamily="34" charset="-120"/>
               </a:rPr>
-              <a:t>STEP 6 ── ToDoアプリを作る</a:t>
+              <a:t>STEP 6 ── 作るものを決める</a:t>
             </a:r>
             <a:endParaRPr lang="en-US" sz="2900" dirty="0"/>
           </a:p>
@@ -11171,18 +11151,585 @@
       </p:sp>
       <p:sp>
         <p:nvSpPr>
-          <p:cNvPr id="5" name="Shape 3"/>
-          <p:cNvSpPr/>
-          <p:nvPr/>
-        </p:nvSpPr>
-        <p:spPr>
-          <a:xfrm>
-            <a:off x="640080" y="1920240"/>
-            <a:ext cx="5669280" cy="3886200"/>
+          <p:cNvPr id="5" name="Text 3"/>
+          <p:cNvSpPr/>
+          <p:nvPr/>
+        </p:nvSpPr>
+        <p:spPr>
+          <a:xfrm>
+            <a:off x="640080" y="1737360"/>
+            <a:ext cx="10908792" cy="411480"/>
+          </a:xfrm>
+          <a:prstGeom prst="rect">
+            <a:avLst/>
+          </a:prstGeom>
+          <a:noFill/>
+          <a:ln/>
+        </p:spPr>
+        <p:txBody>
+          <a:bodyPr wrap="square" lIns="0" tIns="0" rIns="0" bIns="0" rtlCol="0" anchor="ctr"/>
+          <a:lstStyle/>
+          <a:p>
+            <a:pPr algn="l" indent="0" marL="0">
+              <a:buNone/>
+            </a:pPr>
+            <a:r>
+              <a:rPr lang="en-US" sz="1600" dirty="0">
+                <a:solidFill>
+                  <a:srgbClr val="C9D1D9"/>
+                </a:solidFill>
+                <a:latin typeface="Hiragino Sans" pitchFamily="34" charset="0"/>
+                <a:ea typeface="Hiragino Sans" pitchFamily="34" charset="-122"/>
+                <a:cs typeface="Hiragino Sans" pitchFamily="34" charset="-120"/>
+              </a:rPr>
+              <a:t>今日は、ブラウザだけで動く ToDo ミニアプリを作ります。</a:t>
+            </a:r>
+            <a:endParaRPr lang="en-US" sz="1600" dirty="0"/>
+          </a:p>
+        </p:txBody>
+      </p:sp>
+      <p:sp>
+        <p:nvSpPr>
+          <p:cNvPr id="6" name="Shape 4"/>
+          <p:cNvSpPr/>
+          <p:nvPr/>
+        </p:nvSpPr>
+        <p:spPr>
+          <a:xfrm>
+            <a:off x="640080" y="2423160"/>
+            <a:ext cx="4572000" cy="749808"/>
           </a:xfrm>
           <a:prstGeom prst="roundRect">
             <a:avLst>
-              <a:gd name="adj" fmla="val 1412"/>
+              <a:gd name="adj" fmla="val 9756"/>
+            </a:avLst>
+          </a:prstGeom>
+          <a:solidFill>
+            <a:srgbClr val="161B22"/>
+          </a:solidFill>
+          <a:ln w="12700">
+            <a:solidFill>
+              <a:srgbClr val="30363D"/>
+            </a:solidFill>
+            <a:prstDash val="solid"/>
+          </a:ln>
+          <a:effectLst>
+            <a:outerShdw sx="100000" sy="100000" kx="0" ky="0" algn="bl" rotWithShape="0" blurRad="127000" dist="38100" dir="5400000">
+              <a:srgbClr val="000000">
+                <a:alpha val="35000"/>
+              </a:srgbClr>
+            </a:outerShdw>
+          </a:effectLst>
+        </p:spPr>
+      </p:sp>
+      <p:sp>
+        <p:nvSpPr>
+          <p:cNvPr id="7" name="Shape 5"/>
+          <p:cNvSpPr/>
+          <p:nvPr/>
+        </p:nvSpPr>
+        <p:spPr>
+          <a:xfrm>
+            <a:off x="640080" y="2423160"/>
+            <a:ext cx="82296" cy="749808"/>
+          </a:xfrm>
+          <a:prstGeom prst="rect">
+            <a:avLst/>
+          </a:prstGeom>
+          <a:solidFill>
+            <a:srgbClr val="3FB950"/>
+          </a:solidFill>
+          <a:ln/>
+        </p:spPr>
+      </p:sp>
+      <p:sp>
+        <p:nvSpPr>
+          <p:cNvPr id="8" name="Text 6"/>
+          <p:cNvSpPr/>
+          <p:nvPr/>
+        </p:nvSpPr>
+        <p:spPr>
+          <a:xfrm>
+            <a:off x="1005840" y="2514600"/>
+            <a:ext cx="3931920" cy="365760"/>
+          </a:xfrm>
+          <a:prstGeom prst="rect">
+            <a:avLst/>
+          </a:prstGeom>
+          <a:noFill/>
+          <a:ln/>
+        </p:spPr>
+        <p:txBody>
+          <a:bodyPr wrap="square" lIns="0" tIns="0" rIns="0" bIns="0" rtlCol="0" anchor="ctr"/>
+          <a:lstStyle/>
+          <a:p>
+            <a:pPr algn="l" indent="0" marL="0">
+              <a:buNone/>
+            </a:pPr>
+            <a:r>
+              <a:rPr lang="en-US" sz="1600" b="1" dirty="0">
+                <a:solidFill>
+                  <a:srgbClr val="E6EDF3"/>
+                </a:solidFill>
+                <a:latin typeface="Hiragino Sans" pitchFamily="34" charset="0"/>
+                <a:ea typeface="Hiragino Sans" pitchFamily="34" charset="-122"/>
+                <a:cs typeface="Hiragino Sans" pitchFamily="34" charset="-120"/>
+              </a:rPr>
+              <a:t>追加・完了・削除</a:t>
+            </a:r>
+            <a:endParaRPr lang="en-US" sz="1600" dirty="0"/>
+          </a:p>
+        </p:txBody>
+      </p:sp>
+      <p:sp>
+        <p:nvSpPr>
+          <p:cNvPr id="9" name="Text 7"/>
+          <p:cNvSpPr/>
+          <p:nvPr/>
+        </p:nvSpPr>
+        <p:spPr>
+          <a:xfrm>
+            <a:off x="1005840" y="2862072"/>
+            <a:ext cx="3931920" cy="292608"/>
+          </a:xfrm>
+          <a:prstGeom prst="rect">
+            <a:avLst/>
+          </a:prstGeom>
+          <a:noFill/>
+          <a:ln/>
+        </p:spPr>
+        <p:txBody>
+          <a:bodyPr wrap="square" lIns="0" tIns="0" rIns="0" bIns="0" rtlCol="0" anchor="ctr"/>
+          <a:lstStyle/>
+          <a:p>
+            <a:pPr algn="l" indent="0" marL="0">
+              <a:buNone/>
+            </a:pPr>
+            <a:r>
+              <a:rPr lang="en-US" sz="1250" dirty="0">
+                <a:solidFill>
+                  <a:srgbClr val="8B949E"/>
+                </a:solidFill>
+                <a:latin typeface="Hiragino Sans" pitchFamily="34" charset="0"/>
+                <a:ea typeface="Hiragino Sans" pitchFamily="34" charset="-122"/>
+                <a:cs typeface="Hiragino Sans" pitchFamily="34" charset="-120"/>
+              </a:rPr>
+              <a:t>基本操作がその場で試せる</a:t>
+            </a:r>
+            <a:endParaRPr lang="en-US" sz="1250" dirty="0"/>
+          </a:p>
+        </p:txBody>
+      </p:sp>
+      <p:sp>
+        <p:nvSpPr>
+          <p:cNvPr id="10" name="Shape 8"/>
+          <p:cNvSpPr/>
+          <p:nvPr/>
+        </p:nvSpPr>
+        <p:spPr>
+          <a:xfrm>
+            <a:off x="640080" y="3300984"/>
+            <a:ext cx="4572000" cy="749808"/>
+          </a:xfrm>
+          <a:prstGeom prst="roundRect">
+            <a:avLst>
+              <a:gd name="adj" fmla="val 9756"/>
+            </a:avLst>
+          </a:prstGeom>
+          <a:solidFill>
+            <a:srgbClr val="161B22"/>
+          </a:solidFill>
+          <a:ln w="12700">
+            <a:solidFill>
+              <a:srgbClr val="30363D"/>
+            </a:solidFill>
+            <a:prstDash val="solid"/>
+          </a:ln>
+          <a:effectLst>
+            <a:outerShdw sx="100000" sy="100000" kx="0" ky="0" algn="bl" rotWithShape="0" blurRad="127000" dist="38100" dir="5400000">
+              <a:srgbClr val="000000">
+                <a:alpha val="35000"/>
+              </a:srgbClr>
+            </a:outerShdw>
+          </a:effectLst>
+        </p:spPr>
+      </p:sp>
+      <p:sp>
+        <p:nvSpPr>
+          <p:cNvPr id="11" name="Shape 9"/>
+          <p:cNvSpPr/>
+          <p:nvPr/>
+        </p:nvSpPr>
+        <p:spPr>
+          <a:xfrm>
+            <a:off x="640080" y="3300984"/>
+            <a:ext cx="82296" cy="749808"/>
+          </a:xfrm>
+          <a:prstGeom prst="rect">
+            <a:avLst/>
+          </a:prstGeom>
+          <a:solidFill>
+            <a:srgbClr val="58A6FF"/>
+          </a:solidFill>
+          <a:ln/>
+        </p:spPr>
+      </p:sp>
+      <p:sp>
+        <p:nvSpPr>
+          <p:cNvPr id="12" name="Text 10"/>
+          <p:cNvSpPr/>
+          <p:nvPr/>
+        </p:nvSpPr>
+        <p:spPr>
+          <a:xfrm>
+            <a:off x="1005840" y="3392424"/>
+            <a:ext cx="3931920" cy="365760"/>
+          </a:xfrm>
+          <a:prstGeom prst="rect">
+            <a:avLst/>
+          </a:prstGeom>
+          <a:noFill/>
+          <a:ln/>
+        </p:spPr>
+        <p:txBody>
+          <a:bodyPr wrap="square" lIns="0" tIns="0" rIns="0" bIns="0" rtlCol="0" anchor="ctr"/>
+          <a:lstStyle/>
+          <a:p>
+            <a:pPr algn="l" indent="0" marL="0">
+              <a:buNone/>
+            </a:pPr>
+            <a:r>
+              <a:rPr lang="en-US" sz="1600" b="1" dirty="0">
+                <a:solidFill>
+                  <a:srgbClr val="E6EDF3"/>
+                </a:solidFill>
+                <a:latin typeface="Hiragino Sans" pitchFamily="34" charset="0"/>
+                <a:ea typeface="Hiragino Sans" pitchFamily="34" charset="-122"/>
+                <a:cs typeface="Hiragino Sans" pitchFamily="34" charset="-120"/>
+              </a:rPr>
+              <a:t>件数が見える</a:t>
+            </a:r>
+            <a:endParaRPr lang="en-US" sz="1600" dirty="0"/>
+          </a:p>
+        </p:txBody>
+      </p:sp>
+      <p:sp>
+        <p:nvSpPr>
+          <p:cNvPr id="13" name="Text 11"/>
+          <p:cNvSpPr/>
+          <p:nvPr/>
+        </p:nvSpPr>
+        <p:spPr>
+          <a:xfrm>
+            <a:off x="1005840" y="3739896"/>
+            <a:ext cx="3931920" cy="292608"/>
+          </a:xfrm>
+          <a:prstGeom prst="rect">
+            <a:avLst/>
+          </a:prstGeom>
+          <a:noFill/>
+          <a:ln/>
+        </p:spPr>
+        <p:txBody>
+          <a:bodyPr wrap="square" lIns="0" tIns="0" rIns="0" bIns="0" rtlCol="0" anchor="ctr"/>
+          <a:lstStyle/>
+          <a:p>
+            <a:pPr algn="l" indent="0" marL="0">
+              <a:buNone/>
+            </a:pPr>
+            <a:r>
+              <a:rPr lang="en-US" sz="1250" dirty="0">
+                <a:solidFill>
+                  <a:srgbClr val="8B949E"/>
+                </a:solidFill>
+                <a:latin typeface="Hiragino Sans" pitchFamily="34" charset="0"/>
+                <a:ea typeface="Hiragino Sans" pitchFamily="34" charset="-122"/>
+                <a:cs typeface="Hiragino Sans" pitchFamily="34" charset="-120"/>
+              </a:rPr>
+              <a:t>残り件数と完了件数を表示</a:t>
+            </a:r>
+            <a:endParaRPr lang="en-US" sz="1250" dirty="0"/>
+          </a:p>
+        </p:txBody>
+      </p:sp>
+      <p:sp>
+        <p:nvSpPr>
+          <p:cNvPr id="14" name="Shape 12"/>
+          <p:cNvSpPr/>
+          <p:nvPr/>
+        </p:nvSpPr>
+        <p:spPr>
+          <a:xfrm>
+            <a:off x="640080" y="4178808"/>
+            <a:ext cx="4572000" cy="749808"/>
+          </a:xfrm>
+          <a:prstGeom prst="roundRect">
+            <a:avLst>
+              <a:gd name="adj" fmla="val 9756"/>
+            </a:avLst>
+          </a:prstGeom>
+          <a:solidFill>
+            <a:srgbClr val="161B22"/>
+          </a:solidFill>
+          <a:ln w="12700">
+            <a:solidFill>
+              <a:srgbClr val="30363D"/>
+            </a:solidFill>
+            <a:prstDash val="solid"/>
+          </a:ln>
+          <a:effectLst>
+            <a:outerShdw sx="100000" sy="100000" kx="0" ky="0" algn="bl" rotWithShape="0" blurRad="127000" dist="38100" dir="5400000">
+              <a:srgbClr val="000000">
+                <a:alpha val="35000"/>
+              </a:srgbClr>
+            </a:outerShdw>
+          </a:effectLst>
+        </p:spPr>
+      </p:sp>
+      <p:sp>
+        <p:nvSpPr>
+          <p:cNvPr id="15" name="Shape 13"/>
+          <p:cNvSpPr/>
+          <p:nvPr/>
+        </p:nvSpPr>
+        <p:spPr>
+          <a:xfrm>
+            <a:off x="640080" y="4178808"/>
+            <a:ext cx="82296" cy="749808"/>
+          </a:xfrm>
+          <a:prstGeom prst="rect">
+            <a:avLst/>
+          </a:prstGeom>
+          <a:solidFill>
+            <a:srgbClr val="BC8CFF"/>
+          </a:solidFill>
+          <a:ln/>
+        </p:spPr>
+      </p:sp>
+      <p:sp>
+        <p:nvSpPr>
+          <p:cNvPr id="16" name="Text 14"/>
+          <p:cNvSpPr/>
+          <p:nvPr/>
+        </p:nvSpPr>
+        <p:spPr>
+          <a:xfrm>
+            <a:off x="1005840" y="4270248"/>
+            <a:ext cx="3931920" cy="365760"/>
+          </a:xfrm>
+          <a:prstGeom prst="rect">
+            <a:avLst/>
+          </a:prstGeom>
+          <a:noFill/>
+          <a:ln/>
+        </p:spPr>
+        <p:txBody>
+          <a:bodyPr wrap="square" lIns="0" tIns="0" rIns="0" bIns="0" rtlCol="0" anchor="ctr"/>
+          <a:lstStyle/>
+          <a:p>
+            <a:pPr algn="l" indent="0" marL="0">
+              <a:buNone/>
+            </a:pPr>
+            <a:r>
+              <a:rPr lang="en-US" sz="1600" b="1" dirty="0">
+                <a:solidFill>
+                  <a:srgbClr val="E6EDF3"/>
+                </a:solidFill>
+                <a:latin typeface="Hiragino Sans" pitchFamily="34" charset="0"/>
+                <a:ea typeface="Hiragino Sans" pitchFamily="34" charset="-122"/>
+                <a:cs typeface="Hiragino Sans" pitchFamily="34" charset="-120"/>
+              </a:rPr>
+              <a:t>閉じても残る</a:t>
+            </a:r>
+            <a:endParaRPr lang="en-US" sz="1600" dirty="0"/>
+          </a:p>
+        </p:txBody>
+      </p:sp>
+      <p:sp>
+        <p:nvSpPr>
+          <p:cNvPr id="17" name="Text 15"/>
+          <p:cNvSpPr/>
+          <p:nvPr/>
+        </p:nvSpPr>
+        <p:spPr>
+          <a:xfrm>
+            <a:off x="1005840" y="4617720"/>
+            <a:ext cx="3931920" cy="292608"/>
+          </a:xfrm>
+          <a:prstGeom prst="rect">
+            <a:avLst/>
+          </a:prstGeom>
+          <a:noFill/>
+          <a:ln/>
+        </p:spPr>
+        <p:txBody>
+          <a:bodyPr wrap="square" lIns="0" tIns="0" rIns="0" bIns="0" rtlCol="0" anchor="ctr"/>
+          <a:lstStyle/>
+          <a:p>
+            <a:pPr algn="l" indent="0" marL="0">
+              <a:buNone/>
+            </a:pPr>
+            <a:r>
+              <a:rPr lang="en-US" sz="1250" dirty="0">
+                <a:solidFill>
+                  <a:srgbClr val="8B949E"/>
+                </a:solidFill>
+                <a:latin typeface="Hiragino Sans" pitchFamily="34" charset="0"/>
+                <a:ea typeface="Hiragino Sans" pitchFamily="34" charset="-122"/>
+                <a:cs typeface="Hiragino Sans" pitchFamily="34" charset="-120"/>
+              </a:rPr>
+              <a:t>localStorage に保存</a:t>
+            </a:r>
+            <a:endParaRPr lang="en-US" sz="1250" dirty="0"/>
+          </a:p>
+        </p:txBody>
+      </p:sp>
+      <p:sp>
+        <p:nvSpPr>
+          <p:cNvPr id="18" name="Shape 16"/>
+          <p:cNvSpPr/>
+          <p:nvPr/>
+        </p:nvSpPr>
+        <p:spPr>
+          <a:xfrm>
+            <a:off x="640080" y="5056632"/>
+            <a:ext cx="4572000" cy="749808"/>
+          </a:xfrm>
+          <a:prstGeom prst="roundRect">
+            <a:avLst>
+              <a:gd name="adj" fmla="val 9756"/>
+            </a:avLst>
+          </a:prstGeom>
+          <a:solidFill>
+            <a:srgbClr val="161B22"/>
+          </a:solidFill>
+          <a:ln w="12700">
+            <a:solidFill>
+              <a:srgbClr val="30363D"/>
+            </a:solidFill>
+            <a:prstDash val="solid"/>
+          </a:ln>
+          <a:effectLst>
+            <a:outerShdw sx="100000" sy="100000" kx="0" ky="0" algn="bl" rotWithShape="0" blurRad="127000" dist="38100" dir="5400000">
+              <a:srgbClr val="000000">
+                <a:alpha val="35000"/>
+              </a:srgbClr>
+            </a:outerShdw>
+          </a:effectLst>
+        </p:spPr>
+      </p:sp>
+      <p:sp>
+        <p:nvSpPr>
+          <p:cNvPr id="19" name="Shape 17"/>
+          <p:cNvSpPr/>
+          <p:nvPr/>
+        </p:nvSpPr>
+        <p:spPr>
+          <a:xfrm>
+            <a:off x="640080" y="5056632"/>
+            <a:ext cx="82296" cy="749808"/>
+          </a:xfrm>
+          <a:prstGeom prst="rect">
+            <a:avLst/>
+          </a:prstGeom>
+          <a:solidFill>
+            <a:srgbClr val="F0883E"/>
+          </a:solidFill>
+          <a:ln/>
+        </p:spPr>
+      </p:sp>
+      <p:sp>
+        <p:nvSpPr>
+          <p:cNvPr id="20" name="Text 18"/>
+          <p:cNvSpPr/>
+          <p:nvPr/>
+        </p:nvSpPr>
+        <p:spPr>
+          <a:xfrm>
+            <a:off x="1005840" y="5148072"/>
+            <a:ext cx="3931920" cy="365760"/>
+          </a:xfrm>
+          <a:prstGeom prst="rect">
+            <a:avLst/>
+          </a:prstGeom>
+          <a:noFill/>
+          <a:ln/>
+        </p:spPr>
+        <p:txBody>
+          <a:bodyPr wrap="square" lIns="0" tIns="0" rIns="0" bIns="0" rtlCol="0" anchor="ctr"/>
+          <a:lstStyle/>
+          <a:p>
+            <a:pPr algn="l" indent="0" marL="0">
+              <a:buNone/>
+            </a:pPr>
+            <a:r>
+              <a:rPr lang="en-US" sz="1600" b="1" dirty="0">
+                <a:solidFill>
+                  <a:srgbClr val="E6EDF3"/>
+                </a:solidFill>
+                <a:latin typeface="Hiragino Sans" pitchFamily="34" charset="0"/>
+                <a:ea typeface="Hiragino Sans" pitchFamily="34" charset="-122"/>
+                <a:cs typeface="Hiragino Sans" pitchFamily="34" charset="-120"/>
+              </a:rPr>
+              <a:t>役割ごとに分ける</a:t>
+            </a:r>
+            <a:endParaRPr lang="en-US" sz="1600" dirty="0"/>
+          </a:p>
+        </p:txBody>
+      </p:sp>
+      <p:sp>
+        <p:nvSpPr>
+          <p:cNvPr id="21" name="Text 19"/>
+          <p:cNvSpPr/>
+          <p:nvPr/>
+        </p:nvSpPr>
+        <p:spPr>
+          <a:xfrm>
+            <a:off x="1005840" y="5495544"/>
+            <a:ext cx="3931920" cy="292608"/>
+          </a:xfrm>
+          <a:prstGeom prst="rect">
+            <a:avLst/>
+          </a:prstGeom>
+          <a:noFill/>
+          <a:ln/>
+        </p:spPr>
+        <p:txBody>
+          <a:bodyPr wrap="square" lIns="0" tIns="0" rIns="0" bIns="0" rtlCol="0" anchor="ctr"/>
+          <a:lstStyle/>
+          <a:p>
+            <a:pPr algn="l" indent="0" marL="0">
+              <a:buNone/>
+            </a:pPr>
+            <a:r>
+              <a:rPr lang="en-US" sz="1250" dirty="0">
+                <a:solidFill>
+                  <a:srgbClr val="8B949E"/>
+                </a:solidFill>
+                <a:latin typeface="Hiragino Sans" pitchFamily="34" charset="0"/>
+                <a:ea typeface="Hiragino Sans" pitchFamily="34" charset="-122"/>
+                <a:cs typeface="Hiragino Sans" pitchFamily="34" charset="-120"/>
+              </a:rPr>
+              <a:t>画面・見た目・動きを読みやすく</a:t>
+            </a:r>
+            <a:endParaRPr lang="en-US" sz="1250" dirty="0"/>
+          </a:p>
+        </p:txBody>
+      </p:sp>
+      <p:sp>
+        <p:nvSpPr>
+          <p:cNvPr id="22" name="Shape 20"/>
+          <p:cNvSpPr/>
+          <p:nvPr/>
+        </p:nvSpPr>
+        <p:spPr>
+          <a:xfrm>
+            <a:off x="5577840" y="2331720"/>
+            <a:ext cx="5989320" cy="3520440"/>
+          </a:xfrm>
+          <a:prstGeom prst="roundRect">
+            <a:avLst>
+              <a:gd name="adj" fmla="val 2078"/>
             </a:avLst>
           </a:prstGeom>
           <a:solidFill>
@@ -11205,14 +11752,14 @@
       </p:sp>
       <p:sp>
         <p:nvSpPr>
-          <p:cNvPr id="6" name="Shape 4"/>
-          <p:cNvSpPr/>
-          <p:nvPr/>
-        </p:nvSpPr>
-        <p:spPr>
-          <a:xfrm>
-            <a:off x="649224" y="1929384"/>
-            <a:ext cx="5650992" cy="347472"/>
+          <p:cNvPr id="23" name="Shape 21"/>
+          <p:cNvSpPr/>
+          <p:nvPr/>
+        </p:nvSpPr>
+        <p:spPr>
+          <a:xfrm>
+            <a:off x="5577840" y="2331720"/>
+            <a:ext cx="5989320" cy="384048"/>
           </a:xfrm>
           <a:prstGeom prst="rect">
             <a:avLst/>
@@ -11225,13 +11772,13 @@
       </p:sp>
       <p:sp>
         <p:nvSpPr>
-          <p:cNvPr id="7" name="Shape 5"/>
-          <p:cNvSpPr/>
-          <p:nvPr/>
-        </p:nvSpPr>
-        <p:spPr>
-          <a:xfrm>
-            <a:off x="804672" y="2043684"/>
+          <p:cNvPr id="24" name="Shape 22"/>
+          <p:cNvSpPr/>
+          <p:nvPr/>
+        </p:nvSpPr>
+        <p:spPr>
+          <a:xfrm>
+            <a:off x="5760720" y="2478024"/>
             <a:ext cx="109728" cy="109728"/>
           </a:xfrm>
           <a:prstGeom prst="ellipse">
@@ -11245,13 +11792,13 @@
       </p:sp>
       <p:sp>
         <p:nvSpPr>
-          <p:cNvPr id="8" name="Shape 6"/>
-          <p:cNvSpPr/>
-          <p:nvPr/>
-        </p:nvSpPr>
-        <p:spPr>
-          <a:xfrm>
-            <a:off x="1005840" y="2043684"/>
+          <p:cNvPr id="25" name="Shape 23"/>
+          <p:cNvSpPr/>
+          <p:nvPr/>
+        </p:nvSpPr>
+        <p:spPr>
+          <a:xfrm>
+            <a:off x="5961888" y="2478024"/>
             <a:ext cx="109728" cy="109728"/>
           </a:xfrm>
           <a:prstGeom prst="ellipse">
@@ -11265,13 +11812,13 @@
       </p:sp>
       <p:sp>
         <p:nvSpPr>
-          <p:cNvPr id="9" name="Shape 7"/>
-          <p:cNvSpPr/>
-          <p:nvPr/>
-        </p:nvSpPr>
-        <p:spPr>
-          <a:xfrm>
-            <a:off x="1207008" y="2043684"/>
+          <p:cNvPr id="26" name="Shape 24"/>
+          <p:cNvSpPr/>
+          <p:nvPr/>
+        </p:nvSpPr>
+        <p:spPr>
+          <a:xfrm>
+            <a:off x="6163056" y="2478024"/>
             <a:ext cx="109728" cy="109728"/>
           </a:xfrm>
           <a:prstGeom prst="ellipse">
@@ -11285,30 +11832,30 @@
       </p:sp>
       <p:sp>
         <p:nvSpPr>
-          <p:cNvPr id="10" name="Text 8"/>
-          <p:cNvSpPr/>
-          <p:nvPr/>
-        </p:nvSpPr>
-        <p:spPr>
-          <a:xfrm>
-            <a:off x="1463040" y="1929384"/>
-            <a:ext cx="4572000" cy="347472"/>
-          </a:xfrm>
-          <a:prstGeom prst="rect">
-            <a:avLst/>
-          </a:prstGeom>
-          <a:noFill/>
-          <a:ln/>
-        </p:spPr>
-        <p:txBody>
-          <a:bodyPr wrap="square" lIns="0" tIns="0" rIns="0" bIns="0" rtlCol="0" anchor="ctr"/>
-          <a:lstStyle/>
-          <a:p>
-            <a:pPr algn="l" indent="0" marL="0">
-              <a:buNone/>
-            </a:pPr>
-            <a:r>
-              <a:rPr lang="en-US" sz="1000" dirty="0">
+          <p:cNvPr id="27" name="Text 25"/>
+          <p:cNvSpPr/>
+          <p:nvPr/>
+        </p:nvSpPr>
+        <p:spPr>
+          <a:xfrm>
+            <a:off x="6446520" y="2331720"/>
+            <a:ext cx="4846320" cy="384048"/>
+          </a:xfrm>
+          <a:prstGeom prst="rect">
+            <a:avLst/>
+          </a:prstGeom>
+          <a:noFill/>
+          <a:ln/>
+        </p:spPr>
+        <p:txBody>
+          <a:bodyPr wrap="square" lIns="0" tIns="0" rIns="0" bIns="0" rtlCol="0" anchor="ctr"/>
+          <a:lstStyle/>
+          <a:p>
+            <a:pPr algn="l" indent="0" marL="0">
+              <a:buNone/>
+            </a:pPr>
+            <a:r>
+              <a:rPr lang="en-US" sz="1100" dirty="0">
                 <a:solidFill>
                   <a:srgbClr val="8B949E"/>
                 </a:solidFill>
@@ -11316,744 +11863,39 @@
                 <a:ea typeface="Menlo" pitchFamily="34" charset="-122"/>
                 <a:cs typeface="Menlo" pitchFamily="34" charset="-120"/>
               </a:rPr>
-              <a:t>エージェントが作る構成（例）</a:t>
-            </a:r>
-            <a:endParaRPr lang="en-US" sz="1000" dirty="0"/>
-          </a:p>
-        </p:txBody>
-      </p:sp>
-      <p:sp>
-        <p:nvSpPr>
-          <p:cNvPr id="11" name="Text 9"/>
-          <p:cNvSpPr/>
-          <p:nvPr/>
-        </p:nvSpPr>
-        <p:spPr>
-          <a:xfrm>
-            <a:off x="896112" y="2377440"/>
-            <a:ext cx="5212080" cy="3319272"/>
-          </a:xfrm>
-          <a:prstGeom prst="rect">
-            <a:avLst/>
-          </a:prstGeom>
-          <a:noFill/>
-          <a:ln/>
-        </p:spPr>
-        <p:txBody>
-          <a:bodyPr wrap="square" lIns="0" tIns="0" rIns="0" bIns="0" rtlCol="0" anchor="t"/>
-          <a:lstStyle/>
-          <a:p>
-            <a:pPr algn="l" indent="0" marL="0">
-              <a:lnSpc>
-                <a:spcPct val="125000"/>
-              </a:lnSpc>
-              <a:buNone/>
-            </a:pPr>
-            <a:r>
-              <a:rPr lang="en-US" sz="1400" dirty="0">
-                <a:solidFill>
-                  <a:srgbClr val="8B949E"/>
-                </a:solidFill>
-                <a:latin typeface="Menlo" pitchFamily="34" charset="0"/>
-                <a:ea typeface="Menlo" pitchFamily="34" charset="-122"/>
-                <a:cs typeface="Menlo" pitchFamily="34" charset="-120"/>
-              </a:rPr>
-              <a:t>todo-app/</a:t>
-            </a:r>
-            <a:endParaRPr lang="en-US" sz="1400" dirty="0"/>
-          </a:p>
-          <a:p>
-            <a:pPr algn="l" indent="0" marL="0">
-              <a:lnSpc>
-                <a:spcPct val="125000"/>
-              </a:lnSpc>
-              <a:buNone/>
-            </a:pPr>
-            <a:r>
-              <a:rPr lang="en-US" sz="1400" dirty="0">
-                <a:solidFill>
-                  <a:srgbClr val="C9D1D9"/>
-                </a:solidFill>
-                <a:latin typeface="Menlo" pitchFamily="34" charset="0"/>
-                <a:ea typeface="Menlo" pitchFamily="34" charset="-122"/>
-                <a:cs typeface="Menlo" pitchFamily="34" charset="-120"/>
-              </a:rPr>
-              <a:t>  index.html     画面</a:t>
-            </a:r>
-            <a:endParaRPr lang="en-US" sz="1400" dirty="0"/>
-          </a:p>
-          <a:p>
-            <a:pPr algn="l" indent="0" marL="0">
-              <a:lnSpc>
-                <a:spcPct val="125000"/>
-              </a:lnSpc>
-              <a:buNone/>
-            </a:pPr>
-            <a:r>
-              <a:rPr lang="en-US" sz="1400" dirty="0">
-                <a:solidFill>
-                  <a:srgbClr val="C9D1D9"/>
-                </a:solidFill>
-                <a:latin typeface="Menlo" pitchFamily="34" charset="0"/>
-                <a:ea typeface="Menlo" pitchFamily="34" charset="-122"/>
-                <a:cs typeface="Menlo" pitchFamily="34" charset="-120"/>
-              </a:rPr>
-              <a:t>  styles.css     見た目</a:t>
-            </a:r>
-            <a:endParaRPr lang="en-US" sz="1400" dirty="0"/>
-          </a:p>
-          <a:p>
-            <a:pPr algn="l" indent="0" marL="0">
-              <a:lnSpc>
-                <a:spcPct val="125000"/>
-              </a:lnSpc>
-              <a:buNone/>
-            </a:pPr>
-            <a:r>
-              <a:rPr lang="en-US" sz="1400" dirty="0">
-                <a:solidFill>
-                  <a:srgbClr val="8B949E"/>
-                </a:solidFill>
-                <a:latin typeface="Menlo" pitchFamily="34" charset="0"/>
-                <a:ea typeface="Menlo" pitchFamily="34" charset="-122"/>
-                <a:cs typeface="Menlo" pitchFamily="34" charset="-120"/>
-              </a:rPr>
-              <a:t>  src/</a:t>
-            </a:r>
-            <a:endParaRPr lang="en-US" sz="1400" dirty="0"/>
-          </a:p>
-          <a:p>
-            <a:pPr algn="l" indent="0" marL="0">
-              <a:lnSpc>
-                <a:spcPct val="125000"/>
-              </a:lnSpc>
-              <a:buNone/>
-            </a:pPr>
-            <a:r>
-              <a:rPr lang="en-US" sz="1400" dirty="0">
-                <a:solidFill>
-                  <a:srgbClr val="C9D1D9"/>
-                </a:solidFill>
-                <a:latin typeface="Menlo" pitchFamily="34" charset="0"/>
-                <a:ea typeface="Menlo" pitchFamily="34" charset="-122"/>
-                <a:cs typeface="Menlo" pitchFamily="34" charset="-120"/>
-              </a:rPr>
-              <a:t>    storage.js   保存（localStorage）</a:t>
-            </a:r>
-            <a:endParaRPr lang="en-US" sz="1400" dirty="0"/>
-          </a:p>
-          <a:p>
-            <a:pPr algn="l" indent="0" marL="0">
-              <a:lnSpc>
-                <a:spcPct val="125000"/>
-              </a:lnSpc>
-              <a:buNone/>
-            </a:pPr>
-            <a:r>
-              <a:rPr lang="en-US" sz="1400" dirty="0">
-                <a:solidFill>
-                  <a:srgbClr val="C9D1D9"/>
-                </a:solidFill>
-                <a:latin typeface="Menlo" pitchFamily="34" charset="0"/>
-                <a:ea typeface="Menlo" pitchFamily="34" charset="-122"/>
-                <a:cs typeface="Menlo" pitchFamily="34" charset="-120"/>
-              </a:rPr>
-              <a:t>    todo.js      追加・完了・削除</a:t>
-            </a:r>
-            <a:endParaRPr lang="en-US" sz="1400" dirty="0"/>
-          </a:p>
-          <a:p>
-            <a:pPr algn="l" indent="0" marL="0">
-              <a:lnSpc>
-                <a:spcPct val="125000"/>
-              </a:lnSpc>
-              <a:buNone/>
-            </a:pPr>
-            <a:r>
-              <a:rPr lang="en-US" sz="1400" dirty="0">
-                <a:solidFill>
-                  <a:srgbClr val="C9D1D9"/>
-                </a:solidFill>
-                <a:latin typeface="Menlo" pitchFamily="34" charset="0"/>
-                <a:ea typeface="Menlo" pitchFamily="34" charset="-122"/>
-                <a:cs typeface="Menlo" pitchFamily="34" charset="-120"/>
-              </a:rPr>
-              <a:t>    app.js       画面とロジックの入口</a:t>
-            </a:r>
-            <a:endParaRPr lang="en-US" sz="1400" dirty="0"/>
-          </a:p>
-        </p:txBody>
-      </p:sp>
-      <p:sp>
-        <p:nvSpPr>
-          <p:cNvPr id="12" name="Shape 10"/>
-          <p:cNvSpPr/>
-          <p:nvPr/>
-        </p:nvSpPr>
-        <p:spPr>
-          <a:xfrm>
-            <a:off x="6675120" y="1920240"/>
-            <a:ext cx="4846320" cy="749808"/>
-          </a:xfrm>
-          <a:prstGeom prst="roundRect">
-            <a:avLst>
-              <a:gd name="adj" fmla="val 9756"/>
-            </a:avLst>
-          </a:prstGeom>
-          <a:solidFill>
-            <a:srgbClr val="161B22"/>
-          </a:solidFill>
-          <a:ln w="12700">
-            <a:solidFill>
-              <a:srgbClr val="30363D"/>
-            </a:solidFill>
-            <a:prstDash val="solid"/>
-          </a:ln>
-          <a:effectLst>
-            <a:outerShdw sx="100000" sy="100000" kx="0" ky="0" algn="bl" rotWithShape="0" blurRad="127000" dist="38100" dir="5400000">
-              <a:srgbClr val="000000">
-                <a:alpha val="35000"/>
-              </a:srgbClr>
-            </a:outerShdw>
-          </a:effectLst>
-        </p:spPr>
-      </p:sp>
-      <p:sp>
-        <p:nvSpPr>
-          <p:cNvPr id="13" name="Shape 11"/>
-          <p:cNvSpPr/>
-          <p:nvPr/>
-        </p:nvSpPr>
-        <p:spPr>
-          <a:xfrm>
-            <a:off x="6675120" y="1920240"/>
-            <a:ext cx="82296" cy="749808"/>
-          </a:xfrm>
-          <a:prstGeom prst="rect">
-            <a:avLst/>
-          </a:prstGeom>
-          <a:solidFill>
-            <a:srgbClr val="3FB950"/>
-          </a:solidFill>
-          <a:ln/>
-        </p:spPr>
-      </p:sp>
-      <p:sp>
-        <p:nvSpPr>
-          <p:cNvPr id="14" name="Text 12"/>
-          <p:cNvSpPr/>
-          <p:nvPr/>
-        </p:nvSpPr>
-        <p:spPr>
-          <a:xfrm>
-            <a:off x="7040880" y="2011680"/>
-            <a:ext cx="4206240" cy="365760"/>
-          </a:xfrm>
-          <a:prstGeom prst="rect">
-            <a:avLst/>
-          </a:prstGeom>
-          <a:noFill/>
-          <a:ln/>
-        </p:spPr>
-        <p:txBody>
-          <a:bodyPr wrap="square" lIns="0" tIns="0" rIns="0" bIns="0" rtlCol="0" anchor="ctr"/>
-          <a:lstStyle/>
-          <a:p>
-            <a:pPr algn="l" indent="0" marL="0">
-              <a:buNone/>
-            </a:pPr>
-            <a:r>
-              <a:rPr lang="en-US" sz="1600" b="1" dirty="0">
-                <a:solidFill>
-                  <a:srgbClr val="E6EDF3"/>
-                </a:solidFill>
-                <a:latin typeface="Hiragino Sans" pitchFamily="34" charset="0"/>
-                <a:ea typeface="Hiragino Sans" pitchFamily="34" charset="-122"/>
-                <a:cs typeface="Hiragino Sans" pitchFamily="34" charset="-120"/>
-              </a:rPr>
-              <a:t>タスクを追加</a:t>
-            </a:r>
-            <a:endParaRPr lang="en-US" sz="1600" dirty="0"/>
-          </a:p>
-        </p:txBody>
-      </p:sp>
-      <p:sp>
-        <p:nvSpPr>
-          <p:cNvPr id="15" name="Text 13"/>
-          <p:cNvSpPr/>
-          <p:nvPr/>
-        </p:nvSpPr>
-        <p:spPr>
-          <a:xfrm>
-            <a:off x="7040880" y="2359152"/>
-            <a:ext cx="4206240" cy="292608"/>
-          </a:xfrm>
-          <a:prstGeom prst="rect">
-            <a:avLst/>
-          </a:prstGeom>
-          <a:noFill/>
-          <a:ln/>
-        </p:spPr>
-        <p:txBody>
-          <a:bodyPr wrap="square" lIns="0" tIns="0" rIns="0" bIns="0" rtlCol="0" anchor="ctr"/>
-          <a:lstStyle/>
-          <a:p>
-            <a:pPr algn="l" indent="0" marL="0">
-              <a:buNone/>
-            </a:pPr>
-            <a:r>
-              <a:rPr lang="en-US" sz="1250" dirty="0">
-                <a:solidFill>
-                  <a:srgbClr val="8B949E"/>
-                </a:solidFill>
-                <a:latin typeface="Hiragino Sans" pitchFamily="34" charset="0"/>
-                <a:ea typeface="Hiragino Sans" pitchFamily="34" charset="-122"/>
-                <a:cs typeface="Hiragino Sans" pitchFamily="34" charset="-120"/>
-              </a:rPr>
-              <a:t>入力して「追加」で登録</a:t>
-            </a:r>
-            <a:endParaRPr lang="en-US" sz="1250" dirty="0"/>
-          </a:p>
-        </p:txBody>
-      </p:sp>
-      <p:sp>
-        <p:nvSpPr>
-          <p:cNvPr id="16" name="Shape 14"/>
-          <p:cNvSpPr/>
-          <p:nvPr/>
-        </p:nvSpPr>
-        <p:spPr>
-          <a:xfrm>
-            <a:off x="6675120" y="2798064"/>
-            <a:ext cx="4846320" cy="749808"/>
-          </a:xfrm>
-          <a:prstGeom prst="roundRect">
-            <a:avLst>
-              <a:gd name="adj" fmla="val 9756"/>
-            </a:avLst>
-          </a:prstGeom>
-          <a:solidFill>
-            <a:srgbClr val="161B22"/>
-          </a:solidFill>
-          <a:ln w="12700">
-            <a:solidFill>
-              <a:srgbClr val="30363D"/>
-            </a:solidFill>
-            <a:prstDash val="solid"/>
-          </a:ln>
-          <a:effectLst>
-            <a:outerShdw sx="100000" sy="100000" kx="0" ky="0" algn="bl" rotWithShape="0" blurRad="127000" dist="38100" dir="5400000">
-              <a:srgbClr val="000000">
-                <a:alpha val="35000"/>
-              </a:srgbClr>
-            </a:outerShdw>
-          </a:effectLst>
-        </p:spPr>
-      </p:sp>
-      <p:sp>
-        <p:nvSpPr>
-          <p:cNvPr id="17" name="Shape 15"/>
-          <p:cNvSpPr/>
-          <p:nvPr/>
-        </p:nvSpPr>
-        <p:spPr>
-          <a:xfrm>
-            <a:off x="6675120" y="2798064"/>
-            <a:ext cx="82296" cy="749808"/>
-          </a:xfrm>
-          <a:prstGeom prst="rect">
-            <a:avLst/>
-          </a:prstGeom>
-          <a:solidFill>
-            <a:srgbClr val="58A6FF"/>
-          </a:solidFill>
-          <a:ln/>
-        </p:spPr>
-      </p:sp>
-      <p:sp>
-        <p:nvSpPr>
-          <p:cNvPr id="18" name="Text 16"/>
-          <p:cNvSpPr/>
-          <p:nvPr/>
-        </p:nvSpPr>
-        <p:spPr>
-          <a:xfrm>
-            <a:off x="7040880" y="2889504"/>
-            <a:ext cx="4206240" cy="365760"/>
-          </a:xfrm>
-          <a:prstGeom prst="rect">
-            <a:avLst/>
-          </a:prstGeom>
-          <a:noFill/>
-          <a:ln/>
-        </p:spPr>
-        <p:txBody>
-          <a:bodyPr wrap="square" lIns="0" tIns="0" rIns="0" bIns="0" rtlCol="0" anchor="ctr"/>
-          <a:lstStyle/>
-          <a:p>
-            <a:pPr algn="l" indent="0" marL="0">
-              <a:buNone/>
-            </a:pPr>
-            <a:r>
-              <a:rPr lang="en-US" sz="1600" b="1" dirty="0">
-                <a:solidFill>
-                  <a:srgbClr val="E6EDF3"/>
-                </a:solidFill>
-                <a:latin typeface="Hiragino Sans" pitchFamily="34" charset="0"/>
-                <a:ea typeface="Hiragino Sans" pitchFamily="34" charset="-122"/>
-                <a:cs typeface="Hiragino Sans" pitchFamily="34" charset="-120"/>
-              </a:rPr>
-              <a:t>完了でチェック</a:t>
-            </a:r>
-            <a:endParaRPr lang="en-US" sz="1600" dirty="0"/>
-          </a:p>
-        </p:txBody>
-      </p:sp>
-      <p:sp>
-        <p:nvSpPr>
-          <p:cNvPr id="19" name="Text 17"/>
-          <p:cNvSpPr/>
-          <p:nvPr/>
-        </p:nvSpPr>
-        <p:spPr>
-          <a:xfrm>
-            <a:off x="7040880" y="3236976"/>
-            <a:ext cx="4206240" cy="292608"/>
-          </a:xfrm>
-          <a:prstGeom prst="rect">
-            <a:avLst/>
-          </a:prstGeom>
-          <a:noFill/>
-          <a:ln/>
-        </p:spPr>
-        <p:txBody>
-          <a:bodyPr wrap="square" lIns="0" tIns="0" rIns="0" bIns="0" rtlCol="0" anchor="ctr"/>
-          <a:lstStyle/>
-          <a:p>
-            <a:pPr algn="l" indent="0" marL="0">
-              <a:buNone/>
-            </a:pPr>
-            <a:r>
-              <a:rPr lang="en-US" sz="1250" dirty="0">
-                <a:solidFill>
-                  <a:srgbClr val="8B949E"/>
-                </a:solidFill>
-                <a:latin typeface="Hiragino Sans" pitchFamily="34" charset="0"/>
-                <a:ea typeface="Hiragino Sans" pitchFamily="34" charset="-122"/>
-                <a:cs typeface="Hiragino Sans" pitchFamily="34" charset="-120"/>
-              </a:rPr>
-              <a:t>押すと打ち消し線が付く</a:t>
-            </a:r>
-            <a:endParaRPr lang="en-US" sz="1250" dirty="0"/>
-          </a:p>
-        </p:txBody>
-      </p:sp>
-      <p:sp>
-        <p:nvSpPr>
-          <p:cNvPr id="20" name="Shape 18"/>
-          <p:cNvSpPr/>
-          <p:nvPr/>
-        </p:nvSpPr>
-        <p:spPr>
-          <a:xfrm>
-            <a:off x="6675120" y="3675888"/>
-            <a:ext cx="4846320" cy="749808"/>
-          </a:xfrm>
-          <a:prstGeom prst="roundRect">
-            <a:avLst>
-              <a:gd name="adj" fmla="val 9756"/>
-            </a:avLst>
-          </a:prstGeom>
-          <a:solidFill>
-            <a:srgbClr val="161B22"/>
-          </a:solidFill>
-          <a:ln w="12700">
-            <a:solidFill>
-              <a:srgbClr val="30363D"/>
-            </a:solidFill>
-            <a:prstDash val="solid"/>
-          </a:ln>
-          <a:effectLst>
-            <a:outerShdw sx="100000" sy="100000" kx="0" ky="0" algn="bl" rotWithShape="0" blurRad="127000" dist="38100" dir="5400000">
-              <a:srgbClr val="000000">
-                <a:alpha val="35000"/>
-              </a:srgbClr>
-            </a:outerShdw>
-          </a:effectLst>
-        </p:spPr>
-      </p:sp>
-      <p:sp>
-        <p:nvSpPr>
-          <p:cNvPr id="21" name="Shape 19"/>
-          <p:cNvSpPr/>
-          <p:nvPr/>
-        </p:nvSpPr>
-        <p:spPr>
-          <a:xfrm>
-            <a:off x="6675120" y="3675888"/>
-            <a:ext cx="82296" cy="749808"/>
-          </a:xfrm>
-          <a:prstGeom prst="rect">
-            <a:avLst/>
-          </a:prstGeom>
-          <a:solidFill>
-            <a:srgbClr val="BC8CFF"/>
-          </a:solidFill>
-          <a:ln/>
-        </p:spPr>
-      </p:sp>
-      <p:sp>
-        <p:nvSpPr>
-          <p:cNvPr id="22" name="Text 20"/>
-          <p:cNvSpPr/>
-          <p:nvPr/>
-        </p:nvSpPr>
-        <p:spPr>
-          <a:xfrm>
-            <a:off x="7040880" y="3767328"/>
-            <a:ext cx="4206240" cy="365760"/>
-          </a:xfrm>
-          <a:prstGeom prst="rect">
-            <a:avLst/>
-          </a:prstGeom>
-          <a:noFill/>
-          <a:ln/>
-        </p:spPr>
-        <p:txBody>
-          <a:bodyPr wrap="square" lIns="0" tIns="0" rIns="0" bIns="0" rtlCol="0" anchor="ctr"/>
-          <a:lstStyle/>
-          <a:p>
-            <a:pPr algn="l" indent="0" marL="0">
-              <a:buNone/>
-            </a:pPr>
-            <a:r>
-              <a:rPr lang="en-US" sz="1600" b="1" dirty="0">
-                <a:solidFill>
-                  <a:srgbClr val="E6EDF3"/>
-                </a:solidFill>
-                <a:latin typeface="Hiragino Sans" pitchFamily="34" charset="0"/>
-                <a:ea typeface="Hiragino Sans" pitchFamily="34" charset="-122"/>
-                <a:cs typeface="Hiragino Sans" pitchFamily="34" charset="-120"/>
-              </a:rPr>
-              <a:t>いらないものは削除</a:t>
-            </a:r>
-            <a:endParaRPr lang="en-US" sz="1600" dirty="0"/>
-          </a:p>
-        </p:txBody>
-      </p:sp>
-      <p:sp>
-        <p:nvSpPr>
-          <p:cNvPr id="23" name="Text 21"/>
-          <p:cNvSpPr/>
-          <p:nvPr/>
-        </p:nvSpPr>
-        <p:spPr>
-          <a:xfrm>
-            <a:off x="7040880" y="4114800"/>
-            <a:ext cx="4206240" cy="292608"/>
-          </a:xfrm>
-          <a:prstGeom prst="rect">
-            <a:avLst/>
-          </a:prstGeom>
-          <a:noFill/>
-          <a:ln/>
-        </p:spPr>
-        <p:txBody>
-          <a:bodyPr wrap="square" lIns="0" tIns="0" rIns="0" bIns="0" rtlCol="0" anchor="ctr"/>
-          <a:lstStyle/>
-          <a:p>
-            <a:pPr algn="l" indent="0" marL="0">
-              <a:buNone/>
-            </a:pPr>
-            <a:r>
-              <a:rPr lang="en-US" sz="1250" dirty="0">
-                <a:solidFill>
-                  <a:srgbClr val="8B949E"/>
-                </a:solidFill>
-                <a:latin typeface="Hiragino Sans" pitchFamily="34" charset="0"/>
-                <a:ea typeface="Hiragino Sans" pitchFamily="34" charset="-122"/>
-                <a:cs typeface="Hiragino Sans" pitchFamily="34" charset="-120"/>
-              </a:rPr>
-              <a:t>× ボタンで消える</a:t>
-            </a:r>
-            <a:endParaRPr lang="en-US" sz="1250" dirty="0"/>
-          </a:p>
-        </p:txBody>
-      </p:sp>
-      <p:sp>
-        <p:nvSpPr>
-          <p:cNvPr id="24" name="Shape 22"/>
-          <p:cNvSpPr/>
-          <p:nvPr/>
-        </p:nvSpPr>
-        <p:spPr>
-          <a:xfrm>
-            <a:off x="6675120" y="4553712"/>
-            <a:ext cx="4846320" cy="749808"/>
-          </a:xfrm>
-          <a:prstGeom prst="roundRect">
-            <a:avLst>
-              <a:gd name="adj" fmla="val 9756"/>
-            </a:avLst>
-          </a:prstGeom>
-          <a:solidFill>
-            <a:srgbClr val="161B22"/>
-          </a:solidFill>
-          <a:ln w="12700">
-            <a:solidFill>
-              <a:srgbClr val="30363D"/>
-            </a:solidFill>
-            <a:prstDash val="solid"/>
-          </a:ln>
-          <a:effectLst>
-            <a:outerShdw sx="100000" sy="100000" kx="0" ky="0" algn="bl" rotWithShape="0" blurRad="127000" dist="38100" dir="5400000">
-              <a:srgbClr val="000000">
-                <a:alpha val="35000"/>
-              </a:srgbClr>
-            </a:outerShdw>
-          </a:effectLst>
-        </p:spPr>
-      </p:sp>
-      <p:sp>
-        <p:nvSpPr>
-          <p:cNvPr id="25" name="Shape 23"/>
-          <p:cNvSpPr/>
-          <p:nvPr/>
-        </p:nvSpPr>
-        <p:spPr>
-          <a:xfrm>
-            <a:off x="6675120" y="4553712"/>
-            <a:ext cx="82296" cy="749808"/>
-          </a:xfrm>
-          <a:prstGeom prst="rect">
-            <a:avLst/>
-          </a:prstGeom>
-          <a:solidFill>
-            <a:srgbClr val="F0883E"/>
-          </a:solidFill>
-          <a:ln/>
-        </p:spPr>
-      </p:sp>
-      <p:sp>
-        <p:nvSpPr>
-          <p:cNvPr id="26" name="Text 24"/>
-          <p:cNvSpPr/>
-          <p:nvPr/>
-        </p:nvSpPr>
-        <p:spPr>
-          <a:xfrm>
-            <a:off x="7040880" y="4645152"/>
-            <a:ext cx="4206240" cy="365760"/>
-          </a:xfrm>
-          <a:prstGeom prst="rect">
-            <a:avLst/>
-          </a:prstGeom>
-          <a:noFill/>
-          <a:ln/>
-        </p:spPr>
-        <p:txBody>
-          <a:bodyPr wrap="square" lIns="0" tIns="0" rIns="0" bIns="0" rtlCol="0" anchor="ctr"/>
-          <a:lstStyle/>
-          <a:p>
-            <a:pPr algn="l" indent="0" marL="0">
-              <a:buNone/>
-            </a:pPr>
-            <a:r>
-              <a:rPr lang="en-US" sz="1600" b="1" dirty="0">
-                <a:solidFill>
-                  <a:srgbClr val="E6EDF3"/>
-                </a:solidFill>
-                <a:latin typeface="Hiragino Sans" pitchFamily="34" charset="0"/>
-                <a:ea typeface="Hiragino Sans" pitchFamily="34" charset="-122"/>
-                <a:cs typeface="Hiragino Sans" pitchFamily="34" charset="-120"/>
-              </a:rPr>
-              <a:t>閉じても残る</a:t>
-            </a:r>
-            <a:endParaRPr lang="en-US" sz="1600" dirty="0"/>
-          </a:p>
-        </p:txBody>
-      </p:sp>
-      <p:sp>
-        <p:nvSpPr>
-          <p:cNvPr id="27" name="Text 25"/>
-          <p:cNvSpPr/>
-          <p:nvPr/>
-        </p:nvSpPr>
-        <p:spPr>
-          <a:xfrm>
-            <a:off x="7040880" y="4992624"/>
-            <a:ext cx="4206240" cy="292608"/>
-          </a:xfrm>
-          <a:prstGeom prst="rect">
-            <a:avLst/>
-          </a:prstGeom>
-          <a:noFill/>
-          <a:ln/>
-        </p:spPr>
-        <p:txBody>
-          <a:bodyPr wrap="square" lIns="0" tIns="0" rIns="0" bIns="0" rtlCol="0" anchor="ctr"/>
-          <a:lstStyle/>
-          <a:p>
-            <a:pPr algn="l" indent="0" marL="0">
-              <a:buNone/>
-            </a:pPr>
-            <a:r>
-              <a:rPr lang="en-US" sz="1250" dirty="0">
-                <a:solidFill>
-                  <a:srgbClr val="8B949E"/>
-                </a:solidFill>
-                <a:latin typeface="Hiragino Sans" pitchFamily="34" charset="0"/>
-                <a:ea typeface="Hiragino Sans" pitchFamily="34" charset="-122"/>
-                <a:cs typeface="Hiragino Sans" pitchFamily="34" charset="-120"/>
-              </a:rPr>
-              <a:t>localStorage に保存</a:t>
-            </a:r>
-            <a:endParaRPr lang="en-US" sz="1250" dirty="0"/>
-          </a:p>
-        </p:txBody>
-      </p:sp>
-      <p:sp>
-        <p:nvSpPr>
-          <p:cNvPr id="28" name="Text 26"/>
-          <p:cNvSpPr/>
-          <p:nvPr/>
-        </p:nvSpPr>
-        <p:spPr>
-          <a:xfrm>
-            <a:off x="6675120" y="5532120"/>
-            <a:ext cx="4846320" cy="274320"/>
-          </a:xfrm>
-          <a:prstGeom prst="rect">
-            <a:avLst/>
-          </a:prstGeom>
-          <a:noFill/>
-          <a:ln/>
-        </p:spPr>
-        <p:txBody>
-          <a:bodyPr wrap="square" lIns="0" tIns="0" rIns="0" bIns="0" rtlCol="0" anchor="ctr"/>
-          <a:lstStyle/>
-          <a:p>
-            <a:pPr algn="l" indent="0" marL="0">
-              <a:buNone/>
-            </a:pPr>
-            <a:r>
-              <a:rPr lang="en-US" sz="1250" dirty="0">
-                <a:solidFill>
-                  <a:srgbClr val="3FB950"/>
-                </a:solidFill>
-                <a:latin typeface="Hiragino Sans" pitchFamily="34" charset="0"/>
-                <a:ea typeface="Hiragino Sans" pitchFamily="34" charset="-122"/>
-                <a:cs typeface="Hiragino Sans" pitchFamily="34" charset="-120"/>
-              </a:rPr>
-              <a:t>どう分けるかも、まとめてエージェントが考えてくれます。</a:t>
-            </a:r>
-            <a:endParaRPr lang="en-US" sz="1250" dirty="0"/>
-          </a:p>
-        </p:txBody>
-      </p:sp>
-      <p:sp>
-        <p:nvSpPr>
-          <p:cNvPr id="29" name="Text 27"/>
+              <a:t>opencode で生成した実物</a:t>
+            </a:r>
+            <a:endParaRPr lang="en-US" sz="1100" dirty="0"/>
+          </a:p>
+        </p:txBody>
+      </p:sp>
+      <p:pic>
+        <p:nvPicPr>
+          <p:cNvPr id="28" name="Image 0" descr="/Users/ojii3/src/github.com/OJII3/opencode_openrouter_free_example/slides/assets/todo-hands-on-screenshot.png">    </p:cNvPr>
+          <p:cNvPicPr>
+            <a:picLocks noChangeAspect="1"/>
+          </p:cNvPicPr>
+          <p:nvPr/>
+        </p:nvPicPr>
+        <p:blipFill>
+          <a:blip r:embed="rId1"/>
+          <a:stretch>
+            <a:fillRect/>
+          </a:stretch>
+        </p:blipFill>
+        <p:spPr>
+          <a:xfrm>
+            <a:off x="5779008" y="2889504"/>
+            <a:ext cx="5577840" cy="2697480"/>
+          </a:xfrm>
+          <a:prstGeom prst="rect">
+            <a:avLst/>
+          </a:prstGeom>
+        </p:spPr>
+      </p:pic>
+      <p:sp>
+        <p:nvSpPr>
+          <p:cNvPr id="29" name="Text 26"/>
           <p:cNvSpPr/>
           <p:nvPr/>
         </p:nvSpPr>
@@ -12106,7 +11948,7 @@
       </p:sp>
       <p:sp>
         <p:nvSpPr>
-          <p:cNvPr id="30" name="Text 28"/>
+          <p:cNvPr id="30" name="Text 27"/>
           <p:cNvSpPr/>
           <p:nvPr/>
         </p:nvSpPr>
@@ -12286,7 +12128,7 @@
                 <a:ea typeface="Hiragino Sans" pitchFamily="34" charset="-122"/>
                 <a:cs typeface="Hiragino Sans" pitchFamily="34" charset="-120"/>
               </a:rPr>
-              <a:t>プロンプトはシンプルでいい</a:t>
+              <a:t>このプロンプトを貼る</a:t>
             </a:r>
             <a:endParaRPr lang="en-US" sz="2900" dirty="0"/>
           </a:p>
@@ -12294,57 +12136,18 @@
       </p:sp>
       <p:sp>
         <p:nvSpPr>
-          <p:cNvPr id="5" name="Text 3"/>
-          <p:cNvSpPr/>
-          <p:nvPr/>
-        </p:nvSpPr>
-        <p:spPr>
-          <a:xfrm>
-            <a:off x="640080" y="1783080"/>
-            <a:ext cx="10908792" cy="457200"/>
-          </a:xfrm>
-          <a:prstGeom prst="rect">
-            <a:avLst/>
-          </a:prstGeom>
-          <a:noFill/>
-          <a:ln/>
-        </p:spPr>
-        <p:txBody>
-          <a:bodyPr wrap="square" lIns="0" tIns="0" rIns="0" bIns="0" rtlCol="0" anchor="ctr"/>
-          <a:lstStyle/>
-          <a:p>
-            <a:pPr algn="l" indent="0" marL="0">
-              <a:buNone/>
-            </a:pPr>
-            <a:r>
-              <a:rPr lang="en-US" sz="1600" dirty="0">
-                <a:solidFill>
-                  <a:srgbClr val="C9D1D9"/>
-                </a:solidFill>
-                <a:latin typeface="Hiragino Sans" pitchFamily="34" charset="0"/>
-                <a:ea typeface="Hiragino Sans" pitchFamily="34" charset="-122"/>
-                <a:cs typeface="Hiragino Sans" pitchFamily="34" charset="-120"/>
-              </a:rPr>
-              <a:t>「作りたいもの」と「こうなってほしい」を伝えるだけ。作り方はエージェントが考えます。</a:t>
-            </a:r>
-            <a:endParaRPr lang="en-US" sz="1600" dirty="0"/>
-          </a:p>
-        </p:txBody>
-      </p:sp>
-      <p:sp>
-        <p:nvSpPr>
-          <p:cNvPr id="6" name="Shape 4"/>
-          <p:cNvSpPr/>
-          <p:nvPr/>
-        </p:nvSpPr>
-        <p:spPr>
-          <a:xfrm>
-            <a:off x="640080" y="2468880"/>
-            <a:ext cx="10908792" cy="2514600"/>
+          <p:cNvPr id="5" name="Shape 3"/>
+          <p:cNvSpPr/>
+          <p:nvPr/>
+        </p:nvSpPr>
+        <p:spPr>
+          <a:xfrm>
+            <a:off x="640080" y="1581912"/>
+            <a:ext cx="10908792" cy="4096512"/>
           </a:xfrm>
           <a:prstGeom prst="roundRect">
             <a:avLst>
-              <a:gd name="adj" fmla="val 2182"/>
+              <a:gd name="adj" fmla="val 1339"/>
             </a:avLst>
           </a:prstGeom>
           <a:solidFill>
@@ -12367,13 +12170,13 @@
       </p:sp>
       <p:sp>
         <p:nvSpPr>
-          <p:cNvPr id="7" name="Shape 5"/>
-          <p:cNvSpPr/>
-          <p:nvPr/>
-        </p:nvSpPr>
-        <p:spPr>
-          <a:xfrm>
-            <a:off x="649224" y="2478024"/>
+          <p:cNvPr id="6" name="Shape 4"/>
+          <p:cNvSpPr/>
+          <p:nvPr/>
+        </p:nvSpPr>
+        <p:spPr>
+          <a:xfrm>
+            <a:off x="649224" y="1591056"/>
             <a:ext cx="10890504" cy="347472"/>
           </a:xfrm>
           <a:prstGeom prst="rect">
@@ -12387,13 +12190,13 @@
       </p:sp>
       <p:sp>
         <p:nvSpPr>
-          <p:cNvPr id="8" name="Shape 6"/>
-          <p:cNvSpPr/>
-          <p:nvPr/>
-        </p:nvSpPr>
-        <p:spPr>
-          <a:xfrm>
-            <a:off x="804672" y="2592324"/>
+          <p:cNvPr id="7" name="Shape 5"/>
+          <p:cNvSpPr/>
+          <p:nvPr/>
+        </p:nvSpPr>
+        <p:spPr>
+          <a:xfrm>
+            <a:off x="804672" y="1705356"/>
             <a:ext cx="109728" cy="109728"/>
           </a:xfrm>
           <a:prstGeom prst="ellipse">
@@ -12407,13 +12210,13 @@
       </p:sp>
       <p:sp>
         <p:nvSpPr>
-          <p:cNvPr id="9" name="Shape 7"/>
-          <p:cNvSpPr/>
-          <p:nvPr/>
-        </p:nvSpPr>
-        <p:spPr>
-          <a:xfrm>
-            <a:off x="1005840" y="2592324"/>
+          <p:cNvPr id="8" name="Shape 6"/>
+          <p:cNvSpPr/>
+          <p:nvPr/>
+        </p:nvSpPr>
+        <p:spPr>
+          <a:xfrm>
+            <a:off x="1005840" y="1705356"/>
             <a:ext cx="109728" cy="109728"/>
           </a:xfrm>
           <a:prstGeom prst="ellipse">
@@ -12427,13 +12230,13 @@
       </p:sp>
       <p:sp>
         <p:nvSpPr>
-          <p:cNvPr id="10" name="Shape 8"/>
-          <p:cNvSpPr/>
-          <p:nvPr/>
-        </p:nvSpPr>
-        <p:spPr>
-          <a:xfrm>
-            <a:off x="1207008" y="2592324"/>
+          <p:cNvPr id="9" name="Shape 7"/>
+          <p:cNvSpPr/>
+          <p:nvPr/>
+        </p:nvSpPr>
+        <p:spPr>
+          <a:xfrm>
+            <a:off x="1207008" y="1705356"/>
             <a:ext cx="109728" cy="109728"/>
           </a:xfrm>
           <a:prstGeom prst="ellipse">
@@ -12447,13 +12250,13 @@
       </p:sp>
       <p:sp>
         <p:nvSpPr>
-          <p:cNvPr id="11" name="Text 9"/>
-          <p:cNvSpPr/>
-          <p:nvPr/>
-        </p:nvSpPr>
-        <p:spPr>
-          <a:xfrm>
-            <a:off x="1463040" y="2478024"/>
+          <p:cNvPr id="10" name="Text 8"/>
+          <p:cNvSpPr/>
+          <p:nvPr/>
+        </p:nvSpPr>
+        <p:spPr>
+          <a:xfrm>
+            <a:off x="1463040" y="1591056"/>
             <a:ext cx="9811512" cy="347472"/>
           </a:xfrm>
           <a:prstGeom prst="rect">
@@ -12486,14 +12289,14 @@
       </p:sp>
       <p:sp>
         <p:nvSpPr>
-          <p:cNvPr id="12" name="Text 10"/>
-          <p:cNvSpPr/>
-          <p:nvPr/>
-        </p:nvSpPr>
-        <p:spPr>
-          <a:xfrm>
-            <a:off x="896112" y="2926080"/>
-            <a:ext cx="10451592" cy="1947672"/>
+          <p:cNvPr id="11" name="Text 9"/>
+          <p:cNvSpPr/>
+          <p:nvPr/>
+        </p:nvSpPr>
+        <p:spPr>
+          <a:xfrm>
+            <a:off x="896112" y="2039112"/>
+            <a:ext cx="10451592" cy="3529584"/>
           </a:xfrm>
           <a:prstGeom prst="rect">
             <a:avLst/>
@@ -12512,7 +12315,7 @@
               <a:buNone/>
             </a:pPr>
             <a:r>
-              <a:rPr lang="en-US" sz="1500" dirty="0">
+              <a:rPr lang="en-US" sz="1000" dirty="0">
                 <a:solidFill>
                   <a:srgbClr val="E6EDF3"/>
                 </a:solidFill>
@@ -12520,9 +12323,9 @@
                 <a:ea typeface="Menlo" pitchFamily="34" charset="-122"/>
                 <a:cs typeface="Menlo" pitchFamily="34" charset="-120"/>
               </a:rPr>
-              <a:t>ToDoアプリを作って。</a:t>
-            </a:r>
-            <a:endParaRPr lang="en-US" sz="1500" dirty="0"/>
+              <a:t>ブラウザで動くミニToDoアプリを作ってください。</a:t>
+            </a:r>
+            <a:endParaRPr lang="en-US" sz="1000" dirty="0"/>
           </a:p>
           <a:p>
             <a:pPr algn="l" indent="0" marL="0">
@@ -12532,7 +12335,7 @@
               <a:buNone/>
             </a:pPr>
             <a:r>
-              <a:rPr lang="en-US" sz="1500" dirty="0">
+              <a:rPr lang="en-US" sz="1000" dirty="0">
                 <a:solidFill>
                   <a:srgbClr val="C9D1D9"/>
                 </a:solidFill>
@@ -12540,9 +12343,9 @@
                 <a:ea typeface="Menlo" pitchFamily="34" charset="-122"/>
                 <a:cs typeface="Menlo" pitchFamily="34" charset="-120"/>
               </a:rPr>
-              <a:t>・タスクの追加・完了チェック・削除ができる</a:t>
-            </a:r>
-            <a:endParaRPr lang="en-US" sz="1500" dirty="0"/>
+              <a:t>- タスクの追加、完了切り替え、削除ができる</a:t>
+            </a:r>
+            <a:endParaRPr lang="en-US" sz="1000" dirty="0"/>
           </a:p>
           <a:p>
             <a:pPr algn="l" indent="0" marL="0">
@@ -12552,7 +12355,7 @@
               <a:buNone/>
             </a:pPr>
             <a:r>
-              <a:rPr lang="en-US" sz="1500" dirty="0">
+              <a:rPr lang="en-US" sz="1000" dirty="0">
                 <a:solidFill>
                   <a:srgbClr val="C9D1D9"/>
                 </a:solidFill>
@@ -12560,9 +12363,9 @@
                 <a:ea typeface="Menlo" pitchFamily="34" charset="-122"/>
                 <a:cs typeface="Menlo" pitchFamily="34" charset="-120"/>
               </a:rPr>
-              <a:t>・閉じても内容が残るようにする</a:t>
-            </a:r>
-            <a:endParaRPr lang="en-US" sz="1500" dirty="0"/>
+              <a:t>- 残り件数と完了件数を表示する</a:t>
+            </a:r>
+            <a:endParaRPr lang="en-US" sz="1000" dirty="0"/>
           </a:p>
           <a:p>
             <a:pPr algn="l" indent="0" marL="0">
@@ -12572,7 +12375,7 @@
               <a:buNone/>
             </a:pPr>
             <a:r>
-              <a:rPr lang="en-US" sz="1500" dirty="0">
+              <a:rPr lang="en-US" sz="1000" dirty="0">
                 <a:solidFill>
                   <a:srgbClr val="C9D1D9"/>
                 </a:solidFill>
@@ -12580,9 +12383,9 @@
                 <a:ea typeface="Menlo" pitchFamily="34" charset="-122"/>
                 <a:cs typeface="Menlo" pitchFamily="34" charset="-120"/>
               </a:rPr>
-              <a:t>・コードは役割ごとに複数のファイルに分ける</a:t>
-            </a:r>
-            <a:endParaRPr lang="en-US" sz="1500" dirty="0"/>
+              <a:t>- localStorage に保存し、再読み込み後も残る</a:t>
+            </a:r>
+            <a:endParaRPr lang="en-US" sz="1000" dirty="0"/>
           </a:p>
           <a:p>
             <a:pPr algn="l" indent="0" marL="0">
@@ -12592,7 +12395,7 @@
               <a:buNone/>
             </a:pPr>
             <a:r>
-              <a:rPr lang="en-US" sz="1500" dirty="0">
+              <a:rPr lang="en-US" sz="1000" dirty="0">
                 <a:solidFill>
                   <a:srgbClr val="C9D1D9"/>
                 </a:solidFill>
@@ -12600,26 +12403,226 @@
                 <a:ea typeface="Menlo" pitchFamily="34" charset="-122"/>
                 <a:cs typeface="Menlo" pitchFamily="34" charset="-120"/>
               </a:rPr>
-              <a:t>・見た目もシンプルに整える</a:t>
-            </a:r>
-            <a:endParaRPr lang="en-US" sz="1500" dirty="0"/>
-          </a:p>
-        </p:txBody>
-      </p:sp>
-      <p:sp>
-        <p:nvSpPr>
-          <p:cNvPr id="13" name="Shape 11"/>
-          <p:cNvSpPr/>
-          <p:nvPr/>
-        </p:nvSpPr>
-        <p:spPr>
-          <a:xfrm>
-            <a:off x="640080" y="5166360"/>
-            <a:ext cx="10908792" cy="868680"/>
+              <a:t>- 初回表示時はサンプルタスクを3件入れる</a:t>
+            </a:r>
+            <a:endParaRPr lang="en-US" sz="1000" dirty="0"/>
+          </a:p>
+          <a:p>
+            <a:pPr algn="l" indent="0" marL="0">
+              <a:lnSpc>
+                <a:spcPct val="125000"/>
+              </a:lnSpc>
+              <a:buNone/>
+            </a:pPr>
+            <a:r>
+              <a:rPr lang="en-US" sz="1000" dirty="0">
+                <a:solidFill>
+                  <a:srgbClr val="C9D1D9"/>
+                </a:solidFill>
+                <a:latin typeface="Menlo" pitchFamily="34" charset="0"/>
+                <a:ea typeface="Menlo" pitchFamily="34" charset="-122"/>
+                <a:cs typeface="Menlo" pitchFamily="34" charset="-120"/>
+              </a:rPr>
+              <a:t>- スマホでもPCでも見やすいカード風の見た目</a:t>
+            </a:r>
+            <a:endParaRPr lang="en-US" sz="1000" dirty="0"/>
+          </a:p>
+          <a:p>
+            <a:pPr algn="l" indent="0" marL="0">
+              <a:lnSpc>
+                <a:spcPct val="125000"/>
+              </a:lnSpc>
+              <a:buNone/>
+            </a:pPr>
+            <a:r>
+              <a:rPr lang="en-US" sz="1000" dirty="0">
+                <a:solidFill>
+                  <a:srgbClr val="C9D1D9"/>
+                </a:solidFill>
+                <a:latin typeface="Menlo" pitchFamily="34" charset="0"/>
+                <a:ea typeface="Menlo" pitchFamily="34" charset="-122"/>
+                <a:cs typeface="Menlo" pitchFamily="34" charset="-120"/>
+              </a:rPr>
+              <a:t> </a:t>
+            </a:r>
+            <a:endParaRPr lang="en-US" sz="1000" dirty="0"/>
+          </a:p>
+          <a:p>
+            <a:pPr algn="l" indent="0" marL="0">
+              <a:lnSpc>
+                <a:spcPct val="125000"/>
+              </a:lnSpc>
+              <a:buNone/>
+            </a:pPr>
+            <a:r>
+              <a:rPr lang="en-US" sz="1000" dirty="0">
+                <a:solidFill>
+                  <a:srgbClr val="F0883E"/>
+                </a:solidFill>
+                <a:latin typeface="Menlo" pitchFamily="34" charset="0"/>
+                <a:ea typeface="Menlo" pitchFamily="34" charset="-122"/>
+                <a:cs typeface="Menlo" pitchFamily="34" charset="-120"/>
+              </a:rPr>
+              <a:t>実装条件:</a:t>
+            </a:r>
+            <a:endParaRPr lang="en-US" sz="1000" dirty="0"/>
+          </a:p>
+          <a:p>
+            <a:pPr algn="l" indent="0" marL="0">
+              <a:lnSpc>
+                <a:spcPct val="125000"/>
+              </a:lnSpc>
+              <a:buNone/>
+            </a:pPr>
+            <a:r>
+              <a:rPr lang="en-US" sz="1000" dirty="0">
+                <a:solidFill>
+                  <a:srgbClr val="C9D1D9"/>
+                </a:solidFill>
+                <a:latin typeface="Menlo" pitchFamily="34" charset="0"/>
+                <a:ea typeface="Menlo" pitchFamily="34" charset="-122"/>
+                <a:cs typeface="Menlo" pitchFamily="34" charset="-120"/>
+              </a:rPr>
+              <a:t>- HTML / CSS / JavaScript を役割ごとに分ける</a:t>
+            </a:r>
+            <a:endParaRPr lang="en-US" sz="1000" dirty="0"/>
+          </a:p>
+          <a:p>
+            <a:pPr algn="l" indent="0" marL="0">
+              <a:lnSpc>
+                <a:spcPct val="125000"/>
+              </a:lnSpc>
+              <a:buNone/>
+            </a:pPr>
+            <a:r>
+              <a:rPr lang="en-US" sz="1000" dirty="0">
+                <a:solidFill>
+                  <a:srgbClr val="C9D1D9"/>
+                </a:solidFill>
+                <a:latin typeface="Menlo" pitchFamily="34" charset="0"/>
+                <a:ea typeface="Menlo" pitchFamily="34" charset="-122"/>
+                <a:cs typeface="Menlo" pitchFamily="34" charset="-120"/>
+              </a:rPr>
+              <a:t>- 作ったファイルと確認手順を最後に教える</a:t>
+            </a:r>
+            <a:endParaRPr lang="en-US" sz="1000" dirty="0"/>
+          </a:p>
+          <a:p>
+            <a:pPr algn="l" indent="0" marL="0">
+              <a:lnSpc>
+                <a:spcPct val="125000"/>
+              </a:lnSpc>
+              <a:buNone/>
+            </a:pPr>
+            <a:r>
+              <a:rPr lang="en-US" sz="1000" dirty="0">
+                <a:solidFill>
+                  <a:srgbClr val="C9D1D9"/>
+                </a:solidFill>
+                <a:latin typeface="Menlo" pitchFamily="34" charset="0"/>
+                <a:ea typeface="Menlo" pitchFamily="34" charset="-122"/>
+                <a:cs typeface="Menlo" pitchFamily="34" charset="-120"/>
+              </a:rPr>
+              <a:t> </a:t>
+            </a:r>
+            <a:endParaRPr lang="en-US" sz="1000" dirty="0"/>
+          </a:p>
+          <a:p>
+            <a:pPr algn="l" indent="0" marL="0">
+              <a:lnSpc>
+                <a:spcPct val="125000"/>
+              </a:lnSpc>
+              <a:buNone/>
+            </a:pPr>
+            <a:r>
+              <a:rPr lang="en-US" sz="1000" dirty="0">
+                <a:solidFill>
+                  <a:srgbClr val="F0883E"/>
+                </a:solidFill>
+                <a:latin typeface="Menlo" pitchFamily="34" charset="0"/>
+                <a:ea typeface="Menlo" pitchFamily="34" charset="-122"/>
+                <a:cs typeface="Menlo" pitchFamily="34" charset="-120"/>
+              </a:rPr>
+              <a:t>確認すること:</a:t>
+            </a:r>
+            <a:endParaRPr lang="en-US" sz="1000" dirty="0"/>
+          </a:p>
+          <a:p>
+            <a:pPr algn="l" indent="0" marL="0">
+              <a:lnSpc>
+                <a:spcPct val="125000"/>
+              </a:lnSpc>
+              <a:buNone/>
+            </a:pPr>
+            <a:r>
+              <a:rPr lang="en-US" sz="1000" dirty="0">
+                <a:solidFill>
+                  <a:srgbClr val="C9D1D9"/>
+                </a:solidFill>
+                <a:latin typeface="Menlo" pitchFamily="34" charset="0"/>
+                <a:ea typeface="Menlo" pitchFamily="34" charset="-122"/>
+                <a:cs typeface="Menlo" pitchFamily="34" charset="-120"/>
+              </a:rPr>
+              <a:t>- 追加・完了切り替え・削除・再読み込み後の保存</a:t>
+            </a:r>
+            <a:endParaRPr lang="en-US" sz="1000" dirty="0"/>
+          </a:p>
+          <a:p>
+            <a:pPr algn="l" indent="0" marL="0">
+              <a:lnSpc>
+                <a:spcPct val="125000"/>
+              </a:lnSpc>
+              <a:buNone/>
+            </a:pPr>
+            <a:r>
+              <a:rPr lang="en-US" sz="1000" dirty="0">
+                <a:solidFill>
+                  <a:srgbClr val="3FB950"/>
+                </a:solidFill>
+                <a:latin typeface="Menlo" pitchFamily="34" charset="0"/>
+                <a:ea typeface="Menlo" pitchFamily="34" charset="-122"/>
+                <a:cs typeface="Menlo" pitchFamily="34" charset="-120"/>
+              </a:rPr>
+              <a:t>python3 -m http.server 8000 で起動して確認し、</a:t>
+            </a:r>
+            <a:endParaRPr lang="en-US" sz="1000" dirty="0"/>
+          </a:p>
+          <a:p>
+            <a:pPr algn="l" indent="0" marL="0">
+              <a:lnSpc>
+                <a:spcPct val="125000"/>
+              </a:lnSpc>
+              <a:buNone/>
+            </a:pPr>
+            <a:r>
+              <a:rPr lang="en-US" sz="1000" dirty="0">
+                <a:solidFill>
+                  <a:srgbClr val="3FB950"/>
+                </a:solidFill>
+                <a:latin typeface="Menlo" pitchFamily="34" charset="0"/>
+                <a:ea typeface="Menlo" pitchFamily="34" charset="-122"/>
+                <a:cs typeface="Menlo" pitchFamily="34" charset="-120"/>
+              </a:rPr>
+              <a:t>問題があれば修正してください。</a:t>
+            </a:r>
+            <a:endParaRPr lang="en-US" sz="1000" dirty="0"/>
+          </a:p>
+        </p:txBody>
+      </p:sp>
+      <p:sp>
+        <p:nvSpPr>
+          <p:cNvPr id="12" name="Shape 10"/>
+          <p:cNvSpPr/>
+          <p:nvPr/>
+        </p:nvSpPr>
+        <p:spPr>
+          <a:xfrm>
+            <a:off x="640080" y="5760720"/>
+            <a:ext cx="10908792" cy="411480"/>
           </a:xfrm>
           <a:prstGeom prst="roundRect">
             <a:avLst>
-              <a:gd name="adj" fmla="val 8421"/>
+              <a:gd name="adj" fmla="val 17778"/>
             </a:avLst>
           </a:prstGeom>
           <a:solidFill>
@@ -12642,14 +12645,14 @@
       </p:sp>
       <p:sp>
         <p:nvSpPr>
-          <p:cNvPr id="14" name="Shape 12"/>
-          <p:cNvSpPr/>
-          <p:nvPr/>
-        </p:nvSpPr>
-        <p:spPr>
-          <a:xfrm>
-            <a:off x="640080" y="5166360"/>
-            <a:ext cx="82296" cy="868680"/>
+          <p:cNvPr id="13" name="Shape 11"/>
+          <p:cNvSpPr/>
+          <p:nvPr/>
+        </p:nvSpPr>
+        <p:spPr>
+          <a:xfrm>
+            <a:off x="640080" y="5760720"/>
+            <a:ext cx="82296" cy="411480"/>
           </a:xfrm>
           <a:prstGeom prst="rect">
             <a:avLst/>
@@ -12662,60 +12665,60 @@
       </p:sp>
       <p:sp>
         <p:nvSpPr>
+          <p:cNvPr id="14" name="Text 12"/>
+          <p:cNvSpPr/>
+          <p:nvPr/>
+        </p:nvSpPr>
+        <p:spPr>
+          <a:xfrm>
+            <a:off x="1005840" y="5760720"/>
+            <a:ext cx="10268712" cy="411480"/>
+          </a:xfrm>
+          <a:prstGeom prst="rect">
+            <a:avLst/>
+          </a:prstGeom>
+          <a:noFill/>
+          <a:ln/>
+        </p:spPr>
+        <p:txBody>
+          <a:bodyPr wrap="square" lIns="0" tIns="0" rIns="0" bIns="0" rtlCol="0" anchor="ctr"/>
+          <a:lstStyle/>
+          <a:p>
+            <a:pPr algn="l" indent="0" marL="0">
+              <a:buNone/>
+            </a:pPr>
+            <a:r>
+              <a:rPr lang="en-US" sz="1300" b="1" dirty="0">
+                <a:solidFill>
+                  <a:srgbClr val="E6EDF3"/>
+                </a:solidFill>
+                <a:latin typeface="Hiragino Sans" pitchFamily="34" charset="0"/>
+                <a:ea typeface="Hiragino Sans" pitchFamily="34" charset="-122"/>
+                <a:cs typeface="Hiragino Sans" pitchFamily="34" charset="-120"/>
+              </a:rPr>
+              <a:t>ポイント：</a:t>
+            </a:r>
+            <a:pPr algn="l" indent="0" marL="0">
+              <a:buNone/>
+            </a:pPr>
+            <a:r>
+              <a:rPr lang="en-US" sz="1300" dirty="0">
+                <a:solidFill>
+                  <a:srgbClr val="C9D1D9"/>
+                </a:solidFill>
+                <a:latin typeface="Hiragino Sans" pitchFamily="34" charset="0"/>
+                <a:ea typeface="Hiragino Sans" pitchFamily="34" charset="-122"/>
+                <a:cs typeface="Hiragino Sans" pitchFamily="34" charset="-120"/>
+              </a:rPr>
+              <a:t> 完成条件まで書くと無料モデルでも安定。役割と成功条件を渡す。</a:t>
+            </a:r>
+            <a:endParaRPr lang="en-US" sz="1300" dirty="0"/>
+          </a:p>
+        </p:txBody>
+      </p:sp>
+      <p:sp>
+        <p:nvSpPr>
           <p:cNvPr id="15" name="Text 13"/>
-          <p:cNvSpPr/>
-          <p:nvPr/>
-        </p:nvSpPr>
-        <p:spPr>
-          <a:xfrm>
-            <a:off x="1005840" y="5166360"/>
-            <a:ext cx="10268712" cy="868680"/>
-          </a:xfrm>
-          <a:prstGeom prst="rect">
-            <a:avLst/>
-          </a:prstGeom>
-          <a:noFill/>
-          <a:ln/>
-        </p:spPr>
-        <p:txBody>
-          <a:bodyPr wrap="square" lIns="0" tIns="0" rIns="0" bIns="0" rtlCol="0" anchor="ctr"/>
-          <a:lstStyle/>
-          <a:p>
-            <a:pPr algn="l" indent="0" marL="0">
-              <a:buNone/>
-            </a:pPr>
-            <a:r>
-              <a:rPr lang="en-US" sz="1500" b="1" dirty="0">
-                <a:solidFill>
-                  <a:srgbClr val="E6EDF3"/>
-                </a:solidFill>
-                <a:latin typeface="Hiragino Sans" pitchFamily="34" charset="0"/>
-                <a:ea typeface="Hiragino Sans" pitchFamily="34" charset="-122"/>
-                <a:cs typeface="Hiragino Sans" pitchFamily="34" charset="-120"/>
-              </a:rPr>
-              <a:t>ファイル名や分け方までは指定しなくてOK。</a:t>
-            </a:r>
-            <a:pPr algn="l" indent="0" marL="0">
-              <a:buNone/>
-            </a:pPr>
-            <a:r>
-              <a:rPr lang="en-US" sz="1500" dirty="0">
-                <a:solidFill>
-                  <a:srgbClr val="C9D1D9"/>
-                </a:solidFill>
-                <a:latin typeface="Hiragino Sans" pitchFamily="34" charset="0"/>
-                <a:ea typeface="Hiragino Sans" pitchFamily="34" charset="-122"/>
-                <a:cs typeface="Hiragino Sans" pitchFamily="34" charset="-120"/>
-              </a:rPr>
-              <a:t> どう作るかはエージェントが判断します。</a:t>
-            </a:r>
-            <a:endParaRPr lang="en-US" sz="1500" dirty="0"/>
-          </a:p>
-        </p:txBody>
-      </p:sp>
-      <p:sp>
-        <p:nvSpPr>
-          <p:cNvPr id="16" name="Text 14"/>
           <p:cNvSpPr/>
           <p:nvPr/>
         </p:nvSpPr>
@@ -12768,7 +12771,7 @@
       </p:sp>
       <p:sp>
         <p:nvSpPr>
-          <p:cNvPr id="17" name="Text 15"/>
+          <p:cNvPr id="16" name="Text 14"/>
           <p:cNvSpPr/>
           <p:nvPr/>
         </p:nvSpPr>
@@ -13726,16 +13729,16 @@
         <p:spPr>
           <a:xfrm>
             <a:off x="640080" y="1645920"/>
-            <a:ext cx="5486400" cy="822960"/>
-          </a:xfrm>
-          <a:prstGeom prst="rect">
-            <a:avLst/>
-          </a:prstGeom>
-          <a:noFill/>
-          <a:ln/>
-        </p:spPr>
-        <p:txBody>
-          <a:bodyPr wrap="square" lIns="0" tIns="0" rIns="0" bIns="0" rtlCol="0" anchor="t"/>
+            <a:ext cx="5486400" cy="502920"/>
+          </a:xfrm>
+          <a:prstGeom prst="rect">
+            <a:avLst/>
+          </a:prstGeom>
+          <a:noFill/>
+          <a:ln/>
+        </p:spPr>
+        <p:txBody>
+          <a:bodyPr wrap="square" lIns="0" tIns="0" rIns="0" bIns="0" rtlCol="0" anchor="ctr"/>
           <a:lstStyle/>
           <a:p>
             <a:pPr algn="l" indent="0" marL="0">
@@ -13753,27 +13756,7 @@
                 <a:ea typeface="Hiragino Sans" pitchFamily="34" charset="-122"/>
                 <a:cs typeface="Hiragino Sans" pitchFamily="34" charset="-120"/>
               </a:rPr>
-              <a:t>分割したコードは “ローカルサーバー” で開きます。</a:t>
-            </a:r>
-            <a:endParaRPr lang="en-US" sz="1500" dirty="0"/>
-          </a:p>
-          <a:p>
-            <a:pPr algn="l" indent="0" marL="0">
-              <a:lnSpc>
-                <a:spcPct val="130000"/>
-              </a:lnSpc>
-              <a:buNone/>
-            </a:pPr>
-            <a:r>
-              <a:rPr lang="en-US" sz="1500" dirty="0">
-                <a:solidFill>
-                  <a:srgbClr val="C9D1D9"/>
-                </a:solidFill>
-                <a:latin typeface="Hiragino Sans" pitchFamily="34" charset="0"/>
-                <a:ea typeface="Hiragino Sans" pitchFamily="34" charset="-122"/>
-                <a:cs typeface="Hiragino Sans" pitchFamily="34" charset="-120"/>
-              </a:rPr>
-              <a:t>（ダブルクリックでは動きません）</a:t>
+              <a:t>生成された index.html をブラウザで開いて、実際に操作します。</a:t>
             </a:r>
             <a:endParaRPr lang="en-US" sz="1500" dirty="0"/>
           </a:p>
@@ -14164,7 +14147,7 @@
                 <a:ea typeface="Hiragino Sans" pitchFamily="34" charset="-122"/>
                 <a:cs typeface="Hiragino Sans" pitchFamily="34" charset="-120"/>
               </a:rPr>
-              <a:t>「このフォルダをローカルサーバーで開いて」と言えば、起動まで任せられます。</a:t>
+              <a:t>「このフォルダをブラウザで開いて確認して」と言えば、確認まで任せられます。</a:t>
             </a:r>
             <a:endParaRPr lang="en-US" sz="1350" dirty="0"/>
           </a:p>
@@ -16027,7 +16010,7 @@
                 <a:ea typeface="Menlo" pitchFamily="34" charset="-122"/>
                 <a:cs typeface="Menlo" pitchFamily="34" charset="-120"/>
               </a:rPr>
-              <a:t>- アプリは複数ファイルに分けて作る</a:t>
+              <a:t>- 小さく動くものから作る</a:t>
             </a:r>
             <a:endParaRPr lang="en-US" sz="1300" dirty="0"/>
           </a:p>
@@ -16047,7 +16030,7 @@
                 <a:ea typeface="Menlo" pitchFamily="34" charset="-122"/>
                 <a:cs typeface="Menlo" pitchFamily="34" charset="-120"/>
               </a:rPr>
-              <a:t>- 凝った依存は入れない</a:t>
+              <a:t>- まずブラウザで動作確認する</a:t>
             </a:r>
             <a:endParaRPr lang="en-US" sz="1300" dirty="0"/>
           </a:p>
@@ -17495,7 +17478,7 @@
                 <a:ea typeface="Hiragino Sans" pitchFamily="34" charset="-122"/>
                 <a:cs typeface="Hiragino Sans" pitchFamily="34" charset="-120"/>
               </a:rPr>
-              <a:t>複数ファイルの ToDo アプリを作らせた</a:t>
+              <a:t>ToDo ミニアプリを作らせて確認した</a:t>
             </a:r>
             <a:endParaRPr lang="en-US" sz="1800" dirty="0"/>
           </a:p>

--- a/slides/seminar.pptx
+++ b/slides/seminar.pptx
@@ -3129,9 +3129,9 @@
                 <a:solidFill>
                   <a:srgbClr val="21262D"/>
                 </a:solidFill>
-                <a:latin typeface="Menlo" pitchFamily="34" charset="0"/>
-                <a:ea typeface="Menlo" pitchFamily="34" charset="-122"/>
-                <a:cs typeface="Menlo" pitchFamily="34" charset="-120"/>
+                <a:latin typeface="Consolas" pitchFamily="34" charset="0"/>
+                <a:ea typeface="Consolas" pitchFamily="34" charset="-122"/>
+                <a:cs typeface="Consolas" pitchFamily="34" charset="-120"/>
               </a:rPr>
               <a:t>$ _</a:t>
             </a:r>
@@ -3168,9 +3168,9 @@
                 <a:solidFill>
                   <a:srgbClr val="3FB950"/>
                 </a:solidFill>
-                <a:latin typeface="Menlo" pitchFamily="34" charset="0"/>
-                <a:ea typeface="Menlo" pitchFamily="34" charset="-122"/>
-                <a:cs typeface="Menlo" pitchFamily="34" charset="-120"/>
+                <a:latin typeface="Consolas" pitchFamily="34" charset="0"/>
+                <a:ea typeface="Consolas" pitchFamily="34" charset="-122"/>
+                <a:cs typeface="Consolas" pitchFamily="34" charset="-120"/>
               </a:rPr>
               <a:t>HANDS-ON SEMINAR</a:t>
             </a:r>
@@ -3210,9 +3210,9 @@
                 <a:solidFill>
                   <a:srgbClr val="E6EDF3"/>
                 </a:solidFill>
-                <a:latin typeface="Hiragino Sans" pitchFamily="34" charset="0"/>
-                <a:ea typeface="Hiragino Sans" pitchFamily="34" charset="-122"/>
-                <a:cs typeface="Hiragino Sans" pitchFamily="34" charset="-120"/>
+                <a:latin typeface="Yu Gothic" pitchFamily="34" charset="0"/>
+                <a:ea typeface="Yu Gothic" pitchFamily="34" charset="-122"/>
+                <a:cs typeface="Yu Gothic" pitchFamily="34" charset="-120"/>
               </a:rPr>
               <a:t>コーディングエージェント</a:t>
             </a:r>
@@ -3230,9 +3230,9 @@
                 <a:solidFill>
                   <a:srgbClr val="E6EDF3"/>
                 </a:solidFill>
-                <a:latin typeface="Hiragino Sans" pitchFamily="34" charset="0"/>
-                <a:ea typeface="Hiragino Sans" pitchFamily="34" charset="-122"/>
-                <a:cs typeface="Hiragino Sans" pitchFamily="34" charset="-120"/>
+                <a:latin typeface="Yu Gothic" pitchFamily="34" charset="0"/>
+                <a:ea typeface="Yu Gothic" pitchFamily="34" charset="-122"/>
+                <a:cs typeface="Yu Gothic" pitchFamily="34" charset="-120"/>
               </a:rPr>
               <a:t>入門</a:t>
             </a:r>
@@ -3269,9 +3269,9 @@
                 <a:solidFill>
                   <a:srgbClr val="C9D1D9"/>
                 </a:solidFill>
-                <a:latin typeface="Hiragino Sans" pitchFamily="34" charset="0"/>
-                <a:ea typeface="Hiragino Sans" pitchFamily="34" charset="-122"/>
-                <a:cs typeface="Hiragino Sans" pitchFamily="34" charset="-120"/>
+                <a:latin typeface="Yu Gothic" pitchFamily="34" charset="0"/>
+                <a:ea typeface="Yu Gothic" pitchFamily="34" charset="-122"/>
+                <a:cs typeface="Yu Gothic" pitchFamily="34" charset="-120"/>
               </a:rPr>
               <a:t>“あなたのPCで動くAI” を、</a:t>
             </a:r>
@@ -3283,9 +3283,9 @@
                 <a:solidFill>
                   <a:srgbClr val="3FB950"/>
                 </a:solidFill>
-                <a:latin typeface="Hiragino Sans" pitchFamily="34" charset="0"/>
-                <a:ea typeface="Hiragino Sans" pitchFamily="34" charset="-122"/>
-                <a:cs typeface="Hiragino Sans" pitchFamily="34" charset="-120"/>
+                <a:latin typeface="Yu Gothic" pitchFamily="34" charset="0"/>
+                <a:ea typeface="Yu Gothic" pitchFamily="34" charset="-122"/>
+                <a:cs typeface="Yu Gothic" pitchFamily="34" charset="-120"/>
               </a:rPr>
               <a:t>無料</a:t>
             </a:r>
@@ -3297,9 +3297,9 @@
                 <a:solidFill>
                   <a:srgbClr val="C9D1D9"/>
                 </a:solidFill>
-                <a:latin typeface="Hiragino Sans" pitchFamily="34" charset="0"/>
-                <a:ea typeface="Hiragino Sans" pitchFamily="34" charset="-122"/>
-                <a:cs typeface="Hiragino Sans" pitchFamily="34" charset="-120"/>
+                <a:latin typeface="Yu Gothic" pitchFamily="34" charset="0"/>
+                <a:ea typeface="Yu Gothic" pitchFamily="34" charset="-122"/>
+                <a:cs typeface="Yu Gothic" pitchFamily="34" charset="-120"/>
               </a:rPr>
               <a:t>で体験する</a:t>
             </a:r>
@@ -3450,9 +3450,9 @@
                 <a:solidFill>
                   <a:srgbClr val="8B949E"/>
                 </a:solidFill>
-                <a:latin typeface="Menlo" pitchFamily="34" charset="0"/>
-                <a:ea typeface="Menlo" pitchFamily="34" charset="-122"/>
-                <a:cs typeface="Menlo" pitchFamily="34" charset="-120"/>
+                <a:latin typeface="Consolas" pitchFamily="34" charset="0"/>
+                <a:ea typeface="Consolas" pitchFamily="34" charset="-122"/>
+                <a:cs typeface="Consolas" pitchFamily="34" charset="-120"/>
               </a:rPr>
               <a:t>今日やること</a:t>
             </a:r>
@@ -3492,9 +3492,9 @@
                 <a:solidFill>
                   <a:srgbClr val="3FB950"/>
                 </a:solidFill>
-                <a:latin typeface="Menlo" pitchFamily="34" charset="0"/>
-                <a:ea typeface="Menlo" pitchFamily="34" charset="-122"/>
-                <a:cs typeface="Menlo" pitchFamily="34" charset="-120"/>
+                <a:latin typeface="Consolas" pitchFamily="34" charset="0"/>
+                <a:ea typeface="Consolas" pitchFamily="34" charset="-122"/>
+                <a:cs typeface="Consolas" pitchFamily="34" charset="-120"/>
               </a:rPr>
               <a:t>$ opencode</a:t>
             </a:r>
@@ -3512,9 +3512,9 @@
                 <a:solidFill>
                   <a:srgbClr val="58A6FF"/>
                 </a:solidFill>
-                <a:latin typeface="Menlo" pitchFamily="34" charset="0"/>
-                <a:ea typeface="Menlo" pitchFamily="34" charset="-122"/>
-                <a:cs typeface="Menlo" pitchFamily="34" charset="-120"/>
+                <a:latin typeface="Consolas" pitchFamily="34" charset="0"/>
+                <a:ea typeface="Consolas" pitchFamily="34" charset="-122"/>
+                <a:cs typeface="Consolas" pitchFamily="34" charset="-120"/>
               </a:rPr>
               <a:t>&gt; ToDoアプリを作って</a:t>
             </a:r>
@@ -3532,9 +3532,9 @@
                 <a:solidFill>
                   <a:srgbClr val="8B949E"/>
                 </a:solidFill>
-                <a:latin typeface="Menlo" pitchFamily="34" charset="0"/>
-                <a:ea typeface="Menlo" pitchFamily="34" charset="-122"/>
-                <a:cs typeface="Menlo" pitchFamily="34" charset="-120"/>
+                <a:latin typeface="Consolas" pitchFamily="34" charset="0"/>
+                <a:ea typeface="Consolas" pitchFamily="34" charset="-122"/>
+                <a:cs typeface="Consolas" pitchFamily="34" charset="-120"/>
               </a:rPr>
               <a:t>  作成中: index.html …</a:t>
             </a:r>
@@ -3571,9 +3571,9 @@
                 <a:solidFill>
                   <a:srgbClr val="8B949E"/>
                 </a:solidFill>
-                <a:latin typeface="Hiragino Sans" pitchFamily="34" charset="0"/>
-                <a:ea typeface="Hiragino Sans" pitchFamily="34" charset="-122"/>
-                <a:cs typeface="Hiragino Sans" pitchFamily="34" charset="-120"/>
+                <a:latin typeface="Yu Gothic" pitchFamily="34" charset="0"/>
+                <a:ea typeface="Yu Gothic" pitchFamily="34" charset="-122"/>
+                <a:cs typeface="Yu Gothic" pitchFamily="34" charset="-120"/>
               </a:rPr>
               <a:t>情報学科 研究室向け / 所要 約1時間 / お金はかかりません</a:t>
             </a:r>
@@ -3642,9 +3642,9 @@
                 <a:solidFill>
                   <a:srgbClr val="58A6FF"/>
                 </a:solidFill>
-                <a:latin typeface="Menlo" pitchFamily="34" charset="0"/>
-                <a:ea typeface="Menlo" pitchFamily="34" charset="-122"/>
-                <a:cs typeface="Menlo" pitchFamily="34" charset="-120"/>
+                <a:latin typeface="Consolas" pitchFamily="34" charset="0"/>
+                <a:ea typeface="Consolas" pitchFamily="34" charset="-122"/>
+                <a:cs typeface="Consolas" pitchFamily="34" charset="-120"/>
               </a:rPr>
               <a:t>INTRO</a:t>
             </a:r>
@@ -3681,9 +3681,9 @@
                 <a:solidFill>
                   <a:srgbClr val="58A6FF"/>
                 </a:solidFill>
-                <a:latin typeface="Menlo" pitchFamily="34" charset="0"/>
-                <a:ea typeface="Menlo" pitchFamily="34" charset="-122"/>
-                <a:cs typeface="Menlo" pitchFamily="34" charset="-120"/>
+                <a:latin typeface="Consolas" pitchFamily="34" charset="0"/>
+                <a:ea typeface="Consolas" pitchFamily="34" charset="-122"/>
+                <a:cs typeface="Consolas" pitchFamily="34" charset="-120"/>
               </a:rPr>
               <a:t>&gt;</a:t>
             </a:r>
@@ -3720,9 +3720,9 @@
                 <a:solidFill>
                   <a:srgbClr val="E6EDF3"/>
                 </a:solidFill>
-                <a:latin typeface="Hiragino Sans" pitchFamily="34" charset="0"/>
-                <a:ea typeface="Hiragino Sans" pitchFamily="34" charset="-122"/>
-                <a:cs typeface="Hiragino Sans" pitchFamily="34" charset="-120"/>
+                <a:latin typeface="Yu Gothic" pitchFamily="34" charset="0"/>
+                <a:ea typeface="Yu Gothic" pitchFamily="34" charset="-122"/>
+                <a:cs typeface="Yu Gothic" pitchFamily="34" charset="-120"/>
               </a:rPr>
               <a:t>今日やること（全体図）</a:t>
             </a:r>
@@ -3833,9 +3833,9 @@
                 <a:solidFill>
                   <a:srgbClr val="0D1117"/>
                 </a:solidFill>
-                <a:latin typeface="Hiragino Sans" pitchFamily="34" charset="0"/>
-                <a:ea typeface="Hiragino Sans" pitchFamily="34" charset="-122"/>
-                <a:cs typeface="Hiragino Sans" pitchFamily="34" charset="-120"/>
+                <a:latin typeface="Yu Gothic" pitchFamily="34" charset="0"/>
+                <a:ea typeface="Yu Gothic" pitchFamily="34" charset="-122"/>
+                <a:cs typeface="Yu Gothic" pitchFamily="34" charset="-120"/>
               </a:rPr>
               <a:t>1</a:t>
             </a:r>
@@ -3872,9 +3872,9 @@
                 <a:solidFill>
                   <a:srgbClr val="E6EDF3"/>
                 </a:solidFill>
-                <a:latin typeface="Hiragino Sans" pitchFamily="34" charset="0"/>
-                <a:ea typeface="Hiragino Sans" pitchFamily="34" charset="-122"/>
-                <a:cs typeface="Hiragino Sans" pitchFamily="34" charset="-120"/>
+                <a:latin typeface="Yu Gothic" pitchFamily="34" charset="0"/>
+                <a:ea typeface="Yu Gothic" pitchFamily="34" charset="-122"/>
+                <a:cs typeface="Yu Gothic" pitchFamily="34" charset="-120"/>
               </a:rPr>
               <a:t>入れる</a:t>
             </a:r>
@@ -3914,9 +3914,9 @@
                 <a:solidFill>
                   <a:srgbClr val="C9D1D9"/>
                 </a:solidFill>
-                <a:latin typeface="Hiragino Sans" pitchFamily="34" charset="0"/>
-                <a:ea typeface="Hiragino Sans" pitchFamily="34" charset="-122"/>
-                <a:cs typeface="Hiragino Sans" pitchFamily="34" charset="-120"/>
+                <a:latin typeface="Yu Gothic" pitchFamily="34" charset="0"/>
+                <a:ea typeface="Yu Gothic" pitchFamily="34" charset="-122"/>
+                <a:cs typeface="Yu Gothic" pitchFamily="34" charset="-120"/>
               </a:rPr>
               <a:t>OpenCode を</a:t>
             </a:r>
@@ -3934,9 +3934,9 @@
                 <a:solidFill>
                   <a:srgbClr val="C9D1D9"/>
                 </a:solidFill>
-                <a:latin typeface="Hiragino Sans" pitchFamily="34" charset="0"/>
-                <a:ea typeface="Hiragino Sans" pitchFamily="34" charset="-122"/>
-                <a:cs typeface="Hiragino Sans" pitchFamily="34" charset="-120"/>
+                <a:latin typeface="Yu Gothic" pitchFamily="34" charset="0"/>
+                <a:ea typeface="Yu Gothic" pitchFamily="34" charset="-122"/>
+                <a:cs typeface="Yu Gothic" pitchFamily="34" charset="-120"/>
               </a:rPr>
               <a:t>インストール</a:t>
             </a:r>
@@ -3973,9 +3973,9 @@
                 <a:solidFill>
                   <a:srgbClr val="8B949E"/>
                 </a:solidFill>
-                <a:latin typeface="Hiragino Sans" pitchFamily="34" charset="0"/>
-                <a:ea typeface="Hiragino Sans" pitchFamily="34" charset="-122"/>
-                <a:cs typeface="Hiragino Sans" pitchFamily="34" charset="-120"/>
+                <a:latin typeface="Yu Gothic" pitchFamily="34" charset="0"/>
+                <a:ea typeface="Yu Gothic" pitchFamily="34" charset="-122"/>
+                <a:cs typeface="Yu Gothic" pitchFamily="34" charset="-120"/>
               </a:rPr>
               <a:t>→</a:t>
             </a:r>
@@ -4086,9 +4086,9 @@
                 <a:solidFill>
                   <a:srgbClr val="0D1117"/>
                 </a:solidFill>
-                <a:latin typeface="Hiragino Sans" pitchFamily="34" charset="0"/>
-                <a:ea typeface="Hiragino Sans" pitchFamily="34" charset="-122"/>
-                <a:cs typeface="Hiragino Sans" pitchFamily="34" charset="-120"/>
+                <a:latin typeface="Yu Gothic" pitchFamily="34" charset="0"/>
+                <a:ea typeface="Yu Gothic" pitchFamily="34" charset="-122"/>
+                <a:cs typeface="Yu Gothic" pitchFamily="34" charset="-120"/>
               </a:rPr>
               <a:t>2</a:t>
             </a:r>
@@ -4125,9 +4125,9 @@
                 <a:solidFill>
                   <a:srgbClr val="E6EDF3"/>
                 </a:solidFill>
-                <a:latin typeface="Hiragino Sans" pitchFamily="34" charset="0"/>
-                <a:ea typeface="Hiragino Sans" pitchFamily="34" charset="-122"/>
-                <a:cs typeface="Hiragino Sans" pitchFamily="34" charset="-120"/>
+                <a:latin typeface="Yu Gothic" pitchFamily="34" charset="0"/>
+                <a:ea typeface="Yu Gothic" pitchFamily="34" charset="-122"/>
+                <a:cs typeface="Yu Gothic" pitchFamily="34" charset="-120"/>
               </a:rPr>
               <a:t>つなぐ</a:t>
             </a:r>
@@ -4167,9 +4167,9 @@
                 <a:solidFill>
                   <a:srgbClr val="C9D1D9"/>
                 </a:solidFill>
-                <a:latin typeface="Hiragino Sans" pitchFamily="34" charset="0"/>
-                <a:ea typeface="Hiragino Sans" pitchFamily="34" charset="-122"/>
-                <a:cs typeface="Hiragino Sans" pitchFamily="34" charset="-120"/>
+                <a:latin typeface="Yu Gothic" pitchFamily="34" charset="0"/>
+                <a:ea typeface="Yu Gothic" pitchFamily="34" charset="-122"/>
+                <a:cs typeface="Yu Gothic" pitchFamily="34" charset="-120"/>
               </a:rPr>
               <a:t>AIモデルに</a:t>
             </a:r>
@@ -4187,9 +4187,9 @@
                 <a:solidFill>
                   <a:srgbClr val="C9D1D9"/>
                 </a:solidFill>
-                <a:latin typeface="Hiragino Sans" pitchFamily="34" charset="0"/>
-                <a:ea typeface="Hiragino Sans" pitchFamily="34" charset="-122"/>
-                <a:cs typeface="Hiragino Sans" pitchFamily="34" charset="-120"/>
+                <a:latin typeface="Yu Gothic" pitchFamily="34" charset="0"/>
+                <a:ea typeface="Yu Gothic" pitchFamily="34" charset="-122"/>
+                <a:cs typeface="Yu Gothic" pitchFamily="34" charset="-120"/>
               </a:rPr>
               <a:t>/connect</a:t>
             </a:r>
@@ -4226,9 +4226,9 @@
                 <a:solidFill>
                   <a:srgbClr val="8B949E"/>
                 </a:solidFill>
-                <a:latin typeface="Hiragino Sans" pitchFamily="34" charset="0"/>
-                <a:ea typeface="Hiragino Sans" pitchFamily="34" charset="-122"/>
-                <a:cs typeface="Hiragino Sans" pitchFamily="34" charset="-120"/>
+                <a:latin typeface="Yu Gothic" pitchFamily="34" charset="0"/>
+                <a:ea typeface="Yu Gothic" pitchFamily="34" charset="-122"/>
+                <a:cs typeface="Yu Gothic" pitchFamily="34" charset="-120"/>
               </a:rPr>
               <a:t>→</a:t>
             </a:r>
@@ -4339,9 +4339,9 @@
                 <a:solidFill>
                   <a:srgbClr val="0D1117"/>
                 </a:solidFill>
-                <a:latin typeface="Hiragino Sans" pitchFamily="34" charset="0"/>
-                <a:ea typeface="Hiragino Sans" pitchFamily="34" charset="-122"/>
-                <a:cs typeface="Hiragino Sans" pitchFamily="34" charset="-120"/>
+                <a:latin typeface="Yu Gothic" pitchFamily="34" charset="0"/>
+                <a:ea typeface="Yu Gothic" pitchFamily="34" charset="-122"/>
+                <a:cs typeface="Yu Gothic" pitchFamily="34" charset="-120"/>
               </a:rPr>
               <a:t>3</a:t>
             </a:r>
@@ -4378,9 +4378,9 @@
                 <a:solidFill>
                   <a:srgbClr val="E6EDF3"/>
                 </a:solidFill>
-                <a:latin typeface="Hiragino Sans" pitchFamily="34" charset="0"/>
-                <a:ea typeface="Hiragino Sans" pitchFamily="34" charset="-122"/>
-                <a:cs typeface="Hiragino Sans" pitchFamily="34" charset="-120"/>
+                <a:latin typeface="Yu Gothic" pitchFamily="34" charset="0"/>
+                <a:ea typeface="Yu Gothic" pitchFamily="34" charset="-122"/>
+                <a:cs typeface="Yu Gothic" pitchFamily="34" charset="-120"/>
               </a:rPr>
               <a:t>作る</a:t>
             </a:r>
@@ -4420,9 +4420,9 @@
                 <a:solidFill>
                   <a:srgbClr val="C9D1D9"/>
                 </a:solidFill>
-                <a:latin typeface="Hiragino Sans" pitchFamily="34" charset="0"/>
-                <a:ea typeface="Hiragino Sans" pitchFamily="34" charset="-122"/>
-                <a:cs typeface="Hiragino Sans" pitchFamily="34" charset="-120"/>
+                <a:latin typeface="Yu Gothic" pitchFamily="34" charset="0"/>
+                <a:ea typeface="Yu Gothic" pitchFamily="34" charset="-122"/>
+                <a:cs typeface="Yu Gothic" pitchFamily="34" charset="-120"/>
               </a:rPr>
               <a:t>ToDoアプリを</a:t>
             </a:r>
@@ -4440,9 +4440,9 @@
                 <a:solidFill>
                   <a:srgbClr val="C9D1D9"/>
                 </a:solidFill>
-                <a:latin typeface="Hiragino Sans" pitchFamily="34" charset="0"/>
-                <a:ea typeface="Hiragino Sans" pitchFamily="34" charset="-122"/>
-                <a:cs typeface="Hiragino Sans" pitchFamily="34" charset="-120"/>
+                <a:latin typeface="Yu Gothic" pitchFamily="34" charset="0"/>
+                <a:ea typeface="Yu Gothic" pitchFamily="34" charset="-122"/>
+                <a:cs typeface="Yu Gothic" pitchFamily="34" charset="-120"/>
               </a:rPr>
               <a:t>複数ファイルで生成</a:t>
             </a:r>
@@ -4479,9 +4479,9 @@
                 <a:solidFill>
                   <a:srgbClr val="8B949E"/>
                 </a:solidFill>
-                <a:latin typeface="Hiragino Sans" pitchFamily="34" charset="0"/>
-                <a:ea typeface="Hiragino Sans" pitchFamily="34" charset="-122"/>
-                <a:cs typeface="Hiragino Sans" pitchFamily="34" charset="-120"/>
+                <a:latin typeface="Yu Gothic" pitchFamily="34" charset="0"/>
+                <a:ea typeface="Yu Gothic" pitchFamily="34" charset="-122"/>
+                <a:cs typeface="Yu Gothic" pitchFamily="34" charset="-120"/>
               </a:rPr>
               <a:t>この3ステップを、これから順番にやっていきます。</a:t>
             </a:r>
@@ -4518,9 +4518,9 @@
                 <a:solidFill>
                   <a:srgbClr val="8B949E"/>
                 </a:solidFill>
-                <a:latin typeface="Hiragino Sans" pitchFamily="34" charset="0"/>
-                <a:ea typeface="Hiragino Sans" pitchFamily="34" charset="-122"/>
-                <a:cs typeface="Hiragino Sans" pitchFamily="34" charset="-120"/>
+                <a:latin typeface="Yu Gothic" pitchFamily="34" charset="0"/>
+                <a:ea typeface="Yu Gothic" pitchFamily="34" charset="-122"/>
+                <a:cs typeface="Yu Gothic" pitchFamily="34" charset="-120"/>
               </a:rPr>
               <a:t>コーディングエージェント入門</a:t>
             </a:r>
@@ -4532,9 +4532,9 @@
                 <a:solidFill>
                   <a:srgbClr val="30363D"/>
                 </a:solidFill>
-                <a:latin typeface="Hiragino Sans" pitchFamily="34" charset="0"/>
-                <a:ea typeface="Hiragino Sans" pitchFamily="34" charset="-122"/>
-                <a:cs typeface="Hiragino Sans" pitchFamily="34" charset="-120"/>
+                <a:latin typeface="Yu Gothic" pitchFamily="34" charset="0"/>
+                <a:ea typeface="Yu Gothic" pitchFamily="34" charset="-122"/>
+                <a:cs typeface="Yu Gothic" pitchFamily="34" charset="-120"/>
               </a:rPr>
               <a:t>  ·  OpenCode × OpenRouter</a:t>
             </a:r>
@@ -4571,9 +4571,9 @@
                 <a:solidFill>
                   <a:srgbClr val="8B949E"/>
                 </a:solidFill>
-                <a:latin typeface="Menlo" pitchFamily="34" charset="0"/>
-                <a:ea typeface="Menlo" pitchFamily="34" charset="-122"/>
-                <a:cs typeface="Menlo" pitchFamily="34" charset="-120"/>
+                <a:latin typeface="Consolas" pitchFamily="34" charset="0"/>
+                <a:ea typeface="Consolas" pitchFamily="34" charset="-122"/>
+                <a:cs typeface="Consolas" pitchFamily="34" charset="-120"/>
               </a:rPr>
               <a:t>10 / 26</a:t>
             </a:r>
@@ -4642,9 +4642,9 @@
                 <a:solidFill>
                   <a:srgbClr val="BC8CFF"/>
                 </a:solidFill>
-                <a:latin typeface="Menlo" pitchFamily="34" charset="0"/>
-                <a:ea typeface="Menlo" pitchFamily="34" charset="-122"/>
-                <a:cs typeface="Menlo" pitchFamily="34" charset="-120"/>
+                <a:latin typeface="Consolas" pitchFamily="34" charset="0"/>
+                <a:ea typeface="Consolas" pitchFamily="34" charset="-122"/>
+                <a:cs typeface="Consolas" pitchFamily="34" charset="-120"/>
               </a:rPr>
               <a:t>SETUP</a:t>
             </a:r>
@@ -4681,9 +4681,9 @@
                 <a:solidFill>
                   <a:srgbClr val="BC8CFF"/>
                 </a:solidFill>
-                <a:latin typeface="Menlo" pitchFamily="34" charset="0"/>
-                <a:ea typeface="Menlo" pitchFamily="34" charset="-122"/>
-                <a:cs typeface="Menlo" pitchFamily="34" charset="-120"/>
+                <a:latin typeface="Consolas" pitchFamily="34" charset="0"/>
+                <a:ea typeface="Consolas" pitchFamily="34" charset="-122"/>
+                <a:cs typeface="Consolas" pitchFamily="34" charset="-120"/>
               </a:rPr>
               <a:t>&gt;</a:t>
             </a:r>
@@ -4720,9 +4720,9 @@
                 <a:solidFill>
                   <a:srgbClr val="E6EDF3"/>
                 </a:solidFill>
-                <a:latin typeface="Hiragino Sans" pitchFamily="34" charset="0"/>
-                <a:ea typeface="Hiragino Sans" pitchFamily="34" charset="-122"/>
-                <a:cs typeface="Hiragino Sans" pitchFamily="34" charset="-120"/>
+                <a:latin typeface="Yu Gothic" pitchFamily="34" charset="0"/>
+                <a:ea typeface="Yu Gothic" pitchFamily="34" charset="-122"/>
+                <a:cs typeface="Yu Gothic" pitchFamily="34" charset="-120"/>
               </a:rPr>
               <a:t>STEP 0 ── ターミナルを開く</a:t>
             </a:r>
@@ -4793,9 +4793,9 @@
                 <a:solidFill>
                   <a:srgbClr val="BC8CFF"/>
                 </a:solidFill>
-                <a:latin typeface="Hiragino Sans" pitchFamily="34" charset="0"/>
-                <a:ea typeface="Hiragino Sans" pitchFamily="34" charset="-122"/>
-                <a:cs typeface="Hiragino Sans" pitchFamily="34" charset="-120"/>
+                <a:latin typeface="Yu Gothic" pitchFamily="34" charset="0"/>
+                <a:ea typeface="Yu Gothic" pitchFamily="34" charset="-122"/>
+                <a:cs typeface="Yu Gothic" pitchFamily="34" charset="-120"/>
               </a:rPr>
               <a:t>macOS</a:t>
             </a:r>
@@ -4836,9 +4836,9 @@
                 <a:solidFill>
                   <a:srgbClr val="C9D1D9"/>
                 </a:solidFill>
-                <a:latin typeface="Hiragino Sans" pitchFamily="34" charset="0"/>
-                <a:ea typeface="Hiragino Sans" pitchFamily="34" charset="-122"/>
-                <a:cs typeface="Hiragino Sans" pitchFamily="34" charset="-120"/>
+                <a:latin typeface="Yu Gothic" pitchFamily="34" charset="0"/>
+                <a:ea typeface="Yu Gothic" pitchFamily="34" charset="-122"/>
+                <a:cs typeface="Yu Gothic" pitchFamily="34" charset="-120"/>
               </a:rPr>
               <a:t>「ターミナル.app」を開く</a:t>
             </a:r>
@@ -4857,9 +4857,9 @@
                 <a:solidFill>
                   <a:srgbClr val="C9D1D9"/>
                 </a:solidFill>
-                <a:latin typeface="Hiragino Sans" pitchFamily="34" charset="0"/>
-                <a:ea typeface="Hiragino Sans" pitchFamily="34" charset="-122"/>
-                <a:cs typeface="Hiragino Sans" pitchFamily="34" charset="-120"/>
+                <a:latin typeface="Yu Gothic" pitchFamily="34" charset="0"/>
+                <a:ea typeface="Yu Gothic" pitchFamily="34" charset="-122"/>
+                <a:cs typeface="Yu Gothic" pitchFamily="34" charset="-120"/>
               </a:rPr>
               <a:t>Spotlight で “ターミナル” 検索でもOK</a:t>
             </a:r>
@@ -4930,9 +4930,9 @@
                 <a:solidFill>
                   <a:srgbClr val="58A6FF"/>
                 </a:solidFill>
-                <a:latin typeface="Hiragino Sans" pitchFamily="34" charset="0"/>
-                <a:ea typeface="Hiragino Sans" pitchFamily="34" charset="-122"/>
-                <a:cs typeface="Hiragino Sans" pitchFamily="34" charset="-120"/>
+                <a:latin typeface="Yu Gothic" pitchFamily="34" charset="0"/>
+                <a:ea typeface="Yu Gothic" pitchFamily="34" charset="-122"/>
+                <a:cs typeface="Yu Gothic" pitchFamily="34" charset="-120"/>
               </a:rPr>
               <a:t>Windows</a:t>
             </a:r>
@@ -4973,9 +4973,9 @@
                 <a:solidFill>
                   <a:srgbClr val="C9D1D9"/>
                 </a:solidFill>
-                <a:latin typeface="Hiragino Sans" pitchFamily="34" charset="0"/>
-                <a:ea typeface="Hiragino Sans" pitchFamily="34" charset="-122"/>
-                <a:cs typeface="Hiragino Sans" pitchFamily="34" charset="-120"/>
+                <a:latin typeface="Yu Gothic" pitchFamily="34" charset="0"/>
+                <a:ea typeface="Yu Gothic" pitchFamily="34" charset="-122"/>
+                <a:cs typeface="Yu Gothic" pitchFamily="34" charset="-120"/>
               </a:rPr>
               <a:t>WSL の Ubuntu ターミナルを開く</a:t>
             </a:r>
@@ -4994,9 +4994,9 @@
                 <a:solidFill>
                   <a:srgbClr val="F0883E"/>
                 </a:solidFill>
-                <a:latin typeface="Hiragino Sans" pitchFamily="34" charset="0"/>
-                <a:ea typeface="Hiragino Sans" pitchFamily="34" charset="-122"/>
-                <a:cs typeface="Hiragino Sans" pitchFamily="34" charset="-120"/>
+                <a:latin typeface="Yu Gothic" pitchFamily="34" charset="0"/>
+                <a:ea typeface="Yu Gothic" pitchFamily="34" charset="-122"/>
+                <a:cs typeface="Yu Gothic" pitchFamily="34" charset="-120"/>
               </a:rPr>
               <a:t>PowerShell ではない点に注意</a:t>
             </a:r>
@@ -5087,9 +5087,9 @@
                 <a:solidFill>
                   <a:srgbClr val="F0883E"/>
                 </a:solidFill>
-                <a:latin typeface="Hiragino Sans" pitchFamily="34" charset="0"/>
-                <a:ea typeface="Hiragino Sans" pitchFamily="34" charset="-122"/>
-                <a:cs typeface="Hiragino Sans" pitchFamily="34" charset="-120"/>
+                <a:latin typeface="Yu Gothic" pitchFamily="34" charset="0"/>
+                <a:ea typeface="Yu Gothic" pitchFamily="34" charset="-122"/>
+                <a:cs typeface="Yu Gothic" pitchFamily="34" charset="-120"/>
               </a:rPr>
               <a:t>⚠ Windows の人へ：</a:t>
             </a:r>
@@ -5101,9 +5101,9 @@
                 <a:solidFill>
                   <a:srgbClr val="C9D1D9"/>
                 </a:solidFill>
-                <a:latin typeface="Hiragino Sans" pitchFamily="34" charset="0"/>
-                <a:ea typeface="Hiragino Sans" pitchFamily="34" charset="-122"/>
-                <a:cs typeface="Hiragino Sans" pitchFamily="34" charset="-120"/>
+                <a:latin typeface="Yu Gothic" pitchFamily="34" charset="0"/>
+                <a:ea typeface="Yu Gothic" pitchFamily="34" charset="-122"/>
+                <a:cs typeface="Yu Gothic" pitchFamily="34" charset="-120"/>
               </a:rPr>
               <a:t> この先のコマンドはすべて Ubuntu のターミナル内で実行します。</a:t>
             </a:r>
@@ -5254,9 +5254,9 @@
                 <a:solidFill>
                   <a:srgbClr val="8B949E"/>
                 </a:solidFill>
-                <a:latin typeface="Menlo" pitchFamily="34" charset="0"/>
-                <a:ea typeface="Menlo" pitchFamily="34" charset="-122"/>
-                <a:cs typeface="Menlo" pitchFamily="34" charset="-120"/>
+                <a:latin typeface="Consolas" pitchFamily="34" charset="0"/>
+                <a:ea typeface="Consolas" pitchFamily="34" charset="-122"/>
+                <a:cs typeface="Consolas" pitchFamily="34" charset="-120"/>
               </a:rPr>
               <a:t>動作確認</a:t>
             </a:r>
@@ -5296,9 +5296,9 @@
                 <a:solidFill>
                   <a:srgbClr val="3FB950"/>
                 </a:solidFill>
-                <a:latin typeface="Menlo" pitchFamily="34" charset="0"/>
-                <a:ea typeface="Menlo" pitchFamily="34" charset="-122"/>
-                <a:cs typeface="Menlo" pitchFamily="34" charset="-120"/>
+                <a:latin typeface="Consolas" pitchFamily="34" charset="0"/>
+                <a:ea typeface="Consolas" pitchFamily="34" charset="-122"/>
+                <a:cs typeface="Consolas" pitchFamily="34" charset="-120"/>
               </a:rPr>
               <a:t>$ pwd   # 今どこにいるか確認</a:t>
             </a:r>
@@ -5335,9 +5335,9 @@
                 <a:solidFill>
                   <a:srgbClr val="8B949E"/>
                 </a:solidFill>
-                <a:latin typeface="Hiragino Sans" pitchFamily="34" charset="0"/>
-                <a:ea typeface="Hiragino Sans" pitchFamily="34" charset="-122"/>
-                <a:cs typeface="Hiragino Sans" pitchFamily="34" charset="-120"/>
+                <a:latin typeface="Yu Gothic" pitchFamily="34" charset="0"/>
+                <a:ea typeface="Yu Gothic" pitchFamily="34" charset="-122"/>
+                <a:cs typeface="Yu Gothic" pitchFamily="34" charset="-120"/>
               </a:rPr>
               <a:t>コーディングエージェント入門</a:t>
             </a:r>
@@ -5349,9 +5349,9 @@
                 <a:solidFill>
                   <a:srgbClr val="30363D"/>
                 </a:solidFill>
-                <a:latin typeface="Hiragino Sans" pitchFamily="34" charset="0"/>
-                <a:ea typeface="Hiragino Sans" pitchFamily="34" charset="-122"/>
-                <a:cs typeface="Hiragino Sans" pitchFamily="34" charset="-120"/>
+                <a:latin typeface="Yu Gothic" pitchFamily="34" charset="0"/>
+                <a:ea typeface="Yu Gothic" pitchFamily="34" charset="-122"/>
+                <a:cs typeface="Yu Gothic" pitchFamily="34" charset="-120"/>
               </a:rPr>
               <a:t>  ·  OpenCode × OpenRouter</a:t>
             </a:r>
@@ -5388,9 +5388,9 @@
                 <a:solidFill>
                   <a:srgbClr val="8B949E"/>
                 </a:solidFill>
-                <a:latin typeface="Menlo" pitchFamily="34" charset="0"/>
-                <a:ea typeface="Menlo" pitchFamily="34" charset="-122"/>
-                <a:cs typeface="Menlo" pitchFamily="34" charset="-120"/>
+                <a:latin typeface="Consolas" pitchFamily="34" charset="0"/>
+                <a:ea typeface="Consolas" pitchFamily="34" charset="-122"/>
+                <a:cs typeface="Consolas" pitchFamily="34" charset="-120"/>
               </a:rPr>
               <a:t>11 / 26</a:t>
             </a:r>
@@ -5459,9 +5459,9 @@
                 <a:solidFill>
                   <a:srgbClr val="BC8CFF"/>
                 </a:solidFill>
-                <a:latin typeface="Menlo" pitchFamily="34" charset="0"/>
-                <a:ea typeface="Menlo" pitchFamily="34" charset="-122"/>
-                <a:cs typeface="Menlo" pitchFamily="34" charset="-120"/>
+                <a:latin typeface="Consolas" pitchFamily="34" charset="0"/>
+                <a:ea typeface="Consolas" pitchFamily="34" charset="-122"/>
+                <a:cs typeface="Consolas" pitchFamily="34" charset="-120"/>
               </a:rPr>
               <a:t>SETUP</a:t>
             </a:r>
@@ -5498,9 +5498,9 @@
                 <a:solidFill>
                   <a:srgbClr val="BC8CFF"/>
                 </a:solidFill>
-                <a:latin typeface="Menlo" pitchFamily="34" charset="0"/>
-                <a:ea typeface="Menlo" pitchFamily="34" charset="-122"/>
-                <a:cs typeface="Menlo" pitchFamily="34" charset="-120"/>
+                <a:latin typeface="Consolas" pitchFamily="34" charset="0"/>
+                <a:ea typeface="Consolas" pitchFamily="34" charset="-122"/>
+                <a:cs typeface="Consolas" pitchFamily="34" charset="-120"/>
               </a:rPr>
               <a:t>&gt;</a:t>
             </a:r>
@@ -5537,9 +5537,9 @@
                 <a:solidFill>
                   <a:srgbClr val="E6EDF3"/>
                 </a:solidFill>
-                <a:latin typeface="Hiragino Sans" pitchFamily="34" charset="0"/>
-                <a:ea typeface="Hiragino Sans" pitchFamily="34" charset="-122"/>
-                <a:cs typeface="Hiragino Sans" pitchFamily="34" charset="-120"/>
+                <a:latin typeface="Yu Gothic" pitchFamily="34" charset="0"/>
+                <a:ea typeface="Yu Gothic" pitchFamily="34" charset="-122"/>
+                <a:cs typeface="Yu Gothic" pitchFamily="34" charset="-120"/>
               </a:rPr>
               <a:t>STEP 1 ── OpenCode を入れる</a:t>
             </a:r>
@@ -5690,9 +5690,9 @@
                 <a:solidFill>
                   <a:srgbClr val="8B949E"/>
                 </a:solidFill>
-                <a:latin typeface="Menlo" pitchFamily="34" charset="0"/>
-                <a:ea typeface="Menlo" pitchFamily="34" charset="-122"/>
-                <a:cs typeface="Menlo" pitchFamily="34" charset="-120"/>
+                <a:latin typeface="Consolas" pitchFamily="34" charset="0"/>
+                <a:ea typeface="Consolas" pitchFamily="34" charset="-122"/>
+                <a:cs typeface="Consolas" pitchFamily="34" charset="-120"/>
               </a:rPr>
               <a:t>macOS + Homebrew</a:t>
             </a:r>
@@ -5732,9 +5732,9 @@
                 <a:solidFill>
                   <a:srgbClr val="8B949E"/>
                 </a:solidFill>
-                <a:latin typeface="Menlo" pitchFamily="34" charset="0"/>
-                <a:ea typeface="Menlo" pitchFamily="34" charset="-122"/>
-                <a:cs typeface="Menlo" pitchFamily="34" charset="-120"/>
+                <a:latin typeface="Consolas" pitchFamily="34" charset="0"/>
+                <a:ea typeface="Consolas" pitchFamily="34" charset="-122"/>
+                <a:cs typeface="Consolas" pitchFamily="34" charset="-120"/>
               </a:rPr>
               <a:t># Homebrew を更新</a:t>
             </a:r>
@@ -5752,9 +5752,9 @@
                 <a:solidFill>
                   <a:srgbClr val="3FB950"/>
                 </a:solidFill>
-                <a:latin typeface="Menlo" pitchFamily="34" charset="0"/>
-                <a:ea typeface="Menlo" pitchFamily="34" charset="-122"/>
-                <a:cs typeface="Menlo" pitchFamily="34" charset="-120"/>
+                <a:latin typeface="Consolas" pitchFamily="34" charset="0"/>
+                <a:ea typeface="Consolas" pitchFamily="34" charset="-122"/>
+                <a:cs typeface="Consolas" pitchFamily="34" charset="-120"/>
               </a:rPr>
               <a:t>$ brew update</a:t>
             </a:r>
@@ -5772,9 +5772,9 @@
                 <a:solidFill>
                   <a:srgbClr val="C9D1D9"/>
                 </a:solidFill>
-                <a:latin typeface="Menlo" pitchFamily="34" charset="0"/>
-                <a:ea typeface="Menlo" pitchFamily="34" charset="-122"/>
-                <a:cs typeface="Menlo" pitchFamily="34" charset="-120"/>
+                <a:latin typeface="Consolas" pitchFamily="34" charset="0"/>
+                <a:ea typeface="Consolas" pitchFamily="34" charset="-122"/>
+                <a:cs typeface="Consolas" pitchFamily="34" charset="-120"/>
               </a:rPr>
               <a:t> </a:t>
             </a:r>
@@ -5792,9 +5792,9 @@
                 <a:solidFill>
                   <a:srgbClr val="8B949E"/>
                 </a:solidFill>
-                <a:latin typeface="Menlo" pitchFamily="34" charset="0"/>
-                <a:ea typeface="Menlo" pitchFamily="34" charset="-122"/>
-                <a:cs typeface="Menlo" pitchFamily="34" charset="-120"/>
+                <a:latin typeface="Consolas" pitchFamily="34" charset="0"/>
+                <a:ea typeface="Consolas" pitchFamily="34" charset="-122"/>
+                <a:cs typeface="Consolas" pitchFamily="34" charset="-120"/>
               </a:rPr>
               <a:t># OpenCode を入れる</a:t>
             </a:r>
@@ -5812,9 +5812,9 @@
                 <a:solidFill>
                   <a:srgbClr val="3FB950"/>
                 </a:solidFill>
-                <a:latin typeface="Menlo" pitchFamily="34" charset="0"/>
-                <a:ea typeface="Menlo" pitchFamily="34" charset="-122"/>
-                <a:cs typeface="Menlo" pitchFamily="34" charset="-120"/>
+                <a:latin typeface="Consolas" pitchFamily="34" charset="0"/>
+                <a:ea typeface="Consolas" pitchFamily="34" charset="-122"/>
+                <a:cs typeface="Consolas" pitchFamily="34" charset="-120"/>
               </a:rPr>
               <a:t>$ brew install \</a:t>
             </a:r>
@@ -5832,9 +5832,9 @@
                 <a:solidFill>
                   <a:srgbClr val="3FB950"/>
                 </a:solidFill>
-                <a:latin typeface="Menlo" pitchFamily="34" charset="0"/>
-                <a:ea typeface="Menlo" pitchFamily="34" charset="-122"/>
-                <a:cs typeface="Menlo" pitchFamily="34" charset="-120"/>
+                <a:latin typeface="Consolas" pitchFamily="34" charset="0"/>
+                <a:ea typeface="Consolas" pitchFamily="34" charset="-122"/>
+                <a:cs typeface="Consolas" pitchFamily="34" charset="-120"/>
               </a:rPr>
               <a:t>    anomalyco/tap/opencode</a:t>
             </a:r>
@@ -5852,9 +5852,9 @@
                 <a:solidFill>
                   <a:srgbClr val="C9D1D9"/>
                 </a:solidFill>
-                <a:latin typeface="Menlo" pitchFamily="34" charset="0"/>
-                <a:ea typeface="Menlo" pitchFamily="34" charset="-122"/>
-                <a:cs typeface="Menlo" pitchFamily="34" charset="-120"/>
+                <a:latin typeface="Consolas" pitchFamily="34" charset="0"/>
+                <a:ea typeface="Consolas" pitchFamily="34" charset="-122"/>
+                <a:cs typeface="Consolas" pitchFamily="34" charset="-120"/>
               </a:rPr>
               <a:t> </a:t>
             </a:r>
@@ -5872,9 +5872,9 @@
                 <a:solidFill>
                   <a:srgbClr val="3FB950"/>
                 </a:solidFill>
-                <a:latin typeface="Menlo" pitchFamily="34" charset="0"/>
-                <a:ea typeface="Menlo" pitchFamily="34" charset="-122"/>
-                <a:cs typeface="Menlo" pitchFamily="34" charset="-120"/>
+                <a:latin typeface="Consolas" pitchFamily="34" charset="0"/>
+                <a:ea typeface="Consolas" pitchFamily="34" charset="-122"/>
+                <a:cs typeface="Consolas" pitchFamily="34" charset="-120"/>
               </a:rPr>
               <a:t>$ opencode --version</a:t>
             </a:r>
@@ -6025,9 +6025,9 @@
                 <a:solidFill>
                   <a:srgbClr val="8B949E"/>
                 </a:solidFill>
-                <a:latin typeface="Menlo" pitchFamily="34" charset="0"/>
-                <a:ea typeface="Menlo" pitchFamily="34" charset="-122"/>
-                <a:cs typeface="Menlo" pitchFamily="34" charset="-120"/>
+                <a:latin typeface="Consolas" pitchFamily="34" charset="0"/>
+                <a:ea typeface="Consolas" pitchFamily="34" charset="-122"/>
+                <a:cs typeface="Consolas" pitchFamily="34" charset="-120"/>
               </a:rPr>
               <a:t>Windows (WSL Ubuntu)</a:t>
             </a:r>
@@ -6067,9 +6067,9 @@
                 <a:solidFill>
                   <a:srgbClr val="8B949E"/>
                 </a:solidFill>
-                <a:latin typeface="Menlo" pitchFamily="34" charset="0"/>
-                <a:ea typeface="Menlo" pitchFamily="34" charset="-122"/>
-                <a:cs typeface="Menlo" pitchFamily="34" charset="-120"/>
+                <a:latin typeface="Consolas" pitchFamily="34" charset="0"/>
+                <a:ea typeface="Consolas" pitchFamily="34" charset="-122"/>
+                <a:cs typeface="Consolas" pitchFamily="34" charset="-120"/>
               </a:rPr>
               <a:t># 必要なツール</a:t>
             </a:r>
@@ -6087,9 +6087,9 @@
                 <a:solidFill>
                   <a:srgbClr val="3FB950"/>
                 </a:solidFill>
-                <a:latin typeface="Menlo" pitchFamily="34" charset="0"/>
-                <a:ea typeface="Menlo" pitchFamily="34" charset="-122"/>
-                <a:cs typeface="Menlo" pitchFamily="34" charset="-120"/>
+                <a:latin typeface="Consolas" pitchFamily="34" charset="0"/>
+                <a:ea typeface="Consolas" pitchFamily="34" charset="-122"/>
+                <a:cs typeface="Consolas" pitchFamily="34" charset="-120"/>
               </a:rPr>
               <a:t>$ sudo apt update</a:t>
             </a:r>
@@ -6107,9 +6107,9 @@
                 <a:solidFill>
                   <a:srgbClr val="3FB950"/>
                 </a:solidFill>
-                <a:latin typeface="Menlo" pitchFamily="34" charset="0"/>
-                <a:ea typeface="Menlo" pitchFamily="34" charset="-122"/>
-                <a:cs typeface="Menlo" pitchFamily="34" charset="-120"/>
+                <a:latin typeface="Consolas" pitchFamily="34" charset="0"/>
+                <a:ea typeface="Consolas" pitchFamily="34" charset="-122"/>
+                <a:cs typeface="Consolas" pitchFamily="34" charset="-120"/>
               </a:rPr>
               <a:t>$ sudo apt install -y \</a:t>
             </a:r>
@@ -6127,9 +6127,9 @@
                 <a:solidFill>
                   <a:srgbClr val="3FB950"/>
                 </a:solidFill>
-                <a:latin typeface="Menlo" pitchFamily="34" charset="0"/>
-                <a:ea typeface="Menlo" pitchFamily="34" charset="-122"/>
-                <a:cs typeface="Menlo" pitchFamily="34" charset="-120"/>
+                <a:latin typeface="Consolas" pitchFamily="34" charset="0"/>
+                <a:ea typeface="Consolas" pitchFamily="34" charset="-122"/>
+                <a:cs typeface="Consolas" pitchFamily="34" charset="-120"/>
               </a:rPr>
               <a:t>    curl ca-certificates</a:t>
             </a:r>
@@ -6147,9 +6147,9 @@
                 <a:solidFill>
                   <a:srgbClr val="C9D1D9"/>
                 </a:solidFill>
-                <a:latin typeface="Menlo" pitchFamily="34" charset="0"/>
-                <a:ea typeface="Menlo" pitchFamily="34" charset="-122"/>
-                <a:cs typeface="Menlo" pitchFamily="34" charset="-120"/>
+                <a:latin typeface="Consolas" pitchFamily="34" charset="0"/>
+                <a:ea typeface="Consolas" pitchFamily="34" charset="-122"/>
+                <a:cs typeface="Consolas" pitchFamily="34" charset="-120"/>
               </a:rPr>
               <a:t> </a:t>
             </a:r>
@@ -6167,9 +6167,9 @@
                 <a:solidFill>
                   <a:srgbClr val="8B949E"/>
                 </a:solidFill>
-                <a:latin typeface="Menlo" pitchFamily="34" charset="0"/>
-                <a:ea typeface="Menlo" pitchFamily="34" charset="-122"/>
-                <a:cs typeface="Menlo" pitchFamily="34" charset="-120"/>
+                <a:latin typeface="Consolas" pitchFamily="34" charset="0"/>
+                <a:ea typeface="Consolas" pitchFamily="34" charset="-122"/>
+                <a:cs typeface="Consolas" pitchFamily="34" charset="-120"/>
               </a:rPr>
               <a:t># OpenCode を入れる</a:t>
             </a:r>
@@ -6187,9 +6187,9 @@
                 <a:solidFill>
                   <a:srgbClr val="3FB950"/>
                 </a:solidFill>
-                <a:latin typeface="Menlo" pitchFamily="34" charset="0"/>
-                <a:ea typeface="Menlo" pitchFamily="34" charset="-122"/>
-                <a:cs typeface="Menlo" pitchFamily="34" charset="-120"/>
+                <a:latin typeface="Consolas" pitchFamily="34" charset="0"/>
+                <a:ea typeface="Consolas" pitchFamily="34" charset="-122"/>
+                <a:cs typeface="Consolas" pitchFamily="34" charset="-120"/>
               </a:rPr>
               <a:t>$ curl -fsSL \</a:t>
             </a:r>
@@ -6207,9 +6207,9 @@
                 <a:solidFill>
                   <a:srgbClr val="3FB950"/>
                 </a:solidFill>
-                <a:latin typeface="Menlo" pitchFamily="34" charset="0"/>
-                <a:ea typeface="Menlo" pitchFamily="34" charset="-122"/>
-                <a:cs typeface="Menlo" pitchFamily="34" charset="-120"/>
+                <a:latin typeface="Consolas" pitchFamily="34" charset="0"/>
+                <a:ea typeface="Consolas" pitchFamily="34" charset="-122"/>
+                <a:cs typeface="Consolas" pitchFamily="34" charset="-120"/>
               </a:rPr>
               <a:t>    https://opencode.ai/install | bash</a:t>
             </a:r>
@@ -6246,9 +6246,9 @@
                 <a:solidFill>
                   <a:srgbClr val="8B949E"/>
                 </a:solidFill>
-                <a:latin typeface="Hiragino Sans" pitchFamily="34" charset="0"/>
-                <a:ea typeface="Hiragino Sans" pitchFamily="34" charset="-122"/>
-                <a:cs typeface="Hiragino Sans" pitchFamily="34" charset="-120"/>
+                <a:latin typeface="Yu Gothic" pitchFamily="34" charset="0"/>
+                <a:ea typeface="Yu Gothic" pitchFamily="34" charset="-122"/>
+                <a:cs typeface="Yu Gothic" pitchFamily="34" charset="-120"/>
               </a:rPr>
               <a:t>インストール手順だけはOSで違いますが、この先は Mac も WSL も共通です。</a:t>
             </a:r>
@@ -6285,9 +6285,9 @@
                 <a:solidFill>
                   <a:srgbClr val="8B949E"/>
                 </a:solidFill>
-                <a:latin typeface="Hiragino Sans" pitchFamily="34" charset="0"/>
-                <a:ea typeface="Hiragino Sans" pitchFamily="34" charset="-122"/>
-                <a:cs typeface="Hiragino Sans" pitchFamily="34" charset="-120"/>
+                <a:latin typeface="Yu Gothic" pitchFamily="34" charset="0"/>
+                <a:ea typeface="Yu Gothic" pitchFamily="34" charset="-122"/>
+                <a:cs typeface="Yu Gothic" pitchFamily="34" charset="-120"/>
               </a:rPr>
               <a:t>コーディングエージェント入門</a:t>
             </a:r>
@@ -6299,9 +6299,9 @@
                 <a:solidFill>
                   <a:srgbClr val="30363D"/>
                 </a:solidFill>
-                <a:latin typeface="Hiragino Sans" pitchFamily="34" charset="0"/>
-                <a:ea typeface="Hiragino Sans" pitchFamily="34" charset="-122"/>
-                <a:cs typeface="Hiragino Sans" pitchFamily="34" charset="-120"/>
+                <a:latin typeface="Yu Gothic" pitchFamily="34" charset="0"/>
+                <a:ea typeface="Yu Gothic" pitchFamily="34" charset="-122"/>
+                <a:cs typeface="Yu Gothic" pitchFamily="34" charset="-120"/>
               </a:rPr>
               <a:t>  ·  OpenCode × OpenRouter</a:t>
             </a:r>
@@ -6338,9 +6338,9 @@
                 <a:solidFill>
                   <a:srgbClr val="8B949E"/>
                 </a:solidFill>
-                <a:latin typeface="Menlo" pitchFamily="34" charset="0"/>
-                <a:ea typeface="Menlo" pitchFamily="34" charset="-122"/>
-                <a:cs typeface="Menlo" pitchFamily="34" charset="-120"/>
+                <a:latin typeface="Consolas" pitchFamily="34" charset="0"/>
+                <a:ea typeface="Consolas" pitchFamily="34" charset="-122"/>
+                <a:cs typeface="Consolas" pitchFamily="34" charset="-120"/>
               </a:rPr>
               <a:t>12 / 26</a:t>
             </a:r>
@@ -6409,9 +6409,9 @@
                 <a:solidFill>
                   <a:srgbClr val="3FB950"/>
                 </a:solidFill>
-                <a:latin typeface="Menlo" pitchFamily="34" charset="0"/>
-                <a:ea typeface="Menlo" pitchFamily="34" charset="-122"/>
-                <a:cs typeface="Menlo" pitchFamily="34" charset="-120"/>
+                <a:latin typeface="Consolas" pitchFamily="34" charset="0"/>
+                <a:ea typeface="Consolas" pitchFamily="34" charset="-122"/>
+                <a:cs typeface="Consolas" pitchFamily="34" charset="-120"/>
               </a:rPr>
               <a:t>CONNECT</a:t>
             </a:r>
@@ -6448,9 +6448,9 @@
                 <a:solidFill>
                   <a:srgbClr val="3FB950"/>
                 </a:solidFill>
-                <a:latin typeface="Menlo" pitchFamily="34" charset="0"/>
-                <a:ea typeface="Menlo" pitchFamily="34" charset="-122"/>
-                <a:cs typeface="Menlo" pitchFamily="34" charset="-120"/>
+                <a:latin typeface="Consolas" pitchFamily="34" charset="0"/>
+                <a:ea typeface="Consolas" pitchFamily="34" charset="-122"/>
+                <a:cs typeface="Consolas" pitchFamily="34" charset="-120"/>
               </a:rPr>
               <a:t>&gt;</a:t>
             </a:r>
@@ -6487,9 +6487,9 @@
                 <a:solidFill>
                   <a:srgbClr val="E6EDF3"/>
                 </a:solidFill>
-                <a:latin typeface="Hiragino Sans" pitchFamily="34" charset="0"/>
-                <a:ea typeface="Hiragino Sans" pitchFamily="34" charset="-122"/>
-                <a:cs typeface="Hiragino Sans" pitchFamily="34" charset="-120"/>
+                <a:latin typeface="Yu Gothic" pitchFamily="34" charset="0"/>
+                <a:ea typeface="Yu Gothic" pitchFamily="34" charset="-122"/>
+                <a:cs typeface="Yu Gothic" pitchFamily="34" charset="-120"/>
               </a:rPr>
               <a:t>STEP 2 ── OpenRouter API キーを作る</a:t>
             </a:r>
@@ -6580,9 +6580,9 @@
                 <a:solidFill>
                   <a:srgbClr val="0D1117"/>
                 </a:solidFill>
-                <a:latin typeface="Hiragino Sans" pitchFamily="34" charset="0"/>
-                <a:ea typeface="Hiragino Sans" pitchFamily="34" charset="-122"/>
-                <a:cs typeface="Hiragino Sans" pitchFamily="34" charset="-120"/>
+                <a:latin typeface="Yu Gothic" pitchFamily="34" charset="0"/>
+                <a:ea typeface="Yu Gothic" pitchFamily="34" charset="-122"/>
+                <a:cs typeface="Yu Gothic" pitchFamily="34" charset="-120"/>
               </a:rPr>
               <a:t>1</a:t>
             </a:r>
@@ -6619,9 +6619,9 @@
                 <a:solidFill>
                   <a:srgbClr val="E6EDF3"/>
                 </a:solidFill>
-                <a:latin typeface="Hiragino Sans" pitchFamily="34" charset="0"/>
-                <a:ea typeface="Hiragino Sans" pitchFamily="34" charset="-122"/>
-                <a:cs typeface="Hiragino Sans" pitchFamily="34" charset="-120"/>
+                <a:latin typeface="Yu Gothic" pitchFamily="34" charset="0"/>
+                <a:ea typeface="Yu Gothic" pitchFamily="34" charset="-122"/>
+                <a:cs typeface="Yu Gothic" pitchFamily="34" charset="-120"/>
               </a:rPr>
               <a:t>サイトを開く</a:t>
             </a:r>
@@ -6658,9 +6658,9 @@
                 <a:solidFill>
                   <a:srgbClr val="8B949E"/>
                 </a:solidFill>
-                <a:latin typeface="Hiragino Sans" pitchFamily="34" charset="0"/>
-                <a:ea typeface="Hiragino Sans" pitchFamily="34" charset="-122"/>
-                <a:cs typeface="Hiragino Sans" pitchFamily="34" charset="-120"/>
+                <a:latin typeface="Yu Gothic" pitchFamily="34" charset="0"/>
+                <a:ea typeface="Yu Gothic" pitchFamily="34" charset="-122"/>
+                <a:cs typeface="Yu Gothic" pitchFamily="34" charset="-120"/>
               </a:rPr>
               <a:t>openrouter.ai/keys にアクセス</a:t>
             </a:r>
@@ -6751,9 +6751,9 @@
                 <a:solidFill>
                   <a:srgbClr val="0D1117"/>
                 </a:solidFill>
-                <a:latin typeface="Hiragino Sans" pitchFamily="34" charset="0"/>
-                <a:ea typeface="Hiragino Sans" pitchFamily="34" charset="-122"/>
-                <a:cs typeface="Hiragino Sans" pitchFamily="34" charset="-120"/>
+                <a:latin typeface="Yu Gothic" pitchFamily="34" charset="0"/>
+                <a:ea typeface="Yu Gothic" pitchFamily="34" charset="-122"/>
+                <a:cs typeface="Yu Gothic" pitchFamily="34" charset="-120"/>
               </a:rPr>
               <a:t>2</a:t>
             </a:r>
@@ -6790,9 +6790,9 @@
                 <a:solidFill>
                   <a:srgbClr val="E6EDF3"/>
                 </a:solidFill>
-                <a:latin typeface="Hiragino Sans" pitchFamily="34" charset="0"/>
-                <a:ea typeface="Hiragino Sans" pitchFamily="34" charset="-122"/>
-                <a:cs typeface="Hiragino Sans" pitchFamily="34" charset="-120"/>
+                <a:latin typeface="Yu Gothic" pitchFamily="34" charset="0"/>
+                <a:ea typeface="Yu Gothic" pitchFamily="34" charset="-122"/>
+                <a:cs typeface="Yu Gothic" pitchFamily="34" charset="-120"/>
               </a:rPr>
               <a:t>サインイン</a:t>
             </a:r>
@@ -6829,9 +6829,9 @@
                 <a:solidFill>
                   <a:srgbClr val="8B949E"/>
                 </a:solidFill>
-                <a:latin typeface="Hiragino Sans" pitchFamily="34" charset="0"/>
-                <a:ea typeface="Hiragino Sans" pitchFamily="34" charset="-122"/>
-                <a:cs typeface="Hiragino Sans" pitchFamily="34" charset="-120"/>
+                <a:latin typeface="Yu Gothic" pitchFamily="34" charset="0"/>
+                <a:ea typeface="Yu Gothic" pitchFamily="34" charset="-122"/>
+                <a:cs typeface="Yu Gothic" pitchFamily="34" charset="-120"/>
               </a:rPr>
               <a:t>OpenRouter アカウントでログイン（無料）</a:t>
             </a:r>
@@ -6922,9 +6922,9 @@
                 <a:solidFill>
                   <a:srgbClr val="0D1117"/>
                 </a:solidFill>
-                <a:latin typeface="Hiragino Sans" pitchFamily="34" charset="0"/>
-                <a:ea typeface="Hiragino Sans" pitchFamily="34" charset="-122"/>
-                <a:cs typeface="Hiragino Sans" pitchFamily="34" charset="-120"/>
+                <a:latin typeface="Yu Gothic" pitchFamily="34" charset="0"/>
+                <a:ea typeface="Yu Gothic" pitchFamily="34" charset="-122"/>
+                <a:cs typeface="Yu Gothic" pitchFamily="34" charset="-120"/>
               </a:rPr>
               <a:t>3</a:t>
             </a:r>
@@ -6961,9 +6961,9 @@
                 <a:solidFill>
                   <a:srgbClr val="E6EDF3"/>
                 </a:solidFill>
-                <a:latin typeface="Hiragino Sans" pitchFamily="34" charset="0"/>
-                <a:ea typeface="Hiragino Sans" pitchFamily="34" charset="-122"/>
-                <a:cs typeface="Hiragino Sans" pitchFamily="34" charset="-120"/>
+                <a:latin typeface="Yu Gothic" pitchFamily="34" charset="0"/>
+                <a:ea typeface="Yu Gothic" pitchFamily="34" charset="-122"/>
+                <a:cs typeface="Yu Gothic" pitchFamily="34" charset="-120"/>
               </a:rPr>
               <a:t>キーを作成</a:t>
             </a:r>
@@ -7000,9 +7000,9 @@
                 <a:solidFill>
                   <a:srgbClr val="8B949E"/>
                 </a:solidFill>
-                <a:latin typeface="Hiragino Sans" pitchFamily="34" charset="0"/>
-                <a:ea typeface="Hiragino Sans" pitchFamily="34" charset="-122"/>
-                <a:cs typeface="Hiragino Sans" pitchFamily="34" charset="-120"/>
+                <a:latin typeface="Yu Gothic" pitchFamily="34" charset="0"/>
+                <a:ea typeface="Yu Gothic" pitchFamily="34" charset="-122"/>
+                <a:cs typeface="Yu Gothic" pitchFamily="34" charset="-120"/>
               </a:rPr>
               <a:t>「Create Key」を押す</a:t>
             </a:r>
@@ -7093,9 +7093,9 @@
                 <a:solidFill>
                   <a:srgbClr val="0D1117"/>
                 </a:solidFill>
-                <a:latin typeface="Hiragino Sans" pitchFamily="34" charset="0"/>
-                <a:ea typeface="Hiragino Sans" pitchFamily="34" charset="-122"/>
-                <a:cs typeface="Hiragino Sans" pitchFamily="34" charset="-120"/>
+                <a:latin typeface="Yu Gothic" pitchFamily="34" charset="0"/>
+                <a:ea typeface="Yu Gothic" pitchFamily="34" charset="-122"/>
+                <a:cs typeface="Yu Gothic" pitchFamily="34" charset="-120"/>
               </a:rPr>
               <a:t>4</a:t>
             </a:r>
@@ -7132,9 +7132,9 @@
                 <a:solidFill>
                   <a:srgbClr val="E6EDF3"/>
                 </a:solidFill>
-                <a:latin typeface="Hiragino Sans" pitchFamily="34" charset="0"/>
-                <a:ea typeface="Hiragino Sans" pitchFamily="34" charset="-122"/>
-                <a:cs typeface="Hiragino Sans" pitchFamily="34" charset="-120"/>
+                <a:latin typeface="Yu Gothic" pitchFamily="34" charset="0"/>
+                <a:ea typeface="Yu Gothic" pitchFamily="34" charset="-122"/>
+                <a:cs typeface="Yu Gothic" pitchFamily="34" charset="-120"/>
               </a:rPr>
               <a:t>控える</a:t>
             </a:r>
@@ -7171,9 +7171,9 @@
                 <a:solidFill>
                   <a:srgbClr val="8B949E"/>
                 </a:solidFill>
-                <a:latin typeface="Hiragino Sans" pitchFamily="34" charset="0"/>
-                <a:ea typeface="Hiragino Sans" pitchFamily="34" charset="-122"/>
-                <a:cs typeface="Hiragino Sans" pitchFamily="34" charset="-120"/>
+                <a:latin typeface="Yu Gothic" pitchFamily="34" charset="0"/>
+                <a:ea typeface="Yu Gothic" pitchFamily="34" charset="-122"/>
+                <a:cs typeface="Yu Gothic" pitchFamily="34" charset="-120"/>
               </a:rPr>
               <a:t>sk-or-… で始まるキーをコピーしておく</a:t>
             </a:r>
@@ -7264,9 +7264,9 @@
                 <a:solidFill>
                   <a:srgbClr val="FF7B72"/>
                 </a:solidFill>
-                <a:latin typeface="Hiragino Sans" pitchFamily="34" charset="0"/>
-                <a:ea typeface="Hiragino Sans" pitchFamily="34" charset="-122"/>
-                <a:cs typeface="Hiragino Sans" pitchFamily="34" charset="-120"/>
+                <a:latin typeface="Yu Gothic" pitchFamily="34" charset="0"/>
+                <a:ea typeface="Yu Gothic" pitchFamily="34" charset="-122"/>
+                <a:cs typeface="Yu Gothic" pitchFamily="34" charset="-120"/>
               </a:rPr>
               <a:t>⚠ キーの取り扱い</a:t>
             </a:r>
@@ -7307,9 +7307,9 @@
                 <a:solidFill>
                   <a:srgbClr val="C9D1D9"/>
                 </a:solidFill>
-                <a:latin typeface="Hiragino Sans" pitchFamily="34" charset="0"/>
-                <a:ea typeface="Hiragino Sans" pitchFamily="34" charset="-122"/>
-                <a:cs typeface="Hiragino Sans" pitchFamily="34" charset="-120"/>
+                <a:latin typeface="Yu Gothic" pitchFamily="34" charset="0"/>
+                <a:ea typeface="Yu Gothic" pitchFamily="34" charset="-122"/>
+                <a:cs typeface="Yu Gothic" pitchFamily="34" charset="-120"/>
               </a:rPr>
               <a:t>パスワードと同じ秘密情報</a:t>
             </a:r>
@@ -7328,9 +7328,9 @@
                 <a:solidFill>
                   <a:srgbClr val="C9D1D9"/>
                 </a:solidFill>
-                <a:latin typeface="Hiragino Sans" pitchFamily="34" charset="0"/>
-                <a:ea typeface="Hiragino Sans" pitchFamily="34" charset="-122"/>
-                <a:cs typeface="Hiragino Sans" pitchFamily="34" charset="-120"/>
+                <a:latin typeface="Yu Gothic" pitchFamily="34" charset="0"/>
+                <a:ea typeface="Yu Gothic" pitchFamily="34" charset="-122"/>
+                <a:cs typeface="Yu Gothic" pitchFamily="34" charset="-120"/>
               </a:rPr>
               <a:t>ファイルやチャットに貼らない</a:t>
             </a:r>
@@ -7349,9 +7349,9 @@
                 <a:solidFill>
                   <a:srgbClr val="C9D1D9"/>
                 </a:solidFill>
-                <a:latin typeface="Hiragino Sans" pitchFamily="34" charset="0"/>
-                <a:ea typeface="Hiragino Sans" pitchFamily="34" charset="-122"/>
-                <a:cs typeface="Hiragino Sans" pitchFamily="34" charset="-120"/>
+                <a:latin typeface="Yu Gothic" pitchFamily="34" charset="0"/>
+                <a:ea typeface="Yu Gothic" pitchFamily="34" charset="-122"/>
+                <a:cs typeface="Yu Gothic" pitchFamily="34" charset="-120"/>
               </a:rPr>
               <a:t>人に見せない</a:t>
             </a:r>
@@ -7370,9 +7370,9 @@
                 <a:solidFill>
                   <a:srgbClr val="C9D1D9"/>
                 </a:solidFill>
-                <a:latin typeface="Hiragino Sans" pitchFamily="34" charset="0"/>
-                <a:ea typeface="Hiragino Sans" pitchFamily="34" charset="-122"/>
-                <a:cs typeface="Hiragino Sans" pitchFamily="34" charset="-120"/>
+                <a:latin typeface="Yu Gothic" pitchFamily="34" charset="0"/>
+                <a:ea typeface="Yu Gothic" pitchFamily="34" charset="-122"/>
+                <a:cs typeface="Yu Gothic" pitchFamily="34" charset="-120"/>
               </a:rPr>
               <a:t>OpenCode が安全に保存する</a:t>
             </a:r>
@@ -7409,9 +7409,9 @@
                 <a:solidFill>
                   <a:srgbClr val="8B949E"/>
                 </a:solidFill>
-                <a:latin typeface="Hiragino Sans" pitchFamily="34" charset="0"/>
-                <a:ea typeface="Hiragino Sans" pitchFamily="34" charset="-122"/>
-                <a:cs typeface="Hiragino Sans" pitchFamily="34" charset="-120"/>
+                <a:latin typeface="Yu Gothic" pitchFamily="34" charset="0"/>
+                <a:ea typeface="Yu Gothic" pitchFamily="34" charset="-122"/>
+                <a:cs typeface="Yu Gothic" pitchFamily="34" charset="-120"/>
               </a:rPr>
               <a:t>コーディングエージェント入門</a:t>
             </a:r>
@@ -7423,9 +7423,9 @@
                 <a:solidFill>
                   <a:srgbClr val="30363D"/>
                 </a:solidFill>
-                <a:latin typeface="Hiragino Sans" pitchFamily="34" charset="0"/>
-                <a:ea typeface="Hiragino Sans" pitchFamily="34" charset="-122"/>
-                <a:cs typeface="Hiragino Sans" pitchFamily="34" charset="-120"/>
+                <a:latin typeface="Yu Gothic" pitchFamily="34" charset="0"/>
+                <a:ea typeface="Yu Gothic" pitchFamily="34" charset="-122"/>
+                <a:cs typeface="Yu Gothic" pitchFamily="34" charset="-120"/>
               </a:rPr>
               <a:t>  ·  OpenCode × OpenRouter</a:t>
             </a:r>
@@ -7462,9 +7462,9 @@
                 <a:solidFill>
                   <a:srgbClr val="8B949E"/>
                 </a:solidFill>
-                <a:latin typeface="Menlo" pitchFamily="34" charset="0"/>
-                <a:ea typeface="Menlo" pitchFamily="34" charset="-122"/>
-                <a:cs typeface="Menlo" pitchFamily="34" charset="-120"/>
+                <a:latin typeface="Consolas" pitchFamily="34" charset="0"/>
+                <a:ea typeface="Consolas" pitchFamily="34" charset="-122"/>
+                <a:cs typeface="Consolas" pitchFamily="34" charset="-120"/>
               </a:rPr>
               <a:t>13 / 26</a:t>
             </a:r>
@@ -7533,9 +7533,9 @@
                 <a:solidFill>
                   <a:srgbClr val="3FB950"/>
                 </a:solidFill>
-                <a:latin typeface="Menlo" pitchFamily="34" charset="0"/>
-                <a:ea typeface="Menlo" pitchFamily="34" charset="-122"/>
-                <a:cs typeface="Menlo" pitchFamily="34" charset="-120"/>
+                <a:latin typeface="Consolas" pitchFamily="34" charset="0"/>
+                <a:ea typeface="Consolas" pitchFamily="34" charset="-122"/>
+                <a:cs typeface="Consolas" pitchFamily="34" charset="-120"/>
               </a:rPr>
               <a:t>CONNECT</a:t>
             </a:r>
@@ -7572,9 +7572,9 @@
                 <a:solidFill>
                   <a:srgbClr val="3FB950"/>
                 </a:solidFill>
-                <a:latin typeface="Menlo" pitchFamily="34" charset="0"/>
-                <a:ea typeface="Menlo" pitchFamily="34" charset="-122"/>
-                <a:cs typeface="Menlo" pitchFamily="34" charset="-120"/>
+                <a:latin typeface="Consolas" pitchFamily="34" charset="0"/>
+                <a:ea typeface="Consolas" pitchFamily="34" charset="-122"/>
+                <a:cs typeface="Consolas" pitchFamily="34" charset="-120"/>
               </a:rPr>
               <a:t>&gt;</a:t>
             </a:r>
@@ -7611,9 +7611,9 @@
                 <a:solidFill>
                   <a:srgbClr val="E6EDF3"/>
                 </a:solidFill>
-                <a:latin typeface="Hiragino Sans" pitchFamily="34" charset="0"/>
-                <a:ea typeface="Hiragino Sans" pitchFamily="34" charset="-122"/>
-                <a:cs typeface="Hiragino Sans" pitchFamily="34" charset="-120"/>
+                <a:latin typeface="Yu Gothic" pitchFamily="34" charset="0"/>
+                <a:ea typeface="Yu Gothic" pitchFamily="34" charset="-122"/>
+                <a:cs typeface="Yu Gothic" pitchFamily="34" charset="-120"/>
               </a:rPr>
               <a:t>STEP 3 ── フォルダを作って起動する</a:t>
             </a:r>
@@ -7650,9 +7650,9 @@
                 <a:solidFill>
                   <a:srgbClr val="C9D1D9"/>
                 </a:solidFill>
-                <a:latin typeface="Hiragino Sans" pitchFamily="34" charset="0"/>
-                <a:ea typeface="Hiragino Sans" pitchFamily="34" charset="-122"/>
-                <a:cs typeface="Hiragino Sans" pitchFamily="34" charset="-120"/>
+                <a:latin typeface="Yu Gothic" pitchFamily="34" charset="0"/>
+                <a:ea typeface="Yu Gothic" pitchFamily="34" charset="-122"/>
+                <a:cs typeface="Yu Gothic" pitchFamily="34" charset="-120"/>
               </a:rPr>
               <a:t>作業用のフォルダを作り、その中で OpenCode を起動します。</a:t>
             </a:r>
@@ -7803,9 +7803,9 @@
                 <a:solidFill>
                   <a:srgbClr val="8B949E"/>
                 </a:solidFill>
-                <a:latin typeface="Menlo" pitchFamily="34" charset="0"/>
-                <a:ea typeface="Menlo" pitchFamily="34" charset="-122"/>
-                <a:cs typeface="Menlo" pitchFamily="34" charset="-120"/>
+                <a:latin typeface="Consolas" pitchFamily="34" charset="0"/>
+                <a:ea typeface="Consolas" pitchFamily="34" charset="-122"/>
+                <a:cs typeface="Consolas" pitchFamily="34" charset="-120"/>
               </a:rPr>
               <a:t>フォルダ作成 → 起動</a:t>
             </a:r>
@@ -7845,9 +7845,9 @@
                 <a:solidFill>
                   <a:srgbClr val="8B949E"/>
                 </a:solidFill>
-                <a:latin typeface="Menlo" pitchFamily="34" charset="0"/>
-                <a:ea typeface="Menlo" pitchFamily="34" charset="-122"/>
-                <a:cs typeface="Menlo" pitchFamily="34" charset="-120"/>
+                <a:latin typeface="Consolas" pitchFamily="34" charset="0"/>
+                <a:ea typeface="Consolas" pitchFamily="34" charset="-122"/>
+                <a:cs typeface="Consolas" pitchFamily="34" charset="-120"/>
               </a:rPr>
               <a:t># 作業フォルダを作って入る</a:t>
             </a:r>
@@ -7865,9 +7865,9 @@
                 <a:solidFill>
                   <a:srgbClr val="3FB950"/>
                 </a:solidFill>
-                <a:latin typeface="Menlo" pitchFamily="34" charset="0"/>
-                <a:ea typeface="Menlo" pitchFamily="34" charset="-122"/>
-                <a:cs typeface="Menlo" pitchFamily="34" charset="-120"/>
+                <a:latin typeface="Consolas" pitchFamily="34" charset="0"/>
+                <a:ea typeface="Consolas" pitchFamily="34" charset="-122"/>
+                <a:cs typeface="Consolas" pitchFamily="34" charset="-120"/>
               </a:rPr>
               <a:t>$ mkdir todo-app</a:t>
             </a:r>
@@ -7885,9 +7885,9 @@
                 <a:solidFill>
                   <a:srgbClr val="3FB950"/>
                 </a:solidFill>
-                <a:latin typeface="Menlo" pitchFamily="34" charset="0"/>
-                <a:ea typeface="Menlo" pitchFamily="34" charset="-122"/>
-                <a:cs typeface="Menlo" pitchFamily="34" charset="-120"/>
+                <a:latin typeface="Consolas" pitchFamily="34" charset="0"/>
+                <a:ea typeface="Consolas" pitchFamily="34" charset="-122"/>
+                <a:cs typeface="Consolas" pitchFamily="34" charset="-120"/>
               </a:rPr>
               <a:t>$ cd todo-app</a:t>
             </a:r>
@@ -7905,9 +7905,9 @@
                 <a:solidFill>
                   <a:srgbClr val="C9D1D9"/>
                 </a:solidFill>
-                <a:latin typeface="Menlo" pitchFamily="34" charset="0"/>
-                <a:ea typeface="Menlo" pitchFamily="34" charset="-122"/>
-                <a:cs typeface="Menlo" pitchFamily="34" charset="-120"/>
+                <a:latin typeface="Consolas" pitchFamily="34" charset="0"/>
+                <a:ea typeface="Consolas" pitchFamily="34" charset="-122"/>
+                <a:cs typeface="Consolas" pitchFamily="34" charset="-120"/>
               </a:rPr>
               <a:t> </a:t>
             </a:r>
@@ -7925,9 +7925,9 @@
                 <a:solidFill>
                   <a:srgbClr val="8B949E"/>
                 </a:solidFill>
-                <a:latin typeface="Menlo" pitchFamily="34" charset="0"/>
-                <a:ea typeface="Menlo" pitchFamily="34" charset="-122"/>
-                <a:cs typeface="Menlo" pitchFamily="34" charset="-120"/>
+                <a:latin typeface="Consolas" pitchFamily="34" charset="0"/>
+                <a:ea typeface="Consolas" pitchFamily="34" charset="-122"/>
+                <a:cs typeface="Consolas" pitchFamily="34" charset="-120"/>
               </a:rPr>
               <a:t># OpenCode を起動</a:t>
             </a:r>
@@ -7945,9 +7945,9 @@
                 <a:solidFill>
                   <a:srgbClr val="3FB950"/>
                 </a:solidFill>
-                <a:latin typeface="Menlo" pitchFamily="34" charset="0"/>
-                <a:ea typeface="Menlo" pitchFamily="34" charset="-122"/>
-                <a:cs typeface="Menlo" pitchFamily="34" charset="-120"/>
+                <a:latin typeface="Consolas" pitchFamily="34" charset="0"/>
+                <a:ea typeface="Consolas" pitchFamily="34" charset="-122"/>
+                <a:cs typeface="Consolas" pitchFamily="34" charset="-120"/>
               </a:rPr>
               <a:t>$ opencode</a:t>
             </a:r>
@@ -8038,9 +8038,9 @@
                 <a:solidFill>
                   <a:srgbClr val="3FB950"/>
                 </a:solidFill>
-                <a:latin typeface="Hiragino Sans" pitchFamily="34" charset="0"/>
-                <a:ea typeface="Hiragino Sans" pitchFamily="34" charset="-122"/>
-                <a:cs typeface="Hiragino Sans" pitchFamily="34" charset="-120"/>
+                <a:latin typeface="Yu Gothic" pitchFamily="34" charset="0"/>
+                <a:ea typeface="Yu Gothic" pitchFamily="34" charset="-122"/>
+                <a:cs typeface="Yu Gothic" pitchFamily="34" charset="-120"/>
               </a:rPr>
               <a:t>フォルダ名は自由</a:t>
             </a:r>
@@ -8080,9 +8080,9 @@
                 <a:solidFill>
                   <a:srgbClr val="C9D1D9"/>
                 </a:solidFill>
-                <a:latin typeface="Hiragino Sans" pitchFamily="34" charset="0"/>
-                <a:ea typeface="Hiragino Sans" pitchFamily="34" charset="-122"/>
-                <a:cs typeface="Hiragino Sans" pitchFamily="34" charset="-120"/>
+                <a:latin typeface="Yu Gothic" pitchFamily="34" charset="0"/>
+                <a:ea typeface="Yu Gothic" pitchFamily="34" charset="-122"/>
+                <a:cs typeface="Yu Gothic" pitchFamily="34" charset="-120"/>
               </a:rPr>
               <a:t>好きな名前でOK（例: todo-app）。これから作るファイルは、このフォルダの中にできていきます。</a:t>
             </a:r>
@@ -8119,9 +8119,9 @@
                 <a:solidFill>
                   <a:srgbClr val="8B949E"/>
                 </a:solidFill>
-                <a:latin typeface="Hiragino Sans" pitchFamily="34" charset="0"/>
-                <a:ea typeface="Hiragino Sans" pitchFamily="34" charset="-122"/>
-                <a:cs typeface="Hiragino Sans" pitchFamily="34" charset="-120"/>
+                <a:latin typeface="Yu Gothic" pitchFamily="34" charset="0"/>
+                <a:ea typeface="Yu Gothic" pitchFamily="34" charset="-122"/>
+                <a:cs typeface="Yu Gothic" pitchFamily="34" charset="-120"/>
               </a:rPr>
               <a:t>コーディングエージェント入門</a:t>
             </a:r>
@@ -8133,9 +8133,9 @@
                 <a:solidFill>
                   <a:srgbClr val="30363D"/>
                 </a:solidFill>
-                <a:latin typeface="Hiragino Sans" pitchFamily="34" charset="0"/>
-                <a:ea typeface="Hiragino Sans" pitchFamily="34" charset="-122"/>
-                <a:cs typeface="Hiragino Sans" pitchFamily="34" charset="-120"/>
+                <a:latin typeface="Yu Gothic" pitchFamily="34" charset="0"/>
+                <a:ea typeface="Yu Gothic" pitchFamily="34" charset="-122"/>
+                <a:cs typeface="Yu Gothic" pitchFamily="34" charset="-120"/>
               </a:rPr>
               <a:t>  ·  OpenCode × OpenRouter</a:t>
             </a:r>
@@ -8172,9 +8172,9 @@
                 <a:solidFill>
                   <a:srgbClr val="8B949E"/>
                 </a:solidFill>
-                <a:latin typeface="Menlo" pitchFamily="34" charset="0"/>
-                <a:ea typeface="Menlo" pitchFamily="34" charset="-122"/>
-                <a:cs typeface="Menlo" pitchFamily="34" charset="-120"/>
+                <a:latin typeface="Consolas" pitchFamily="34" charset="0"/>
+                <a:ea typeface="Consolas" pitchFamily="34" charset="-122"/>
+                <a:cs typeface="Consolas" pitchFamily="34" charset="-120"/>
               </a:rPr>
               <a:t>14 / 26</a:t>
             </a:r>
@@ -8243,9 +8243,9 @@
                 <a:solidFill>
                   <a:srgbClr val="3FB950"/>
                 </a:solidFill>
-                <a:latin typeface="Menlo" pitchFamily="34" charset="0"/>
-                <a:ea typeface="Menlo" pitchFamily="34" charset="-122"/>
-                <a:cs typeface="Menlo" pitchFamily="34" charset="-120"/>
+                <a:latin typeface="Consolas" pitchFamily="34" charset="0"/>
+                <a:ea typeface="Consolas" pitchFamily="34" charset="-122"/>
+                <a:cs typeface="Consolas" pitchFamily="34" charset="-120"/>
               </a:rPr>
               <a:t>CONNECT</a:t>
             </a:r>
@@ -8282,9 +8282,9 @@
                 <a:solidFill>
                   <a:srgbClr val="3FB950"/>
                 </a:solidFill>
-                <a:latin typeface="Menlo" pitchFamily="34" charset="0"/>
-                <a:ea typeface="Menlo" pitchFamily="34" charset="-122"/>
-                <a:cs typeface="Menlo" pitchFamily="34" charset="-120"/>
+                <a:latin typeface="Consolas" pitchFamily="34" charset="0"/>
+                <a:ea typeface="Consolas" pitchFamily="34" charset="-122"/>
+                <a:cs typeface="Consolas" pitchFamily="34" charset="-120"/>
               </a:rPr>
               <a:t>&gt;</a:t>
             </a:r>
@@ -8321,9 +8321,9 @@
                 <a:solidFill>
                   <a:srgbClr val="E6EDF3"/>
                 </a:solidFill>
-                <a:latin typeface="Hiragino Sans" pitchFamily="34" charset="0"/>
-                <a:ea typeface="Hiragino Sans" pitchFamily="34" charset="-122"/>
-                <a:cs typeface="Hiragino Sans" pitchFamily="34" charset="-120"/>
+                <a:latin typeface="Yu Gothic" pitchFamily="34" charset="0"/>
+                <a:ea typeface="Yu Gothic" pitchFamily="34" charset="-122"/>
+                <a:cs typeface="Yu Gothic" pitchFamily="34" charset="-120"/>
               </a:rPr>
               <a:t>STEP 4 ── /connect で接続する</a:t>
             </a:r>
@@ -8414,9 +8414,9 @@
                 <a:solidFill>
                   <a:srgbClr val="0D1117"/>
                 </a:solidFill>
-                <a:latin typeface="Hiragino Sans" pitchFamily="34" charset="0"/>
-                <a:ea typeface="Hiragino Sans" pitchFamily="34" charset="-122"/>
-                <a:cs typeface="Hiragino Sans" pitchFamily="34" charset="-120"/>
+                <a:latin typeface="Yu Gothic" pitchFamily="34" charset="0"/>
+                <a:ea typeface="Yu Gothic" pitchFamily="34" charset="-122"/>
+                <a:cs typeface="Yu Gothic" pitchFamily="34" charset="-120"/>
               </a:rPr>
               <a:t>1</a:t>
             </a:r>
@@ -8453,9 +8453,9 @@
                 <a:solidFill>
                   <a:srgbClr val="E6EDF3"/>
                 </a:solidFill>
-                <a:latin typeface="Hiragino Sans" pitchFamily="34" charset="0"/>
-                <a:ea typeface="Hiragino Sans" pitchFamily="34" charset="-122"/>
-                <a:cs typeface="Hiragino Sans" pitchFamily="34" charset="-120"/>
+                <a:latin typeface="Yu Gothic" pitchFamily="34" charset="0"/>
+                <a:ea typeface="Yu Gothic" pitchFamily="34" charset="-122"/>
+                <a:cs typeface="Yu Gothic" pitchFamily="34" charset="-120"/>
               </a:rPr>
               <a:t>/connect と入力</a:t>
             </a:r>
@@ -8492,9 +8492,9 @@
                 <a:solidFill>
                   <a:srgbClr val="8B949E"/>
                 </a:solidFill>
-                <a:latin typeface="Hiragino Sans" pitchFamily="34" charset="0"/>
-                <a:ea typeface="Hiragino Sans" pitchFamily="34" charset="-122"/>
-                <a:cs typeface="Hiragino Sans" pitchFamily="34" charset="-120"/>
+                <a:latin typeface="Yu Gothic" pitchFamily="34" charset="0"/>
+                <a:ea typeface="Yu Gothic" pitchFamily="34" charset="-122"/>
+                <a:cs typeface="Yu Gothic" pitchFamily="34" charset="-120"/>
               </a:rPr>
               <a:t>TUIの入力欄に打って Enter</a:t>
             </a:r>
@@ -8585,9 +8585,9 @@
                 <a:solidFill>
                   <a:srgbClr val="0D1117"/>
                 </a:solidFill>
-                <a:latin typeface="Hiragino Sans" pitchFamily="34" charset="0"/>
-                <a:ea typeface="Hiragino Sans" pitchFamily="34" charset="-122"/>
-                <a:cs typeface="Hiragino Sans" pitchFamily="34" charset="-120"/>
+                <a:latin typeface="Yu Gothic" pitchFamily="34" charset="0"/>
+                <a:ea typeface="Yu Gothic" pitchFamily="34" charset="-122"/>
+                <a:cs typeface="Yu Gothic" pitchFamily="34" charset="-120"/>
               </a:rPr>
               <a:t>2</a:t>
             </a:r>
@@ -8624,9 +8624,9 @@
                 <a:solidFill>
                   <a:srgbClr val="E6EDF3"/>
                 </a:solidFill>
-                <a:latin typeface="Hiragino Sans" pitchFamily="34" charset="0"/>
-                <a:ea typeface="Hiragino Sans" pitchFamily="34" charset="-122"/>
-                <a:cs typeface="Hiragino Sans" pitchFamily="34" charset="-120"/>
+                <a:latin typeface="Yu Gothic" pitchFamily="34" charset="0"/>
+                <a:ea typeface="Yu Gothic" pitchFamily="34" charset="-122"/>
+                <a:cs typeface="Yu Gothic" pitchFamily="34" charset="-120"/>
               </a:rPr>
               <a:t>OpenRouter を選ぶ</a:t>
             </a:r>
@@ -8663,9 +8663,9 @@
                 <a:solidFill>
                   <a:srgbClr val="8B949E"/>
                 </a:solidFill>
-                <a:latin typeface="Hiragino Sans" pitchFamily="34" charset="0"/>
-                <a:ea typeface="Hiragino Sans" pitchFamily="34" charset="-122"/>
-                <a:cs typeface="Hiragino Sans" pitchFamily="34" charset="-120"/>
+                <a:latin typeface="Yu Gothic" pitchFamily="34" charset="0"/>
+                <a:ea typeface="Yu Gothic" pitchFamily="34" charset="-122"/>
+                <a:cs typeface="Yu Gothic" pitchFamily="34" charset="-120"/>
               </a:rPr>
               <a:t>provider 一覧から選択</a:t>
             </a:r>
@@ -8756,9 +8756,9 @@
                 <a:solidFill>
                   <a:srgbClr val="0D1117"/>
                 </a:solidFill>
-                <a:latin typeface="Hiragino Sans" pitchFamily="34" charset="0"/>
-                <a:ea typeface="Hiragino Sans" pitchFamily="34" charset="-122"/>
-                <a:cs typeface="Hiragino Sans" pitchFamily="34" charset="-120"/>
+                <a:latin typeface="Yu Gothic" pitchFamily="34" charset="0"/>
+                <a:ea typeface="Yu Gothic" pitchFamily="34" charset="-122"/>
+                <a:cs typeface="Yu Gothic" pitchFamily="34" charset="-120"/>
               </a:rPr>
               <a:t>3</a:t>
             </a:r>
@@ -8795,9 +8795,9 @@
                 <a:solidFill>
                   <a:srgbClr val="E6EDF3"/>
                 </a:solidFill>
-                <a:latin typeface="Hiragino Sans" pitchFamily="34" charset="0"/>
-                <a:ea typeface="Hiragino Sans" pitchFamily="34" charset="-122"/>
-                <a:cs typeface="Hiragino Sans" pitchFamily="34" charset="-120"/>
+                <a:latin typeface="Yu Gothic" pitchFamily="34" charset="0"/>
+                <a:ea typeface="Yu Gothic" pitchFamily="34" charset="-122"/>
+                <a:cs typeface="Yu Gothic" pitchFamily="34" charset="-120"/>
               </a:rPr>
               <a:t>API キーを貼る</a:t>
             </a:r>
@@ -8834,9 +8834,9 @@
                 <a:solidFill>
                   <a:srgbClr val="8B949E"/>
                 </a:solidFill>
-                <a:latin typeface="Hiragino Sans" pitchFamily="34" charset="0"/>
-                <a:ea typeface="Hiragino Sans" pitchFamily="34" charset="-122"/>
-                <a:cs typeface="Hiragino Sans" pitchFamily="34" charset="-120"/>
+                <a:latin typeface="Yu Gothic" pitchFamily="34" charset="0"/>
+                <a:ea typeface="Yu Gothic" pitchFamily="34" charset="-122"/>
+                <a:cs typeface="Yu Gothic" pitchFamily="34" charset="-120"/>
               </a:rPr>
               <a:t>STEP 2 で控えたキーを貼り付け</a:t>
             </a:r>
@@ -8987,9 +8987,9 @@
                 <a:solidFill>
                   <a:srgbClr val="8B949E"/>
                 </a:solidFill>
-                <a:latin typeface="Menlo" pitchFamily="34" charset="0"/>
-                <a:ea typeface="Menlo" pitchFamily="34" charset="-122"/>
-                <a:cs typeface="Menlo" pitchFamily="34" charset="-120"/>
+                <a:latin typeface="Consolas" pitchFamily="34" charset="0"/>
+                <a:ea typeface="Consolas" pitchFamily="34" charset="-122"/>
+                <a:cs typeface="Consolas" pitchFamily="34" charset="-120"/>
               </a:rPr>
               <a:t>入力イメージ</a:t>
             </a:r>
@@ -9029,9 +9029,9 @@
                 <a:solidFill>
                   <a:srgbClr val="3FB950"/>
                 </a:solidFill>
-                <a:latin typeface="Menlo" pitchFamily="34" charset="0"/>
-                <a:ea typeface="Menlo" pitchFamily="34" charset="-122"/>
-                <a:cs typeface="Menlo" pitchFamily="34" charset="-120"/>
+                <a:latin typeface="Consolas" pitchFamily="34" charset="0"/>
+                <a:ea typeface="Consolas" pitchFamily="34" charset="-122"/>
+                <a:cs typeface="Consolas" pitchFamily="34" charset="-120"/>
               </a:rPr>
               <a:t>&gt; /connect</a:t>
             </a:r>
@@ -9049,9 +9049,9 @@
                 <a:solidFill>
                   <a:srgbClr val="C9D1D9"/>
                 </a:solidFill>
-                <a:latin typeface="Menlo" pitchFamily="34" charset="0"/>
-                <a:ea typeface="Menlo" pitchFamily="34" charset="-122"/>
-                <a:cs typeface="Menlo" pitchFamily="34" charset="-120"/>
+                <a:latin typeface="Consolas" pitchFamily="34" charset="0"/>
+                <a:ea typeface="Consolas" pitchFamily="34" charset="-122"/>
+                <a:cs typeface="Consolas" pitchFamily="34" charset="-120"/>
               </a:rPr>
               <a:t> </a:t>
             </a:r>
@@ -9069,9 +9069,9 @@
                 <a:solidFill>
                   <a:srgbClr val="8B949E"/>
                 </a:solidFill>
-                <a:latin typeface="Menlo" pitchFamily="34" charset="0"/>
-                <a:ea typeface="Menlo" pitchFamily="34" charset="-122"/>
-                <a:cs typeface="Menlo" pitchFamily="34" charset="-120"/>
+                <a:latin typeface="Consolas" pitchFamily="34" charset="0"/>
+                <a:ea typeface="Consolas" pitchFamily="34" charset="-122"/>
+                <a:cs typeface="Consolas" pitchFamily="34" charset="-120"/>
               </a:rPr>
               <a:t>  ? Provider</a:t>
             </a:r>
@@ -9089,9 +9089,9 @@
                 <a:solidFill>
                   <a:srgbClr val="58A6FF"/>
                 </a:solidFill>
-                <a:latin typeface="Menlo" pitchFamily="34" charset="0"/>
-                <a:ea typeface="Menlo" pitchFamily="34" charset="-122"/>
-                <a:cs typeface="Menlo" pitchFamily="34" charset="-120"/>
+                <a:latin typeface="Consolas" pitchFamily="34" charset="0"/>
+                <a:ea typeface="Consolas" pitchFamily="34" charset="-122"/>
+                <a:cs typeface="Consolas" pitchFamily="34" charset="-120"/>
               </a:rPr>
               <a:t>  &gt; OpenRouter</a:t>
             </a:r>
@@ -9109,9 +9109,9 @@
                 <a:solidFill>
                   <a:srgbClr val="C9D1D9"/>
                 </a:solidFill>
-                <a:latin typeface="Menlo" pitchFamily="34" charset="0"/>
-                <a:ea typeface="Menlo" pitchFamily="34" charset="-122"/>
-                <a:cs typeface="Menlo" pitchFamily="34" charset="-120"/>
+                <a:latin typeface="Consolas" pitchFamily="34" charset="0"/>
+                <a:ea typeface="Consolas" pitchFamily="34" charset="-122"/>
+                <a:cs typeface="Consolas" pitchFamily="34" charset="-120"/>
               </a:rPr>
               <a:t> </a:t>
             </a:r>
@@ -9129,9 +9129,9 @@
                 <a:solidFill>
                   <a:srgbClr val="8B949E"/>
                 </a:solidFill>
-                <a:latin typeface="Menlo" pitchFamily="34" charset="0"/>
-                <a:ea typeface="Menlo" pitchFamily="34" charset="-122"/>
-                <a:cs typeface="Menlo" pitchFamily="34" charset="-120"/>
+                <a:latin typeface="Consolas" pitchFamily="34" charset="0"/>
+                <a:ea typeface="Consolas" pitchFamily="34" charset="-122"/>
+                <a:cs typeface="Consolas" pitchFamily="34" charset="-120"/>
               </a:rPr>
               <a:t>  ? API Key</a:t>
             </a:r>
@@ -9149,9 +9149,9 @@
                 <a:solidFill>
                   <a:srgbClr val="C9D1D9"/>
                 </a:solidFill>
-                <a:latin typeface="Menlo" pitchFamily="34" charset="0"/>
-                <a:ea typeface="Menlo" pitchFamily="34" charset="-122"/>
-                <a:cs typeface="Menlo" pitchFamily="34" charset="-120"/>
+                <a:latin typeface="Consolas" pitchFamily="34" charset="0"/>
+                <a:ea typeface="Consolas" pitchFamily="34" charset="-122"/>
+                <a:cs typeface="Consolas" pitchFamily="34" charset="-120"/>
               </a:rPr>
               <a:t>  &gt; sk-or-••••••••</a:t>
             </a:r>
@@ -9169,9 +9169,9 @@
                 <a:solidFill>
                   <a:srgbClr val="C9D1D9"/>
                 </a:solidFill>
-                <a:latin typeface="Menlo" pitchFamily="34" charset="0"/>
-                <a:ea typeface="Menlo" pitchFamily="34" charset="-122"/>
-                <a:cs typeface="Menlo" pitchFamily="34" charset="-120"/>
+                <a:latin typeface="Consolas" pitchFamily="34" charset="0"/>
+                <a:ea typeface="Consolas" pitchFamily="34" charset="-122"/>
+                <a:cs typeface="Consolas" pitchFamily="34" charset="-120"/>
               </a:rPr>
               <a:t> </a:t>
             </a:r>
@@ -9189,9 +9189,9 @@
                 <a:solidFill>
                   <a:srgbClr val="3FB950"/>
                 </a:solidFill>
-                <a:latin typeface="Menlo" pitchFamily="34" charset="0"/>
-                <a:ea typeface="Menlo" pitchFamily="34" charset="-122"/>
-                <a:cs typeface="Menlo" pitchFamily="34" charset="-120"/>
+                <a:latin typeface="Consolas" pitchFamily="34" charset="0"/>
+                <a:ea typeface="Consolas" pitchFamily="34" charset="-122"/>
+                <a:cs typeface="Consolas" pitchFamily="34" charset="-120"/>
               </a:rPr>
               <a:t>  ✓ 接続しました</a:t>
             </a:r>
@@ -9228,9 +9228,9 @@
                 <a:solidFill>
                   <a:srgbClr val="8B949E"/>
                 </a:solidFill>
-                <a:latin typeface="Hiragino Sans" pitchFamily="34" charset="0"/>
-                <a:ea typeface="Hiragino Sans" pitchFamily="34" charset="-122"/>
-                <a:cs typeface="Hiragino Sans" pitchFamily="34" charset="-120"/>
+                <a:latin typeface="Yu Gothic" pitchFamily="34" charset="0"/>
+                <a:ea typeface="Yu Gothic" pitchFamily="34" charset="-122"/>
+                <a:cs typeface="Yu Gothic" pitchFamily="34" charset="-120"/>
               </a:rPr>
               <a:t>コーディングエージェント入門</a:t>
             </a:r>
@@ -9242,9 +9242,9 @@
                 <a:solidFill>
                   <a:srgbClr val="30363D"/>
                 </a:solidFill>
-                <a:latin typeface="Hiragino Sans" pitchFamily="34" charset="0"/>
-                <a:ea typeface="Hiragino Sans" pitchFamily="34" charset="-122"/>
-                <a:cs typeface="Hiragino Sans" pitchFamily="34" charset="-120"/>
+                <a:latin typeface="Yu Gothic" pitchFamily="34" charset="0"/>
+                <a:ea typeface="Yu Gothic" pitchFamily="34" charset="-122"/>
+                <a:cs typeface="Yu Gothic" pitchFamily="34" charset="-120"/>
               </a:rPr>
               <a:t>  ·  OpenCode × OpenRouter</a:t>
             </a:r>
@@ -9281,9 +9281,9 @@
                 <a:solidFill>
                   <a:srgbClr val="8B949E"/>
                 </a:solidFill>
-                <a:latin typeface="Menlo" pitchFamily="34" charset="0"/>
-                <a:ea typeface="Menlo" pitchFamily="34" charset="-122"/>
-                <a:cs typeface="Menlo" pitchFamily="34" charset="-120"/>
+                <a:latin typeface="Consolas" pitchFamily="34" charset="0"/>
+                <a:ea typeface="Consolas" pitchFamily="34" charset="-122"/>
+                <a:cs typeface="Consolas" pitchFamily="34" charset="-120"/>
               </a:rPr>
               <a:t>15 / 26</a:t>
             </a:r>
@@ -9352,9 +9352,9 @@
                 <a:solidFill>
                   <a:srgbClr val="3FB950"/>
                 </a:solidFill>
-                <a:latin typeface="Menlo" pitchFamily="34" charset="0"/>
-                <a:ea typeface="Menlo" pitchFamily="34" charset="-122"/>
-                <a:cs typeface="Menlo" pitchFamily="34" charset="-120"/>
+                <a:latin typeface="Consolas" pitchFamily="34" charset="0"/>
+                <a:ea typeface="Consolas" pitchFamily="34" charset="-122"/>
+                <a:cs typeface="Consolas" pitchFamily="34" charset="-120"/>
               </a:rPr>
               <a:t>CONNECT</a:t>
             </a:r>
@@ -9391,9 +9391,9 @@
                 <a:solidFill>
                   <a:srgbClr val="3FB950"/>
                 </a:solidFill>
-                <a:latin typeface="Menlo" pitchFamily="34" charset="0"/>
-                <a:ea typeface="Menlo" pitchFamily="34" charset="-122"/>
-                <a:cs typeface="Menlo" pitchFamily="34" charset="-120"/>
+                <a:latin typeface="Consolas" pitchFamily="34" charset="0"/>
+                <a:ea typeface="Consolas" pitchFamily="34" charset="-122"/>
+                <a:cs typeface="Consolas" pitchFamily="34" charset="-120"/>
               </a:rPr>
               <a:t>&gt;</a:t>
             </a:r>
@@ -9430,9 +9430,9 @@
                 <a:solidFill>
                   <a:srgbClr val="E6EDF3"/>
                 </a:solidFill>
-                <a:latin typeface="Hiragino Sans" pitchFamily="34" charset="0"/>
-                <a:ea typeface="Hiragino Sans" pitchFamily="34" charset="-122"/>
-                <a:cs typeface="Hiragino Sans" pitchFamily="34" charset="-120"/>
+                <a:latin typeface="Yu Gothic" pitchFamily="34" charset="0"/>
+                <a:ea typeface="Yu Gothic" pitchFamily="34" charset="-122"/>
+                <a:cs typeface="Yu Gothic" pitchFamily="34" charset="-120"/>
               </a:rPr>
               <a:t>STEP 5 ── Free Models Router を選ぶ</a:t>
             </a:r>
@@ -9469,9 +9469,9 @@
                 <a:solidFill>
                   <a:srgbClr val="C9D1D9"/>
                 </a:solidFill>
-                <a:latin typeface="Hiragino Sans" pitchFamily="34" charset="0"/>
-                <a:ea typeface="Hiragino Sans" pitchFamily="34" charset="-122"/>
-                <a:cs typeface="Hiragino Sans" pitchFamily="34" charset="-120"/>
+                <a:latin typeface="Yu Gothic" pitchFamily="34" charset="0"/>
+                <a:ea typeface="Yu Gothic" pitchFamily="34" charset="-122"/>
+                <a:cs typeface="Yu Gothic" pitchFamily="34" charset="-120"/>
               </a:rPr>
               <a:t>モデル選択画面で </a:t>
             </a:r>
@@ -9483,9 +9483,9 @@
                 <a:solidFill>
                   <a:srgbClr val="3FB950"/>
                 </a:solidFill>
-                <a:latin typeface="Hiragino Sans" pitchFamily="34" charset="0"/>
-                <a:ea typeface="Hiragino Sans" pitchFamily="34" charset="-122"/>
-                <a:cs typeface="Hiragino Sans" pitchFamily="34" charset="-120"/>
+                <a:latin typeface="Yu Gothic" pitchFamily="34" charset="0"/>
+                <a:ea typeface="Yu Gothic" pitchFamily="34" charset="-122"/>
+                <a:cs typeface="Yu Gothic" pitchFamily="34" charset="-120"/>
               </a:rPr>
               <a:t>Free Models Router</a:t>
             </a:r>
@@ -9497,9 +9497,9 @@
                 <a:solidFill>
                   <a:srgbClr val="C9D1D9"/>
                 </a:solidFill>
-                <a:latin typeface="Hiragino Sans" pitchFamily="34" charset="0"/>
-                <a:ea typeface="Hiragino Sans" pitchFamily="34" charset="-122"/>
-                <a:cs typeface="Hiragino Sans" pitchFamily="34" charset="-120"/>
+                <a:latin typeface="Yu Gothic" pitchFamily="34" charset="0"/>
+                <a:ea typeface="Yu Gothic" pitchFamily="34" charset="-122"/>
+                <a:cs typeface="Yu Gothic" pitchFamily="34" charset="-120"/>
               </a:rPr>
               <a:t> を選びます。</a:t>
             </a:r>
@@ -9650,9 +9650,9 @@
                 <a:solidFill>
                   <a:srgbClr val="8B949E"/>
                 </a:solidFill>
-                <a:latin typeface="Menlo" pitchFamily="34" charset="0"/>
-                <a:ea typeface="Menlo" pitchFamily="34" charset="-122"/>
-                <a:cs typeface="Menlo" pitchFamily="34" charset="-120"/>
+                <a:latin typeface="Consolas" pitchFamily="34" charset="0"/>
+                <a:ea typeface="Consolas" pitchFamily="34" charset="-122"/>
+                <a:cs typeface="Consolas" pitchFamily="34" charset="-120"/>
               </a:rPr>
               <a:t>モデルを探す</a:t>
             </a:r>
@@ -9692,9 +9692,9 @@
                 <a:solidFill>
                   <a:srgbClr val="8B949E"/>
                 </a:solidFill>
-                <a:latin typeface="Menlo" pitchFamily="34" charset="0"/>
-                <a:ea typeface="Menlo" pitchFamily="34" charset="-122"/>
-                <a:cs typeface="Menlo" pitchFamily="34" charset="-120"/>
+                <a:latin typeface="Consolas" pitchFamily="34" charset="0"/>
+                <a:ea typeface="Consolas" pitchFamily="34" charset="-122"/>
+                <a:cs typeface="Consolas" pitchFamily="34" charset="-120"/>
               </a:rPr>
               <a:t># 見つからなければ検索欄に：</a:t>
             </a:r>
@@ -9712,9 +9712,9 @@
                 <a:solidFill>
                   <a:srgbClr val="3FB950"/>
                 </a:solidFill>
-                <a:latin typeface="Menlo" pitchFamily="34" charset="0"/>
-                <a:ea typeface="Menlo" pitchFamily="34" charset="-122"/>
-                <a:cs typeface="Menlo" pitchFamily="34" charset="-120"/>
+                <a:latin typeface="Consolas" pitchFamily="34" charset="0"/>
+                <a:ea typeface="Consolas" pitchFamily="34" charset="-122"/>
+                <a:cs typeface="Consolas" pitchFamily="34" charset="-120"/>
               </a:rPr>
               <a:t>Free Models Router</a:t>
             </a:r>
@@ -9732,9 +9732,9 @@
                 <a:solidFill>
                   <a:srgbClr val="8B949E"/>
                 </a:solidFill>
-                <a:latin typeface="Menlo" pitchFamily="34" charset="0"/>
-                <a:ea typeface="Menlo" pitchFamily="34" charset="-122"/>
-                <a:cs typeface="Menlo" pitchFamily="34" charset="-120"/>
+                <a:latin typeface="Consolas" pitchFamily="34" charset="0"/>
+                <a:ea typeface="Consolas" pitchFamily="34" charset="-122"/>
+                <a:cs typeface="Consolas" pitchFamily="34" charset="-120"/>
               </a:rPr>
               <a:t># と入力して絞り込む</a:t>
             </a:r>
@@ -9825,9 +9825,9 @@
                 <a:solidFill>
                   <a:srgbClr val="E6EDF3"/>
                 </a:solidFill>
-                <a:latin typeface="Hiragino Sans" pitchFamily="34" charset="0"/>
-                <a:ea typeface="Hiragino Sans" pitchFamily="34" charset="-122"/>
-                <a:cs typeface="Hiragino Sans" pitchFamily="34" charset="-120"/>
+                <a:latin typeface="Yu Gothic" pitchFamily="34" charset="0"/>
+                <a:ea typeface="Yu Gothic" pitchFamily="34" charset="-122"/>
+                <a:cs typeface="Yu Gothic" pitchFamily="34" charset="-120"/>
               </a:rPr>
               <a:t>動作確認</a:t>
             </a:r>
@@ -9864,9 +9864,9 @@
                 <a:solidFill>
                   <a:srgbClr val="3FB950"/>
                 </a:solidFill>
-                <a:latin typeface="Menlo" pitchFamily="34" charset="0"/>
-                <a:ea typeface="Menlo" pitchFamily="34" charset="-122"/>
-                <a:cs typeface="Menlo" pitchFamily="34" charset="-120"/>
+                <a:latin typeface="Consolas" pitchFamily="34" charset="0"/>
+                <a:ea typeface="Consolas" pitchFamily="34" charset="-122"/>
+                <a:cs typeface="Consolas" pitchFamily="34" charset="-120"/>
               </a:rPr>
               <a:t>Reply with OK only.</a:t>
             </a:r>
@@ -9878,9 +9878,9 @@
                 <a:solidFill>
                   <a:srgbClr val="C9D1D9"/>
                 </a:solidFill>
-                <a:latin typeface="Hiragino Sans" pitchFamily="34" charset="0"/>
-                <a:ea typeface="Hiragino Sans" pitchFamily="34" charset="-122"/>
-                <a:cs typeface="Hiragino Sans" pitchFamily="34" charset="-120"/>
+                <a:latin typeface="Yu Gothic" pitchFamily="34" charset="0"/>
+                <a:ea typeface="Yu Gothic" pitchFamily="34" charset="-122"/>
+                <a:cs typeface="Yu Gothic" pitchFamily="34" charset="-120"/>
               </a:rPr>
               <a:t>  と送って </a:t>
             </a:r>
@@ -9892,9 +9892,9 @@
                 <a:solidFill>
                   <a:srgbClr val="3FB950"/>
                 </a:solidFill>
-                <a:latin typeface="Menlo" pitchFamily="34" charset="0"/>
-                <a:ea typeface="Menlo" pitchFamily="34" charset="-122"/>
-                <a:cs typeface="Menlo" pitchFamily="34" charset="-120"/>
+                <a:latin typeface="Consolas" pitchFamily="34" charset="0"/>
+                <a:ea typeface="Consolas" pitchFamily="34" charset="-122"/>
+                <a:cs typeface="Consolas" pitchFamily="34" charset="-120"/>
               </a:rPr>
               <a:t>OK</a:t>
             </a:r>
@@ -9906,9 +9906,9 @@
                 <a:solidFill>
                   <a:srgbClr val="C9D1D9"/>
                 </a:solidFill>
-                <a:latin typeface="Hiragino Sans" pitchFamily="34" charset="0"/>
-                <a:ea typeface="Hiragino Sans" pitchFamily="34" charset="-122"/>
-                <a:cs typeface="Hiragino Sans" pitchFamily="34" charset="-120"/>
+                <a:latin typeface="Yu Gothic" pitchFamily="34" charset="0"/>
+                <a:ea typeface="Yu Gothic" pitchFamily="34" charset="-122"/>
+                <a:cs typeface="Yu Gothic" pitchFamily="34" charset="-120"/>
               </a:rPr>
               <a:t> が返れば、接続成功です 🎉</a:t>
             </a:r>
@@ -9945,9 +9945,9 @@
                 <a:solidFill>
                   <a:srgbClr val="8B949E"/>
                 </a:solidFill>
-                <a:latin typeface="Hiragino Sans" pitchFamily="34" charset="0"/>
-                <a:ea typeface="Hiragino Sans" pitchFamily="34" charset="-122"/>
-                <a:cs typeface="Hiragino Sans" pitchFamily="34" charset="-120"/>
+                <a:latin typeface="Yu Gothic" pitchFamily="34" charset="0"/>
+                <a:ea typeface="Yu Gothic" pitchFamily="34" charset="-122"/>
+                <a:cs typeface="Yu Gothic" pitchFamily="34" charset="-120"/>
               </a:rPr>
               <a:t>コーディングエージェント入門</a:t>
             </a:r>
@@ -9959,9 +9959,9 @@
                 <a:solidFill>
                   <a:srgbClr val="30363D"/>
                 </a:solidFill>
-                <a:latin typeface="Hiragino Sans" pitchFamily="34" charset="0"/>
-                <a:ea typeface="Hiragino Sans" pitchFamily="34" charset="-122"/>
-                <a:cs typeface="Hiragino Sans" pitchFamily="34" charset="-120"/>
+                <a:latin typeface="Yu Gothic" pitchFamily="34" charset="0"/>
+                <a:ea typeface="Yu Gothic" pitchFamily="34" charset="-122"/>
+                <a:cs typeface="Yu Gothic" pitchFamily="34" charset="-120"/>
               </a:rPr>
               <a:t>  ·  OpenCode × OpenRouter</a:t>
             </a:r>
@@ -9998,9 +9998,9 @@
                 <a:solidFill>
                   <a:srgbClr val="8B949E"/>
                 </a:solidFill>
-                <a:latin typeface="Menlo" pitchFamily="34" charset="0"/>
-                <a:ea typeface="Menlo" pitchFamily="34" charset="-122"/>
-                <a:cs typeface="Menlo" pitchFamily="34" charset="-120"/>
+                <a:latin typeface="Consolas" pitchFamily="34" charset="0"/>
+                <a:ea typeface="Consolas" pitchFamily="34" charset="-122"/>
+                <a:cs typeface="Consolas" pitchFamily="34" charset="-120"/>
               </a:rPr>
               <a:t>16 / 26</a:t>
             </a:r>
@@ -10069,9 +10069,9 @@
                 <a:solidFill>
                   <a:srgbClr val="F0883E"/>
                 </a:solidFill>
-                <a:latin typeface="Menlo" pitchFamily="34" charset="0"/>
-                <a:ea typeface="Menlo" pitchFamily="34" charset="-122"/>
-                <a:cs typeface="Menlo" pitchFamily="34" charset="-120"/>
+                <a:latin typeface="Consolas" pitchFamily="34" charset="0"/>
+                <a:ea typeface="Consolas" pitchFamily="34" charset="-122"/>
+                <a:cs typeface="Consolas" pitchFamily="34" charset="-120"/>
               </a:rPr>
               <a:t>BUILD</a:t>
             </a:r>
@@ -10108,9 +10108,9 @@
                 <a:solidFill>
                   <a:srgbClr val="F0883E"/>
                 </a:solidFill>
-                <a:latin typeface="Menlo" pitchFamily="34" charset="0"/>
-                <a:ea typeface="Menlo" pitchFamily="34" charset="-122"/>
-                <a:cs typeface="Menlo" pitchFamily="34" charset="-120"/>
+                <a:latin typeface="Consolas" pitchFamily="34" charset="0"/>
+                <a:ea typeface="Consolas" pitchFamily="34" charset="-122"/>
+                <a:cs typeface="Consolas" pitchFamily="34" charset="-120"/>
               </a:rPr>
               <a:t>&gt;</a:t>
             </a:r>
@@ -10147,9 +10147,9 @@
                 <a:solidFill>
                   <a:srgbClr val="E6EDF3"/>
                 </a:solidFill>
-                <a:latin typeface="Hiragino Sans" pitchFamily="34" charset="0"/>
-                <a:ea typeface="Hiragino Sans" pitchFamily="34" charset="-122"/>
-                <a:cs typeface="Hiragino Sans" pitchFamily="34" charset="-120"/>
+                <a:latin typeface="Yu Gothic" pitchFamily="34" charset="0"/>
+                <a:ea typeface="Yu Gothic" pitchFamily="34" charset="-122"/>
+                <a:cs typeface="Yu Gothic" pitchFamily="34" charset="-120"/>
               </a:rPr>
               <a:t>つかいかた（基本）</a:t>
             </a:r>
@@ -10240,9 +10240,9 @@
                 <a:solidFill>
                   <a:srgbClr val="E6EDF3"/>
                 </a:solidFill>
-                <a:latin typeface="Hiragino Sans" pitchFamily="34" charset="0"/>
-                <a:ea typeface="Hiragino Sans" pitchFamily="34" charset="-122"/>
-                <a:cs typeface="Hiragino Sans" pitchFamily="34" charset="-120"/>
+                <a:latin typeface="Yu Gothic" pitchFamily="34" charset="0"/>
+                <a:ea typeface="Yu Gothic" pitchFamily="34" charset="-122"/>
+                <a:cs typeface="Yu Gothic" pitchFamily="34" charset="-120"/>
               </a:rPr>
               <a:t>指示を書いて Enter</a:t>
             </a:r>
@@ -10279,9 +10279,9 @@
                 <a:solidFill>
                   <a:srgbClr val="C9D1D9"/>
                 </a:solidFill>
-                <a:latin typeface="Hiragino Sans" pitchFamily="34" charset="0"/>
-                <a:ea typeface="Hiragino Sans" pitchFamily="34" charset="-122"/>
-                <a:cs typeface="Hiragino Sans" pitchFamily="34" charset="-120"/>
+                <a:latin typeface="Yu Gothic" pitchFamily="34" charset="0"/>
+                <a:ea typeface="Yu Gothic" pitchFamily="34" charset="-122"/>
+                <a:cs typeface="Yu Gothic" pitchFamily="34" charset="-120"/>
               </a:rPr>
               <a:t>やってほしいことを日本語で書いて送るだけ。</a:t>
             </a:r>
@@ -10372,9 +10372,9 @@
                 <a:solidFill>
                   <a:srgbClr val="E6EDF3"/>
                 </a:solidFill>
-                <a:latin typeface="Hiragino Sans" pitchFamily="34" charset="0"/>
-                <a:ea typeface="Hiragino Sans" pitchFamily="34" charset="-122"/>
-                <a:cs typeface="Hiragino Sans" pitchFamily="34" charset="-120"/>
+                <a:latin typeface="Yu Gothic" pitchFamily="34" charset="0"/>
+                <a:ea typeface="Yu Gothic" pitchFamily="34" charset="-122"/>
+                <a:cs typeface="Yu Gothic" pitchFamily="34" charset="-120"/>
               </a:rPr>
               <a:t>様子が表示される</a:t>
             </a:r>
@@ -10411,9 +10411,9 @@
                 <a:solidFill>
                   <a:srgbClr val="C9D1D9"/>
                 </a:solidFill>
-                <a:latin typeface="Hiragino Sans" pitchFamily="34" charset="0"/>
-                <a:ea typeface="Hiragino Sans" pitchFamily="34" charset="-122"/>
-                <a:cs typeface="Hiragino Sans" pitchFamily="34" charset="-120"/>
+                <a:latin typeface="Yu Gothic" pitchFamily="34" charset="0"/>
+                <a:ea typeface="Yu Gothic" pitchFamily="34" charset="-122"/>
+                <a:cs typeface="Yu Gothic" pitchFamily="34" charset="-120"/>
               </a:rPr>
               <a:t>ファイルを作る・編集する過程がそのまま見える。</a:t>
             </a:r>
@@ -10504,9 +10504,9 @@
                 <a:solidFill>
                   <a:srgbClr val="E6EDF3"/>
                 </a:solidFill>
-                <a:latin typeface="Hiragino Sans" pitchFamily="34" charset="0"/>
-                <a:ea typeface="Hiragino Sans" pitchFamily="34" charset="-122"/>
-                <a:cs typeface="Hiragino Sans" pitchFamily="34" charset="-120"/>
+                <a:latin typeface="Yu Gothic" pitchFamily="34" charset="0"/>
+                <a:ea typeface="Yu Gothic" pitchFamily="34" charset="-122"/>
+                <a:cs typeface="Yu Gothic" pitchFamily="34" charset="-120"/>
               </a:rPr>
               <a:t>確認しながら進む</a:t>
             </a:r>
@@ -10543,9 +10543,9 @@
                 <a:solidFill>
                   <a:srgbClr val="C9D1D9"/>
                 </a:solidFill>
-                <a:latin typeface="Hiragino Sans" pitchFamily="34" charset="0"/>
-                <a:ea typeface="Hiragino Sans" pitchFamily="34" charset="-122"/>
-                <a:cs typeface="Hiragino Sans" pitchFamily="34" charset="-120"/>
+                <a:latin typeface="Yu Gothic" pitchFamily="34" charset="0"/>
+                <a:ea typeface="Yu Gothic" pitchFamily="34" charset="-122"/>
+                <a:cs typeface="Yu Gothic" pitchFamily="34" charset="-120"/>
               </a:rPr>
               <a:t>変更内容を見て、続けて指示を重ねていける。</a:t>
             </a:r>
@@ -10696,9 +10696,9 @@
                 <a:solidFill>
                   <a:srgbClr val="8B949E"/>
                 </a:solidFill>
-                <a:latin typeface="Menlo" pitchFamily="34" charset="0"/>
-                <a:ea typeface="Menlo" pitchFamily="34" charset="-122"/>
-                <a:cs typeface="Menlo" pitchFamily="34" charset="-120"/>
+                <a:latin typeface="Consolas" pitchFamily="34" charset="0"/>
+                <a:ea typeface="Consolas" pitchFamily="34" charset="-122"/>
+                <a:cs typeface="Consolas" pitchFamily="34" charset="-120"/>
               </a:rPr>
               <a:t>やりとりの例</a:t>
             </a:r>
@@ -10738,9 +10738,9 @@
                 <a:solidFill>
                   <a:srgbClr val="58A6FF"/>
                 </a:solidFill>
-                <a:latin typeface="Menlo" pitchFamily="34" charset="0"/>
-                <a:ea typeface="Menlo" pitchFamily="34" charset="-122"/>
-                <a:cs typeface="Menlo" pitchFamily="34" charset="-120"/>
+                <a:latin typeface="Consolas" pitchFamily="34" charset="0"/>
+                <a:ea typeface="Consolas" pitchFamily="34" charset="-122"/>
+                <a:cs typeface="Consolas" pitchFamily="34" charset="-120"/>
               </a:rPr>
               <a:t>&gt; ミニToDoアプリを作って</a:t>
             </a:r>
@@ -10758,9 +10758,9 @@
                 <a:solidFill>
                   <a:srgbClr val="C9D1D9"/>
                 </a:solidFill>
-                <a:latin typeface="Menlo" pitchFamily="34" charset="0"/>
-                <a:ea typeface="Menlo" pitchFamily="34" charset="-122"/>
-                <a:cs typeface="Menlo" pitchFamily="34" charset="-120"/>
+                <a:latin typeface="Consolas" pitchFamily="34" charset="0"/>
+                <a:ea typeface="Consolas" pitchFamily="34" charset="-122"/>
+                <a:cs typeface="Consolas" pitchFamily="34" charset="-120"/>
               </a:rPr>
               <a:t> </a:t>
             </a:r>
@@ -10778,9 +10778,9 @@
                 <a:solidFill>
                   <a:srgbClr val="3FB950"/>
                 </a:solidFill>
-                <a:latin typeface="Menlo" pitchFamily="34" charset="0"/>
-                <a:ea typeface="Menlo" pitchFamily="34" charset="-122"/>
-                <a:cs typeface="Menlo" pitchFamily="34" charset="-120"/>
+                <a:latin typeface="Consolas" pitchFamily="34" charset="0"/>
+                <a:ea typeface="Consolas" pitchFamily="34" charset="-122"/>
+                <a:cs typeface="Consolas" pitchFamily="34" charset="-120"/>
               </a:rPr>
               <a:t>  ● 作成中</a:t>
             </a:r>
@@ -10798,9 +10798,9 @@
                 <a:solidFill>
                   <a:srgbClr val="3FB950"/>
                 </a:solidFill>
-                <a:latin typeface="Menlo" pitchFamily="34" charset="0"/>
-                <a:ea typeface="Menlo" pitchFamily="34" charset="-122"/>
-                <a:cs typeface="Menlo" pitchFamily="34" charset="-120"/>
+                <a:latin typeface="Consolas" pitchFamily="34" charset="0"/>
+                <a:ea typeface="Consolas" pitchFamily="34" charset="-122"/>
+                <a:cs typeface="Consolas" pitchFamily="34" charset="-120"/>
               </a:rPr>
               <a:t>  + index.html</a:t>
             </a:r>
@@ -10818,9 +10818,9 @@
                 <a:solidFill>
                   <a:srgbClr val="3FB950"/>
                 </a:solidFill>
-                <a:latin typeface="Menlo" pitchFamily="34" charset="0"/>
-                <a:ea typeface="Menlo" pitchFamily="34" charset="-122"/>
-                <a:cs typeface="Menlo" pitchFamily="34" charset="-120"/>
+                <a:latin typeface="Consolas" pitchFamily="34" charset="0"/>
+                <a:ea typeface="Consolas" pitchFamily="34" charset="-122"/>
+                <a:cs typeface="Consolas" pitchFamily="34" charset="-120"/>
               </a:rPr>
               <a:t>  + style.css</a:t>
             </a:r>
@@ -10838,9 +10838,9 @@
                 <a:solidFill>
                   <a:srgbClr val="3FB950"/>
                 </a:solidFill>
-                <a:latin typeface="Menlo" pitchFamily="34" charset="0"/>
-                <a:ea typeface="Menlo" pitchFamily="34" charset="-122"/>
-                <a:cs typeface="Menlo" pitchFamily="34" charset="-120"/>
+                <a:latin typeface="Consolas" pitchFamily="34" charset="0"/>
+                <a:ea typeface="Consolas" pitchFamily="34" charset="-122"/>
+                <a:cs typeface="Consolas" pitchFamily="34" charset="-120"/>
               </a:rPr>
               <a:t>  + script.js</a:t>
             </a:r>
@@ -10858,9 +10858,9 @@
                 <a:solidFill>
                   <a:srgbClr val="3FB950"/>
                 </a:solidFill>
-                <a:latin typeface="Menlo" pitchFamily="34" charset="0"/>
-                <a:ea typeface="Menlo" pitchFamily="34" charset="-122"/>
-                <a:cs typeface="Menlo" pitchFamily="34" charset="-120"/>
+                <a:latin typeface="Consolas" pitchFamily="34" charset="0"/>
+                <a:ea typeface="Consolas" pitchFamily="34" charset="-122"/>
+                <a:cs typeface="Consolas" pitchFamily="34" charset="-120"/>
               </a:rPr>
               <a:t>  ✓ ブラウザで表示確認</a:t>
             </a:r>
@@ -10878,9 +10878,9 @@
                 <a:solidFill>
                   <a:srgbClr val="C9D1D9"/>
                 </a:solidFill>
-                <a:latin typeface="Menlo" pitchFamily="34" charset="0"/>
-                <a:ea typeface="Menlo" pitchFamily="34" charset="-122"/>
-                <a:cs typeface="Menlo" pitchFamily="34" charset="-120"/>
+                <a:latin typeface="Consolas" pitchFamily="34" charset="0"/>
+                <a:ea typeface="Consolas" pitchFamily="34" charset="-122"/>
+                <a:cs typeface="Consolas" pitchFamily="34" charset="-120"/>
               </a:rPr>
               <a:t> </a:t>
             </a:r>
@@ -10898,9 +10898,9 @@
                 <a:solidFill>
                   <a:srgbClr val="3FB950"/>
                 </a:solidFill>
-                <a:latin typeface="Menlo" pitchFamily="34" charset="0"/>
-                <a:ea typeface="Menlo" pitchFamily="34" charset="-122"/>
-                <a:cs typeface="Menlo" pitchFamily="34" charset="-120"/>
+                <a:latin typeface="Consolas" pitchFamily="34" charset="0"/>
+                <a:ea typeface="Consolas" pitchFamily="34" charset="-122"/>
+                <a:cs typeface="Consolas" pitchFamily="34" charset="-120"/>
               </a:rPr>
               <a:t>  ✓ 追加・完了・削除を確認</a:t>
             </a:r>
@@ -10937,9 +10937,9 @@
                 <a:solidFill>
                   <a:srgbClr val="8B949E"/>
                 </a:solidFill>
-                <a:latin typeface="Hiragino Sans" pitchFamily="34" charset="0"/>
-                <a:ea typeface="Hiragino Sans" pitchFamily="34" charset="-122"/>
-                <a:cs typeface="Hiragino Sans" pitchFamily="34" charset="-120"/>
+                <a:latin typeface="Yu Gothic" pitchFamily="34" charset="0"/>
+                <a:ea typeface="Yu Gothic" pitchFamily="34" charset="-122"/>
+                <a:cs typeface="Yu Gothic" pitchFamily="34" charset="-120"/>
               </a:rPr>
               <a:t>コーディングエージェント入門</a:t>
             </a:r>
@@ -10951,9 +10951,9 @@
                 <a:solidFill>
                   <a:srgbClr val="30363D"/>
                 </a:solidFill>
-                <a:latin typeface="Hiragino Sans" pitchFamily="34" charset="0"/>
-                <a:ea typeface="Hiragino Sans" pitchFamily="34" charset="-122"/>
-                <a:cs typeface="Hiragino Sans" pitchFamily="34" charset="-120"/>
+                <a:latin typeface="Yu Gothic" pitchFamily="34" charset="0"/>
+                <a:ea typeface="Yu Gothic" pitchFamily="34" charset="-122"/>
+                <a:cs typeface="Yu Gothic" pitchFamily="34" charset="-120"/>
               </a:rPr>
               <a:t>  ·  OpenCode × OpenRouter</a:t>
             </a:r>
@@ -10990,9 +10990,9 @@
                 <a:solidFill>
                   <a:srgbClr val="8B949E"/>
                 </a:solidFill>
-                <a:latin typeface="Menlo" pitchFamily="34" charset="0"/>
-                <a:ea typeface="Menlo" pitchFamily="34" charset="-122"/>
-                <a:cs typeface="Menlo" pitchFamily="34" charset="-120"/>
+                <a:latin typeface="Consolas" pitchFamily="34" charset="0"/>
+                <a:ea typeface="Consolas" pitchFamily="34" charset="-122"/>
+                <a:cs typeface="Consolas" pitchFamily="34" charset="-120"/>
               </a:rPr>
               <a:t>17 / 26</a:t>
             </a:r>
@@ -11061,9 +11061,9 @@
                 <a:solidFill>
                   <a:srgbClr val="F0883E"/>
                 </a:solidFill>
-                <a:latin typeface="Menlo" pitchFamily="34" charset="0"/>
-                <a:ea typeface="Menlo" pitchFamily="34" charset="-122"/>
-                <a:cs typeface="Menlo" pitchFamily="34" charset="-120"/>
+                <a:latin typeface="Consolas" pitchFamily="34" charset="0"/>
+                <a:ea typeface="Consolas" pitchFamily="34" charset="-122"/>
+                <a:cs typeface="Consolas" pitchFamily="34" charset="-120"/>
               </a:rPr>
               <a:t>BUILD</a:t>
             </a:r>
@@ -11100,9 +11100,9 @@
                 <a:solidFill>
                   <a:srgbClr val="F0883E"/>
                 </a:solidFill>
-                <a:latin typeface="Menlo" pitchFamily="34" charset="0"/>
-                <a:ea typeface="Menlo" pitchFamily="34" charset="-122"/>
-                <a:cs typeface="Menlo" pitchFamily="34" charset="-120"/>
+                <a:latin typeface="Consolas" pitchFamily="34" charset="0"/>
+                <a:ea typeface="Consolas" pitchFamily="34" charset="-122"/>
+                <a:cs typeface="Consolas" pitchFamily="34" charset="-120"/>
               </a:rPr>
               <a:t>&gt;</a:t>
             </a:r>
@@ -11139,9 +11139,9 @@
                 <a:solidFill>
                   <a:srgbClr val="E6EDF3"/>
                 </a:solidFill>
-                <a:latin typeface="Hiragino Sans" pitchFamily="34" charset="0"/>
-                <a:ea typeface="Hiragino Sans" pitchFamily="34" charset="-122"/>
-                <a:cs typeface="Hiragino Sans" pitchFamily="34" charset="-120"/>
+                <a:latin typeface="Yu Gothic" pitchFamily="34" charset="0"/>
+                <a:ea typeface="Yu Gothic" pitchFamily="34" charset="-122"/>
+                <a:cs typeface="Yu Gothic" pitchFamily="34" charset="-120"/>
               </a:rPr>
               <a:t>STEP 6 ── 作るものを決める</a:t>
             </a:r>
@@ -11178,9 +11178,9 @@
                 <a:solidFill>
                   <a:srgbClr val="C9D1D9"/>
                 </a:solidFill>
-                <a:latin typeface="Hiragino Sans" pitchFamily="34" charset="0"/>
-                <a:ea typeface="Hiragino Sans" pitchFamily="34" charset="-122"/>
-                <a:cs typeface="Hiragino Sans" pitchFamily="34" charset="-120"/>
+                <a:latin typeface="Yu Gothic" pitchFamily="34" charset="0"/>
+                <a:ea typeface="Yu Gothic" pitchFamily="34" charset="-122"/>
+                <a:cs typeface="Yu Gothic" pitchFamily="34" charset="-120"/>
               </a:rPr>
               <a:t>今日は、ブラウザだけで動く ToDo ミニアプリを作ります。</a:t>
             </a:r>
@@ -11271,9 +11271,9 @@
                 <a:solidFill>
                   <a:srgbClr val="E6EDF3"/>
                 </a:solidFill>
-                <a:latin typeface="Hiragino Sans" pitchFamily="34" charset="0"/>
-                <a:ea typeface="Hiragino Sans" pitchFamily="34" charset="-122"/>
-                <a:cs typeface="Hiragino Sans" pitchFamily="34" charset="-120"/>
+                <a:latin typeface="Yu Gothic" pitchFamily="34" charset="0"/>
+                <a:ea typeface="Yu Gothic" pitchFamily="34" charset="-122"/>
+                <a:cs typeface="Yu Gothic" pitchFamily="34" charset="-120"/>
               </a:rPr>
               <a:t>追加・完了・削除</a:t>
             </a:r>
@@ -11310,9 +11310,9 @@
                 <a:solidFill>
                   <a:srgbClr val="8B949E"/>
                 </a:solidFill>
-                <a:latin typeface="Hiragino Sans" pitchFamily="34" charset="0"/>
-                <a:ea typeface="Hiragino Sans" pitchFamily="34" charset="-122"/>
-                <a:cs typeface="Hiragino Sans" pitchFamily="34" charset="-120"/>
+                <a:latin typeface="Yu Gothic" pitchFamily="34" charset="0"/>
+                <a:ea typeface="Yu Gothic" pitchFamily="34" charset="-122"/>
+                <a:cs typeface="Yu Gothic" pitchFamily="34" charset="-120"/>
               </a:rPr>
               <a:t>基本操作がその場で試せる</a:t>
             </a:r>
@@ -11403,9 +11403,9 @@
                 <a:solidFill>
                   <a:srgbClr val="E6EDF3"/>
                 </a:solidFill>
-                <a:latin typeface="Hiragino Sans" pitchFamily="34" charset="0"/>
-                <a:ea typeface="Hiragino Sans" pitchFamily="34" charset="-122"/>
-                <a:cs typeface="Hiragino Sans" pitchFamily="34" charset="-120"/>
+                <a:latin typeface="Yu Gothic" pitchFamily="34" charset="0"/>
+                <a:ea typeface="Yu Gothic" pitchFamily="34" charset="-122"/>
+                <a:cs typeface="Yu Gothic" pitchFamily="34" charset="-120"/>
               </a:rPr>
               <a:t>件数が見える</a:t>
             </a:r>
@@ -11442,9 +11442,9 @@
                 <a:solidFill>
                   <a:srgbClr val="8B949E"/>
                 </a:solidFill>
-                <a:latin typeface="Hiragino Sans" pitchFamily="34" charset="0"/>
-                <a:ea typeface="Hiragino Sans" pitchFamily="34" charset="-122"/>
-                <a:cs typeface="Hiragino Sans" pitchFamily="34" charset="-120"/>
+                <a:latin typeface="Yu Gothic" pitchFamily="34" charset="0"/>
+                <a:ea typeface="Yu Gothic" pitchFamily="34" charset="-122"/>
+                <a:cs typeface="Yu Gothic" pitchFamily="34" charset="-120"/>
               </a:rPr>
               <a:t>残り件数と完了件数を表示</a:t>
             </a:r>
@@ -11535,9 +11535,9 @@
                 <a:solidFill>
                   <a:srgbClr val="E6EDF3"/>
                 </a:solidFill>
-                <a:latin typeface="Hiragino Sans" pitchFamily="34" charset="0"/>
-                <a:ea typeface="Hiragino Sans" pitchFamily="34" charset="-122"/>
-                <a:cs typeface="Hiragino Sans" pitchFamily="34" charset="-120"/>
+                <a:latin typeface="Yu Gothic" pitchFamily="34" charset="0"/>
+                <a:ea typeface="Yu Gothic" pitchFamily="34" charset="-122"/>
+                <a:cs typeface="Yu Gothic" pitchFamily="34" charset="-120"/>
               </a:rPr>
               <a:t>閉じても残る</a:t>
             </a:r>
@@ -11574,9 +11574,9 @@
                 <a:solidFill>
                   <a:srgbClr val="8B949E"/>
                 </a:solidFill>
-                <a:latin typeface="Hiragino Sans" pitchFamily="34" charset="0"/>
-                <a:ea typeface="Hiragino Sans" pitchFamily="34" charset="-122"/>
-                <a:cs typeface="Hiragino Sans" pitchFamily="34" charset="-120"/>
+                <a:latin typeface="Yu Gothic" pitchFamily="34" charset="0"/>
+                <a:ea typeface="Yu Gothic" pitchFamily="34" charset="-122"/>
+                <a:cs typeface="Yu Gothic" pitchFamily="34" charset="-120"/>
               </a:rPr>
               <a:t>localStorage に保存</a:t>
             </a:r>
@@ -11667,9 +11667,9 @@
                 <a:solidFill>
                   <a:srgbClr val="E6EDF3"/>
                 </a:solidFill>
-                <a:latin typeface="Hiragino Sans" pitchFamily="34" charset="0"/>
-                <a:ea typeface="Hiragino Sans" pitchFamily="34" charset="-122"/>
-                <a:cs typeface="Hiragino Sans" pitchFamily="34" charset="-120"/>
+                <a:latin typeface="Yu Gothic" pitchFamily="34" charset="0"/>
+                <a:ea typeface="Yu Gothic" pitchFamily="34" charset="-122"/>
+                <a:cs typeface="Yu Gothic" pitchFamily="34" charset="-120"/>
               </a:rPr>
               <a:t>役割ごとに分ける</a:t>
             </a:r>
@@ -11706,9 +11706,9 @@
                 <a:solidFill>
                   <a:srgbClr val="8B949E"/>
                 </a:solidFill>
-                <a:latin typeface="Hiragino Sans" pitchFamily="34" charset="0"/>
-                <a:ea typeface="Hiragino Sans" pitchFamily="34" charset="-122"/>
-                <a:cs typeface="Hiragino Sans" pitchFamily="34" charset="-120"/>
+                <a:latin typeface="Yu Gothic" pitchFamily="34" charset="0"/>
+                <a:ea typeface="Yu Gothic" pitchFamily="34" charset="-122"/>
+                <a:cs typeface="Yu Gothic" pitchFamily="34" charset="-120"/>
               </a:rPr>
               <a:t>画面・見た目・動きを読みやすく</a:t>
             </a:r>
@@ -11859,9 +11859,9 @@
                 <a:solidFill>
                   <a:srgbClr val="8B949E"/>
                 </a:solidFill>
-                <a:latin typeface="Menlo" pitchFamily="34" charset="0"/>
-                <a:ea typeface="Menlo" pitchFamily="34" charset="-122"/>
-                <a:cs typeface="Menlo" pitchFamily="34" charset="-120"/>
+                <a:latin typeface="Consolas" pitchFamily="34" charset="0"/>
+                <a:ea typeface="Consolas" pitchFamily="34" charset="-122"/>
+                <a:cs typeface="Consolas" pitchFamily="34" charset="-120"/>
               </a:rPr>
               <a:t>opencode で生成した実物</a:t>
             </a:r>
@@ -11922,9 +11922,9 @@
                 <a:solidFill>
                   <a:srgbClr val="8B949E"/>
                 </a:solidFill>
-                <a:latin typeface="Hiragino Sans" pitchFamily="34" charset="0"/>
-                <a:ea typeface="Hiragino Sans" pitchFamily="34" charset="-122"/>
-                <a:cs typeface="Hiragino Sans" pitchFamily="34" charset="-120"/>
+                <a:latin typeface="Yu Gothic" pitchFamily="34" charset="0"/>
+                <a:ea typeface="Yu Gothic" pitchFamily="34" charset="-122"/>
+                <a:cs typeface="Yu Gothic" pitchFamily="34" charset="-120"/>
               </a:rPr>
               <a:t>コーディングエージェント入門</a:t>
             </a:r>
@@ -11936,9 +11936,9 @@
                 <a:solidFill>
                   <a:srgbClr val="30363D"/>
                 </a:solidFill>
-                <a:latin typeface="Hiragino Sans" pitchFamily="34" charset="0"/>
-                <a:ea typeface="Hiragino Sans" pitchFamily="34" charset="-122"/>
-                <a:cs typeface="Hiragino Sans" pitchFamily="34" charset="-120"/>
+                <a:latin typeface="Yu Gothic" pitchFamily="34" charset="0"/>
+                <a:ea typeface="Yu Gothic" pitchFamily="34" charset="-122"/>
+                <a:cs typeface="Yu Gothic" pitchFamily="34" charset="-120"/>
               </a:rPr>
               <a:t>  ·  OpenCode × OpenRouter</a:t>
             </a:r>
@@ -11975,9 +11975,9 @@
                 <a:solidFill>
                   <a:srgbClr val="8B949E"/>
                 </a:solidFill>
-                <a:latin typeface="Menlo" pitchFamily="34" charset="0"/>
-                <a:ea typeface="Menlo" pitchFamily="34" charset="-122"/>
-                <a:cs typeface="Menlo" pitchFamily="34" charset="-120"/>
+                <a:latin typeface="Consolas" pitchFamily="34" charset="0"/>
+                <a:ea typeface="Consolas" pitchFamily="34" charset="-122"/>
+                <a:cs typeface="Consolas" pitchFamily="34" charset="-120"/>
               </a:rPr>
               <a:t>18 / 26</a:t>
             </a:r>
@@ -12046,9 +12046,9 @@
                 <a:solidFill>
                   <a:srgbClr val="F0883E"/>
                 </a:solidFill>
-                <a:latin typeface="Menlo" pitchFamily="34" charset="0"/>
-                <a:ea typeface="Menlo" pitchFamily="34" charset="-122"/>
-                <a:cs typeface="Menlo" pitchFamily="34" charset="-120"/>
+                <a:latin typeface="Consolas" pitchFamily="34" charset="0"/>
+                <a:ea typeface="Consolas" pitchFamily="34" charset="-122"/>
+                <a:cs typeface="Consolas" pitchFamily="34" charset="-120"/>
               </a:rPr>
               <a:t>BUILD</a:t>
             </a:r>
@@ -12085,9 +12085,9 @@
                 <a:solidFill>
                   <a:srgbClr val="F0883E"/>
                 </a:solidFill>
-                <a:latin typeface="Menlo" pitchFamily="34" charset="0"/>
-                <a:ea typeface="Menlo" pitchFamily="34" charset="-122"/>
-                <a:cs typeface="Menlo" pitchFamily="34" charset="-120"/>
+                <a:latin typeface="Consolas" pitchFamily="34" charset="0"/>
+                <a:ea typeface="Consolas" pitchFamily="34" charset="-122"/>
+                <a:cs typeface="Consolas" pitchFamily="34" charset="-120"/>
               </a:rPr>
               <a:t>&gt;</a:t>
             </a:r>
@@ -12124,9 +12124,9 @@
                 <a:solidFill>
                   <a:srgbClr val="E6EDF3"/>
                 </a:solidFill>
-                <a:latin typeface="Hiragino Sans" pitchFamily="34" charset="0"/>
-                <a:ea typeface="Hiragino Sans" pitchFamily="34" charset="-122"/>
-                <a:cs typeface="Hiragino Sans" pitchFamily="34" charset="-120"/>
+                <a:latin typeface="Yu Gothic" pitchFamily="34" charset="0"/>
+                <a:ea typeface="Yu Gothic" pitchFamily="34" charset="-122"/>
+                <a:cs typeface="Yu Gothic" pitchFamily="34" charset="-120"/>
               </a:rPr>
               <a:t>このプロンプトを貼る</a:t>
             </a:r>
@@ -12277,9 +12277,9 @@
                 <a:solidFill>
                   <a:srgbClr val="8B949E"/>
                 </a:solidFill>
-                <a:latin typeface="Menlo" pitchFamily="34" charset="0"/>
-                <a:ea typeface="Menlo" pitchFamily="34" charset="-122"/>
-                <a:cs typeface="Menlo" pitchFamily="34" charset="-120"/>
+                <a:latin typeface="Consolas" pitchFamily="34" charset="0"/>
+                <a:ea typeface="Consolas" pitchFamily="34" charset="-122"/>
+                <a:cs typeface="Consolas" pitchFamily="34" charset="-120"/>
               </a:rPr>
               <a:t>OpenCode に貼り付ける指示</a:t>
             </a:r>
@@ -12319,9 +12319,9 @@
                 <a:solidFill>
                   <a:srgbClr val="E6EDF3"/>
                 </a:solidFill>
-                <a:latin typeface="Menlo" pitchFamily="34" charset="0"/>
-                <a:ea typeface="Menlo" pitchFamily="34" charset="-122"/>
-                <a:cs typeface="Menlo" pitchFamily="34" charset="-120"/>
+                <a:latin typeface="Consolas" pitchFamily="34" charset="0"/>
+                <a:ea typeface="Consolas" pitchFamily="34" charset="-122"/>
+                <a:cs typeface="Consolas" pitchFamily="34" charset="-120"/>
               </a:rPr>
               <a:t>ブラウザで動くミニToDoアプリを作ってください。</a:t>
             </a:r>
@@ -12339,9 +12339,9 @@
                 <a:solidFill>
                   <a:srgbClr val="C9D1D9"/>
                 </a:solidFill>
-                <a:latin typeface="Menlo" pitchFamily="34" charset="0"/>
-                <a:ea typeface="Menlo" pitchFamily="34" charset="-122"/>
-                <a:cs typeface="Menlo" pitchFamily="34" charset="-120"/>
+                <a:latin typeface="Consolas" pitchFamily="34" charset="0"/>
+                <a:ea typeface="Consolas" pitchFamily="34" charset="-122"/>
+                <a:cs typeface="Consolas" pitchFamily="34" charset="-120"/>
               </a:rPr>
               <a:t>- タスクの追加、完了切り替え、削除ができる</a:t>
             </a:r>
@@ -12359,9 +12359,9 @@
                 <a:solidFill>
                   <a:srgbClr val="C9D1D9"/>
                 </a:solidFill>
-                <a:latin typeface="Menlo" pitchFamily="34" charset="0"/>
-                <a:ea typeface="Menlo" pitchFamily="34" charset="-122"/>
-                <a:cs typeface="Menlo" pitchFamily="34" charset="-120"/>
+                <a:latin typeface="Consolas" pitchFamily="34" charset="0"/>
+                <a:ea typeface="Consolas" pitchFamily="34" charset="-122"/>
+                <a:cs typeface="Consolas" pitchFamily="34" charset="-120"/>
               </a:rPr>
               <a:t>- 残り件数と完了件数を表示する</a:t>
             </a:r>
@@ -12379,9 +12379,9 @@
                 <a:solidFill>
                   <a:srgbClr val="C9D1D9"/>
                 </a:solidFill>
-                <a:latin typeface="Menlo" pitchFamily="34" charset="0"/>
-                <a:ea typeface="Menlo" pitchFamily="34" charset="-122"/>
-                <a:cs typeface="Menlo" pitchFamily="34" charset="-120"/>
+                <a:latin typeface="Consolas" pitchFamily="34" charset="0"/>
+                <a:ea typeface="Consolas" pitchFamily="34" charset="-122"/>
+                <a:cs typeface="Consolas" pitchFamily="34" charset="-120"/>
               </a:rPr>
               <a:t>- localStorage に保存し、再読み込み後も残る</a:t>
             </a:r>
@@ -12399,9 +12399,9 @@
                 <a:solidFill>
                   <a:srgbClr val="C9D1D9"/>
                 </a:solidFill>
-                <a:latin typeface="Menlo" pitchFamily="34" charset="0"/>
-                <a:ea typeface="Menlo" pitchFamily="34" charset="-122"/>
-                <a:cs typeface="Menlo" pitchFamily="34" charset="-120"/>
+                <a:latin typeface="Consolas" pitchFamily="34" charset="0"/>
+                <a:ea typeface="Consolas" pitchFamily="34" charset="-122"/>
+                <a:cs typeface="Consolas" pitchFamily="34" charset="-120"/>
               </a:rPr>
               <a:t>- 初回表示時はサンプルタスクを3件入れる</a:t>
             </a:r>
@@ -12419,9 +12419,9 @@
                 <a:solidFill>
                   <a:srgbClr val="C9D1D9"/>
                 </a:solidFill>
-                <a:latin typeface="Menlo" pitchFamily="34" charset="0"/>
-                <a:ea typeface="Menlo" pitchFamily="34" charset="-122"/>
-                <a:cs typeface="Menlo" pitchFamily="34" charset="-120"/>
+                <a:latin typeface="Consolas" pitchFamily="34" charset="0"/>
+                <a:ea typeface="Consolas" pitchFamily="34" charset="-122"/>
+                <a:cs typeface="Consolas" pitchFamily="34" charset="-120"/>
               </a:rPr>
               <a:t>- スマホでもPCでも見やすいカード風の見た目</a:t>
             </a:r>
@@ -12439,9 +12439,9 @@
                 <a:solidFill>
                   <a:srgbClr val="C9D1D9"/>
                 </a:solidFill>
-                <a:latin typeface="Menlo" pitchFamily="34" charset="0"/>
-                <a:ea typeface="Menlo" pitchFamily="34" charset="-122"/>
-                <a:cs typeface="Menlo" pitchFamily="34" charset="-120"/>
+                <a:latin typeface="Consolas" pitchFamily="34" charset="0"/>
+                <a:ea typeface="Consolas" pitchFamily="34" charset="-122"/>
+                <a:cs typeface="Consolas" pitchFamily="34" charset="-120"/>
               </a:rPr>
               <a:t> </a:t>
             </a:r>
@@ -12459,9 +12459,9 @@
                 <a:solidFill>
                   <a:srgbClr val="F0883E"/>
                 </a:solidFill>
-                <a:latin typeface="Menlo" pitchFamily="34" charset="0"/>
-                <a:ea typeface="Menlo" pitchFamily="34" charset="-122"/>
-                <a:cs typeface="Menlo" pitchFamily="34" charset="-120"/>
+                <a:latin typeface="Consolas" pitchFamily="34" charset="0"/>
+                <a:ea typeface="Consolas" pitchFamily="34" charset="-122"/>
+                <a:cs typeface="Consolas" pitchFamily="34" charset="-120"/>
               </a:rPr>
               <a:t>実装条件:</a:t>
             </a:r>
@@ -12479,9 +12479,9 @@
                 <a:solidFill>
                   <a:srgbClr val="C9D1D9"/>
                 </a:solidFill>
-                <a:latin typeface="Menlo" pitchFamily="34" charset="0"/>
-                <a:ea typeface="Menlo" pitchFamily="34" charset="-122"/>
-                <a:cs typeface="Menlo" pitchFamily="34" charset="-120"/>
+                <a:latin typeface="Consolas" pitchFamily="34" charset="0"/>
+                <a:ea typeface="Consolas" pitchFamily="34" charset="-122"/>
+                <a:cs typeface="Consolas" pitchFamily="34" charset="-120"/>
               </a:rPr>
               <a:t>- HTML / CSS / JavaScript を役割ごとに分ける</a:t>
             </a:r>
@@ -12499,9 +12499,9 @@
                 <a:solidFill>
                   <a:srgbClr val="C9D1D9"/>
                 </a:solidFill>
-                <a:latin typeface="Menlo" pitchFamily="34" charset="0"/>
-                <a:ea typeface="Menlo" pitchFamily="34" charset="-122"/>
-                <a:cs typeface="Menlo" pitchFamily="34" charset="-120"/>
+                <a:latin typeface="Consolas" pitchFamily="34" charset="0"/>
+                <a:ea typeface="Consolas" pitchFamily="34" charset="-122"/>
+                <a:cs typeface="Consolas" pitchFamily="34" charset="-120"/>
               </a:rPr>
               <a:t>- 作ったファイルと確認手順を最後に教える</a:t>
             </a:r>
@@ -12519,9 +12519,9 @@
                 <a:solidFill>
                   <a:srgbClr val="C9D1D9"/>
                 </a:solidFill>
-                <a:latin typeface="Menlo" pitchFamily="34" charset="0"/>
-                <a:ea typeface="Menlo" pitchFamily="34" charset="-122"/>
-                <a:cs typeface="Menlo" pitchFamily="34" charset="-120"/>
+                <a:latin typeface="Consolas" pitchFamily="34" charset="0"/>
+                <a:ea typeface="Consolas" pitchFamily="34" charset="-122"/>
+                <a:cs typeface="Consolas" pitchFamily="34" charset="-120"/>
               </a:rPr>
               <a:t> </a:t>
             </a:r>
@@ -12539,9 +12539,9 @@
                 <a:solidFill>
                   <a:srgbClr val="F0883E"/>
                 </a:solidFill>
-                <a:latin typeface="Menlo" pitchFamily="34" charset="0"/>
-                <a:ea typeface="Menlo" pitchFamily="34" charset="-122"/>
-                <a:cs typeface="Menlo" pitchFamily="34" charset="-120"/>
+                <a:latin typeface="Consolas" pitchFamily="34" charset="0"/>
+                <a:ea typeface="Consolas" pitchFamily="34" charset="-122"/>
+                <a:cs typeface="Consolas" pitchFamily="34" charset="-120"/>
               </a:rPr>
               <a:t>確認すること:</a:t>
             </a:r>
@@ -12559,9 +12559,9 @@
                 <a:solidFill>
                   <a:srgbClr val="C9D1D9"/>
                 </a:solidFill>
-                <a:latin typeface="Menlo" pitchFamily="34" charset="0"/>
-                <a:ea typeface="Menlo" pitchFamily="34" charset="-122"/>
-                <a:cs typeface="Menlo" pitchFamily="34" charset="-120"/>
+                <a:latin typeface="Consolas" pitchFamily="34" charset="0"/>
+                <a:ea typeface="Consolas" pitchFamily="34" charset="-122"/>
+                <a:cs typeface="Consolas" pitchFamily="34" charset="-120"/>
               </a:rPr>
               <a:t>- 追加・完了切り替え・削除・再読み込み後の保存</a:t>
             </a:r>
@@ -12579,9 +12579,9 @@
                 <a:solidFill>
                   <a:srgbClr val="3FB950"/>
                 </a:solidFill>
-                <a:latin typeface="Menlo" pitchFamily="34" charset="0"/>
-                <a:ea typeface="Menlo" pitchFamily="34" charset="-122"/>
-                <a:cs typeface="Menlo" pitchFamily="34" charset="-120"/>
+                <a:latin typeface="Consolas" pitchFamily="34" charset="0"/>
+                <a:ea typeface="Consolas" pitchFamily="34" charset="-122"/>
+                <a:cs typeface="Consolas" pitchFamily="34" charset="-120"/>
               </a:rPr>
               <a:t>python3 -m http.server 8000 で起動して確認し、</a:t>
             </a:r>
@@ -12599,9 +12599,9 @@
                 <a:solidFill>
                   <a:srgbClr val="3FB950"/>
                 </a:solidFill>
-                <a:latin typeface="Menlo" pitchFamily="34" charset="0"/>
-                <a:ea typeface="Menlo" pitchFamily="34" charset="-122"/>
-                <a:cs typeface="Menlo" pitchFamily="34" charset="-120"/>
+                <a:latin typeface="Consolas" pitchFamily="34" charset="0"/>
+                <a:ea typeface="Consolas" pitchFamily="34" charset="-122"/>
+                <a:cs typeface="Consolas" pitchFamily="34" charset="-120"/>
               </a:rPr>
               <a:t>問題があれば修正してください。</a:t>
             </a:r>
@@ -12692,9 +12692,9 @@
                 <a:solidFill>
                   <a:srgbClr val="E6EDF3"/>
                 </a:solidFill>
-                <a:latin typeface="Hiragino Sans" pitchFamily="34" charset="0"/>
-                <a:ea typeface="Hiragino Sans" pitchFamily="34" charset="-122"/>
-                <a:cs typeface="Hiragino Sans" pitchFamily="34" charset="-120"/>
+                <a:latin typeface="Yu Gothic" pitchFamily="34" charset="0"/>
+                <a:ea typeface="Yu Gothic" pitchFamily="34" charset="-122"/>
+                <a:cs typeface="Yu Gothic" pitchFamily="34" charset="-120"/>
               </a:rPr>
               <a:t>ポイント：</a:t>
             </a:r>
@@ -12706,9 +12706,9 @@
                 <a:solidFill>
                   <a:srgbClr val="C9D1D9"/>
                 </a:solidFill>
-                <a:latin typeface="Hiragino Sans" pitchFamily="34" charset="0"/>
-                <a:ea typeface="Hiragino Sans" pitchFamily="34" charset="-122"/>
-                <a:cs typeface="Hiragino Sans" pitchFamily="34" charset="-120"/>
+                <a:latin typeface="Yu Gothic" pitchFamily="34" charset="0"/>
+                <a:ea typeface="Yu Gothic" pitchFamily="34" charset="-122"/>
+                <a:cs typeface="Yu Gothic" pitchFamily="34" charset="-120"/>
               </a:rPr>
               <a:t> 完成条件まで書くと無料モデルでも安定。役割と成功条件を渡す。</a:t>
             </a:r>
@@ -12745,9 +12745,9 @@
                 <a:solidFill>
                   <a:srgbClr val="8B949E"/>
                 </a:solidFill>
-                <a:latin typeface="Hiragino Sans" pitchFamily="34" charset="0"/>
-                <a:ea typeface="Hiragino Sans" pitchFamily="34" charset="-122"/>
-                <a:cs typeface="Hiragino Sans" pitchFamily="34" charset="-120"/>
+                <a:latin typeface="Yu Gothic" pitchFamily="34" charset="0"/>
+                <a:ea typeface="Yu Gothic" pitchFamily="34" charset="-122"/>
+                <a:cs typeface="Yu Gothic" pitchFamily="34" charset="-120"/>
               </a:rPr>
               <a:t>コーディングエージェント入門</a:t>
             </a:r>
@@ -12759,9 +12759,9 @@
                 <a:solidFill>
                   <a:srgbClr val="30363D"/>
                 </a:solidFill>
-                <a:latin typeface="Hiragino Sans" pitchFamily="34" charset="0"/>
-                <a:ea typeface="Hiragino Sans" pitchFamily="34" charset="-122"/>
-                <a:cs typeface="Hiragino Sans" pitchFamily="34" charset="-120"/>
+                <a:latin typeface="Yu Gothic" pitchFamily="34" charset="0"/>
+                <a:ea typeface="Yu Gothic" pitchFamily="34" charset="-122"/>
+                <a:cs typeface="Yu Gothic" pitchFamily="34" charset="-120"/>
               </a:rPr>
               <a:t>  ·  OpenCode × OpenRouter</a:t>
             </a:r>
@@ -12798,9 +12798,9 @@
                 <a:solidFill>
                   <a:srgbClr val="8B949E"/>
                 </a:solidFill>
-                <a:latin typeface="Menlo" pitchFamily="34" charset="0"/>
-                <a:ea typeface="Menlo" pitchFamily="34" charset="-122"/>
-                <a:cs typeface="Menlo" pitchFamily="34" charset="-120"/>
+                <a:latin typeface="Consolas" pitchFamily="34" charset="0"/>
+                <a:ea typeface="Consolas" pitchFamily="34" charset="-122"/>
+                <a:cs typeface="Consolas" pitchFamily="34" charset="-120"/>
               </a:rPr>
               <a:t>19 / 26</a:t>
             </a:r>
@@ -12869,9 +12869,9 @@
                 <a:solidFill>
                   <a:srgbClr val="58A6FF"/>
                 </a:solidFill>
-                <a:latin typeface="Menlo" pitchFamily="34" charset="0"/>
-                <a:ea typeface="Menlo" pitchFamily="34" charset="-122"/>
-                <a:cs typeface="Menlo" pitchFamily="34" charset="-120"/>
+                <a:latin typeface="Consolas" pitchFamily="34" charset="0"/>
+                <a:ea typeface="Consolas" pitchFamily="34" charset="-122"/>
+                <a:cs typeface="Consolas" pitchFamily="34" charset="-120"/>
               </a:rPr>
               <a:t>INTRO</a:t>
             </a:r>
@@ -12908,9 +12908,9 @@
                 <a:solidFill>
                   <a:srgbClr val="58A6FF"/>
                 </a:solidFill>
-                <a:latin typeface="Menlo" pitchFamily="34" charset="0"/>
-                <a:ea typeface="Menlo" pitchFamily="34" charset="-122"/>
-                <a:cs typeface="Menlo" pitchFamily="34" charset="-120"/>
+                <a:latin typeface="Consolas" pitchFamily="34" charset="0"/>
+                <a:ea typeface="Consolas" pitchFamily="34" charset="-122"/>
+                <a:cs typeface="Consolas" pitchFamily="34" charset="-120"/>
               </a:rPr>
               <a:t>&gt;</a:t>
             </a:r>
@@ -12947,9 +12947,9 @@
                 <a:solidFill>
                   <a:srgbClr val="E6EDF3"/>
                 </a:solidFill>
-                <a:latin typeface="Hiragino Sans" pitchFamily="34" charset="0"/>
-                <a:ea typeface="Hiragino Sans" pitchFamily="34" charset="-122"/>
-                <a:cs typeface="Hiragino Sans" pitchFamily="34" charset="-120"/>
+                <a:latin typeface="Yu Gothic" pitchFamily="34" charset="0"/>
+                <a:ea typeface="Yu Gothic" pitchFamily="34" charset="-122"/>
+                <a:cs typeface="Yu Gothic" pitchFamily="34" charset="-120"/>
               </a:rPr>
               <a:t>今日のゴール</a:t>
             </a:r>
@@ -13040,9 +13040,9 @@
                 <a:solidFill>
                   <a:srgbClr val="0D1117"/>
                 </a:solidFill>
-                <a:latin typeface="Hiragino Sans" pitchFamily="34" charset="0"/>
-                <a:ea typeface="Hiragino Sans" pitchFamily="34" charset="-122"/>
-                <a:cs typeface="Hiragino Sans" pitchFamily="34" charset="-120"/>
+                <a:latin typeface="Yu Gothic" pitchFamily="34" charset="0"/>
+                <a:ea typeface="Yu Gothic" pitchFamily="34" charset="-122"/>
+                <a:cs typeface="Yu Gothic" pitchFamily="34" charset="-120"/>
               </a:rPr>
               <a:t>1</a:t>
             </a:r>
@@ -13079,9 +13079,9 @@
                 <a:solidFill>
                   <a:srgbClr val="E6EDF3"/>
                 </a:solidFill>
-                <a:latin typeface="Hiragino Sans" pitchFamily="34" charset="0"/>
-                <a:ea typeface="Hiragino Sans" pitchFamily="34" charset="-122"/>
-                <a:cs typeface="Hiragino Sans" pitchFamily="34" charset="-120"/>
+                <a:latin typeface="Yu Gothic" pitchFamily="34" charset="0"/>
+                <a:ea typeface="Yu Gothic" pitchFamily="34" charset="-122"/>
+                <a:cs typeface="Yu Gothic" pitchFamily="34" charset="-120"/>
               </a:rPr>
               <a:t>“何か”が分かる</a:t>
             </a:r>
@@ -13121,9 +13121,9 @@
                 <a:solidFill>
                   <a:srgbClr val="C9D1D9"/>
                 </a:solidFill>
-                <a:latin typeface="Hiragino Sans" pitchFamily="34" charset="0"/>
-                <a:ea typeface="Hiragino Sans" pitchFamily="34" charset="-122"/>
-                <a:cs typeface="Hiragino Sans" pitchFamily="34" charset="-120"/>
+                <a:latin typeface="Yu Gothic" pitchFamily="34" charset="0"/>
+                <a:ea typeface="Yu Gothic" pitchFamily="34" charset="-122"/>
+                <a:cs typeface="Yu Gothic" pitchFamily="34" charset="-120"/>
               </a:rPr>
               <a:t>コーディングエージェントとは何か、普段のAIチャットと何が違うのかを理解する。</a:t>
             </a:r>
@@ -13214,9 +13214,9 @@
                 <a:solidFill>
                   <a:srgbClr val="0D1117"/>
                 </a:solidFill>
-                <a:latin typeface="Hiragino Sans" pitchFamily="34" charset="0"/>
-                <a:ea typeface="Hiragino Sans" pitchFamily="34" charset="-122"/>
-                <a:cs typeface="Hiragino Sans" pitchFamily="34" charset="-120"/>
+                <a:latin typeface="Yu Gothic" pitchFamily="34" charset="0"/>
+                <a:ea typeface="Yu Gothic" pitchFamily="34" charset="-122"/>
+                <a:cs typeface="Yu Gothic" pitchFamily="34" charset="-120"/>
               </a:rPr>
               <a:t>2</a:t>
             </a:r>
@@ -13253,9 +13253,9 @@
                 <a:solidFill>
                   <a:srgbClr val="E6EDF3"/>
                 </a:solidFill>
-                <a:latin typeface="Hiragino Sans" pitchFamily="34" charset="0"/>
-                <a:ea typeface="Hiragino Sans" pitchFamily="34" charset="-122"/>
-                <a:cs typeface="Hiragino Sans" pitchFamily="34" charset="-120"/>
+                <a:latin typeface="Yu Gothic" pitchFamily="34" charset="0"/>
+                <a:ea typeface="Yu Gothic" pitchFamily="34" charset="-122"/>
+                <a:cs typeface="Yu Gothic" pitchFamily="34" charset="-120"/>
               </a:rPr>
               <a:t>自分のPCで動かす</a:t>
             </a:r>
@@ -13295,9 +13295,9 @@
                 <a:solidFill>
                   <a:srgbClr val="C9D1D9"/>
                 </a:solidFill>
-                <a:latin typeface="Hiragino Sans" pitchFamily="34" charset="0"/>
-                <a:ea typeface="Hiragino Sans" pitchFamily="34" charset="-122"/>
-                <a:cs typeface="Hiragino Sans" pitchFamily="34" charset="-120"/>
+                <a:latin typeface="Yu Gothic" pitchFamily="34" charset="0"/>
+                <a:ea typeface="Yu Gothic" pitchFamily="34" charset="-122"/>
+                <a:cs typeface="Yu Gothic" pitchFamily="34" charset="-120"/>
               </a:rPr>
               <a:t>エージェントを実際にインストールし、AIモデルにつないで起動するところまでやる。</a:t>
             </a:r>
@@ -13388,9 +13388,9 @@
                 <a:solidFill>
                   <a:srgbClr val="0D1117"/>
                 </a:solidFill>
-                <a:latin typeface="Hiragino Sans" pitchFamily="34" charset="0"/>
-                <a:ea typeface="Hiragino Sans" pitchFamily="34" charset="-122"/>
-                <a:cs typeface="Hiragino Sans" pitchFamily="34" charset="-120"/>
+                <a:latin typeface="Yu Gothic" pitchFamily="34" charset="0"/>
+                <a:ea typeface="Yu Gothic" pitchFamily="34" charset="-122"/>
+                <a:cs typeface="Yu Gothic" pitchFamily="34" charset="-120"/>
               </a:rPr>
               <a:t>3</a:t>
             </a:r>
@@ -13427,9 +13427,9 @@
                 <a:solidFill>
                   <a:srgbClr val="E6EDF3"/>
                 </a:solidFill>
-                <a:latin typeface="Hiragino Sans" pitchFamily="34" charset="0"/>
-                <a:ea typeface="Hiragino Sans" pitchFamily="34" charset="-122"/>
-                <a:cs typeface="Hiragino Sans" pitchFamily="34" charset="-120"/>
+                <a:latin typeface="Yu Gothic" pitchFamily="34" charset="0"/>
+                <a:ea typeface="Yu Gothic" pitchFamily="34" charset="-122"/>
+                <a:cs typeface="Yu Gothic" pitchFamily="34" charset="-120"/>
               </a:rPr>
               <a:t>アプリを作らせる</a:t>
             </a:r>
@@ -13469,9 +13469,9 @@
                 <a:solidFill>
                   <a:srgbClr val="C9D1D9"/>
                 </a:solidFill>
-                <a:latin typeface="Hiragino Sans" pitchFamily="34" charset="0"/>
-                <a:ea typeface="Hiragino Sans" pitchFamily="34" charset="-122"/>
-                <a:cs typeface="Hiragino Sans" pitchFamily="34" charset="-120"/>
+                <a:latin typeface="Yu Gothic" pitchFamily="34" charset="0"/>
+                <a:ea typeface="Yu Gothic" pitchFamily="34" charset="-122"/>
+                <a:cs typeface="Yu Gothic" pitchFamily="34" charset="-120"/>
               </a:rPr>
               <a:t>チャットにとどまらず、エージェントに ToDo アプリを作らせてブラウザで動かす。</a:t>
             </a:r>
@@ -13508,9 +13508,9 @@
                 <a:solidFill>
                   <a:srgbClr val="8B949E"/>
                 </a:solidFill>
-                <a:latin typeface="Hiragino Sans" pitchFamily="34" charset="0"/>
-                <a:ea typeface="Hiragino Sans" pitchFamily="34" charset="-122"/>
-                <a:cs typeface="Hiragino Sans" pitchFamily="34" charset="-120"/>
+                <a:latin typeface="Yu Gothic" pitchFamily="34" charset="0"/>
+                <a:ea typeface="Yu Gothic" pitchFamily="34" charset="-122"/>
+                <a:cs typeface="Yu Gothic" pitchFamily="34" charset="-120"/>
               </a:rPr>
               <a:t>コーディングエージェント入門</a:t>
             </a:r>
@@ -13522,9 +13522,9 @@
                 <a:solidFill>
                   <a:srgbClr val="30363D"/>
                 </a:solidFill>
-                <a:latin typeface="Hiragino Sans" pitchFamily="34" charset="0"/>
-                <a:ea typeface="Hiragino Sans" pitchFamily="34" charset="-122"/>
-                <a:cs typeface="Hiragino Sans" pitchFamily="34" charset="-120"/>
+                <a:latin typeface="Yu Gothic" pitchFamily="34" charset="0"/>
+                <a:ea typeface="Yu Gothic" pitchFamily="34" charset="-122"/>
+                <a:cs typeface="Yu Gothic" pitchFamily="34" charset="-120"/>
               </a:rPr>
               <a:t>  ·  OpenCode × OpenRouter</a:t>
             </a:r>
@@ -13561,9 +13561,9 @@
                 <a:solidFill>
                   <a:srgbClr val="8B949E"/>
                 </a:solidFill>
-                <a:latin typeface="Menlo" pitchFamily="34" charset="0"/>
-                <a:ea typeface="Menlo" pitchFamily="34" charset="-122"/>
-                <a:cs typeface="Menlo" pitchFamily="34" charset="-120"/>
+                <a:latin typeface="Consolas" pitchFamily="34" charset="0"/>
+                <a:ea typeface="Consolas" pitchFamily="34" charset="-122"/>
+                <a:cs typeface="Consolas" pitchFamily="34" charset="-120"/>
               </a:rPr>
               <a:t>02 / 26</a:t>
             </a:r>
@@ -13632,9 +13632,9 @@
                 <a:solidFill>
                   <a:srgbClr val="F0883E"/>
                 </a:solidFill>
-                <a:latin typeface="Menlo" pitchFamily="34" charset="0"/>
-                <a:ea typeface="Menlo" pitchFamily="34" charset="-122"/>
-                <a:cs typeface="Menlo" pitchFamily="34" charset="-120"/>
+                <a:latin typeface="Consolas" pitchFamily="34" charset="0"/>
+                <a:ea typeface="Consolas" pitchFamily="34" charset="-122"/>
+                <a:cs typeface="Consolas" pitchFamily="34" charset="-120"/>
               </a:rPr>
               <a:t>BUILD</a:t>
             </a:r>
@@ -13671,9 +13671,9 @@
                 <a:solidFill>
                   <a:srgbClr val="F0883E"/>
                 </a:solidFill>
-                <a:latin typeface="Menlo" pitchFamily="34" charset="0"/>
-                <a:ea typeface="Menlo" pitchFamily="34" charset="-122"/>
-                <a:cs typeface="Menlo" pitchFamily="34" charset="-120"/>
+                <a:latin typeface="Consolas" pitchFamily="34" charset="0"/>
+                <a:ea typeface="Consolas" pitchFamily="34" charset="-122"/>
+                <a:cs typeface="Consolas" pitchFamily="34" charset="-120"/>
               </a:rPr>
               <a:t>&gt;</a:t>
             </a:r>
@@ -13710,9 +13710,9 @@
                 <a:solidFill>
                   <a:srgbClr val="E6EDF3"/>
                 </a:solidFill>
-                <a:latin typeface="Hiragino Sans" pitchFamily="34" charset="0"/>
-                <a:ea typeface="Hiragino Sans" pitchFamily="34" charset="-122"/>
-                <a:cs typeface="Hiragino Sans" pitchFamily="34" charset="-120"/>
+                <a:latin typeface="Yu Gothic" pitchFamily="34" charset="0"/>
+                <a:ea typeface="Yu Gothic" pitchFamily="34" charset="-122"/>
+                <a:cs typeface="Yu Gothic" pitchFamily="34" charset="-120"/>
               </a:rPr>
               <a:t>ブラウザで動かしてみる</a:t>
             </a:r>
@@ -13752,9 +13752,9 @@
                 <a:solidFill>
                   <a:srgbClr val="C9D1D9"/>
                 </a:solidFill>
-                <a:latin typeface="Hiragino Sans" pitchFamily="34" charset="0"/>
-                <a:ea typeface="Hiragino Sans" pitchFamily="34" charset="-122"/>
-                <a:cs typeface="Hiragino Sans" pitchFamily="34" charset="-120"/>
+                <a:latin typeface="Yu Gothic" pitchFamily="34" charset="0"/>
+                <a:ea typeface="Yu Gothic" pitchFamily="34" charset="-122"/>
+                <a:cs typeface="Yu Gothic" pitchFamily="34" charset="-120"/>
               </a:rPr>
               <a:t>生成された index.html をブラウザで開いて、実際に操作します。</a:t>
             </a:r>
@@ -13905,9 +13905,9 @@
                 <a:solidFill>
                   <a:srgbClr val="8B949E"/>
                 </a:solidFill>
-                <a:latin typeface="Menlo" pitchFamily="34" charset="0"/>
-                <a:ea typeface="Menlo" pitchFamily="34" charset="-122"/>
-                <a:cs typeface="Menlo" pitchFamily="34" charset="-120"/>
+                <a:latin typeface="Consolas" pitchFamily="34" charset="0"/>
+                <a:ea typeface="Consolas" pitchFamily="34" charset="-122"/>
+                <a:cs typeface="Consolas" pitchFamily="34" charset="-120"/>
               </a:rPr>
               <a:t>ローカルサーバーを起動</a:t>
             </a:r>
@@ -13947,9 +13947,9 @@
                 <a:solidFill>
                   <a:srgbClr val="8B949E"/>
                 </a:solidFill>
-                <a:latin typeface="Menlo" pitchFamily="34" charset="0"/>
-                <a:ea typeface="Menlo" pitchFamily="34" charset="-122"/>
-                <a:cs typeface="Menlo" pitchFamily="34" charset="-120"/>
+                <a:latin typeface="Consolas" pitchFamily="34" charset="0"/>
+                <a:ea typeface="Consolas" pitchFamily="34" charset="-122"/>
+                <a:cs typeface="Consolas" pitchFamily="34" charset="-120"/>
               </a:rPr>
               <a:t># プロジェクトのフォルダで</a:t>
             </a:r>
@@ -13967,9 +13967,9 @@
                 <a:solidFill>
                   <a:srgbClr val="3FB950"/>
                 </a:solidFill>
-                <a:latin typeface="Menlo" pitchFamily="34" charset="0"/>
-                <a:ea typeface="Menlo" pitchFamily="34" charset="-122"/>
-                <a:cs typeface="Menlo" pitchFamily="34" charset="-120"/>
+                <a:latin typeface="Consolas" pitchFamily="34" charset="0"/>
+                <a:ea typeface="Consolas" pitchFamily="34" charset="-122"/>
+                <a:cs typeface="Consolas" pitchFamily="34" charset="-120"/>
               </a:rPr>
               <a:t>$ python3 -m http.server</a:t>
             </a:r>
@@ -13987,9 +13987,9 @@
                 <a:solidFill>
                   <a:srgbClr val="C9D1D9"/>
                 </a:solidFill>
-                <a:latin typeface="Menlo" pitchFamily="34" charset="0"/>
-                <a:ea typeface="Menlo" pitchFamily="34" charset="-122"/>
-                <a:cs typeface="Menlo" pitchFamily="34" charset="-120"/>
+                <a:latin typeface="Consolas" pitchFamily="34" charset="0"/>
+                <a:ea typeface="Consolas" pitchFamily="34" charset="-122"/>
+                <a:cs typeface="Consolas" pitchFamily="34" charset="-120"/>
               </a:rPr>
               <a:t> </a:t>
             </a:r>
@@ -14007,9 +14007,9 @@
                 <a:solidFill>
                   <a:srgbClr val="8B949E"/>
                 </a:solidFill>
-                <a:latin typeface="Menlo" pitchFamily="34" charset="0"/>
-                <a:ea typeface="Menlo" pitchFamily="34" charset="-122"/>
-                <a:cs typeface="Menlo" pitchFamily="34" charset="-120"/>
+                <a:latin typeface="Consolas" pitchFamily="34" charset="0"/>
+                <a:ea typeface="Consolas" pitchFamily="34" charset="-122"/>
+                <a:cs typeface="Consolas" pitchFamily="34" charset="-120"/>
               </a:rPr>
               <a:t># ブラウザで開く</a:t>
             </a:r>
@@ -14027,9 +14027,9 @@
                 <a:solidFill>
                   <a:srgbClr val="58A6FF"/>
                 </a:solidFill>
-                <a:latin typeface="Menlo" pitchFamily="34" charset="0"/>
-                <a:ea typeface="Menlo" pitchFamily="34" charset="-122"/>
-                <a:cs typeface="Menlo" pitchFamily="34" charset="-120"/>
+                <a:latin typeface="Consolas" pitchFamily="34" charset="0"/>
+                <a:ea typeface="Consolas" pitchFamily="34" charset="-122"/>
+                <a:cs typeface="Consolas" pitchFamily="34" charset="-120"/>
               </a:rPr>
               <a:t>→ http://localhost:8000</a:t>
             </a:r>
@@ -14123,9 +14123,9 @@
                 <a:solidFill>
                   <a:srgbClr val="3FB950"/>
                 </a:solidFill>
-                <a:latin typeface="Hiragino Sans" pitchFamily="34" charset="0"/>
-                <a:ea typeface="Hiragino Sans" pitchFamily="34" charset="-122"/>
-                <a:cs typeface="Hiragino Sans" pitchFamily="34" charset="-120"/>
+                <a:latin typeface="Yu Gothic" pitchFamily="34" charset="0"/>
+                <a:ea typeface="Yu Gothic" pitchFamily="34" charset="-122"/>
+                <a:cs typeface="Yu Gothic" pitchFamily="34" charset="-120"/>
               </a:rPr>
               <a:t>エージェントに頼んでもOK：</a:t>
             </a:r>
@@ -14143,9 +14143,9 @@
                 <a:solidFill>
                   <a:srgbClr val="C9D1D9"/>
                 </a:solidFill>
-                <a:latin typeface="Hiragino Sans" pitchFamily="34" charset="0"/>
-                <a:ea typeface="Hiragino Sans" pitchFamily="34" charset="-122"/>
-                <a:cs typeface="Hiragino Sans" pitchFamily="34" charset="-120"/>
+                <a:latin typeface="Yu Gothic" pitchFamily="34" charset="0"/>
+                <a:ea typeface="Yu Gothic" pitchFamily="34" charset="-122"/>
+                <a:cs typeface="Yu Gothic" pitchFamily="34" charset="-120"/>
               </a:rPr>
               <a:t>「このフォルダをブラウザで開いて確認して」と言えば、確認まで任せられます。</a:t>
             </a:r>
@@ -14296,9 +14296,9 @@
                 <a:solidFill>
                   <a:srgbClr val="8B949E"/>
                 </a:solidFill>
-                <a:latin typeface="Menlo" pitchFamily="34" charset="0"/>
-                <a:ea typeface="Menlo" pitchFamily="34" charset="-122"/>
-                <a:cs typeface="Menlo" pitchFamily="34" charset="-120"/>
+                <a:latin typeface="Consolas" pitchFamily="34" charset="0"/>
+                <a:ea typeface="Consolas" pitchFamily="34" charset="-122"/>
+                <a:cs typeface="Consolas" pitchFamily="34" charset="-120"/>
               </a:rPr>
               <a:t>My ToDo  ·  localhost:8000</a:t>
             </a:r>
@@ -14362,9 +14362,9 @@
                 <a:solidFill>
                   <a:srgbClr val="8B949E"/>
                 </a:solidFill>
-                <a:latin typeface="Hiragino Sans" pitchFamily="34" charset="0"/>
-                <a:ea typeface="Hiragino Sans" pitchFamily="34" charset="-122"/>
-                <a:cs typeface="Hiragino Sans" pitchFamily="34" charset="-120"/>
+                <a:latin typeface="Yu Gothic" pitchFamily="34" charset="0"/>
+                <a:ea typeface="Yu Gothic" pitchFamily="34" charset="-122"/>
+                <a:cs typeface="Yu Gothic" pitchFamily="34" charset="-120"/>
               </a:rPr>
               <a:t>牛乳を買う</a:t>
             </a:r>
@@ -14423,9 +14423,9 @@
                 <a:solidFill>
                   <a:srgbClr val="0D1117"/>
                 </a:solidFill>
-                <a:latin typeface="Hiragino Sans" pitchFamily="34" charset="0"/>
-                <a:ea typeface="Hiragino Sans" pitchFamily="34" charset="-122"/>
-                <a:cs typeface="Hiragino Sans" pitchFamily="34" charset="-120"/>
+                <a:latin typeface="Yu Gothic" pitchFamily="34" charset="0"/>
+                <a:ea typeface="Yu Gothic" pitchFamily="34" charset="-122"/>
+                <a:cs typeface="Yu Gothic" pitchFamily="34" charset="-120"/>
               </a:rPr>
               <a:t>追加</a:t>
             </a:r>
@@ -14509,9 +14509,9 @@
                 <a:solidFill>
                   <a:srgbClr val="0D1117"/>
                 </a:solidFill>
-                <a:latin typeface="Hiragino Sans" pitchFamily="34" charset="0"/>
-                <a:ea typeface="Hiragino Sans" pitchFamily="34" charset="-122"/>
-                <a:cs typeface="Hiragino Sans" pitchFamily="34" charset="-120"/>
+                <a:latin typeface="Yu Gothic" pitchFamily="34" charset="0"/>
+                <a:ea typeface="Yu Gothic" pitchFamily="34" charset="-122"/>
+                <a:cs typeface="Yu Gothic" pitchFamily="34" charset="-120"/>
               </a:rPr>
               <a:t>✓</a:t>
             </a:r>
@@ -14548,9 +14548,9 @@
                 <a:solidFill>
                   <a:srgbClr val="8B949E"/>
                 </a:solidFill>
-                <a:latin typeface="Hiragino Sans" pitchFamily="34" charset="0"/>
-                <a:ea typeface="Hiragino Sans" pitchFamily="34" charset="-122"/>
-                <a:cs typeface="Hiragino Sans" pitchFamily="34" charset="-120"/>
+                <a:latin typeface="Yu Gothic" pitchFamily="34" charset="0"/>
+                <a:ea typeface="Yu Gothic" pitchFamily="34" charset="-122"/>
+                <a:cs typeface="Yu Gothic" pitchFamily="34" charset="-120"/>
               </a:rPr>
               <a:t>レポートを書く</a:t>
             </a:r>
@@ -14587,9 +14587,9 @@
                 <a:solidFill>
                   <a:srgbClr val="8B949E"/>
                 </a:solidFill>
-                <a:latin typeface="Hiragino Sans" pitchFamily="34" charset="0"/>
-                <a:ea typeface="Hiragino Sans" pitchFamily="34" charset="-122"/>
-                <a:cs typeface="Hiragino Sans" pitchFamily="34" charset="-120"/>
+                <a:latin typeface="Yu Gothic" pitchFamily="34" charset="0"/>
+                <a:ea typeface="Yu Gothic" pitchFamily="34" charset="-122"/>
+                <a:cs typeface="Yu Gothic" pitchFamily="34" charset="-120"/>
               </a:rPr>
               <a:t>×</a:t>
             </a:r>
@@ -14678,9 +14678,9 @@
                 <a:solidFill>
                   <a:srgbClr val="E6EDF3"/>
                 </a:solidFill>
-                <a:latin typeface="Hiragino Sans" pitchFamily="34" charset="0"/>
-                <a:ea typeface="Hiragino Sans" pitchFamily="34" charset="-122"/>
-                <a:cs typeface="Hiragino Sans" pitchFamily="34" charset="-120"/>
+                <a:latin typeface="Yu Gothic" pitchFamily="34" charset="0"/>
+                <a:ea typeface="Yu Gothic" pitchFamily="34" charset="-122"/>
+                <a:cs typeface="Yu Gothic" pitchFamily="34" charset="-120"/>
               </a:rPr>
               <a:t>牛乳を買う</a:t>
             </a:r>
@@ -14717,9 +14717,9 @@
                 <a:solidFill>
                   <a:srgbClr val="8B949E"/>
                 </a:solidFill>
-                <a:latin typeface="Hiragino Sans" pitchFamily="34" charset="0"/>
-                <a:ea typeface="Hiragino Sans" pitchFamily="34" charset="-122"/>
-                <a:cs typeface="Hiragino Sans" pitchFamily="34" charset="-120"/>
+                <a:latin typeface="Yu Gothic" pitchFamily="34" charset="0"/>
+                <a:ea typeface="Yu Gothic" pitchFamily="34" charset="-122"/>
+                <a:cs typeface="Yu Gothic" pitchFamily="34" charset="-120"/>
               </a:rPr>
               <a:t>×</a:t>
             </a:r>
@@ -14808,9 +14808,9 @@
                 <a:solidFill>
                   <a:srgbClr val="E6EDF3"/>
                 </a:solidFill>
-                <a:latin typeface="Hiragino Sans" pitchFamily="34" charset="0"/>
-                <a:ea typeface="Hiragino Sans" pitchFamily="34" charset="-122"/>
-                <a:cs typeface="Hiragino Sans" pitchFamily="34" charset="-120"/>
+                <a:latin typeface="Yu Gothic" pitchFamily="34" charset="0"/>
+                <a:ea typeface="Yu Gothic" pitchFamily="34" charset="-122"/>
+                <a:cs typeface="Yu Gothic" pitchFamily="34" charset="-120"/>
               </a:rPr>
               <a:t>本を返す</a:t>
             </a:r>
@@ -14847,9 +14847,9 @@
                 <a:solidFill>
                   <a:srgbClr val="8B949E"/>
                 </a:solidFill>
-                <a:latin typeface="Hiragino Sans" pitchFamily="34" charset="0"/>
-                <a:ea typeface="Hiragino Sans" pitchFamily="34" charset="-122"/>
-                <a:cs typeface="Hiragino Sans" pitchFamily="34" charset="-120"/>
+                <a:latin typeface="Yu Gothic" pitchFamily="34" charset="0"/>
+                <a:ea typeface="Yu Gothic" pitchFamily="34" charset="-122"/>
+                <a:cs typeface="Yu Gothic" pitchFamily="34" charset="-120"/>
               </a:rPr>
               <a:t>×</a:t>
             </a:r>
@@ -14886,9 +14886,9 @@
                 <a:solidFill>
                   <a:srgbClr val="8B949E"/>
                 </a:solidFill>
-                <a:latin typeface="Hiragino Sans" pitchFamily="34" charset="0"/>
-                <a:ea typeface="Hiragino Sans" pitchFamily="34" charset="-122"/>
-                <a:cs typeface="Hiragino Sans" pitchFamily="34" charset="-120"/>
+                <a:latin typeface="Yu Gothic" pitchFamily="34" charset="0"/>
+                <a:ea typeface="Yu Gothic" pitchFamily="34" charset="-122"/>
+                <a:cs typeface="Yu Gothic" pitchFamily="34" charset="-120"/>
               </a:rPr>
               <a:t>コーディングエージェント入門</a:t>
             </a:r>
@@ -14900,9 +14900,9 @@
                 <a:solidFill>
                   <a:srgbClr val="30363D"/>
                 </a:solidFill>
-                <a:latin typeface="Hiragino Sans" pitchFamily="34" charset="0"/>
-                <a:ea typeface="Hiragino Sans" pitchFamily="34" charset="-122"/>
-                <a:cs typeface="Hiragino Sans" pitchFamily="34" charset="-120"/>
+                <a:latin typeface="Yu Gothic" pitchFamily="34" charset="0"/>
+                <a:ea typeface="Yu Gothic" pitchFamily="34" charset="-122"/>
+                <a:cs typeface="Yu Gothic" pitchFamily="34" charset="-120"/>
               </a:rPr>
               <a:t>  ·  OpenCode × OpenRouter</a:t>
             </a:r>
@@ -14939,9 +14939,9 @@
                 <a:solidFill>
                   <a:srgbClr val="8B949E"/>
                 </a:solidFill>
-                <a:latin typeface="Menlo" pitchFamily="34" charset="0"/>
-                <a:ea typeface="Menlo" pitchFamily="34" charset="-122"/>
-                <a:cs typeface="Menlo" pitchFamily="34" charset="-120"/>
+                <a:latin typeface="Consolas" pitchFamily="34" charset="0"/>
+                <a:ea typeface="Consolas" pitchFamily="34" charset="-122"/>
+                <a:cs typeface="Consolas" pitchFamily="34" charset="-120"/>
               </a:rPr>
               <a:t>20 / 26</a:t>
             </a:r>
@@ -15010,9 +15010,9 @@
                 <a:solidFill>
                   <a:srgbClr val="F0883E"/>
                 </a:solidFill>
-                <a:latin typeface="Menlo" pitchFamily="34" charset="0"/>
-                <a:ea typeface="Menlo" pitchFamily="34" charset="-122"/>
-                <a:cs typeface="Menlo" pitchFamily="34" charset="-120"/>
+                <a:latin typeface="Consolas" pitchFamily="34" charset="0"/>
+                <a:ea typeface="Consolas" pitchFamily="34" charset="-122"/>
+                <a:cs typeface="Consolas" pitchFamily="34" charset="-120"/>
               </a:rPr>
               <a:t>BUILD</a:t>
             </a:r>
@@ -15049,9 +15049,9 @@
                 <a:solidFill>
                   <a:srgbClr val="F0883E"/>
                 </a:solidFill>
-                <a:latin typeface="Menlo" pitchFamily="34" charset="0"/>
-                <a:ea typeface="Menlo" pitchFamily="34" charset="-122"/>
-                <a:cs typeface="Menlo" pitchFamily="34" charset="-120"/>
+                <a:latin typeface="Consolas" pitchFamily="34" charset="0"/>
+                <a:ea typeface="Consolas" pitchFamily="34" charset="-122"/>
+                <a:cs typeface="Consolas" pitchFamily="34" charset="-120"/>
               </a:rPr>
               <a:t>&gt;</a:t>
             </a:r>
@@ -15088,9 +15088,9 @@
                 <a:solidFill>
                   <a:srgbClr val="E6EDF3"/>
                 </a:solidFill>
-                <a:latin typeface="Hiragino Sans" pitchFamily="34" charset="0"/>
-                <a:ea typeface="Hiragino Sans" pitchFamily="34" charset="-122"/>
-                <a:cs typeface="Hiragino Sans" pitchFamily="34" charset="-120"/>
+                <a:latin typeface="Yu Gothic" pitchFamily="34" charset="0"/>
+                <a:ea typeface="Yu Gothic" pitchFamily="34" charset="-122"/>
+                <a:cs typeface="Yu Gothic" pitchFamily="34" charset="-120"/>
               </a:rPr>
               <a:t>エージェントへの指示ファイル</a:t>
             </a:r>
@@ -15127,9 +15127,9 @@
                 <a:solidFill>
                   <a:srgbClr val="C9D1D9"/>
                 </a:solidFill>
-                <a:latin typeface="Hiragino Sans" pitchFamily="34" charset="0"/>
-                <a:ea typeface="Hiragino Sans" pitchFamily="34" charset="-122"/>
-                <a:cs typeface="Hiragino Sans" pitchFamily="34" charset="-120"/>
+                <a:latin typeface="Yu Gothic" pitchFamily="34" charset="0"/>
+                <a:ea typeface="Yu Gothic" pitchFamily="34" charset="-122"/>
+                <a:cs typeface="Yu Gothic" pitchFamily="34" charset="-120"/>
               </a:rPr>
               <a:t>プロジェクトに“指示ファイル”を置くと、前提やルールを毎回伝えられます。</a:t>
             </a:r>
@@ -15137,591 +15137,490 @@
           </a:p>
         </p:txBody>
       </p:sp>
-      <p:graphicFrame>
-        <p:nvGraphicFramePr>
-          <p:cNvPr id="22" name="Table 0"/>
-          <p:cNvGraphicFramePr>
-            <a:graphicFrameLocks noGrp="1"/>
-          </p:cNvGraphicFramePr>
-          <p:nvPr>
-            <p:extLst>
-              <p:ext uri="{D42A27DB-BD31-4B8C-83A1-F6EECF244321}">
-                <p14:modId xmlns:p14="http://schemas.microsoft.com/office/powerpoint/2010/main" val="1579011935"/>
-              </p:ext>
-            </p:extLst>
-          </p:nvPr>
-        </p:nvGraphicFramePr>
-        <p:xfrm>
-          <a:off x="640080" y="2423160"/>
-          <a:ext cx="5852160" cy="914400"/>
-        </p:xfrm>
-        <a:graphic>
-          <a:graphicData uri="http://schemas.openxmlformats.org/drawingml/2006/table">
-            <a:tbl>
-              <a:tblPr/>
-              <a:tblGrid>
-                <a:gridCol w="3108960"/>
-                <a:gridCol w="2743200"/>
-              </a:tblGrid>
-              <a:tr h="502920">
-                <a:tc>
-                  <a:txBody>
-                    <a:bodyPr/>
-                    <a:lstStyle/>
-                    <a:p>
-                      <a:pPr algn="l" indent="0" marL="0">
-                        <a:buNone/>
-                      </a:pPr>
-                      <a:r>
-                        <a:rPr lang="en-US" sz="1500" b="1" dirty="0">
-                          <a:solidFill>
-                            <a:srgbClr val="0D1117"/>
-                          </a:solidFill>
-                          <a:latin typeface="Hiragino Sans" pitchFamily="34" charset="0"/>
-                          <a:ea typeface="Hiragino Sans" pitchFamily="34" charset="-122"/>
-                          <a:cs typeface="Hiragino Sans" pitchFamily="34" charset="-120"/>
-                        </a:rPr>
-                        <a:t>ツール</a:t>
-                      </a:r>
-                      <a:endParaRPr lang="en-US" sz="1500" dirty="0">
-                        <a:latin typeface="Hiragino Sans" charset="0"/>
-                        <a:ea typeface="Hiragino Sans" charset="0"/>
-                        <a:cs typeface="Hiragino Sans" charset="0"/>
-                      </a:endParaRPr>
-                    </a:p>
-                  </a:txBody>
-                  <a:tcPr marL="7315200" marR="0" marT="0" marB="0" anchor="ctr">
-                    <a:lnL w="12700" cap="flat" cmpd="sng" algn="ctr">
-                      <a:solidFill>
-                        <a:srgbClr val="30363D"/>
-                      </a:solidFill>
-                      <a:prstDash val="solid"/>
-                      <a:round/>
-                      <a:headEnd type="none" w="med" len="med"/>
-                      <a:tailEnd type="none" w="med" len="med"/>
-                    </a:lnL>
-                    <a:lnR w="12700" cap="flat" cmpd="sng" algn="ctr">
-                      <a:solidFill>
-                        <a:srgbClr val="30363D"/>
-                      </a:solidFill>
-                      <a:prstDash val="solid"/>
-                      <a:round/>
-                      <a:headEnd type="none" w="med" len="med"/>
-                      <a:tailEnd type="none" w="med" len="med"/>
-                    </a:lnR>
-                    <a:lnT w="12700" cap="flat" cmpd="sng" algn="ctr">
-                      <a:solidFill>
-                        <a:srgbClr val="30363D"/>
-                      </a:solidFill>
-                      <a:prstDash val="solid"/>
-                      <a:round/>
-                      <a:headEnd type="none" w="med" len="med"/>
-                      <a:tailEnd type="none" w="med" len="med"/>
-                    </a:lnT>
-                    <a:lnB w="12700" cap="flat" cmpd="sng" algn="ctr">
-                      <a:solidFill>
-                        <a:srgbClr val="30363D"/>
-                      </a:solidFill>
-                      <a:prstDash val="solid"/>
-                      <a:round/>
-                      <a:headEnd type="none" w="med" len="med"/>
-                      <a:tailEnd type="none" w="med" len="med"/>
-                    </a:lnB>
-                    <a:solidFill>
-                      <a:srgbClr val="F0883E"/>
-                    </a:solidFill>
-                  </a:tcPr>
-                </a:tc>
-                <a:tc>
-                  <a:txBody>
-                    <a:bodyPr/>
-                    <a:lstStyle/>
-                    <a:p>
-                      <a:pPr algn="l" indent="0" marL="0">
-                        <a:buNone/>
-                      </a:pPr>
-                      <a:r>
-                        <a:rPr lang="en-US" sz="1500" b="1" dirty="0">
-                          <a:solidFill>
-                            <a:srgbClr val="0D1117"/>
-                          </a:solidFill>
-                          <a:latin typeface="Hiragino Sans" pitchFamily="34" charset="0"/>
-                          <a:ea typeface="Hiragino Sans" pitchFamily="34" charset="-122"/>
-                          <a:cs typeface="Hiragino Sans" pitchFamily="34" charset="-120"/>
-                        </a:rPr>
-                        <a:t>指示ファイル</a:t>
-                      </a:r>
-                      <a:endParaRPr lang="en-US" sz="1500" dirty="0">
-                        <a:latin typeface="Hiragino Sans" charset="0"/>
-                        <a:ea typeface="Hiragino Sans" charset="0"/>
-                        <a:cs typeface="Hiragino Sans" charset="0"/>
-                      </a:endParaRPr>
-                    </a:p>
-                  </a:txBody>
-                  <a:tcPr marL="7315200" marR="0" marT="0" marB="0" anchor="ctr">
-                    <a:lnL w="12700" cap="flat" cmpd="sng" algn="ctr">
-                      <a:solidFill>
-                        <a:srgbClr val="30363D"/>
-                      </a:solidFill>
-                      <a:prstDash val="solid"/>
-                      <a:round/>
-                      <a:headEnd type="none" w="med" len="med"/>
-                      <a:tailEnd type="none" w="med" len="med"/>
-                    </a:lnL>
-                    <a:lnR w="12700" cap="flat" cmpd="sng" algn="ctr">
-                      <a:solidFill>
-                        <a:srgbClr val="30363D"/>
-                      </a:solidFill>
-                      <a:prstDash val="solid"/>
-                      <a:round/>
-                      <a:headEnd type="none" w="med" len="med"/>
-                      <a:tailEnd type="none" w="med" len="med"/>
-                    </a:lnR>
-                    <a:lnT w="12700" cap="flat" cmpd="sng" algn="ctr">
-                      <a:solidFill>
-                        <a:srgbClr val="30363D"/>
-                      </a:solidFill>
-                      <a:prstDash val="solid"/>
-                      <a:round/>
-                      <a:headEnd type="none" w="med" len="med"/>
-                      <a:tailEnd type="none" w="med" len="med"/>
-                    </a:lnT>
-                    <a:lnB w="12700" cap="flat" cmpd="sng" algn="ctr">
-                      <a:solidFill>
-                        <a:srgbClr val="30363D"/>
-                      </a:solidFill>
-                      <a:prstDash val="solid"/>
-                      <a:round/>
-                      <a:headEnd type="none" w="med" len="med"/>
-                      <a:tailEnd type="none" w="med" len="med"/>
-                    </a:lnB>
-                    <a:solidFill>
-                      <a:srgbClr val="F0883E"/>
-                    </a:solidFill>
-                  </a:tcPr>
-                </a:tc>
-              </a:tr>
-              <a:tr h="640080">
-                <a:tc>
-                  <a:txBody>
-                    <a:bodyPr/>
-                    <a:lstStyle/>
-                    <a:p>
-                      <a:pPr indent="0" marL="0">
-                        <a:buNone/>
-                      </a:pPr>
-                      <a:r>
-                        <a:rPr lang="en-US" sz="1500" dirty="0">
-                          <a:solidFill>
-                            <a:srgbClr val="E6EDF3"/>
-                          </a:solidFill>
-                          <a:latin typeface="Hiragino Sans" pitchFamily="34" charset="0"/>
-                          <a:ea typeface="Hiragino Sans" pitchFamily="34" charset="-122"/>
-                          <a:cs typeface="Hiragino Sans" pitchFamily="34" charset="-120"/>
-                        </a:rPr>
-                        <a:t>OpenCode</a:t>
-                      </a:r>
-                      <a:endParaRPr lang="en-US" sz="1500" dirty="0">
-                        <a:latin typeface="Hiragino Sans" charset="0"/>
-                        <a:ea typeface="Hiragino Sans" charset="0"/>
-                        <a:cs typeface="Hiragino Sans" charset="0"/>
-                      </a:endParaRPr>
-                    </a:p>
-                  </a:txBody>
-                  <a:tcPr marL="7315200" marR="0" marT="0" marB="0" anchor="ctr">
-                    <a:lnL w="12700" cap="flat" cmpd="sng" algn="ctr">
-                      <a:solidFill>
-                        <a:srgbClr val="30363D"/>
-                      </a:solidFill>
-                      <a:prstDash val="solid"/>
-                      <a:round/>
-                      <a:headEnd type="none" w="med" len="med"/>
-                      <a:tailEnd type="none" w="med" len="med"/>
-                    </a:lnL>
-                    <a:lnR w="12700" cap="flat" cmpd="sng" algn="ctr">
-                      <a:solidFill>
-                        <a:srgbClr val="30363D"/>
-                      </a:solidFill>
-                      <a:prstDash val="solid"/>
-                      <a:round/>
-                      <a:headEnd type="none" w="med" len="med"/>
-                      <a:tailEnd type="none" w="med" len="med"/>
-                    </a:lnR>
-                    <a:lnT w="12700" cap="flat" cmpd="sng" algn="ctr">
-                      <a:solidFill>
-                        <a:srgbClr val="30363D"/>
-                      </a:solidFill>
-                      <a:prstDash val="solid"/>
-                      <a:round/>
-                      <a:headEnd type="none" w="med" len="med"/>
-                      <a:tailEnd type="none" w="med" len="med"/>
-                    </a:lnT>
-                    <a:lnB w="12700" cap="flat" cmpd="sng" algn="ctr">
-                      <a:solidFill>
-                        <a:srgbClr val="30363D"/>
-                      </a:solidFill>
-                      <a:prstDash val="solid"/>
-                      <a:round/>
-                      <a:headEnd type="none" w="med" len="med"/>
-                      <a:tailEnd type="none" w="med" len="med"/>
-                    </a:lnB>
-                    <a:solidFill>
-                      <a:srgbClr val="161B22"/>
-                    </a:solidFill>
-                  </a:tcPr>
-                </a:tc>
-                <a:tc>
-                  <a:txBody>
-                    <a:bodyPr/>
-                    <a:lstStyle/>
-                    <a:p>
-                      <a:pPr indent="0" marL="0">
-                        <a:buNone/>
-                      </a:pPr>
-                      <a:r>
-                        <a:rPr lang="en-US" sz="1500" dirty="0">
-                          <a:solidFill>
-                            <a:srgbClr val="3FB950"/>
-                          </a:solidFill>
-                          <a:latin typeface="Hiragino Sans" pitchFamily="34" charset="0"/>
-                          <a:ea typeface="Hiragino Sans" pitchFamily="34" charset="-122"/>
-                          <a:cs typeface="Hiragino Sans" pitchFamily="34" charset="-120"/>
-                        </a:rPr>
-                        <a:t>AGENTS.md</a:t>
-                      </a:r>
-                      <a:endParaRPr lang="en-US" sz="1500" dirty="0">
-                        <a:latin typeface="Hiragino Sans" charset="0"/>
-                        <a:ea typeface="Hiragino Sans" charset="0"/>
-                        <a:cs typeface="Hiragino Sans" charset="0"/>
-                      </a:endParaRPr>
-                    </a:p>
-                  </a:txBody>
-                  <a:tcPr marL="7315200" marR="0" marT="0" marB="0" anchor="ctr">
-                    <a:lnL w="12700" cap="flat" cmpd="sng" algn="ctr">
-                      <a:solidFill>
-                        <a:srgbClr val="30363D"/>
-                      </a:solidFill>
-                      <a:prstDash val="solid"/>
-                      <a:round/>
-                      <a:headEnd type="none" w="med" len="med"/>
-                      <a:tailEnd type="none" w="med" len="med"/>
-                    </a:lnL>
-                    <a:lnR w="12700" cap="flat" cmpd="sng" algn="ctr">
-                      <a:solidFill>
-                        <a:srgbClr val="30363D"/>
-                      </a:solidFill>
-                      <a:prstDash val="solid"/>
-                      <a:round/>
-                      <a:headEnd type="none" w="med" len="med"/>
-                      <a:tailEnd type="none" w="med" len="med"/>
-                    </a:lnR>
-                    <a:lnT w="12700" cap="flat" cmpd="sng" algn="ctr">
-                      <a:solidFill>
-                        <a:srgbClr val="30363D"/>
-                      </a:solidFill>
-                      <a:prstDash val="solid"/>
-                      <a:round/>
-                      <a:headEnd type="none" w="med" len="med"/>
-                      <a:tailEnd type="none" w="med" len="med"/>
-                    </a:lnT>
-                    <a:lnB w="12700" cap="flat" cmpd="sng" algn="ctr">
-                      <a:solidFill>
-                        <a:srgbClr val="30363D"/>
-                      </a:solidFill>
-                      <a:prstDash val="solid"/>
-                      <a:round/>
-                      <a:headEnd type="none" w="med" len="med"/>
-                      <a:tailEnd type="none" w="med" len="med"/>
-                    </a:lnB>
-                    <a:solidFill>
-                      <a:srgbClr val="161B22"/>
-                    </a:solidFill>
-                  </a:tcPr>
-                </a:tc>
-              </a:tr>
-              <a:tr h="640080">
-                <a:tc>
-                  <a:txBody>
-                    <a:bodyPr/>
-                    <a:lstStyle/>
-                    <a:p>
-                      <a:pPr indent="0" marL="0">
-                        <a:buNone/>
-                      </a:pPr>
-                      <a:r>
-                        <a:rPr lang="en-US" sz="1500" dirty="0">
-                          <a:solidFill>
-                            <a:srgbClr val="E6EDF3"/>
-                          </a:solidFill>
-                          <a:latin typeface="Hiragino Sans" pitchFamily="34" charset="0"/>
-                          <a:ea typeface="Hiragino Sans" pitchFamily="34" charset="-122"/>
-                          <a:cs typeface="Hiragino Sans" pitchFamily="34" charset="-120"/>
-                        </a:rPr>
-                        <a:t>Codex CLI</a:t>
-                      </a:r>
-                      <a:endParaRPr lang="en-US" sz="1500" dirty="0">
-                        <a:latin typeface="Hiragino Sans" charset="0"/>
-                        <a:ea typeface="Hiragino Sans" charset="0"/>
-                        <a:cs typeface="Hiragino Sans" charset="0"/>
-                      </a:endParaRPr>
-                    </a:p>
-                  </a:txBody>
-                  <a:tcPr marL="7315200" marR="0" marT="0" marB="0" anchor="ctr">
-                    <a:lnL w="12700" cap="flat" cmpd="sng" algn="ctr">
-                      <a:solidFill>
-                        <a:srgbClr val="30363D"/>
-                      </a:solidFill>
-                      <a:prstDash val="solid"/>
-                      <a:round/>
-                      <a:headEnd type="none" w="med" len="med"/>
-                      <a:tailEnd type="none" w="med" len="med"/>
-                    </a:lnL>
-                    <a:lnR w="12700" cap="flat" cmpd="sng" algn="ctr">
-                      <a:solidFill>
-                        <a:srgbClr val="30363D"/>
-                      </a:solidFill>
-                      <a:prstDash val="solid"/>
-                      <a:round/>
-                      <a:headEnd type="none" w="med" len="med"/>
-                      <a:tailEnd type="none" w="med" len="med"/>
-                    </a:lnR>
-                    <a:lnT w="12700" cap="flat" cmpd="sng" algn="ctr">
-                      <a:solidFill>
-                        <a:srgbClr val="30363D"/>
-                      </a:solidFill>
-                      <a:prstDash val="solid"/>
-                      <a:round/>
-                      <a:headEnd type="none" w="med" len="med"/>
-                      <a:tailEnd type="none" w="med" len="med"/>
-                    </a:lnT>
-                    <a:lnB w="12700" cap="flat" cmpd="sng" algn="ctr">
-                      <a:solidFill>
-                        <a:srgbClr val="30363D"/>
-                      </a:solidFill>
-                      <a:prstDash val="solid"/>
-                      <a:round/>
-                      <a:headEnd type="none" w="med" len="med"/>
-                      <a:tailEnd type="none" w="med" len="med"/>
-                    </a:lnB>
-                    <a:solidFill>
-                      <a:srgbClr val="1C2128"/>
-                    </a:solidFill>
-                  </a:tcPr>
-                </a:tc>
-                <a:tc>
-                  <a:txBody>
-                    <a:bodyPr/>
-                    <a:lstStyle/>
-                    <a:p>
-                      <a:pPr indent="0" marL="0">
-                        <a:buNone/>
-                      </a:pPr>
-                      <a:r>
-                        <a:rPr lang="en-US" sz="1500" dirty="0">
-                          <a:solidFill>
-                            <a:srgbClr val="3FB950"/>
-                          </a:solidFill>
-                          <a:latin typeface="Hiragino Sans" pitchFamily="34" charset="0"/>
-                          <a:ea typeface="Hiragino Sans" pitchFamily="34" charset="-122"/>
-                          <a:cs typeface="Hiragino Sans" pitchFamily="34" charset="-120"/>
-                        </a:rPr>
-                        <a:t>AGENTS.md</a:t>
-                      </a:r>
-                      <a:endParaRPr lang="en-US" sz="1500" dirty="0">
-                        <a:latin typeface="Hiragino Sans" charset="0"/>
-                        <a:ea typeface="Hiragino Sans" charset="0"/>
-                        <a:cs typeface="Hiragino Sans" charset="0"/>
-                      </a:endParaRPr>
-                    </a:p>
-                  </a:txBody>
-                  <a:tcPr marL="7315200" marR="0" marT="0" marB="0" anchor="ctr">
-                    <a:lnL w="12700" cap="flat" cmpd="sng" algn="ctr">
-                      <a:solidFill>
-                        <a:srgbClr val="30363D"/>
-                      </a:solidFill>
-                      <a:prstDash val="solid"/>
-                      <a:round/>
-                      <a:headEnd type="none" w="med" len="med"/>
-                      <a:tailEnd type="none" w="med" len="med"/>
-                    </a:lnL>
-                    <a:lnR w="12700" cap="flat" cmpd="sng" algn="ctr">
-                      <a:solidFill>
-                        <a:srgbClr val="30363D"/>
-                      </a:solidFill>
-                      <a:prstDash val="solid"/>
-                      <a:round/>
-                      <a:headEnd type="none" w="med" len="med"/>
-                      <a:tailEnd type="none" w="med" len="med"/>
-                    </a:lnR>
-                    <a:lnT w="12700" cap="flat" cmpd="sng" algn="ctr">
-                      <a:solidFill>
-                        <a:srgbClr val="30363D"/>
-                      </a:solidFill>
-                      <a:prstDash val="solid"/>
-                      <a:round/>
-                      <a:headEnd type="none" w="med" len="med"/>
-                      <a:tailEnd type="none" w="med" len="med"/>
-                    </a:lnT>
-                    <a:lnB w="12700" cap="flat" cmpd="sng" algn="ctr">
-                      <a:solidFill>
-                        <a:srgbClr val="30363D"/>
-                      </a:solidFill>
-                      <a:prstDash val="solid"/>
-                      <a:round/>
-                      <a:headEnd type="none" w="med" len="med"/>
-                      <a:tailEnd type="none" w="med" len="med"/>
-                    </a:lnB>
-                    <a:solidFill>
-                      <a:srgbClr val="1C2128"/>
-                    </a:solidFill>
-                  </a:tcPr>
-                </a:tc>
-              </a:tr>
-              <a:tr h="640080">
-                <a:tc>
-                  <a:txBody>
-                    <a:bodyPr/>
-                    <a:lstStyle/>
-                    <a:p>
-                      <a:pPr indent="0" marL="0">
-                        <a:buNone/>
-                      </a:pPr>
-                      <a:r>
-                        <a:rPr lang="en-US" sz="1500" dirty="0">
-                          <a:solidFill>
-                            <a:srgbClr val="E6EDF3"/>
-                          </a:solidFill>
-                          <a:latin typeface="Hiragino Sans" pitchFamily="34" charset="0"/>
-                          <a:ea typeface="Hiragino Sans" pitchFamily="34" charset="-122"/>
-                          <a:cs typeface="Hiragino Sans" pitchFamily="34" charset="-120"/>
-                        </a:rPr>
-                        <a:t>Claude Code</a:t>
-                      </a:r>
-                      <a:endParaRPr lang="en-US" sz="1500" dirty="0">
-                        <a:latin typeface="Hiragino Sans" charset="0"/>
-                        <a:ea typeface="Hiragino Sans" charset="0"/>
-                        <a:cs typeface="Hiragino Sans" charset="0"/>
-                      </a:endParaRPr>
-                    </a:p>
-                  </a:txBody>
-                  <a:tcPr marL="7315200" marR="0" marT="0" marB="0" anchor="ctr">
-                    <a:lnL w="12700" cap="flat" cmpd="sng" algn="ctr">
-                      <a:solidFill>
-                        <a:srgbClr val="30363D"/>
-                      </a:solidFill>
-                      <a:prstDash val="solid"/>
-                      <a:round/>
-                      <a:headEnd type="none" w="med" len="med"/>
-                      <a:tailEnd type="none" w="med" len="med"/>
-                    </a:lnL>
-                    <a:lnR w="12700" cap="flat" cmpd="sng" algn="ctr">
-                      <a:solidFill>
-                        <a:srgbClr val="30363D"/>
-                      </a:solidFill>
-                      <a:prstDash val="solid"/>
-                      <a:round/>
-                      <a:headEnd type="none" w="med" len="med"/>
-                      <a:tailEnd type="none" w="med" len="med"/>
-                    </a:lnR>
-                    <a:lnT w="12700" cap="flat" cmpd="sng" algn="ctr">
-                      <a:solidFill>
-                        <a:srgbClr val="30363D"/>
-                      </a:solidFill>
-                      <a:prstDash val="solid"/>
-                      <a:round/>
-                      <a:headEnd type="none" w="med" len="med"/>
-                      <a:tailEnd type="none" w="med" len="med"/>
-                    </a:lnT>
-                    <a:lnB w="12700" cap="flat" cmpd="sng" algn="ctr">
-                      <a:solidFill>
-                        <a:srgbClr val="30363D"/>
-                      </a:solidFill>
-                      <a:prstDash val="solid"/>
-                      <a:round/>
-                      <a:headEnd type="none" w="med" len="med"/>
-                      <a:tailEnd type="none" w="med" len="med"/>
-                    </a:lnB>
-                    <a:solidFill>
-                      <a:srgbClr val="161B22"/>
-                    </a:solidFill>
-                  </a:tcPr>
-                </a:tc>
-                <a:tc>
-                  <a:txBody>
-                    <a:bodyPr/>
-                    <a:lstStyle/>
-                    <a:p>
-                      <a:pPr indent="0" marL="0">
-                        <a:buNone/>
-                      </a:pPr>
-                      <a:r>
-                        <a:rPr lang="en-US" sz="1500" dirty="0">
-                          <a:solidFill>
-                            <a:srgbClr val="3FB950"/>
-                          </a:solidFill>
-                          <a:latin typeface="Hiragino Sans" pitchFamily="34" charset="0"/>
-                          <a:ea typeface="Hiragino Sans" pitchFamily="34" charset="-122"/>
-                          <a:cs typeface="Hiragino Sans" pitchFamily="34" charset="-120"/>
-                        </a:rPr>
-                        <a:t>CLAUDE.md</a:t>
-                      </a:r>
-                      <a:endParaRPr lang="en-US" sz="1500" dirty="0">
-                        <a:latin typeface="Hiragino Sans" charset="0"/>
-                        <a:ea typeface="Hiragino Sans" charset="0"/>
-                        <a:cs typeface="Hiragino Sans" charset="0"/>
-                      </a:endParaRPr>
-                    </a:p>
-                  </a:txBody>
-                  <a:tcPr marL="7315200" marR="0" marT="0" marB="0" anchor="ctr">
-                    <a:lnL w="12700" cap="flat" cmpd="sng" algn="ctr">
-                      <a:solidFill>
-                        <a:srgbClr val="30363D"/>
-                      </a:solidFill>
-                      <a:prstDash val="solid"/>
-                      <a:round/>
-                      <a:headEnd type="none" w="med" len="med"/>
-                      <a:tailEnd type="none" w="med" len="med"/>
-                    </a:lnL>
-                    <a:lnR w="12700" cap="flat" cmpd="sng" algn="ctr">
-                      <a:solidFill>
-                        <a:srgbClr val="30363D"/>
-                      </a:solidFill>
-                      <a:prstDash val="solid"/>
-                      <a:round/>
-                      <a:headEnd type="none" w="med" len="med"/>
-                      <a:tailEnd type="none" w="med" len="med"/>
-                    </a:lnR>
-                    <a:lnT w="12700" cap="flat" cmpd="sng" algn="ctr">
-                      <a:solidFill>
-                        <a:srgbClr val="30363D"/>
-                      </a:solidFill>
-                      <a:prstDash val="solid"/>
-                      <a:round/>
-                      <a:headEnd type="none" w="med" len="med"/>
-                      <a:tailEnd type="none" w="med" len="med"/>
-                    </a:lnT>
-                    <a:lnB w="12700" cap="flat" cmpd="sng" algn="ctr">
-                      <a:solidFill>
-                        <a:srgbClr val="30363D"/>
-                      </a:solidFill>
-                      <a:prstDash val="solid"/>
-                      <a:round/>
-                      <a:headEnd type="none" w="med" len="med"/>
-                      <a:tailEnd type="none" w="med" len="med"/>
-                    </a:lnB>
-                    <a:solidFill>
-                      <a:srgbClr val="161B22"/>
-                    </a:solidFill>
-                  </a:tcPr>
-                </a:tc>
-              </a:tr>
-            </a:tbl>
-          </a:graphicData>
-        </a:graphic>
-      </p:graphicFrame>
-      <p:sp>
-        <p:nvSpPr>
-          <p:cNvPr id="7" name="Text 4"/>
+      <p:sp>
+        <p:nvSpPr>
+          <p:cNvPr id="6" name="Shape 4"/>
+          <p:cNvSpPr/>
+          <p:nvPr/>
+        </p:nvSpPr>
+        <p:spPr>
+          <a:xfrm>
+            <a:off x="640080" y="2423160"/>
+            <a:ext cx="5852160" cy="502920"/>
+          </a:xfrm>
+          <a:prstGeom prst="rect">
+            <a:avLst/>
+          </a:prstGeom>
+          <a:solidFill>
+            <a:srgbClr val="F0883E"/>
+          </a:solidFill>
+          <a:ln w="12700">
+            <a:solidFill>
+              <a:srgbClr val="30363D"/>
+            </a:solidFill>
+            <a:prstDash val="solid"/>
+          </a:ln>
+        </p:spPr>
+      </p:sp>
+      <p:sp>
+        <p:nvSpPr>
+          <p:cNvPr id="7" name="Text 5"/>
+          <p:cNvSpPr/>
+          <p:nvPr/>
+        </p:nvSpPr>
+        <p:spPr>
+          <a:xfrm>
+            <a:off x="804672" y="2423160"/>
+            <a:ext cx="2834640" cy="502920"/>
+          </a:xfrm>
+          <a:prstGeom prst="rect">
+            <a:avLst/>
+          </a:prstGeom>
+          <a:noFill/>
+          <a:ln/>
+        </p:spPr>
+        <p:txBody>
+          <a:bodyPr wrap="square" lIns="0" tIns="0" rIns="0" bIns="0" rtlCol="0" anchor="ctr"/>
+          <a:lstStyle/>
+          <a:p>
+            <a:pPr algn="l" indent="0" marL="0">
+              <a:buNone/>
+            </a:pPr>
+            <a:r>
+              <a:rPr lang="en-US" sz="1500" b="1" dirty="0">
+                <a:solidFill>
+                  <a:srgbClr val="0D1117"/>
+                </a:solidFill>
+                <a:latin typeface="Yu Gothic" pitchFamily="34" charset="0"/>
+                <a:ea typeface="Yu Gothic" pitchFamily="34" charset="-122"/>
+                <a:cs typeface="Yu Gothic" pitchFamily="34" charset="-120"/>
+              </a:rPr>
+              <a:t>ツール</a:t>
+            </a:r>
+            <a:endParaRPr lang="en-US" sz="1500" dirty="0"/>
+          </a:p>
+        </p:txBody>
+      </p:sp>
+      <p:sp>
+        <p:nvSpPr>
+          <p:cNvPr id="8" name="Text 6"/>
+          <p:cNvSpPr/>
+          <p:nvPr/>
+        </p:nvSpPr>
+        <p:spPr>
+          <a:xfrm>
+            <a:off x="3913632" y="2423160"/>
+            <a:ext cx="2468880" cy="502920"/>
+          </a:xfrm>
+          <a:prstGeom prst="rect">
+            <a:avLst/>
+          </a:prstGeom>
+          <a:noFill/>
+          <a:ln/>
+        </p:spPr>
+        <p:txBody>
+          <a:bodyPr wrap="square" lIns="0" tIns="0" rIns="0" bIns="0" rtlCol="0" anchor="ctr"/>
+          <a:lstStyle/>
+          <a:p>
+            <a:pPr algn="l" indent="0" marL="0">
+              <a:buNone/>
+            </a:pPr>
+            <a:r>
+              <a:rPr lang="en-US" sz="1500" b="1" dirty="0">
+                <a:solidFill>
+                  <a:srgbClr val="0D1117"/>
+                </a:solidFill>
+                <a:latin typeface="Yu Gothic" pitchFamily="34" charset="0"/>
+                <a:ea typeface="Yu Gothic" pitchFamily="34" charset="-122"/>
+                <a:cs typeface="Yu Gothic" pitchFamily="34" charset="-120"/>
+              </a:rPr>
+              <a:t>指示ファイル</a:t>
+            </a:r>
+            <a:endParaRPr lang="en-US" sz="1500" dirty="0"/>
+          </a:p>
+        </p:txBody>
+      </p:sp>
+      <p:sp>
+        <p:nvSpPr>
+          <p:cNvPr id="9" name="Shape 7"/>
+          <p:cNvSpPr/>
+          <p:nvPr/>
+        </p:nvSpPr>
+        <p:spPr>
+          <a:xfrm>
+            <a:off x="640080" y="2926080"/>
+            <a:ext cx="5852160" cy="640080"/>
+          </a:xfrm>
+          <a:prstGeom prst="rect">
+            <a:avLst/>
+          </a:prstGeom>
+          <a:solidFill>
+            <a:srgbClr val="161B22"/>
+          </a:solidFill>
+          <a:ln w="12700">
+            <a:solidFill>
+              <a:srgbClr val="30363D"/>
+            </a:solidFill>
+            <a:prstDash val="solid"/>
+          </a:ln>
+        </p:spPr>
+      </p:sp>
+      <p:sp>
+        <p:nvSpPr>
+          <p:cNvPr id="10" name="Shape 8"/>
+          <p:cNvSpPr/>
+          <p:nvPr/>
+        </p:nvSpPr>
+        <p:spPr>
+          <a:xfrm>
+            <a:off x="3749040" y="2926080"/>
+            <a:ext cx="0" cy="640080"/>
+          </a:xfrm>
+          <a:prstGeom prst="line">
+            <a:avLst/>
+          </a:prstGeom>
+          <a:noFill/>
+          <a:ln w="12700">
+            <a:solidFill>
+              <a:srgbClr val="30363D"/>
+            </a:solidFill>
+            <a:prstDash val="solid"/>
+          </a:ln>
+        </p:spPr>
+      </p:sp>
+      <p:sp>
+        <p:nvSpPr>
+          <p:cNvPr id="11" name="Text 9"/>
+          <p:cNvSpPr/>
+          <p:nvPr/>
+        </p:nvSpPr>
+        <p:spPr>
+          <a:xfrm>
+            <a:off x="804672" y="2926080"/>
+            <a:ext cx="2834640" cy="640080"/>
+          </a:xfrm>
+          <a:prstGeom prst="rect">
+            <a:avLst/>
+          </a:prstGeom>
+          <a:noFill/>
+          <a:ln/>
+        </p:spPr>
+        <p:txBody>
+          <a:bodyPr wrap="square" lIns="0" tIns="0" rIns="0" bIns="0" rtlCol="0" anchor="ctr"/>
+          <a:lstStyle/>
+          <a:p>
+            <a:pPr algn="l" indent="0" marL="0">
+              <a:buNone/>
+            </a:pPr>
+            <a:r>
+              <a:rPr lang="en-US" sz="1500" dirty="0">
+                <a:solidFill>
+                  <a:srgbClr val="E6EDF3"/>
+                </a:solidFill>
+                <a:latin typeface="Yu Gothic" pitchFamily="34" charset="0"/>
+                <a:ea typeface="Yu Gothic" pitchFamily="34" charset="-122"/>
+                <a:cs typeface="Yu Gothic" pitchFamily="34" charset="-120"/>
+              </a:rPr>
+              <a:t>OpenCode</a:t>
+            </a:r>
+            <a:endParaRPr lang="en-US" sz="1500" dirty="0"/>
+          </a:p>
+        </p:txBody>
+      </p:sp>
+      <p:sp>
+        <p:nvSpPr>
+          <p:cNvPr id="12" name="Text 10"/>
+          <p:cNvSpPr/>
+          <p:nvPr/>
+        </p:nvSpPr>
+        <p:spPr>
+          <a:xfrm>
+            <a:off x="3913632" y="2926080"/>
+            <a:ext cx="2468880" cy="640080"/>
+          </a:xfrm>
+          <a:prstGeom prst="rect">
+            <a:avLst/>
+          </a:prstGeom>
+          <a:noFill/>
+          <a:ln/>
+        </p:spPr>
+        <p:txBody>
+          <a:bodyPr wrap="square" lIns="0" tIns="0" rIns="0" bIns="0" rtlCol="0" anchor="ctr"/>
+          <a:lstStyle/>
+          <a:p>
+            <a:pPr algn="l" indent="0" marL="0">
+              <a:buNone/>
+            </a:pPr>
+            <a:r>
+              <a:rPr lang="en-US" sz="1500" dirty="0">
+                <a:solidFill>
+                  <a:srgbClr val="3FB950"/>
+                </a:solidFill>
+                <a:latin typeface="Yu Gothic" pitchFamily="34" charset="0"/>
+                <a:ea typeface="Yu Gothic" pitchFamily="34" charset="-122"/>
+                <a:cs typeface="Yu Gothic" pitchFamily="34" charset="-120"/>
+              </a:rPr>
+              <a:t>AGENTS.md</a:t>
+            </a:r>
+            <a:endParaRPr lang="en-US" sz="1500" dirty="0"/>
+          </a:p>
+        </p:txBody>
+      </p:sp>
+      <p:sp>
+        <p:nvSpPr>
+          <p:cNvPr id="13" name="Shape 11"/>
+          <p:cNvSpPr/>
+          <p:nvPr/>
+        </p:nvSpPr>
+        <p:spPr>
+          <a:xfrm>
+            <a:off x="640080" y="3566160"/>
+            <a:ext cx="5852160" cy="640080"/>
+          </a:xfrm>
+          <a:prstGeom prst="rect">
+            <a:avLst/>
+          </a:prstGeom>
+          <a:solidFill>
+            <a:srgbClr val="1C2128"/>
+          </a:solidFill>
+          <a:ln w="12700">
+            <a:solidFill>
+              <a:srgbClr val="30363D"/>
+            </a:solidFill>
+            <a:prstDash val="solid"/>
+          </a:ln>
+        </p:spPr>
+      </p:sp>
+      <p:sp>
+        <p:nvSpPr>
+          <p:cNvPr id="14" name="Shape 12"/>
+          <p:cNvSpPr/>
+          <p:nvPr/>
+        </p:nvSpPr>
+        <p:spPr>
+          <a:xfrm>
+            <a:off x="3749040" y="3566160"/>
+            <a:ext cx="0" cy="640080"/>
+          </a:xfrm>
+          <a:prstGeom prst="line">
+            <a:avLst/>
+          </a:prstGeom>
+          <a:noFill/>
+          <a:ln w="12700">
+            <a:solidFill>
+              <a:srgbClr val="30363D"/>
+            </a:solidFill>
+            <a:prstDash val="solid"/>
+          </a:ln>
+        </p:spPr>
+      </p:sp>
+      <p:sp>
+        <p:nvSpPr>
+          <p:cNvPr id="15" name="Text 13"/>
+          <p:cNvSpPr/>
+          <p:nvPr/>
+        </p:nvSpPr>
+        <p:spPr>
+          <a:xfrm>
+            <a:off x="804672" y="3566160"/>
+            <a:ext cx="2834640" cy="640080"/>
+          </a:xfrm>
+          <a:prstGeom prst="rect">
+            <a:avLst/>
+          </a:prstGeom>
+          <a:noFill/>
+          <a:ln/>
+        </p:spPr>
+        <p:txBody>
+          <a:bodyPr wrap="square" lIns="0" tIns="0" rIns="0" bIns="0" rtlCol="0" anchor="ctr"/>
+          <a:lstStyle/>
+          <a:p>
+            <a:pPr algn="l" indent="0" marL="0">
+              <a:buNone/>
+            </a:pPr>
+            <a:r>
+              <a:rPr lang="en-US" sz="1500" dirty="0">
+                <a:solidFill>
+                  <a:srgbClr val="E6EDF3"/>
+                </a:solidFill>
+                <a:latin typeface="Yu Gothic" pitchFamily="34" charset="0"/>
+                <a:ea typeface="Yu Gothic" pitchFamily="34" charset="-122"/>
+                <a:cs typeface="Yu Gothic" pitchFamily="34" charset="-120"/>
+              </a:rPr>
+              <a:t>Codex CLI</a:t>
+            </a:r>
+            <a:endParaRPr lang="en-US" sz="1500" dirty="0"/>
+          </a:p>
+        </p:txBody>
+      </p:sp>
+      <p:sp>
+        <p:nvSpPr>
+          <p:cNvPr id="16" name="Text 14"/>
+          <p:cNvSpPr/>
+          <p:nvPr/>
+        </p:nvSpPr>
+        <p:spPr>
+          <a:xfrm>
+            <a:off x="3913632" y="3566160"/>
+            <a:ext cx="2468880" cy="640080"/>
+          </a:xfrm>
+          <a:prstGeom prst="rect">
+            <a:avLst/>
+          </a:prstGeom>
+          <a:noFill/>
+          <a:ln/>
+        </p:spPr>
+        <p:txBody>
+          <a:bodyPr wrap="square" lIns="0" tIns="0" rIns="0" bIns="0" rtlCol="0" anchor="ctr"/>
+          <a:lstStyle/>
+          <a:p>
+            <a:pPr algn="l" indent="0" marL="0">
+              <a:buNone/>
+            </a:pPr>
+            <a:r>
+              <a:rPr lang="en-US" sz="1500" dirty="0">
+                <a:solidFill>
+                  <a:srgbClr val="3FB950"/>
+                </a:solidFill>
+                <a:latin typeface="Yu Gothic" pitchFamily="34" charset="0"/>
+                <a:ea typeface="Yu Gothic" pitchFamily="34" charset="-122"/>
+                <a:cs typeface="Yu Gothic" pitchFamily="34" charset="-120"/>
+              </a:rPr>
+              <a:t>AGENTS.md</a:t>
+            </a:r>
+            <a:endParaRPr lang="en-US" sz="1500" dirty="0"/>
+          </a:p>
+        </p:txBody>
+      </p:sp>
+      <p:sp>
+        <p:nvSpPr>
+          <p:cNvPr id="17" name="Shape 15"/>
+          <p:cNvSpPr/>
+          <p:nvPr/>
+        </p:nvSpPr>
+        <p:spPr>
+          <a:xfrm>
+            <a:off x="640080" y="4206240"/>
+            <a:ext cx="5852160" cy="640080"/>
+          </a:xfrm>
+          <a:prstGeom prst="rect">
+            <a:avLst/>
+          </a:prstGeom>
+          <a:solidFill>
+            <a:srgbClr val="161B22"/>
+          </a:solidFill>
+          <a:ln w="12700">
+            <a:solidFill>
+              <a:srgbClr val="30363D"/>
+            </a:solidFill>
+            <a:prstDash val="solid"/>
+          </a:ln>
+        </p:spPr>
+      </p:sp>
+      <p:sp>
+        <p:nvSpPr>
+          <p:cNvPr id="18" name="Shape 16"/>
+          <p:cNvSpPr/>
+          <p:nvPr/>
+        </p:nvSpPr>
+        <p:spPr>
+          <a:xfrm>
+            <a:off x="3749040" y="4206240"/>
+            <a:ext cx="0" cy="640080"/>
+          </a:xfrm>
+          <a:prstGeom prst="line">
+            <a:avLst/>
+          </a:prstGeom>
+          <a:noFill/>
+          <a:ln w="12700">
+            <a:solidFill>
+              <a:srgbClr val="30363D"/>
+            </a:solidFill>
+            <a:prstDash val="solid"/>
+          </a:ln>
+        </p:spPr>
+      </p:sp>
+      <p:sp>
+        <p:nvSpPr>
+          <p:cNvPr id="19" name="Text 17"/>
+          <p:cNvSpPr/>
+          <p:nvPr/>
+        </p:nvSpPr>
+        <p:spPr>
+          <a:xfrm>
+            <a:off x="804672" y="4206240"/>
+            <a:ext cx="2834640" cy="640080"/>
+          </a:xfrm>
+          <a:prstGeom prst="rect">
+            <a:avLst/>
+          </a:prstGeom>
+          <a:noFill/>
+          <a:ln/>
+        </p:spPr>
+        <p:txBody>
+          <a:bodyPr wrap="square" lIns="0" tIns="0" rIns="0" bIns="0" rtlCol="0" anchor="ctr"/>
+          <a:lstStyle/>
+          <a:p>
+            <a:pPr algn="l" indent="0" marL="0">
+              <a:buNone/>
+            </a:pPr>
+            <a:r>
+              <a:rPr lang="en-US" sz="1500" dirty="0">
+                <a:solidFill>
+                  <a:srgbClr val="E6EDF3"/>
+                </a:solidFill>
+                <a:latin typeface="Yu Gothic" pitchFamily="34" charset="0"/>
+                <a:ea typeface="Yu Gothic" pitchFamily="34" charset="-122"/>
+                <a:cs typeface="Yu Gothic" pitchFamily="34" charset="-120"/>
+              </a:rPr>
+              <a:t>Claude Code</a:t>
+            </a:r>
+            <a:endParaRPr lang="en-US" sz="1500" dirty="0"/>
+          </a:p>
+        </p:txBody>
+      </p:sp>
+      <p:sp>
+        <p:nvSpPr>
+          <p:cNvPr id="20" name="Text 18"/>
+          <p:cNvSpPr/>
+          <p:nvPr/>
+        </p:nvSpPr>
+        <p:spPr>
+          <a:xfrm>
+            <a:off x="3913632" y="4206240"/>
+            <a:ext cx="2468880" cy="640080"/>
+          </a:xfrm>
+          <a:prstGeom prst="rect">
+            <a:avLst/>
+          </a:prstGeom>
+          <a:noFill/>
+          <a:ln/>
+        </p:spPr>
+        <p:txBody>
+          <a:bodyPr wrap="square" lIns="0" tIns="0" rIns="0" bIns="0" rtlCol="0" anchor="ctr"/>
+          <a:lstStyle/>
+          <a:p>
+            <a:pPr algn="l" indent="0" marL="0">
+              <a:buNone/>
+            </a:pPr>
+            <a:r>
+              <a:rPr lang="en-US" sz="1500" dirty="0">
+                <a:solidFill>
+                  <a:srgbClr val="3FB950"/>
+                </a:solidFill>
+                <a:latin typeface="Yu Gothic" pitchFamily="34" charset="0"/>
+                <a:ea typeface="Yu Gothic" pitchFamily="34" charset="-122"/>
+                <a:cs typeface="Yu Gothic" pitchFamily="34" charset="-120"/>
+              </a:rPr>
+              <a:t>CLAUDE.md</a:t>
+            </a:r>
+            <a:endParaRPr lang="en-US" sz="1500" dirty="0"/>
+          </a:p>
+        </p:txBody>
+      </p:sp>
+      <p:sp>
+        <p:nvSpPr>
+          <p:cNvPr id="21" name="Text 19"/>
           <p:cNvSpPr/>
           <p:nvPr/>
         </p:nvSpPr>
@@ -15751,9 +15650,9 @@
                 <a:solidFill>
                   <a:srgbClr val="8B949E"/>
                 </a:solidFill>
-                <a:latin typeface="Hiragino Sans" pitchFamily="34" charset="0"/>
-                <a:ea typeface="Hiragino Sans" pitchFamily="34" charset="-122"/>
-                <a:cs typeface="Hiragino Sans" pitchFamily="34" charset="-120"/>
+                <a:latin typeface="Yu Gothic" pitchFamily="34" charset="0"/>
+                <a:ea typeface="Yu Gothic" pitchFamily="34" charset="-122"/>
+                <a:cs typeface="Yu Gothic" pitchFamily="34" charset="-120"/>
               </a:rPr>
               <a:t>名前は違っても“前提を1度書いておく”という考え方は共通です。</a:t>
             </a:r>
@@ -15763,7 +15662,7 @@
       </p:sp>
       <p:sp>
         <p:nvSpPr>
-          <p:cNvPr id="8" name="Shape 5"/>
+          <p:cNvPr id="22" name="Shape 20"/>
           <p:cNvSpPr/>
           <p:nvPr/>
         </p:nvSpPr>
@@ -15797,7 +15696,7 @@
       </p:sp>
       <p:sp>
         <p:nvSpPr>
-          <p:cNvPr id="9" name="Shape 6"/>
+          <p:cNvPr id="23" name="Shape 21"/>
           <p:cNvSpPr/>
           <p:nvPr/>
         </p:nvSpPr>
@@ -15817,7 +15716,7 @@
       </p:sp>
       <p:sp>
         <p:nvSpPr>
-          <p:cNvPr id="10" name="Shape 7"/>
+          <p:cNvPr id="24" name="Shape 22"/>
           <p:cNvSpPr/>
           <p:nvPr/>
         </p:nvSpPr>
@@ -15837,7 +15736,7 @@
       </p:sp>
       <p:sp>
         <p:nvSpPr>
-          <p:cNvPr id="11" name="Shape 8"/>
+          <p:cNvPr id="25" name="Shape 23"/>
           <p:cNvSpPr/>
           <p:nvPr/>
         </p:nvSpPr>
@@ -15857,7 +15756,7 @@
       </p:sp>
       <p:sp>
         <p:nvSpPr>
-          <p:cNvPr id="12" name="Shape 9"/>
+          <p:cNvPr id="26" name="Shape 24"/>
           <p:cNvSpPr/>
           <p:nvPr/>
         </p:nvSpPr>
@@ -15877,7 +15776,7 @@
       </p:sp>
       <p:sp>
         <p:nvSpPr>
-          <p:cNvPr id="13" name="Text 10"/>
+          <p:cNvPr id="27" name="Text 25"/>
           <p:cNvSpPr/>
           <p:nvPr/>
         </p:nvSpPr>
@@ -15904,9 +15803,9 @@
                 <a:solidFill>
                   <a:srgbClr val="8B949E"/>
                 </a:solidFill>
-                <a:latin typeface="Menlo" pitchFamily="34" charset="0"/>
-                <a:ea typeface="Menlo" pitchFamily="34" charset="-122"/>
-                <a:cs typeface="Menlo" pitchFamily="34" charset="-120"/>
+                <a:latin typeface="Consolas" pitchFamily="34" charset="0"/>
+                <a:ea typeface="Consolas" pitchFamily="34" charset="-122"/>
+                <a:cs typeface="Consolas" pitchFamily="34" charset="-120"/>
               </a:rPr>
               <a:t>書き方の例</a:t>
             </a:r>
@@ -15916,7 +15815,7 @@
       </p:sp>
       <p:sp>
         <p:nvSpPr>
-          <p:cNvPr id="14" name="Text 11"/>
+          <p:cNvPr id="28" name="Text 26"/>
           <p:cNvSpPr/>
           <p:nvPr/>
         </p:nvSpPr>
@@ -15946,9 +15845,9 @@
                 <a:solidFill>
                   <a:srgbClr val="8B949E"/>
                 </a:solidFill>
-                <a:latin typeface="Menlo" pitchFamily="34" charset="0"/>
-                <a:ea typeface="Menlo" pitchFamily="34" charset="-122"/>
-                <a:cs typeface="Menlo" pitchFamily="34" charset="-120"/>
+                <a:latin typeface="Consolas" pitchFamily="34" charset="0"/>
+                <a:ea typeface="Consolas" pitchFamily="34" charset="-122"/>
+                <a:cs typeface="Consolas" pitchFamily="34" charset="-120"/>
               </a:rPr>
               <a:t># AGENTS.md</a:t>
             </a:r>
@@ -15966,9 +15865,9 @@
                 <a:solidFill>
                   <a:srgbClr val="BC8CFF"/>
                 </a:solidFill>
-                <a:latin typeface="Menlo" pitchFamily="34" charset="0"/>
-                <a:ea typeface="Menlo" pitchFamily="34" charset="-122"/>
-                <a:cs typeface="Menlo" pitchFamily="34" charset="-120"/>
+                <a:latin typeface="Consolas" pitchFamily="34" charset="0"/>
+                <a:ea typeface="Consolas" pitchFamily="34" charset="-122"/>
+                <a:cs typeface="Consolas" pitchFamily="34" charset="-120"/>
               </a:rPr>
               <a:t>## ルール</a:t>
             </a:r>
@@ -15986,9 +15885,9 @@
                 <a:solidFill>
                   <a:srgbClr val="C9D1D9"/>
                 </a:solidFill>
-                <a:latin typeface="Menlo" pitchFamily="34" charset="0"/>
-                <a:ea typeface="Menlo" pitchFamily="34" charset="-122"/>
-                <a:cs typeface="Menlo" pitchFamily="34" charset="-120"/>
+                <a:latin typeface="Consolas" pitchFamily="34" charset="0"/>
+                <a:ea typeface="Consolas" pitchFamily="34" charset="-122"/>
+                <a:cs typeface="Consolas" pitchFamily="34" charset="-120"/>
               </a:rPr>
               <a:t>- 返答は日本語で</a:t>
             </a:r>
@@ -16006,9 +15905,9 @@
                 <a:solidFill>
                   <a:srgbClr val="C9D1D9"/>
                 </a:solidFill>
-                <a:latin typeface="Menlo" pitchFamily="34" charset="0"/>
-                <a:ea typeface="Menlo" pitchFamily="34" charset="-122"/>
-                <a:cs typeface="Menlo" pitchFamily="34" charset="-120"/>
+                <a:latin typeface="Consolas" pitchFamily="34" charset="0"/>
+                <a:ea typeface="Consolas" pitchFamily="34" charset="-122"/>
+                <a:cs typeface="Consolas" pitchFamily="34" charset="-120"/>
               </a:rPr>
               <a:t>- 小さく動くものから作る</a:t>
             </a:r>
@@ -16026,9 +15925,9 @@
                 <a:solidFill>
                   <a:srgbClr val="C9D1D9"/>
                 </a:solidFill>
-                <a:latin typeface="Menlo" pitchFamily="34" charset="0"/>
-                <a:ea typeface="Menlo" pitchFamily="34" charset="-122"/>
-                <a:cs typeface="Menlo" pitchFamily="34" charset="-120"/>
+                <a:latin typeface="Consolas" pitchFamily="34" charset="0"/>
+                <a:ea typeface="Consolas" pitchFamily="34" charset="-122"/>
+                <a:cs typeface="Consolas" pitchFamily="34" charset="-120"/>
               </a:rPr>
               <a:t>- まずブラウザで動作確認する</a:t>
             </a:r>
@@ -16038,7 +15937,7 @@
       </p:sp>
       <p:sp>
         <p:nvSpPr>
-          <p:cNvPr id="15" name="Shape 12"/>
+          <p:cNvPr id="29" name="Shape 27"/>
           <p:cNvSpPr/>
           <p:nvPr/>
         </p:nvSpPr>
@@ -16072,7 +15971,7 @@
       </p:sp>
       <p:sp>
         <p:nvSpPr>
-          <p:cNvPr id="16" name="Shape 13"/>
+          <p:cNvPr id="30" name="Shape 28"/>
           <p:cNvSpPr/>
           <p:nvPr/>
         </p:nvSpPr>
@@ -16092,7 +15991,7 @@
       </p:sp>
       <p:sp>
         <p:nvSpPr>
-          <p:cNvPr id="17" name="Text 14"/>
+          <p:cNvPr id="31" name="Text 29"/>
           <p:cNvSpPr/>
           <p:nvPr/>
         </p:nvSpPr>
@@ -16122,9 +16021,9 @@
                 <a:solidFill>
                   <a:srgbClr val="C9D1D9"/>
                 </a:solidFill>
-                <a:latin typeface="Hiragino Sans" pitchFamily="34" charset="0"/>
-                <a:ea typeface="Hiragino Sans" pitchFamily="34" charset="-122"/>
-                <a:cs typeface="Hiragino Sans" pitchFamily="34" charset="-120"/>
+                <a:latin typeface="Yu Gothic" pitchFamily="34" charset="0"/>
+                <a:ea typeface="Yu Gothic" pitchFamily="34" charset="-122"/>
+                <a:cs typeface="Yu Gothic" pitchFamily="34" charset="-120"/>
               </a:rPr>
               <a:t>毎回同じ指示を書かずに済み、チームで前提もそろえられる。</a:t>
             </a:r>
@@ -16134,7 +16033,7 @@
       </p:sp>
       <p:sp>
         <p:nvSpPr>
-          <p:cNvPr id="18" name="Text 15"/>
+          <p:cNvPr id="32" name="Text 30"/>
           <p:cNvSpPr/>
           <p:nvPr/>
         </p:nvSpPr>
@@ -16161,9 +16060,9 @@
                 <a:solidFill>
                   <a:srgbClr val="8B949E"/>
                 </a:solidFill>
-                <a:latin typeface="Hiragino Sans" pitchFamily="34" charset="0"/>
-                <a:ea typeface="Hiragino Sans" pitchFamily="34" charset="-122"/>
-                <a:cs typeface="Hiragino Sans" pitchFamily="34" charset="-120"/>
+                <a:latin typeface="Yu Gothic" pitchFamily="34" charset="0"/>
+                <a:ea typeface="Yu Gothic" pitchFamily="34" charset="-122"/>
+                <a:cs typeface="Yu Gothic" pitchFamily="34" charset="-120"/>
               </a:rPr>
               <a:t>コーディングエージェント入門</a:t>
             </a:r>
@@ -16175,9 +16074,9 @@
                 <a:solidFill>
                   <a:srgbClr val="30363D"/>
                 </a:solidFill>
-                <a:latin typeface="Hiragino Sans" pitchFamily="34" charset="0"/>
-                <a:ea typeface="Hiragino Sans" pitchFamily="34" charset="-122"/>
-                <a:cs typeface="Hiragino Sans" pitchFamily="34" charset="-120"/>
+                <a:latin typeface="Yu Gothic" pitchFamily="34" charset="0"/>
+                <a:ea typeface="Yu Gothic" pitchFamily="34" charset="-122"/>
+                <a:cs typeface="Yu Gothic" pitchFamily="34" charset="-120"/>
               </a:rPr>
               <a:t>  ·  OpenCode × OpenRouter</a:t>
             </a:r>
@@ -16187,7 +16086,7 @@
       </p:sp>
       <p:sp>
         <p:nvSpPr>
-          <p:cNvPr id="19" name="Text 16"/>
+          <p:cNvPr id="33" name="Text 31"/>
           <p:cNvSpPr/>
           <p:nvPr/>
         </p:nvSpPr>
@@ -16214,9 +16113,9 @@
                 <a:solidFill>
                   <a:srgbClr val="8B949E"/>
                 </a:solidFill>
-                <a:latin typeface="Menlo" pitchFamily="34" charset="0"/>
-                <a:ea typeface="Menlo" pitchFamily="34" charset="-122"/>
-                <a:cs typeface="Menlo" pitchFamily="34" charset="-120"/>
+                <a:latin typeface="Consolas" pitchFamily="34" charset="0"/>
+                <a:ea typeface="Consolas" pitchFamily="34" charset="-122"/>
+                <a:cs typeface="Consolas" pitchFamily="34" charset="-120"/>
               </a:rPr>
               <a:t>21 / 26</a:t>
             </a:r>
@@ -16285,9 +16184,9 @@
                 <a:solidFill>
                   <a:srgbClr val="F0883E"/>
                 </a:solidFill>
-                <a:latin typeface="Menlo" pitchFamily="34" charset="0"/>
-                <a:ea typeface="Menlo" pitchFamily="34" charset="-122"/>
-                <a:cs typeface="Menlo" pitchFamily="34" charset="-120"/>
+                <a:latin typeface="Consolas" pitchFamily="34" charset="0"/>
+                <a:ea typeface="Consolas" pitchFamily="34" charset="-122"/>
+                <a:cs typeface="Consolas" pitchFamily="34" charset="-120"/>
               </a:rPr>
               <a:t>BUILD</a:t>
             </a:r>
@@ -16324,9 +16223,9 @@
                 <a:solidFill>
                   <a:srgbClr val="F0883E"/>
                 </a:solidFill>
-                <a:latin typeface="Menlo" pitchFamily="34" charset="0"/>
-                <a:ea typeface="Menlo" pitchFamily="34" charset="-122"/>
-                <a:cs typeface="Menlo" pitchFamily="34" charset="-120"/>
+                <a:latin typeface="Consolas" pitchFamily="34" charset="0"/>
+                <a:ea typeface="Consolas" pitchFamily="34" charset="-122"/>
+                <a:cs typeface="Consolas" pitchFamily="34" charset="-120"/>
               </a:rPr>
               <a:t>&gt;</a:t>
             </a:r>
@@ -16363,9 +16262,9 @@
                 <a:solidFill>
                   <a:srgbClr val="E6EDF3"/>
                 </a:solidFill>
-                <a:latin typeface="Hiragino Sans" pitchFamily="34" charset="0"/>
-                <a:ea typeface="Hiragino Sans" pitchFamily="34" charset="-122"/>
-                <a:cs typeface="Hiragino Sans" pitchFamily="34" charset="-120"/>
+                <a:latin typeface="Yu Gothic" pitchFamily="34" charset="0"/>
+                <a:ea typeface="Yu Gothic" pitchFamily="34" charset="-122"/>
+                <a:cs typeface="Yu Gothic" pitchFamily="34" charset="-120"/>
               </a:rPr>
               <a:t>無料枠の上限に注意</a:t>
             </a:r>
@@ -16402,9 +16301,9 @@
                 <a:solidFill>
                   <a:srgbClr val="C9D1D9"/>
                 </a:solidFill>
-                <a:latin typeface="Hiragino Sans" pitchFamily="34" charset="0"/>
-                <a:ea typeface="Hiragino Sans" pitchFamily="34" charset="-122"/>
-                <a:cs typeface="Hiragino Sans" pitchFamily="34" charset="-120"/>
+                <a:latin typeface="Yu Gothic" pitchFamily="34" charset="0"/>
+                <a:ea typeface="Yu Gothic" pitchFamily="34" charset="-122"/>
+                <a:cs typeface="Yu Gothic" pitchFamily="34" charset="-120"/>
               </a:rPr>
               <a:t>未課金アカウントの無料モデルには、OpenRouter の利用上限があります。</a:t>
             </a:r>
@@ -16495,9 +16394,9 @@
                 <a:solidFill>
                   <a:srgbClr val="3FB950"/>
                 </a:solidFill>
-                <a:latin typeface="Hiragino Sans" pitchFamily="34" charset="0"/>
-                <a:ea typeface="Hiragino Sans" pitchFamily="34" charset="-122"/>
-                <a:cs typeface="Hiragino Sans" pitchFamily="34" charset="-120"/>
+                <a:latin typeface="Yu Gothic" pitchFamily="34" charset="0"/>
+                <a:ea typeface="Yu Gothic" pitchFamily="34" charset="-122"/>
+                <a:cs typeface="Yu Gothic" pitchFamily="34" charset="-120"/>
               </a:rPr>
               <a:t>50</a:t>
             </a:r>
@@ -16534,9 +16433,9 @@
                 <a:solidFill>
                   <a:srgbClr val="C9D1D9"/>
                 </a:solidFill>
-                <a:latin typeface="Hiragino Sans" pitchFamily="34" charset="0"/>
-                <a:ea typeface="Hiragino Sans" pitchFamily="34" charset="-122"/>
-                <a:cs typeface="Hiragino Sans" pitchFamily="34" charset="-120"/>
+                <a:latin typeface="Yu Gothic" pitchFamily="34" charset="0"/>
+                <a:ea typeface="Yu Gothic" pitchFamily="34" charset="-122"/>
+                <a:cs typeface="Yu Gothic" pitchFamily="34" charset="-120"/>
               </a:rPr>
               <a:t>リクエスト / 日</a:t>
             </a:r>
@@ -16627,9 +16526,9 @@
                 <a:solidFill>
                   <a:srgbClr val="58A6FF"/>
                 </a:solidFill>
-                <a:latin typeface="Hiragino Sans" pitchFamily="34" charset="0"/>
-                <a:ea typeface="Hiragino Sans" pitchFamily="34" charset="-122"/>
-                <a:cs typeface="Hiragino Sans" pitchFamily="34" charset="-120"/>
+                <a:latin typeface="Yu Gothic" pitchFamily="34" charset="0"/>
+                <a:ea typeface="Yu Gothic" pitchFamily="34" charset="-122"/>
+                <a:cs typeface="Yu Gothic" pitchFamily="34" charset="-120"/>
               </a:rPr>
               <a:t>20</a:t>
             </a:r>
@@ -16666,9 +16565,9 @@
                 <a:solidFill>
                   <a:srgbClr val="C9D1D9"/>
                 </a:solidFill>
-                <a:latin typeface="Hiragino Sans" pitchFamily="34" charset="0"/>
-                <a:ea typeface="Hiragino Sans" pitchFamily="34" charset="-122"/>
-                <a:cs typeface="Hiragino Sans" pitchFamily="34" charset="-120"/>
+                <a:latin typeface="Yu Gothic" pitchFamily="34" charset="0"/>
+                <a:ea typeface="Yu Gothic" pitchFamily="34" charset="-122"/>
+                <a:cs typeface="Yu Gothic" pitchFamily="34" charset="-120"/>
               </a:rPr>
               <a:t>リクエスト / 分</a:t>
             </a:r>
@@ -16705,9 +16604,9 @@
                 <a:solidFill>
                   <a:srgbClr val="8B949E"/>
                 </a:solidFill>
-                <a:latin typeface="Hiragino Sans" pitchFamily="34" charset="0"/>
-                <a:ea typeface="Hiragino Sans" pitchFamily="34" charset="-122"/>
-                <a:cs typeface="Hiragino Sans" pitchFamily="34" charset="-120"/>
+                <a:latin typeface="Yu Gothic" pitchFamily="34" charset="0"/>
+                <a:ea typeface="Yu Gothic" pitchFamily="34" charset="-122"/>
+                <a:cs typeface="Yu Gothic" pitchFamily="34" charset="-120"/>
               </a:rPr>
               <a:t>上限に当たったら、少し時間をおいてから再開しましょう。</a:t>
             </a:r>
@@ -16744,9 +16643,9 @@
                 <a:solidFill>
                   <a:srgbClr val="8B949E"/>
                 </a:solidFill>
-                <a:latin typeface="Hiragino Sans" pitchFamily="34" charset="0"/>
-                <a:ea typeface="Hiragino Sans" pitchFamily="34" charset="-122"/>
-                <a:cs typeface="Hiragino Sans" pitchFamily="34" charset="-120"/>
+                <a:latin typeface="Yu Gothic" pitchFamily="34" charset="0"/>
+                <a:ea typeface="Yu Gothic" pitchFamily="34" charset="-122"/>
+                <a:cs typeface="Yu Gothic" pitchFamily="34" charset="-120"/>
               </a:rPr>
               <a:t>コーディングエージェント入門</a:t>
             </a:r>
@@ -16758,9 +16657,9 @@
                 <a:solidFill>
                   <a:srgbClr val="30363D"/>
                 </a:solidFill>
-                <a:latin typeface="Hiragino Sans" pitchFamily="34" charset="0"/>
-                <a:ea typeface="Hiragino Sans" pitchFamily="34" charset="-122"/>
-                <a:cs typeface="Hiragino Sans" pitchFamily="34" charset="-120"/>
+                <a:latin typeface="Yu Gothic" pitchFamily="34" charset="0"/>
+                <a:ea typeface="Yu Gothic" pitchFamily="34" charset="-122"/>
+                <a:cs typeface="Yu Gothic" pitchFamily="34" charset="-120"/>
               </a:rPr>
               <a:t>  ·  OpenCode × OpenRouter</a:t>
             </a:r>
@@ -16797,9 +16696,9 @@
                 <a:solidFill>
                   <a:srgbClr val="8B949E"/>
                 </a:solidFill>
-                <a:latin typeface="Menlo" pitchFamily="34" charset="0"/>
-                <a:ea typeface="Menlo" pitchFamily="34" charset="-122"/>
-                <a:cs typeface="Menlo" pitchFamily="34" charset="-120"/>
+                <a:latin typeface="Consolas" pitchFamily="34" charset="0"/>
+                <a:ea typeface="Consolas" pitchFamily="34" charset="-122"/>
+                <a:cs typeface="Consolas" pitchFamily="34" charset="-120"/>
               </a:rPr>
               <a:t>22 / 26</a:t>
             </a:r>
@@ -16868,9 +16767,9 @@
                 <a:solidFill>
                   <a:srgbClr val="3FB950"/>
                 </a:solidFill>
-                <a:latin typeface="Menlo" pitchFamily="34" charset="0"/>
-                <a:ea typeface="Menlo" pitchFamily="34" charset="-122"/>
-                <a:cs typeface="Menlo" pitchFamily="34" charset="-120"/>
+                <a:latin typeface="Consolas" pitchFamily="34" charset="0"/>
+                <a:ea typeface="Consolas" pitchFamily="34" charset="-122"/>
+                <a:cs typeface="Consolas" pitchFamily="34" charset="-120"/>
               </a:rPr>
               <a:t>WRAP UP</a:t>
             </a:r>
@@ -16907,9 +16806,9 @@
                 <a:solidFill>
                   <a:srgbClr val="3FB950"/>
                 </a:solidFill>
-                <a:latin typeface="Menlo" pitchFamily="34" charset="0"/>
-                <a:ea typeface="Menlo" pitchFamily="34" charset="-122"/>
-                <a:cs typeface="Menlo" pitchFamily="34" charset="-120"/>
+                <a:latin typeface="Consolas" pitchFamily="34" charset="0"/>
+                <a:ea typeface="Consolas" pitchFamily="34" charset="-122"/>
+                <a:cs typeface="Consolas" pitchFamily="34" charset="-120"/>
               </a:rPr>
               <a:t>&gt;</a:t>
             </a:r>
@@ -16946,9 +16845,9 @@
                 <a:solidFill>
                   <a:srgbClr val="E6EDF3"/>
                 </a:solidFill>
-                <a:latin typeface="Hiragino Sans" pitchFamily="34" charset="0"/>
-                <a:ea typeface="Hiragino Sans" pitchFamily="34" charset="-122"/>
-                <a:cs typeface="Hiragino Sans" pitchFamily="34" charset="-120"/>
+                <a:latin typeface="Yu Gothic" pitchFamily="34" charset="0"/>
+                <a:ea typeface="Yu Gothic" pitchFamily="34" charset="-122"/>
+                <a:cs typeface="Yu Gothic" pitchFamily="34" charset="-120"/>
               </a:rPr>
               <a:t>今日できたこと</a:t>
             </a:r>
@@ -17039,9 +16938,9 @@
                 <a:solidFill>
                   <a:srgbClr val="0D1117"/>
                 </a:solidFill>
-                <a:latin typeface="Hiragino Sans" pitchFamily="34" charset="0"/>
-                <a:ea typeface="Hiragino Sans" pitchFamily="34" charset="-122"/>
-                <a:cs typeface="Hiragino Sans" pitchFamily="34" charset="-120"/>
+                <a:latin typeface="Yu Gothic" pitchFamily="34" charset="0"/>
+                <a:ea typeface="Yu Gothic" pitchFamily="34" charset="-122"/>
+                <a:cs typeface="Yu Gothic" pitchFamily="34" charset="-120"/>
               </a:rPr>
               <a:t>✓</a:t>
             </a:r>
@@ -17078,9 +16977,9 @@
                 <a:solidFill>
                   <a:srgbClr val="E6EDF3"/>
                 </a:solidFill>
-                <a:latin typeface="Hiragino Sans" pitchFamily="34" charset="0"/>
-                <a:ea typeface="Hiragino Sans" pitchFamily="34" charset="-122"/>
-                <a:cs typeface="Hiragino Sans" pitchFamily="34" charset="-120"/>
+                <a:latin typeface="Yu Gothic" pitchFamily="34" charset="0"/>
+                <a:ea typeface="Yu Gothic" pitchFamily="34" charset="-122"/>
+                <a:cs typeface="Yu Gothic" pitchFamily="34" charset="-120"/>
               </a:rPr>
               <a:t>コーディングエージェントが何か理解した</a:t>
             </a:r>
@@ -17171,9 +17070,9 @@
                 <a:solidFill>
                   <a:srgbClr val="0D1117"/>
                 </a:solidFill>
-                <a:latin typeface="Hiragino Sans" pitchFamily="34" charset="0"/>
-                <a:ea typeface="Hiragino Sans" pitchFamily="34" charset="-122"/>
-                <a:cs typeface="Hiragino Sans" pitchFamily="34" charset="-120"/>
+                <a:latin typeface="Yu Gothic" pitchFamily="34" charset="0"/>
+                <a:ea typeface="Yu Gothic" pitchFamily="34" charset="-122"/>
+                <a:cs typeface="Yu Gothic" pitchFamily="34" charset="-120"/>
               </a:rPr>
               <a:t>✓</a:t>
             </a:r>
@@ -17210,9 +17109,9 @@
                 <a:solidFill>
                   <a:srgbClr val="E6EDF3"/>
                 </a:solidFill>
-                <a:latin typeface="Hiragino Sans" pitchFamily="34" charset="0"/>
-                <a:ea typeface="Hiragino Sans" pitchFamily="34" charset="-122"/>
-                <a:cs typeface="Hiragino Sans" pitchFamily="34" charset="-120"/>
+                <a:latin typeface="Yu Gothic" pitchFamily="34" charset="0"/>
+                <a:ea typeface="Yu Gothic" pitchFamily="34" charset="-122"/>
+                <a:cs typeface="Yu Gothic" pitchFamily="34" charset="-120"/>
               </a:rPr>
               <a:t>OpenCode を自分のPCにインストールした</a:t>
             </a:r>
@@ -17303,9 +17202,9 @@
                 <a:solidFill>
                   <a:srgbClr val="0D1117"/>
                 </a:solidFill>
-                <a:latin typeface="Hiragino Sans" pitchFamily="34" charset="0"/>
-                <a:ea typeface="Hiragino Sans" pitchFamily="34" charset="-122"/>
-                <a:cs typeface="Hiragino Sans" pitchFamily="34" charset="-120"/>
+                <a:latin typeface="Yu Gothic" pitchFamily="34" charset="0"/>
+                <a:ea typeface="Yu Gothic" pitchFamily="34" charset="-122"/>
+                <a:cs typeface="Yu Gothic" pitchFamily="34" charset="-120"/>
               </a:rPr>
               <a:t>✓</a:t>
             </a:r>
@@ -17342,9 +17241,9 @@
                 <a:solidFill>
                   <a:srgbClr val="E6EDF3"/>
                 </a:solidFill>
-                <a:latin typeface="Hiragino Sans" pitchFamily="34" charset="0"/>
-                <a:ea typeface="Hiragino Sans" pitchFamily="34" charset="-122"/>
-                <a:cs typeface="Hiragino Sans" pitchFamily="34" charset="-120"/>
+                <a:latin typeface="Yu Gothic" pitchFamily="34" charset="0"/>
+                <a:ea typeface="Yu Gothic" pitchFamily="34" charset="-122"/>
+                <a:cs typeface="Yu Gothic" pitchFamily="34" charset="-120"/>
               </a:rPr>
               <a:t>OpenRouter の無料モデルに接続した</a:t>
             </a:r>
@@ -17435,9 +17334,9 @@
                 <a:solidFill>
                   <a:srgbClr val="0D1117"/>
                 </a:solidFill>
-                <a:latin typeface="Hiragino Sans" pitchFamily="34" charset="0"/>
-                <a:ea typeface="Hiragino Sans" pitchFamily="34" charset="-122"/>
-                <a:cs typeface="Hiragino Sans" pitchFamily="34" charset="-120"/>
+                <a:latin typeface="Yu Gothic" pitchFamily="34" charset="0"/>
+                <a:ea typeface="Yu Gothic" pitchFamily="34" charset="-122"/>
+                <a:cs typeface="Yu Gothic" pitchFamily="34" charset="-120"/>
               </a:rPr>
               <a:t>✓</a:t>
             </a:r>
@@ -17474,9 +17373,9 @@
                 <a:solidFill>
                   <a:srgbClr val="E6EDF3"/>
                 </a:solidFill>
-                <a:latin typeface="Hiragino Sans" pitchFamily="34" charset="0"/>
-                <a:ea typeface="Hiragino Sans" pitchFamily="34" charset="-122"/>
-                <a:cs typeface="Hiragino Sans" pitchFamily="34" charset="-120"/>
+                <a:latin typeface="Yu Gothic" pitchFamily="34" charset="0"/>
+                <a:ea typeface="Yu Gothic" pitchFamily="34" charset="-122"/>
+                <a:cs typeface="Yu Gothic" pitchFamily="34" charset="-120"/>
               </a:rPr>
               <a:t>ToDo ミニアプリを作らせて確認した</a:t>
             </a:r>
@@ -17513,9 +17412,9 @@
                 <a:solidFill>
                   <a:srgbClr val="8B949E"/>
                 </a:solidFill>
-                <a:latin typeface="Hiragino Sans" pitchFamily="34" charset="0"/>
-                <a:ea typeface="Hiragino Sans" pitchFamily="34" charset="-122"/>
-                <a:cs typeface="Hiragino Sans" pitchFamily="34" charset="-120"/>
+                <a:latin typeface="Yu Gothic" pitchFamily="34" charset="0"/>
+                <a:ea typeface="Yu Gothic" pitchFamily="34" charset="-122"/>
+                <a:cs typeface="Yu Gothic" pitchFamily="34" charset="-120"/>
               </a:rPr>
               <a:t>コーディングエージェント入門</a:t>
             </a:r>
@@ -17527,9 +17426,9 @@
                 <a:solidFill>
                   <a:srgbClr val="30363D"/>
                 </a:solidFill>
-                <a:latin typeface="Hiragino Sans" pitchFamily="34" charset="0"/>
-                <a:ea typeface="Hiragino Sans" pitchFamily="34" charset="-122"/>
-                <a:cs typeface="Hiragino Sans" pitchFamily="34" charset="-120"/>
+                <a:latin typeface="Yu Gothic" pitchFamily="34" charset="0"/>
+                <a:ea typeface="Yu Gothic" pitchFamily="34" charset="-122"/>
+                <a:cs typeface="Yu Gothic" pitchFamily="34" charset="-120"/>
               </a:rPr>
               <a:t>  ·  OpenCode × OpenRouter</a:t>
             </a:r>
@@ -17566,9 +17465,9 @@
                 <a:solidFill>
                   <a:srgbClr val="8B949E"/>
                 </a:solidFill>
-                <a:latin typeface="Menlo" pitchFamily="34" charset="0"/>
-                <a:ea typeface="Menlo" pitchFamily="34" charset="-122"/>
-                <a:cs typeface="Menlo" pitchFamily="34" charset="-120"/>
+                <a:latin typeface="Consolas" pitchFamily="34" charset="0"/>
+                <a:ea typeface="Consolas" pitchFamily="34" charset="-122"/>
+                <a:cs typeface="Consolas" pitchFamily="34" charset="-120"/>
               </a:rPr>
               <a:t>23 / 26</a:t>
             </a:r>
@@ -17637,9 +17536,9 @@
                 <a:solidFill>
                   <a:srgbClr val="3FB950"/>
                 </a:solidFill>
-                <a:latin typeface="Menlo" pitchFamily="34" charset="0"/>
-                <a:ea typeface="Menlo" pitchFamily="34" charset="-122"/>
-                <a:cs typeface="Menlo" pitchFamily="34" charset="-120"/>
+                <a:latin typeface="Consolas" pitchFamily="34" charset="0"/>
+                <a:ea typeface="Consolas" pitchFamily="34" charset="-122"/>
+                <a:cs typeface="Consolas" pitchFamily="34" charset="-120"/>
               </a:rPr>
               <a:t>WRAP UP</a:t>
             </a:r>
@@ -17676,9 +17575,9 @@
                 <a:solidFill>
                   <a:srgbClr val="3FB950"/>
                 </a:solidFill>
-                <a:latin typeface="Menlo" pitchFamily="34" charset="0"/>
-                <a:ea typeface="Menlo" pitchFamily="34" charset="-122"/>
-                <a:cs typeface="Menlo" pitchFamily="34" charset="-120"/>
+                <a:latin typeface="Consolas" pitchFamily="34" charset="0"/>
+                <a:ea typeface="Consolas" pitchFamily="34" charset="-122"/>
+                <a:cs typeface="Consolas" pitchFamily="34" charset="-120"/>
               </a:rPr>
               <a:t>&gt;</a:t>
             </a:r>
@@ -17715,9 +17614,9 @@
                 <a:solidFill>
                   <a:srgbClr val="E6EDF3"/>
                 </a:solidFill>
-                <a:latin typeface="Hiragino Sans" pitchFamily="34" charset="0"/>
-                <a:ea typeface="Hiragino Sans" pitchFamily="34" charset="-122"/>
-                <a:cs typeface="Hiragino Sans" pitchFamily="34" charset="-120"/>
+                <a:latin typeface="Yu Gothic" pitchFamily="34" charset="0"/>
+                <a:ea typeface="Yu Gothic" pitchFamily="34" charset="-122"/>
+                <a:cs typeface="Yu Gothic" pitchFamily="34" charset="-120"/>
               </a:rPr>
               <a:t>もっと先へ</a:t>
             </a:r>
@@ -17754,9 +17653,9 @@
                 <a:solidFill>
                   <a:srgbClr val="8B949E"/>
                 </a:solidFill>
-                <a:latin typeface="Hiragino Sans" pitchFamily="34" charset="0"/>
-                <a:ea typeface="Hiragino Sans" pitchFamily="34" charset="-122"/>
-                <a:cs typeface="Hiragino Sans" pitchFamily="34" charset="-120"/>
+                <a:latin typeface="Yu Gothic" pitchFamily="34" charset="0"/>
+                <a:ea typeface="Yu Gothic" pitchFamily="34" charset="-122"/>
+                <a:cs typeface="Yu Gothic" pitchFamily="34" charset="-120"/>
               </a:rPr>
               <a:t>今日おぼえた “頼み方” と “指示ファイル” は、どのエージェントでもそのまま使えます。</a:t>
             </a:r>
@@ -17847,9 +17746,9 @@
                 <a:solidFill>
                   <a:srgbClr val="58A6FF"/>
                 </a:solidFill>
-                <a:latin typeface="Hiragino Sans" pitchFamily="34" charset="0"/>
-                <a:ea typeface="Hiragino Sans" pitchFamily="34" charset="-122"/>
-                <a:cs typeface="Hiragino Sans" pitchFamily="34" charset="-120"/>
+                <a:latin typeface="Yu Gothic" pitchFamily="34" charset="0"/>
+                <a:ea typeface="Yu Gothic" pitchFamily="34" charset="-122"/>
+                <a:cs typeface="Yu Gothic" pitchFamily="34" charset="-120"/>
               </a:rPr>
               <a:t>他のエージェントを試す</a:t>
             </a:r>
@@ -17889,9 +17788,9 @@
                 <a:solidFill>
                   <a:srgbClr val="C9D1D9"/>
                 </a:solidFill>
-                <a:latin typeface="Hiragino Sans" pitchFamily="34" charset="0"/>
-                <a:ea typeface="Hiragino Sans" pitchFamily="34" charset="-122"/>
-                <a:cs typeface="Hiragino Sans" pitchFamily="34" charset="-120"/>
+                <a:latin typeface="Yu Gothic" pitchFamily="34" charset="0"/>
+                <a:ea typeface="Yu Gothic" pitchFamily="34" charset="-122"/>
+                <a:cs typeface="Yu Gothic" pitchFamily="34" charset="-120"/>
               </a:rPr>
               <a:t>Claude Code・Codex CLI など。今日の知識がそのまま活きる。</a:t>
             </a:r>
@@ -17982,9 +17881,9 @@
                 <a:solidFill>
                   <a:srgbClr val="F0883E"/>
                 </a:solidFill>
-                <a:latin typeface="Hiragino Sans" pitchFamily="34" charset="0"/>
-                <a:ea typeface="Hiragino Sans" pitchFamily="34" charset="-122"/>
-                <a:cs typeface="Hiragino Sans" pitchFamily="34" charset="-120"/>
+                <a:latin typeface="Yu Gothic" pitchFamily="34" charset="0"/>
+                <a:ea typeface="Yu Gothic" pitchFamily="34" charset="-122"/>
+                <a:cs typeface="Yu Gothic" pitchFamily="34" charset="-120"/>
               </a:rPr>
               <a:t>高性能モデルで本格開発</a:t>
             </a:r>
@@ -18024,9 +17923,9 @@
                 <a:solidFill>
                   <a:srgbClr val="C9D1D9"/>
                 </a:solidFill>
-                <a:latin typeface="Hiragino Sans" pitchFamily="34" charset="0"/>
-                <a:ea typeface="Hiragino Sans" pitchFamily="34" charset="-122"/>
-                <a:cs typeface="Hiragino Sans" pitchFamily="34" charset="-120"/>
+                <a:latin typeface="Yu Gothic" pitchFamily="34" charset="0"/>
+                <a:ea typeface="Yu Gothic" pitchFamily="34" charset="-122"/>
+                <a:cs typeface="Yu Gothic" pitchFamily="34" charset="-120"/>
               </a:rPr>
               <a:t>有料モデルにすると精度・速度がぐっと上がる。</a:t>
             </a:r>
@@ -18117,9 +18016,9 @@
                 <a:solidFill>
                   <a:srgbClr val="BC8CFF"/>
                 </a:solidFill>
-                <a:latin typeface="Hiragino Sans" pitchFamily="34" charset="0"/>
-                <a:ea typeface="Hiragino Sans" pitchFamily="34" charset="-122"/>
-                <a:cs typeface="Hiragino Sans" pitchFamily="34" charset="-120"/>
+                <a:latin typeface="Yu Gothic" pitchFamily="34" charset="0"/>
+                <a:ea typeface="Yu Gothic" pitchFamily="34" charset="-122"/>
+                <a:cs typeface="Yu Gothic" pitchFamily="34" charset="-120"/>
               </a:rPr>
               <a:t>Webアプリに挑戦</a:t>
             </a:r>
@@ -18159,9 +18058,9 @@
                 <a:solidFill>
                   <a:srgbClr val="C9D1D9"/>
                 </a:solidFill>
-                <a:latin typeface="Hiragino Sans" pitchFamily="34" charset="0"/>
-                <a:ea typeface="Hiragino Sans" pitchFamily="34" charset="-122"/>
-                <a:cs typeface="Hiragino Sans" pitchFamily="34" charset="-120"/>
+                <a:latin typeface="Yu Gothic" pitchFamily="34" charset="0"/>
+                <a:ea typeface="Yu Gothic" pitchFamily="34" charset="-122"/>
+                <a:cs typeface="Yu Gothic" pitchFamily="34" charset="-120"/>
               </a:rPr>
               <a:t>Node を入れて Vite などで本格的なアプリへ。</a:t>
             </a:r>
@@ -18252,9 +18151,9 @@
                 <a:solidFill>
                   <a:srgbClr val="3FB950"/>
                 </a:solidFill>
-                <a:latin typeface="Hiragino Sans" pitchFamily="34" charset="0"/>
-                <a:ea typeface="Hiragino Sans" pitchFamily="34" charset="-122"/>
-                <a:cs typeface="Hiragino Sans" pitchFamily="34" charset="-120"/>
+                <a:latin typeface="Yu Gothic" pitchFamily="34" charset="0"/>
+                <a:ea typeface="Yu Gothic" pitchFamily="34" charset="-122"/>
+                <a:cs typeface="Yu Gothic" pitchFamily="34" charset="-120"/>
               </a:rPr>
               <a:t>ふだんの作業に使う</a:t>
             </a:r>
@@ -18294,9 +18193,9 @@
                 <a:solidFill>
                   <a:srgbClr val="C9D1D9"/>
                 </a:solidFill>
-                <a:latin typeface="Hiragino Sans" pitchFamily="34" charset="0"/>
-                <a:ea typeface="Hiragino Sans" pitchFamily="34" charset="-122"/>
-                <a:cs typeface="Hiragino Sans" pitchFamily="34" charset="-120"/>
+                <a:latin typeface="Yu Gothic" pitchFamily="34" charset="0"/>
+                <a:ea typeface="Yu Gothic" pitchFamily="34" charset="-122"/>
+                <a:cs typeface="Yu Gothic" pitchFamily="34" charset="-120"/>
               </a:rPr>
               <a:t>調べもの・修正・自動化など、研究や開発の相棒に。</a:t>
             </a:r>
@@ -18333,9 +18232,9 @@
                 <a:solidFill>
                   <a:srgbClr val="8B949E"/>
                 </a:solidFill>
-                <a:latin typeface="Hiragino Sans" pitchFamily="34" charset="0"/>
-                <a:ea typeface="Hiragino Sans" pitchFamily="34" charset="-122"/>
-                <a:cs typeface="Hiragino Sans" pitchFamily="34" charset="-120"/>
+                <a:latin typeface="Yu Gothic" pitchFamily="34" charset="0"/>
+                <a:ea typeface="Yu Gothic" pitchFamily="34" charset="-122"/>
+                <a:cs typeface="Yu Gothic" pitchFamily="34" charset="-120"/>
               </a:rPr>
               <a:t>コーディングエージェント入門</a:t>
             </a:r>
@@ -18347,9 +18246,9 @@
                 <a:solidFill>
                   <a:srgbClr val="30363D"/>
                 </a:solidFill>
-                <a:latin typeface="Hiragino Sans" pitchFamily="34" charset="0"/>
-                <a:ea typeface="Hiragino Sans" pitchFamily="34" charset="-122"/>
-                <a:cs typeface="Hiragino Sans" pitchFamily="34" charset="-120"/>
+                <a:latin typeface="Yu Gothic" pitchFamily="34" charset="0"/>
+                <a:ea typeface="Yu Gothic" pitchFamily="34" charset="-122"/>
+                <a:cs typeface="Yu Gothic" pitchFamily="34" charset="-120"/>
               </a:rPr>
               <a:t>  ·  OpenCode × OpenRouter</a:t>
             </a:r>
@@ -18386,9 +18285,9 @@
                 <a:solidFill>
                   <a:srgbClr val="8B949E"/>
                 </a:solidFill>
-                <a:latin typeface="Menlo" pitchFamily="34" charset="0"/>
-                <a:ea typeface="Menlo" pitchFamily="34" charset="-122"/>
-                <a:cs typeface="Menlo" pitchFamily="34" charset="-120"/>
+                <a:latin typeface="Consolas" pitchFamily="34" charset="0"/>
+                <a:ea typeface="Consolas" pitchFamily="34" charset="-122"/>
+                <a:cs typeface="Consolas" pitchFamily="34" charset="-120"/>
               </a:rPr>
               <a:t>24 / 26</a:t>
             </a:r>
@@ -18457,9 +18356,9 @@
                 <a:solidFill>
                   <a:srgbClr val="3FB950"/>
                 </a:solidFill>
-                <a:latin typeface="Menlo" pitchFamily="34" charset="0"/>
-                <a:ea typeface="Menlo" pitchFamily="34" charset="-122"/>
-                <a:cs typeface="Menlo" pitchFamily="34" charset="-120"/>
+                <a:latin typeface="Consolas" pitchFamily="34" charset="0"/>
+                <a:ea typeface="Consolas" pitchFamily="34" charset="-122"/>
+                <a:cs typeface="Consolas" pitchFamily="34" charset="-120"/>
               </a:rPr>
               <a:t>WRAP UP</a:t>
             </a:r>
@@ -18496,9 +18395,9 @@
                 <a:solidFill>
                   <a:srgbClr val="3FB950"/>
                 </a:solidFill>
-                <a:latin typeface="Menlo" pitchFamily="34" charset="0"/>
-                <a:ea typeface="Menlo" pitchFamily="34" charset="-122"/>
-                <a:cs typeface="Menlo" pitchFamily="34" charset="-120"/>
+                <a:latin typeface="Consolas" pitchFamily="34" charset="0"/>
+                <a:ea typeface="Consolas" pitchFamily="34" charset="-122"/>
+                <a:cs typeface="Consolas" pitchFamily="34" charset="-120"/>
               </a:rPr>
               <a:t>&gt;</a:t>
             </a:r>
@@ -18535,9 +18434,9 @@
                 <a:solidFill>
                   <a:srgbClr val="E6EDF3"/>
                 </a:solidFill>
-                <a:latin typeface="Hiragino Sans" pitchFamily="34" charset="0"/>
-                <a:ea typeface="Hiragino Sans" pitchFamily="34" charset="-122"/>
-                <a:cs typeface="Hiragino Sans" pitchFamily="34" charset="-120"/>
+                <a:latin typeface="Yu Gothic" pitchFamily="34" charset="0"/>
+                <a:ea typeface="Yu Gothic" pitchFamily="34" charset="-122"/>
+                <a:cs typeface="Yu Gothic" pitchFamily="34" charset="-120"/>
               </a:rPr>
               <a:t>参考リンク</a:t>
             </a:r>
@@ -18628,9 +18527,9 @@
                 <a:solidFill>
                   <a:srgbClr val="E6EDF3"/>
                 </a:solidFill>
-                <a:latin typeface="Hiragino Sans" pitchFamily="34" charset="0"/>
-                <a:ea typeface="Hiragino Sans" pitchFamily="34" charset="-122"/>
-                <a:cs typeface="Hiragino Sans" pitchFamily="34" charset="-120"/>
+                <a:latin typeface="Yu Gothic" pitchFamily="34" charset="0"/>
+                <a:ea typeface="Yu Gothic" pitchFamily="34" charset="-122"/>
+                <a:cs typeface="Yu Gothic" pitchFamily="34" charset="-120"/>
               </a:rPr>
               <a:t>OpenCode（今日のツール）</a:t>
             </a:r>
@@ -18667,9 +18566,9 @@
                 <a:solidFill>
                   <a:srgbClr val="3FB950"/>
                 </a:solidFill>
-                <a:latin typeface="Menlo" pitchFamily="34" charset="0"/>
-                <a:ea typeface="Menlo" pitchFamily="34" charset="-122"/>
-                <a:cs typeface="Menlo" pitchFamily="34" charset="-120"/>
+                <a:latin typeface="Consolas" pitchFamily="34" charset="0"/>
+                <a:ea typeface="Consolas" pitchFamily="34" charset="-122"/>
+                <a:cs typeface="Consolas" pitchFamily="34" charset="-120"/>
               </a:rPr>
               <a:t>opencode.ai/docs</a:t>
             </a:r>
@@ -18760,9 +18659,9 @@
                 <a:solidFill>
                   <a:srgbClr val="E6EDF3"/>
                 </a:solidFill>
-                <a:latin typeface="Hiragino Sans" pitchFamily="34" charset="0"/>
-                <a:ea typeface="Hiragino Sans" pitchFamily="34" charset="-122"/>
-                <a:cs typeface="Hiragino Sans" pitchFamily="34" charset="-120"/>
+                <a:latin typeface="Yu Gothic" pitchFamily="34" charset="0"/>
+                <a:ea typeface="Yu Gothic" pitchFamily="34" charset="-122"/>
+                <a:cs typeface="Yu Gothic" pitchFamily="34" charset="-120"/>
               </a:rPr>
               <a:t>OpenRouter API キー</a:t>
             </a:r>
@@ -18799,9 +18698,9 @@
                 <a:solidFill>
                   <a:srgbClr val="58A6FF"/>
                 </a:solidFill>
-                <a:latin typeface="Menlo" pitchFamily="34" charset="0"/>
-                <a:ea typeface="Menlo" pitchFamily="34" charset="-122"/>
-                <a:cs typeface="Menlo" pitchFamily="34" charset="-120"/>
+                <a:latin typeface="Consolas" pitchFamily="34" charset="0"/>
+                <a:ea typeface="Consolas" pitchFamily="34" charset="-122"/>
+                <a:cs typeface="Consolas" pitchFamily="34" charset="-120"/>
               </a:rPr>
               <a:t>openrouter.ai/keys</a:t>
             </a:r>
@@ -18892,9 +18791,9 @@
                 <a:solidFill>
                   <a:srgbClr val="E6EDF3"/>
                 </a:solidFill>
-                <a:latin typeface="Hiragino Sans" pitchFamily="34" charset="0"/>
-                <a:ea typeface="Hiragino Sans" pitchFamily="34" charset="-122"/>
-                <a:cs typeface="Hiragino Sans" pitchFamily="34" charset="-120"/>
+                <a:latin typeface="Yu Gothic" pitchFamily="34" charset="0"/>
+                <a:ea typeface="Yu Gothic" pitchFamily="34" charset="-122"/>
+                <a:cs typeface="Yu Gothic" pitchFamily="34" charset="-120"/>
               </a:rPr>
               <a:t>Claude Code</a:t>
             </a:r>
@@ -18931,9 +18830,9 @@
                 <a:solidFill>
                   <a:srgbClr val="F0883E"/>
                 </a:solidFill>
-                <a:latin typeface="Menlo" pitchFamily="34" charset="0"/>
-                <a:ea typeface="Menlo" pitchFamily="34" charset="-122"/>
-                <a:cs typeface="Menlo" pitchFamily="34" charset="-120"/>
+                <a:latin typeface="Consolas" pitchFamily="34" charset="0"/>
+                <a:ea typeface="Consolas" pitchFamily="34" charset="-122"/>
+                <a:cs typeface="Consolas" pitchFamily="34" charset="-120"/>
               </a:rPr>
               <a:t>claude.com/claude-code</a:t>
             </a:r>
@@ -19024,9 +18923,9 @@
                 <a:solidFill>
                   <a:srgbClr val="E6EDF3"/>
                 </a:solidFill>
-                <a:latin typeface="Hiragino Sans" pitchFamily="34" charset="0"/>
-                <a:ea typeface="Hiragino Sans" pitchFamily="34" charset="-122"/>
-                <a:cs typeface="Hiragino Sans" pitchFamily="34" charset="-120"/>
+                <a:latin typeface="Yu Gothic" pitchFamily="34" charset="0"/>
+                <a:ea typeface="Yu Gothic" pitchFamily="34" charset="-122"/>
+                <a:cs typeface="Yu Gothic" pitchFamily="34" charset="-120"/>
               </a:rPr>
               <a:t>Codex CLI</a:t>
             </a:r>
@@ -19063,9 +18962,9 @@
                 <a:solidFill>
                   <a:srgbClr val="BC8CFF"/>
                 </a:solidFill>
-                <a:latin typeface="Menlo" pitchFamily="34" charset="0"/>
-                <a:ea typeface="Menlo" pitchFamily="34" charset="-122"/>
-                <a:cs typeface="Menlo" pitchFamily="34" charset="-120"/>
+                <a:latin typeface="Consolas" pitchFamily="34" charset="0"/>
+                <a:ea typeface="Consolas" pitchFamily="34" charset="-122"/>
+                <a:cs typeface="Consolas" pitchFamily="34" charset="-120"/>
               </a:rPr>
               <a:t>github.com/openai/codex</a:t>
             </a:r>
@@ -19102,9 +19001,9 @@
                 <a:solidFill>
                   <a:srgbClr val="8B949E"/>
                 </a:solidFill>
-                <a:latin typeface="Hiragino Sans" pitchFamily="34" charset="0"/>
-                <a:ea typeface="Hiragino Sans" pitchFamily="34" charset="-122"/>
-                <a:cs typeface="Hiragino Sans" pitchFamily="34" charset="-120"/>
+                <a:latin typeface="Yu Gothic" pitchFamily="34" charset="0"/>
+                <a:ea typeface="Yu Gothic" pitchFamily="34" charset="-122"/>
+                <a:cs typeface="Yu Gothic" pitchFamily="34" charset="-120"/>
               </a:rPr>
               <a:t>コーディングエージェント入門</a:t>
             </a:r>
@@ -19116,9 +19015,9 @@
                 <a:solidFill>
                   <a:srgbClr val="30363D"/>
                 </a:solidFill>
-                <a:latin typeface="Hiragino Sans" pitchFamily="34" charset="0"/>
-                <a:ea typeface="Hiragino Sans" pitchFamily="34" charset="-122"/>
-                <a:cs typeface="Hiragino Sans" pitchFamily="34" charset="-120"/>
+                <a:latin typeface="Yu Gothic" pitchFamily="34" charset="0"/>
+                <a:ea typeface="Yu Gothic" pitchFamily="34" charset="-122"/>
+                <a:cs typeface="Yu Gothic" pitchFamily="34" charset="-120"/>
               </a:rPr>
               <a:t>  ·  OpenCode × OpenRouter</a:t>
             </a:r>
@@ -19155,9 +19054,9 @@
                 <a:solidFill>
                   <a:srgbClr val="8B949E"/>
                 </a:solidFill>
-                <a:latin typeface="Menlo" pitchFamily="34" charset="0"/>
-                <a:ea typeface="Menlo" pitchFamily="34" charset="-122"/>
-                <a:cs typeface="Menlo" pitchFamily="34" charset="-120"/>
+                <a:latin typeface="Consolas" pitchFamily="34" charset="0"/>
+                <a:ea typeface="Consolas" pitchFamily="34" charset="-122"/>
+                <a:cs typeface="Consolas" pitchFamily="34" charset="-120"/>
               </a:rPr>
               <a:t>25 / 26</a:t>
             </a:r>
@@ -19226,9 +19125,9 @@
                 <a:solidFill>
                   <a:srgbClr val="21262D"/>
                 </a:solidFill>
-                <a:latin typeface="Menlo" pitchFamily="34" charset="0"/>
-                <a:ea typeface="Menlo" pitchFamily="34" charset="-122"/>
-                <a:cs typeface="Menlo" pitchFamily="34" charset="-120"/>
+                <a:latin typeface="Consolas" pitchFamily="34" charset="0"/>
+                <a:ea typeface="Consolas" pitchFamily="34" charset="-122"/>
+                <a:cs typeface="Consolas" pitchFamily="34" charset="-120"/>
               </a:rPr>
               <a:t>$ _</a:t>
             </a:r>
@@ -19265,9 +19164,9 @@
                 <a:solidFill>
                   <a:srgbClr val="3FB950"/>
                 </a:solidFill>
-                <a:latin typeface="Menlo" pitchFamily="34" charset="0"/>
-                <a:ea typeface="Menlo" pitchFamily="34" charset="-122"/>
-                <a:cs typeface="Menlo" pitchFamily="34" charset="-120"/>
+                <a:latin typeface="Consolas" pitchFamily="34" charset="0"/>
+                <a:ea typeface="Consolas" pitchFamily="34" charset="-122"/>
+                <a:cs typeface="Consolas" pitchFamily="34" charset="-120"/>
               </a:rPr>
               <a:t>THANK YOU</a:t>
             </a:r>
@@ -19304,9 +19203,9 @@
                 <a:solidFill>
                   <a:srgbClr val="E6EDF3"/>
                 </a:solidFill>
-                <a:latin typeface="Hiragino Sans" pitchFamily="34" charset="0"/>
-                <a:ea typeface="Hiragino Sans" pitchFamily="34" charset="-122"/>
-                <a:cs typeface="Hiragino Sans" pitchFamily="34" charset="-120"/>
+                <a:latin typeface="Yu Gothic" pitchFamily="34" charset="0"/>
+                <a:ea typeface="Yu Gothic" pitchFamily="34" charset="-122"/>
+                <a:cs typeface="Yu Gothic" pitchFamily="34" charset="-120"/>
               </a:rPr>
               <a:t>おつかれさまでした</a:t>
             </a:r>
@@ -19343,9 +19242,9 @@
                 <a:solidFill>
                   <a:srgbClr val="C9D1D9"/>
                 </a:solidFill>
-                <a:latin typeface="Hiragino Sans" pitchFamily="34" charset="0"/>
-                <a:ea typeface="Hiragino Sans" pitchFamily="34" charset="-122"/>
-                <a:cs typeface="Hiragino Sans" pitchFamily="34" charset="-120"/>
+                <a:latin typeface="Yu Gothic" pitchFamily="34" charset="0"/>
+                <a:ea typeface="Yu Gothic" pitchFamily="34" charset="-122"/>
+                <a:cs typeface="Yu Gothic" pitchFamily="34" charset="-120"/>
               </a:rPr>
               <a:t>今日の続きは、あなたのPCの中で。</a:t>
             </a:r>
@@ -19496,9 +19395,9 @@
                 <a:solidFill>
                   <a:srgbClr val="8B949E"/>
                 </a:solidFill>
-                <a:latin typeface="Menlo" pitchFamily="34" charset="0"/>
-                <a:ea typeface="Menlo" pitchFamily="34" charset="-122"/>
-                <a:cs typeface="Menlo" pitchFamily="34" charset="-120"/>
+                <a:latin typeface="Consolas" pitchFamily="34" charset="0"/>
+                <a:ea typeface="Consolas" pitchFamily="34" charset="-122"/>
+                <a:cs typeface="Consolas" pitchFamily="34" charset="-120"/>
               </a:rPr>
               <a:t>Happy hacking</a:t>
             </a:r>
@@ -19538,9 +19437,9 @@
                 <a:solidFill>
                   <a:srgbClr val="3FB950"/>
                 </a:solidFill>
-                <a:latin typeface="Menlo" pitchFamily="34" charset="0"/>
-                <a:ea typeface="Menlo" pitchFamily="34" charset="-122"/>
-                <a:cs typeface="Menlo" pitchFamily="34" charset="-120"/>
+                <a:latin typeface="Consolas" pitchFamily="34" charset="0"/>
+                <a:ea typeface="Consolas" pitchFamily="34" charset="-122"/>
+                <a:cs typeface="Consolas" pitchFamily="34" charset="-120"/>
               </a:rPr>
               <a:t>$ opencode</a:t>
             </a:r>
@@ -19558,9 +19457,9 @@
                 <a:solidFill>
                   <a:srgbClr val="58A6FF"/>
                 </a:solidFill>
-                <a:latin typeface="Menlo" pitchFamily="34" charset="0"/>
-                <a:ea typeface="Menlo" pitchFamily="34" charset="-122"/>
-                <a:cs typeface="Menlo" pitchFamily="34" charset="-120"/>
+                <a:latin typeface="Consolas" pitchFamily="34" charset="0"/>
+                <a:ea typeface="Consolas" pitchFamily="34" charset="-122"/>
+                <a:cs typeface="Consolas" pitchFamily="34" charset="-120"/>
               </a:rPr>
               <a:t>&gt; 次は何を作ろうか？</a:t>
             </a:r>
@@ -19597,9 +19496,9 @@
                 <a:solidFill>
                   <a:srgbClr val="8B949E"/>
                 </a:solidFill>
-                <a:latin typeface="Hiragino Sans" pitchFamily="34" charset="0"/>
-                <a:ea typeface="Hiragino Sans" pitchFamily="34" charset="-122"/>
-                <a:cs typeface="Hiragino Sans" pitchFamily="34" charset="-120"/>
+                <a:latin typeface="Yu Gothic" pitchFamily="34" charset="0"/>
+                <a:ea typeface="Yu Gothic" pitchFamily="34" charset="-122"/>
+                <a:cs typeface="Yu Gothic" pitchFamily="34" charset="-120"/>
               </a:rPr>
               <a:t>コーディングエージェント入門  ·  OpenCode × OpenRouter</a:t>
             </a:r>
@@ -19636,9 +19535,9 @@
                 <a:solidFill>
                   <a:srgbClr val="8B949E"/>
                 </a:solidFill>
-                <a:latin typeface="Menlo" pitchFamily="34" charset="0"/>
-                <a:ea typeface="Menlo" pitchFamily="34" charset="-122"/>
-                <a:cs typeface="Menlo" pitchFamily="34" charset="-120"/>
+                <a:latin typeface="Consolas" pitchFamily="34" charset="0"/>
+                <a:ea typeface="Consolas" pitchFamily="34" charset="-122"/>
+                <a:cs typeface="Consolas" pitchFamily="34" charset="-120"/>
               </a:rPr>
               <a:t>26 / 26</a:t>
             </a:r>
@@ -19707,9 +19606,9 @@
                 <a:solidFill>
                   <a:srgbClr val="58A6FF"/>
                 </a:solidFill>
-                <a:latin typeface="Menlo" pitchFamily="34" charset="0"/>
-                <a:ea typeface="Menlo" pitchFamily="34" charset="-122"/>
-                <a:cs typeface="Menlo" pitchFamily="34" charset="-120"/>
+                <a:latin typeface="Consolas" pitchFamily="34" charset="0"/>
+                <a:ea typeface="Consolas" pitchFamily="34" charset="-122"/>
+                <a:cs typeface="Consolas" pitchFamily="34" charset="-120"/>
               </a:rPr>
               <a:t>INTRO</a:t>
             </a:r>
@@ -19746,9 +19645,9 @@
                 <a:solidFill>
                   <a:srgbClr val="58A6FF"/>
                 </a:solidFill>
-                <a:latin typeface="Menlo" pitchFamily="34" charset="0"/>
-                <a:ea typeface="Menlo" pitchFamily="34" charset="-122"/>
-                <a:cs typeface="Menlo" pitchFamily="34" charset="-120"/>
+                <a:latin typeface="Consolas" pitchFamily="34" charset="0"/>
+                <a:ea typeface="Consolas" pitchFamily="34" charset="-122"/>
+                <a:cs typeface="Consolas" pitchFamily="34" charset="-120"/>
               </a:rPr>
               <a:t>&gt;</a:t>
             </a:r>
@@ -19785,9 +19684,9 @@
                 <a:solidFill>
                   <a:srgbClr val="E6EDF3"/>
                 </a:solidFill>
-                <a:latin typeface="Hiragino Sans" pitchFamily="34" charset="0"/>
-                <a:ea typeface="Hiragino Sans" pitchFamily="34" charset="-122"/>
-                <a:cs typeface="Hiragino Sans" pitchFamily="34" charset="-120"/>
+                <a:latin typeface="Yu Gothic" pitchFamily="34" charset="0"/>
+                <a:ea typeface="Yu Gothic" pitchFamily="34" charset="-122"/>
+                <a:cs typeface="Yu Gothic" pitchFamily="34" charset="-120"/>
               </a:rPr>
               <a:t>今日の流れ</a:t>
             </a:r>
@@ -19878,9 +19777,9 @@
                 <a:solidFill>
                   <a:srgbClr val="0D1117"/>
                 </a:solidFill>
-                <a:latin typeface="Hiragino Sans" pitchFamily="34" charset="0"/>
-                <a:ea typeface="Hiragino Sans" pitchFamily="34" charset="-122"/>
-                <a:cs typeface="Hiragino Sans" pitchFamily="34" charset="-120"/>
+                <a:latin typeface="Yu Gothic" pitchFamily="34" charset="0"/>
+                <a:ea typeface="Yu Gothic" pitchFamily="34" charset="-122"/>
+                <a:cs typeface="Yu Gothic" pitchFamily="34" charset="-120"/>
               </a:rPr>
               <a:t>1</a:t>
             </a:r>
@@ -19917,9 +19816,9 @@
                 <a:solidFill>
                   <a:srgbClr val="E6EDF3"/>
                 </a:solidFill>
-                <a:latin typeface="Hiragino Sans" pitchFamily="34" charset="0"/>
-                <a:ea typeface="Hiragino Sans" pitchFamily="34" charset="-122"/>
-                <a:cs typeface="Hiragino Sans" pitchFamily="34" charset="-120"/>
+                <a:latin typeface="Yu Gothic" pitchFamily="34" charset="0"/>
+                <a:ea typeface="Yu Gothic" pitchFamily="34" charset="-122"/>
+                <a:cs typeface="Yu Gothic" pitchFamily="34" charset="-120"/>
               </a:rPr>
               <a:t>知る：エージェントって何？</a:t>
             </a:r>
@@ -19956,9 +19855,9 @@
                 <a:solidFill>
                   <a:srgbClr val="8B949E"/>
                 </a:solidFill>
-                <a:latin typeface="Hiragino Sans" pitchFamily="34" charset="0"/>
-                <a:ea typeface="Hiragino Sans" pitchFamily="34" charset="-122"/>
-                <a:cs typeface="Hiragino Sans" pitchFamily="34" charset="-120"/>
+                <a:latin typeface="Yu Gothic" pitchFamily="34" charset="0"/>
+                <a:ea typeface="Yu Gothic" pitchFamily="34" charset="-122"/>
+                <a:cs typeface="Yu Gothic" pitchFamily="34" charset="-120"/>
               </a:rPr>
               <a:t>座学でイメージをつかむ</a:t>
             </a:r>
@@ -19995,9 +19894,9 @@
                 <a:solidFill>
                   <a:srgbClr val="58A6FF"/>
                 </a:solidFill>
-                <a:latin typeface="Menlo" pitchFamily="34" charset="0"/>
-                <a:ea typeface="Menlo" pitchFamily="34" charset="-122"/>
-                <a:cs typeface="Menlo" pitchFamily="34" charset="-120"/>
+                <a:latin typeface="Consolas" pitchFamily="34" charset="0"/>
+                <a:ea typeface="Consolas" pitchFamily="34" charset="-122"/>
+                <a:cs typeface="Consolas" pitchFamily="34" charset="-120"/>
               </a:rPr>
               <a:t>〜15分</a:t>
             </a:r>
@@ -20088,9 +19987,9 @@
                 <a:solidFill>
                   <a:srgbClr val="0D1117"/>
                 </a:solidFill>
-                <a:latin typeface="Hiragino Sans" pitchFamily="34" charset="0"/>
-                <a:ea typeface="Hiragino Sans" pitchFamily="34" charset="-122"/>
-                <a:cs typeface="Hiragino Sans" pitchFamily="34" charset="-120"/>
+                <a:latin typeface="Yu Gothic" pitchFamily="34" charset="0"/>
+                <a:ea typeface="Yu Gothic" pitchFamily="34" charset="-122"/>
+                <a:cs typeface="Yu Gothic" pitchFamily="34" charset="-120"/>
               </a:rPr>
               <a:t>2</a:t>
             </a:r>
@@ -20127,9 +20026,9 @@
                 <a:solidFill>
                   <a:srgbClr val="E6EDF3"/>
                 </a:solidFill>
-                <a:latin typeface="Hiragino Sans" pitchFamily="34" charset="0"/>
-                <a:ea typeface="Hiragino Sans" pitchFamily="34" charset="-122"/>
-                <a:cs typeface="Hiragino Sans" pitchFamily="34" charset="-120"/>
+                <a:latin typeface="Yu Gothic" pitchFamily="34" charset="0"/>
+                <a:ea typeface="Yu Gothic" pitchFamily="34" charset="-122"/>
+                <a:cs typeface="Yu Gothic" pitchFamily="34" charset="-120"/>
               </a:rPr>
               <a:t>準備：エージェントを入れる</a:t>
             </a:r>
@@ -20166,9 +20065,9 @@
                 <a:solidFill>
                   <a:srgbClr val="8B949E"/>
                 </a:solidFill>
-                <a:latin typeface="Hiragino Sans" pitchFamily="34" charset="0"/>
-                <a:ea typeface="Hiragino Sans" pitchFamily="34" charset="-122"/>
-                <a:cs typeface="Hiragino Sans" pitchFamily="34" charset="-120"/>
+                <a:latin typeface="Yu Gothic" pitchFamily="34" charset="0"/>
+                <a:ea typeface="Yu Gothic" pitchFamily="34" charset="-122"/>
+                <a:cs typeface="Yu Gothic" pitchFamily="34" charset="-120"/>
               </a:rPr>
               <a:t>OpenCode をインストール</a:t>
             </a:r>
@@ -20205,9 +20104,9 @@
                 <a:solidFill>
                   <a:srgbClr val="BC8CFF"/>
                 </a:solidFill>
-                <a:latin typeface="Menlo" pitchFamily="34" charset="0"/>
-                <a:ea typeface="Menlo" pitchFamily="34" charset="-122"/>
-                <a:cs typeface="Menlo" pitchFamily="34" charset="-120"/>
+                <a:latin typeface="Consolas" pitchFamily="34" charset="0"/>
+                <a:ea typeface="Consolas" pitchFamily="34" charset="-122"/>
+                <a:cs typeface="Consolas" pitchFamily="34" charset="-120"/>
               </a:rPr>
               <a:t>〜15分</a:t>
             </a:r>
@@ -20298,9 +20197,9 @@
                 <a:solidFill>
                   <a:srgbClr val="0D1117"/>
                 </a:solidFill>
-                <a:latin typeface="Hiragino Sans" pitchFamily="34" charset="0"/>
-                <a:ea typeface="Hiragino Sans" pitchFamily="34" charset="-122"/>
-                <a:cs typeface="Hiragino Sans" pitchFamily="34" charset="-120"/>
+                <a:latin typeface="Yu Gothic" pitchFamily="34" charset="0"/>
+                <a:ea typeface="Yu Gothic" pitchFamily="34" charset="-122"/>
+                <a:cs typeface="Yu Gothic" pitchFamily="34" charset="-120"/>
               </a:rPr>
               <a:t>3</a:t>
             </a:r>
@@ -20337,9 +20236,9 @@
                 <a:solidFill>
                   <a:srgbClr val="E6EDF3"/>
                 </a:solidFill>
-                <a:latin typeface="Hiragino Sans" pitchFamily="34" charset="0"/>
-                <a:ea typeface="Hiragino Sans" pitchFamily="34" charset="-122"/>
-                <a:cs typeface="Hiragino Sans" pitchFamily="34" charset="-120"/>
+                <a:latin typeface="Yu Gothic" pitchFamily="34" charset="0"/>
+                <a:ea typeface="Yu Gothic" pitchFamily="34" charset="-122"/>
+                <a:cs typeface="Yu Gothic" pitchFamily="34" charset="-120"/>
               </a:rPr>
               <a:t>つなぐ：AIモデルに接続</a:t>
             </a:r>
@@ -20376,9 +20275,9 @@
                 <a:solidFill>
                   <a:srgbClr val="8B949E"/>
                 </a:solidFill>
-                <a:latin typeface="Hiragino Sans" pitchFamily="34" charset="0"/>
-                <a:ea typeface="Hiragino Sans" pitchFamily="34" charset="-122"/>
-                <a:cs typeface="Hiragino Sans" pitchFamily="34" charset="-120"/>
+                <a:latin typeface="Yu Gothic" pitchFamily="34" charset="0"/>
+                <a:ea typeface="Yu Gothic" pitchFamily="34" charset="-122"/>
+                <a:cs typeface="Yu Gothic" pitchFamily="34" charset="-120"/>
               </a:rPr>
               <a:t>APIキーを作って /connect</a:t>
             </a:r>
@@ -20415,9 +20314,9 @@
                 <a:solidFill>
                   <a:srgbClr val="3FB950"/>
                 </a:solidFill>
-                <a:latin typeface="Menlo" pitchFamily="34" charset="0"/>
-                <a:ea typeface="Menlo" pitchFamily="34" charset="-122"/>
-                <a:cs typeface="Menlo" pitchFamily="34" charset="-120"/>
+                <a:latin typeface="Consolas" pitchFamily="34" charset="0"/>
+                <a:ea typeface="Consolas" pitchFamily="34" charset="-122"/>
+                <a:cs typeface="Consolas" pitchFamily="34" charset="-120"/>
               </a:rPr>
               <a:t>〜10分</a:t>
             </a:r>
@@ -20508,9 +20407,9 @@
                 <a:solidFill>
                   <a:srgbClr val="0D1117"/>
                 </a:solidFill>
-                <a:latin typeface="Hiragino Sans" pitchFamily="34" charset="0"/>
-                <a:ea typeface="Hiragino Sans" pitchFamily="34" charset="-122"/>
-                <a:cs typeface="Hiragino Sans" pitchFamily="34" charset="-120"/>
+                <a:latin typeface="Yu Gothic" pitchFamily="34" charset="0"/>
+                <a:ea typeface="Yu Gothic" pitchFamily="34" charset="-122"/>
+                <a:cs typeface="Yu Gothic" pitchFamily="34" charset="-120"/>
               </a:rPr>
               <a:t>4</a:t>
             </a:r>
@@ -20547,9 +20446,9 @@
                 <a:solidFill>
                   <a:srgbClr val="E6EDF3"/>
                 </a:solidFill>
-                <a:latin typeface="Hiragino Sans" pitchFamily="34" charset="0"/>
-                <a:ea typeface="Hiragino Sans" pitchFamily="34" charset="-122"/>
-                <a:cs typeface="Hiragino Sans" pitchFamily="34" charset="-120"/>
+                <a:latin typeface="Yu Gothic" pitchFamily="34" charset="0"/>
+                <a:ea typeface="Yu Gothic" pitchFamily="34" charset="-122"/>
+                <a:cs typeface="Yu Gothic" pitchFamily="34" charset="-120"/>
               </a:rPr>
               <a:t>作る：ToDoアプリを生成</a:t>
             </a:r>
@@ -20586,9 +20485,9 @@
                 <a:solidFill>
                   <a:srgbClr val="8B949E"/>
                 </a:solidFill>
-                <a:latin typeface="Hiragino Sans" pitchFamily="34" charset="0"/>
-                <a:ea typeface="Hiragino Sans" pitchFamily="34" charset="-122"/>
-                <a:cs typeface="Hiragino Sans" pitchFamily="34" charset="-120"/>
+                <a:latin typeface="Yu Gothic" pitchFamily="34" charset="0"/>
+                <a:ea typeface="Yu Gothic" pitchFamily="34" charset="-122"/>
+                <a:cs typeface="Yu Gothic" pitchFamily="34" charset="-120"/>
               </a:rPr>
               <a:t>複数ファイルに分けて作らせる</a:t>
             </a:r>
@@ -20625,9 +20524,9 @@
                 <a:solidFill>
                   <a:srgbClr val="F0883E"/>
                 </a:solidFill>
-                <a:latin typeface="Menlo" pitchFamily="34" charset="0"/>
-                <a:ea typeface="Menlo" pitchFamily="34" charset="-122"/>
-                <a:cs typeface="Menlo" pitchFamily="34" charset="-120"/>
+                <a:latin typeface="Consolas" pitchFamily="34" charset="0"/>
+                <a:ea typeface="Consolas" pitchFamily="34" charset="-122"/>
+                <a:cs typeface="Consolas" pitchFamily="34" charset="-120"/>
               </a:rPr>
               <a:t>〜20分</a:t>
             </a:r>
@@ -20664,9 +20563,9 @@
                 <a:solidFill>
                   <a:srgbClr val="8B949E"/>
                 </a:solidFill>
-                <a:latin typeface="Hiragino Sans" pitchFamily="34" charset="0"/>
-                <a:ea typeface="Hiragino Sans" pitchFamily="34" charset="-122"/>
-                <a:cs typeface="Hiragino Sans" pitchFamily="34" charset="-120"/>
+                <a:latin typeface="Yu Gothic" pitchFamily="34" charset="0"/>
+                <a:ea typeface="Yu Gothic" pitchFamily="34" charset="-122"/>
+                <a:cs typeface="Yu Gothic" pitchFamily="34" charset="-120"/>
               </a:rPr>
               <a:t>コーディングエージェント入門</a:t>
             </a:r>
@@ -20678,9 +20577,9 @@
                 <a:solidFill>
                   <a:srgbClr val="30363D"/>
                 </a:solidFill>
-                <a:latin typeface="Hiragino Sans" pitchFamily="34" charset="0"/>
-                <a:ea typeface="Hiragino Sans" pitchFamily="34" charset="-122"/>
-                <a:cs typeface="Hiragino Sans" pitchFamily="34" charset="-120"/>
+                <a:latin typeface="Yu Gothic" pitchFamily="34" charset="0"/>
+                <a:ea typeface="Yu Gothic" pitchFamily="34" charset="-122"/>
+                <a:cs typeface="Yu Gothic" pitchFamily="34" charset="-120"/>
               </a:rPr>
               <a:t>  ·  OpenCode × OpenRouter</a:t>
             </a:r>
@@ -20717,9 +20616,9 @@
                 <a:solidFill>
                   <a:srgbClr val="8B949E"/>
                 </a:solidFill>
-                <a:latin typeface="Menlo" pitchFamily="34" charset="0"/>
-                <a:ea typeface="Menlo" pitchFamily="34" charset="-122"/>
-                <a:cs typeface="Menlo" pitchFamily="34" charset="-120"/>
+                <a:latin typeface="Consolas" pitchFamily="34" charset="0"/>
+                <a:ea typeface="Consolas" pitchFamily="34" charset="-122"/>
+                <a:cs typeface="Consolas" pitchFamily="34" charset="-120"/>
               </a:rPr>
               <a:t>03 / 26</a:t>
             </a:r>
@@ -20788,9 +20687,9 @@
                 <a:solidFill>
                   <a:srgbClr val="58A6FF"/>
                 </a:solidFill>
-                <a:latin typeface="Menlo" pitchFamily="34" charset="0"/>
-                <a:ea typeface="Menlo" pitchFamily="34" charset="-122"/>
-                <a:cs typeface="Menlo" pitchFamily="34" charset="-120"/>
+                <a:latin typeface="Consolas" pitchFamily="34" charset="0"/>
+                <a:ea typeface="Consolas" pitchFamily="34" charset="-122"/>
+                <a:cs typeface="Consolas" pitchFamily="34" charset="-120"/>
               </a:rPr>
               <a:t>INTRO</a:t>
             </a:r>
@@ -20827,9 +20726,9 @@
                 <a:solidFill>
                   <a:srgbClr val="58A6FF"/>
                 </a:solidFill>
-                <a:latin typeface="Menlo" pitchFamily="34" charset="0"/>
-                <a:ea typeface="Menlo" pitchFamily="34" charset="-122"/>
-                <a:cs typeface="Menlo" pitchFamily="34" charset="-120"/>
+                <a:latin typeface="Consolas" pitchFamily="34" charset="0"/>
+                <a:ea typeface="Consolas" pitchFamily="34" charset="-122"/>
+                <a:cs typeface="Consolas" pitchFamily="34" charset="-120"/>
               </a:rPr>
               <a:t>&gt;</a:t>
             </a:r>
@@ -20866,9 +20765,9 @@
                 <a:solidFill>
                   <a:srgbClr val="E6EDF3"/>
                 </a:solidFill>
-                <a:latin typeface="Hiragino Sans" pitchFamily="34" charset="0"/>
-                <a:ea typeface="Hiragino Sans" pitchFamily="34" charset="-122"/>
-                <a:cs typeface="Hiragino Sans" pitchFamily="34" charset="-120"/>
+                <a:latin typeface="Yu Gothic" pitchFamily="34" charset="0"/>
+                <a:ea typeface="Yu Gothic" pitchFamily="34" charset="-122"/>
+                <a:cs typeface="Yu Gothic" pitchFamily="34" charset="-120"/>
               </a:rPr>
               <a:t>“コピペ”の、その先へ</a:t>
             </a:r>
@@ -20905,9 +20804,9 @@
                 <a:solidFill>
                   <a:srgbClr val="C9D1D9"/>
                 </a:solidFill>
-                <a:latin typeface="Hiragino Sans" pitchFamily="34" charset="0"/>
-                <a:ea typeface="Hiragino Sans" pitchFamily="34" charset="-122"/>
-                <a:cs typeface="Hiragino Sans" pitchFamily="34" charset="-120"/>
+                <a:latin typeface="Yu Gothic" pitchFamily="34" charset="0"/>
+                <a:ea typeface="Yu Gothic" pitchFamily="34" charset="-122"/>
+                <a:cs typeface="Yu Gothic" pitchFamily="34" charset="-120"/>
               </a:rPr>
               <a:t>ChatGPT や Claude に質問 → 返ってきた答えを</a:t>
             </a:r>
@@ -20919,9 +20818,9 @@
                 <a:solidFill>
                   <a:srgbClr val="58A6FF"/>
                 </a:solidFill>
-                <a:latin typeface="Hiragino Sans" pitchFamily="34" charset="0"/>
-                <a:ea typeface="Hiragino Sans" pitchFamily="34" charset="-122"/>
-                <a:cs typeface="Hiragino Sans" pitchFamily="34" charset="-120"/>
+                <a:latin typeface="Yu Gothic" pitchFamily="34" charset="0"/>
+                <a:ea typeface="Yu Gothic" pitchFamily="34" charset="-122"/>
+                <a:cs typeface="Yu Gothic" pitchFamily="34" charset="-120"/>
               </a:rPr>
               <a:t>自分でコピペ</a:t>
             </a:r>
@@ -20933,9 +20832,9 @@
                 <a:solidFill>
                   <a:srgbClr val="C9D1D9"/>
                 </a:solidFill>
-                <a:latin typeface="Hiragino Sans" pitchFamily="34" charset="0"/>
-                <a:ea typeface="Hiragino Sans" pitchFamily="34" charset="-122"/>
-                <a:cs typeface="Hiragino Sans" pitchFamily="34" charset="-120"/>
+                <a:latin typeface="Yu Gothic" pitchFamily="34" charset="0"/>
+                <a:ea typeface="Yu Gothic" pitchFamily="34" charset="-122"/>
+                <a:cs typeface="Yu Gothic" pitchFamily="34" charset="-120"/>
               </a:rPr>
               <a:t>。</a:t>
             </a:r>
@@ -21006,9 +20905,9 @@
                 <a:solidFill>
                   <a:srgbClr val="58A6FF"/>
                 </a:solidFill>
-                <a:latin typeface="Hiragino Sans" pitchFamily="34" charset="0"/>
-                <a:ea typeface="Hiragino Sans" pitchFamily="34" charset="-122"/>
-                <a:cs typeface="Hiragino Sans" pitchFamily="34" charset="-120"/>
+                <a:latin typeface="Yu Gothic" pitchFamily="34" charset="0"/>
+                <a:ea typeface="Yu Gothic" pitchFamily="34" charset="-122"/>
+                <a:cs typeface="Yu Gothic" pitchFamily="34" charset="-120"/>
               </a:rPr>
               <a:t>ふつうの AI チャット</a:t>
             </a:r>
@@ -21049,9 +20948,9 @@
                 <a:solidFill>
                   <a:srgbClr val="C9D1D9"/>
                 </a:solidFill>
-                <a:latin typeface="Hiragino Sans" pitchFamily="34" charset="0"/>
-                <a:ea typeface="Hiragino Sans" pitchFamily="34" charset="-122"/>
-                <a:cs typeface="Hiragino Sans" pitchFamily="34" charset="-120"/>
+                <a:latin typeface="Yu Gothic" pitchFamily="34" charset="0"/>
+                <a:ea typeface="Yu Gothic" pitchFamily="34" charset="-122"/>
+                <a:cs typeface="Yu Gothic" pitchFamily="34" charset="-120"/>
               </a:rPr>
               <a:t>質問すると文章を返してくれる</a:t>
             </a:r>
@@ -21070,9 +20969,9 @@
                 <a:solidFill>
                   <a:srgbClr val="C9D1D9"/>
                 </a:solidFill>
-                <a:latin typeface="Hiragino Sans" pitchFamily="34" charset="0"/>
-                <a:ea typeface="Hiragino Sans" pitchFamily="34" charset="-122"/>
-                <a:cs typeface="Hiragino Sans" pitchFamily="34" charset="-120"/>
+                <a:latin typeface="Yu Gothic" pitchFamily="34" charset="0"/>
+                <a:ea typeface="Yu Gothic" pitchFamily="34" charset="-122"/>
+                <a:cs typeface="Yu Gothic" pitchFamily="34" charset="-120"/>
               </a:rPr>
               <a:t>コードも“テキストとして”もらえる</a:t>
             </a:r>
@@ -21091,9 +20990,9 @@
                 <a:solidFill>
                   <a:srgbClr val="C9D1D9"/>
                 </a:solidFill>
-                <a:latin typeface="Hiragino Sans" pitchFamily="34" charset="0"/>
-                <a:ea typeface="Hiragino Sans" pitchFamily="34" charset="-122"/>
-                <a:cs typeface="Hiragino Sans" pitchFamily="34" charset="-120"/>
+                <a:latin typeface="Yu Gothic" pitchFamily="34" charset="0"/>
+                <a:ea typeface="Yu Gothic" pitchFamily="34" charset="-122"/>
+                <a:cs typeface="Yu Gothic" pitchFamily="34" charset="-120"/>
               </a:rPr>
               <a:t>でも…ファイルに保存するのは自分</a:t>
             </a:r>
@@ -21112,9 +21011,9 @@
                 <a:solidFill>
                   <a:srgbClr val="C9D1D9"/>
                 </a:solidFill>
-                <a:latin typeface="Hiragino Sans" pitchFamily="34" charset="0"/>
-                <a:ea typeface="Hiragino Sans" pitchFamily="34" charset="-122"/>
-                <a:cs typeface="Hiragino Sans" pitchFamily="34" charset="-120"/>
+                <a:latin typeface="Yu Gothic" pitchFamily="34" charset="0"/>
+                <a:ea typeface="Yu Gothic" pitchFamily="34" charset="-122"/>
+                <a:cs typeface="Yu Gothic" pitchFamily="34" charset="-120"/>
               </a:rPr>
               <a:t>実行・テスト・修正も全部自分</a:t>
             </a:r>
@@ -21151,9 +21050,9 @@
                 <a:solidFill>
                   <a:srgbClr val="8B949E"/>
                 </a:solidFill>
-                <a:latin typeface="Hiragino Sans" pitchFamily="34" charset="0"/>
-                <a:ea typeface="Hiragino Sans" pitchFamily="34" charset="-122"/>
-                <a:cs typeface="Hiragino Sans" pitchFamily="34" charset="-120"/>
+                <a:latin typeface="Yu Gothic" pitchFamily="34" charset="0"/>
+                <a:ea typeface="Yu Gothic" pitchFamily="34" charset="-122"/>
+                <a:cs typeface="Yu Gothic" pitchFamily="34" charset="-120"/>
               </a:rPr>
               <a:t>→</a:t>
             </a:r>
@@ -21244,9 +21143,9 @@
                 <a:solidFill>
                   <a:srgbClr val="3FB950"/>
                 </a:solidFill>
-                <a:latin typeface="Hiragino Sans" pitchFamily="34" charset="0"/>
-                <a:ea typeface="Hiragino Sans" pitchFamily="34" charset="-122"/>
-                <a:cs typeface="Hiragino Sans" pitchFamily="34" charset="-120"/>
+                <a:latin typeface="Yu Gothic" pitchFamily="34" charset="0"/>
+                <a:ea typeface="Yu Gothic" pitchFamily="34" charset="-122"/>
+                <a:cs typeface="Yu Gothic" pitchFamily="34" charset="-120"/>
               </a:rPr>
               <a:t>コーディングエージェント</a:t>
             </a:r>
@@ -21286,9 +21185,9 @@
                 <a:solidFill>
                   <a:srgbClr val="E6EDF3"/>
                 </a:solidFill>
-                <a:latin typeface="Hiragino Sans" pitchFamily="34" charset="0"/>
-                <a:ea typeface="Hiragino Sans" pitchFamily="34" charset="-122"/>
-                <a:cs typeface="Hiragino Sans" pitchFamily="34" charset="-120"/>
+                <a:latin typeface="Yu Gothic" pitchFamily="34" charset="0"/>
+                <a:ea typeface="Yu Gothic" pitchFamily="34" charset="-122"/>
+                <a:cs typeface="Yu Gothic" pitchFamily="34" charset="-120"/>
               </a:rPr>
               <a:t>コピペの“その先”を、AIが</a:t>
             </a:r>
@@ -21306,9 +21205,9 @@
                 <a:solidFill>
                   <a:srgbClr val="E6EDF3"/>
                 </a:solidFill>
-                <a:latin typeface="Hiragino Sans" pitchFamily="34" charset="0"/>
-                <a:ea typeface="Hiragino Sans" pitchFamily="34" charset="-122"/>
-                <a:cs typeface="Hiragino Sans" pitchFamily="34" charset="-120"/>
+                <a:latin typeface="Yu Gothic" pitchFamily="34" charset="0"/>
+                <a:ea typeface="Yu Gothic" pitchFamily="34" charset="-122"/>
+                <a:cs typeface="Yu Gothic" pitchFamily="34" charset="-120"/>
               </a:rPr>
               <a:t>あなたのPCの上で自分でやる。</a:t>
             </a:r>
@@ -21345,9 +21244,9 @@
                 <a:solidFill>
                   <a:srgbClr val="8B949E"/>
                 </a:solidFill>
-                <a:latin typeface="Hiragino Sans" pitchFamily="34" charset="0"/>
-                <a:ea typeface="Hiragino Sans" pitchFamily="34" charset="-122"/>
-                <a:cs typeface="Hiragino Sans" pitchFamily="34" charset="-120"/>
+                <a:latin typeface="Yu Gothic" pitchFamily="34" charset="0"/>
+                <a:ea typeface="Yu Gothic" pitchFamily="34" charset="-122"/>
+                <a:cs typeface="Yu Gothic" pitchFamily="34" charset="-120"/>
               </a:rPr>
               <a:t>コーディングエージェント入門</a:t>
             </a:r>
@@ -21359,9 +21258,9 @@
                 <a:solidFill>
                   <a:srgbClr val="30363D"/>
                 </a:solidFill>
-                <a:latin typeface="Hiragino Sans" pitchFamily="34" charset="0"/>
-                <a:ea typeface="Hiragino Sans" pitchFamily="34" charset="-122"/>
-                <a:cs typeface="Hiragino Sans" pitchFamily="34" charset="-120"/>
+                <a:latin typeface="Yu Gothic" pitchFamily="34" charset="0"/>
+                <a:ea typeface="Yu Gothic" pitchFamily="34" charset="-122"/>
+                <a:cs typeface="Yu Gothic" pitchFamily="34" charset="-120"/>
               </a:rPr>
               <a:t>  ·  OpenCode × OpenRouter</a:t>
             </a:r>
@@ -21398,9 +21297,9 @@
                 <a:solidFill>
                   <a:srgbClr val="8B949E"/>
                 </a:solidFill>
-                <a:latin typeface="Menlo" pitchFamily="34" charset="0"/>
-                <a:ea typeface="Menlo" pitchFamily="34" charset="-122"/>
-                <a:cs typeface="Menlo" pitchFamily="34" charset="-120"/>
+                <a:latin typeface="Consolas" pitchFamily="34" charset="0"/>
+                <a:ea typeface="Consolas" pitchFamily="34" charset="-122"/>
+                <a:cs typeface="Consolas" pitchFamily="34" charset="-120"/>
               </a:rPr>
               <a:t>04 / 26</a:t>
             </a:r>
@@ -21469,9 +21368,9 @@
                 <a:solidFill>
                   <a:srgbClr val="58A6FF"/>
                 </a:solidFill>
-                <a:latin typeface="Menlo" pitchFamily="34" charset="0"/>
-                <a:ea typeface="Menlo" pitchFamily="34" charset="-122"/>
-                <a:cs typeface="Menlo" pitchFamily="34" charset="-120"/>
+                <a:latin typeface="Consolas" pitchFamily="34" charset="0"/>
+                <a:ea typeface="Consolas" pitchFamily="34" charset="-122"/>
+                <a:cs typeface="Consolas" pitchFamily="34" charset="-120"/>
               </a:rPr>
               <a:t>INTRO</a:t>
             </a:r>
@@ -21508,9 +21407,9 @@
                 <a:solidFill>
                   <a:srgbClr val="58A6FF"/>
                 </a:solidFill>
-                <a:latin typeface="Menlo" pitchFamily="34" charset="0"/>
-                <a:ea typeface="Menlo" pitchFamily="34" charset="-122"/>
-                <a:cs typeface="Menlo" pitchFamily="34" charset="-120"/>
+                <a:latin typeface="Consolas" pitchFamily="34" charset="0"/>
+                <a:ea typeface="Consolas" pitchFamily="34" charset="-122"/>
+                <a:cs typeface="Consolas" pitchFamily="34" charset="-120"/>
               </a:rPr>
               <a:t>&gt;</a:t>
             </a:r>
@@ -21547,9 +21446,9 @@
                 <a:solidFill>
                   <a:srgbClr val="E6EDF3"/>
                 </a:solidFill>
-                <a:latin typeface="Hiragino Sans" pitchFamily="34" charset="0"/>
-                <a:ea typeface="Hiragino Sans" pitchFamily="34" charset="-122"/>
-                <a:cs typeface="Hiragino Sans" pitchFamily="34" charset="-120"/>
+                <a:latin typeface="Yu Gothic" pitchFamily="34" charset="0"/>
+                <a:ea typeface="Yu Gothic" pitchFamily="34" charset="-122"/>
+                <a:cs typeface="Yu Gothic" pitchFamily="34" charset="-120"/>
               </a:rPr>
               <a:t>コーディングエージェントとは？</a:t>
             </a:r>
@@ -21586,9 +21485,9 @@
                 <a:solidFill>
                   <a:srgbClr val="C9D1D9"/>
                 </a:solidFill>
-                <a:latin typeface="Hiragino Sans" pitchFamily="34" charset="0"/>
-                <a:ea typeface="Hiragino Sans" pitchFamily="34" charset="-122"/>
-                <a:cs typeface="Hiragino Sans" pitchFamily="34" charset="-120"/>
+                <a:latin typeface="Yu Gothic" pitchFamily="34" charset="0"/>
+                <a:ea typeface="Yu Gothic" pitchFamily="34" charset="-122"/>
+                <a:cs typeface="Yu Gothic" pitchFamily="34" charset="-120"/>
               </a:rPr>
               <a:t>ひとことで言うと —— あなたのPCを操作できるAI。</a:t>
             </a:r>
@@ -21679,9 +21578,9 @@
                 <a:solidFill>
                   <a:srgbClr val="0D1117"/>
                 </a:solidFill>
-                <a:latin typeface="Hiragino Sans" pitchFamily="34" charset="0"/>
-                <a:ea typeface="Hiragino Sans" pitchFamily="34" charset="-122"/>
-                <a:cs typeface="Hiragino Sans" pitchFamily="34" charset="-120"/>
+                <a:latin typeface="Yu Gothic" pitchFamily="34" charset="0"/>
+                <a:ea typeface="Yu Gothic" pitchFamily="34" charset="-122"/>
+                <a:cs typeface="Yu Gothic" pitchFamily="34" charset="-120"/>
               </a:rPr>
               <a:t>1</a:t>
             </a:r>
@@ -21718,9 +21617,9 @@
                 <a:solidFill>
                   <a:srgbClr val="E6EDF3"/>
                 </a:solidFill>
-                <a:latin typeface="Hiragino Sans" pitchFamily="34" charset="0"/>
-                <a:ea typeface="Hiragino Sans" pitchFamily="34" charset="-122"/>
-                <a:cs typeface="Hiragino Sans" pitchFamily="34" charset="-120"/>
+                <a:latin typeface="Yu Gothic" pitchFamily="34" charset="0"/>
+                <a:ea typeface="Yu Gothic" pitchFamily="34" charset="-122"/>
+                <a:cs typeface="Yu Gothic" pitchFamily="34" charset="-120"/>
               </a:rPr>
               <a:t>ファイルを読む</a:t>
             </a:r>
@@ -21760,9 +21659,9 @@
                 <a:solidFill>
                   <a:srgbClr val="8B949E"/>
                 </a:solidFill>
-                <a:latin typeface="Hiragino Sans" pitchFamily="34" charset="0"/>
-                <a:ea typeface="Hiragino Sans" pitchFamily="34" charset="-122"/>
-                <a:cs typeface="Hiragino Sans" pitchFamily="34" charset="-120"/>
+                <a:latin typeface="Yu Gothic" pitchFamily="34" charset="0"/>
+                <a:ea typeface="Yu Gothic" pitchFamily="34" charset="-122"/>
+                <a:cs typeface="Yu Gothic" pitchFamily="34" charset="-120"/>
               </a:rPr>
               <a:t>プロジェクト全体を把握</a:t>
             </a:r>
@@ -21853,9 +21752,9 @@
                 <a:solidFill>
                   <a:srgbClr val="0D1117"/>
                 </a:solidFill>
-                <a:latin typeface="Hiragino Sans" pitchFamily="34" charset="0"/>
-                <a:ea typeface="Hiragino Sans" pitchFamily="34" charset="-122"/>
-                <a:cs typeface="Hiragino Sans" pitchFamily="34" charset="-120"/>
+                <a:latin typeface="Yu Gothic" pitchFamily="34" charset="0"/>
+                <a:ea typeface="Yu Gothic" pitchFamily="34" charset="-122"/>
+                <a:cs typeface="Yu Gothic" pitchFamily="34" charset="-120"/>
               </a:rPr>
               <a:t>2</a:t>
             </a:r>
@@ -21892,9 +21791,9 @@
                 <a:solidFill>
                   <a:srgbClr val="E6EDF3"/>
                 </a:solidFill>
-                <a:latin typeface="Hiragino Sans" pitchFamily="34" charset="0"/>
-                <a:ea typeface="Hiragino Sans" pitchFamily="34" charset="-122"/>
-                <a:cs typeface="Hiragino Sans" pitchFamily="34" charset="-120"/>
+                <a:latin typeface="Yu Gothic" pitchFamily="34" charset="0"/>
+                <a:ea typeface="Yu Gothic" pitchFamily="34" charset="-122"/>
+                <a:cs typeface="Yu Gothic" pitchFamily="34" charset="-120"/>
               </a:rPr>
               <a:t>ファイルを書く・直す</a:t>
             </a:r>
@@ -21934,9 +21833,9 @@
                 <a:solidFill>
                   <a:srgbClr val="8B949E"/>
                 </a:solidFill>
-                <a:latin typeface="Hiragino Sans" pitchFamily="34" charset="0"/>
-                <a:ea typeface="Hiragino Sans" pitchFamily="34" charset="-122"/>
-                <a:cs typeface="Hiragino Sans" pitchFamily="34" charset="-120"/>
+                <a:latin typeface="Yu Gothic" pitchFamily="34" charset="0"/>
+                <a:ea typeface="Yu Gothic" pitchFamily="34" charset="-122"/>
+                <a:cs typeface="Yu Gothic" pitchFamily="34" charset="-120"/>
               </a:rPr>
               <a:t>コードを実際に保存</a:t>
             </a:r>
@@ -22027,9 +21926,9 @@
                 <a:solidFill>
                   <a:srgbClr val="0D1117"/>
                 </a:solidFill>
-                <a:latin typeface="Hiragino Sans" pitchFamily="34" charset="0"/>
-                <a:ea typeface="Hiragino Sans" pitchFamily="34" charset="-122"/>
-                <a:cs typeface="Hiragino Sans" pitchFamily="34" charset="-120"/>
+                <a:latin typeface="Yu Gothic" pitchFamily="34" charset="0"/>
+                <a:ea typeface="Yu Gothic" pitchFamily="34" charset="-122"/>
+                <a:cs typeface="Yu Gothic" pitchFamily="34" charset="-120"/>
               </a:rPr>
               <a:t>3</a:t>
             </a:r>
@@ -22066,9 +21965,9 @@
                 <a:solidFill>
                   <a:srgbClr val="E6EDF3"/>
                 </a:solidFill>
-                <a:latin typeface="Hiragino Sans" pitchFamily="34" charset="0"/>
-                <a:ea typeface="Hiragino Sans" pitchFamily="34" charset="-122"/>
-                <a:cs typeface="Hiragino Sans" pitchFamily="34" charset="-120"/>
+                <a:latin typeface="Yu Gothic" pitchFamily="34" charset="0"/>
+                <a:ea typeface="Yu Gothic" pitchFamily="34" charset="-122"/>
+                <a:cs typeface="Yu Gothic" pitchFamily="34" charset="-120"/>
               </a:rPr>
               <a:t>コマンドを実行</a:t>
             </a:r>
@@ -22108,9 +22007,9 @@
                 <a:solidFill>
                   <a:srgbClr val="8B949E"/>
                 </a:solidFill>
-                <a:latin typeface="Hiragino Sans" pitchFamily="34" charset="0"/>
-                <a:ea typeface="Hiragino Sans" pitchFamily="34" charset="-122"/>
-                <a:cs typeface="Hiragino Sans" pitchFamily="34" charset="-120"/>
+                <a:latin typeface="Yu Gothic" pitchFamily="34" charset="0"/>
+                <a:ea typeface="Yu Gothic" pitchFamily="34" charset="-122"/>
+                <a:cs typeface="Yu Gothic" pitchFamily="34" charset="-120"/>
               </a:rPr>
               <a:t>テスト・サーバー起動も</a:t>
             </a:r>
@@ -22201,9 +22100,9 @@
                 <a:solidFill>
                   <a:srgbClr val="0D1117"/>
                 </a:solidFill>
-                <a:latin typeface="Hiragino Sans" pitchFamily="34" charset="0"/>
-                <a:ea typeface="Hiragino Sans" pitchFamily="34" charset="-122"/>
-                <a:cs typeface="Hiragino Sans" pitchFamily="34" charset="-120"/>
+                <a:latin typeface="Yu Gothic" pitchFamily="34" charset="0"/>
+                <a:ea typeface="Yu Gothic" pitchFamily="34" charset="-122"/>
+                <a:cs typeface="Yu Gothic" pitchFamily="34" charset="-120"/>
               </a:rPr>
               <a:t>4</a:t>
             </a:r>
@@ -22240,9 +22139,9 @@
                 <a:solidFill>
                   <a:srgbClr val="E6EDF3"/>
                 </a:solidFill>
-                <a:latin typeface="Hiragino Sans" pitchFamily="34" charset="0"/>
-                <a:ea typeface="Hiragino Sans" pitchFamily="34" charset="-122"/>
-                <a:cs typeface="Hiragino Sans" pitchFamily="34" charset="-120"/>
+                <a:latin typeface="Yu Gothic" pitchFamily="34" charset="0"/>
+                <a:ea typeface="Yu Gothic" pitchFamily="34" charset="-122"/>
+                <a:cs typeface="Yu Gothic" pitchFamily="34" charset="-120"/>
               </a:rPr>
               <a:t>エラーを読んで直す</a:t>
             </a:r>
@@ -22282,9 +22181,9 @@
                 <a:solidFill>
                   <a:srgbClr val="8B949E"/>
                 </a:solidFill>
-                <a:latin typeface="Hiragino Sans" pitchFamily="34" charset="0"/>
-                <a:ea typeface="Hiragino Sans" pitchFamily="34" charset="-122"/>
-                <a:cs typeface="Hiragino Sans" pitchFamily="34" charset="-120"/>
+                <a:latin typeface="Yu Gothic" pitchFamily="34" charset="0"/>
+                <a:ea typeface="Yu Gothic" pitchFamily="34" charset="-122"/>
+                <a:cs typeface="Yu Gothic" pitchFamily="34" charset="-120"/>
               </a:rPr>
               <a:t>結果を見て自分で修正</a:t>
             </a:r>
@@ -22321,9 +22220,9 @@
                 <a:solidFill>
                   <a:srgbClr val="8B949E"/>
                 </a:solidFill>
-                <a:latin typeface="Hiragino Sans" pitchFamily="34" charset="0"/>
-                <a:ea typeface="Hiragino Sans" pitchFamily="34" charset="-122"/>
-                <a:cs typeface="Hiragino Sans" pitchFamily="34" charset="-120"/>
+                <a:latin typeface="Yu Gothic" pitchFamily="34" charset="0"/>
+                <a:ea typeface="Yu Gothic" pitchFamily="34" charset="-122"/>
+                <a:cs typeface="Yu Gothic" pitchFamily="34" charset="-120"/>
               </a:rPr>
               <a:t>Webチャットとの一番の違いは </a:t>
             </a:r>
@@ -22335,9 +22234,9 @@
                 <a:solidFill>
                   <a:srgbClr val="E6EDF3"/>
                 </a:solidFill>
-                <a:latin typeface="Hiragino Sans" pitchFamily="34" charset="0"/>
-                <a:ea typeface="Hiragino Sans" pitchFamily="34" charset="-122"/>
-                <a:cs typeface="Hiragino Sans" pitchFamily="34" charset="-120"/>
+                <a:latin typeface="Yu Gothic" pitchFamily="34" charset="0"/>
+                <a:ea typeface="Yu Gothic" pitchFamily="34" charset="-122"/>
+                <a:cs typeface="Yu Gothic" pitchFamily="34" charset="-120"/>
               </a:rPr>
               <a:t>“手元のPCを直接動かせる”</a:t>
             </a:r>
@@ -22349,9 +22248,9 @@
                 <a:solidFill>
                   <a:srgbClr val="8B949E"/>
                 </a:solidFill>
-                <a:latin typeface="Hiragino Sans" pitchFamily="34" charset="0"/>
-                <a:ea typeface="Hiragino Sans" pitchFamily="34" charset="-122"/>
-                <a:cs typeface="Hiragino Sans" pitchFamily="34" charset="-120"/>
+                <a:latin typeface="Yu Gothic" pitchFamily="34" charset="0"/>
+                <a:ea typeface="Yu Gothic" pitchFamily="34" charset="-122"/>
+                <a:cs typeface="Yu Gothic" pitchFamily="34" charset="-120"/>
               </a:rPr>
               <a:t> こと。だから実際にファイルができて、その場で動かせる。</a:t>
             </a:r>
@@ -22388,9 +22287,9 @@
                 <a:solidFill>
                   <a:srgbClr val="8B949E"/>
                 </a:solidFill>
-                <a:latin typeface="Hiragino Sans" pitchFamily="34" charset="0"/>
-                <a:ea typeface="Hiragino Sans" pitchFamily="34" charset="-122"/>
-                <a:cs typeface="Hiragino Sans" pitchFamily="34" charset="-120"/>
+                <a:latin typeface="Yu Gothic" pitchFamily="34" charset="0"/>
+                <a:ea typeface="Yu Gothic" pitchFamily="34" charset="-122"/>
+                <a:cs typeface="Yu Gothic" pitchFamily="34" charset="-120"/>
               </a:rPr>
               <a:t>コーディングエージェント入門</a:t>
             </a:r>
@@ -22402,9 +22301,9 @@
                 <a:solidFill>
                   <a:srgbClr val="30363D"/>
                 </a:solidFill>
-                <a:latin typeface="Hiragino Sans" pitchFamily="34" charset="0"/>
-                <a:ea typeface="Hiragino Sans" pitchFamily="34" charset="-122"/>
-                <a:cs typeface="Hiragino Sans" pitchFamily="34" charset="-120"/>
+                <a:latin typeface="Yu Gothic" pitchFamily="34" charset="0"/>
+                <a:ea typeface="Yu Gothic" pitchFamily="34" charset="-122"/>
+                <a:cs typeface="Yu Gothic" pitchFamily="34" charset="-120"/>
               </a:rPr>
               <a:t>  ·  OpenCode × OpenRouter</a:t>
             </a:r>
@@ -22441,9 +22340,9 @@
                 <a:solidFill>
                   <a:srgbClr val="8B949E"/>
                 </a:solidFill>
-                <a:latin typeface="Menlo" pitchFamily="34" charset="0"/>
-                <a:ea typeface="Menlo" pitchFamily="34" charset="-122"/>
-                <a:cs typeface="Menlo" pitchFamily="34" charset="-120"/>
+                <a:latin typeface="Consolas" pitchFamily="34" charset="0"/>
+                <a:ea typeface="Consolas" pitchFamily="34" charset="-122"/>
+                <a:cs typeface="Consolas" pitchFamily="34" charset="-120"/>
               </a:rPr>
               <a:t>05 / 26</a:t>
             </a:r>
@@ -22512,9 +22411,9 @@
                 <a:solidFill>
                   <a:srgbClr val="58A6FF"/>
                 </a:solidFill>
-                <a:latin typeface="Menlo" pitchFamily="34" charset="0"/>
-                <a:ea typeface="Menlo" pitchFamily="34" charset="-122"/>
-                <a:cs typeface="Menlo" pitchFamily="34" charset="-120"/>
+                <a:latin typeface="Consolas" pitchFamily="34" charset="0"/>
+                <a:ea typeface="Consolas" pitchFamily="34" charset="-122"/>
+                <a:cs typeface="Consolas" pitchFamily="34" charset="-120"/>
               </a:rPr>
               <a:t>INTRO</a:t>
             </a:r>
@@ -22551,9 +22450,9 @@
                 <a:solidFill>
                   <a:srgbClr val="58A6FF"/>
                 </a:solidFill>
-                <a:latin typeface="Menlo" pitchFamily="34" charset="0"/>
-                <a:ea typeface="Menlo" pitchFamily="34" charset="-122"/>
-                <a:cs typeface="Menlo" pitchFamily="34" charset="-120"/>
+                <a:latin typeface="Consolas" pitchFamily="34" charset="0"/>
+                <a:ea typeface="Consolas" pitchFamily="34" charset="-122"/>
+                <a:cs typeface="Consolas" pitchFamily="34" charset="-120"/>
               </a:rPr>
               <a:t>&gt;</a:t>
             </a:r>
@@ -22590,9 +22489,9 @@
                 <a:solidFill>
                   <a:srgbClr val="E6EDF3"/>
                 </a:solidFill>
-                <a:latin typeface="Hiragino Sans" pitchFamily="34" charset="0"/>
-                <a:ea typeface="Hiragino Sans" pitchFamily="34" charset="-122"/>
-                <a:cs typeface="Hiragino Sans" pitchFamily="34" charset="-120"/>
+                <a:latin typeface="Yu Gothic" pitchFamily="34" charset="0"/>
+                <a:ea typeface="Yu Gothic" pitchFamily="34" charset="-122"/>
+                <a:cs typeface="Yu Gothic" pitchFamily="34" charset="-120"/>
               </a:rPr>
               <a:t>代表的なエージェント</a:t>
             </a:r>
@@ -22663,9 +22562,9 @@
                 <a:solidFill>
                   <a:srgbClr val="F0883E"/>
                 </a:solidFill>
-                <a:latin typeface="Hiragino Sans" pitchFamily="34" charset="0"/>
-                <a:ea typeface="Hiragino Sans" pitchFamily="34" charset="-122"/>
-                <a:cs typeface="Hiragino Sans" pitchFamily="34" charset="-120"/>
+                <a:latin typeface="Yu Gothic" pitchFamily="34" charset="0"/>
+                <a:ea typeface="Yu Gothic" pitchFamily="34" charset="-122"/>
+                <a:cs typeface="Yu Gothic" pitchFamily="34" charset="-120"/>
               </a:rPr>
               <a:t>Claude Code</a:t>
             </a:r>
@@ -22702,9 +22601,9 @@
                 <a:solidFill>
                   <a:srgbClr val="8B949E"/>
                 </a:solidFill>
-                <a:latin typeface="Menlo" pitchFamily="34" charset="0"/>
-                <a:ea typeface="Menlo" pitchFamily="34" charset="-122"/>
-                <a:cs typeface="Menlo" pitchFamily="34" charset="-120"/>
+                <a:latin typeface="Consolas" pitchFamily="34" charset="0"/>
+                <a:ea typeface="Consolas" pitchFamily="34" charset="-122"/>
+                <a:cs typeface="Consolas" pitchFamily="34" charset="-120"/>
               </a:rPr>
               <a:t>Anthropic</a:t>
             </a:r>
@@ -22744,9 +22643,9 @@
                 <a:solidFill>
                   <a:srgbClr val="C9D1D9"/>
                 </a:solidFill>
-                <a:latin typeface="Hiragino Sans" pitchFamily="34" charset="0"/>
-                <a:ea typeface="Hiragino Sans" pitchFamily="34" charset="-122"/>
-                <a:cs typeface="Hiragino Sans" pitchFamily="34" charset="-120"/>
+                <a:latin typeface="Yu Gothic" pitchFamily="34" charset="0"/>
+                <a:ea typeface="Yu Gothic" pitchFamily="34" charset="-122"/>
+                <a:cs typeface="Yu Gothic" pitchFamily="34" charset="-120"/>
               </a:rPr>
               <a:t>高性能で人気。CLIから本格的な開発。基本は有料。</a:t>
             </a:r>
@@ -22817,9 +22716,9 @@
                 <a:solidFill>
                   <a:srgbClr val="58A6FF"/>
                 </a:solidFill>
-                <a:latin typeface="Hiragino Sans" pitchFamily="34" charset="0"/>
-                <a:ea typeface="Hiragino Sans" pitchFamily="34" charset="-122"/>
-                <a:cs typeface="Hiragino Sans" pitchFamily="34" charset="-120"/>
+                <a:latin typeface="Yu Gothic" pitchFamily="34" charset="0"/>
+                <a:ea typeface="Yu Gothic" pitchFamily="34" charset="-122"/>
+                <a:cs typeface="Yu Gothic" pitchFamily="34" charset="-120"/>
               </a:rPr>
               <a:t>Codex CLI</a:t>
             </a:r>
@@ -22856,9 +22755,9 @@
                 <a:solidFill>
                   <a:srgbClr val="8B949E"/>
                 </a:solidFill>
-                <a:latin typeface="Menlo" pitchFamily="34" charset="0"/>
-                <a:ea typeface="Menlo" pitchFamily="34" charset="-122"/>
-                <a:cs typeface="Menlo" pitchFamily="34" charset="-120"/>
+                <a:latin typeface="Consolas" pitchFamily="34" charset="0"/>
+                <a:ea typeface="Consolas" pitchFamily="34" charset="-122"/>
+                <a:cs typeface="Consolas" pitchFamily="34" charset="-120"/>
               </a:rPr>
               <a:t>OpenAI</a:t>
             </a:r>
@@ -22898,9 +22797,9 @@
                 <a:solidFill>
                   <a:srgbClr val="C9D1D9"/>
                 </a:solidFill>
-                <a:latin typeface="Hiragino Sans" pitchFamily="34" charset="0"/>
-                <a:ea typeface="Hiragino Sans" pitchFamily="34" charset="-122"/>
-                <a:cs typeface="Hiragino Sans" pitchFamily="34" charset="-120"/>
+                <a:latin typeface="Yu Gothic" pitchFamily="34" charset="0"/>
+                <a:ea typeface="Yu Gothic" pitchFamily="34" charset="-122"/>
+                <a:cs typeface="Yu Gothic" pitchFamily="34" charset="-120"/>
               </a:rPr>
               <a:t>OpenAI のCLIエージェント。ChatGPTの延長で使える。</a:t>
             </a:r>
@@ -22991,9 +22890,9 @@
                 <a:solidFill>
                   <a:srgbClr val="3FB950"/>
                 </a:solidFill>
-                <a:latin typeface="Hiragino Sans" pitchFamily="34" charset="0"/>
-                <a:ea typeface="Hiragino Sans" pitchFamily="34" charset="-122"/>
-                <a:cs typeface="Hiragino Sans" pitchFamily="34" charset="-120"/>
+                <a:latin typeface="Yu Gothic" pitchFamily="34" charset="0"/>
+                <a:ea typeface="Yu Gothic" pitchFamily="34" charset="-122"/>
+                <a:cs typeface="Yu Gothic" pitchFamily="34" charset="-120"/>
               </a:rPr>
               <a:t>OpenCode</a:t>
             </a:r>
@@ -23030,9 +22929,9 @@
                 <a:solidFill>
                   <a:srgbClr val="8B949E"/>
                 </a:solidFill>
-                <a:latin typeface="Menlo" pitchFamily="34" charset="0"/>
-                <a:ea typeface="Menlo" pitchFamily="34" charset="-122"/>
-                <a:cs typeface="Menlo" pitchFamily="34" charset="-120"/>
+                <a:latin typeface="Consolas" pitchFamily="34" charset="0"/>
+                <a:ea typeface="Consolas" pitchFamily="34" charset="-122"/>
+                <a:cs typeface="Consolas" pitchFamily="34" charset="-120"/>
               </a:rPr>
               <a:t>オープンソース</a:t>
             </a:r>
@@ -23072,9 +22971,9 @@
                 <a:solidFill>
                   <a:srgbClr val="C9D1D9"/>
                 </a:solidFill>
-                <a:latin typeface="Hiragino Sans" pitchFamily="34" charset="0"/>
-                <a:ea typeface="Hiragino Sans" pitchFamily="34" charset="-122"/>
-                <a:cs typeface="Hiragino Sans" pitchFamily="34" charset="-120"/>
+                <a:latin typeface="Yu Gothic" pitchFamily="34" charset="0"/>
+                <a:ea typeface="Yu Gothic" pitchFamily="34" charset="-122"/>
+                <a:cs typeface="Yu Gothic" pitchFamily="34" charset="-120"/>
               </a:rPr>
               <a:t>好きなモデルに接続できる。無料モデルでも動く。</a:t>
             </a:r>
@@ -23165,9 +23064,9 @@
                 <a:solidFill>
                   <a:srgbClr val="E6EDF3"/>
                 </a:solidFill>
-                <a:latin typeface="Hiragino Sans" pitchFamily="34" charset="0"/>
-                <a:ea typeface="Hiragino Sans" pitchFamily="34" charset="-122"/>
-                <a:cs typeface="Hiragino Sans" pitchFamily="34" charset="-120"/>
+                <a:latin typeface="Yu Gothic" pitchFamily="34" charset="0"/>
+                <a:ea typeface="Yu Gothic" pitchFamily="34" charset="-122"/>
+                <a:cs typeface="Yu Gothic" pitchFamily="34" charset="-120"/>
               </a:rPr>
               <a:t>どれも“ターミナルで動くエージェント”で、使う感覚はほぼ同じ。</a:t>
             </a:r>
@@ -23179,9 +23078,9 @@
                 <a:solidFill>
                   <a:srgbClr val="C9D1D9"/>
                 </a:solidFill>
-                <a:latin typeface="Hiragino Sans" pitchFamily="34" charset="0"/>
-                <a:ea typeface="Hiragino Sans" pitchFamily="34" charset="-122"/>
-                <a:cs typeface="Hiragino Sans" pitchFamily="34" charset="-120"/>
+                <a:latin typeface="Yu Gothic" pitchFamily="34" charset="0"/>
+                <a:ea typeface="Yu Gothic" pitchFamily="34" charset="-122"/>
+                <a:cs typeface="Yu Gothic" pitchFamily="34" charset="-120"/>
               </a:rPr>
               <a:t>  今日は誰でも無料で試せる OpenCode を使います。</a:t>
             </a:r>
@@ -23218,9 +23117,9 @@
                 <a:solidFill>
                   <a:srgbClr val="8B949E"/>
                 </a:solidFill>
-                <a:latin typeface="Hiragino Sans" pitchFamily="34" charset="0"/>
-                <a:ea typeface="Hiragino Sans" pitchFamily="34" charset="-122"/>
-                <a:cs typeface="Hiragino Sans" pitchFamily="34" charset="-120"/>
+                <a:latin typeface="Yu Gothic" pitchFamily="34" charset="0"/>
+                <a:ea typeface="Yu Gothic" pitchFamily="34" charset="-122"/>
+                <a:cs typeface="Yu Gothic" pitchFamily="34" charset="-120"/>
               </a:rPr>
               <a:t>コーディングエージェント入門</a:t>
             </a:r>
@@ -23232,9 +23131,9 @@
                 <a:solidFill>
                   <a:srgbClr val="30363D"/>
                 </a:solidFill>
-                <a:latin typeface="Hiragino Sans" pitchFamily="34" charset="0"/>
-                <a:ea typeface="Hiragino Sans" pitchFamily="34" charset="-122"/>
-                <a:cs typeface="Hiragino Sans" pitchFamily="34" charset="-120"/>
+                <a:latin typeface="Yu Gothic" pitchFamily="34" charset="0"/>
+                <a:ea typeface="Yu Gothic" pitchFamily="34" charset="-122"/>
+                <a:cs typeface="Yu Gothic" pitchFamily="34" charset="-120"/>
               </a:rPr>
               <a:t>  ·  OpenCode × OpenRouter</a:t>
             </a:r>
@@ -23271,9 +23170,9 @@
                 <a:solidFill>
                   <a:srgbClr val="8B949E"/>
                 </a:solidFill>
-                <a:latin typeface="Menlo" pitchFamily="34" charset="0"/>
-                <a:ea typeface="Menlo" pitchFamily="34" charset="-122"/>
-                <a:cs typeface="Menlo" pitchFamily="34" charset="-120"/>
+                <a:latin typeface="Consolas" pitchFamily="34" charset="0"/>
+                <a:ea typeface="Consolas" pitchFamily="34" charset="-122"/>
+                <a:cs typeface="Consolas" pitchFamily="34" charset="-120"/>
               </a:rPr>
               <a:t>06 / 26</a:t>
             </a:r>
@@ -23342,9 +23241,9 @@
                 <a:solidFill>
                   <a:srgbClr val="58A6FF"/>
                 </a:solidFill>
-                <a:latin typeface="Menlo" pitchFamily="34" charset="0"/>
-                <a:ea typeface="Menlo" pitchFamily="34" charset="-122"/>
-                <a:cs typeface="Menlo" pitchFamily="34" charset="-120"/>
+                <a:latin typeface="Consolas" pitchFamily="34" charset="0"/>
+                <a:ea typeface="Consolas" pitchFamily="34" charset="-122"/>
+                <a:cs typeface="Consolas" pitchFamily="34" charset="-120"/>
               </a:rPr>
               <a:t>INTRO</a:t>
             </a:r>
@@ -23381,9 +23280,9 @@
                 <a:solidFill>
                   <a:srgbClr val="58A6FF"/>
                 </a:solidFill>
-                <a:latin typeface="Menlo" pitchFamily="34" charset="0"/>
-                <a:ea typeface="Menlo" pitchFamily="34" charset="-122"/>
-                <a:cs typeface="Menlo" pitchFamily="34" charset="-120"/>
+                <a:latin typeface="Consolas" pitchFamily="34" charset="0"/>
+                <a:ea typeface="Consolas" pitchFamily="34" charset="-122"/>
+                <a:cs typeface="Consolas" pitchFamily="34" charset="-120"/>
               </a:rPr>
               <a:t>&gt;</a:t>
             </a:r>
@@ -23420,9 +23319,9 @@
                 <a:solidFill>
                   <a:srgbClr val="E6EDF3"/>
                 </a:solidFill>
-                <a:latin typeface="Hiragino Sans" pitchFamily="34" charset="0"/>
-                <a:ea typeface="Hiragino Sans" pitchFamily="34" charset="-122"/>
-                <a:cs typeface="Hiragino Sans" pitchFamily="34" charset="-120"/>
+                <a:latin typeface="Yu Gothic" pitchFamily="34" charset="0"/>
+                <a:ea typeface="Yu Gothic" pitchFamily="34" charset="-122"/>
+                <a:cs typeface="Yu Gothic" pitchFamily="34" charset="-120"/>
               </a:rPr>
               <a:t>なぜ “ターミナル” で動くの？</a:t>
             </a:r>
@@ -23493,9 +23392,9 @@
                 <a:solidFill>
                   <a:srgbClr val="E6EDF3"/>
                 </a:solidFill>
-                <a:latin typeface="Hiragino Sans" pitchFamily="34" charset="0"/>
-                <a:ea typeface="Hiragino Sans" pitchFamily="34" charset="-122"/>
-                <a:cs typeface="Hiragino Sans" pitchFamily="34" charset="-120"/>
+                <a:latin typeface="Yu Gothic" pitchFamily="34" charset="0"/>
+                <a:ea typeface="Yu Gothic" pitchFamily="34" charset="-122"/>
+                <a:cs typeface="Yu Gothic" pitchFamily="34" charset="-120"/>
               </a:rPr>
               <a:t>ターミナル = PCに文字で命令する場所</a:t>
             </a:r>
@@ -23536,9 +23435,9 @@
                 <a:solidFill>
                   <a:srgbClr val="C9D1D9"/>
                 </a:solidFill>
-                <a:latin typeface="Hiragino Sans" pitchFamily="34" charset="0"/>
-                <a:ea typeface="Hiragino Sans" pitchFamily="34" charset="-122"/>
-                <a:cs typeface="Hiragino Sans" pitchFamily="34" charset="-120"/>
+                <a:latin typeface="Yu Gothic" pitchFamily="34" charset="0"/>
+                <a:ea typeface="Yu Gothic" pitchFamily="34" charset="-122"/>
+                <a:cs typeface="Yu Gothic" pitchFamily="34" charset="-120"/>
               </a:rPr>
               <a:t>ファイル操作もコマンド実行も、ここから全部できる</a:t>
             </a:r>
@@ -23557,9 +23456,9 @@
                 <a:solidFill>
                   <a:srgbClr val="C9D1D9"/>
                 </a:solidFill>
-                <a:latin typeface="Hiragino Sans" pitchFamily="34" charset="0"/>
-                <a:ea typeface="Hiragino Sans" pitchFamily="34" charset="-122"/>
-                <a:cs typeface="Hiragino Sans" pitchFamily="34" charset="-120"/>
+                <a:latin typeface="Yu Gothic" pitchFamily="34" charset="0"/>
+                <a:ea typeface="Yu Gothic" pitchFamily="34" charset="-122"/>
+                <a:cs typeface="Yu Gothic" pitchFamily="34" charset="-120"/>
               </a:rPr>
               <a:t>エージェントの“手”として一番都合がいい</a:t>
             </a:r>
@@ -23578,9 +23477,9 @@
                 <a:solidFill>
                   <a:srgbClr val="C9D1D9"/>
                 </a:solidFill>
-                <a:latin typeface="Hiragino Sans" pitchFamily="34" charset="0"/>
-                <a:ea typeface="Hiragino Sans" pitchFamily="34" charset="-122"/>
-                <a:cs typeface="Hiragino Sans" pitchFamily="34" charset="-120"/>
+                <a:latin typeface="Yu Gothic" pitchFamily="34" charset="0"/>
+                <a:ea typeface="Yu Gothic" pitchFamily="34" charset="-122"/>
+                <a:cs typeface="Yu Gothic" pitchFamily="34" charset="-120"/>
               </a:rPr>
               <a:t>ボタンを探すより速く・自動で動かせる</a:t>
             </a:r>
@@ -23731,9 +23630,9 @@
                 <a:solidFill>
                   <a:srgbClr val="8B949E"/>
                 </a:solidFill>
-                <a:latin typeface="Menlo" pitchFamily="34" charset="0"/>
-                <a:ea typeface="Menlo" pitchFamily="34" charset="-122"/>
-                <a:cs typeface="Menlo" pitchFamily="34" charset="-120"/>
+                <a:latin typeface="Consolas" pitchFamily="34" charset="0"/>
+                <a:ea typeface="Consolas" pitchFamily="34" charset="-122"/>
+                <a:cs typeface="Consolas" pitchFamily="34" charset="-120"/>
               </a:rPr>
               <a:t>こんな世界です</a:t>
             </a:r>
@@ -23773,9 +23672,9 @@
                 <a:solidFill>
                   <a:srgbClr val="3FB950"/>
                 </a:solidFill>
-                <a:latin typeface="Menlo" pitchFamily="34" charset="0"/>
-                <a:ea typeface="Menlo" pitchFamily="34" charset="-122"/>
-                <a:cs typeface="Menlo" pitchFamily="34" charset="-120"/>
+                <a:latin typeface="Consolas" pitchFamily="34" charset="0"/>
+                <a:ea typeface="Consolas" pitchFamily="34" charset="-122"/>
+                <a:cs typeface="Consolas" pitchFamily="34" charset="-120"/>
               </a:rPr>
               <a:t>$ ls</a:t>
             </a:r>
@@ -23793,9 +23692,9 @@
                 <a:solidFill>
                   <a:srgbClr val="C9D1D9"/>
                 </a:solidFill>
-                <a:latin typeface="Menlo" pitchFamily="34" charset="0"/>
-                <a:ea typeface="Menlo" pitchFamily="34" charset="-122"/>
-                <a:cs typeface="Menlo" pitchFamily="34" charset="-120"/>
+                <a:latin typeface="Consolas" pitchFamily="34" charset="0"/>
+                <a:ea typeface="Consolas" pitchFamily="34" charset="-122"/>
+                <a:cs typeface="Consolas" pitchFamily="34" charset="-120"/>
               </a:rPr>
               <a:t>index.html  README.md</a:t>
             </a:r>
@@ -23813,9 +23712,9 @@
                 <a:solidFill>
                   <a:srgbClr val="C9D1D9"/>
                 </a:solidFill>
-                <a:latin typeface="Menlo" pitchFamily="34" charset="0"/>
-                <a:ea typeface="Menlo" pitchFamily="34" charset="-122"/>
-                <a:cs typeface="Menlo" pitchFamily="34" charset="-120"/>
+                <a:latin typeface="Consolas" pitchFamily="34" charset="0"/>
+                <a:ea typeface="Consolas" pitchFamily="34" charset="-122"/>
+                <a:cs typeface="Consolas" pitchFamily="34" charset="-120"/>
               </a:rPr>
               <a:t> </a:t>
             </a:r>
@@ -23833,9 +23732,9 @@
                 <a:solidFill>
                   <a:srgbClr val="3FB950"/>
                 </a:solidFill>
-                <a:latin typeface="Menlo" pitchFamily="34" charset="0"/>
-                <a:ea typeface="Menlo" pitchFamily="34" charset="-122"/>
-                <a:cs typeface="Menlo" pitchFamily="34" charset="-120"/>
+                <a:latin typeface="Consolas" pitchFamily="34" charset="0"/>
+                <a:ea typeface="Consolas" pitchFamily="34" charset="-122"/>
+                <a:cs typeface="Consolas" pitchFamily="34" charset="-120"/>
               </a:rPr>
               <a:t>$ python3 -m http.server</a:t>
             </a:r>
@@ -23853,9 +23752,9 @@
                 <a:solidFill>
                   <a:srgbClr val="8B949E"/>
                 </a:solidFill>
-                <a:latin typeface="Menlo" pitchFamily="34" charset="0"/>
-                <a:ea typeface="Menlo" pitchFamily="34" charset="-122"/>
-                <a:cs typeface="Menlo" pitchFamily="34" charset="-120"/>
+                <a:latin typeface="Consolas" pitchFamily="34" charset="0"/>
+                <a:ea typeface="Consolas" pitchFamily="34" charset="-122"/>
+                <a:cs typeface="Consolas" pitchFamily="34" charset="-120"/>
               </a:rPr>
               <a:t># → localhost:8000 で確認</a:t>
             </a:r>
@@ -23873,9 +23772,9 @@
                 <a:solidFill>
                   <a:srgbClr val="C9D1D9"/>
                 </a:solidFill>
-                <a:latin typeface="Menlo" pitchFamily="34" charset="0"/>
-                <a:ea typeface="Menlo" pitchFamily="34" charset="-122"/>
-                <a:cs typeface="Menlo" pitchFamily="34" charset="-120"/>
+                <a:latin typeface="Consolas" pitchFamily="34" charset="0"/>
+                <a:ea typeface="Consolas" pitchFamily="34" charset="-122"/>
+                <a:cs typeface="Consolas" pitchFamily="34" charset="-120"/>
               </a:rPr>
               <a:t> </a:t>
             </a:r>
@@ -23893,9 +23792,9 @@
                 <a:solidFill>
                   <a:srgbClr val="3FB950"/>
                 </a:solidFill>
-                <a:latin typeface="Menlo" pitchFamily="34" charset="0"/>
-                <a:ea typeface="Menlo" pitchFamily="34" charset="-122"/>
-                <a:cs typeface="Menlo" pitchFamily="34" charset="-120"/>
+                <a:latin typeface="Consolas" pitchFamily="34" charset="0"/>
+                <a:ea typeface="Consolas" pitchFamily="34" charset="-122"/>
+                <a:cs typeface="Consolas" pitchFamily="34" charset="-120"/>
               </a:rPr>
               <a:t>$ opencode</a:t>
             </a:r>
@@ -23913,9 +23812,9 @@
                 <a:solidFill>
                   <a:srgbClr val="58A6FF"/>
                 </a:solidFill>
-                <a:latin typeface="Menlo" pitchFamily="34" charset="0"/>
-                <a:ea typeface="Menlo" pitchFamily="34" charset="-122"/>
-                <a:cs typeface="Menlo" pitchFamily="34" charset="-120"/>
+                <a:latin typeface="Consolas" pitchFamily="34" charset="0"/>
+                <a:ea typeface="Consolas" pitchFamily="34" charset="-122"/>
+                <a:cs typeface="Consolas" pitchFamily="34" charset="-120"/>
               </a:rPr>
               <a:t>&gt; ToDoアプリを作って</a:t>
             </a:r>
@@ -23933,9 +23832,9 @@
                 <a:solidFill>
                   <a:srgbClr val="8B949E"/>
                 </a:solidFill>
-                <a:latin typeface="Menlo" pitchFamily="34" charset="0"/>
-                <a:ea typeface="Menlo" pitchFamily="34" charset="-122"/>
-                <a:cs typeface="Menlo" pitchFamily="34" charset="-120"/>
+                <a:latin typeface="Consolas" pitchFamily="34" charset="0"/>
+                <a:ea typeface="Consolas" pitchFamily="34" charset="-122"/>
+                <a:cs typeface="Consolas" pitchFamily="34" charset="-120"/>
               </a:rPr>
               <a:t>  作成中: src/app.js …</a:t>
             </a:r>
@@ -23972,9 +23871,9 @@
                 <a:solidFill>
                   <a:srgbClr val="8B949E"/>
                 </a:solidFill>
-                <a:latin typeface="Hiragino Sans" pitchFamily="34" charset="0"/>
-                <a:ea typeface="Hiragino Sans" pitchFamily="34" charset="-122"/>
-                <a:cs typeface="Hiragino Sans" pitchFamily="34" charset="-120"/>
+                <a:latin typeface="Yu Gothic" pitchFamily="34" charset="0"/>
+                <a:ea typeface="Yu Gothic" pitchFamily="34" charset="-122"/>
+                <a:cs typeface="Yu Gothic" pitchFamily="34" charset="-120"/>
               </a:rPr>
               <a:t>コーディングエージェント入門</a:t>
             </a:r>
@@ -23986,9 +23885,9 @@
                 <a:solidFill>
                   <a:srgbClr val="30363D"/>
                 </a:solidFill>
-                <a:latin typeface="Hiragino Sans" pitchFamily="34" charset="0"/>
-                <a:ea typeface="Hiragino Sans" pitchFamily="34" charset="-122"/>
-                <a:cs typeface="Hiragino Sans" pitchFamily="34" charset="-120"/>
+                <a:latin typeface="Yu Gothic" pitchFamily="34" charset="0"/>
+                <a:ea typeface="Yu Gothic" pitchFamily="34" charset="-122"/>
+                <a:cs typeface="Yu Gothic" pitchFamily="34" charset="-120"/>
               </a:rPr>
               <a:t>  ·  OpenCode × OpenRouter</a:t>
             </a:r>
@@ -24025,9 +23924,9 @@
                 <a:solidFill>
                   <a:srgbClr val="8B949E"/>
                 </a:solidFill>
-                <a:latin typeface="Menlo" pitchFamily="34" charset="0"/>
-                <a:ea typeface="Menlo" pitchFamily="34" charset="-122"/>
-                <a:cs typeface="Menlo" pitchFamily="34" charset="-120"/>
+                <a:latin typeface="Consolas" pitchFamily="34" charset="0"/>
+                <a:ea typeface="Consolas" pitchFamily="34" charset="-122"/>
+                <a:cs typeface="Consolas" pitchFamily="34" charset="-120"/>
               </a:rPr>
               <a:t>07 / 26</a:t>
             </a:r>
@@ -24096,9 +23995,9 @@
                 <a:solidFill>
                   <a:srgbClr val="58A6FF"/>
                 </a:solidFill>
-                <a:latin typeface="Menlo" pitchFamily="34" charset="0"/>
-                <a:ea typeface="Menlo" pitchFamily="34" charset="-122"/>
-                <a:cs typeface="Menlo" pitchFamily="34" charset="-120"/>
+                <a:latin typeface="Consolas" pitchFamily="34" charset="0"/>
+                <a:ea typeface="Consolas" pitchFamily="34" charset="-122"/>
+                <a:cs typeface="Consolas" pitchFamily="34" charset="-120"/>
               </a:rPr>
               <a:t>INTRO</a:t>
             </a:r>
@@ -24135,9 +24034,9 @@
                 <a:solidFill>
                   <a:srgbClr val="58A6FF"/>
                 </a:solidFill>
-                <a:latin typeface="Menlo" pitchFamily="34" charset="0"/>
-                <a:ea typeface="Menlo" pitchFamily="34" charset="-122"/>
-                <a:cs typeface="Menlo" pitchFamily="34" charset="-120"/>
+                <a:latin typeface="Consolas" pitchFamily="34" charset="0"/>
+                <a:ea typeface="Consolas" pitchFamily="34" charset="-122"/>
+                <a:cs typeface="Consolas" pitchFamily="34" charset="-120"/>
               </a:rPr>
               <a:t>&gt;</a:t>
             </a:r>
@@ -24174,9 +24073,9 @@
                 <a:solidFill>
                   <a:srgbClr val="E6EDF3"/>
                 </a:solidFill>
-                <a:latin typeface="Hiragino Sans" pitchFamily="34" charset="0"/>
-                <a:ea typeface="Hiragino Sans" pitchFamily="34" charset="-122"/>
-                <a:cs typeface="Hiragino Sans" pitchFamily="34" charset="-120"/>
+                <a:latin typeface="Yu Gothic" pitchFamily="34" charset="0"/>
+                <a:ea typeface="Yu Gothic" pitchFamily="34" charset="-122"/>
+                <a:cs typeface="Yu Gothic" pitchFamily="34" charset="-120"/>
               </a:rPr>
               <a:t>今日のツール：OpenCode</a:t>
             </a:r>
@@ -24267,9 +24166,9 @@
                 <a:solidFill>
                   <a:srgbClr val="3FB950"/>
                 </a:solidFill>
-                <a:latin typeface="Hiragino Sans" pitchFamily="34" charset="0"/>
-                <a:ea typeface="Hiragino Sans" pitchFamily="34" charset="-122"/>
-                <a:cs typeface="Hiragino Sans" pitchFamily="34" charset="-120"/>
+                <a:latin typeface="Yu Gothic" pitchFamily="34" charset="0"/>
+                <a:ea typeface="Yu Gothic" pitchFamily="34" charset="-122"/>
+                <a:cs typeface="Yu Gothic" pitchFamily="34" charset="-120"/>
               </a:rPr>
               <a:t>オープンソース</a:t>
             </a:r>
@@ -24306,9 +24205,9 @@
                 <a:solidFill>
                   <a:srgbClr val="C9D1D9"/>
                 </a:solidFill>
-                <a:latin typeface="Hiragino Sans" pitchFamily="34" charset="0"/>
-                <a:ea typeface="Hiragino Sans" pitchFamily="34" charset="-122"/>
-                <a:cs typeface="Hiragino Sans" pitchFamily="34" charset="-120"/>
+                <a:latin typeface="Yu Gothic" pitchFamily="34" charset="0"/>
+                <a:ea typeface="Yu Gothic" pitchFamily="34" charset="-122"/>
+                <a:cs typeface="Yu Gothic" pitchFamily="34" charset="-120"/>
               </a:rPr>
               <a:t>無料で使える。ターミナルで動くエージェント。</a:t>
             </a:r>
@@ -24399,9 +24298,9 @@
                 <a:solidFill>
                   <a:srgbClr val="58A6FF"/>
                 </a:solidFill>
-                <a:latin typeface="Hiragino Sans" pitchFamily="34" charset="0"/>
-                <a:ea typeface="Hiragino Sans" pitchFamily="34" charset="-122"/>
-                <a:cs typeface="Hiragino Sans" pitchFamily="34" charset="-120"/>
+                <a:latin typeface="Yu Gothic" pitchFamily="34" charset="0"/>
+                <a:ea typeface="Yu Gothic" pitchFamily="34" charset="-122"/>
+                <a:cs typeface="Yu Gothic" pitchFamily="34" charset="-120"/>
               </a:rPr>
               <a:t>モデルが自由</a:t>
             </a:r>
@@ -24438,9 +24337,9 @@
                 <a:solidFill>
                   <a:srgbClr val="C9D1D9"/>
                 </a:solidFill>
-                <a:latin typeface="Hiragino Sans" pitchFamily="34" charset="0"/>
-                <a:ea typeface="Hiragino Sans" pitchFamily="34" charset="-122"/>
-                <a:cs typeface="Hiragino Sans" pitchFamily="34" charset="-120"/>
+                <a:latin typeface="Yu Gothic" pitchFamily="34" charset="0"/>
+                <a:ea typeface="Yu Gothic" pitchFamily="34" charset="-122"/>
+                <a:cs typeface="Yu Gothic" pitchFamily="34" charset="-120"/>
               </a:rPr>
               <a:t>OpenAI / Anthropic / OpenRouter など好きなモデルに接続。</a:t>
             </a:r>
@@ -24531,9 +24430,9 @@
                 <a:solidFill>
                   <a:srgbClr val="BC8CFF"/>
                 </a:solidFill>
-                <a:latin typeface="Hiragino Sans" pitchFamily="34" charset="0"/>
-                <a:ea typeface="Hiragino Sans" pitchFamily="34" charset="-122"/>
-                <a:cs typeface="Hiragino Sans" pitchFamily="34" charset="-120"/>
+                <a:latin typeface="Yu Gothic" pitchFamily="34" charset="0"/>
+                <a:ea typeface="Yu Gothic" pitchFamily="34" charset="-122"/>
+                <a:cs typeface="Yu Gothic" pitchFamily="34" charset="-120"/>
               </a:rPr>
               <a:t>なぜ今日これ？</a:t>
             </a:r>
@@ -24570,9 +24469,9 @@
                 <a:solidFill>
                   <a:srgbClr val="C9D1D9"/>
                 </a:solidFill>
-                <a:latin typeface="Hiragino Sans" pitchFamily="34" charset="0"/>
-                <a:ea typeface="Hiragino Sans" pitchFamily="34" charset="-122"/>
-                <a:cs typeface="Hiragino Sans" pitchFamily="34" charset="-120"/>
+                <a:latin typeface="Yu Gothic" pitchFamily="34" charset="0"/>
+                <a:ea typeface="Yu Gothic" pitchFamily="34" charset="-122"/>
+                <a:cs typeface="Yu Gothic" pitchFamily="34" charset="-120"/>
               </a:rPr>
               <a:t>誰でも無料で動かせるから。操作の感覚は他ツールと同じ。</a:t>
             </a:r>
@@ -24723,9 +24622,9 @@
                 <a:solidFill>
                   <a:srgbClr val="8B949E"/>
                 </a:solidFill>
-                <a:latin typeface="Menlo" pitchFamily="34" charset="0"/>
-                <a:ea typeface="Menlo" pitchFamily="34" charset="-122"/>
-                <a:cs typeface="Menlo" pitchFamily="34" charset="-120"/>
+                <a:latin typeface="Consolas" pitchFamily="34" charset="0"/>
+                <a:ea typeface="Consolas" pitchFamily="34" charset="-122"/>
+                <a:cs typeface="Consolas" pitchFamily="34" charset="-120"/>
               </a:rPr>
               <a:t>TUI イメージ</a:t>
             </a:r>
@@ -24765,9 +24664,9 @@
                 <a:solidFill>
                   <a:srgbClr val="3FB950"/>
                 </a:solidFill>
-                <a:latin typeface="Menlo" pitchFamily="34" charset="0"/>
-                <a:ea typeface="Menlo" pitchFamily="34" charset="-122"/>
-                <a:cs typeface="Menlo" pitchFamily="34" charset="-120"/>
+                <a:latin typeface="Consolas" pitchFamily="34" charset="0"/>
+                <a:ea typeface="Consolas" pitchFamily="34" charset="-122"/>
+                <a:cs typeface="Consolas" pitchFamily="34" charset="-120"/>
               </a:rPr>
               <a:t>$ opencode</a:t>
             </a:r>
@@ -24785,9 +24684,9 @@
                 <a:solidFill>
                   <a:srgbClr val="C9D1D9"/>
                 </a:solidFill>
-                <a:latin typeface="Menlo" pitchFamily="34" charset="0"/>
-                <a:ea typeface="Menlo" pitchFamily="34" charset="-122"/>
-                <a:cs typeface="Menlo" pitchFamily="34" charset="-120"/>
+                <a:latin typeface="Consolas" pitchFamily="34" charset="0"/>
+                <a:ea typeface="Consolas" pitchFamily="34" charset="-122"/>
+                <a:cs typeface="Consolas" pitchFamily="34" charset="-120"/>
               </a:rPr>
               <a:t> </a:t>
             </a:r>
@@ -24805,9 +24704,9 @@
                 <a:solidFill>
                   <a:srgbClr val="8B949E"/>
                 </a:solidFill>
-                <a:latin typeface="Menlo" pitchFamily="34" charset="0"/>
-                <a:ea typeface="Menlo" pitchFamily="34" charset="-122"/>
-                <a:cs typeface="Menlo" pitchFamily="34" charset="-120"/>
+                <a:latin typeface="Consolas" pitchFamily="34" charset="0"/>
+                <a:ea typeface="Consolas" pitchFamily="34" charset="-122"/>
+                <a:cs typeface="Consolas" pitchFamily="34" charset="-120"/>
               </a:rPr>
               <a:t>  OpenCode を起動しました</a:t>
             </a:r>
@@ -24825,9 +24724,9 @@
                 <a:solidFill>
                   <a:srgbClr val="8B949E"/>
                 </a:solidFill>
-                <a:latin typeface="Menlo" pitchFamily="34" charset="0"/>
-                <a:ea typeface="Menlo" pitchFamily="34" charset="-122"/>
-                <a:cs typeface="Menlo" pitchFamily="34" charset="-120"/>
+                <a:latin typeface="Consolas" pitchFamily="34" charset="0"/>
+                <a:ea typeface="Consolas" pitchFamily="34" charset="-122"/>
+                <a:cs typeface="Consolas" pitchFamily="34" charset="-120"/>
               </a:rPr>
               <a:t>  ───────────────────</a:t>
             </a:r>
@@ -24845,9 +24744,9 @@
                 <a:solidFill>
                   <a:srgbClr val="C9D1D9"/>
                 </a:solidFill>
-                <a:latin typeface="Menlo" pitchFamily="34" charset="0"/>
-                <a:ea typeface="Menlo" pitchFamily="34" charset="-122"/>
-                <a:cs typeface="Menlo" pitchFamily="34" charset="-120"/>
+                <a:latin typeface="Consolas" pitchFamily="34" charset="0"/>
+                <a:ea typeface="Consolas" pitchFamily="34" charset="-122"/>
+                <a:cs typeface="Consolas" pitchFamily="34" charset="-120"/>
               </a:rPr>
               <a:t> </a:t>
             </a:r>
@@ -24865,9 +24764,9 @@
                 <a:solidFill>
                   <a:srgbClr val="3FB950"/>
                 </a:solidFill>
-                <a:latin typeface="Menlo" pitchFamily="34" charset="0"/>
-                <a:ea typeface="Menlo" pitchFamily="34" charset="-122"/>
-                <a:cs typeface="Menlo" pitchFamily="34" charset="-120"/>
+                <a:latin typeface="Consolas" pitchFamily="34" charset="0"/>
+                <a:ea typeface="Consolas" pitchFamily="34" charset="-122"/>
+                <a:cs typeface="Consolas" pitchFamily="34" charset="-120"/>
               </a:rPr>
               <a:t>  &gt; _</a:t>
             </a:r>
@@ -24885,9 +24784,9 @@
                 <a:solidFill>
                   <a:srgbClr val="C9D1D9"/>
                 </a:solidFill>
-                <a:latin typeface="Menlo" pitchFamily="34" charset="0"/>
-                <a:ea typeface="Menlo" pitchFamily="34" charset="-122"/>
-                <a:cs typeface="Menlo" pitchFamily="34" charset="-120"/>
+                <a:latin typeface="Consolas" pitchFamily="34" charset="0"/>
+                <a:ea typeface="Consolas" pitchFamily="34" charset="-122"/>
+                <a:cs typeface="Consolas" pitchFamily="34" charset="-120"/>
               </a:rPr>
               <a:t> </a:t>
             </a:r>
@@ -24905,9 +24804,9 @@
                 <a:solidFill>
                   <a:srgbClr val="C9D1D9"/>
                 </a:solidFill>
-                <a:latin typeface="Menlo" pitchFamily="34" charset="0"/>
-                <a:ea typeface="Menlo" pitchFamily="34" charset="-122"/>
-                <a:cs typeface="Menlo" pitchFamily="34" charset="-120"/>
+                <a:latin typeface="Consolas" pitchFamily="34" charset="0"/>
+                <a:ea typeface="Consolas" pitchFamily="34" charset="-122"/>
+                <a:cs typeface="Consolas" pitchFamily="34" charset="-120"/>
               </a:rPr>
               <a:t>  ここに指示を書く</a:t>
             </a:r>
@@ -24925,9 +24824,9 @@
                 <a:solidFill>
                   <a:srgbClr val="8B949E"/>
                 </a:solidFill>
-                <a:latin typeface="Menlo" pitchFamily="34" charset="0"/>
-                <a:ea typeface="Menlo" pitchFamily="34" charset="-122"/>
-                <a:cs typeface="Menlo" pitchFamily="34" charset="-120"/>
+                <a:latin typeface="Consolas" pitchFamily="34" charset="0"/>
+                <a:ea typeface="Consolas" pitchFamily="34" charset="-122"/>
+                <a:cs typeface="Consolas" pitchFamily="34" charset="-120"/>
               </a:rPr>
               <a:t>  ───────────────────</a:t>
             </a:r>
@@ -24945,9 +24844,9 @@
                 <a:solidFill>
                   <a:srgbClr val="58A6FF"/>
                 </a:solidFill>
-                <a:latin typeface="Menlo" pitchFamily="34" charset="0"/>
-                <a:ea typeface="Menlo" pitchFamily="34" charset="-122"/>
-                <a:cs typeface="Menlo" pitchFamily="34" charset="-120"/>
+                <a:latin typeface="Consolas" pitchFamily="34" charset="0"/>
+                <a:ea typeface="Consolas" pitchFamily="34" charset="-122"/>
+                <a:cs typeface="Consolas" pitchFamily="34" charset="-120"/>
               </a:rPr>
               <a:t>  /connect でモデルに接続</a:t>
             </a:r>
@@ -24984,9 +24883,9 @@
                 <a:solidFill>
                   <a:srgbClr val="8B949E"/>
                 </a:solidFill>
-                <a:latin typeface="Hiragino Sans" pitchFamily="34" charset="0"/>
-                <a:ea typeface="Hiragino Sans" pitchFamily="34" charset="-122"/>
-                <a:cs typeface="Hiragino Sans" pitchFamily="34" charset="-120"/>
+                <a:latin typeface="Yu Gothic" pitchFamily="34" charset="0"/>
+                <a:ea typeface="Yu Gothic" pitchFamily="34" charset="-122"/>
+                <a:cs typeface="Yu Gothic" pitchFamily="34" charset="-120"/>
               </a:rPr>
               <a:t>コーディングエージェント入門</a:t>
             </a:r>
@@ -24998,9 +24897,9 @@
                 <a:solidFill>
                   <a:srgbClr val="30363D"/>
                 </a:solidFill>
-                <a:latin typeface="Hiragino Sans" pitchFamily="34" charset="0"/>
-                <a:ea typeface="Hiragino Sans" pitchFamily="34" charset="-122"/>
-                <a:cs typeface="Hiragino Sans" pitchFamily="34" charset="-120"/>
+                <a:latin typeface="Yu Gothic" pitchFamily="34" charset="0"/>
+                <a:ea typeface="Yu Gothic" pitchFamily="34" charset="-122"/>
+                <a:cs typeface="Yu Gothic" pitchFamily="34" charset="-120"/>
               </a:rPr>
               <a:t>  ·  OpenCode × OpenRouter</a:t>
             </a:r>
@@ -25037,9 +24936,9 @@
                 <a:solidFill>
                   <a:srgbClr val="8B949E"/>
                 </a:solidFill>
-                <a:latin typeface="Menlo" pitchFamily="34" charset="0"/>
-                <a:ea typeface="Menlo" pitchFamily="34" charset="-122"/>
-                <a:cs typeface="Menlo" pitchFamily="34" charset="-120"/>
+                <a:latin typeface="Consolas" pitchFamily="34" charset="0"/>
+                <a:ea typeface="Consolas" pitchFamily="34" charset="-122"/>
+                <a:cs typeface="Consolas" pitchFamily="34" charset="-120"/>
               </a:rPr>
               <a:t>08 / 26</a:t>
             </a:r>
@@ -25108,9 +25007,9 @@
                 <a:solidFill>
                   <a:srgbClr val="58A6FF"/>
                 </a:solidFill>
-                <a:latin typeface="Menlo" pitchFamily="34" charset="0"/>
-                <a:ea typeface="Menlo" pitchFamily="34" charset="-122"/>
-                <a:cs typeface="Menlo" pitchFamily="34" charset="-120"/>
+                <a:latin typeface="Consolas" pitchFamily="34" charset="0"/>
+                <a:ea typeface="Consolas" pitchFamily="34" charset="-122"/>
+                <a:cs typeface="Consolas" pitchFamily="34" charset="-120"/>
               </a:rPr>
               <a:t>INTRO</a:t>
             </a:r>
@@ -25147,9 +25046,9 @@
                 <a:solidFill>
                   <a:srgbClr val="58A6FF"/>
                 </a:solidFill>
-                <a:latin typeface="Menlo" pitchFamily="34" charset="0"/>
-                <a:ea typeface="Menlo" pitchFamily="34" charset="-122"/>
-                <a:cs typeface="Menlo" pitchFamily="34" charset="-120"/>
+                <a:latin typeface="Consolas" pitchFamily="34" charset="0"/>
+                <a:ea typeface="Consolas" pitchFamily="34" charset="-122"/>
+                <a:cs typeface="Consolas" pitchFamily="34" charset="-120"/>
               </a:rPr>
               <a:t>&gt;</a:t>
             </a:r>
@@ -25186,9 +25085,9 @@
                 <a:solidFill>
                   <a:srgbClr val="E6EDF3"/>
                 </a:solidFill>
-                <a:latin typeface="Hiragino Sans" pitchFamily="34" charset="0"/>
-                <a:ea typeface="Hiragino Sans" pitchFamily="34" charset="-122"/>
-                <a:cs typeface="Hiragino Sans" pitchFamily="34" charset="-120"/>
+                <a:latin typeface="Yu Gothic" pitchFamily="34" charset="0"/>
+                <a:ea typeface="Yu Gothic" pitchFamily="34" charset="-122"/>
+                <a:cs typeface="Yu Gothic" pitchFamily="34" charset="-120"/>
               </a:rPr>
               <a:t>なぜ OpenRouter？</a:t>
             </a:r>
@@ -25279,9 +25178,9 @@
                 <a:solidFill>
                   <a:srgbClr val="0D1117"/>
                 </a:solidFill>
-                <a:latin typeface="Hiragino Sans" pitchFamily="34" charset="0"/>
-                <a:ea typeface="Hiragino Sans" pitchFamily="34" charset="-122"/>
-                <a:cs typeface="Hiragino Sans" pitchFamily="34" charset="-120"/>
+                <a:latin typeface="Yu Gothic" pitchFamily="34" charset="0"/>
+                <a:ea typeface="Yu Gothic" pitchFamily="34" charset="-122"/>
+                <a:cs typeface="Yu Gothic" pitchFamily="34" charset="-120"/>
               </a:rPr>
               <a:t>1</a:t>
             </a:r>
@@ -25318,9 +25217,9 @@
                 <a:solidFill>
                   <a:srgbClr val="E6EDF3"/>
                 </a:solidFill>
-                <a:latin typeface="Hiragino Sans" pitchFamily="34" charset="0"/>
-                <a:ea typeface="Hiragino Sans" pitchFamily="34" charset="-122"/>
-                <a:cs typeface="Hiragino Sans" pitchFamily="34" charset="-120"/>
+                <a:latin typeface="Yu Gothic" pitchFamily="34" charset="0"/>
+                <a:ea typeface="Yu Gothic" pitchFamily="34" charset="-122"/>
+                <a:cs typeface="Yu Gothic" pitchFamily="34" charset="-120"/>
               </a:rPr>
               <a:t>1つのキーで多数のモデル</a:t>
             </a:r>
@@ -25360,9 +25259,9 @@
                 <a:solidFill>
                   <a:srgbClr val="C9D1D9"/>
                 </a:solidFill>
-                <a:latin typeface="Hiragino Sans" pitchFamily="34" charset="0"/>
-                <a:ea typeface="Hiragino Sans" pitchFamily="34" charset="-122"/>
-                <a:cs typeface="Hiragino Sans" pitchFamily="34" charset="-120"/>
+                <a:latin typeface="Yu Gothic" pitchFamily="34" charset="0"/>
+                <a:ea typeface="Yu Gothic" pitchFamily="34" charset="-122"/>
+                <a:cs typeface="Yu Gothic" pitchFamily="34" charset="-120"/>
               </a:rPr>
               <a:t>OpenRouter のAPIキー1本で、いろんなモデルを切り替えて使える。</a:t>
             </a:r>
@@ -25453,9 +25352,9 @@
                 <a:solidFill>
                   <a:srgbClr val="0D1117"/>
                 </a:solidFill>
-                <a:latin typeface="Hiragino Sans" pitchFamily="34" charset="0"/>
-                <a:ea typeface="Hiragino Sans" pitchFamily="34" charset="-122"/>
-                <a:cs typeface="Hiragino Sans" pitchFamily="34" charset="-120"/>
+                <a:latin typeface="Yu Gothic" pitchFamily="34" charset="0"/>
+                <a:ea typeface="Yu Gothic" pitchFamily="34" charset="-122"/>
+                <a:cs typeface="Yu Gothic" pitchFamily="34" charset="-120"/>
               </a:rPr>
               <a:t>2</a:t>
             </a:r>
@@ -25492,9 +25391,9 @@
                 <a:solidFill>
                   <a:srgbClr val="E6EDF3"/>
                 </a:solidFill>
-                <a:latin typeface="Hiragino Sans" pitchFamily="34" charset="0"/>
-                <a:ea typeface="Hiragino Sans" pitchFamily="34" charset="-122"/>
-                <a:cs typeface="Hiragino Sans" pitchFamily="34" charset="-120"/>
+                <a:latin typeface="Yu Gothic" pitchFamily="34" charset="0"/>
+                <a:ea typeface="Yu Gothic" pitchFamily="34" charset="-122"/>
+                <a:cs typeface="Yu Gothic" pitchFamily="34" charset="-120"/>
               </a:rPr>
               <a:t>無料モデルがある</a:t>
             </a:r>
@@ -25534,9 +25433,9 @@
                 <a:solidFill>
                   <a:srgbClr val="C9D1D9"/>
                 </a:solidFill>
-                <a:latin typeface="Hiragino Sans" pitchFamily="34" charset="0"/>
-                <a:ea typeface="Hiragino Sans" pitchFamily="34" charset="-122"/>
-                <a:cs typeface="Hiragino Sans" pitchFamily="34" charset="-120"/>
+                <a:latin typeface="Yu Gothic" pitchFamily="34" charset="0"/>
+                <a:ea typeface="Yu Gothic" pitchFamily="34" charset="-122"/>
+                <a:cs typeface="Yu Gothic" pitchFamily="34" charset="-120"/>
               </a:rPr>
               <a:t>今日はここを使う。料金は input / output ともに $0。</a:t>
             </a:r>
@@ -25627,9 +25526,9 @@
                 <a:solidFill>
                   <a:srgbClr val="0D1117"/>
                 </a:solidFill>
-                <a:latin typeface="Hiragino Sans" pitchFamily="34" charset="0"/>
-                <a:ea typeface="Hiragino Sans" pitchFamily="34" charset="-122"/>
-                <a:cs typeface="Hiragino Sans" pitchFamily="34" charset="-120"/>
+                <a:latin typeface="Yu Gothic" pitchFamily="34" charset="0"/>
+                <a:ea typeface="Yu Gothic" pitchFamily="34" charset="-122"/>
+                <a:cs typeface="Yu Gothic" pitchFamily="34" charset="-120"/>
               </a:rPr>
               <a:t>3</a:t>
             </a:r>
@@ -25666,9 +25565,9 @@
                 <a:solidFill>
                   <a:srgbClr val="E6EDF3"/>
                 </a:solidFill>
-                <a:latin typeface="Hiragino Sans" pitchFamily="34" charset="0"/>
-                <a:ea typeface="Hiragino Sans" pitchFamily="34" charset="-122"/>
-                <a:cs typeface="Hiragino Sans" pitchFamily="34" charset="-120"/>
+                <a:latin typeface="Yu Gothic" pitchFamily="34" charset="0"/>
+                <a:ea typeface="Yu Gothic" pitchFamily="34" charset="-122"/>
+                <a:cs typeface="Yu Gothic" pitchFamily="34" charset="-120"/>
               </a:rPr>
               <a:t>普段のquotaを使わない</a:t>
             </a:r>
@@ -25708,9 +25607,9 @@
                 <a:solidFill>
                   <a:srgbClr val="C9D1D9"/>
                 </a:solidFill>
-                <a:latin typeface="Hiragino Sans" pitchFamily="34" charset="0"/>
-                <a:ea typeface="Hiragino Sans" pitchFamily="34" charset="-122"/>
-                <a:cs typeface="Hiragino Sans" pitchFamily="34" charset="-120"/>
+                <a:latin typeface="Yu Gothic" pitchFamily="34" charset="0"/>
+                <a:ea typeface="Yu Gothic" pitchFamily="34" charset="-122"/>
+                <a:cs typeface="Yu Gothic" pitchFamily="34" charset="-120"/>
               </a:rPr>
               <a:t>ChatGPT等の課金枠を消費しないので、気兼ねなく試せる。</a:t>
             </a:r>
@@ -25801,9 +25700,9 @@
                 <a:solidFill>
                   <a:srgbClr val="0D1117"/>
                 </a:solidFill>
-                <a:latin typeface="Hiragino Sans" pitchFamily="34" charset="0"/>
-                <a:ea typeface="Hiragino Sans" pitchFamily="34" charset="-122"/>
-                <a:cs typeface="Hiragino Sans" pitchFamily="34" charset="-120"/>
+                <a:latin typeface="Yu Gothic" pitchFamily="34" charset="0"/>
+                <a:ea typeface="Yu Gothic" pitchFamily="34" charset="-122"/>
+                <a:cs typeface="Yu Gothic" pitchFamily="34" charset="-120"/>
               </a:rPr>
               <a:t>4</a:t>
             </a:r>
@@ -25840,9 +25739,9 @@
                 <a:solidFill>
                   <a:srgbClr val="E6EDF3"/>
                 </a:solidFill>
-                <a:latin typeface="Hiragino Sans" pitchFamily="34" charset="0"/>
-                <a:ea typeface="Hiragino Sans" pitchFamily="34" charset="-122"/>
-                <a:cs typeface="Hiragino Sans" pitchFamily="34" charset="-120"/>
+                <a:latin typeface="Yu Gothic" pitchFamily="34" charset="0"/>
+                <a:ea typeface="Yu Gothic" pitchFamily="34" charset="-122"/>
+                <a:cs typeface="Yu Gothic" pitchFamily="34" charset="-120"/>
               </a:rPr>
               <a:t>Free Models Router</a:t>
             </a:r>
@@ -25882,9 +25781,9 @@
                 <a:solidFill>
                   <a:srgbClr val="C9D1D9"/>
                 </a:solidFill>
-                <a:latin typeface="Hiragino Sans" pitchFamily="34" charset="0"/>
-                <a:ea typeface="Hiragino Sans" pitchFamily="34" charset="-122"/>
-                <a:cs typeface="Hiragino Sans" pitchFamily="34" charset="-120"/>
+                <a:latin typeface="Yu Gothic" pitchFamily="34" charset="0"/>
+                <a:ea typeface="Yu Gothic" pitchFamily="34" charset="-122"/>
+                <a:cs typeface="Yu Gothic" pitchFamily="34" charset="-120"/>
               </a:rPr>
               <a:t>空いている無料モデルへ自動でつないでくれる。</a:t>
             </a:r>
@@ -25921,9 +25820,9 @@
                 <a:solidFill>
                   <a:srgbClr val="8B949E"/>
                 </a:solidFill>
-                <a:latin typeface="Hiragino Sans" pitchFamily="34" charset="0"/>
-                <a:ea typeface="Hiragino Sans" pitchFamily="34" charset="-122"/>
-                <a:cs typeface="Hiragino Sans" pitchFamily="34" charset="-120"/>
+                <a:latin typeface="Yu Gothic" pitchFamily="34" charset="0"/>
+                <a:ea typeface="Yu Gothic" pitchFamily="34" charset="-122"/>
+                <a:cs typeface="Yu Gothic" pitchFamily="34" charset="-120"/>
               </a:rPr>
               <a:t>コーディングエージェント入門</a:t>
             </a:r>
@@ -25935,9 +25834,9 @@
                 <a:solidFill>
                   <a:srgbClr val="30363D"/>
                 </a:solidFill>
-                <a:latin typeface="Hiragino Sans" pitchFamily="34" charset="0"/>
-                <a:ea typeface="Hiragino Sans" pitchFamily="34" charset="-122"/>
-                <a:cs typeface="Hiragino Sans" pitchFamily="34" charset="-120"/>
+                <a:latin typeface="Yu Gothic" pitchFamily="34" charset="0"/>
+                <a:ea typeface="Yu Gothic" pitchFamily="34" charset="-122"/>
+                <a:cs typeface="Yu Gothic" pitchFamily="34" charset="-120"/>
               </a:rPr>
               <a:t>  ·  OpenCode × OpenRouter</a:t>
             </a:r>
@@ -25974,9 +25873,9 @@
                 <a:solidFill>
                   <a:srgbClr val="8B949E"/>
                 </a:solidFill>
-                <a:latin typeface="Menlo" pitchFamily="34" charset="0"/>
-                <a:ea typeface="Menlo" pitchFamily="34" charset="-122"/>
-                <a:cs typeface="Menlo" pitchFamily="34" charset="-120"/>
+                <a:latin typeface="Consolas" pitchFamily="34" charset="0"/>
+                <a:ea typeface="Consolas" pitchFamily="34" charset="-122"/>
+                <a:cs typeface="Consolas" pitchFamily="34" charset="-120"/>
               </a:rPr>
               <a:t>09 / 26</a:t>
             </a:r>
